--- a/Chapter 07 A deep dive on Keras.pptx
+++ b/Chapter 07 A deep dive on Keras.pptx
@@ -16,7 +16,7 @@
     <p:sldId id="1142" r:id="rId4"/>
     <p:sldId id="1144" r:id="rId5"/>
     <p:sldId id="1147" r:id="rId6"/>
-    <p:sldId id="1146" r:id="rId7"/>
+    <p:sldId id="1150" r:id="rId7"/>
     <p:sldId id="1148" r:id="rId8"/>
   </p:sldIdLst>
   <p:sldSz cx="12192000" cy="6858000"/>
@@ -130,7 +130,7 @@
             <p14:sldId id="1142"/>
             <p14:sldId id="1144"/>
             <p14:sldId id="1147"/>
-            <p14:sldId id="1146"/>
+            <p14:sldId id="1150"/>
             <p14:sldId id="1148"/>
           </p14:sldIdLst>
         </p14:section>
@@ -256,7 +256,7 @@
                 <a:latin typeface="맑은 고딕" panose="020B0503020000020004" pitchFamily="50" charset="-127"/>
                 <a:ea typeface="맑은 고딕" panose="020B0503020000020004" pitchFamily="50" charset="-127"/>
               </a:rPr>
-              <a:t>2026-07-07</a:t>
+              <a:t>2026-08-03</a:t>
             </a:fld>
             <a:endParaRPr lang="ko-KR" altLang="en-US">
               <a:latin typeface="맑은 고딕" panose="020B0503020000020004" pitchFamily="50" charset="-127"/>
@@ -442,7 +442,7 @@
           <a:p>
             <a:fld id="{43E1C3DD-4A19-441D-907C-380838DB51C4}" type="datetime1">
               <a:rPr lang="ko-KR" altLang="en-US" noProof="0" smtClean="0"/>
-              <a:t>2026-07-07</a:t>
+              <a:t>2026-08-03</a:t>
             </a:fld>
             <a:endParaRPr lang="ko-KR" altLang="en-US" noProof="0"/>
           </a:p>
@@ -1290,7 +1290,7 @@
           <a:p>
             <a:fld id="{990475B5-67CA-4281-BDCA-DA943C3C8EB3}" type="datetime1">
               <a:rPr lang="ko-KR" altLang="en-US" noProof="0" smtClean="0"/>
-              <a:t>2026-07-07</a:t>
+              <a:t>2026-08-03</a:t>
             </a:fld>
             <a:endParaRPr lang="ko-KR" altLang="en-US" noProof="0"/>
           </a:p>
@@ -1944,7 +1944,7 @@
           <a:p>
             <a:fld id="{48A87A34-81AB-432B-8DAE-1953F412C126}" type="datetimeFigureOut">
               <a:rPr lang="en-US" smtClean="0"/>
-              <a:t>7/7/2026</a:t>
+              <a:t>8/3/2026</a:t>
             </a:fld>
             <a:endParaRPr lang="en-US" dirty="0"/>
           </a:p>
@@ -2240,7 +2240,7 @@
           <a:p>
             <a:fld id="{C655C81E-72E7-4D05-94B5-F45B321A525D}" type="datetime1">
               <a:rPr lang="ko-KR" altLang="en-US" noProof="0" smtClean="0"/>
-              <a:t>2026-07-07</a:t>
+              <a:t>2026-08-03</a:t>
             </a:fld>
             <a:endParaRPr lang="ko-KR" altLang="en-US" noProof="0" dirty="0">
               <a:latin typeface="맑은 고딕" panose="020B0503020000020004" pitchFamily="50" charset="-127"/>
@@ -3174,8 +3174,8 @@
         </p:nvSpPr>
         <p:spPr>
           <a:xfrm>
-            <a:off x="577530" y="1248422"/>
-            <a:ext cx="11233469" cy="4005327"/>
+            <a:off x="479265" y="1795668"/>
+            <a:ext cx="11233469" cy="3266663"/>
           </a:xfrm>
           <a:prstGeom prst="rect">
             <a:avLst/>
@@ -3187,17 +3187,6 @@
             <a:spAutoFit/>
           </a:bodyPr>
           <a:lstStyle/>
-          <a:p>
-            <a:pPr>
-              <a:lnSpc>
-                <a:spcPct val="200000"/>
-              </a:lnSpc>
-            </a:pPr>
-            <a:r>
-              <a:rPr lang="en-US" altLang="ko-KR" sz="2400" dirty="0"/>
-              <a:t>This chapter covers</a:t>
-            </a:r>
-          </a:p>
           <a:p>
             <a:pPr marL="800100" lvl="1" indent="-342900">
               <a:lnSpc>
@@ -5742,7 +5731,7 @@
         <p:cNvPr id="1" name="">
           <a:extLst>
             <a:ext uri="{FF2B5EF4-FFF2-40B4-BE49-F238E27FC236}">
-              <a16:creationId xmlns:a16="http://schemas.microsoft.com/office/drawing/2014/main" id="{7136A7EB-D8FF-0AE4-6B0E-A35CA5DA3F49}"/>
+              <a16:creationId xmlns:a16="http://schemas.microsoft.com/office/drawing/2014/main" id="{B15605F2-9C18-E013-582A-498F408F704E}"/>
             </a:ext>
           </a:extLst>
         </p:cNvPr>
@@ -5762,7 +5751,7 @@
           <p:cNvPr id="4" name="슬라이드 번호 개체 틀 3">
             <a:extLst>
               <a:ext uri="{FF2B5EF4-FFF2-40B4-BE49-F238E27FC236}">
-                <a16:creationId xmlns:a16="http://schemas.microsoft.com/office/drawing/2014/main" id="{9FDC8C2B-92BF-B2E5-EEC6-9E5B5B4F11E1}"/>
+                <a16:creationId xmlns:a16="http://schemas.microsoft.com/office/drawing/2014/main" id="{9D454672-1BAB-01F1-57C2-11F56A735D03}"/>
               </a:ext>
             </a:extLst>
           </p:cNvPr>
@@ -5797,7 +5786,7 @@
           <p:cNvPr id="3" name="제목 1">
             <a:extLst>
               <a:ext uri="{FF2B5EF4-FFF2-40B4-BE49-F238E27FC236}">
-                <a16:creationId xmlns:a16="http://schemas.microsoft.com/office/drawing/2014/main" id="{9D92536E-88F8-EA03-72A7-C546A2E35220}"/>
+                <a16:creationId xmlns:a16="http://schemas.microsoft.com/office/drawing/2014/main" id="{EE5003D4-1996-EEFE-8BE3-214989BD8FA4}"/>
               </a:ext>
             </a:extLst>
           </p:cNvPr>
@@ -5845,21 +5834,2961 @@
               <a:rPr lang="en-US" altLang="ko-KR" sz="2800" b="1" cap="none" dirty="0">
                 <a:latin typeface="Lora" pitchFamily="2" charset="0"/>
               </a:rPr>
-              <a:t>Using built-in training and evaluation loops</a:t>
-            </a:r>
+              <a:t>FCNN Architecture</a:t>
+            </a:r>
+          </a:p>
+        </p:txBody>
+      </p:sp>
+      <p:sp>
+        <p:nvSpPr>
+          <p:cNvPr id="2" name="타원 1">
+            <a:extLst>
+              <a:ext uri="{FF2B5EF4-FFF2-40B4-BE49-F238E27FC236}">
+                <a16:creationId xmlns:a16="http://schemas.microsoft.com/office/drawing/2014/main" id="{6CA83F80-D5DA-0FBF-4240-B4CD76EC70CE}"/>
+              </a:ext>
+            </a:extLst>
+          </p:cNvPr>
+          <p:cNvSpPr/>
+          <p:nvPr/>
+        </p:nvSpPr>
+        <p:spPr>
+          <a:xfrm>
+            <a:off x="1402753" y="2844800"/>
+            <a:ext cx="198120" cy="198120"/>
+          </a:xfrm>
+          <a:prstGeom prst="ellipse">
+            <a:avLst/>
+          </a:prstGeom>
+          <a:solidFill>
+            <a:schemeClr val="tx1"/>
+          </a:solidFill>
+        </p:spPr>
+        <p:style>
+          <a:lnRef idx="2">
+            <a:schemeClr val="accent1">
+              <a:shade val="15000"/>
+            </a:schemeClr>
+          </a:lnRef>
+          <a:fillRef idx="1">
+            <a:schemeClr val="accent1"/>
+          </a:fillRef>
+          <a:effectRef idx="0">
+            <a:schemeClr val="accent1"/>
+          </a:effectRef>
+          <a:fontRef idx="minor">
+            <a:schemeClr val="lt1"/>
+          </a:fontRef>
+        </p:style>
+        <p:txBody>
+          <a:bodyPr rtlCol="0" anchor="ctr"/>
+          <a:lstStyle/>
+          <a:p>
+            <a:pPr algn="ctr"/>
+            <a:endParaRPr lang="ko-KR" altLang="en-US"/>
+          </a:p>
+        </p:txBody>
+      </p:sp>
+      <p:sp>
+        <p:nvSpPr>
+          <p:cNvPr id="7" name="타원 6">
+            <a:extLst>
+              <a:ext uri="{FF2B5EF4-FFF2-40B4-BE49-F238E27FC236}">
+                <a16:creationId xmlns:a16="http://schemas.microsoft.com/office/drawing/2014/main" id="{682906F9-E5E4-84FF-8153-9AB5E29FC07E}"/>
+              </a:ext>
+            </a:extLst>
+          </p:cNvPr>
+          <p:cNvSpPr/>
+          <p:nvPr/>
+        </p:nvSpPr>
+        <p:spPr>
+          <a:xfrm>
+            <a:off x="1442720" y="5425441"/>
+            <a:ext cx="198120" cy="198120"/>
+          </a:xfrm>
+          <a:prstGeom prst="ellipse">
+            <a:avLst/>
+          </a:prstGeom>
+          <a:solidFill>
+            <a:schemeClr val="tx1"/>
+          </a:solidFill>
+        </p:spPr>
+        <p:style>
+          <a:lnRef idx="2">
+            <a:schemeClr val="accent1">
+              <a:shade val="15000"/>
+            </a:schemeClr>
+          </a:lnRef>
+          <a:fillRef idx="1">
+            <a:schemeClr val="accent1"/>
+          </a:fillRef>
+          <a:effectRef idx="0">
+            <a:schemeClr val="accent1"/>
+          </a:effectRef>
+          <a:fontRef idx="minor">
+            <a:schemeClr val="lt1"/>
+          </a:fontRef>
+        </p:style>
+        <p:txBody>
+          <a:bodyPr rtlCol="0" anchor="ctr"/>
+          <a:lstStyle/>
+          <a:p>
+            <a:pPr algn="ctr"/>
+            <a:endParaRPr lang="ko-KR" altLang="en-US"/>
+          </a:p>
+        </p:txBody>
+      </p:sp>
+      <p:sp>
+        <p:nvSpPr>
+          <p:cNvPr id="10" name="직사각형 9">
+            <a:extLst>
+              <a:ext uri="{FF2B5EF4-FFF2-40B4-BE49-F238E27FC236}">
+                <a16:creationId xmlns:a16="http://schemas.microsoft.com/office/drawing/2014/main" id="{BB9DC231-0434-9EB0-06B8-F842DD34D883}"/>
+              </a:ext>
+            </a:extLst>
+          </p:cNvPr>
+          <p:cNvSpPr/>
+          <p:nvPr/>
+        </p:nvSpPr>
+        <p:spPr>
+          <a:xfrm>
+            <a:off x="4268470" y="2194561"/>
+            <a:ext cx="488475" cy="3942080"/>
+          </a:xfrm>
+          <a:prstGeom prst="rect">
+            <a:avLst/>
+          </a:prstGeom>
+          <a:noFill/>
+          <a:ln w="19050">
+            <a:solidFill>
+              <a:schemeClr val="tx1"/>
+            </a:solidFill>
+          </a:ln>
+        </p:spPr>
+        <p:style>
+          <a:lnRef idx="2">
+            <a:schemeClr val="accent1">
+              <a:shade val="15000"/>
+            </a:schemeClr>
+          </a:lnRef>
+          <a:fillRef idx="1">
+            <a:schemeClr val="accent1"/>
+          </a:fillRef>
+          <a:effectRef idx="0">
+            <a:schemeClr val="accent1"/>
+          </a:effectRef>
+          <a:fontRef idx="minor">
+            <a:schemeClr val="lt1"/>
+          </a:fontRef>
+        </p:style>
+        <p:txBody>
+          <a:bodyPr rtlCol="0" anchor="ctr"/>
+          <a:lstStyle/>
+          <a:p>
+            <a:pPr algn="ctr"/>
+            <a:endParaRPr lang="ko-KR" altLang="en-US"/>
+          </a:p>
+        </p:txBody>
+      </p:sp>
+      <p:sp>
+        <p:nvSpPr>
+          <p:cNvPr id="11" name="직사각형 10">
+            <a:extLst>
+              <a:ext uri="{FF2B5EF4-FFF2-40B4-BE49-F238E27FC236}">
+                <a16:creationId xmlns:a16="http://schemas.microsoft.com/office/drawing/2014/main" id="{A2877830-E07E-C929-4BB3-E2952E0AC881}"/>
+              </a:ext>
+            </a:extLst>
+          </p:cNvPr>
+          <p:cNvSpPr/>
+          <p:nvPr/>
+        </p:nvSpPr>
+        <p:spPr>
+          <a:xfrm>
+            <a:off x="8889205" y="2194561"/>
+            <a:ext cx="488475" cy="1232747"/>
+          </a:xfrm>
+          <a:prstGeom prst="rect">
+            <a:avLst/>
+          </a:prstGeom>
+          <a:noFill/>
+          <a:ln w="19050">
+            <a:solidFill>
+              <a:schemeClr val="tx1"/>
+            </a:solidFill>
+          </a:ln>
+        </p:spPr>
+        <p:style>
+          <a:lnRef idx="2">
+            <a:schemeClr val="accent1">
+              <a:shade val="15000"/>
+            </a:schemeClr>
+          </a:lnRef>
+          <a:fillRef idx="1">
+            <a:schemeClr val="accent1"/>
+          </a:fillRef>
+          <a:effectRef idx="0">
+            <a:schemeClr val="accent1"/>
+          </a:effectRef>
+          <a:fontRef idx="minor">
+            <a:schemeClr val="lt1"/>
+          </a:fontRef>
+        </p:style>
+        <p:txBody>
+          <a:bodyPr rtlCol="0" anchor="ctr"/>
+          <a:lstStyle/>
+          <a:p>
+            <a:pPr algn="ctr"/>
+            <a:endParaRPr lang="ko-KR" altLang="en-US"/>
+          </a:p>
+        </p:txBody>
+      </p:sp>
+      <p:sp>
+        <p:nvSpPr>
+          <p:cNvPr id="12" name="타원 11">
+            <a:extLst>
+              <a:ext uri="{FF2B5EF4-FFF2-40B4-BE49-F238E27FC236}">
+                <a16:creationId xmlns:a16="http://schemas.microsoft.com/office/drawing/2014/main" id="{6D88C569-ED61-835B-992F-0B3D357CF47E}"/>
+              </a:ext>
+            </a:extLst>
+          </p:cNvPr>
+          <p:cNvSpPr/>
+          <p:nvPr/>
+        </p:nvSpPr>
+        <p:spPr>
+          <a:xfrm>
+            <a:off x="4415790" y="2336800"/>
+            <a:ext cx="198120" cy="198120"/>
+          </a:xfrm>
+          <a:prstGeom prst="ellipse">
+            <a:avLst/>
+          </a:prstGeom>
+          <a:solidFill>
+            <a:schemeClr val="accent2"/>
+          </a:solidFill>
+        </p:spPr>
+        <p:style>
+          <a:lnRef idx="2">
+            <a:schemeClr val="accent1">
+              <a:shade val="15000"/>
+            </a:schemeClr>
+          </a:lnRef>
+          <a:fillRef idx="1">
+            <a:schemeClr val="accent1"/>
+          </a:fillRef>
+          <a:effectRef idx="0">
+            <a:schemeClr val="accent1"/>
+          </a:effectRef>
+          <a:fontRef idx="minor">
+            <a:schemeClr val="lt1"/>
+          </a:fontRef>
+        </p:style>
+        <p:txBody>
+          <a:bodyPr rtlCol="0" anchor="ctr"/>
+          <a:lstStyle/>
+          <a:p>
+            <a:pPr algn="ctr"/>
+            <a:endParaRPr lang="ko-KR" altLang="en-US"/>
+          </a:p>
+        </p:txBody>
+      </p:sp>
+      <p:sp>
+        <p:nvSpPr>
+          <p:cNvPr id="13" name="타원 12">
+            <a:extLst>
+              <a:ext uri="{FF2B5EF4-FFF2-40B4-BE49-F238E27FC236}">
+                <a16:creationId xmlns:a16="http://schemas.microsoft.com/office/drawing/2014/main" id="{EFFFE80F-3837-1A31-122B-2EBCA9A87739}"/>
+              </a:ext>
+            </a:extLst>
+          </p:cNvPr>
+          <p:cNvSpPr/>
+          <p:nvPr/>
+        </p:nvSpPr>
+        <p:spPr>
+          <a:xfrm>
+            <a:off x="4415790" y="5863223"/>
+            <a:ext cx="198120" cy="198120"/>
+          </a:xfrm>
+          <a:prstGeom prst="ellipse">
+            <a:avLst/>
+          </a:prstGeom>
+          <a:solidFill>
+            <a:schemeClr val="accent2"/>
+          </a:solidFill>
+        </p:spPr>
+        <p:style>
+          <a:lnRef idx="2">
+            <a:schemeClr val="accent1">
+              <a:shade val="15000"/>
+            </a:schemeClr>
+          </a:lnRef>
+          <a:fillRef idx="1">
+            <a:schemeClr val="accent1"/>
+          </a:fillRef>
+          <a:effectRef idx="0">
+            <a:schemeClr val="accent1"/>
+          </a:effectRef>
+          <a:fontRef idx="minor">
+            <a:schemeClr val="lt1"/>
+          </a:fontRef>
+        </p:style>
+        <p:txBody>
+          <a:bodyPr rtlCol="0" anchor="ctr"/>
+          <a:lstStyle/>
+          <a:p>
+            <a:pPr algn="ctr"/>
+            <a:endParaRPr lang="ko-KR" altLang="en-US"/>
+          </a:p>
+        </p:txBody>
+      </p:sp>
+      <p:sp>
+        <p:nvSpPr>
+          <p:cNvPr id="15" name="타원 14">
+            <a:extLst>
+              <a:ext uri="{FF2B5EF4-FFF2-40B4-BE49-F238E27FC236}">
+                <a16:creationId xmlns:a16="http://schemas.microsoft.com/office/drawing/2014/main" id="{E8CBCB36-E696-F2E4-17B0-8A5D90FEE7C9}"/>
+              </a:ext>
+            </a:extLst>
+          </p:cNvPr>
+          <p:cNvSpPr/>
+          <p:nvPr/>
+        </p:nvSpPr>
+        <p:spPr>
+          <a:xfrm>
+            <a:off x="4415790" y="2609427"/>
+            <a:ext cx="198120" cy="198120"/>
+          </a:xfrm>
+          <a:prstGeom prst="ellipse">
+            <a:avLst/>
+          </a:prstGeom>
+          <a:solidFill>
+            <a:schemeClr val="accent2"/>
+          </a:solidFill>
+        </p:spPr>
+        <p:style>
+          <a:lnRef idx="2">
+            <a:schemeClr val="accent1">
+              <a:shade val="15000"/>
+            </a:schemeClr>
+          </a:lnRef>
+          <a:fillRef idx="1">
+            <a:schemeClr val="accent1"/>
+          </a:fillRef>
+          <a:effectRef idx="0">
+            <a:schemeClr val="accent1"/>
+          </a:effectRef>
+          <a:fontRef idx="minor">
+            <a:schemeClr val="lt1"/>
+          </a:fontRef>
+        </p:style>
+        <p:txBody>
+          <a:bodyPr rtlCol="0" anchor="ctr"/>
+          <a:lstStyle/>
+          <a:p>
+            <a:pPr algn="ctr"/>
+            <a:endParaRPr lang="ko-KR" altLang="en-US"/>
+          </a:p>
+        </p:txBody>
+      </p:sp>
+      <p:sp>
+        <p:nvSpPr>
+          <p:cNvPr id="16" name="타원 15">
+            <a:extLst>
+              <a:ext uri="{FF2B5EF4-FFF2-40B4-BE49-F238E27FC236}">
+                <a16:creationId xmlns:a16="http://schemas.microsoft.com/office/drawing/2014/main" id="{06A4A0EC-801F-475B-FC5B-8BB37781219E}"/>
+              </a:ext>
+            </a:extLst>
+          </p:cNvPr>
+          <p:cNvSpPr/>
+          <p:nvPr/>
+        </p:nvSpPr>
+        <p:spPr>
+          <a:xfrm>
+            <a:off x="4415790" y="2882054"/>
+            <a:ext cx="198120" cy="198120"/>
+          </a:xfrm>
+          <a:prstGeom prst="ellipse">
+            <a:avLst/>
+          </a:prstGeom>
+          <a:solidFill>
+            <a:schemeClr val="accent2"/>
+          </a:solidFill>
+        </p:spPr>
+        <p:style>
+          <a:lnRef idx="2">
+            <a:schemeClr val="accent1">
+              <a:shade val="15000"/>
+            </a:schemeClr>
+          </a:lnRef>
+          <a:fillRef idx="1">
+            <a:schemeClr val="accent1"/>
+          </a:fillRef>
+          <a:effectRef idx="0">
+            <a:schemeClr val="accent1"/>
+          </a:effectRef>
+          <a:fontRef idx="minor">
+            <a:schemeClr val="lt1"/>
+          </a:fontRef>
+        </p:style>
+        <p:txBody>
+          <a:bodyPr rtlCol="0" anchor="ctr"/>
+          <a:lstStyle/>
+          <a:p>
+            <a:pPr algn="ctr"/>
+            <a:endParaRPr lang="ko-KR" altLang="en-US"/>
+          </a:p>
+        </p:txBody>
+      </p:sp>
+      <p:sp>
+        <p:nvSpPr>
+          <p:cNvPr id="17" name="타원 16">
+            <a:extLst>
+              <a:ext uri="{FF2B5EF4-FFF2-40B4-BE49-F238E27FC236}">
+                <a16:creationId xmlns:a16="http://schemas.microsoft.com/office/drawing/2014/main" id="{CECBF8B9-9EAE-40D1-B381-6469847DF8F9}"/>
+              </a:ext>
+            </a:extLst>
+          </p:cNvPr>
+          <p:cNvSpPr/>
+          <p:nvPr/>
+        </p:nvSpPr>
+        <p:spPr>
+          <a:xfrm>
+            <a:off x="4415790" y="3154681"/>
+            <a:ext cx="198120" cy="198120"/>
+          </a:xfrm>
+          <a:prstGeom prst="ellipse">
+            <a:avLst/>
+          </a:prstGeom>
+          <a:solidFill>
+            <a:schemeClr val="accent2"/>
+          </a:solidFill>
+        </p:spPr>
+        <p:style>
+          <a:lnRef idx="2">
+            <a:schemeClr val="accent1">
+              <a:shade val="15000"/>
+            </a:schemeClr>
+          </a:lnRef>
+          <a:fillRef idx="1">
+            <a:schemeClr val="accent1"/>
+          </a:fillRef>
+          <a:effectRef idx="0">
+            <a:schemeClr val="accent1"/>
+          </a:effectRef>
+          <a:fontRef idx="minor">
+            <a:schemeClr val="lt1"/>
+          </a:fontRef>
+        </p:style>
+        <p:txBody>
+          <a:bodyPr rtlCol="0" anchor="ctr"/>
+          <a:lstStyle/>
+          <a:p>
+            <a:pPr algn="ctr"/>
+            <a:endParaRPr lang="ko-KR" altLang="en-US"/>
+          </a:p>
+        </p:txBody>
+      </p:sp>
+      <p:sp>
+        <p:nvSpPr>
+          <p:cNvPr id="18" name="타원 17">
+            <a:extLst>
+              <a:ext uri="{FF2B5EF4-FFF2-40B4-BE49-F238E27FC236}">
+                <a16:creationId xmlns:a16="http://schemas.microsoft.com/office/drawing/2014/main" id="{EF1D6504-54EC-BE41-BDFA-85092D3E611B}"/>
+              </a:ext>
+            </a:extLst>
+          </p:cNvPr>
+          <p:cNvSpPr/>
+          <p:nvPr/>
+        </p:nvSpPr>
+        <p:spPr>
+          <a:xfrm>
+            <a:off x="4415790" y="3427308"/>
+            <a:ext cx="198120" cy="198120"/>
+          </a:xfrm>
+          <a:prstGeom prst="ellipse">
+            <a:avLst/>
+          </a:prstGeom>
+          <a:solidFill>
+            <a:schemeClr val="accent2"/>
+          </a:solidFill>
+        </p:spPr>
+        <p:style>
+          <a:lnRef idx="2">
+            <a:schemeClr val="accent1">
+              <a:shade val="15000"/>
+            </a:schemeClr>
+          </a:lnRef>
+          <a:fillRef idx="1">
+            <a:schemeClr val="accent1"/>
+          </a:fillRef>
+          <a:effectRef idx="0">
+            <a:schemeClr val="accent1"/>
+          </a:effectRef>
+          <a:fontRef idx="minor">
+            <a:schemeClr val="lt1"/>
+          </a:fontRef>
+        </p:style>
+        <p:txBody>
+          <a:bodyPr rtlCol="0" anchor="ctr"/>
+          <a:lstStyle/>
+          <a:p>
+            <a:pPr algn="ctr"/>
+            <a:endParaRPr lang="ko-KR" altLang="en-US"/>
+          </a:p>
+        </p:txBody>
+      </p:sp>
+      <p:sp>
+        <p:nvSpPr>
+          <p:cNvPr id="19" name="타원 18">
+            <a:extLst>
+              <a:ext uri="{FF2B5EF4-FFF2-40B4-BE49-F238E27FC236}">
+                <a16:creationId xmlns:a16="http://schemas.microsoft.com/office/drawing/2014/main" id="{68297D93-4999-C1B4-856A-FF2F3FADAA67}"/>
+              </a:ext>
+            </a:extLst>
+          </p:cNvPr>
+          <p:cNvSpPr/>
+          <p:nvPr/>
+        </p:nvSpPr>
+        <p:spPr>
+          <a:xfrm>
+            <a:off x="4415790" y="3699935"/>
+            <a:ext cx="198120" cy="198120"/>
+          </a:xfrm>
+          <a:prstGeom prst="ellipse">
+            <a:avLst/>
+          </a:prstGeom>
+          <a:solidFill>
+            <a:schemeClr val="accent2"/>
+          </a:solidFill>
+        </p:spPr>
+        <p:style>
+          <a:lnRef idx="2">
+            <a:schemeClr val="accent1">
+              <a:shade val="15000"/>
+            </a:schemeClr>
+          </a:lnRef>
+          <a:fillRef idx="1">
+            <a:schemeClr val="accent1"/>
+          </a:fillRef>
+          <a:effectRef idx="0">
+            <a:schemeClr val="accent1"/>
+          </a:effectRef>
+          <a:fontRef idx="minor">
+            <a:schemeClr val="lt1"/>
+          </a:fontRef>
+        </p:style>
+        <p:txBody>
+          <a:bodyPr rtlCol="0" anchor="ctr"/>
+          <a:lstStyle/>
+          <a:p>
+            <a:pPr algn="ctr"/>
+            <a:endParaRPr lang="ko-KR" altLang="en-US"/>
+          </a:p>
+        </p:txBody>
+      </p:sp>
+      <p:sp>
+        <p:nvSpPr>
+          <p:cNvPr id="20" name="타원 19">
+            <a:extLst>
+              <a:ext uri="{FF2B5EF4-FFF2-40B4-BE49-F238E27FC236}">
+                <a16:creationId xmlns:a16="http://schemas.microsoft.com/office/drawing/2014/main" id="{C38BC522-D4F2-DE9E-6A35-B3672E80DF0D}"/>
+              </a:ext>
+            </a:extLst>
+          </p:cNvPr>
+          <p:cNvSpPr/>
+          <p:nvPr/>
+        </p:nvSpPr>
+        <p:spPr>
+          <a:xfrm>
+            <a:off x="4415790" y="3972560"/>
+            <a:ext cx="198120" cy="198120"/>
+          </a:xfrm>
+          <a:prstGeom prst="ellipse">
+            <a:avLst/>
+          </a:prstGeom>
+          <a:solidFill>
+            <a:schemeClr val="accent2"/>
+          </a:solidFill>
+        </p:spPr>
+        <p:style>
+          <a:lnRef idx="2">
+            <a:schemeClr val="accent1">
+              <a:shade val="15000"/>
+            </a:schemeClr>
+          </a:lnRef>
+          <a:fillRef idx="1">
+            <a:schemeClr val="accent1"/>
+          </a:fillRef>
+          <a:effectRef idx="0">
+            <a:schemeClr val="accent1"/>
+          </a:effectRef>
+          <a:fontRef idx="minor">
+            <a:schemeClr val="lt1"/>
+          </a:fontRef>
+        </p:style>
+        <p:txBody>
+          <a:bodyPr rtlCol="0" anchor="ctr"/>
+          <a:lstStyle/>
+          <a:p>
+            <a:pPr algn="ctr"/>
+            <a:endParaRPr lang="ko-KR" altLang="en-US"/>
+          </a:p>
+        </p:txBody>
+      </p:sp>
+      <p:sp>
+        <p:nvSpPr>
+          <p:cNvPr id="21" name="타원 20">
+            <a:extLst>
+              <a:ext uri="{FF2B5EF4-FFF2-40B4-BE49-F238E27FC236}">
+                <a16:creationId xmlns:a16="http://schemas.microsoft.com/office/drawing/2014/main" id="{E54CFAFD-58AF-87DF-ECED-58D21843EE62}"/>
+              </a:ext>
+            </a:extLst>
+          </p:cNvPr>
+          <p:cNvSpPr/>
+          <p:nvPr/>
+        </p:nvSpPr>
+        <p:spPr>
+          <a:xfrm>
+            <a:off x="9027160" y="2280455"/>
+            <a:ext cx="198120" cy="198120"/>
+          </a:xfrm>
+          <a:prstGeom prst="ellipse">
+            <a:avLst/>
+          </a:prstGeom>
+          <a:solidFill>
+            <a:schemeClr val="accent5"/>
+          </a:solidFill>
+        </p:spPr>
+        <p:style>
+          <a:lnRef idx="2">
+            <a:schemeClr val="accent1">
+              <a:shade val="15000"/>
+            </a:schemeClr>
+          </a:lnRef>
+          <a:fillRef idx="1">
+            <a:schemeClr val="accent1"/>
+          </a:fillRef>
+          <a:effectRef idx="0">
+            <a:schemeClr val="accent1"/>
+          </a:effectRef>
+          <a:fontRef idx="minor">
+            <a:schemeClr val="lt1"/>
+          </a:fontRef>
+        </p:style>
+        <p:txBody>
+          <a:bodyPr rtlCol="0" anchor="ctr"/>
+          <a:lstStyle/>
+          <a:p>
+            <a:pPr algn="ctr"/>
+            <a:endParaRPr lang="ko-KR" altLang="en-US"/>
+          </a:p>
+        </p:txBody>
+      </p:sp>
+      <p:sp>
+        <p:nvSpPr>
+          <p:cNvPr id="22" name="타원 21">
+            <a:extLst>
+              <a:ext uri="{FF2B5EF4-FFF2-40B4-BE49-F238E27FC236}">
+                <a16:creationId xmlns:a16="http://schemas.microsoft.com/office/drawing/2014/main" id="{617EB039-51A8-E52F-2B7F-2BC4DD91482A}"/>
+              </a:ext>
+            </a:extLst>
+          </p:cNvPr>
+          <p:cNvSpPr/>
+          <p:nvPr/>
+        </p:nvSpPr>
+        <p:spPr>
+          <a:xfrm>
+            <a:off x="9027160" y="2568787"/>
+            <a:ext cx="198120" cy="198120"/>
+          </a:xfrm>
+          <a:prstGeom prst="ellipse">
+            <a:avLst/>
+          </a:prstGeom>
+          <a:solidFill>
+            <a:schemeClr val="accent5"/>
+          </a:solidFill>
+        </p:spPr>
+        <p:style>
+          <a:lnRef idx="2">
+            <a:schemeClr val="accent1">
+              <a:shade val="15000"/>
+            </a:schemeClr>
+          </a:lnRef>
+          <a:fillRef idx="1">
+            <a:schemeClr val="accent1"/>
+          </a:fillRef>
+          <a:effectRef idx="0">
+            <a:schemeClr val="accent1"/>
+          </a:effectRef>
+          <a:fontRef idx="minor">
+            <a:schemeClr val="lt1"/>
+          </a:fontRef>
+        </p:style>
+        <p:txBody>
+          <a:bodyPr rtlCol="0" anchor="ctr"/>
+          <a:lstStyle/>
+          <a:p>
+            <a:pPr algn="ctr"/>
+            <a:endParaRPr lang="ko-KR" altLang="en-US"/>
+          </a:p>
+        </p:txBody>
+      </p:sp>
+      <p:sp>
+        <p:nvSpPr>
+          <p:cNvPr id="23" name="타원 22">
+            <a:extLst>
+              <a:ext uri="{FF2B5EF4-FFF2-40B4-BE49-F238E27FC236}">
+                <a16:creationId xmlns:a16="http://schemas.microsoft.com/office/drawing/2014/main" id="{69AF67FD-8BF6-5121-9BF1-E1C9330CC637}"/>
+              </a:ext>
+            </a:extLst>
+          </p:cNvPr>
+          <p:cNvSpPr/>
+          <p:nvPr/>
+        </p:nvSpPr>
+        <p:spPr>
+          <a:xfrm>
+            <a:off x="9027160" y="3095414"/>
+            <a:ext cx="198120" cy="198120"/>
+          </a:xfrm>
+          <a:prstGeom prst="ellipse">
+            <a:avLst/>
+          </a:prstGeom>
+          <a:solidFill>
+            <a:schemeClr val="accent5"/>
+          </a:solidFill>
+        </p:spPr>
+        <p:style>
+          <a:lnRef idx="2">
+            <a:schemeClr val="accent1">
+              <a:shade val="15000"/>
+            </a:schemeClr>
+          </a:lnRef>
+          <a:fillRef idx="1">
+            <a:schemeClr val="accent1"/>
+          </a:fillRef>
+          <a:effectRef idx="0">
+            <a:schemeClr val="accent1"/>
+          </a:effectRef>
+          <a:fontRef idx="minor">
+            <a:schemeClr val="lt1"/>
+          </a:fontRef>
+        </p:style>
+        <p:txBody>
+          <a:bodyPr rtlCol="0" anchor="ctr"/>
+          <a:lstStyle/>
+          <a:p>
+            <a:pPr algn="ctr"/>
+            <a:endParaRPr lang="ko-KR" altLang="en-US"/>
+          </a:p>
+        </p:txBody>
+      </p:sp>
+      <p:sp>
+        <p:nvSpPr>
+          <p:cNvPr id="24" name="타원 23">
+            <a:extLst>
+              <a:ext uri="{FF2B5EF4-FFF2-40B4-BE49-F238E27FC236}">
+                <a16:creationId xmlns:a16="http://schemas.microsoft.com/office/drawing/2014/main" id="{0759407F-4DCF-CC44-3719-5726647CBAB5}"/>
+              </a:ext>
+            </a:extLst>
+          </p:cNvPr>
+          <p:cNvSpPr/>
+          <p:nvPr/>
+        </p:nvSpPr>
+        <p:spPr>
+          <a:xfrm>
+            <a:off x="5982452" y="4328621"/>
+            <a:ext cx="1132840" cy="1132840"/>
+          </a:xfrm>
+          <a:prstGeom prst="ellipse">
+            <a:avLst/>
+          </a:prstGeom>
+          <a:solidFill>
+            <a:schemeClr val="accent2"/>
+          </a:solidFill>
+        </p:spPr>
+        <p:style>
+          <a:lnRef idx="2">
+            <a:schemeClr val="accent1">
+              <a:shade val="15000"/>
+            </a:schemeClr>
+          </a:lnRef>
+          <a:fillRef idx="1">
+            <a:schemeClr val="accent1"/>
+          </a:fillRef>
+          <a:effectRef idx="0">
+            <a:schemeClr val="accent1"/>
+          </a:effectRef>
+          <a:fontRef idx="minor">
+            <a:schemeClr val="lt1"/>
+          </a:fontRef>
+        </p:style>
+        <p:txBody>
+          <a:bodyPr rtlCol="0" anchor="ctr"/>
+          <a:lstStyle/>
+          <a:p>
+            <a:pPr algn="ctr"/>
+            <a:endParaRPr lang="ko-KR" altLang="en-US"/>
+          </a:p>
+        </p:txBody>
+      </p:sp>
+      <p:sp>
+        <p:nvSpPr>
+          <p:cNvPr id="25" name="타원 24">
+            <a:extLst>
+              <a:ext uri="{FF2B5EF4-FFF2-40B4-BE49-F238E27FC236}">
+                <a16:creationId xmlns:a16="http://schemas.microsoft.com/office/drawing/2014/main" id="{CDF42377-6D0E-DBE5-C763-4BBDD680E1C0}"/>
+              </a:ext>
+            </a:extLst>
+          </p:cNvPr>
+          <p:cNvSpPr/>
+          <p:nvPr/>
+        </p:nvSpPr>
+        <p:spPr>
+          <a:xfrm>
+            <a:off x="9947591" y="4328621"/>
+            <a:ext cx="1132840" cy="1132840"/>
+          </a:xfrm>
+          <a:prstGeom prst="ellipse">
+            <a:avLst/>
+          </a:prstGeom>
+          <a:solidFill>
+            <a:schemeClr val="accent5"/>
+          </a:solidFill>
+        </p:spPr>
+        <p:style>
+          <a:lnRef idx="2">
+            <a:schemeClr val="accent1">
+              <a:shade val="15000"/>
+            </a:schemeClr>
+          </a:lnRef>
+          <a:fillRef idx="1">
+            <a:schemeClr val="accent1"/>
+          </a:fillRef>
+          <a:effectRef idx="0">
+            <a:schemeClr val="accent1"/>
+          </a:effectRef>
+          <a:fontRef idx="minor">
+            <a:schemeClr val="lt1"/>
+          </a:fontRef>
+        </p:style>
+        <p:txBody>
+          <a:bodyPr rtlCol="0" anchor="ctr"/>
+          <a:lstStyle/>
+          <a:p>
+            <a:pPr algn="ctr"/>
+            <a:endParaRPr lang="ko-KR" altLang="en-US"/>
+          </a:p>
+        </p:txBody>
+      </p:sp>
+      <mc:AlternateContent xmlns:mc="http://schemas.openxmlformats.org/markup-compatibility/2006">
+        <mc:Choice xmlns:a14="http://schemas.microsoft.com/office/drawing/2010/main" Requires="a14">
+          <p:sp>
+            <p:nvSpPr>
+              <p:cNvPr id="26" name="TextBox 25">
+                <a:extLst>
+                  <a:ext uri="{FF2B5EF4-FFF2-40B4-BE49-F238E27FC236}">
+                    <a16:creationId xmlns:a16="http://schemas.microsoft.com/office/drawing/2014/main" id="{3B040E58-465D-2B52-F823-AEFEFD1F5167}"/>
+                  </a:ext>
+                </a:extLst>
+              </p:cNvPr>
+              <p:cNvSpPr txBox="1"/>
+              <p:nvPr/>
+            </p:nvSpPr>
+            <p:spPr>
+              <a:xfrm>
+                <a:off x="4842472" y="4541699"/>
+                <a:ext cx="1706399" cy="672172"/>
+              </a:xfrm>
+              <a:prstGeom prst="rect">
+                <a:avLst/>
+              </a:prstGeom>
+              <a:noFill/>
+            </p:spPr>
+            <p:txBody>
+              <a:bodyPr wrap="square" lIns="0" tIns="0" rIns="0" bIns="0" rtlCol="0">
+                <a:spAutoFit/>
+              </a:bodyPr>
+              <a:lstStyle/>
+              <a:p>
+                <a:pPr lvl="0" latinLnBrk="1">
+                  <a:defRPr/>
+                </a:pPr>
+                <a14:m>
+                  <m:oMathPara xmlns:m="http://schemas.openxmlformats.org/officeDocument/2006/math">
+                    <m:oMathParaPr>
+                      <m:jc m:val="centerGroup"/>
+                    </m:oMathParaPr>
+                    <m:oMath xmlns:m="http://schemas.openxmlformats.org/officeDocument/2006/math">
+                      <m:r>
+                        <m:rPr>
+                          <m:sty m:val="p"/>
+                        </m:rPr>
+                        <a:rPr kumimoji="0" lang="en-US" altLang="ko-KR" sz="1600" b="0" i="1" u="none" strike="noStrike" kern="1200" cap="none" spc="0" normalizeH="0" baseline="0" noProof="0" smtClean="0">
+                          <a:ln>
+                            <a:noFill/>
+                          </a:ln>
+                          <a:solidFill>
+                            <a:prstClr val="black"/>
+                          </a:solidFill>
+                          <a:effectLst/>
+                          <a:uLnTx/>
+                          <a:uFillTx/>
+                          <a:latin typeface="Cambria Math" panose="02040503050406030204" pitchFamily="18" charset="0"/>
+                        </a:rPr>
+                        <m:t>z</m:t>
+                      </m:r>
+                      <m:r>
+                        <a:rPr kumimoji="0" lang="en-US" altLang="ko-KR" sz="1600" b="0" i="1" u="none" strike="noStrike" kern="1200" cap="none" spc="0" normalizeH="0" baseline="0" noProof="0" smtClean="0">
+                          <a:ln>
+                            <a:noFill/>
+                          </a:ln>
+                          <a:solidFill>
+                            <a:prstClr val="black"/>
+                          </a:solidFill>
+                          <a:effectLst/>
+                          <a:uLnTx/>
+                          <a:uFillTx/>
+                          <a:latin typeface="Cambria Math" panose="02040503050406030204" pitchFamily="18" charset="0"/>
+                        </a:rPr>
+                        <m:t>=</m:t>
+                      </m:r>
+                      <m:nary>
+                        <m:naryPr>
+                          <m:chr m:val="∑"/>
+                          <m:ctrlPr>
+                            <a:rPr kumimoji="0" lang="pt-BR" altLang="ko-KR" sz="1600" b="0" i="1" u="none" strike="noStrike" kern="1200" cap="none" spc="0" normalizeH="0" baseline="0" noProof="0" smtClean="0">
+                              <a:ln>
+                                <a:noFill/>
+                              </a:ln>
+                              <a:solidFill>
+                                <a:prstClr val="black"/>
+                              </a:solidFill>
+                              <a:effectLst/>
+                              <a:uLnTx/>
+                              <a:uFillTx/>
+                              <a:latin typeface="Cambria Math" panose="02040503050406030204" pitchFamily="18" charset="0"/>
+                            </a:rPr>
+                          </m:ctrlPr>
+                        </m:naryPr>
+                        <m:sub>
+                          <m:r>
+                            <m:rPr>
+                              <m:brk m:alnAt="23"/>
+                            </m:rPr>
+                            <a:rPr kumimoji="0" lang="en-US" altLang="ko-KR" sz="1600" b="0" i="1" u="none" strike="noStrike" kern="1200" cap="none" spc="0" normalizeH="0" baseline="0" noProof="0" smtClean="0">
+                              <a:ln>
+                                <a:noFill/>
+                              </a:ln>
+                              <a:solidFill>
+                                <a:prstClr val="black"/>
+                              </a:solidFill>
+                              <a:effectLst/>
+                              <a:uLnTx/>
+                              <a:uFillTx/>
+                              <a:latin typeface="Cambria Math" panose="02040503050406030204" pitchFamily="18" charset="0"/>
+                            </a:rPr>
+                            <m:t>𝑖</m:t>
+                          </m:r>
+                          <m:r>
+                            <a:rPr kumimoji="0" lang="pt-BR" altLang="ko-KR" sz="1600" b="0" i="1" u="none" strike="noStrike" kern="1200" cap="none" spc="0" normalizeH="0" baseline="0" noProof="0" smtClean="0">
+                              <a:ln>
+                                <a:noFill/>
+                              </a:ln>
+                              <a:solidFill>
+                                <a:prstClr val="black"/>
+                              </a:solidFill>
+                              <a:effectLst/>
+                              <a:uLnTx/>
+                              <a:uFillTx/>
+                              <a:latin typeface="Cambria Math" panose="02040503050406030204" pitchFamily="18" charset="0"/>
+                            </a:rPr>
+                            <m:t>=</m:t>
+                          </m:r>
+                          <m:r>
+                            <a:rPr kumimoji="0" lang="en-US" altLang="ko-KR" sz="1600" b="0" i="1" u="none" strike="noStrike" kern="1200" cap="none" spc="0" normalizeH="0" baseline="0" noProof="0" smtClean="0">
+                              <a:ln>
+                                <a:noFill/>
+                              </a:ln>
+                              <a:solidFill>
+                                <a:prstClr val="black"/>
+                              </a:solidFill>
+                              <a:effectLst/>
+                              <a:uLnTx/>
+                              <a:uFillTx/>
+                              <a:latin typeface="Cambria Math" panose="02040503050406030204" pitchFamily="18" charset="0"/>
+                            </a:rPr>
+                            <m:t>1</m:t>
+                          </m:r>
+                        </m:sub>
+                        <m:sup>
+                          <m:r>
+                            <a:rPr kumimoji="0" lang="en-US" altLang="ko-KR" sz="1600" b="0" i="1" u="none" strike="noStrike" kern="1200" cap="none" spc="0" normalizeH="0" baseline="0" noProof="0" smtClean="0">
+                              <a:ln>
+                                <a:noFill/>
+                              </a:ln>
+                              <a:solidFill>
+                                <a:prstClr val="black"/>
+                              </a:solidFill>
+                              <a:effectLst/>
+                              <a:uLnTx/>
+                              <a:uFillTx/>
+                              <a:latin typeface="Cambria Math" panose="02040503050406030204" pitchFamily="18" charset="0"/>
+                            </a:rPr>
+                            <m:t>𝑛</m:t>
+                          </m:r>
+                        </m:sup>
+                        <m:e>
+                          <m:sSub>
+                            <m:sSubPr>
+                              <m:ctrlPr>
+                                <a:rPr kumimoji="0" lang="en-US" altLang="ko-KR" sz="1600" b="0" i="1" u="none" strike="noStrike" kern="1200" cap="none" spc="0" normalizeH="0" baseline="0" noProof="0" smtClean="0">
+                                  <a:ln>
+                                    <a:noFill/>
+                                  </a:ln>
+                                  <a:solidFill>
+                                    <a:prstClr val="black"/>
+                                  </a:solidFill>
+                                  <a:effectLst/>
+                                  <a:uLnTx/>
+                                  <a:uFillTx/>
+                                  <a:latin typeface="Cambria Math" panose="02040503050406030204" pitchFamily="18" charset="0"/>
+                                </a:rPr>
+                              </m:ctrlPr>
+                            </m:sSubPr>
+                            <m:e>
+                              <m:r>
+                                <a:rPr kumimoji="0" lang="en-US" altLang="ko-KR" sz="1600" b="0" i="1" u="none" strike="noStrike" kern="1200" cap="none" spc="0" normalizeH="0" baseline="0" noProof="0" smtClean="0">
+                                  <a:ln>
+                                    <a:noFill/>
+                                  </a:ln>
+                                  <a:solidFill>
+                                    <a:prstClr val="black"/>
+                                  </a:solidFill>
+                                  <a:effectLst/>
+                                  <a:uLnTx/>
+                                  <a:uFillTx/>
+                                  <a:latin typeface="Cambria Math" panose="02040503050406030204" pitchFamily="18" charset="0"/>
+                                </a:rPr>
+                                <m:t>𝑤</m:t>
+                              </m:r>
+                            </m:e>
+                            <m:sub>
+                              <m:r>
+                                <a:rPr kumimoji="0" lang="en-US" altLang="ko-KR" sz="1600" b="0" i="1" u="none" strike="noStrike" kern="1200" cap="none" spc="0" normalizeH="0" baseline="0" noProof="0" smtClean="0">
+                                  <a:ln>
+                                    <a:noFill/>
+                                  </a:ln>
+                                  <a:solidFill>
+                                    <a:prstClr val="black"/>
+                                  </a:solidFill>
+                                  <a:effectLst/>
+                                  <a:uLnTx/>
+                                  <a:uFillTx/>
+                                  <a:latin typeface="Cambria Math" panose="02040503050406030204" pitchFamily="18" charset="0"/>
+                                </a:rPr>
+                                <m:t>𝑖</m:t>
+                              </m:r>
+                            </m:sub>
+                          </m:sSub>
+                          <m:sSub>
+                            <m:sSubPr>
+                              <m:ctrlPr>
+                                <a:rPr kumimoji="0" lang="en-US" altLang="ko-KR" sz="1600" b="0" i="1" u="none" strike="noStrike" kern="1200" cap="none" spc="0" normalizeH="0" baseline="0" noProof="0">
+                                  <a:ln>
+                                    <a:noFill/>
+                                  </a:ln>
+                                  <a:solidFill>
+                                    <a:prstClr val="black"/>
+                                  </a:solidFill>
+                                  <a:effectLst/>
+                                  <a:uLnTx/>
+                                  <a:uFillTx/>
+                                  <a:latin typeface="Cambria Math" panose="02040503050406030204" pitchFamily="18" charset="0"/>
+                                </a:rPr>
+                              </m:ctrlPr>
+                            </m:sSubPr>
+                            <m:e>
+                              <m:r>
+                                <a:rPr kumimoji="0" lang="en-US" altLang="ko-KR" sz="1600" b="0" i="1" u="none" strike="noStrike" kern="1200" cap="none" spc="0" normalizeH="0" baseline="0" noProof="0">
+                                  <a:ln>
+                                    <a:noFill/>
+                                  </a:ln>
+                                  <a:solidFill>
+                                    <a:prstClr val="black"/>
+                                  </a:solidFill>
+                                  <a:effectLst/>
+                                  <a:uLnTx/>
+                                  <a:uFillTx/>
+                                  <a:latin typeface="Cambria Math" panose="02040503050406030204" pitchFamily="18" charset="0"/>
+                                </a:rPr>
+                                <m:t>𝑥</m:t>
+                              </m:r>
+                            </m:e>
+                            <m:sub>
+                              <m:r>
+                                <a:rPr kumimoji="0" lang="en-US" altLang="ko-KR" sz="1600" b="0" i="1" u="none" strike="noStrike" kern="1200" cap="none" spc="0" normalizeH="0" baseline="0" noProof="0" smtClean="0">
+                                  <a:ln>
+                                    <a:noFill/>
+                                  </a:ln>
+                                  <a:solidFill>
+                                    <a:prstClr val="black"/>
+                                  </a:solidFill>
+                                  <a:effectLst/>
+                                  <a:uLnTx/>
+                                  <a:uFillTx/>
+                                  <a:latin typeface="Cambria Math" panose="02040503050406030204" pitchFamily="18" charset="0"/>
+                                </a:rPr>
+                                <m:t>𝑖</m:t>
+                              </m:r>
+                            </m:sub>
+                          </m:sSub>
+                          <m:r>
+                            <a:rPr kumimoji="0" lang="en-US" altLang="ko-KR" sz="1600" b="0" i="1" u="none" strike="noStrike" kern="1200" cap="none" spc="0" normalizeH="0" baseline="0" noProof="0" smtClean="0">
+                              <a:ln>
+                                <a:noFill/>
+                              </a:ln>
+                              <a:solidFill>
+                                <a:prstClr val="black"/>
+                              </a:solidFill>
+                              <a:effectLst/>
+                              <a:uLnTx/>
+                              <a:uFillTx/>
+                              <a:latin typeface="Cambria Math" panose="02040503050406030204" pitchFamily="18" charset="0"/>
+                            </a:rPr>
+                            <m:t> + </m:t>
+                          </m:r>
+                          <m:sSub>
+                            <m:sSubPr>
+                              <m:ctrlPr>
+                                <a:rPr lang="en-US" altLang="ko-KR" sz="1600" i="1">
+                                  <a:solidFill>
+                                    <a:prstClr val="black"/>
+                                  </a:solidFill>
+                                  <a:latin typeface="Cambria Math" panose="02040503050406030204" pitchFamily="18" charset="0"/>
+                                </a:rPr>
+                              </m:ctrlPr>
+                            </m:sSubPr>
+                            <m:e>
+                              <m:r>
+                                <a:rPr lang="en-US" altLang="ko-KR" sz="1600" i="1">
+                                  <a:solidFill>
+                                    <a:prstClr val="black"/>
+                                  </a:solidFill>
+                                  <a:latin typeface="Cambria Math" panose="02040503050406030204" pitchFamily="18" charset="0"/>
+                                </a:rPr>
+                                <m:t>𝑤</m:t>
+                              </m:r>
+                            </m:e>
+                            <m:sub>
+                              <m:r>
+                                <a:rPr lang="en-US" altLang="ko-KR" sz="1600" b="0" i="1" smtClean="0">
+                                  <a:solidFill>
+                                    <a:prstClr val="black"/>
+                                  </a:solidFill>
+                                  <a:latin typeface="Cambria Math" panose="02040503050406030204" pitchFamily="18" charset="0"/>
+                                </a:rPr>
+                                <m:t>0</m:t>
+                              </m:r>
+                            </m:sub>
+                          </m:sSub>
+                        </m:e>
+                      </m:nary>
+                    </m:oMath>
+                  </m:oMathPara>
+                </a14:m>
+                <a:endParaRPr kumimoji="0" lang="ko-KR" altLang="en-US" sz="1600" b="0" i="0" u="none" strike="noStrike" kern="1200" cap="none" spc="0" normalizeH="0" baseline="0" noProof="0" dirty="0">
+                  <a:ln>
+                    <a:noFill/>
+                  </a:ln>
+                  <a:solidFill>
+                    <a:prstClr val="black"/>
+                  </a:solidFill>
+                  <a:effectLst/>
+                  <a:uLnTx/>
+                  <a:uFillTx/>
+                  <a:latin typeface="NanumGothicExtraBold" pitchFamily="2" charset="-127"/>
+                  <a:ea typeface="NanumGothicExtraBold" pitchFamily="2" charset="-127"/>
+                </a:endParaRPr>
+              </a:p>
+            </p:txBody>
+          </p:sp>
+        </mc:Choice>
+        <mc:Fallback>
+          <p:sp>
+            <p:nvSpPr>
+              <p:cNvPr id="26" name="TextBox 25">
+                <a:extLst>
+                  <a:ext uri="{FF2B5EF4-FFF2-40B4-BE49-F238E27FC236}">
+                    <a16:creationId xmlns:a16="http://schemas.microsoft.com/office/drawing/2014/main" id="{3B040E58-465D-2B52-F823-AEFEFD1F5167}"/>
+                  </a:ext>
+                </a:extLst>
+              </p:cNvPr>
+              <p:cNvSpPr txBox="1">
+                <a:spLocks noRot="1" noChangeAspect="1" noMove="1" noResize="1" noEditPoints="1" noAdjustHandles="1" noChangeArrowheads="1" noChangeShapeType="1" noTextEdit="1"/>
+              </p:cNvSpPr>
+              <p:nvPr/>
+            </p:nvSpPr>
+            <p:spPr>
+              <a:xfrm>
+                <a:off x="4842472" y="4541699"/>
+                <a:ext cx="1706399" cy="672172"/>
+              </a:xfrm>
+              <a:prstGeom prst="rect">
+                <a:avLst/>
+              </a:prstGeom>
+              <a:blipFill>
+                <a:blip r:embed="rId2"/>
+                <a:stretch>
+                  <a:fillRect b="-909"/>
+                </a:stretch>
+              </a:blipFill>
+            </p:spPr>
+            <p:txBody>
+              <a:bodyPr/>
+              <a:lstStyle/>
+              <a:p>
+                <a:r>
+                  <a:rPr lang="ko-KR" altLang="en-US">
+                    <a:noFill/>
+                  </a:rPr>
+                  <a:t> </a:t>
+                </a:r>
+              </a:p>
+            </p:txBody>
+          </p:sp>
+        </mc:Fallback>
+      </mc:AlternateContent>
+      <mc:AlternateContent xmlns:mc="http://schemas.openxmlformats.org/markup-compatibility/2006">
+        <mc:Choice xmlns:a14="http://schemas.microsoft.com/office/drawing/2010/main" Requires="a14">
+          <p:sp>
+            <p:nvSpPr>
+              <p:cNvPr id="30" name="TextBox 29">
+                <a:extLst>
+                  <a:ext uri="{FF2B5EF4-FFF2-40B4-BE49-F238E27FC236}">
+                    <a16:creationId xmlns:a16="http://schemas.microsoft.com/office/drawing/2014/main" id="{70E52007-6328-99A6-656E-AC620A409686}"/>
+                  </a:ext>
+                </a:extLst>
+              </p:cNvPr>
+              <p:cNvSpPr txBox="1"/>
+              <p:nvPr/>
+            </p:nvSpPr>
+            <p:spPr>
+              <a:xfrm>
+                <a:off x="6425303" y="4708508"/>
+                <a:ext cx="1282281" cy="338554"/>
+              </a:xfrm>
+              <a:prstGeom prst="rect">
+                <a:avLst/>
+              </a:prstGeom>
+              <a:noFill/>
+            </p:spPr>
+            <p:txBody>
+              <a:bodyPr wrap="square">
+                <a:spAutoFit/>
+              </a:bodyPr>
+              <a:lstStyle/>
+              <a:p>
+                <a:pPr/>
+                <a14:m>
+                  <m:oMathPara xmlns:m="http://schemas.openxmlformats.org/officeDocument/2006/math">
+                    <m:oMathParaPr>
+                      <m:jc m:val="centerGroup"/>
+                    </m:oMathParaPr>
+                    <m:oMath xmlns:m="http://schemas.openxmlformats.org/officeDocument/2006/math">
+                      <m:acc>
+                        <m:accPr>
+                          <m:chr m:val="̂"/>
+                          <m:ctrlPr>
+                            <a:rPr kumimoji="0" lang="en-US" altLang="ko-KR" sz="1600" b="0" i="1" u="none" strike="noStrike" kern="1200" cap="none" spc="0" normalizeH="0" baseline="0" noProof="0" smtClean="0">
+                              <a:ln>
+                                <a:noFill/>
+                              </a:ln>
+                              <a:solidFill>
+                                <a:prstClr val="black"/>
+                              </a:solidFill>
+                              <a:effectLst/>
+                              <a:uLnTx/>
+                              <a:uFillTx/>
+                              <a:latin typeface="Cambria Math" panose="02040503050406030204" pitchFamily="18" charset="0"/>
+                            </a:rPr>
+                          </m:ctrlPr>
+                        </m:accPr>
+                        <m:e>
+                          <m:r>
+                            <a:rPr kumimoji="0" lang="en-US" altLang="ko-KR" sz="1600" b="0" i="1" u="none" strike="noStrike" kern="1200" cap="none" spc="0" normalizeH="0" baseline="0" noProof="0" smtClean="0">
+                              <a:ln>
+                                <a:noFill/>
+                              </a:ln>
+                              <a:solidFill>
+                                <a:prstClr val="black"/>
+                              </a:solidFill>
+                              <a:effectLst/>
+                              <a:uLnTx/>
+                              <a:uFillTx/>
+                              <a:latin typeface="Cambria Math" panose="02040503050406030204" pitchFamily="18" charset="0"/>
+                            </a:rPr>
+                            <m:t>𝑦</m:t>
+                          </m:r>
+                        </m:e>
+                      </m:acc>
+                      <m:r>
+                        <a:rPr kumimoji="0" lang="en-US" altLang="ko-KR" sz="1600" b="0" i="1" u="none" strike="noStrike" kern="1200" cap="none" spc="0" normalizeH="0" baseline="0" noProof="0" smtClean="0">
+                          <a:ln>
+                            <a:noFill/>
+                          </a:ln>
+                          <a:solidFill>
+                            <a:prstClr val="black"/>
+                          </a:solidFill>
+                          <a:effectLst/>
+                          <a:uLnTx/>
+                          <a:uFillTx/>
+                          <a:latin typeface="Cambria Math" panose="02040503050406030204" pitchFamily="18" charset="0"/>
+                        </a:rPr>
+                        <m:t>=</m:t>
+                      </m:r>
+                      <m:r>
+                        <a:rPr kumimoji="0" lang="en-US" altLang="ko-KR" sz="1600" b="0" i="1" u="none" strike="noStrike" kern="1200" cap="none" spc="0" normalizeH="0" baseline="0" noProof="0" smtClean="0">
+                          <a:ln>
+                            <a:noFill/>
+                          </a:ln>
+                          <a:solidFill>
+                            <a:prstClr val="black"/>
+                          </a:solidFill>
+                          <a:effectLst/>
+                          <a:uLnTx/>
+                          <a:uFillTx/>
+                          <a:latin typeface="Cambria Math" panose="02040503050406030204" pitchFamily="18" charset="0"/>
+                        </a:rPr>
+                        <m:t>𝜎</m:t>
+                      </m:r>
+                      <m:d>
+                        <m:dPr>
+                          <m:ctrlPr>
+                            <a:rPr kumimoji="0" lang="en-US" altLang="ko-KR" sz="1600" b="0" i="1" u="none" strike="noStrike" kern="1200" cap="none" spc="0" normalizeH="0" baseline="0" noProof="0" smtClean="0">
+                              <a:ln>
+                                <a:noFill/>
+                              </a:ln>
+                              <a:solidFill>
+                                <a:prstClr val="black"/>
+                              </a:solidFill>
+                              <a:effectLst/>
+                              <a:uLnTx/>
+                              <a:uFillTx/>
+                              <a:latin typeface="Cambria Math" panose="02040503050406030204" pitchFamily="18" charset="0"/>
+                            </a:rPr>
+                          </m:ctrlPr>
+                        </m:dPr>
+                        <m:e>
+                          <m:r>
+                            <a:rPr kumimoji="0" lang="en-US" altLang="ko-KR" sz="1600" b="0" i="1" u="none" strike="noStrike" kern="1200" cap="none" spc="0" normalizeH="0" baseline="0" noProof="0" smtClean="0">
+                              <a:ln>
+                                <a:noFill/>
+                              </a:ln>
+                              <a:solidFill>
+                                <a:prstClr val="black"/>
+                              </a:solidFill>
+                              <a:effectLst/>
+                              <a:uLnTx/>
+                              <a:uFillTx/>
+                              <a:latin typeface="Cambria Math" panose="02040503050406030204" pitchFamily="18" charset="0"/>
+                            </a:rPr>
+                            <m:t>𝑧</m:t>
+                          </m:r>
+                        </m:e>
+                      </m:d>
+                    </m:oMath>
+                  </m:oMathPara>
+                </a14:m>
+                <a:endParaRPr lang="ko-KR" altLang="en-US" sz="1600" dirty="0"/>
+              </a:p>
+            </p:txBody>
+          </p:sp>
+        </mc:Choice>
+        <mc:Fallback>
+          <p:sp>
+            <p:nvSpPr>
+              <p:cNvPr id="30" name="TextBox 29">
+                <a:extLst>
+                  <a:ext uri="{FF2B5EF4-FFF2-40B4-BE49-F238E27FC236}">
+                    <a16:creationId xmlns:a16="http://schemas.microsoft.com/office/drawing/2014/main" id="{70E52007-6328-99A6-656E-AC620A409686}"/>
+                  </a:ext>
+                </a:extLst>
+              </p:cNvPr>
+              <p:cNvSpPr txBox="1">
+                <a:spLocks noRot="1" noChangeAspect="1" noMove="1" noResize="1" noEditPoints="1" noAdjustHandles="1" noChangeArrowheads="1" noChangeShapeType="1" noTextEdit="1"/>
+              </p:cNvSpPr>
+              <p:nvPr/>
+            </p:nvSpPr>
+            <p:spPr>
+              <a:xfrm>
+                <a:off x="6425303" y="4708508"/>
+                <a:ext cx="1282281" cy="338554"/>
+              </a:xfrm>
+              <a:prstGeom prst="rect">
+                <a:avLst/>
+              </a:prstGeom>
+              <a:blipFill>
+                <a:blip r:embed="rId3"/>
+                <a:stretch>
+                  <a:fillRect b="-5357"/>
+                </a:stretch>
+              </a:blipFill>
+            </p:spPr>
+            <p:txBody>
+              <a:bodyPr/>
+              <a:lstStyle/>
+              <a:p>
+                <a:r>
+                  <a:rPr lang="ko-KR" altLang="en-US">
+                    <a:noFill/>
+                  </a:rPr>
+                  <a:t> </a:t>
+                </a:r>
+              </a:p>
+            </p:txBody>
+          </p:sp>
+        </mc:Fallback>
+      </mc:AlternateContent>
+      <p:sp>
+        <p:nvSpPr>
+          <p:cNvPr id="33" name="TextBox 32">
+            <a:extLst>
+              <a:ext uri="{FF2B5EF4-FFF2-40B4-BE49-F238E27FC236}">
+                <a16:creationId xmlns:a16="http://schemas.microsoft.com/office/drawing/2014/main" id="{B9549582-C890-5354-E54B-72E68751E4AE}"/>
+              </a:ext>
+            </a:extLst>
+          </p:cNvPr>
+          <p:cNvSpPr txBox="1"/>
+          <p:nvPr/>
+        </p:nvSpPr>
+        <p:spPr>
+          <a:xfrm>
+            <a:off x="1193402" y="1728005"/>
+            <a:ext cx="894876" cy="307777"/>
+          </a:xfrm>
+          <a:prstGeom prst="rect">
+            <a:avLst/>
+          </a:prstGeom>
+          <a:noFill/>
+        </p:spPr>
+        <p:txBody>
+          <a:bodyPr wrap="square">
+            <a:spAutoFit/>
+          </a:bodyPr>
+          <a:lstStyle/>
+          <a:p>
+            <a:r>
+              <a:rPr lang="en-US" altLang="ko-KR" sz="1400" dirty="0">
+                <a:solidFill>
+                  <a:prstClr val="black"/>
+                </a:solidFill>
+                <a:latin typeface="ADLaM Display" panose="02010000000000000000" pitchFamily="2" charset="0"/>
+                <a:ea typeface="ADLaM Display" panose="02010000000000000000" pitchFamily="2" charset="0"/>
+                <a:cs typeface="ADLaM Display" panose="02010000000000000000" pitchFamily="2" charset="0"/>
+              </a:rPr>
+              <a:t>Input</a:t>
+            </a:r>
+            <a:endParaRPr lang="ko-KR" altLang="en-US" sz="1400" dirty="0"/>
+          </a:p>
+        </p:txBody>
+      </p:sp>
+      <p:sp>
+        <p:nvSpPr>
+          <p:cNvPr id="34" name="TextBox 33">
+            <a:extLst>
+              <a:ext uri="{FF2B5EF4-FFF2-40B4-BE49-F238E27FC236}">
+                <a16:creationId xmlns:a16="http://schemas.microsoft.com/office/drawing/2014/main" id="{8EA59847-AA9D-AE4A-9FC0-8B0F1D2FB8C9}"/>
+              </a:ext>
+            </a:extLst>
+          </p:cNvPr>
+          <p:cNvSpPr txBox="1"/>
+          <p:nvPr/>
+        </p:nvSpPr>
+        <p:spPr>
+          <a:xfrm>
+            <a:off x="2290682" y="1728005"/>
+            <a:ext cx="894876" cy="307777"/>
+          </a:xfrm>
+          <a:prstGeom prst="rect">
+            <a:avLst/>
+          </a:prstGeom>
+          <a:noFill/>
+        </p:spPr>
+        <p:txBody>
+          <a:bodyPr wrap="square">
+            <a:spAutoFit/>
+          </a:bodyPr>
+          <a:lstStyle/>
+          <a:p>
+            <a:r>
+              <a:rPr lang="en-US" altLang="ko-KR" sz="1400" dirty="0">
+                <a:solidFill>
+                  <a:prstClr val="black"/>
+                </a:solidFill>
+                <a:latin typeface="ADLaM Display" panose="02010000000000000000" pitchFamily="2" charset="0"/>
+                <a:ea typeface="ADLaM Display" panose="02010000000000000000" pitchFamily="2" charset="0"/>
+                <a:cs typeface="ADLaM Display" panose="02010000000000000000" pitchFamily="2" charset="0"/>
+              </a:rPr>
+              <a:t>Weights</a:t>
+            </a:r>
+            <a:endParaRPr lang="ko-KR" altLang="en-US" sz="1400" dirty="0"/>
+          </a:p>
+        </p:txBody>
+      </p:sp>
+      <p:sp>
+        <p:nvSpPr>
+          <p:cNvPr id="35" name="직사각형 34">
+            <a:extLst>
+              <a:ext uri="{FF2B5EF4-FFF2-40B4-BE49-F238E27FC236}">
+                <a16:creationId xmlns:a16="http://schemas.microsoft.com/office/drawing/2014/main" id="{1204238D-40FF-B7DE-46A3-A0C73B07F3AA}"/>
+              </a:ext>
+            </a:extLst>
+          </p:cNvPr>
+          <p:cNvSpPr/>
+          <p:nvPr/>
+        </p:nvSpPr>
+        <p:spPr>
+          <a:xfrm>
+            <a:off x="6504180" y="3774726"/>
+            <a:ext cx="1066164" cy="600164"/>
+          </a:xfrm>
+          <a:prstGeom prst="rect">
+            <a:avLst/>
+          </a:prstGeom>
+        </p:spPr>
+        <p:txBody>
+          <a:bodyPr wrap="square">
+            <a:spAutoFit/>
+          </a:bodyPr>
+          <a:lstStyle/>
+          <a:p>
+            <a:pPr marR="0" lvl="0" algn="ctr" defTabSz="914400" rtl="0" eaLnBrk="1" fontAlgn="base" latinLnBrk="1" hangingPunct="1">
+              <a:spcBef>
+                <a:spcPts val="0"/>
+              </a:spcBef>
+              <a:spcAft>
+                <a:spcPts val="0"/>
+              </a:spcAft>
+              <a:buClrTx/>
+              <a:buSzTx/>
+              <a:tabLst/>
+              <a:defRPr/>
+            </a:pPr>
+            <a:r>
+              <a:rPr lang="en-US" altLang="ko-KR" sz="1100" dirty="0">
+                <a:solidFill>
+                  <a:prstClr val="black"/>
+                </a:solidFill>
+                <a:latin typeface="ADLaM Display" panose="02010000000000000000" pitchFamily="2" charset="0"/>
+                <a:ea typeface="ADLaM Display" panose="02010000000000000000" pitchFamily="2" charset="0"/>
+                <a:cs typeface="ADLaM Display" panose="02010000000000000000" pitchFamily="2" charset="0"/>
+              </a:rPr>
+              <a:t>Activation function</a:t>
+            </a:r>
+          </a:p>
+          <a:p>
+            <a:pPr marR="0" lvl="0" algn="ctr" defTabSz="914400" rtl="0" eaLnBrk="1" fontAlgn="base" latinLnBrk="1" hangingPunct="1">
+              <a:spcBef>
+                <a:spcPts val="0"/>
+              </a:spcBef>
+              <a:spcAft>
+                <a:spcPts val="0"/>
+              </a:spcAft>
+              <a:buClrTx/>
+              <a:buSzTx/>
+              <a:tabLst/>
+              <a:defRPr/>
+            </a:pPr>
+            <a:r>
+              <a:rPr lang="en-US" altLang="ko-KR" sz="1100" dirty="0">
+                <a:solidFill>
+                  <a:prstClr val="black"/>
+                </a:solidFill>
+                <a:latin typeface="ADLaM Display" panose="02010000000000000000" pitchFamily="2" charset="0"/>
+                <a:ea typeface="ADLaM Display" panose="02010000000000000000" pitchFamily="2" charset="0"/>
+                <a:cs typeface="ADLaM Display" panose="02010000000000000000" pitchFamily="2" charset="0"/>
+              </a:rPr>
+              <a:t>(</a:t>
+            </a:r>
+            <a:r>
+              <a:rPr lang="en-US" altLang="ko-KR" sz="1100" dirty="0" err="1">
+                <a:solidFill>
+                  <a:prstClr val="black"/>
+                </a:solidFill>
+                <a:latin typeface="ADLaM Display" panose="02010000000000000000" pitchFamily="2" charset="0"/>
+                <a:ea typeface="ADLaM Display" panose="02010000000000000000" pitchFamily="2" charset="0"/>
+                <a:cs typeface="ADLaM Display" panose="02010000000000000000" pitchFamily="2" charset="0"/>
+              </a:rPr>
+              <a:t>Relu</a:t>
+            </a:r>
+            <a:r>
+              <a:rPr lang="en-US" altLang="ko-KR" sz="1100" dirty="0">
+                <a:solidFill>
+                  <a:prstClr val="black"/>
+                </a:solidFill>
+                <a:latin typeface="ADLaM Display" panose="02010000000000000000" pitchFamily="2" charset="0"/>
+                <a:ea typeface="ADLaM Display" panose="02010000000000000000" pitchFamily="2" charset="0"/>
+                <a:cs typeface="ADLaM Display" panose="02010000000000000000" pitchFamily="2" charset="0"/>
+              </a:rPr>
+              <a:t>)</a:t>
+            </a:r>
+          </a:p>
+        </p:txBody>
+      </p:sp>
+      <p:sp>
+        <p:nvSpPr>
+          <p:cNvPr id="37" name="TextBox 36">
+            <a:extLst>
+              <a:ext uri="{FF2B5EF4-FFF2-40B4-BE49-F238E27FC236}">
+                <a16:creationId xmlns:a16="http://schemas.microsoft.com/office/drawing/2014/main" id="{EE5A20BE-B177-78AC-97ED-F2460DE6DFE2}"/>
+              </a:ext>
+            </a:extLst>
+          </p:cNvPr>
+          <p:cNvSpPr txBox="1"/>
+          <p:nvPr/>
+        </p:nvSpPr>
+        <p:spPr>
+          <a:xfrm>
+            <a:off x="6667854" y="1728005"/>
+            <a:ext cx="894876" cy="307777"/>
+          </a:xfrm>
+          <a:prstGeom prst="rect">
+            <a:avLst/>
+          </a:prstGeom>
+          <a:noFill/>
+        </p:spPr>
+        <p:txBody>
+          <a:bodyPr wrap="square">
+            <a:spAutoFit/>
+          </a:bodyPr>
+          <a:lstStyle/>
+          <a:p>
+            <a:r>
+              <a:rPr lang="en-US" altLang="ko-KR" sz="1400" dirty="0">
+                <a:solidFill>
+                  <a:prstClr val="black"/>
+                </a:solidFill>
+                <a:latin typeface="ADLaM Display" panose="02010000000000000000" pitchFamily="2" charset="0"/>
+                <a:ea typeface="ADLaM Display" panose="02010000000000000000" pitchFamily="2" charset="0"/>
+                <a:cs typeface="ADLaM Display" panose="02010000000000000000" pitchFamily="2" charset="0"/>
+              </a:rPr>
+              <a:t>Weights</a:t>
+            </a:r>
+            <a:endParaRPr lang="ko-KR" altLang="en-US" sz="1400" dirty="0"/>
+          </a:p>
+        </p:txBody>
+      </p:sp>
+      <p:cxnSp>
+        <p:nvCxnSpPr>
+          <p:cNvPr id="39" name="직선 연결선 38">
+            <a:extLst>
+              <a:ext uri="{FF2B5EF4-FFF2-40B4-BE49-F238E27FC236}">
+                <a16:creationId xmlns:a16="http://schemas.microsoft.com/office/drawing/2014/main" id="{F98F12EE-AC97-8C44-6A88-1E555F739D1A}"/>
+              </a:ext>
+            </a:extLst>
+          </p:cNvPr>
+          <p:cNvCxnSpPr>
+            <a:stCxn id="24" idx="0"/>
+            <a:endCxn id="24" idx="4"/>
+          </p:cNvCxnSpPr>
+          <p:nvPr/>
+        </p:nvCxnSpPr>
+        <p:spPr>
+          <a:xfrm>
+            <a:off x="6548872" y="4328621"/>
+            <a:ext cx="0" cy="1132840"/>
+          </a:xfrm>
+          <a:prstGeom prst="line">
+            <a:avLst/>
+          </a:prstGeom>
+          <a:ln w="12700"/>
+        </p:spPr>
+        <p:style>
+          <a:lnRef idx="1">
+            <a:schemeClr val="dk1"/>
+          </a:lnRef>
+          <a:fillRef idx="0">
+            <a:schemeClr val="dk1"/>
+          </a:fillRef>
+          <a:effectRef idx="0">
+            <a:schemeClr val="dk1"/>
+          </a:effectRef>
+          <a:fontRef idx="minor">
+            <a:schemeClr val="tx1"/>
+          </a:fontRef>
+        </p:style>
+      </p:cxnSp>
+      <p:sp>
+        <p:nvSpPr>
+          <p:cNvPr id="40" name="TextBox 39">
+            <a:extLst>
+              <a:ext uri="{FF2B5EF4-FFF2-40B4-BE49-F238E27FC236}">
+                <a16:creationId xmlns:a16="http://schemas.microsoft.com/office/drawing/2014/main" id="{4828ABBF-A0E8-A33F-DA5D-97CD482356C1}"/>
+              </a:ext>
+            </a:extLst>
+          </p:cNvPr>
+          <p:cNvSpPr txBox="1"/>
+          <p:nvPr/>
+        </p:nvSpPr>
+        <p:spPr>
+          <a:xfrm>
+            <a:off x="3627118" y="1728005"/>
+            <a:ext cx="2049781" cy="307777"/>
+          </a:xfrm>
+          <a:prstGeom prst="rect">
+            <a:avLst/>
+          </a:prstGeom>
+          <a:noFill/>
+        </p:spPr>
+        <p:txBody>
+          <a:bodyPr wrap="square">
+            <a:spAutoFit/>
+          </a:bodyPr>
+          <a:lstStyle/>
+          <a:p>
+            <a:r>
+              <a:rPr lang="en-US" altLang="ko-KR" sz="1400" dirty="0">
+                <a:solidFill>
+                  <a:prstClr val="black"/>
+                </a:solidFill>
+                <a:latin typeface="ADLaM Display" panose="02010000000000000000" pitchFamily="2" charset="0"/>
+                <a:ea typeface="ADLaM Display" panose="02010000000000000000" pitchFamily="2" charset="0"/>
+                <a:cs typeface="ADLaM Display" panose="02010000000000000000" pitchFamily="2" charset="0"/>
+              </a:rPr>
+              <a:t>Layer</a:t>
+            </a:r>
+            <a:r>
+              <a:rPr lang="ko-KR" altLang="en-US" sz="1400" dirty="0">
+                <a:solidFill>
+                  <a:prstClr val="black"/>
+                </a:solidFill>
+                <a:latin typeface="ADLaM Display" panose="02010000000000000000" pitchFamily="2" charset="0"/>
+                <a:cs typeface="ADLaM Display" panose="02010000000000000000" pitchFamily="2" charset="0"/>
+              </a:rPr>
+              <a:t> </a:t>
+            </a:r>
+            <a:r>
+              <a:rPr lang="en-US" altLang="ko-KR" sz="1400" dirty="0">
+                <a:solidFill>
+                  <a:prstClr val="black"/>
+                </a:solidFill>
+                <a:latin typeface="ADLaM Display" panose="02010000000000000000" pitchFamily="2" charset="0"/>
+                <a:ea typeface="ADLaM Display" panose="02010000000000000000" pitchFamily="2" charset="0"/>
+                <a:cs typeface="ADLaM Display" panose="02010000000000000000" pitchFamily="2" charset="0"/>
+              </a:rPr>
+              <a:t>(Dense</a:t>
+            </a:r>
+            <a:r>
+              <a:rPr lang="ko-KR" altLang="en-US" sz="1400" dirty="0">
+                <a:solidFill>
+                  <a:prstClr val="black"/>
+                </a:solidFill>
+                <a:latin typeface="ADLaM Display" panose="02010000000000000000" pitchFamily="2" charset="0"/>
+                <a:cs typeface="ADLaM Display" panose="02010000000000000000" pitchFamily="2" charset="0"/>
+              </a:rPr>
+              <a:t> </a:t>
+            </a:r>
+            <a:r>
+              <a:rPr lang="en-US" altLang="ko-KR" sz="1400" dirty="0">
+                <a:solidFill>
+                  <a:prstClr val="black"/>
+                </a:solidFill>
+                <a:latin typeface="ADLaM Display" panose="02010000000000000000" pitchFamily="2" charset="0"/>
+                <a:ea typeface="ADLaM Display" panose="02010000000000000000" pitchFamily="2" charset="0"/>
+                <a:cs typeface="ADLaM Display" panose="02010000000000000000" pitchFamily="2" charset="0"/>
+              </a:rPr>
+              <a:t>=64)</a:t>
+            </a:r>
+            <a:endParaRPr lang="ko-KR" altLang="en-US" sz="1400" dirty="0">
+              <a:solidFill>
+                <a:prstClr val="black"/>
+              </a:solidFill>
+              <a:latin typeface="ADLaM Display" panose="02010000000000000000" pitchFamily="2" charset="0"/>
+              <a:cs typeface="ADLaM Display" panose="02010000000000000000" pitchFamily="2" charset="0"/>
+            </a:endParaRPr>
+          </a:p>
+        </p:txBody>
+      </p:sp>
+      <p:sp>
+        <p:nvSpPr>
+          <p:cNvPr id="5" name="TextBox 4">
+            <a:extLst>
+              <a:ext uri="{FF2B5EF4-FFF2-40B4-BE49-F238E27FC236}">
+                <a16:creationId xmlns:a16="http://schemas.microsoft.com/office/drawing/2014/main" id="{8CB5EAD0-4525-F13A-9B0A-ECA6A7E730B0}"/>
+              </a:ext>
+            </a:extLst>
+          </p:cNvPr>
+          <p:cNvSpPr txBox="1"/>
+          <p:nvPr/>
+        </p:nvSpPr>
+        <p:spPr>
+          <a:xfrm>
+            <a:off x="8273020" y="1728005"/>
+            <a:ext cx="1706400" cy="307777"/>
+          </a:xfrm>
+          <a:prstGeom prst="rect">
+            <a:avLst/>
+          </a:prstGeom>
+          <a:noFill/>
+        </p:spPr>
+        <p:txBody>
+          <a:bodyPr wrap="square">
+            <a:spAutoFit/>
+          </a:bodyPr>
+          <a:lstStyle/>
+          <a:p>
+            <a:r>
+              <a:rPr lang="en-US" altLang="ko-KR" sz="1400" dirty="0">
+                <a:solidFill>
+                  <a:prstClr val="black"/>
+                </a:solidFill>
+                <a:latin typeface="ADLaM Display" panose="02010000000000000000" pitchFamily="2" charset="0"/>
+                <a:ea typeface="ADLaM Display" panose="02010000000000000000" pitchFamily="2" charset="0"/>
+                <a:cs typeface="ADLaM Display" panose="02010000000000000000" pitchFamily="2" charset="0"/>
+              </a:rPr>
+              <a:t>Layer</a:t>
+            </a:r>
+            <a:r>
+              <a:rPr lang="ko-KR" altLang="en-US" sz="1400" dirty="0">
+                <a:solidFill>
+                  <a:prstClr val="black"/>
+                </a:solidFill>
+                <a:latin typeface="ADLaM Display" panose="02010000000000000000" pitchFamily="2" charset="0"/>
+                <a:cs typeface="ADLaM Display" panose="02010000000000000000" pitchFamily="2" charset="0"/>
+              </a:rPr>
+              <a:t> </a:t>
+            </a:r>
+            <a:r>
+              <a:rPr lang="en-US" altLang="ko-KR" sz="1400" dirty="0">
+                <a:solidFill>
+                  <a:prstClr val="black"/>
+                </a:solidFill>
+                <a:latin typeface="ADLaM Display" panose="02010000000000000000" pitchFamily="2" charset="0"/>
+                <a:ea typeface="ADLaM Display" panose="02010000000000000000" pitchFamily="2" charset="0"/>
+                <a:cs typeface="ADLaM Display" panose="02010000000000000000" pitchFamily="2" charset="0"/>
+              </a:rPr>
+              <a:t>(Dense</a:t>
+            </a:r>
+            <a:r>
+              <a:rPr lang="ko-KR" altLang="en-US" sz="1400" dirty="0">
+                <a:solidFill>
+                  <a:prstClr val="black"/>
+                </a:solidFill>
+                <a:latin typeface="ADLaM Display" panose="02010000000000000000" pitchFamily="2" charset="0"/>
+                <a:cs typeface="ADLaM Display" panose="02010000000000000000" pitchFamily="2" charset="0"/>
+              </a:rPr>
+              <a:t> </a:t>
+            </a:r>
+            <a:r>
+              <a:rPr lang="en-US" altLang="ko-KR" sz="1400" dirty="0">
+                <a:solidFill>
+                  <a:prstClr val="black"/>
+                </a:solidFill>
+                <a:latin typeface="ADLaM Display" panose="02010000000000000000" pitchFamily="2" charset="0"/>
+                <a:ea typeface="ADLaM Display" panose="02010000000000000000" pitchFamily="2" charset="0"/>
+                <a:cs typeface="ADLaM Display" panose="02010000000000000000" pitchFamily="2" charset="0"/>
+              </a:rPr>
+              <a:t>=10)</a:t>
+            </a:r>
+            <a:endParaRPr lang="ko-KR" altLang="en-US" sz="1400" dirty="0">
+              <a:solidFill>
+                <a:prstClr val="black"/>
+              </a:solidFill>
+              <a:latin typeface="ADLaM Display" panose="02010000000000000000" pitchFamily="2" charset="0"/>
+              <a:cs typeface="ADLaM Display" panose="02010000000000000000" pitchFamily="2" charset="0"/>
+            </a:endParaRPr>
+          </a:p>
+        </p:txBody>
+      </p:sp>
+      <p:sp>
+        <p:nvSpPr>
+          <p:cNvPr id="8" name="직사각형 7">
+            <a:extLst>
+              <a:ext uri="{FF2B5EF4-FFF2-40B4-BE49-F238E27FC236}">
+                <a16:creationId xmlns:a16="http://schemas.microsoft.com/office/drawing/2014/main" id="{D011DC52-9D70-D10A-924F-D4AAE7E6FDF9}"/>
+              </a:ext>
+            </a:extLst>
+          </p:cNvPr>
+          <p:cNvSpPr/>
+          <p:nvPr/>
+        </p:nvSpPr>
+        <p:spPr>
+          <a:xfrm>
+            <a:off x="5576686" y="3814329"/>
+            <a:ext cx="953135" cy="430887"/>
+          </a:xfrm>
+          <a:prstGeom prst="rect">
+            <a:avLst/>
+          </a:prstGeom>
+        </p:spPr>
+        <p:txBody>
+          <a:bodyPr wrap="square">
+            <a:spAutoFit/>
+          </a:bodyPr>
+          <a:lstStyle/>
+          <a:p>
+            <a:pPr marR="0" lvl="0" algn="ctr" defTabSz="914400" rtl="0" eaLnBrk="1" fontAlgn="base" latinLnBrk="1" hangingPunct="1">
+              <a:spcBef>
+                <a:spcPts val="0"/>
+              </a:spcBef>
+              <a:spcAft>
+                <a:spcPts val="0"/>
+              </a:spcAft>
+              <a:buClrTx/>
+              <a:buSzTx/>
+              <a:tabLst/>
+              <a:defRPr/>
+            </a:pPr>
+            <a:r>
+              <a:rPr lang="en-US" altLang="ko-KR" sz="1100" dirty="0">
+                <a:solidFill>
+                  <a:prstClr val="black"/>
+                </a:solidFill>
+                <a:latin typeface="ADLaM Display" panose="02010000000000000000" pitchFamily="2" charset="0"/>
+                <a:ea typeface="ADLaM Display" panose="02010000000000000000" pitchFamily="2" charset="0"/>
+                <a:cs typeface="ADLaM Display" panose="02010000000000000000" pitchFamily="2" charset="0"/>
+              </a:rPr>
+              <a:t>Weighted Sum</a:t>
+            </a:r>
+          </a:p>
+        </p:txBody>
+      </p:sp>
+      <p:cxnSp>
+        <p:nvCxnSpPr>
+          <p:cNvPr id="9" name="직선 연결선 8">
+            <a:extLst>
+              <a:ext uri="{FF2B5EF4-FFF2-40B4-BE49-F238E27FC236}">
+                <a16:creationId xmlns:a16="http://schemas.microsoft.com/office/drawing/2014/main" id="{34B423E7-6F3D-A02B-A0E0-7D13A8750AFA}"/>
+              </a:ext>
+            </a:extLst>
+          </p:cNvPr>
+          <p:cNvCxnSpPr>
+            <a:cxnSpLocks/>
+            <a:stCxn id="25" idx="0"/>
+            <a:endCxn id="25" idx="4"/>
+          </p:cNvCxnSpPr>
+          <p:nvPr/>
+        </p:nvCxnSpPr>
+        <p:spPr>
+          <a:xfrm>
+            <a:off x="10514011" y="4328621"/>
+            <a:ext cx="0" cy="1132840"/>
+          </a:xfrm>
+          <a:prstGeom prst="line">
+            <a:avLst/>
+          </a:prstGeom>
+          <a:ln w="12700">
+            <a:solidFill>
+              <a:schemeClr val="bg1"/>
+            </a:solidFill>
+          </a:ln>
+        </p:spPr>
+        <p:style>
+          <a:lnRef idx="1">
+            <a:schemeClr val="dk1"/>
+          </a:lnRef>
+          <a:fillRef idx="0">
+            <a:schemeClr val="dk1"/>
+          </a:fillRef>
+          <a:effectRef idx="0">
+            <a:schemeClr val="dk1"/>
+          </a:effectRef>
+          <a:fontRef idx="minor">
+            <a:schemeClr val="tx1"/>
+          </a:fontRef>
+        </p:style>
+      </p:cxnSp>
+      <mc:AlternateContent xmlns:mc="http://schemas.openxmlformats.org/markup-compatibility/2006">
+        <mc:Choice xmlns:a14="http://schemas.microsoft.com/office/drawing/2010/main" Requires="a14">
+          <p:sp>
+            <p:nvSpPr>
+              <p:cNvPr id="28" name="TextBox 27">
+                <a:extLst>
+                  <a:ext uri="{FF2B5EF4-FFF2-40B4-BE49-F238E27FC236}">
+                    <a16:creationId xmlns:a16="http://schemas.microsoft.com/office/drawing/2014/main" id="{BC4B07E5-8CC4-EA95-8160-3D6E55A0284F}"/>
+                  </a:ext>
+                </a:extLst>
+              </p:cNvPr>
+              <p:cNvSpPr txBox="1"/>
+              <p:nvPr/>
+            </p:nvSpPr>
+            <p:spPr>
+              <a:xfrm>
+                <a:off x="8732890" y="4541699"/>
+                <a:ext cx="1706399" cy="672172"/>
+              </a:xfrm>
+              <a:prstGeom prst="rect">
+                <a:avLst/>
+              </a:prstGeom>
+              <a:noFill/>
+            </p:spPr>
+            <p:txBody>
+              <a:bodyPr wrap="square" lIns="0" tIns="0" rIns="0" bIns="0" rtlCol="0">
+                <a:spAutoFit/>
+              </a:bodyPr>
+              <a:lstStyle/>
+              <a:p>
+                <a:pPr lvl="0" latinLnBrk="1">
+                  <a:defRPr/>
+                </a:pPr>
+                <a14:m>
+                  <m:oMathPara xmlns:m="http://schemas.openxmlformats.org/officeDocument/2006/math">
+                    <m:oMathParaPr>
+                      <m:jc m:val="centerGroup"/>
+                    </m:oMathParaPr>
+                    <m:oMath xmlns:m="http://schemas.openxmlformats.org/officeDocument/2006/math">
+                      <m:r>
+                        <m:rPr>
+                          <m:sty m:val="p"/>
+                        </m:rPr>
+                        <a:rPr kumimoji="0" lang="en-US" altLang="ko-KR" sz="1600" b="0" i="1" u="none" strike="noStrike" kern="1200" cap="none" spc="0" normalizeH="0" baseline="0" noProof="0" smtClean="0">
+                          <a:ln>
+                            <a:noFill/>
+                          </a:ln>
+                          <a:solidFill>
+                            <a:prstClr val="black"/>
+                          </a:solidFill>
+                          <a:effectLst/>
+                          <a:uLnTx/>
+                          <a:uFillTx/>
+                          <a:latin typeface="Cambria Math" panose="02040503050406030204" pitchFamily="18" charset="0"/>
+                        </a:rPr>
+                        <m:t>q</m:t>
+                      </m:r>
+                      <m:r>
+                        <a:rPr kumimoji="0" lang="en-US" altLang="ko-KR" sz="1600" b="0" i="1" u="none" strike="noStrike" kern="1200" cap="none" spc="0" normalizeH="0" baseline="0" noProof="0" smtClean="0">
+                          <a:ln>
+                            <a:noFill/>
+                          </a:ln>
+                          <a:solidFill>
+                            <a:prstClr val="black"/>
+                          </a:solidFill>
+                          <a:effectLst/>
+                          <a:uLnTx/>
+                          <a:uFillTx/>
+                          <a:latin typeface="Cambria Math" panose="02040503050406030204" pitchFamily="18" charset="0"/>
+                        </a:rPr>
+                        <m:t>=</m:t>
+                      </m:r>
+                      <m:nary>
+                        <m:naryPr>
+                          <m:chr m:val="∑"/>
+                          <m:ctrlPr>
+                            <a:rPr kumimoji="0" lang="pt-BR" altLang="ko-KR" sz="1600" b="0" i="1" u="none" strike="noStrike" kern="1200" cap="none" spc="0" normalizeH="0" baseline="0" noProof="0" smtClean="0">
+                              <a:ln>
+                                <a:noFill/>
+                              </a:ln>
+                              <a:solidFill>
+                                <a:prstClr val="black"/>
+                              </a:solidFill>
+                              <a:effectLst/>
+                              <a:uLnTx/>
+                              <a:uFillTx/>
+                              <a:latin typeface="Cambria Math" panose="02040503050406030204" pitchFamily="18" charset="0"/>
+                            </a:rPr>
+                          </m:ctrlPr>
+                        </m:naryPr>
+                        <m:sub>
+                          <m:r>
+                            <m:rPr>
+                              <m:brk m:alnAt="23"/>
+                            </m:rPr>
+                            <a:rPr kumimoji="0" lang="en-US" altLang="ko-KR" sz="1600" b="0" i="1" u="none" strike="noStrike" kern="1200" cap="none" spc="0" normalizeH="0" baseline="0" noProof="0" smtClean="0">
+                              <a:ln>
+                                <a:noFill/>
+                              </a:ln>
+                              <a:solidFill>
+                                <a:prstClr val="black"/>
+                              </a:solidFill>
+                              <a:effectLst/>
+                              <a:uLnTx/>
+                              <a:uFillTx/>
+                              <a:latin typeface="Cambria Math" panose="02040503050406030204" pitchFamily="18" charset="0"/>
+                            </a:rPr>
+                            <m:t>𝑖</m:t>
+                          </m:r>
+                          <m:r>
+                            <a:rPr kumimoji="0" lang="pt-BR" altLang="ko-KR" sz="1600" b="0" i="1" u="none" strike="noStrike" kern="1200" cap="none" spc="0" normalizeH="0" baseline="0" noProof="0" smtClean="0">
+                              <a:ln>
+                                <a:noFill/>
+                              </a:ln>
+                              <a:solidFill>
+                                <a:prstClr val="black"/>
+                              </a:solidFill>
+                              <a:effectLst/>
+                              <a:uLnTx/>
+                              <a:uFillTx/>
+                              <a:latin typeface="Cambria Math" panose="02040503050406030204" pitchFamily="18" charset="0"/>
+                            </a:rPr>
+                            <m:t>=</m:t>
+                          </m:r>
+                          <m:r>
+                            <a:rPr kumimoji="0" lang="en-US" altLang="ko-KR" sz="1600" b="0" i="1" u="none" strike="noStrike" kern="1200" cap="none" spc="0" normalizeH="0" baseline="0" noProof="0" smtClean="0">
+                              <a:ln>
+                                <a:noFill/>
+                              </a:ln>
+                              <a:solidFill>
+                                <a:prstClr val="black"/>
+                              </a:solidFill>
+                              <a:effectLst/>
+                              <a:uLnTx/>
+                              <a:uFillTx/>
+                              <a:latin typeface="Cambria Math" panose="02040503050406030204" pitchFamily="18" charset="0"/>
+                            </a:rPr>
+                            <m:t>1</m:t>
+                          </m:r>
+                        </m:sub>
+                        <m:sup>
+                          <m:r>
+                            <a:rPr kumimoji="0" lang="en-US" altLang="ko-KR" sz="1600" b="0" i="1" u="none" strike="noStrike" kern="1200" cap="none" spc="0" normalizeH="0" baseline="0" noProof="0" smtClean="0">
+                              <a:ln>
+                                <a:noFill/>
+                              </a:ln>
+                              <a:solidFill>
+                                <a:prstClr val="black"/>
+                              </a:solidFill>
+                              <a:effectLst/>
+                              <a:uLnTx/>
+                              <a:uFillTx/>
+                              <a:latin typeface="Cambria Math" panose="02040503050406030204" pitchFamily="18" charset="0"/>
+                            </a:rPr>
+                            <m:t>𝑛</m:t>
+                          </m:r>
+                        </m:sup>
+                        <m:e>
+                          <m:sSub>
+                            <m:sSubPr>
+                              <m:ctrlPr>
+                                <a:rPr kumimoji="0" lang="en-US" altLang="ko-KR" sz="1600" b="0" i="1" u="none" strike="noStrike" kern="1200" cap="none" spc="0" normalizeH="0" baseline="0" noProof="0" smtClean="0">
+                                  <a:ln>
+                                    <a:noFill/>
+                                  </a:ln>
+                                  <a:solidFill>
+                                    <a:prstClr val="black"/>
+                                  </a:solidFill>
+                                  <a:effectLst/>
+                                  <a:uLnTx/>
+                                  <a:uFillTx/>
+                                  <a:latin typeface="Cambria Math" panose="02040503050406030204" pitchFamily="18" charset="0"/>
+                                </a:rPr>
+                              </m:ctrlPr>
+                            </m:sSubPr>
+                            <m:e>
+                              <m:r>
+                                <a:rPr kumimoji="0" lang="en-US" altLang="ko-KR" sz="1600" b="0" i="1" u="none" strike="noStrike" kern="1200" cap="none" spc="0" normalizeH="0" baseline="0" noProof="0" smtClean="0">
+                                  <a:ln>
+                                    <a:noFill/>
+                                  </a:ln>
+                                  <a:solidFill>
+                                    <a:prstClr val="black"/>
+                                  </a:solidFill>
+                                  <a:effectLst/>
+                                  <a:uLnTx/>
+                                  <a:uFillTx/>
+                                  <a:latin typeface="Cambria Math" panose="02040503050406030204" pitchFamily="18" charset="0"/>
+                                </a:rPr>
+                                <m:t>𝑤</m:t>
+                              </m:r>
+                            </m:e>
+                            <m:sub>
+                              <m:r>
+                                <a:rPr kumimoji="0" lang="en-US" altLang="ko-KR" sz="1600" b="0" i="1" u="none" strike="noStrike" kern="1200" cap="none" spc="0" normalizeH="0" baseline="0" noProof="0" smtClean="0">
+                                  <a:ln>
+                                    <a:noFill/>
+                                  </a:ln>
+                                  <a:solidFill>
+                                    <a:prstClr val="black"/>
+                                  </a:solidFill>
+                                  <a:effectLst/>
+                                  <a:uLnTx/>
+                                  <a:uFillTx/>
+                                  <a:latin typeface="Cambria Math" panose="02040503050406030204" pitchFamily="18" charset="0"/>
+                                </a:rPr>
+                                <m:t>𝑖</m:t>
+                              </m:r>
+                            </m:sub>
+                          </m:sSub>
+                          <m:sSub>
+                            <m:sSubPr>
+                              <m:ctrlPr>
+                                <a:rPr kumimoji="0" lang="en-US" altLang="ko-KR" sz="1600" b="0" i="1" u="none" strike="noStrike" kern="1200" cap="none" spc="0" normalizeH="0" baseline="0" noProof="0">
+                                  <a:ln>
+                                    <a:noFill/>
+                                  </a:ln>
+                                  <a:solidFill>
+                                    <a:prstClr val="black"/>
+                                  </a:solidFill>
+                                  <a:effectLst/>
+                                  <a:uLnTx/>
+                                  <a:uFillTx/>
+                                  <a:latin typeface="Cambria Math" panose="02040503050406030204" pitchFamily="18" charset="0"/>
+                                </a:rPr>
+                              </m:ctrlPr>
+                            </m:sSubPr>
+                            <m:e>
+                              <m:acc>
+                                <m:accPr>
+                                  <m:chr m:val="̂"/>
+                                  <m:ctrlPr>
+                                    <a:rPr lang="en-US" altLang="ko-KR" sz="1600" i="1">
+                                      <a:solidFill>
+                                        <a:prstClr val="black"/>
+                                      </a:solidFill>
+                                      <a:latin typeface="Cambria Math" panose="02040503050406030204" pitchFamily="18" charset="0"/>
+                                    </a:rPr>
+                                  </m:ctrlPr>
+                                </m:accPr>
+                                <m:e>
+                                  <m:r>
+                                    <a:rPr lang="en-US" altLang="ko-KR" sz="1600" i="1">
+                                      <a:solidFill>
+                                        <a:prstClr val="black"/>
+                                      </a:solidFill>
+                                      <a:latin typeface="Cambria Math" panose="02040503050406030204" pitchFamily="18" charset="0"/>
+                                    </a:rPr>
+                                    <m:t>𝑦</m:t>
+                                  </m:r>
+                                </m:e>
+                              </m:acc>
+                            </m:e>
+                            <m:sub>
+                              <m:r>
+                                <a:rPr kumimoji="0" lang="en-US" altLang="ko-KR" sz="1600" b="0" i="1" u="none" strike="noStrike" kern="1200" cap="none" spc="0" normalizeH="0" baseline="0" noProof="0" smtClean="0">
+                                  <a:ln>
+                                    <a:noFill/>
+                                  </a:ln>
+                                  <a:solidFill>
+                                    <a:prstClr val="black"/>
+                                  </a:solidFill>
+                                  <a:effectLst/>
+                                  <a:uLnTx/>
+                                  <a:uFillTx/>
+                                  <a:latin typeface="Cambria Math" panose="02040503050406030204" pitchFamily="18" charset="0"/>
+                                </a:rPr>
+                                <m:t>𝑖</m:t>
+                              </m:r>
+                            </m:sub>
+                          </m:sSub>
+                          <m:r>
+                            <a:rPr kumimoji="0" lang="en-US" altLang="ko-KR" sz="1600" b="0" i="1" u="none" strike="noStrike" kern="1200" cap="none" spc="0" normalizeH="0" baseline="0" noProof="0" smtClean="0">
+                              <a:ln>
+                                <a:noFill/>
+                              </a:ln>
+                              <a:solidFill>
+                                <a:prstClr val="black"/>
+                              </a:solidFill>
+                              <a:effectLst/>
+                              <a:uLnTx/>
+                              <a:uFillTx/>
+                              <a:latin typeface="Cambria Math" panose="02040503050406030204" pitchFamily="18" charset="0"/>
+                            </a:rPr>
+                            <m:t> + </m:t>
+                          </m:r>
+                          <m:sSub>
+                            <m:sSubPr>
+                              <m:ctrlPr>
+                                <a:rPr lang="en-US" altLang="ko-KR" sz="1600" i="1">
+                                  <a:solidFill>
+                                    <a:prstClr val="black"/>
+                                  </a:solidFill>
+                                  <a:latin typeface="Cambria Math" panose="02040503050406030204" pitchFamily="18" charset="0"/>
+                                </a:rPr>
+                              </m:ctrlPr>
+                            </m:sSubPr>
+                            <m:e>
+                              <m:r>
+                                <a:rPr lang="en-US" altLang="ko-KR" sz="1600" i="1">
+                                  <a:solidFill>
+                                    <a:prstClr val="black"/>
+                                  </a:solidFill>
+                                  <a:latin typeface="Cambria Math" panose="02040503050406030204" pitchFamily="18" charset="0"/>
+                                </a:rPr>
+                                <m:t>𝑤</m:t>
+                              </m:r>
+                            </m:e>
+                            <m:sub>
+                              <m:r>
+                                <a:rPr lang="en-US" altLang="ko-KR" sz="1600" b="0" i="1" smtClean="0">
+                                  <a:solidFill>
+                                    <a:prstClr val="black"/>
+                                  </a:solidFill>
+                                  <a:latin typeface="Cambria Math" panose="02040503050406030204" pitchFamily="18" charset="0"/>
+                                </a:rPr>
+                                <m:t>0</m:t>
+                              </m:r>
+                            </m:sub>
+                          </m:sSub>
+                        </m:e>
+                      </m:nary>
+                    </m:oMath>
+                  </m:oMathPara>
+                </a14:m>
+                <a:endParaRPr kumimoji="0" lang="ko-KR" altLang="en-US" sz="1600" b="0" i="0" u="none" strike="noStrike" kern="1200" cap="none" spc="0" normalizeH="0" baseline="0" noProof="0" dirty="0">
+                  <a:ln>
+                    <a:noFill/>
+                  </a:ln>
+                  <a:solidFill>
+                    <a:prstClr val="black"/>
+                  </a:solidFill>
+                  <a:effectLst/>
+                  <a:uLnTx/>
+                  <a:uFillTx/>
+                  <a:latin typeface="NanumGothicExtraBold" pitchFamily="2" charset="-127"/>
+                  <a:ea typeface="NanumGothicExtraBold" pitchFamily="2" charset="-127"/>
+                </a:endParaRPr>
+              </a:p>
+            </p:txBody>
+          </p:sp>
+        </mc:Choice>
+        <mc:Fallback>
+          <p:sp>
+            <p:nvSpPr>
+              <p:cNvPr id="28" name="TextBox 27">
+                <a:extLst>
+                  <a:ext uri="{FF2B5EF4-FFF2-40B4-BE49-F238E27FC236}">
+                    <a16:creationId xmlns:a16="http://schemas.microsoft.com/office/drawing/2014/main" id="{BC4B07E5-8CC4-EA95-8160-3D6E55A0284F}"/>
+                  </a:ext>
+                </a:extLst>
+              </p:cNvPr>
+              <p:cNvSpPr txBox="1">
+                <a:spLocks noRot="1" noChangeAspect="1" noMove="1" noResize="1" noEditPoints="1" noAdjustHandles="1" noChangeArrowheads="1" noChangeShapeType="1" noTextEdit="1"/>
+              </p:cNvSpPr>
+              <p:nvPr/>
+            </p:nvSpPr>
+            <p:spPr>
+              <a:xfrm>
+                <a:off x="8732890" y="4541699"/>
+                <a:ext cx="1706399" cy="672172"/>
+              </a:xfrm>
+              <a:prstGeom prst="rect">
+                <a:avLst/>
+              </a:prstGeom>
+              <a:blipFill>
+                <a:blip r:embed="rId4"/>
+                <a:stretch>
+                  <a:fillRect b="-909"/>
+                </a:stretch>
+              </a:blipFill>
+            </p:spPr>
+            <p:txBody>
+              <a:bodyPr/>
+              <a:lstStyle/>
+              <a:p>
+                <a:r>
+                  <a:rPr lang="ko-KR" altLang="en-US">
+                    <a:noFill/>
+                  </a:rPr>
+                  <a:t> </a:t>
+                </a:r>
+              </a:p>
+            </p:txBody>
+          </p:sp>
+        </mc:Fallback>
+      </mc:AlternateContent>
+      <mc:AlternateContent xmlns:mc="http://schemas.openxmlformats.org/markup-compatibility/2006">
+        <mc:Choice xmlns:a14="http://schemas.microsoft.com/office/drawing/2010/main" Requires="a14">
+          <p:sp>
+            <p:nvSpPr>
+              <p:cNvPr id="29" name="TextBox 28">
+                <a:extLst>
+                  <a:ext uri="{FF2B5EF4-FFF2-40B4-BE49-F238E27FC236}">
+                    <a16:creationId xmlns:a16="http://schemas.microsoft.com/office/drawing/2014/main" id="{4FD9ED97-B32F-292F-B4E5-3EE92C758D15}"/>
+                  </a:ext>
+                </a:extLst>
+              </p:cNvPr>
+              <p:cNvSpPr txBox="1"/>
+              <p:nvPr/>
+            </p:nvSpPr>
+            <p:spPr>
+              <a:xfrm>
+                <a:off x="10405952" y="4705877"/>
+                <a:ext cx="1282281" cy="351828"/>
+              </a:xfrm>
+              <a:prstGeom prst="rect">
+                <a:avLst/>
+              </a:prstGeom>
+              <a:noFill/>
+            </p:spPr>
+            <p:txBody>
+              <a:bodyPr wrap="square">
+                <a:spAutoFit/>
+              </a:bodyPr>
+              <a:lstStyle/>
+              <a:p>
+                <a:pPr/>
+                <a14:m>
+                  <m:oMathPara xmlns:m="http://schemas.openxmlformats.org/officeDocument/2006/math">
+                    <m:oMathParaPr>
+                      <m:jc m:val="centerGroup"/>
+                    </m:oMathParaPr>
+                    <m:oMath xmlns:m="http://schemas.openxmlformats.org/officeDocument/2006/math">
+                      <m:acc>
+                        <m:accPr>
+                          <m:chr m:val="̂"/>
+                          <m:ctrlPr>
+                            <a:rPr kumimoji="0" lang="en-US" altLang="ko-KR" sz="1600" b="0" i="1" u="none" strike="noStrike" kern="1200" cap="none" spc="0" normalizeH="0" baseline="0" noProof="0" smtClean="0">
+                              <a:ln>
+                                <a:noFill/>
+                              </a:ln>
+                              <a:solidFill>
+                                <a:prstClr val="black"/>
+                              </a:solidFill>
+                              <a:effectLst/>
+                              <a:uLnTx/>
+                              <a:uFillTx/>
+                              <a:latin typeface="Cambria Math" panose="02040503050406030204" pitchFamily="18" charset="0"/>
+                            </a:rPr>
+                          </m:ctrlPr>
+                        </m:accPr>
+                        <m:e>
+                          <m:r>
+                            <m:rPr>
+                              <m:sty m:val="p"/>
+                            </m:rPr>
+                            <a:rPr kumimoji="0" lang="en-US" altLang="ko-KR" sz="1600" b="0" i="1" u="none" strike="noStrike" kern="1200" cap="none" spc="0" normalizeH="0" baseline="0" noProof="0" smtClean="0">
+                              <a:ln>
+                                <a:noFill/>
+                              </a:ln>
+                              <a:solidFill>
+                                <a:prstClr val="black"/>
+                              </a:solidFill>
+                              <a:effectLst/>
+                              <a:uLnTx/>
+                              <a:uFillTx/>
+                              <a:latin typeface="Cambria Math" panose="02040503050406030204" pitchFamily="18" charset="0"/>
+                            </a:rPr>
+                            <m:t>k</m:t>
+                          </m:r>
+                        </m:e>
+                      </m:acc>
+                      <m:r>
+                        <a:rPr kumimoji="0" lang="en-US" altLang="ko-KR" sz="1600" b="0" i="1" u="none" strike="noStrike" kern="1200" cap="none" spc="0" normalizeH="0" baseline="0" noProof="0" smtClean="0">
+                          <a:ln>
+                            <a:noFill/>
+                          </a:ln>
+                          <a:solidFill>
+                            <a:prstClr val="black"/>
+                          </a:solidFill>
+                          <a:effectLst/>
+                          <a:uLnTx/>
+                          <a:uFillTx/>
+                          <a:latin typeface="Cambria Math" panose="02040503050406030204" pitchFamily="18" charset="0"/>
+                        </a:rPr>
+                        <m:t>=</m:t>
+                      </m:r>
+                      <m:r>
+                        <a:rPr kumimoji="0" lang="en-US" altLang="ko-KR" sz="1600" b="0" i="1" u="none" strike="noStrike" kern="1200" cap="none" spc="0" normalizeH="0" baseline="0" noProof="0" smtClean="0">
+                          <a:ln>
+                            <a:noFill/>
+                          </a:ln>
+                          <a:solidFill>
+                            <a:prstClr val="black"/>
+                          </a:solidFill>
+                          <a:effectLst/>
+                          <a:uLnTx/>
+                          <a:uFillTx/>
+                          <a:latin typeface="Cambria Math" panose="02040503050406030204" pitchFamily="18" charset="0"/>
+                        </a:rPr>
+                        <m:t>𝜎</m:t>
+                      </m:r>
+                      <m:d>
+                        <m:dPr>
+                          <m:ctrlPr>
+                            <a:rPr kumimoji="0" lang="en-US" altLang="ko-KR" sz="1600" b="0" i="1" u="none" strike="noStrike" kern="1200" cap="none" spc="0" normalizeH="0" baseline="0" noProof="0" smtClean="0">
+                              <a:ln>
+                                <a:noFill/>
+                              </a:ln>
+                              <a:solidFill>
+                                <a:prstClr val="black"/>
+                              </a:solidFill>
+                              <a:effectLst/>
+                              <a:uLnTx/>
+                              <a:uFillTx/>
+                              <a:latin typeface="Cambria Math" panose="02040503050406030204" pitchFamily="18" charset="0"/>
+                            </a:rPr>
+                          </m:ctrlPr>
+                        </m:dPr>
+                        <m:e>
+                          <m:r>
+                            <m:rPr>
+                              <m:sty m:val="p"/>
+                            </m:rPr>
+                            <a:rPr kumimoji="0" lang="en-US" altLang="ko-KR" sz="1600" b="0" i="1" u="none" strike="noStrike" kern="1200" cap="none" spc="0" normalizeH="0" baseline="0" noProof="0" smtClean="0">
+                              <a:ln>
+                                <a:noFill/>
+                              </a:ln>
+                              <a:solidFill>
+                                <a:prstClr val="black"/>
+                              </a:solidFill>
+                              <a:effectLst/>
+                              <a:uLnTx/>
+                              <a:uFillTx/>
+                              <a:latin typeface="Cambria Math" panose="02040503050406030204" pitchFamily="18" charset="0"/>
+                            </a:rPr>
+                            <m:t>q</m:t>
+                          </m:r>
+                        </m:e>
+                      </m:d>
+                    </m:oMath>
+                  </m:oMathPara>
+                </a14:m>
+                <a:endParaRPr lang="ko-KR" altLang="en-US" sz="1600" dirty="0"/>
+              </a:p>
+            </p:txBody>
+          </p:sp>
+        </mc:Choice>
+        <mc:Fallback>
+          <p:sp>
+            <p:nvSpPr>
+              <p:cNvPr id="29" name="TextBox 28">
+                <a:extLst>
+                  <a:ext uri="{FF2B5EF4-FFF2-40B4-BE49-F238E27FC236}">
+                    <a16:creationId xmlns:a16="http://schemas.microsoft.com/office/drawing/2014/main" id="{4FD9ED97-B32F-292F-B4E5-3EE92C758D15}"/>
+                  </a:ext>
+                </a:extLst>
+              </p:cNvPr>
+              <p:cNvSpPr txBox="1">
+                <a:spLocks noRot="1" noChangeAspect="1" noMove="1" noResize="1" noEditPoints="1" noAdjustHandles="1" noChangeArrowheads="1" noChangeShapeType="1" noTextEdit="1"/>
+              </p:cNvSpPr>
+              <p:nvPr/>
+            </p:nvSpPr>
+            <p:spPr>
+              <a:xfrm>
+                <a:off x="10405952" y="4705877"/>
+                <a:ext cx="1282281" cy="351828"/>
+              </a:xfrm>
+              <a:prstGeom prst="rect">
+                <a:avLst/>
+              </a:prstGeom>
+              <a:blipFill>
+                <a:blip r:embed="rId5"/>
+                <a:stretch>
+                  <a:fillRect b="-5172"/>
+                </a:stretch>
+              </a:blipFill>
+            </p:spPr>
+            <p:txBody>
+              <a:bodyPr/>
+              <a:lstStyle/>
+              <a:p>
+                <a:r>
+                  <a:rPr lang="ko-KR" altLang="en-US">
+                    <a:noFill/>
+                  </a:rPr>
+                  <a:t> </a:t>
+                </a:r>
+              </a:p>
+            </p:txBody>
+          </p:sp>
+        </mc:Fallback>
+      </mc:AlternateContent>
+      <p:sp>
+        <p:nvSpPr>
+          <p:cNvPr id="31" name="직사각형 30">
+            <a:extLst>
+              <a:ext uri="{FF2B5EF4-FFF2-40B4-BE49-F238E27FC236}">
+                <a16:creationId xmlns:a16="http://schemas.microsoft.com/office/drawing/2014/main" id="{4CE80BAE-9C39-7B5F-3033-26E33C692CBD}"/>
+              </a:ext>
+            </a:extLst>
+          </p:cNvPr>
+          <p:cNvSpPr/>
+          <p:nvPr/>
+        </p:nvSpPr>
+        <p:spPr>
+          <a:xfrm>
+            <a:off x="10514011" y="3798194"/>
+            <a:ext cx="1066164" cy="600164"/>
+          </a:xfrm>
+          <a:prstGeom prst="rect">
+            <a:avLst/>
+          </a:prstGeom>
+        </p:spPr>
+        <p:txBody>
+          <a:bodyPr wrap="square">
+            <a:spAutoFit/>
+          </a:bodyPr>
+          <a:lstStyle/>
+          <a:p>
+            <a:pPr marR="0" lvl="0" algn="ctr" defTabSz="914400" rtl="0" eaLnBrk="1" fontAlgn="base" latinLnBrk="1" hangingPunct="1">
+              <a:spcBef>
+                <a:spcPts val="0"/>
+              </a:spcBef>
+              <a:spcAft>
+                <a:spcPts val="0"/>
+              </a:spcAft>
+              <a:buClrTx/>
+              <a:buSzTx/>
+              <a:tabLst/>
+              <a:defRPr/>
+            </a:pPr>
+            <a:r>
+              <a:rPr lang="en-US" altLang="ko-KR" sz="1100" dirty="0">
+                <a:solidFill>
+                  <a:prstClr val="black"/>
+                </a:solidFill>
+                <a:latin typeface="ADLaM Display" panose="02010000000000000000" pitchFamily="2" charset="0"/>
+                <a:ea typeface="ADLaM Display" panose="02010000000000000000" pitchFamily="2" charset="0"/>
+                <a:cs typeface="ADLaM Display" panose="02010000000000000000" pitchFamily="2" charset="0"/>
+              </a:rPr>
+              <a:t>Activation function</a:t>
+            </a:r>
+          </a:p>
+          <a:p>
+            <a:pPr marR="0" lvl="0" algn="ctr" defTabSz="914400" rtl="0" eaLnBrk="1" fontAlgn="base" latinLnBrk="1" hangingPunct="1">
+              <a:spcBef>
+                <a:spcPts val="0"/>
+              </a:spcBef>
+              <a:spcAft>
+                <a:spcPts val="0"/>
+              </a:spcAft>
+              <a:buClrTx/>
+              <a:buSzTx/>
+              <a:tabLst/>
+              <a:defRPr/>
+            </a:pPr>
+            <a:r>
+              <a:rPr lang="en-US" altLang="ko-KR" sz="1100" dirty="0">
+                <a:solidFill>
+                  <a:prstClr val="black"/>
+                </a:solidFill>
+                <a:latin typeface="ADLaM Display" panose="02010000000000000000" pitchFamily="2" charset="0"/>
+                <a:ea typeface="ADLaM Display" panose="02010000000000000000" pitchFamily="2" charset="0"/>
+                <a:cs typeface="ADLaM Display" panose="02010000000000000000" pitchFamily="2" charset="0"/>
+              </a:rPr>
+              <a:t>(</a:t>
+            </a:r>
+            <a:r>
+              <a:rPr lang="en-US" altLang="ko-KR" sz="1100" dirty="0" err="1">
+                <a:solidFill>
+                  <a:prstClr val="black"/>
+                </a:solidFill>
+                <a:latin typeface="ADLaM Display" panose="02010000000000000000" pitchFamily="2" charset="0"/>
+                <a:ea typeface="ADLaM Display" panose="02010000000000000000" pitchFamily="2" charset="0"/>
+                <a:cs typeface="ADLaM Display" panose="02010000000000000000" pitchFamily="2" charset="0"/>
+              </a:rPr>
+              <a:t>Softmax</a:t>
+            </a:r>
+            <a:r>
+              <a:rPr lang="en-US" altLang="ko-KR" sz="1100" dirty="0">
+                <a:solidFill>
+                  <a:prstClr val="black"/>
+                </a:solidFill>
+                <a:latin typeface="ADLaM Display" panose="02010000000000000000" pitchFamily="2" charset="0"/>
+                <a:ea typeface="ADLaM Display" panose="02010000000000000000" pitchFamily="2" charset="0"/>
+                <a:cs typeface="ADLaM Display" panose="02010000000000000000" pitchFamily="2" charset="0"/>
+              </a:rPr>
+              <a:t>)</a:t>
+            </a:r>
+          </a:p>
+        </p:txBody>
+      </p:sp>
+      <p:sp>
+        <p:nvSpPr>
+          <p:cNvPr id="32" name="직사각형 31">
+            <a:extLst>
+              <a:ext uri="{FF2B5EF4-FFF2-40B4-BE49-F238E27FC236}">
+                <a16:creationId xmlns:a16="http://schemas.microsoft.com/office/drawing/2014/main" id="{F1ACFA93-7D03-94BB-EA1D-FCE12074FF17}"/>
+              </a:ext>
+            </a:extLst>
+          </p:cNvPr>
+          <p:cNvSpPr/>
+          <p:nvPr/>
+        </p:nvSpPr>
+        <p:spPr>
+          <a:xfrm>
+            <a:off x="9624469" y="3803293"/>
+            <a:ext cx="953135" cy="430887"/>
+          </a:xfrm>
+          <a:prstGeom prst="rect">
+            <a:avLst/>
+          </a:prstGeom>
+        </p:spPr>
+        <p:txBody>
+          <a:bodyPr wrap="square">
+            <a:spAutoFit/>
+          </a:bodyPr>
+          <a:lstStyle/>
+          <a:p>
+            <a:pPr marR="0" lvl="0" algn="ctr" defTabSz="914400" rtl="0" eaLnBrk="1" fontAlgn="base" latinLnBrk="1" hangingPunct="1">
+              <a:spcBef>
+                <a:spcPts val="0"/>
+              </a:spcBef>
+              <a:spcAft>
+                <a:spcPts val="0"/>
+              </a:spcAft>
+              <a:buClrTx/>
+              <a:buSzTx/>
+              <a:tabLst/>
+              <a:defRPr/>
+            </a:pPr>
+            <a:r>
+              <a:rPr lang="en-US" altLang="ko-KR" sz="1100" dirty="0">
+                <a:solidFill>
+                  <a:prstClr val="black"/>
+                </a:solidFill>
+                <a:latin typeface="ADLaM Display" panose="02010000000000000000" pitchFamily="2" charset="0"/>
+                <a:ea typeface="ADLaM Display" panose="02010000000000000000" pitchFamily="2" charset="0"/>
+                <a:cs typeface="ADLaM Display" panose="02010000000000000000" pitchFamily="2" charset="0"/>
+              </a:rPr>
+              <a:t>Weighted Sum</a:t>
+            </a:r>
+          </a:p>
+        </p:txBody>
+      </p:sp>
+      <p:cxnSp>
+        <p:nvCxnSpPr>
+          <p:cNvPr id="38" name="연결선: 구부러짐 37">
+            <a:extLst>
+              <a:ext uri="{FF2B5EF4-FFF2-40B4-BE49-F238E27FC236}">
+                <a16:creationId xmlns:a16="http://schemas.microsoft.com/office/drawing/2014/main" id="{73F3AF5A-F092-B3AE-4DF9-CC3B8DF654BE}"/>
+              </a:ext>
+            </a:extLst>
+          </p:cNvPr>
+          <p:cNvCxnSpPr>
+            <a:cxnSpLocks/>
+            <a:stCxn id="12" idx="6"/>
+            <a:endCxn id="8" idx="1"/>
+          </p:cNvCxnSpPr>
+          <p:nvPr/>
+        </p:nvCxnSpPr>
+        <p:spPr>
+          <a:xfrm>
+            <a:off x="4613910" y="2435860"/>
+            <a:ext cx="962776" cy="1593913"/>
+          </a:xfrm>
+          <a:prstGeom prst="curvedConnector3">
+            <a:avLst>
+              <a:gd name="adj1" fmla="val 50000"/>
+            </a:avLst>
+          </a:prstGeom>
+          <a:ln>
+            <a:tailEnd type="triangle"/>
+          </a:ln>
+        </p:spPr>
+        <p:style>
+          <a:lnRef idx="1">
+            <a:schemeClr val="dk1"/>
+          </a:lnRef>
+          <a:fillRef idx="0">
+            <a:schemeClr val="dk1"/>
+          </a:fillRef>
+          <a:effectRef idx="0">
+            <a:schemeClr val="dk1"/>
+          </a:effectRef>
+          <a:fontRef idx="minor">
+            <a:schemeClr val="tx1"/>
+          </a:fontRef>
+        </p:style>
+      </p:cxnSp>
+      <p:cxnSp>
+        <p:nvCxnSpPr>
+          <p:cNvPr id="42" name="연결선: 구부러짐 41">
+            <a:extLst>
+              <a:ext uri="{FF2B5EF4-FFF2-40B4-BE49-F238E27FC236}">
+                <a16:creationId xmlns:a16="http://schemas.microsoft.com/office/drawing/2014/main" id="{A606EA95-A2E8-B736-2FDB-ECA9A6474740}"/>
+              </a:ext>
+            </a:extLst>
+          </p:cNvPr>
+          <p:cNvCxnSpPr>
+            <a:cxnSpLocks/>
+            <a:stCxn id="21" idx="6"/>
+            <a:endCxn id="32" idx="0"/>
+          </p:cNvCxnSpPr>
+          <p:nvPr/>
+        </p:nvCxnSpPr>
+        <p:spPr>
+          <a:xfrm>
+            <a:off x="9225280" y="2379515"/>
+            <a:ext cx="875757" cy="1423778"/>
+          </a:xfrm>
+          <a:prstGeom prst="curvedConnector2">
+            <a:avLst/>
+          </a:prstGeom>
+          <a:ln>
+            <a:tailEnd type="triangle"/>
+          </a:ln>
+        </p:spPr>
+        <p:style>
+          <a:lnRef idx="1">
+            <a:schemeClr val="dk1"/>
+          </a:lnRef>
+          <a:fillRef idx="0">
+            <a:schemeClr val="dk1"/>
+          </a:fillRef>
+          <a:effectRef idx="0">
+            <a:schemeClr val="dk1"/>
+          </a:effectRef>
+          <a:fontRef idx="minor">
+            <a:schemeClr val="tx1"/>
+          </a:fontRef>
+        </p:style>
+      </p:cxnSp>
+      <p:sp>
+        <p:nvSpPr>
+          <p:cNvPr id="43" name="타원 42">
+            <a:extLst>
+              <a:ext uri="{FF2B5EF4-FFF2-40B4-BE49-F238E27FC236}">
+                <a16:creationId xmlns:a16="http://schemas.microsoft.com/office/drawing/2014/main" id="{0CAD048B-7251-1962-DB76-8BEBA1153903}"/>
+              </a:ext>
+            </a:extLst>
+          </p:cNvPr>
+          <p:cNvSpPr/>
+          <p:nvPr/>
+        </p:nvSpPr>
+        <p:spPr>
+          <a:xfrm>
+            <a:off x="1402753" y="4245216"/>
+            <a:ext cx="198120" cy="198120"/>
+          </a:xfrm>
+          <a:prstGeom prst="ellipse">
+            <a:avLst/>
+          </a:prstGeom>
+          <a:solidFill>
+            <a:schemeClr val="tx1"/>
+          </a:solidFill>
+        </p:spPr>
+        <p:style>
+          <a:lnRef idx="2">
+            <a:schemeClr val="accent1">
+              <a:shade val="15000"/>
+            </a:schemeClr>
+          </a:lnRef>
+          <a:fillRef idx="1">
+            <a:schemeClr val="accent1"/>
+          </a:fillRef>
+          <a:effectRef idx="0">
+            <a:schemeClr val="accent1"/>
+          </a:effectRef>
+          <a:fontRef idx="minor">
+            <a:schemeClr val="lt1"/>
+          </a:fontRef>
+        </p:style>
+        <p:txBody>
+          <a:bodyPr rtlCol="0" anchor="ctr"/>
+          <a:lstStyle/>
+          <a:p>
+            <a:pPr algn="ctr"/>
+            <a:endParaRPr lang="ko-KR" altLang="en-US"/>
           </a:p>
         </p:txBody>
       </p:sp>
     </p:spTree>
     <p:extLst>
       <p:ext uri="{BB962C8B-B14F-4D97-AF65-F5344CB8AC3E}">
-        <p14:creationId xmlns:p14="http://schemas.microsoft.com/office/powerpoint/2010/main" val="2764261165"/>
+        <p14:creationId xmlns:p14="http://schemas.microsoft.com/office/powerpoint/2010/main" val="3286098695"/>
       </p:ext>
     </p:extLst>
   </p:cSld>
   <p:clrMapOvr>
     <a:masterClrMapping/>
   </p:clrMapOvr>
+  <p:timing>
+    <p:tnLst>
+      <p:par>
+        <p:cTn id="1" dur="indefinite" restart="never" nodeType="tmRoot">
+          <p:childTnLst>
+            <p:seq concurrent="1" nextAc="seek">
+              <p:cTn id="2" dur="indefinite" nodeType="mainSeq">
+                <p:childTnLst>
+                  <p:par>
+                    <p:cTn id="3" fill="hold">
+                      <p:stCondLst>
+                        <p:cond delay="indefinite"/>
+                        <p:cond evt="onBegin" delay="0">
+                          <p:tn val="2"/>
+                        </p:cond>
+                      </p:stCondLst>
+                      <p:childTnLst>
+                        <p:par>
+                          <p:cTn id="4" fill="hold">
+                            <p:stCondLst>
+                              <p:cond delay="0"/>
+                            </p:stCondLst>
+                            <p:childTnLst>
+                              <p:par>
+                                <p:cTn id="5" presetID="1" presetClass="entr" presetSubtype="0" fill="hold" grpId="0" nodeType="withEffect">
+                                  <p:stCondLst>
+                                    <p:cond delay="0"/>
+                                  </p:stCondLst>
+                                  <p:childTnLst>
+                                    <p:set>
+                                      <p:cBhvr>
+                                        <p:cTn id="6" dur="1" fill="hold">
+                                          <p:stCondLst>
+                                            <p:cond delay="0"/>
+                                          </p:stCondLst>
+                                        </p:cTn>
+                                        <p:tgtEl>
+                                          <p:spTgt spid="26"/>
+                                        </p:tgtEl>
+                                        <p:attrNameLst>
+                                          <p:attrName>style.visibility</p:attrName>
+                                        </p:attrNameLst>
+                                      </p:cBhvr>
+                                      <p:to>
+                                        <p:strVal val="visible"/>
+                                      </p:to>
+                                    </p:set>
+                                  </p:childTnLst>
+                                </p:cTn>
+                              </p:par>
+                              <p:par>
+                                <p:cTn id="7" presetID="1" presetClass="entr" presetSubtype="0" fill="hold" grpId="0" nodeType="withEffect">
+                                  <p:stCondLst>
+                                    <p:cond delay="0"/>
+                                  </p:stCondLst>
+                                  <p:childTnLst>
+                                    <p:set>
+                                      <p:cBhvr>
+                                        <p:cTn id="8" dur="1" fill="hold">
+                                          <p:stCondLst>
+                                            <p:cond delay="0"/>
+                                          </p:stCondLst>
+                                        </p:cTn>
+                                        <p:tgtEl>
+                                          <p:spTgt spid="28"/>
+                                        </p:tgtEl>
+                                        <p:attrNameLst>
+                                          <p:attrName>style.visibility</p:attrName>
+                                        </p:attrNameLst>
+                                      </p:cBhvr>
+                                      <p:to>
+                                        <p:strVal val="visible"/>
+                                      </p:to>
+                                    </p:set>
+                                  </p:childTnLst>
+                                </p:cTn>
+                              </p:par>
+                            </p:childTnLst>
+                          </p:cTn>
+                        </p:par>
+                      </p:childTnLst>
+                    </p:cTn>
+                  </p:par>
+                </p:childTnLst>
+              </p:cTn>
+              <p:prevCondLst>
+                <p:cond evt="onPrev" delay="0">
+                  <p:tgtEl>
+                    <p:sldTgt/>
+                  </p:tgtEl>
+                </p:cond>
+              </p:prevCondLst>
+              <p:nextCondLst>
+                <p:cond evt="onNext" delay="0">
+                  <p:tgtEl>
+                    <p:sldTgt/>
+                  </p:tgtEl>
+                </p:cond>
+              </p:nextCondLst>
+            </p:seq>
+          </p:childTnLst>
+        </p:cTn>
+      </p:par>
+    </p:tnLst>
+    <p:bldLst>
+      <p:bldP spid="26" grpId="0"/>
+      <p:bldP spid="28" grpId="0"/>
+    </p:bldLst>
+  </p:timing>
 </p:sld>
 </file>
 

--- a/Chapter 07 A deep dive on Keras.pptx
+++ b/Chapter 07 A deep dive on Keras.pptx
@@ -5,19 +5,23 @@
     <p:sldMasterId id="2147483660" r:id="rId1"/>
   </p:sldMasterIdLst>
   <p:notesMasterIdLst>
-    <p:notesMasterId r:id="rId9"/>
+    <p:notesMasterId r:id="rId13"/>
   </p:notesMasterIdLst>
   <p:handoutMasterIdLst>
-    <p:handoutMasterId r:id="rId10"/>
+    <p:handoutMasterId r:id="rId14"/>
   </p:handoutMasterIdLst>
   <p:sldIdLst>
     <p:sldId id="256" r:id="rId2"/>
     <p:sldId id="1135" r:id="rId3"/>
     <p:sldId id="1142" r:id="rId4"/>
     <p:sldId id="1144" r:id="rId5"/>
-    <p:sldId id="1147" r:id="rId6"/>
-    <p:sldId id="1150" r:id="rId7"/>
-    <p:sldId id="1148" r:id="rId8"/>
+    <p:sldId id="1150" r:id="rId6"/>
+    <p:sldId id="1152" r:id="rId7"/>
+    <p:sldId id="1151" r:id="rId8"/>
+    <p:sldId id="1147" r:id="rId9"/>
+    <p:sldId id="1153" r:id="rId10"/>
+    <p:sldId id="1148" r:id="rId11"/>
+    <p:sldId id="1154" r:id="rId12"/>
   </p:sldIdLst>
   <p:sldSz cx="12192000" cy="6858000"/>
   <p:notesSz cx="6858000" cy="9144000"/>
@@ -129,9 +133,13 @@
             <p14:sldId id="1135"/>
             <p14:sldId id="1142"/>
             <p14:sldId id="1144"/>
+            <p14:sldId id="1150"/>
+            <p14:sldId id="1152"/>
+            <p14:sldId id="1151"/>
             <p14:sldId id="1147"/>
-            <p14:sldId id="1150"/>
+            <p14:sldId id="1153"/>
             <p14:sldId id="1148"/>
+            <p14:sldId id="1154"/>
           </p14:sldIdLst>
         </p14:section>
         <p14:section name="자세한 정보" id="{2CC34DB2-6590-42C0-AD4B-A04C6060184E}">
@@ -3027,6 +3035,1299 @@
 </p:sld>
 </file>
 
+<file path=ppt/slides/slide10.xml><?xml version="1.0" encoding="utf-8"?>
+<p:sld xmlns:a="http://schemas.openxmlformats.org/drawingml/2006/main" xmlns:r="http://schemas.openxmlformats.org/officeDocument/2006/relationships" xmlns:p="http://schemas.openxmlformats.org/presentationml/2006/main">
+  <p:cSld>
+    <p:spTree>
+      <p:nvGrpSpPr>
+        <p:cNvPr id="1" name="">
+          <a:extLst>
+            <a:ext uri="{FF2B5EF4-FFF2-40B4-BE49-F238E27FC236}">
+              <a16:creationId xmlns:a16="http://schemas.microsoft.com/office/drawing/2014/main" id="{99409AF4-13C2-BB8C-7BFC-6CD15F491502}"/>
+            </a:ext>
+          </a:extLst>
+        </p:cNvPr>
+        <p:cNvGrpSpPr/>
+        <p:nvPr/>
+      </p:nvGrpSpPr>
+      <p:grpSpPr>
+        <a:xfrm>
+          <a:off x="0" y="0"/>
+          <a:ext cx="0" cy="0"/>
+          <a:chOff x="0" y="0"/>
+          <a:chExt cx="0" cy="0"/>
+        </a:xfrm>
+      </p:grpSpPr>
+      <p:sp>
+        <p:nvSpPr>
+          <p:cNvPr id="4" name="슬라이드 번호 개체 틀 3">
+            <a:extLst>
+              <a:ext uri="{FF2B5EF4-FFF2-40B4-BE49-F238E27FC236}">
+                <a16:creationId xmlns:a16="http://schemas.microsoft.com/office/drawing/2014/main" id="{72D42AF9-ED60-E6F6-D796-22E5E2FB0BCE}"/>
+              </a:ext>
+            </a:extLst>
+          </p:cNvPr>
+          <p:cNvSpPr>
+            <a:spLocks noGrp="1"/>
+          </p:cNvSpPr>
+          <p:nvPr>
+            <p:ph type="sldNum" sz="quarter" idx="12"/>
+          </p:nvPr>
+        </p:nvSpPr>
+        <p:spPr>
+          <a:xfrm>
+            <a:off x="10514011" y="6036261"/>
+            <a:ext cx="753545" cy="365125"/>
+          </a:xfrm>
+        </p:spPr>
+        <p:txBody>
+          <a:bodyPr/>
+          <a:lstStyle/>
+          <a:p>
+            <a:fld id="{D57F1E4F-1CFF-5643-939E-217C01CDF565}" type="slidenum">
+              <a:rPr lang="en-US" smtClean="0"/>
+              <a:pPr/>
+              <a:t>10</a:t>
+            </a:fld>
+            <a:endParaRPr lang="en-US" dirty="0"/>
+          </a:p>
+        </p:txBody>
+      </p:sp>
+      <p:sp>
+        <p:nvSpPr>
+          <p:cNvPr id="3" name="제목 1">
+            <a:extLst>
+              <a:ext uri="{FF2B5EF4-FFF2-40B4-BE49-F238E27FC236}">
+                <a16:creationId xmlns:a16="http://schemas.microsoft.com/office/drawing/2014/main" id="{99A1ECBA-5803-6C29-0C46-8A7E5A8D3E81}"/>
+              </a:ext>
+            </a:extLst>
+          </p:cNvPr>
+          <p:cNvSpPr txBox="1">
+            <a:spLocks/>
+          </p:cNvSpPr>
+          <p:nvPr/>
+        </p:nvSpPr>
+        <p:spPr>
+          <a:xfrm>
+            <a:off x="475645" y="481983"/>
+            <a:ext cx="10353762" cy="766439"/>
+          </a:xfrm>
+          <a:prstGeom prst="rect">
+            <a:avLst/>
+          </a:prstGeom>
+        </p:spPr>
+        <p:txBody>
+          <a:bodyPr vert="horz" lIns="91440" tIns="45720" rIns="91440" bIns="45720" rtlCol="0" anchor="ctr">
+            <a:normAutofit/>
+          </a:bodyPr>
+          <a:lstStyle>
+            <a:lvl1pPr algn="ctr" defTabSz="914400" rtl="0" eaLnBrk="1" latinLnBrk="1" hangingPunct="1">
+              <a:lnSpc>
+                <a:spcPct val="90000"/>
+              </a:lnSpc>
+              <a:spcBef>
+                <a:spcPct val="0"/>
+              </a:spcBef>
+              <a:buNone/>
+              <a:defRPr sz="3200" kern="1200" cap="all" baseline="0">
+                <a:solidFill>
+                  <a:schemeClr val="tx1"/>
+                </a:solidFill>
+                <a:effectLst/>
+                <a:latin typeface="Batang" panose="02030600000101010101" pitchFamily="18" charset="-127"/>
+                <a:ea typeface="Batang" panose="02030600000101010101" pitchFamily="18" charset="-127"/>
+                <a:cs typeface="+mj-cs"/>
+              </a:defRPr>
+            </a:lvl1pPr>
+          </a:lstStyle>
+          <a:p>
+            <a:pPr algn="l"/>
+            <a:r>
+              <a:rPr lang="en-US" altLang="ko-KR" sz="2800" b="1" cap="none" dirty="0">
+                <a:latin typeface="Lora" pitchFamily="2" charset="0"/>
+              </a:rPr>
+              <a:t>Subclassing the Model class</a:t>
+            </a:r>
+          </a:p>
+        </p:txBody>
+      </p:sp>
+      <p:pic>
+        <p:nvPicPr>
+          <p:cNvPr id="2050" name="Picture 2">
+            <a:extLst>
+              <a:ext uri="{FF2B5EF4-FFF2-40B4-BE49-F238E27FC236}">
+                <a16:creationId xmlns:a16="http://schemas.microsoft.com/office/drawing/2014/main" id="{292FAC77-18C0-9431-C235-BC9955FABCB9}"/>
+              </a:ext>
+            </a:extLst>
+          </p:cNvPr>
+          <p:cNvPicPr>
+            <a:picLocks noChangeAspect="1" noChangeArrowheads="1"/>
+          </p:cNvPicPr>
+          <p:nvPr/>
+        </p:nvPicPr>
+        <p:blipFill>
+          <a:blip r:embed="rId2">
+            <a:extLst>
+              <a:ext uri="{28A0092B-C50C-407E-A947-70E740481C1C}">
+                <a14:useLocalDpi xmlns:a14="http://schemas.microsoft.com/office/drawing/2010/main" val="0"/>
+              </a:ext>
+            </a:extLst>
+          </a:blip>
+          <a:srcRect/>
+          <a:stretch>
+            <a:fillRect/>
+          </a:stretch>
+        </p:blipFill>
+        <p:spPr bwMode="auto">
+          <a:xfrm>
+            <a:off x="7216016" y="1502952"/>
+            <a:ext cx="4661263" cy="4310994"/>
+          </a:xfrm>
+          <a:prstGeom prst="rect">
+            <a:avLst/>
+          </a:prstGeom>
+          <a:noFill/>
+          <a:extLst>
+            <a:ext uri="{909E8E84-426E-40DD-AFC4-6F175D3DCCD1}">
+              <a14:hiddenFill xmlns:a14="http://schemas.microsoft.com/office/drawing/2010/main">
+                <a:solidFill>
+                  <a:srgbClr val="FFFFFF"/>
+                </a:solidFill>
+              </a14:hiddenFill>
+            </a:ext>
+          </a:extLst>
+        </p:spPr>
+      </p:pic>
+      <p:sp>
+        <p:nvSpPr>
+          <p:cNvPr id="5" name="TextBox 4">
+            <a:extLst>
+              <a:ext uri="{FF2B5EF4-FFF2-40B4-BE49-F238E27FC236}">
+                <a16:creationId xmlns:a16="http://schemas.microsoft.com/office/drawing/2014/main" id="{A5731A8E-5190-C071-A6BC-CC43A33B7831}"/>
+              </a:ext>
+            </a:extLst>
+          </p:cNvPr>
+          <p:cNvSpPr txBox="1"/>
+          <p:nvPr/>
+        </p:nvSpPr>
+        <p:spPr>
+          <a:xfrm>
+            <a:off x="609996" y="1468083"/>
+            <a:ext cx="6524229" cy="4606389"/>
+          </a:xfrm>
+          <a:prstGeom prst="rect">
+            <a:avLst/>
+          </a:prstGeom>
+          <a:solidFill>
+            <a:srgbClr val="76E3FF"/>
+          </a:solidFill>
+        </p:spPr>
+        <p:txBody>
+          <a:bodyPr wrap="square">
+            <a:spAutoFit/>
+          </a:bodyPr>
+          <a:lstStyle/>
+          <a:p>
+            <a:pPr>
+              <a:lnSpc>
+                <a:spcPts val="1575"/>
+              </a:lnSpc>
+              <a:buNone/>
+            </a:pPr>
+            <a:r>
+              <a:rPr lang="en-US" altLang="ko-KR" sz="1400" b="0" dirty="0">
+                <a:effectLst/>
+                <a:latin typeface="D2Coding" panose="020B0609020101020101" pitchFamily="49" charset="-127"/>
+                <a:ea typeface="D2Coding" panose="020B0609020101020101" pitchFamily="49" charset="-127"/>
+              </a:rPr>
+              <a:t>class </a:t>
+            </a:r>
+            <a:r>
+              <a:rPr lang="en-US" altLang="ko-KR" sz="1400" b="0" dirty="0" err="1">
+                <a:effectLst/>
+                <a:latin typeface="D2Coding" panose="020B0609020101020101" pitchFamily="49" charset="-127"/>
+                <a:ea typeface="D2Coding" panose="020B0609020101020101" pitchFamily="49" charset="-127"/>
+              </a:rPr>
+              <a:t>CustomerTicketModel</a:t>
+            </a:r>
+            <a:r>
+              <a:rPr lang="en-US" altLang="ko-KR" sz="1400" b="0" dirty="0">
+                <a:effectLst/>
+                <a:latin typeface="D2Coding" panose="020B0609020101020101" pitchFamily="49" charset="-127"/>
+                <a:ea typeface="D2Coding" panose="020B0609020101020101" pitchFamily="49" charset="-127"/>
+              </a:rPr>
+              <a:t>(</a:t>
+            </a:r>
+            <a:r>
+              <a:rPr lang="en-US" altLang="ko-KR" sz="1400" b="0" dirty="0" err="1">
+                <a:effectLst/>
+                <a:latin typeface="D2Coding" panose="020B0609020101020101" pitchFamily="49" charset="-127"/>
+                <a:ea typeface="D2Coding" panose="020B0609020101020101" pitchFamily="49" charset="-127"/>
+              </a:rPr>
+              <a:t>keras.Model</a:t>
+            </a:r>
+            <a:r>
+              <a:rPr lang="en-US" altLang="ko-KR" sz="1400" b="0" dirty="0">
+                <a:effectLst/>
+                <a:latin typeface="D2Coding" panose="020B0609020101020101" pitchFamily="49" charset="-127"/>
+                <a:ea typeface="D2Coding" panose="020B0609020101020101" pitchFamily="49" charset="-127"/>
+              </a:rPr>
+              <a:t>):</a:t>
+            </a:r>
+          </a:p>
+          <a:p>
+            <a:pPr>
+              <a:lnSpc>
+                <a:spcPts val="1575"/>
+              </a:lnSpc>
+              <a:buNone/>
+            </a:pPr>
+            <a:r>
+              <a:rPr lang="en-US" altLang="ko-KR" sz="1400" b="0" dirty="0">
+                <a:effectLst/>
+                <a:latin typeface="D2Coding" panose="020B0609020101020101" pitchFamily="49" charset="-127"/>
+                <a:ea typeface="D2Coding" panose="020B0609020101020101" pitchFamily="49" charset="-127"/>
+              </a:rPr>
+              <a:t>    def __</a:t>
+            </a:r>
+            <a:r>
+              <a:rPr lang="en-US" altLang="ko-KR" sz="1400" b="0" dirty="0" err="1">
+                <a:effectLst/>
+                <a:latin typeface="D2Coding" panose="020B0609020101020101" pitchFamily="49" charset="-127"/>
+                <a:ea typeface="D2Coding" panose="020B0609020101020101" pitchFamily="49" charset="-127"/>
+              </a:rPr>
+              <a:t>init</a:t>
+            </a:r>
+            <a:r>
+              <a:rPr lang="en-US" altLang="ko-KR" sz="1400" b="0" dirty="0">
+                <a:effectLst/>
+                <a:latin typeface="D2Coding" panose="020B0609020101020101" pitchFamily="49" charset="-127"/>
+                <a:ea typeface="D2Coding" panose="020B0609020101020101" pitchFamily="49" charset="-127"/>
+              </a:rPr>
+              <a:t>__(self, </a:t>
+            </a:r>
+            <a:r>
+              <a:rPr lang="en-US" altLang="ko-KR" sz="1400" b="0" dirty="0" err="1">
+                <a:effectLst/>
+                <a:latin typeface="D2Coding" panose="020B0609020101020101" pitchFamily="49" charset="-127"/>
+                <a:ea typeface="D2Coding" panose="020B0609020101020101" pitchFamily="49" charset="-127"/>
+              </a:rPr>
+              <a:t>num_departments</a:t>
+            </a:r>
+            <a:r>
+              <a:rPr lang="en-US" altLang="ko-KR" sz="1400" b="0" dirty="0">
+                <a:effectLst/>
+                <a:latin typeface="D2Coding" panose="020B0609020101020101" pitchFamily="49" charset="-127"/>
+                <a:ea typeface="D2Coding" panose="020B0609020101020101" pitchFamily="49" charset="-127"/>
+              </a:rPr>
+              <a:t>):</a:t>
+            </a:r>
+          </a:p>
+          <a:p>
+            <a:pPr>
+              <a:lnSpc>
+                <a:spcPts val="1575"/>
+              </a:lnSpc>
+              <a:buNone/>
+            </a:pPr>
+            <a:r>
+              <a:rPr lang="en-US" altLang="ko-KR" sz="1400" b="0" dirty="0">
+                <a:effectLst/>
+                <a:latin typeface="D2Coding" panose="020B0609020101020101" pitchFamily="49" charset="-127"/>
+                <a:ea typeface="D2Coding" panose="020B0609020101020101" pitchFamily="49" charset="-127"/>
+              </a:rPr>
+              <a:t>        super().__</a:t>
+            </a:r>
+            <a:r>
+              <a:rPr lang="en-US" altLang="ko-KR" sz="1400" b="0" dirty="0" err="1">
+                <a:effectLst/>
+                <a:latin typeface="D2Coding" panose="020B0609020101020101" pitchFamily="49" charset="-127"/>
+                <a:ea typeface="D2Coding" panose="020B0609020101020101" pitchFamily="49" charset="-127"/>
+              </a:rPr>
+              <a:t>init</a:t>
+            </a:r>
+            <a:r>
+              <a:rPr lang="en-US" altLang="ko-KR" sz="1400" b="0" dirty="0">
+                <a:effectLst/>
+                <a:latin typeface="D2Coding" panose="020B0609020101020101" pitchFamily="49" charset="-127"/>
+                <a:ea typeface="D2Coding" panose="020B0609020101020101" pitchFamily="49" charset="-127"/>
+              </a:rPr>
+              <a:t>__()</a:t>
+            </a:r>
+          </a:p>
+          <a:p>
+            <a:pPr>
+              <a:lnSpc>
+                <a:spcPts val="1575"/>
+              </a:lnSpc>
+              <a:buNone/>
+            </a:pPr>
+            <a:r>
+              <a:rPr lang="en-US" altLang="ko-KR" sz="1400" b="0" dirty="0">
+                <a:effectLst/>
+                <a:latin typeface="D2Coding" panose="020B0609020101020101" pitchFamily="49" charset="-127"/>
+                <a:ea typeface="D2Coding" panose="020B0609020101020101" pitchFamily="49" charset="-127"/>
+              </a:rPr>
+              <a:t>        </a:t>
+            </a:r>
+            <a:r>
+              <a:rPr lang="en-US" altLang="ko-KR" sz="1400" b="0" dirty="0" err="1">
+                <a:effectLst/>
+                <a:latin typeface="D2Coding" panose="020B0609020101020101" pitchFamily="49" charset="-127"/>
+                <a:ea typeface="D2Coding" panose="020B0609020101020101" pitchFamily="49" charset="-127"/>
+              </a:rPr>
+              <a:t>self.concat_layer</a:t>
+            </a:r>
+            <a:r>
+              <a:rPr lang="en-US" altLang="ko-KR" sz="1400" b="0" dirty="0">
+                <a:effectLst/>
+                <a:latin typeface="D2Coding" panose="020B0609020101020101" pitchFamily="49" charset="-127"/>
+                <a:ea typeface="D2Coding" panose="020B0609020101020101" pitchFamily="49" charset="-127"/>
+              </a:rPr>
+              <a:t> = </a:t>
+            </a:r>
+            <a:r>
+              <a:rPr lang="en-US" altLang="ko-KR" sz="1400" b="0" dirty="0" err="1">
+                <a:effectLst/>
+                <a:latin typeface="D2Coding" panose="020B0609020101020101" pitchFamily="49" charset="-127"/>
+                <a:ea typeface="D2Coding" panose="020B0609020101020101" pitchFamily="49" charset="-127"/>
+              </a:rPr>
+              <a:t>layers.Concatenate</a:t>
+            </a:r>
+            <a:r>
+              <a:rPr lang="en-US" altLang="ko-KR" sz="1400" b="0" dirty="0">
+                <a:effectLst/>
+                <a:latin typeface="D2Coding" panose="020B0609020101020101" pitchFamily="49" charset="-127"/>
+                <a:ea typeface="D2Coding" panose="020B0609020101020101" pitchFamily="49" charset="-127"/>
+              </a:rPr>
+              <a:t>()</a:t>
+            </a:r>
+          </a:p>
+          <a:p>
+            <a:pPr>
+              <a:lnSpc>
+                <a:spcPts val="1575"/>
+              </a:lnSpc>
+              <a:buNone/>
+            </a:pPr>
+            <a:r>
+              <a:rPr lang="en-US" altLang="ko-KR" sz="1400" b="0" dirty="0">
+                <a:effectLst/>
+                <a:latin typeface="D2Coding" panose="020B0609020101020101" pitchFamily="49" charset="-127"/>
+                <a:ea typeface="D2Coding" panose="020B0609020101020101" pitchFamily="49" charset="-127"/>
+              </a:rPr>
+              <a:t>        </a:t>
+            </a:r>
+            <a:r>
+              <a:rPr lang="en-US" altLang="ko-KR" sz="1400" b="0" dirty="0" err="1">
+                <a:effectLst/>
+                <a:latin typeface="D2Coding" panose="020B0609020101020101" pitchFamily="49" charset="-127"/>
+                <a:ea typeface="D2Coding" panose="020B0609020101020101" pitchFamily="49" charset="-127"/>
+              </a:rPr>
+              <a:t>self.mixing_layer</a:t>
+            </a:r>
+            <a:r>
+              <a:rPr lang="en-US" altLang="ko-KR" sz="1400" b="0" dirty="0">
+                <a:effectLst/>
+                <a:latin typeface="D2Coding" panose="020B0609020101020101" pitchFamily="49" charset="-127"/>
+                <a:ea typeface="D2Coding" panose="020B0609020101020101" pitchFamily="49" charset="-127"/>
+              </a:rPr>
+              <a:t> = </a:t>
+            </a:r>
+            <a:r>
+              <a:rPr lang="en-US" altLang="ko-KR" sz="1400" b="0" dirty="0" err="1">
+                <a:effectLst/>
+                <a:latin typeface="D2Coding" panose="020B0609020101020101" pitchFamily="49" charset="-127"/>
+                <a:ea typeface="D2Coding" panose="020B0609020101020101" pitchFamily="49" charset="-127"/>
+              </a:rPr>
+              <a:t>layers.Dense</a:t>
+            </a:r>
+            <a:r>
+              <a:rPr lang="en-US" altLang="ko-KR" sz="1400" b="0" dirty="0">
+                <a:effectLst/>
+                <a:latin typeface="D2Coding" panose="020B0609020101020101" pitchFamily="49" charset="-127"/>
+                <a:ea typeface="D2Coding" panose="020B0609020101020101" pitchFamily="49" charset="-127"/>
+              </a:rPr>
+              <a:t>(64, activation="</a:t>
+            </a:r>
+            <a:r>
+              <a:rPr lang="en-US" altLang="ko-KR" sz="1400" b="0" dirty="0" err="1">
+                <a:effectLst/>
+                <a:latin typeface="D2Coding" panose="020B0609020101020101" pitchFamily="49" charset="-127"/>
+                <a:ea typeface="D2Coding" panose="020B0609020101020101" pitchFamily="49" charset="-127"/>
+              </a:rPr>
+              <a:t>relu</a:t>
+            </a:r>
+            <a:r>
+              <a:rPr lang="en-US" altLang="ko-KR" sz="1400" b="0" dirty="0">
+                <a:effectLst/>
+                <a:latin typeface="D2Coding" panose="020B0609020101020101" pitchFamily="49" charset="-127"/>
+                <a:ea typeface="D2Coding" panose="020B0609020101020101" pitchFamily="49" charset="-127"/>
+              </a:rPr>
+              <a:t>")</a:t>
+            </a:r>
+          </a:p>
+          <a:p>
+            <a:pPr>
+              <a:lnSpc>
+                <a:spcPts val="1575"/>
+              </a:lnSpc>
+              <a:buNone/>
+            </a:pPr>
+            <a:r>
+              <a:rPr lang="en-US" altLang="ko-KR" sz="1400" b="0" dirty="0">
+                <a:effectLst/>
+                <a:latin typeface="D2Coding" panose="020B0609020101020101" pitchFamily="49" charset="-127"/>
+                <a:ea typeface="D2Coding" panose="020B0609020101020101" pitchFamily="49" charset="-127"/>
+              </a:rPr>
+              <a:t>        </a:t>
+            </a:r>
+            <a:r>
+              <a:rPr lang="en-US" altLang="ko-KR" sz="1400" b="0" dirty="0" err="1">
+                <a:effectLst/>
+                <a:latin typeface="D2Coding" panose="020B0609020101020101" pitchFamily="49" charset="-127"/>
+                <a:ea typeface="D2Coding" panose="020B0609020101020101" pitchFamily="49" charset="-127"/>
+              </a:rPr>
+              <a:t>self.priority_scorer</a:t>
+            </a:r>
+            <a:r>
+              <a:rPr lang="en-US" altLang="ko-KR" sz="1400" b="0" dirty="0">
+                <a:effectLst/>
+                <a:latin typeface="D2Coding" panose="020B0609020101020101" pitchFamily="49" charset="-127"/>
+                <a:ea typeface="D2Coding" panose="020B0609020101020101" pitchFamily="49" charset="-127"/>
+              </a:rPr>
+              <a:t> = </a:t>
+            </a:r>
+            <a:r>
+              <a:rPr lang="en-US" altLang="ko-KR" sz="1400" b="0" dirty="0" err="1">
+                <a:effectLst/>
+                <a:latin typeface="D2Coding" panose="020B0609020101020101" pitchFamily="49" charset="-127"/>
+                <a:ea typeface="D2Coding" panose="020B0609020101020101" pitchFamily="49" charset="-127"/>
+              </a:rPr>
+              <a:t>layers.Dense</a:t>
+            </a:r>
+            <a:r>
+              <a:rPr lang="en-US" altLang="ko-KR" sz="1400" b="0" dirty="0">
+                <a:effectLst/>
+                <a:latin typeface="D2Coding" panose="020B0609020101020101" pitchFamily="49" charset="-127"/>
+                <a:ea typeface="D2Coding" panose="020B0609020101020101" pitchFamily="49" charset="-127"/>
+              </a:rPr>
+              <a:t>(1, activation="sigmoid")</a:t>
+            </a:r>
+          </a:p>
+          <a:p>
+            <a:pPr>
+              <a:lnSpc>
+                <a:spcPts val="1575"/>
+              </a:lnSpc>
+              <a:buNone/>
+            </a:pPr>
+            <a:r>
+              <a:rPr lang="en-US" altLang="ko-KR" sz="1400" b="0" dirty="0">
+                <a:effectLst/>
+                <a:latin typeface="D2Coding" panose="020B0609020101020101" pitchFamily="49" charset="-127"/>
+                <a:ea typeface="D2Coding" panose="020B0609020101020101" pitchFamily="49" charset="-127"/>
+              </a:rPr>
+              <a:t>        </a:t>
+            </a:r>
+            <a:r>
+              <a:rPr lang="en-US" altLang="ko-KR" sz="1400" b="0" dirty="0" err="1">
+                <a:effectLst/>
+                <a:latin typeface="D2Coding" panose="020B0609020101020101" pitchFamily="49" charset="-127"/>
+                <a:ea typeface="D2Coding" panose="020B0609020101020101" pitchFamily="49" charset="-127"/>
+              </a:rPr>
+              <a:t>self.department_classifier</a:t>
+            </a:r>
+            <a:r>
+              <a:rPr lang="en-US" altLang="ko-KR" sz="1400" b="0" dirty="0">
+                <a:effectLst/>
+                <a:latin typeface="D2Coding" panose="020B0609020101020101" pitchFamily="49" charset="-127"/>
+                <a:ea typeface="D2Coding" panose="020B0609020101020101" pitchFamily="49" charset="-127"/>
+              </a:rPr>
+              <a:t> = </a:t>
+            </a:r>
+            <a:r>
+              <a:rPr lang="en-US" altLang="ko-KR" sz="1400" b="0" dirty="0" err="1">
+                <a:effectLst/>
+                <a:latin typeface="D2Coding" panose="020B0609020101020101" pitchFamily="49" charset="-127"/>
+                <a:ea typeface="D2Coding" panose="020B0609020101020101" pitchFamily="49" charset="-127"/>
+              </a:rPr>
+              <a:t>layers.Dense</a:t>
+            </a:r>
+            <a:r>
+              <a:rPr lang="en-US" altLang="ko-KR" sz="1400" b="0" dirty="0">
+                <a:effectLst/>
+                <a:latin typeface="D2Coding" panose="020B0609020101020101" pitchFamily="49" charset="-127"/>
+                <a:ea typeface="D2Coding" panose="020B0609020101020101" pitchFamily="49" charset="-127"/>
+              </a:rPr>
+              <a:t>(</a:t>
+            </a:r>
+          </a:p>
+          <a:p>
+            <a:pPr>
+              <a:lnSpc>
+                <a:spcPts val="1575"/>
+              </a:lnSpc>
+              <a:buNone/>
+            </a:pPr>
+            <a:r>
+              <a:rPr lang="en-US" altLang="ko-KR" sz="1400" b="0" dirty="0">
+                <a:effectLst/>
+                <a:latin typeface="D2Coding" panose="020B0609020101020101" pitchFamily="49" charset="-127"/>
+                <a:ea typeface="D2Coding" panose="020B0609020101020101" pitchFamily="49" charset="-127"/>
+              </a:rPr>
+              <a:t>            </a:t>
+            </a:r>
+            <a:r>
+              <a:rPr lang="en-US" altLang="ko-KR" sz="1400" b="0" dirty="0" err="1">
+                <a:effectLst/>
+                <a:latin typeface="D2Coding" panose="020B0609020101020101" pitchFamily="49" charset="-127"/>
+                <a:ea typeface="D2Coding" panose="020B0609020101020101" pitchFamily="49" charset="-127"/>
+              </a:rPr>
+              <a:t>num_departments</a:t>
+            </a:r>
+            <a:r>
+              <a:rPr lang="en-US" altLang="ko-KR" sz="1400" b="0" dirty="0">
+                <a:effectLst/>
+                <a:latin typeface="D2Coding" panose="020B0609020101020101" pitchFamily="49" charset="-127"/>
+                <a:ea typeface="D2Coding" panose="020B0609020101020101" pitchFamily="49" charset="-127"/>
+              </a:rPr>
+              <a:t>, activation="</a:t>
+            </a:r>
+            <a:r>
+              <a:rPr lang="en-US" altLang="ko-KR" sz="1400" b="0" dirty="0" err="1">
+                <a:effectLst/>
+                <a:latin typeface="D2Coding" panose="020B0609020101020101" pitchFamily="49" charset="-127"/>
+                <a:ea typeface="D2Coding" panose="020B0609020101020101" pitchFamily="49" charset="-127"/>
+              </a:rPr>
+              <a:t>softmax</a:t>
+            </a:r>
+            <a:r>
+              <a:rPr lang="en-US" altLang="ko-KR" sz="1400" b="0" dirty="0">
+                <a:effectLst/>
+                <a:latin typeface="D2Coding" panose="020B0609020101020101" pitchFamily="49" charset="-127"/>
+                <a:ea typeface="D2Coding" panose="020B0609020101020101" pitchFamily="49" charset="-127"/>
+              </a:rPr>
+              <a:t>"</a:t>
+            </a:r>
+          </a:p>
+          <a:p>
+            <a:pPr>
+              <a:lnSpc>
+                <a:spcPts val="1575"/>
+              </a:lnSpc>
+              <a:buNone/>
+            </a:pPr>
+            <a:r>
+              <a:rPr lang="en-US" altLang="ko-KR" sz="1400" b="0" dirty="0">
+                <a:effectLst/>
+                <a:latin typeface="D2Coding" panose="020B0609020101020101" pitchFamily="49" charset="-127"/>
+                <a:ea typeface="D2Coding" panose="020B0609020101020101" pitchFamily="49" charset="-127"/>
+              </a:rPr>
+              <a:t>        )</a:t>
+            </a:r>
+            <a:br>
+              <a:rPr lang="en-US" altLang="ko-KR" sz="1400" b="0" dirty="0">
+                <a:effectLst/>
+                <a:latin typeface="D2Coding" panose="020B0609020101020101" pitchFamily="49" charset="-127"/>
+                <a:ea typeface="D2Coding" panose="020B0609020101020101" pitchFamily="49" charset="-127"/>
+              </a:rPr>
+            </a:br>
+            <a:endParaRPr lang="en-US" altLang="ko-KR" sz="1400" b="0" dirty="0">
+              <a:effectLst/>
+              <a:latin typeface="D2Coding" panose="020B0609020101020101" pitchFamily="49" charset="-127"/>
+              <a:ea typeface="D2Coding" panose="020B0609020101020101" pitchFamily="49" charset="-127"/>
+            </a:endParaRPr>
+          </a:p>
+          <a:p>
+            <a:pPr>
+              <a:lnSpc>
+                <a:spcPts val="1575"/>
+              </a:lnSpc>
+              <a:buNone/>
+            </a:pPr>
+            <a:r>
+              <a:rPr lang="en-US" altLang="ko-KR" sz="1400" b="0" dirty="0">
+                <a:effectLst/>
+                <a:latin typeface="D2Coding" panose="020B0609020101020101" pitchFamily="49" charset="-127"/>
+                <a:ea typeface="D2Coding" panose="020B0609020101020101" pitchFamily="49" charset="-127"/>
+              </a:rPr>
+              <a:t>    def call(self, inputs):</a:t>
+            </a:r>
+          </a:p>
+          <a:p>
+            <a:pPr>
+              <a:lnSpc>
+                <a:spcPts val="1575"/>
+              </a:lnSpc>
+              <a:buNone/>
+            </a:pPr>
+            <a:r>
+              <a:rPr lang="en-US" altLang="ko-KR" sz="1400" b="0" dirty="0">
+                <a:effectLst/>
+                <a:latin typeface="D2Coding" panose="020B0609020101020101" pitchFamily="49" charset="-127"/>
+                <a:ea typeface="D2Coding" panose="020B0609020101020101" pitchFamily="49" charset="-127"/>
+              </a:rPr>
+              <a:t>        title = inputs["title"]</a:t>
+            </a:r>
+          </a:p>
+          <a:p>
+            <a:pPr>
+              <a:lnSpc>
+                <a:spcPts val="1575"/>
+              </a:lnSpc>
+              <a:buNone/>
+            </a:pPr>
+            <a:r>
+              <a:rPr lang="en-US" altLang="ko-KR" sz="1400" b="0" dirty="0">
+                <a:effectLst/>
+                <a:latin typeface="D2Coding" panose="020B0609020101020101" pitchFamily="49" charset="-127"/>
+                <a:ea typeface="D2Coding" panose="020B0609020101020101" pitchFamily="49" charset="-127"/>
+              </a:rPr>
+              <a:t>        </a:t>
+            </a:r>
+            <a:r>
+              <a:rPr lang="en-US" altLang="ko-KR" sz="1400" b="0" dirty="0" err="1">
+                <a:effectLst/>
+                <a:latin typeface="D2Coding" panose="020B0609020101020101" pitchFamily="49" charset="-127"/>
+                <a:ea typeface="D2Coding" panose="020B0609020101020101" pitchFamily="49" charset="-127"/>
+              </a:rPr>
+              <a:t>text_body</a:t>
+            </a:r>
+            <a:r>
+              <a:rPr lang="en-US" altLang="ko-KR" sz="1400" b="0" dirty="0">
+                <a:effectLst/>
+                <a:latin typeface="D2Coding" panose="020B0609020101020101" pitchFamily="49" charset="-127"/>
+                <a:ea typeface="D2Coding" panose="020B0609020101020101" pitchFamily="49" charset="-127"/>
+              </a:rPr>
+              <a:t> = inputs["</a:t>
+            </a:r>
+            <a:r>
+              <a:rPr lang="en-US" altLang="ko-KR" sz="1400" b="0" dirty="0" err="1">
+                <a:effectLst/>
+                <a:latin typeface="D2Coding" panose="020B0609020101020101" pitchFamily="49" charset="-127"/>
+                <a:ea typeface="D2Coding" panose="020B0609020101020101" pitchFamily="49" charset="-127"/>
+              </a:rPr>
+              <a:t>text_body</a:t>
+            </a:r>
+            <a:r>
+              <a:rPr lang="en-US" altLang="ko-KR" sz="1400" b="0" dirty="0">
+                <a:effectLst/>
+                <a:latin typeface="D2Coding" panose="020B0609020101020101" pitchFamily="49" charset="-127"/>
+                <a:ea typeface="D2Coding" panose="020B0609020101020101" pitchFamily="49" charset="-127"/>
+              </a:rPr>
+              <a:t>"]</a:t>
+            </a:r>
+          </a:p>
+          <a:p>
+            <a:pPr>
+              <a:lnSpc>
+                <a:spcPts val="1575"/>
+              </a:lnSpc>
+              <a:buNone/>
+            </a:pPr>
+            <a:r>
+              <a:rPr lang="en-US" altLang="ko-KR" sz="1400" b="0" dirty="0">
+                <a:effectLst/>
+                <a:latin typeface="D2Coding" panose="020B0609020101020101" pitchFamily="49" charset="-127"/>
+                <a:ea typeface="D2Coding" panose="020B0609020101020101" pitchFamily="49" charset="-127"/>
+              </a:rPr>
+              <a:t>        tags = inputs["tags"]</a:t>
+            </a:r>
+          </a:p>
+          <a:p>
+            <a:pPr>
+              <a:lnSpc>
+                <a:spcPts val="1575"/>
+              </a:lnSpc>
+              <a:buNone/>
+            </a:pPr>
+            <a:endParaRPr lang="en-US" altLang="ko-KR" sz="1400" b="0" dirty="0">
+              <a:effectLst/>
+              <a:latin typeface="D2Coding" panose="020B0609020101020101" pitchFamily="49" charset="-127"/>
+              <a:ea typeface="D2Coding" panose="020B0609020101020101" pitchFamily="49" charset="-127"/>
+            </a:endParaRPr>
+          </a:p>
+          <a:p>
+            <a:pPr>
+              <a:lnSpc>
+                <a:spcPts val="1575"/>
+              </a:lnSpc>
+              <a:buNone/>
+            </a:pPr>
+            <a:r>
+              <a:rPr lang="en-US" altLang="ko-KR" sz="1400" b="0" dirty="0">
+                <a:effectLst/>
+                <a:latin typeface="D2Coding" panose="020B0609020101020101" pitchFamily="49" charset="-127"/>
+                <a:ea typeface="D2Coding" panose="020B0609020101020101" pitchFamily="49" charset="-127"/>
+              </a:rPr>
+              <a:t>        features = </a:t>
+            </a:r>
+            <a:r>
+              <a:rPr lang="en-US" altLang="ko-KR" sz="1400" b="0" dirty="0" err="1">
+                <a:effectLst/>
+                <a:latin typeface="D2Coding" panose="020B0609020101020101" pitchFamily="49" charset="-127"/>
+                <a:ea typeface="D2Coding" panose="020B0609020101020101" pitchFamily="49" charset="-127"/>
+              </a:rPr>
+              <a:t>self.concat_layer</a:t>
+            </a:r>
+            <a:r>
+              <a:rPr lang="en-US" altLang="ko-KR" sz="1400" b="0" dirty="0">
+                <a:effectLst/>
+                <a:latin typeface="D2Coding" panose="020B0609020101020101" pitchFamily="49" charset="-127"/>
+                <a:ea typeface="D2Coding" panose="020B0609020101020101" pitchFamily="49" charset="-127"/>
+              </a:rPr>
+              <a:t>([title, </a:t>
+            </a:r>
+            <a:r>
+              <a:rPr lang="en-US" altLang="ko-KR" sz="1400" b="0" dirty="0" err="1">
+                <a:effectLst/>
+                <a:latin typeface="D2Coding" panose="020B0609020101020101" pitchFamily="49" charset="-127"/>
+                <a:ea typeface="D2Coding" panose="020B0609020101020101" pitchFamily="49" charset="-127"/>
+              </a:rPr>
+              <a:t>text_body</a:t>
+            </a:r>
+            <a:r>
+              <a:rPr lang="en-US" altLang="ko-KR" sz="1400" b="0" dirty="0">
+                <a:effectLst/>
+                <a:latin typeface="D2Coding" panose="020B0609020101020101" pitchFamily="49" charset="-127"/>
+                <a:ea typeface="D2Coding" panose="020B0609020101020101" pitchFamily="49" charset="-127"/>
+              </a:rPr>
+              <a:t>, tags])</a:t>
+            </a:r>
+          </a:p>
+          <a:p>
+            <a:pPr>
+              <a:lnSpc>
+                <a:spcPts val="1575"/>
+              </a:lnSpc>
+              <a:buNone/>
+            </a:pPr>
+            <a:r>
+              <a:rPr lang="en-US" altLang="ko-KR" sz="1400" b="0" dirty="0">
+                <a:effectLst/>
+                <a:latin typeface="D2Coding" panose="020B0609020101020101" pitchFamily="49" charset="-127"/>
+                <a:ea typeface="D2Coding" panose="020B0609020101020101" pitchFamily="49" charset="-127"/>
+              </a:rPr>
+              <a:t>        features = </a:t>
+            </a:r>
+            <a:r>
+              <a:rPr lang="en-US" altLang="ko-KR" sz="1400" b="0" dirty="0" err="1">
+                <a:effectLst/>
+                <a:latin typeface="D2Coding" panose="020B0609020101020101" pitchFamily="49" charset="-127"/>
+                <a:ea typeface="D2Coding" panose="020B0609020101020101" pitchFamily="49" charset="-127"/>
+              </a:rPr>
+              <a:t>self.mixing_layer</a:t>
+            </a:r>
+            <a:r>
+              <a:rPr lang="en-US" altLang="ko-KR" sz="1400" b="0" dirty="0">
+                <a:effectLst/>
+                <a:latin typeface="D2Coding" panose="020B0609020101020101" pitchFamily="49" charset="-127"/>
+                <a:ea typeface="D2Coding" panose="020B0609020101020101" pitchFamily="49" charset="-127"/>
+              </a:rPr>
+              <a:t>(features)</a:t>
+            </a:r>
+          </a:p>
+          <a:p>
+            <a:pPr>
+              <a:lnSpc>
+                <a:spcPts val="1575"/>
+              </a:lnSpc>
+              <a:buNone/>
+            </a:pPr>
+            <a:r>
+              <a:rPr lang="en-US" altLang="ko-KR" sz="1400" b="0" dirty="0">
+                <a:effectLst/>
+                <a:latin typeface="D2Coding" panose="020B0609020101020101" pitchFamily="49" charset="-127"/>
+                <a:ea typeface="D2Coding" panose="020B0609020101020101" pitchFamily="49" charset="-127"/>
+              </a:rPr>
+              <a:t>        priority = </a:t>
+            </a:r>
+            <a:r>
+              <a:rPr lang="en-US" altLang="ko-KR" sz="1400" b="0" dirty="0" err="1">
+                <a:effectLst/>
+                <a:latin typeface="D2Coding" panose="020B0609020101020101" pitchFamily="49" charset="-127"/>
+                <a:ea typeface="D2Coding" panose="020B0609020101020101" pitchFamily="49" charset="-127"/>
+              </a:rPr>
+              <a:t>self.priority_scorer</a:t>
+            </a:r>
+            <a:r>
+              <a:rPr lang="en-US" altLang="ko-KR" sz="1400" b="0" dirty="0">
+                <a:effectLst/>
+                <a:latin typeface="D2Coding" panose="020B0609020101020101" pitchFamily="49" charset="-127"/>
+                <a:ea typeface="D2Coding" panose="020B0609020101020101" pitchFamily="49" charset="-127"/>
+              </a:rPr>
+              <a:t>(features)</a:t>
+            </a:r>
+          </a:p>
+          <a:p>
+            <a:pPr>
+              <a:lnSpc>
+                <a:spcPts val="1575"/>
+              </a:lnSpc>
+              <a:buNone/>
+            </a:pPr>
+            <a:r>
+              <a:rPr lang="en-US" altLang="ko-KR" sz="1400" b="0" dirty="0">
+                <a:effectLst/>
+                <a:latin typeface="D2Coding" panose="020B0609020101020101" pitchFamily="49" charset="-127"/>
+                <a:ea typeface="D2Coding" panose="020B0609020101020101" pitchFamily="49" charset="-127"/>
+              </a:rPr>
+              <a:t>        department = </a:t>
+            </a:r>
+            <a:r>
+              <a:rPr lang="en-US" altLang="ko-KR" sz="1400" b="0" dirty="0" err="1">
+                <a:effectLst/>
+                <a:latin typeface="D2Coding" panose="020B0609020101020101" pitchFamily="49" charset="-127"/>
+                <a:ea typeface="D2Coding" panose="020B0609020101020101" pitchFamily="49" charset="-127"/>
+              </a:rPr>
+              <a:t>self.department_classifier</a:t>
+            </a:r>
+            <a:r>
+              <a:rPr lang="en-US" altLang="ko-KR" sz="1400" b="0" dirty="0">
+                <a:effectLst/>
+                <a:latin typeface="D2Coding" panose="020B0609020101020101" pitchFamily="49" charset="-127"/>
+                <a:ea typeface="D2Coding" panose="020B0609020101020101" pitchFamily="49" charset="-127"/>
+              </a:rPr>
+              <a:t>(features)</a:t>
+            </a:r>
+          </a:p>
+          <a:p>
+            <a:pPr>
+              <a:lnSpc>
+                <a:spcPts val="1575"/>
+              </a:lnSpc>
+              <a:buNone/>
+            </a:pPr>
+            <a:r>
+              <a:rPr lang="en-US" altLang="ko-KR" sz="1400" b="0" dirty="0">
+                <a:effectLst/>
+                <a:latin typeface="D2Coding" panose="020B0609020101020101" pitchFamily="49" charset="-127"/>
+                <a:ea typeface="D2Coding" panose="020B0609020101020101" pitchFamily="49" charset="-127"/>
+              </a:rPr>
+              <a:t>        return priority, department</a:t>
+            </a:r>
+          </a:p>
+          <a:p>
+            <a:pPr>
+              <a:lnSpc>
+                <a:spcPts val="1575"/>
+              </a:lnSpc>
+            </a:pPr>
+            <a:endParaRPr lang="en-US" altLang="ko-KR" sz="1400" dirty="0">
+              <a:latin typeface="D2Coding" panose="020B0609020101020101" pitchFamily="49" charset="-127"/>
+              <a:ea typeface="D2Coding" panose="020B0609020101020101" pitchFamily="49" charset="-127"/>
+            </a:endParaRPr>
+          </a:p>
+          <a:p>
+            <a:pPr>
+              <a:lnSpc>
+                <a:spcPts val="1575"/>
+              </a:lnSpc>
+            </a:pPr>
+            <a:r>
+              <a:rPr lang="en-US" altLang="ko-KR" sz="1400" dirty="0">
+                <a:latin typeface="D2Coding" panose="020B0609020101020101" pitchFamily="49" charset="-127"/>
+                <a:ea typeface="D2Coding" panose="020B0609020101020101" pitchFamily="49" charset="-127"/>
+              </a:rPr>
+              <a:t>model = </a:t>
+            </a:r>
+            <a:r>
+              <a:rPr lang="en-US" altLang="ko-KR" sz="1400" dirty="0" err="1">
+                <a:latin typeface="D2Coding" panose="020B0609020101020101" pitchFamily="49" charset="-127"/>
+                <a:ea typeface="D2Coding" panose="020B0609020101020101" pitchFamily="49" charset="-127"/>
+              </a:rPr>
+              <a:t>CustomerTicketModel</a:t>
+            </a:r>
+            <a:r>
+              <a:rPr lang="en-US" altLang="ko-KR" sz="1400" dirty="0">
+                <a:latin typeface="D2Coding" panose="020B0609020101020101" pitchFamily="49" charset="-127"/>
+                <a:ea typeface="D2Coding" panose="020B0609020101020101" pitchFamily="49" charset="-127"/>
+              </a:rPr>
+              <a:t>(</a:t>
+            </a:r>
+            <a:r>
+              <a:rPr lang="en-US" altLang="ko-KR" sz="1400" dirty="0" err="1">
+                <a:latin typeface="D2Coding" panose="020B0609020101020101" pitchFamily="49" charset="-127"/>
+                <a:ea typeface="D2Coding" panose="020B0609020101020101" pitchFamily="49" charset="-127"/>
+              </a:rPr>
+              <a:t>num_departments</a:t>
+            </a:r>
+            <a:r>
+              <a:rPr lang="en-US" altLang="ko-KR" sz="1400" dirty="0">
+                <a:latin typeface="D2Coding" panose="020B0609020101020101" pitchFamily="49" charset="-127"/>
+                <a:ea typeface="D2Coding" panose="020B0609020101020101" pitchFamily="49" charset="-127"/>
+              </a:rPr>
+              <a:t>=4)</a:t>
+            </a:r>
+          </a:p>
+        </p:txBody>
+      </p:sp>
+      <p:sp>
+        <p:nvSpPr>
+          <p:cNvPr id="7" name="TextBox 6">
+            <a:extLst>
+              <a:ext uri="{FF2B5EF4-FFF2-40B4-BE49-F238E27FC236}">
+                <a16:creationId xmlns:a16="http://schemas.microsoft.com/office/drawing/2014/main" id="{F8CC0487-B516-9566-D864-CD470E8418E2}"/>
+              </a:ext>
+            </a:extLst>
+          </p:cNvPr>
+          <p:cNvSpPr txBox="1"/>
+          <p:nvPr/>
+        </p:nvSpPr>
+        <p:spPr>
+          <a:xfrm>
+            <a:off x="609996" y="6068477"/>
+            <a:ext cx="9067405" cy="297517"/>
+          </a:xfrm>
+          <a:prstGeom prst="rect">
+            <a:avLst/>
+          </a:prstGeom>
+          <a:solidFill>
+            <a:srgbClr val="76E3FF"/>
+          </a:solidFill>
+        </p:spPr>
+        <p:txBody>
+          <a:bodyPr wrap="square">
+            <a:spAutoFit/>
+          </a:bodyPr>
+          <a:lstStyle/>
+          <a:p>
+            <a:pPr>
+              <a:lnSpc>
+                <a:spcPts val="1575"/>
+              </a:lnSpc>
+            </a:pPr>
+            <a:r>
+              <a:rPr lang="en-US" altLang="ko-KR" sz="1400" dirty="0">
+                <a:latin typeface="D2Coding" panose="020B0609020101020101" pitchFamily="49" charset="-127"/>
+                <a:ea typeface="D2Coding" panose="020B0609020101020101" pitchFamily="49" charset="-127"/>
+              </a:rPr>
+              <a:t>priority, department = model({"title": </a:t>
+            </a:r>
+            <a:r>
+              <a:rPr lang="en-US" altLang="ko-KR" sz="1400" dirty="0" err="1">
+                <a:latin typeface="D2Coding" panose="020B0609020101020101" pitchFamily="49" charset="-127"/>
+                <a:ea typeface="D2Coding" panose="020B0609020101020101" pitchFamily="49" charset="-127"/>
+              </a:rPr>
+              <a:t>title_data</a:t>
+            </a:r>
+            <a:r>
+              <a:rPr lang="en-US" altLang="ko-KR" sz="1400" dirty="0">
+                <a:latin typeface="D2Coding" panose="020B0609020101020101" pitchFamily="49" charset="-127"/>
+                <a:ea typeface="D2Coding" panose="020B0609020101020101" pitchFamily="49" charset="-127"/>
+              </a:rPr>
+              <a:t>, "</a:t>
+            </a:r>
+            <a:r>
+              <a:rPr lang="en-US" altLang="ko-KR" sz="1400" dirty="0" err="1">
+                <a:latin typeface="D2Coding" panose="020B0609020101020101" pitchFamily="49" charset="-127"/>
+                <a:ea typeface="D2Coding" panose="020B0609020101020101" pitchFamily="49" charset="-127"/>
+              </a:rPr>
+              <a:t>text_body</a:t>
+            </a:r>
+            <a:r>
+              <a:rPr lang="en-US" altLang="ko-KR" sz="1400" dirty="0">
+                <a:latin typeface="D2Coding" panose="020B0609020101020101" pitchFamily="49" charset="-127"/>
+                <a:ea typeface="D2Coding" panose="020B0609020101020101" pitchFamily="49" charset="-127"/>
+              </a:rPr>
+              <a:t>": </a:t>
+            </a:r>
+            <a:r>
+              <a:rPr lang="en-US" altLang="ko-KR" sz="1400" dirty="0" err="1">
+                <a:latin typeface="D2Coding" panose="020B0609020101020101" pitchFamily="49" charset="-127"/>
+                <a:ea typeface="D2Coding" panose="020B0609020101020101" pitchFamily="49" charset="-127"/>
+              </a:rPr>
+              <a:t>text_body_data</a:t>
+            </a:r>
+            <a:r>
+              <a:rPr lang="en-US" altLang="ko-KR" sz="1400" dirty="0">
+                <a:latin typeface="D2Coding" panose="020B0609020101020101" pitchFamily="49" charset="-127"/>
+                <a:ea typeface="D2Coding" panose="020B0609020101020101" pitchFamily="49" charset="-127"/>
+              </a:rPr>
+              <a:t>, "tags": </a:t>
+            </a:r>
+            <a:r>
+              <a:rPr lang="en-US" altLang="ko-KR" sz="1400" dirty="0" err="1">
+                <a:latin typeface="D2Coding" panose="020B0609020101020101" pitchFamily="49" charset="-127"/>
+                <a:ea typeface="D2Coding" panose="020B0609020101020101" pitchFamily="49" charset="-127"/>
+              </a:rPr>
+              <a:t>tags_data</a:t>
+            </a:r>
+            <a:r>
+              <a:rPr lang="en-US" altLang="ko-KR" sz="1400" dirty="0">
+                <a:latin typeface="D2Coding" panose="020B0609020101020101" pitchFamily="49" charset="-127"/>
+                <a:ea typeface="D2Coding" panose="020B0609020101020101" pitchFamily="49" charset="-127"/>
+              </a:rPr>
+              <a:t>})</a:t>
+            </a:r>
+          </a:p>
+        </p:txBody>
+      </p:sp>
+    </p:spTree>
+    <p:extLst>
+      <p:ext uri="{BB962C8B-B14F-4D97-AF65-F5344CB8AC3E}">
+        <p14:creationId xmlns:p14="http://schemas.microsoft.com/office/powerpoint/2010/main" val="1289008243"/>
+      </p:ext>
+    </p:extLst>
+  </p:cSld>
+  <p:clrMapOvr>
+    <a:masterClrMapping/>
+  </p:clrMapOvr>
+</p:sld>
+</file>
+
+<file path=ppt/slides/slide11.xml><?xml version="1.0" encoding="utf-8"?>
+<p:sld xmlns:a="http://schemas.openxmlformats.org/drawingml/2006/main" xmlns:r="http://schemas.openxmlformats.org/officeDocument/2006/relationships" xmlns:p="http://schemas.openxmlformats.org/presentationml/2006/main">
+  <p:cSld>
+    <p:spTree>
+      <p:nvGrpSpPr>
+        <p:cNvPr id="1" name="">
+          <a:extLst>
+            <a:ext uri="{FF2B5EF4-FFF2-40B4-BE49-F238E27FC236}">
+              <a16:creationId xmlns:a16="http://schemas.microsoft.com/office/drawing/2014/main" id="{6B2FB6A5-149E-4D67-21B7-028E2D81C6D7}"/>
+            </a:ext>
+          </a:extLst>
+        </p:cNvPr>
+        <p:cNvGrpSpPr/>
+        <p:nvPr/>
+      </p:nvGrpSpPr>
+      <p:grpSpPr>
+        <a:xfrm>
+          <a:off x="0" y="0"/>
+          <a:ext cx="0" cy="0"/>
+          <a:chOff x="0" y="0"/>
+          <a:chExt cx="0" cy="0"/>
+        </a:xfrm>
+      </p:grpSpPr>
+      <p:sp>
+        <p:nvSpPr>
+          <p:cNvPr id="4" name="슬라이드 번호 개체 틀 3">
+            <a:extLst>
+              <a:ext uri="{FF2B5EF4-FFF2-40B4-BE49-F238E27FC236}">
+                <a16:creationId xmlns:a16="http://schemas.microsoft.com/office/drawing/2014/main" id="{1C6BAFB7-E082-612A-CE0E-124CB8266CD5}"/>
+              </a:ext>
+            </a:extLst>
+          </p:cNvPr>
+          <p:cNvSpPr>
+            <a:spLocks noGrp="1"/>
+          </p:cNvSpPr>
+          <p:nvPr>
+            <p:ph type="sldNum" sz="quarter" idx="12"/>
+          </p:nvPr>
+        </p:nvSpPr>
+        <p:spPr>
+          <a:xfrm>
+            <a:off x="10514011" y="6036261"/>
+            <a:ext cx="753545" cy="365125"/>
+          </a:xfrm>
+        </p:spPr>
+        <p:txBody>
+          <a:bodyPr/>
+          <a:lstStyle/>
+          <a:p>
+            <a:fld id="{D57F1E4F-1CFF-5643-939E-217C01CDF565}" type="slidenum">
+              <a:rPr lang="en-US" smtClean="0"/>
+              <a:pPr/>
+              <a:t>11</a:t>
+            </a:fld>
+            <a:endParaRPr lang="en-US" dirty="0"/>
+          </a:p>
+        </p:txBody>
+      </p:sp>
+      <p:sp>
+        <p:nvSpPr>
+          <p:cNvPr id="3" name="제목 1">
+            <a:extLst>
+              <a:ext uri="{FF2B5EF4-FFF2-40B4-BE49-F238E27FC236}">
+                <a16:creationId xmlns:a16="http://schemas.microsoft.com/office/drawing/2014/main" id="{A5CF9D73-95B0-9103-6AEC-EF349B15D0D9}"/>
+              </a:ext>
+            </a:extLst>
+          </p:cNvPr>
+          <p:cNvSpPr txBox="1">
+            <a:spLocks/>
+          </p:cNvSpPr>
+          <p:nvPr/>
+        </p:nvSpPr>
+        <p:spPr>
+          <a:xfrm>
+            <a:off x="475645" y="481983"/>
+            <a:ext cx="10353762" cy="766439"/>
+          </a:xfrm>
+          <a:prstGeom prst="rect">
+            <a:avLst/>
+          </a:prstGeom>
+        </p:spPr>
+        <p:txBody>
+          <a:bodyPr vert="horz" lIns="91440" tIns="45720" rIns="91440" bIns="45720" rtlCol="0" anchor="ctr">
+            <a:normAutofit/>
+          </a:bodyPr>
+          <a:lstStyle>
+            <a:lvl1pPr algn="ctr" defTabSz="914400" rtl="0" eaLnBrk="1" latinLnBrk="1" hangingPunct="1">
+              <a:lnSpc>
+                <a:spcPct val="90000"/>
+              </a:lnSpc>
+              <a:spcBef>
+                <a:spcPct val="0"/>
+              </a:spcBef>
+              <a:buNone/>
+              <a:defRPr sz="3200" kern="1200" cap="all" baseline="0">
+                <a:solidFill>
+                  <a:schemeClr val="tx1"/>
+                </a:solidFill>
+                <a:effectLst/>
+                <a:latin typeface="Batang" panose="02030600000101010101" pitchFamily="18" charset="-127"/>
+                <a:ea typeface="Batang" panose="02030600000101010101" pitchFamily="18" charset="-127"/>
+                <a:cs typeface="+mj-cs"/>
+              </a:defRPr>
+            </a:lvl1pPr>
+          </a:lstStyle>
+          <a:p>
+            <a:pPr algn="l"/>
+            <a:r>
+              <a:rPr lang="en-US" altLang="ko-KR" sz="2800" b="1" cap="none" dirty="0">
+                <a:latin typeface="Lora" pitchFamily="2" charset="0"/>
+              </a:rPr>
+              <a:t>Using built-in training and evaluation loops</a:t>
+            </a:r>
+          </a:p>
+        </p:txBody>
+      </p:sp>
+      <p:sp>
+        <p:nvSpPr>
+          <p:cNvPr id="6" name="TextBox 5">
+            <a:extLst>
+              <a:ext uri="{FF2B5EF4-FFF2-40B4-BE49-F238E27FC236}">
+                <a16:creationId xmlns:a16="http://schemas.microsoft.com/office/drawing/2014/main" id="{0857F850-C204-222C-9F07-18B9C6C222F4}"/>
+              </a:ext>
+            </a:extLst>
+          </p:cNvPr>
+          <p:cNvSpPr txBox="1"/>
+          <p:nvPr/>
+        </p:nvSpPr>
+        <p:spPr>
+          <a:xfrm>
+            <a:off x="1466850" y="2244209"/>
+            <a:ext cx="8219556" cy="2468817"/>
+          </a:xfrm>
+          <a:prstGeom prst="rect">
+            <a:avLst/>
+          </a:prstGeom>
+          <a:noFill/>
+        </p:spPr>
+        <p:txBody>
+          <a:bodyPr wrap="square">
+            <a:spAutoFit/>
+          </a:bodyPr>
+          <a:lstStyle/>
+          <a:p>
+            <a:pPr marL="285750" indent="-285750" algn="l">
+              <a:lnSpc>
+                <a:spcPct val="200000"/>
+              </a:lnSpc>
+              <a:buFont typeface="Wingdings" panose="05000000000000000000" pitchFamily="2" charset="2"/>
+              <a:buChar char="v"/>
+            </a:pPr>
+            <a:r>
+              <a:rPr lang="en-US" altLang="ko-KR" sz="2000" i="0" dirty="0">
+                <a:effectLst/>
+                <a:latin typeface="D2Coding" panose="020B0609020101020101" pitchFamily="49" charset="-127"/>
+                <a:ea typeface="D2Coding" panose="020B0609020101020101" pitchFamily="49" charset="-127"/>
+              </a:rPr>
+              <a:t>Writing your own metrics</a:t>
+            </a:r>
+          </a:p>
+          <a:p>
+            <a:pPr marL="285750" indent="-285750">
+              <a:lnSpc>
+                <a:spcPct val="200000"/>
+              </a:lnSpc>
+              <a:buFont typeface="Wingdings" panose="05000000000000000000" pitchFamily="2" charset="2"/>
+              <a:buChar char="v"/>
+            </a:pPr>
+            <a:r>
+              <a:rPr lang="en-US" altLang="ko-KR" sz="2000" dirty="0">
+                <a:latin typeface="D2Coding" panose="020B0609020101020101" pitchFamily="49" charset="-127"/>
+                <a:ea typeface="D2Coding" panose="020B0609020101020101" pitchFamily="49" charset="-127"/>
+              </a:rPr>
+              <a:t>Using callbacks</a:t>
+            </a:r>
+          </a:p>
+          <a:p>
+            <a:pPr marL="742950" lvl="1" indent="-285750">
+              <a:lnSpc>
+                <a:spcPct val="200000"/>
+              </a:lnSpc>
+              <a:buFont typeface="Wingdings" panose="05000000000000000000" pitchFamily="2" charset="2"/>
+              <a:buChar char="v"/>
+            </a:pPr>
+            <a:r>
+              <a:rPr lang="en-US" altLang="ko-KR" sz="2000" dirty="0">
+                <a:latin typeface="D2Coding" panose="020B0609020101020101" pitchFamily="49" charset="-127"/>
+                <a:ea typeface="D2Coding" panose="020B0609020101020101" pitchFamily="49" charset="-127"/>
+              </a:rPr>
+              <a:t>The </a:t>
+            </a:r>
+            <a:r>
+              <a:rPr lang="en-US" altLang="ko-KR" sz="2000" dirty="0" err="1">
+                <a:latin typeface="D2Coding" panose="020B0609020101020101" pitchFamily="49" charset="-127"/>
+                <a:ea typeface="D2Coding" panose="020B0609020101020101" pitchFamily="49" charset="-127"/>
+              </a:rPr>
+              <a:t>EarlyStopping</a:t>
+            </a:r>
+            <a:r>
+              <a:rPr lang="en-US" altLang="ko-KR" sz="2000" dirty="0">
+                <a:latin typeface="D2Coding" panose="020B0609020101020101" pitchFamily="49" charset="-127"/>
+                <a:ea typeface="D2Coding" panose="020B0609020101020101" pitchFamily="49" charset="-127"/>
+              </a:rPr>
+              <a:t> and </a:t>
+            </a:r>
+            <a:r>
+              <a:rPr lang="en-US" altLang="ko-KR" sz="2000" dirty="0" err="1">
+                <a:latin typeface="D2Coding" panose="020B0609020101020101" pitchFamily="49" charset="-127"/>
+                <a:ea typeface="D2Coding" panose="020B0609020101020101" pitchFamily="49" charset="-127"/>
+              </a:rPr>
+              <a:t>ModelCheckpoint</a:t>
+            </a:r>
+            <a:r>
+              <a:rPr lang="en-US" altLang="ko-KR" sz="2000" dirty="0">
+                <a:latin typeface="D2Coding" panose="020B0609020101020101" pitchFamily="49" charset="-127"/>
+                <a:ea typeface="D2Coding" panose="020B0609020101020101" pitchFamily="49" charset="-127"/>
+              </a:rPr>
+              <a:t> callbacks</a:t>
+            </a:r>
+          </a:p>
+          <a:p>
+            <a:pPr marL="285750" indent="-285750">
+              <a:lnSpc>
+                <a:spcPct val="200000"/>
+              </a:lnSpc>
+              <a:buFont typeface="Wingdings" panose="05000000000000000000" pitchFamily="2" charset="2"/>
+              <a:buChar char="v"/>
+            </a:pPr>
+            <a:r>
+              <a:rPr lang="en-US" altLang="ko-KR" sz="2000" dirty="0">
+                <a:latin typeface="D2Coding" panose="020B0609020101020101" pitchFamily="49" charset="-127"/>
+                <a:ea typeface="D2Coding" panose="020B0609020101020101" pitchFamily="49" charset="-127"/>
+              </a:rPr>
+              <a:t>Writing your own callbacks</a:t>
+            </a:r>
+          </a:p>
+        </p:txBody>
+      </p:sp>
+    </p:spTree>
+    <p:extLst>
+      <p:ext uri="{BB962C8B-B14F-4D97-AF65-F5344CB8AC3E}">
+        <p14:creationId xmlns:p14="http://schemas.microsoft.com/office/powerpoint/2010/main" val="4090951945"/>
+      </p:ext>
+    </p:extLst>
+  </p:cSld>
+  <p:clrMapOvr>
+    <a:masterClrMapping/>
+  </p:clrMapOvr>
+</p:sld>
+</file>
+
 <file path=ppt/slides/slide2.xml><?xml version="1.0" encoding="utf-8"?>
 <p:sld xmlns:a="http://schemas.openxmlformats.org/drawingml/2006/main" xmlns:r="http://schemas.openxmlformats.org/officeDocument/2006/relationships" xmlns:p="http://schemas.openxmlformats.org/presentationml/2006/main">
   <p:cSld>
@@ -3175,7 +4476,7 @@
         <p:spPr>
           <a:xfrm>
             <a:off x="479265" y="1795668"/>
-            <a:ext cx="11233469" cy="3266663"/>
+            <a:ext cx="11233469" cy="3893182"/>
           </a:xfrm>
           <a:prstGeom prst="rect">
             <a:avLst/>
@@ -3190,100 +4491,167 @@
           <a:p>
             <a:pPr marL="800100" lvl="1" indent="-342900">
               <a:lnSpc>
-                <a:spcPct val="150000"/>
+                <a:spcPct val="200000"/>
               </a:lnSpc>
               <a:buFont typeface="Wingdings" panose="05000000000000000000" pitchFamily="2" charset="2"/>
               <a:buChar char="v"/>
             </a:pPr>
             <a:r>
-              <a:rPr lang="en-US" altLang="ko-KR" sz="2000" dirty="0"/>
+              <a:rPr lang="en-US" altLang="ko-KR" dirty="0">
+                <a:latin typeface="D2Coding" panose="020B0609020101020101" pitchFamily="49" charset="-127"/>
+                <a:ea typeface="D2Coding" panose="020B0609020101020101" pitchFamily="49" charset="-127"/>
+              </a:rPr>
               <a:t>The different ways to create </a:t>
             </a:r>
             <a:r>
-              <a:rPr lang="en-US" altLang="ko-KR" sz="2000" dirty="0" err="1"/>
+              <a:rPr lang="en-US" altLang="ko-KR" dirty="0" err="1">
+                <a:latin typeface="D2Coding" panose="020B0609020101020101" pitchFamily="49" charset="-127"/>
+                <a:ea typeface="D2Coding" panose="020B0609020101020101" pitchFamily="49" charset="-127"/>
+              </a:rPr>
               <a:t>Keras</a:t>
             </a:r>
             <a:r>
-              <a:rPr lang="en-US" altLang="ko-KR" sz="2000" dirty="0"/>
+              <a:rPr lang="en-US" altLang="ko-KR" dirty="0">
+                <a:latin typeface="D2Coding" panose="020B0609020101020101" pitchFamily="49" charset="-127"/>
+                <a:ea typeface="D2Coding" panose="020B0609020101020101" pitchFamily="49" charset="-127"/>
+              </a:rPr>
               <a:t> models: the Sequential class, the Functional API, and model subclassing</a:t>
             </a:r>
           </a:p>
           <a:p>
             <a:pPr marL="800100" lvl="1" indent="-342900">
               <a:lnSpc>
-                <a:spcPct val="150000"/>
+                <a:spcPct val="200000"/>
               </a:lnSpc>
               <a:buFont typeface="Wingdings" panose="05000000000000000000" pitchFamily="2" charset="2"/>
               <a:buChar char="v"/>
             </a:pPr>
             <a:r>
-              <a:rPr lang="en-US" altLang="ko-KR" sz="2000" dirty="0"/>
+              <a:rPr lang="en-US" altLang="ko-KR" dirty="0">
+                <a:latin typeface="D2Coding" panose="020B0609020101020101" pitchFamily="49" charset="-127"/>
+                <a:ea typeface="D2Coding" panose="020B0609020101020101" pitchFamily="49" charset="-127"/>
+              </a:rPr>
               <a:t>How to use the built-in </a:t>
             </a:r>
             <a:r>
-              <a:rPr lang="en-US" altLang="ko-KR" sz="2000" dirty="0" err="1"/>
+              <a:rPr lang="en-US" altLang="ko-KR" dirty="0" err="1">
+                <a:latin typeface="D2Coding" panose="020B0609020101020101" pitchFamily="49" charset="-127"/>
+                <a:ea typeface="D2Coding" panose="020B0609020101020101" pitchFamily="49" charset="-127"/>
+              </a:rPr>
               <a:t>Keras</a:t>
             </a:r>
             <a:r>
-              <a:rPr lang="en-US" altLang="ko-KR" sz="2000" dirty="0"/>
+              <a:rPr lang="en-US" altLang="ko-KR" dirty="0">
+                <a:latin typeface="D2Coding" panose="020B0609020101020101" pitchFamily="49" charset="-127"/>
+                <a:ea typeface="D2Coding" panose="020B0609020101020101" pitchFamily="49" charset="-127"/>
+              </a:rPr>
               <a:t> training and evaluation loops, including how to use custom metrics and custom losses</a:t>
             </a:r>
           </a:p>
           <a:p>
             <a:pPr marL="800100" lvl="1" indent="-342900">
               <a:lnSpc>
-                <a:spcPct val="150000"/>
+                <a:spcPct val="200000"/>
               </a:lnSpc>
               <a:buFont typeface="Wingdings" panose="05000000000000000000" pitchFamily="2" charset="2"/>
               <a:buChar char="v"/>
             </a:pPr>
             <a:r>
-              <a:rPr lang="en-US" altLang="ko-KR" sz="2000" dirty="0"/>
+              <a:rPr lang="en-US" altLang="ko-KR" dirty="0">
+                <a:latin typeface="D2Coding" panose="020B0609020101020101" pitchFamily="49" charset="-127"/>
+                <a:ea typeface="D2Coding" panose="020B0609020101020101" pitchFamily="49" charset="-127"/>
+              </a:rPr>
               <a:t>Using </a:t>
             </a:r>
             <a:r>
-              <a:rPr lang="en-US" altLang="ko-KR" sz="2000" dirty="0" err="1"/>
+              <a:rPr lang="en-US" altLang="ko-KR" dirty="0" err="1">
+                <a:latin typeface="D2Coding" panose="020B0609020101020101" pitchFamily="49" charset="-127"/>
+                <a:ea typeface="D2Coding" panose="020B0609020101020101" pitchFamily="49" charset="-127"/>
+              </a:rPr>
               <a:t>Keras</a:t>
             </a:r>
             <a:r>
-              <a:rPr lang="en-US" altLang="ko-KR" sz="2000" dirty="0"/>
+              <a:rPr lang="en-US" altLang="ko-KR" dirty="0">
+                <a:latin typeface="D2Coding" panose="020B0609020101020101" pitchFamily="49" charset="-127"/>
+                <a:ea typeface="D2Coding" panose="020B0609020101020101" pitchFamily="49" charset="-127"/>
+              </a:rPr>
               <a:t> callbacks to further customize how training proceeds</a:t>
             </a:r>
           </a:p>
           <a:p>
             <a:pPr marL="800100" lvl="1" indent="-342900">
               <a:lnSpc>
-                <a:spcPct val="150000"/>
+                <a:spcPct val="200000"/>
               </a:lnSpc>
               <a:buFont typeface="Wingdings" panose="05000000000000000000" pitchFamily="2" charset="2"/>
               <a:buChar char="v"/>
             </a:pPr>
             <a:r>
-              <a:rPr lang="en-US" altLang="ko-KR" sz="2000" dirty="0"/>
+              <a:rPr lang="en-US" altLang="ko-KR" dirty="0">
+                <a:solidFill>
+                  <a:schemeClr val="bg1">
+                    <a:lumMod val="50000"/>
+                  </a:schemeClr>
+                </a:solidFill>
+                <a:latin typeface="D2Coding" panose="020B0609020101020101" pitchFamily="49" charset="-127"/>
+                <a:ea typeface="D2Coding" panose="020B0609020101020101" pitchFamily="49" charset="-127"/>
+              </a:rPr>
               <a:t>Using </a:t>
             </a:r>
             <a:r>
-              <a:rPr lang="en-US" altLang="ko-KR" sz="2000" dirty="0" err="1"/>
+              <a:rPr lang="en-US" altLang="ko-KR" dirty="0" err="1">
+                <a:solidFill>
+                  <a:schemeClr val="bg1">
+                    <a:lumMod val="50000"/>
+                  </a:schemeClr>
+                </a:solidFill>
+                <a:latin typeface="D2Coding" panose="020B0609020101020101" pitchFamily="49" charset="-127"/>
+                <a:ea typeface="D2Coding" panose="020B0609020101020101" pitchFamily="49" charset="-127"/>
+              </a:rPr>
               <a:t>TensorBoard</a:t>
             </a:r>
             <a:r>
-              <a:rPr lang="en-US" altLang="ko-KR" sz="2000" dirty="0"/>
+              <a:rPr lang="en-US" altLang="ko-KR" dirty="0">
+                <a:solidFill>
+                  <a:schemeClr val="bg1">
+                    <a:lumMod val="50000"/>
+                  </a:schemeClr>
+                </a:solidFill>
+                <a:latin typeface="D2Coding" panose="020B0609020101020101" pitchFamily="49" charset="-127"/>
+                <a:ea typeface="D2Coding" panose="020B0609020101020101" pitchFamily="49" charset="-127"/>
+              </a:rPr>
               <a:t> for monitoring your training and evaluation metrics over time</a:t>
             </a:r>
           </a:p>
           <a:p>
             <a:pPr marL="800100" lvl="1" indent="-342900">
               <a:lnSpc>
-                <a:spcPct val="150000"/>
+                <a:spcPct val="200000"/>
               </a:lnSpc>
               <a:buFont typeface="Wingdings" panose="05000000000000000000" pitchFamily="2" charset="2"/>
               <a:buChar char="v"/>
             </a:pPr>
             <a:r>
-              <a:rPr lang="en-US" altLang="ko-KR" sz="2000" dirty="0"/>
+              <a:rPr lang="en-US" altLang="ko-KR" dirty="0">
+                <a:solidFill>
+                  <a:schemeClr val="bg1">
+                    <a:lumMod val="50000"/>
+                  </a:schemeClr>
+                </a:solidFill>
+                <a:latin typeface="D2Coding" panose="020B0609020101020101" pitchFamily="49" charset="-127"/>
+                <a:ea typeface="D2Coding" panose="020B0609020101020101" pitchFamily="49" charset="-127"/>
+              </a:rPr>
               <a:t>How to write your own training and evaluation loops from scratch</a:t>
             </a:r>
-            <a:endParaRPr lang="en-US" altLang="ko-KR" sz="2400" dirty="0"/>
+            <a:endParaRPr lang="en-US" altLang="ko-KR" sz="2000" dirty="0">
+              <a:solidFill>
+                <a:schemeClr val="bg1">
+                  <a:lumMod val="50000"/>
+                </a:schemeClr>
+              </a:solidFill>
+              <a:latin typeface="D2Coding" panose="020B0609020101020101" pitchFamily="49" charset="-127"/>
+              <a:ea typeface="D2Coding" panose="020B0609020101020101" pitchFamily="49" charset="-127"/>
+            </a:endParaRPr>
           </a:p>
         </p:txBody>
       </p:sp>
@@ -5416,321 +6784,6 @@
         <p:cNvPr id="1" name="">
           <a:extLst>
             <a:ext uri="{FF2B5EF4-FFF2-40B4-BE49-F238E27FC236}">
-              <a16:creationId xmlns:a16="http://schemas.microsoft.com/office/drawing/2014/main" id="{EF7E70B9-5654-A5B6-2611-8A8E13CECC5B}"/>
-            </a:ext>
-          </a:extLst>
-        </p:cNvPr>
-        <p:cNvGrpSpPr/>
-        <p:nvPr/>
-      </p:nvGrpSpPr>
-      <p:grpSpPr>
-        <a:xfrm>
-          <a:off x="0" y="0"/>
-          <a:ext cx="0" cy="0"/>
-          <a:chOff x="0" y="0"/>
-          <a:chExt cx="0" cy="0"/>
-        </a:xfrm>
-      </p:grpSpPr>
-      <p:sp>
-        <p:nvSpPr>
-          <p:cNvPr id="4" name="슬라이드 번호 개체 틀 3">
-            <a:extLst>
-              <a:ext uri="{FF2B5EF4-FFF2-40B4-BE49-F238E27FC236}">
-                <a16:creationId xmlns:a16="http://schemas.microsoft.com/office/drawing/2014/main" id="{411B3FAF-0A59-B809-6001-123EE4730E0D}"/>
-              </a:ext>
-            </a:extLst>
-          </p:cNvPr>
-          <p:cNvSpPr>
-            <a:spLocks noGrp="1"/>
-          </p:cNvSpPr>
-          <p:nvPr>
-            <p:ph type="sldNum" sz="quarter" idx="12"/>
-          </p:nvPr>
-        </p:nvSpPr>
-        <p:spPr>
-          <a:xfrm>
-            <a:off x="10514011" y="6036261"/>
-            <a:ext cx="753545" cy="365125"/>
-          </a:xfrm>
-        </p:spPr>
-        <p:txBody>
-          <a:bodyPr/>
-          <a:lstStyle/>
-          <a:p>
-            <a:fld id="{D57F1E4F-1CFF-5643-939E-217C01CDF565}" type="slidenum">
-              <a:rPr lang="en-US" smtClean="0"/>
-              <a:pPr/>
-              <a:t>5</a:t>
-            </a:fld>
-            <a:endParaRPr lang="en-US" dirty="0"/>
-          </a:p>
-        </p:txBody>
-      </p:sp>
-      <p:sp>
-        <p:nvSpPr>
-          <p:cNvPr id="3" name="제목 1">
-            <a:extLst>
-              <a:ext uri="{FF2B5EF4-FFF2-40B4-BE49-F238E27FC236}">
-                <a16:creationId xmlns:a16="http://schemas.microsoft.com/office/drawing/2014/main" id="{5AA0A530-F655-859A-2D85-453B4F511F99}"/>
-              </a:ext>
-            </a:extLst>
-          </p:cNvPr>
-          <p:cNvSpPr txBox="1">
-            <a:spLocks/>
-          </p:cNvSpPr>
-          <p:nvPr/>
-        </p:nvSpPr>
-        <p:spPr>
-          <a:xfrm>
-            <a:off x="475645" y="481983"/>
-            <a:ext cx="6595715" cy="766439"/>
-          </a:xfrm>
-          <a:prstGeom prst="rect">
-            <a:avLst/>
-          </a:prstGeom>
-        </p:spPr>
-        <p:txBody>
-          <a:bodyPr vert="horz" lIns="91440" tIns="45720" rIns="91440" bIns="45720" rtlCol="0" anchor="ctr">
-            <a:normAutofit/>
-          </a:bodyPr>
-          <a:lstStyle>
-            <a:lvl1pPr algn="ctr" defTabSz="914400" rtl="0" eaLnBrk="1" latinLnBrk="1" hangingPunct="1">
-              <a:lnSpc>
-                <a:spcPct val="90000"/>
-              </a:lnSpc>
-              <a:spcBef>
-                <a:spcPct val="0"/>
-              </a:spcBef>
-              <a:buNone/>
-              <a:defRPr sz="3200" kern="1200" cap="all" baseline="0">
-                <a:solidFill>
-                  <a:schemeClr val="tx1"/>
-                </a:solidFill>
-                <a:effectLst/>
-                <a:latin typeface="Batang" panose="02030600000101010101" pitchFamily="18" charset="-127"/>
-                <a:ea typeface="Batang" panose="02030600000101010101" pitchFamily="18" charset="-127"/>
-                <a:cs typeface="+mj-cs"/>
-              </a:defRPr>
-            </a:lvl1pPr>
-          </a:lstStyle>
-          <a:p>
-            <a:pPr algn="l"/>
-            <a:r>
-              <a:rPr lang="en-US" altLang="ko-KR" sz="2800" b="1" cap="none" dirty="0">
-                <a:latin typeface="Lora" pitchFamily="2" charset="0"/>
-              </a:rPr>
-              <a:t>Different ways to build </a:t>
-            </a:r>
-            <a:r>
-              <a:rPr lang="en-US" altLang="ko-KR" sz="2800" b="1" cap="none" dirty="0" err="1">
-                <a:latin typeface="Lora" pitchFamily="2" charset="0"/>
-              </a:rPr>
-              <a:t>Keras</a:t>
-            </a:r>
-            <a:r>
-              <a:rPr lang="en-US" altLang="ko-KR" sz="2800" b="1" cap="none" dirty="0">
-                <a:latin typeface="Lora" pitchFamily="2" charset="0"/>
-              </a:rPr>
-              <a:t> models</a:t>
-            </a:r>
-          </a:p>
-        </p:txBody>
-      </p:sp>
-      <p:sp>
-        <p:nvSpPr>
-          <p:cNvPr id="6" name="TextBox 5">
-            <a:extLst>
-              <a:ext uri="{FF2B5EF4-FFF2-40B4-BE49-F238E27FC236}">
-                <a16:creationId xmlns:a16="http://schemas.microsoft.com/office/drawing/2014/main" id="{EF903609-6381-C120-0EA0-451E43FA442E}"/>
-              </a:ext>
-            </a:extLst>
-          </p:cNvPr>
-          <p:cNvSpPr txBox="1"/>
-          <p:nvPr/>
-        </p:nvSpPr>
-        <p:spPr>
-          <a:xfrm>
-            <a:off x="8554720" y="822776"/>
-            <a:ext cx="3048000" cy="369332"/>
-          </a:xfrm>
-          <a:prstGeom prst="rect">
-            <a:avLst/>
-          </a:prstGeom>
-          <a:noFill/>
-        </p:spPr>
-        <p:txBody>
-          <a:bodyPr wrap="square">
-            <a:spAutoFit/>
-          </a:bodyPr>
-          <a:lstStyle/>
-          <a:p>
-            <a:pPr algn="r"/>
-            <a:r>
-              <a:rPr lang="en-US" altLang="ko-KR" b="1" dirty="0">
-                <a:latin typeface="Lora" pitchFamily="2" charset="0"/>
-              </a:rPr>
-              <a:t>Functional API</a:t>
-            </a:r>
-          </a:p>
-        </p:txBody>
-      </p:sp>
-      <p:pic>
-        <p:nvPicPr>
-          <p:cNvPr id="4098" name="Picture 2">
-            <a:extLst>
-              <a:ext uri="{FF2B5EF4-FFF2-40B4-BE49-F238E27FC236}">
-                <a16:creationId xmlns:a16="http://schemas.microsoft.com/office/drawing/2014/main" id="{B4854A1D-15A3-B76F-3237-451998C01159}"/>
-              </a:ext>
-            </a:extLst>
-          </p:cNvPr>
-          <p:cNvPicPr>
-            <a:picLocks noChangeAspect="1" noChangeArrowheads="1"/>
-          </p:cNvPicPr>
-          <p:nvPr/>
-        </p:nvPicPr>
-        <p:blipFill>
-          <a:blip r:embed="rId2">
-            <a:extLst>
-              <a:ext uri="{28A0092B-C50C-407E-A947-70E740481C1C}">
-                <a14:useLocalDpi xmlns:a14="http://schemas.microsoft.com/office/drawing/2010/main" val="0"/>
-              </a:ext>
-            </a:extLst>
-          </a:blip>
-          <a:srcRect/>
-          <a:stretch>
-            <a:fillRect/>
-          </a:stretch>
-        </p:blipFill>
-        <p:spPr bwMode="auto">
-          <a:xfrm>
-            <a:off x="979805" y="2736850"/>
-            <a:ext cx="4097757" cy="3300060"/>
-          </a:xfrm>
-          <a:prstGeom prst="rect">
-            <a:avLst/>
-          </a:prstGeom>
-          <a:noFill/>
-          <a:extLst>
-            <a:ext uri="{909E8E84-426E-40DD-AFC4-6F175D3DCCD1}">
-              <a14:hiddenFill xmlns:a14="http://schemas.microsoft.com/office/drawing/2010/main">
-                <a:solidFill>
-                  <a:srgbClr val="FFFFFF"/>
-                </a:solidFill>
-              </a14:hiddenFill>
-            </a:ext>
-          </a:extLst>
-        </p:spPr>
-      </p:pic>
-      <p:pic>
-        <p:nvPicPr>
-          <p:cNvPr id="4100" name="Picture 4">
-            <a:extLst>
-              <a:ext uri="{FF2B5EF4-FFF2-40B4-BE49-F238E27FC236}">
-                <a16:creationId xmlns:a16="http://schemas.microsoft.com/office/drawing/2014/main" id="{86A3EDEA-44E5-F84B-7F48-777ED5F28075}"/>
-              </a:ext>
-            </a:extLst>
-          </p:cNvPr>
-          <p:cNvPicPr>
-            <a:picLocks noChangeAspect="1" noChangeArrowheads="1"/>
-          </p:cNvPicPr>
-          <p:nvPr/>
-        </p:nvPicPr>
-        <p:blipFill>
-          <a:blip r:embed="rId3">
-            <a:extLst>
-              <a:ext uri="{28A0092B-C50C-407E-A947-70E740481C1C}">
-                <a14:useLocalDpi xmlns:a14="http://schemas.microsoft.com/office/drawing/2010/main" val="0"/>
-              </a:ext>
-            </a:extLst>
-          </a:blip>
-          <a:srcRect/>
-          <a:stretch>
-            <a:fillRect/>
-          </a:stretch>
-        </p:blipFill>
-        <p:spPr bwMode="auto">
-          <a:xfrm>
-            <a:off x="5802631" y="2736850"/>
-            <a:ext cx="5200650" cy="3300060"/>
-          </a:xfrm>
-          <a:prstGeom prst="rect">
-            <a:avLst/>
-          </a:prstGeom>
-          <a:noFill/>
-          <a:extLst>
-            <a:ext uri="{909E8E84-426E-40DD-AFC4-6F175D3DCCD1}">
-              <a14:hiddenFill xmlns:a14="http://schemas.microsoft.com/office/drawing/2010/main">
-                <a:solidFill>
-                  <a:srgbClr val="FFFFFF"/>
-                </a:solidFill>
-              </a14:hiddenFill>
-            </a:ext>
-          </a:extLst>
-        </p:spPr>
-      </p:pic>
-      <p:sp>
-        <p:nvSpPr>
-          <p:cNvPr id="8" name="TextBox 7">
-            <a:extLst>
-              <a:ext uri="{FF2B5EF4-FFF2-40B4-BE49-F238E27FC236}">
-                <a16:creationId xmlns:a16="http://schemas.microsoft.com/office/drawing/2014/main" id="{61286AE1-FF3A-2650-C3F3-446BEDC64377}"/>
-              </a:ext>
-            </a:extLst>
-          </p:cNvPr>
-          <p:cNvSpPr txBox="1"/>
-          <p:nvPr/>
-        </p:nvSpPr>
-        <p:spPr>
-          <a:xfrm>
-            <a:off x="2092960" y="1907247"/>
-            <a:ext cx="7264400" cy="369332"/>
-          </a:xfrm>
-          <a:prstGeom prst="rect">
-            <a:avLst/>
-          </a:prstGeom>
-          <a:noFill/>
-        </p:spPr>
-        <p:txBody>
-          <a:bodyPr wrap="square">
-            <a:spAutoFit/>
-          </a:bodyPr>
-          <a:lstStyle/>
-          <a:p>
-            <a:pPr algn="l">
-              <a:buNone/>
-            </a:pPr>
-            <a:r>
-              <a:rPr lang="en-US" altLang="ko-KR" i="0" dirty="0">
-                <a:effectLst/>
-                <a:latin typeface="D2Coding" panose="020B0609020101020101" pitchFamily="49" charset="-127"/>
-                <a:ea typeface="D2Coding" panose="020B0609020101020101" pitchFamily="49" charset="-127"/>
-              </a:rPr>
-              <a:t>The power of the Functional API: Access to layer connectivity</a:t>
-            </a:r>
-          </a:p>
-        </p:txBody>
-      </p:sp>
-    </p:spTree>
-    <p:extLst>
-      <p:ext uri="{BB962C8B-B14F-4D97-AF65-F5344CB8AC3E}">
-        <p14:creationId xmlns:p14="http://schemas.microsoft.com/office/powerpoint/2010/main" val="1901938499"/>
-      </p:ext>
-    </p:extLst>
-  </p:cSld>
-  <p:clrMapOvr>
-    <a:masterClrMapping/>
-  </p:clrMapOvr>
-</p:sld>
-</file>
-
-<file path=ppt/slides/slide6.xml><?xml version="1.0" encoding="utf-8"?>
-<p:sld xmlns:a="http://schemas.openxmlformats.org/drawingml/2006/main" xmlns:r="http://schemas.openxmlformats.org/officeDocument/2006/relationships" xmlns:p="http://schemas.openxmlformats.org/presentationml/2006/main">
-  <p:cSld>
-    <p:spTree>
-      <p:nvGrpSpPr>
-        <p:cNvPr id="1" name="">
-          <a:extLst>
-            <a:ext uri="{FF2B5EF4-FFF2-40B4-BE49-F238E27FC236}">
               <a16:creationId xmlns:a16="http://schemas.microsoft.com/office/drawing/2014/main" id="{B15605F2-9C18-E013-582A-498F408F704E}"/>
             </a:ext>
           </a:extLst>
@@ -5775,7 +6828,7 @@
             <a:fld id="{D57F1E4F-1CFF-5643-939E-217C01CDF565}" type="slidenum">
               <a:rPr lang="en-US" smtClean="0"/>
               <a:pPr/>
-              <a:t>6</a:t>
+              <a:t>5</a:t>
             </a:fld>
             <a:endParaRPr lang="en-US" dirty="0"/>
           </a:p>
@@ -8792,7 +9845,7 @@
 </p:sld>
 </file>
 
-<file path=ppt/slides/slide7.xml><?xml version="1.0" encoding="utf-8"?>
+<file path=ppt/slides/slide6.xml><?xml version="1.0" encoding="utf-8"?>
 <p:sld xmlns:a="http://schemas.openxmlformats.org/drawingml/2006/main" xmlns:r="http://schemas.openxmlformats.org/officeDocument/2006/relationships" xmlns:p="http://schemas.openxmlformats.org/presentationml/2006/main">
   <p:cSld>
     <p:spTree>
@@ -8800,7 +9853,7 @@
         <p:cNvPr id="1" name="">
           <a:extLst>
             <a:ext uri="{FF2B5EF4-FFF2-40B4-BE49-F238E27FC236}">
-              <a16:creationId xmlns:a16="http://schemas.microsoft.com/office/drawing/2014/main" id="{99409AF4-13C2-BB8C-7BFC-6CD15F491502}"/>
+              <a16:creationId xmlns:a16="http://schemas.microsoft.com/office/drawing/2014/main" id="{5B311850-5D22-3010-D783-7AFECAD65B36}"/>
             </a:ext>
           </a:extLst>
         </p:cNvPr>
@@ -8820,7 +9873,7 @@
           <p:cNvPr id="4" name="슬라이드 번호 개체 틀 3">
             <a:extLst>
               <a:ext uri="{FF2B5EF4-FFF2-40B4-BE49-F238E27FC236}">
-                <a16:creationId xmlns:a16="http://schemas.microsoft.com/office/drawing/2014/main" id="{72D42AF9-ED60-E6F6-D796-22E5E2FB0BCE}"/>
+                <a16:creationId xmlns:a16="http://schemas.microsoft.com/office/drawing/2014/main" id="{B9480BA0-D889-798C-9736-4E866309CB7C}"/>
               </a:ext>
             </a:extLst>
           </p:cNvPr>
@@ -8844,7 +9897,7 @@
             <a:fld id="{D57F1E4F-1CFF-5643-939E-217C01CDF565}" type="slidenum">
               <a:rPr lang="en-US" smtClean="0"/>
               <a:pPr/>
-              <a:t>7</a:t>
+              <a:t>6</a:t>
             </a:fld>
             <a:endParaRPr lang="en-US" dirty="0"/>
           </a:p>
@@ -8855,7 +9908,7 @@
           <p:cNvPr id="3" name="제목 1">
             <a:extLst>
               <a:ext uri="{FF2B5EF4-FFF2-40B4-BE49-F238E27FC236}">
-                <a16:creationId xmlns:a16="http://schemas.microsoft.com/office/drawing/2014/main" id="{99A1ECBA-5803-6C29-0C46-8A7E5A8D3E81}"/>
+                <a16:creationId xmlns:a16="http://schemas.microsoft.com/office/drawing/2014/main" id="{A6576AED-7449-1093-E25D-02DC949DE91C}"/>
               </a:ext>
             </a:extLst>
           </p:cNvPr>
@@ -8903,7 +9956,473 @@
               <a:rPr lang="en-US" altLang="ko-KR" sz="2800" b="1" cap="none" dirty="0">
                 <a:latin typeface="Lora" pitchFamily="2" charset="0"/>
               </a:rPr>
-              <a:t>Writing your own training and evaluation loops</a:t>
+              <a:t>Sequential &amp; Functional API</a:t>
+            </a:r>
+          </a:p>
+        </p:txBody>
+      </p:sp>
+      <p:sp>
+        <p:nvSpPr>
+          <p:cNvPr id="14" name="TextBox 13">
+            <a:extLst>
+              <a:ext uri="{FF2B5EF4-FFF2-40B4-BE49-F238E27FC236}">
+                <a16:creationId xmlns:a16="http://schemas.microsoft.com/office/drawing/2014/main" id="{4819E5EA-3A29-AF20-E48F-7748D5997CE1}"/>
+              </a:ext>
+            </a:extLst>
+          </p:cNvPr>
+          <p:cNvSpPr txBox="1"/>
+          <p:nvPr/>
+        </p:nvSpPr>
+        <p:spPr>
+          <a:xfrm>
+            <a:off x="1171574" y="2066370"/>
+            <a:ext cx="9734551" cy="1203984"/>
+          </a:xfrm>
+          <a:prstGeom prst="rect">
+            <a:avLst/>
+          </a:prstGeom>
+          <a:solidFill>
+            <a:srgbClr val="76E3FF"/>
+          </a:solidFill>
+        </p:spPr>
+        <p:txBody>
+          <a:bodyPr wrap="square">
+            <a:spAutoFit/>
+          </a:bodyPr>
+          <a:lstStyle/>
+          <a:p>
+            <a:pPr algn="l" latinLnBrk="0">
+              <a:lnSpc>
+                <a:spcPct val="150000"/>
+              </a:lnSpc>
+              <a:buNone/>
+            </a:pPr>
+            <a:r>
+              <a:rPr lang="en-US" altLang="ko-KR" sz="1600" b="0" i="0" dirty="0">
+                <a:effectLst/>
+                <a:latin typeface="D2Coding" panose="020B0609020101020101" pitchFamily="49" charset="-127"/>
+                <a:ea typeface="D2Coding" panose="020B0609020101020101" pitchFamily="49" charset="-127"/>
+              </a:rPr>
+              <a:t>model = </a:t>
+            </a:r>
+            <a:r>
+              <a:rPr lang="en-US" altLang="ko-KR" sz="1600" b="0" i="0" dirty="0" err="1">
+                <a:effectLst/>
+                <a:latin typeface="D2Coding" panose="020B0609020101020101" pitchFamily="49" charset="-127"/>
+                <a:ea typeface="D2Coding" panose="020B0609020101020101" pitchFamily="49" charset="-127"/>
+              </a:rPr>
+              <a:t>keras.Sequential</a:t>
+            </a:r>
+            <a:r>
+              <a:rPr lang="en-US" altLang="ko-KR" sz="1600" b="0" i="0" dirty="0">
+                <a:effectLst/>
+                <a:latin typeface="D2Coding" panose="020B0609020101020101" pitchFamily="49" charset="-127"/>
+                <a:ea typeface="D2Coding" panose="020B0609020101020101" pitchFamily="49" charset="-127"/>
+              </a:rPr>
+              <a:t>()</a:t>
+            </a:r>
+          </a:p>
+          <a:p>
+            <a:pPr algn="l" latinLnBrk="0">
+              <a:lnSpc>
+                <a:spcPct val="150000"/>
+              </a:lnSpc>
+              <a:buNone/>
+            </a:pPr>
+            <a:r>
+              <a:rPr lang="en-US" altLang="ko-KR" sz="1600" b="0" i="0" dirty="0" err="1">
+                <a:effectLst/>
+                <a:latin typeface="D2Coding" panose="020B0609020101020101" pitchFamily="49" charset="-127"/>
+                <a:ea typeface="D2Coding" panose="020B0609020101020101" pitchFamily="49" charset="-127"/>
+              </a:rPr>
+              <a:t>model.add</a:t>
+            </a:r>
+            <a:r>
+              <a:rPr lang="en-US" altLang="ko-KR" sz="1600" b="0" i="0" dirty="0">
+                <a:effectLst/>
+                <a:latin typeface="D2Coding" panose="020B0609020101020101" pitchFamily="49" charset="-127"/>
+                <a:ea typeface="D2Coding" panose="020B0609020101020101" pitchFamily="49" charset="-127"/>
+              </a:rPr>
+              <a:t>(</a:t>
+            </a:r>
+            <a:r>
+              <a:rPr lang="en-US" altLang="ko-KR" sz="1600" b="0" i="0" dirty="0" err="1">
+                <a:effectLst/>
+                <a:latin typeface="D2Coding" panose="020B0609020101020101" pitchFamily="49" charset="-127"/>
+                <a:ea typeface="D2Coding" panose="020B0609020101020101" pitchFamily="49" charset="-127"/>
+              </a:rPr>
+              <a:t>layers.Dense</a:t>
+            </a:r>
+            <a:r>
+              <a:rPr lang="en-US" altLang="ko-KR" sz="1600" b="0" i="0" dirty="0">
+                <a:effectLst/>
+                <a:latin typeface="D2Coding" panose="020B0609020101020101" pitchFamily="49" charset="-127"/>
+                <a:ea typeface="D2Coding" panose="020B0609020101020101" pitchFamily="49" charset="-127"/>
+              </a:rPr>
+              <a:t>(64, activation="</a:t>
+            </a:r>
+            <a:r>
+              <a:rPr lang="en-US" altLang="ko-KR" sz="1600" b="0" i="0" dirty="0" err="1">
+                <a:effectLst/>
+                <a:latin typeface="D2Coding" panose="020B0609020101020101" pitchFamily="49" charset="-127"/>
+                <a:ea typeface="D2Coding" panose="020B0609020101020101" pitchFamily="49" charset="-127"/>
+              </a:rPr>
+              <a:t>relu</a:t>
+            </a:r>
+            <a:r>
+              <a:rPr lang="en-US" altLang="ko-KR" sz="1600" b="0" i="0" dirty="0">
+                <a:effectLst/>
+                <a:latin typeface="D2Coding" panose="020B0609020101020101" pitchFamily="49" charset="-127"/>
+                <a:ea typeface="D2Coding" panose="020B0609020101020101" pitchFamily="49" charset="-127"/>
+              </a:rPr>
+              <a:t>"))</a:t>
+            </a:r>
+          </a:p>
+          <a:p>
+            <a:pPr algn="l">
+              <a:lnSpc>
+                <a:spcPct val="150000"/>
+              </a:lnSpc>
+              <a:buNone/>
+            </a:pPr>
+            <a:r>
+              <a:rPr lang="en-US" altLang="ko-KR" sz="1600" b="0" i="0" dirty="0" err="1">
+                <a:effectLst/>
+                <a:latin typeface="D2Coding" panose="020B0609020101020101" pitchFamily="49" charset="-127"/>
+                <a:ea typeface="D2Coding" panose="020B0609020101020101" pitchFamily="49" charset="-127"/>
+              </a:rPr>
+              <a:t>model.add</a:t>
+            </a:r>
+            <a:r>
+              <a:rPr lang="en-US" altLang="ko-KR" sz="1600" b="0" i="0" dirty="0">
+                <a:effectLst/>
+                <a:latin typeface="D2Coding" panose="020B0609020101020101" pitchFamily="49" charset="-127"/>
+                <a:ea typeface="D2Coding" panose="020B0609020101020101" pitchFamily="49" charset="-127"/>
+              </a:rPr>
+              <a:t>(</a:t>
+            </a:r>
+            <a:r>
+              <a:rPr lang="en-US" altLang="ko-KR" sz="1600" b="0" i="0" dirty="0" err="1">
+                <a:effectLst/>
+                <a:latin typeface="D2Coding" panose="020B0609020101020101" pitchFamily="49" charset="-127"/>
+                <a:ea typeface="D2Coding" panose="020B0609020101020101" pitchFamily="49" charset="-127"/>
+              </a:rPr>
+              <a:t>layers.Dense</a:t>
+            </a:r>
+            <a:r>
+              <a:rPr lang="en-US" altLang="ko-KR" sz="1600" b="0" i="0" dirty="0">
+                <a:effectLst/>
+                <a:latin typeface="D2Coding" panose="020B0609020101020101" pitchFamily="49" charset="-127"/>
+                <a:ea typeface="D2Coding" panose="020B0609020101020101" pitchFamily="49" charset="-127"/>
+              </a:rPr>
+              <a:t>(10, activation="</a:t>
+            </a:r>
+            <a:r>
+              <a:rPr lang="en-US" altLang="ko-KR" sz="1600" b="0" i="0" dirty="0" err="1">
+                <a:effectLst/>
+                <a:latin typeface="D2Coding" panose="020B0609020101020101" pitchFamily="49" charset="-127"/>
+                <a:ea typeface="D2Coding" panose="020B0609020101020101" pitchFamily="49" charset="-127"/>
+              </a:rPr>
+              <a:t>softmax</a:t>
+            </a:r>
+            <a:r>
+              <a:rPr lang="en-US" altLang="ko-KR" sz="1600" b="0" i="0" dirty="0">
+                <a:effectLst/>
+                <a:latin typeface="D2Coding" panose="020B0609020101020101" pitchFamily="49" charset="-127"/>
+                <a:ea typeface="D2Coding" panose="020B0609020101020101" pitchFamily="49" charset="-127"/>
+              </a:rPr>
+              <a:t>"))</a:t>
+            </a:r>
+          </a:p>
+        </p:txBody>
+      </p:sp>
+      <p:sp>
+        <p:nvSpPr>
+          <p:cNvPr id="36" name="TextBox 35">
+            <a:extLst>
+              <a:ext uri="{FF2B5EF4-FFF2-40B4-BE49-F238E27FC236}">
+                <a16:creationId xmlns:a16="http://schemas.microsoft.com/office/drawing/2014/main" id="{603068ED-9BE3-50B9-4C8D-22E31BE93248}"/>
+              </a:ext>
+            </a:extLst>
+          </p:cNvPr>
+          <p:cNvSpPr txBox="1"/>
+          <p:nvPr/>
+        </p:nvSpPr>
+        <p:spPr>
+          <a:xfrm>
+            <a:off x="1171574" y="4505421"/>
+            <a:ext cx="9734550" cy="1531830"/>
+          </a:xfrm>
+          <a:prstGeom prst="rect">
+            <a:avLst/>
+          </a:prstGeom>
+          <a:solidFill>
+            <a:srgbClr val="76E3FF"/>
+          </a:solidFill>
+        </p:spPr>
+        <p:txBody>
+          <a:bodyPr wrap="square">
+            <a:spAutoFit/>
+          </a:bodyPr>
+          <a:lstStyle/>
+          <a:p>
+            <a:pPr algn="l" latinLnBrk="0">
+              <a:lnSpc>
+                <a:spcPct val="150000"/>
+              </a:lnSpc>
+              <a:buNone/>
+            </a:pPr>
+            <a:r>
+              <a:rPr lang="en-US" altLang="ko-KR" sz="1600" dirty="0">
+                <a:latin typeface="D2Coding" panose="020B0609020101020101" pitchFamily="49" charset="-127"/>
+                <a:ea typeface="D2Coding" panose="020B0609020101020101" pitchFamily="49" charset="-127"/>
+              </a:rPr>
+              <a:t>inputs = </a:t>
+            </a:r>
+            <a:r>
+              <a:rPr lang="en-US" altLang="ko-KR" sz="1600" dirty="0" err="1">
+                <a:latin typeface="D2Coding" panose="020B0609020101020101" pitchFamily="49" charset="-127"/>
+                <a:ea typeface="D2Coding" panose="020B0609020101020101" pitchFamily="49" charset="-127"/>
+              </a:rPr>
+              <a:t>keras.Input</a:t>
+            </a:r>
+            <a:r>
+              <a:rPr lang="en-US" altLang="ko-KR" sz="1600" dirty="0">
+                <a:latin typeface="D2Coding" panose="020B0609020101020101" pitchFamily="49" charset="-127"/>
+                <a:ea typeface="D2Coding" panose="020B0609020101020101" pitchFamily="49" charset="-127"/>
+              </a:rPr>
+              <a:t>(shape=(3,), name="</a:t>
+            </a:r>
+            <a:r>
+              <a:rPr lang="en-US" altLang="ko-KR" sz="1600" dirty="0" err="1">
+                <a:latin typeface="D2Coding" panose="020B0609020101020101" pitchFamily="49" charset="-127"/>
+                <a:ea typeface="D2Coding" panose="020B0609020101020101" pitchFamily="49" charset="-127"/>
+              </a:rPr>
+              <a:t>my_input</a:t>
+            </a:r>
+            <a:r>
+              <a:rPr lang="en-US" altLang="ko-KR" sz="1600" dirty="0">
+                <a:latin typeface="D2Coding" panose="020B0609020101020101" pitchFamily="49" charset="-127"/>
+                <a:ea typeface="D2Coding" panose="020B0609020101020101" pitchFamily="49" charset="-127"/>
+              </a:rPr>
+              <a:t>")</a:t>
+            </a:r>
+          </a:p>
+          <a:p>
+            <a:pPr algn="l" latinLnBrk="0">
+              <a:lnSpc>
+                <a:spcPct val="150000"/>
+              </a:lnSpc>
+              <a:buNone/>
+            </a:pPr>
+            <a:r>
+              <a:rPr lang="en-US" altLang="ko-KR" sz="1600" dirty="0">
+                <a:latin typeface="D2Coding" panose="020B0609020101020101" pitchFamily="49" charset="-127"/>
+                <a:ea typeface="D2Coding" panose="020B0609020101020101" pitchFamily="49" charset="-127"/>
+              </a:rPr>
+              <a:t>features = </a:t>
+            </a:r>
+            <a:r>
+              <a:rPr lang="en-US" altLang="ko-KR" sz="1600" dirty="0" err="1">
+                <a:latin typeface="D2Coding" panose="020B0609020101020101" pitchFamily="49" charset="-127"/>
+                <a:ea typeface="D2Coding" panose="020B0609020101020101" pitchFamily="49" charset="-127"/>
+              </a:rPr>
+              <a:t>layers.Dense</a:t>
+            </a:r>
+            <a:r>
+              <a:rPr lang="en-US" altLang="ko-KR" sz="1600" dirty="0">
+                <a:latin typeface="D2Coding" panose="020B0609020101020101" pitchFamily="49" charset="-127"/>
+                <a:ea typeface="D2Coding" panose="020B0609020101020101" pitchFamily="49" charset="-127"/>
+              </a:rPr>
+              <a:t>(64, activation="</a:t>
+            </a:r>
+            <a:r>
+              <a:rPr lang="en-US" altLang="ko-KR" sz="1600" dirty="0" err="1">
+                <a:latin typeface="D2Coding" panose="020B0609020101020101" pitchFamily="49" charset="-127"/>
+                <a:ea typeface="D2Coding" panose="020B0609020101020101" pitchFamily="49" charset="-127"/>
+              </a:rPr>
+              <a:t>relu</a:t>
+            </a:r>
+            <a:r>
+              <a:rPr lang="en-US" altLang="ko-KR" sz="1600" dirty="0">
+                <a:latin typeface="D2Coding" panose="020B0609020101020101" pitchFamily="49" charset="-127"/>
+                <a:ea typeface="D2Coding" panose="020B0609020101020101" pitchFamily="49" charset="-127"/>
+              </a:rPr>
+              <a:t>")(inputs)</a:t>
+            </a:r>
+          </a:p>
+          <a:p>
+            <a:pPr algn="l" latinLnBrk="0">
+              <a:lnSpc>
+                <a:spcPct val="150000"/>
+              </a:lnSpc>
+              <a:buNone/>
+            </a:pPr>
+            <a:r>
+              <a:rPr lang="en-US" altLang="ko-KR" sz="1600" dirty="0">
+                <a:latin typeface="D2Coding" panose="020B0609020101020101" pitchFamily="49" charset="-127"/>
+                <a:ea typeface="D2Coding" panose="020B0609020101020101" pitchFamily="49" charset="-127"/>
+              </a:rPr>
+              <a:t>outputs = </a:t>
+            </a:r>
+            <a:r>
+              <a:rPr lang="en-US" altLang="ko-KR" sz="1600" dirty="0" err="1">
+                <a:latin typeface="D2Coding" panose="020B0609020101020101" pitchFamily="49" charset="-127"/>
+                <a:ea typeface="D2Coding" panose="020B0609020101020101" pitchFamily="49" charset="-127"/>
+              </a:rPr>
+              <a:t>layers.Dense</a:t>
+            </a:r>
+            <a:r>
+              <a:rPr lang="en-US" altLang="ko-KR" sz="1600" dirty="0">
+                <a:latin typeface="D2Coding" panose="020B0609020101020101" pitchFamily="49" charset="-127"/>
+                <a:ea typeface="D2Coding" panose="020B0609020101020101" pitchFamily="49" charset="-127"/>
+              </a:rPr>
+              <a:t>(10, activation="</a:t>
+            </a:r>
+            <a:r>
+              <a:rPr lang="en-US" altLang="ko-KR" sz="1600" dirty="0" err="1">
+                <a:latin typeface="D2Coding" panose="020B0609020101020101" pitchFamily="49" charset="-127"/>
+                <a:ea typeface="D2Coding" panose="020B0609020101020101" pitchFamily="49" charset="-127"/>
+              </a:rPr>
+              <a:t>softmax</a:t>
+            </a:r>
+            <a:r>
+              <a:rPr lang="en-US" altLang="ko-KR" sz="1600" dirty="0">
+                <a:latin typeface="D2Coding" panose="020B0609020101020101" pitchFamily="49" charset="-127"/>
+                <a:ea typeface="D2Coding" panose="020B0609020101020101" pitchFamily="49" charset="-127"/>
+              </a:rPr>
+              <a:t>")(features)</a:t>
+            </a:r>
+          </a:p>
+          <a:p>
+            <a:pPr algn="l">
+              <a:lnSpc>
+                <a:spcPct val="150000"/>
+              </a:lnSpc>
+              <a:buNone/>
+            </a:pPr>
+            <a:r>
+              <a:rPr lang="en-US" altLang="ko-KR" sz="1600" dirty="0">
+                <a:latin typeface="D2Coding" panose="020B0609020101020101" pitchFamily="49" charset="-127"/>
+                <a:ea typeface="D2Coding" panose="020B0609020101020101" pitchFamily="49" charset="-127"/>
+              </a:rPr>
+              <a:t>model = </a:t>
+            </a:r>
+            <a:r>
+              <a:rPr lang="en-US" altLang="ko-KR" sz="1600" dirty="0" err="1">
+                <a:latin typeface="D2Coding" panose="020B0609020101020101" pitchFamily="49" charset="-127"/>
+                <a:ea typeface="D2Coding" panose="020B0609020101020101" pitchFamily="49" charset="-127"/>
+              </a:rPr>
+              <a:t>keras.Model</a:t>
+            </a:r>
+            <a:r>
+              <a:rPr lang="en-US" altLang="ko-KR" sz="1600" dirty="0">
+                <a:latin typeface="D2Coding" panose="020B0609020101020101" pitchFamily="49" charset="-127"/>
+                <a:ea typeface="D2Coding" panose="020B0609020101020101" pitchFamily="49" charset="-127"/>
+              </a:rPr>
+              <a:t>(inputs=inputs, outputs=outputs, name="</a:t>
+            </a:r>
+            <a:r>
+              <a:rPr lang="en-US" altLang="ko-KR" sz="1600" dirty="0" err="1">
+                <a:latin typeface="D2Coding" panose="020B0609020101020101" pitchFamily="49" charset="-127"/>
+                <a:ea typeface="D2Coding" panose="020B0609020101020101" pitchFamily="49" charset="-127"/>
+              </a:rPr>
+              <a:t>my_functional_model</a:t>
+            </a:r>
+            <a:r>
+              <a:rPr lang="en-US" altLang="ko-KR" sz="1600" dirty="0">
+                <a:latin typeface="D2Coding" panose="020B0609020101020101" pitchFamily="49" charset="-127"/>
+                <a:ea typeface="D2Coding" panose="020B0609020101020101" pitchFamily="49" charset="-127"/>
+              </a:rPr>
+              <a:t>")</a:t>
+            </a:r>
+          </a:p>
+        </p:txBody>
+      </p:sp>
+      <p:sp>
+        <p:nvSpPr>
+          <p:cNvPr id="44" name="TextBox 43">
+            <a:extLst>
+              <a:ext uri="{FF2B5EF4-FFF2-40B4-BE49-F238E27FC236}">
+                <a16:creationId xmlns:a16="http://schemas.microsoft.com/office/drawing/2014/main" id="{2CDAC854-C3D5-1107-4870-FBDC850F27E0}"/>
+              </a:ext>
+            </a:extLst>
+          </p:cNvPr>
+          <p:cNvSpPr txBox="1"/>
+          <p:nvPr/>
+        </p:nvSpPr>
+        <p:spPr>
+          <a:xfrm>
+            <a:off x="1171574" y="1702235"/>
+            <a:ext cx="2286001" cy="369332"/>
+          </a:xfrm>
+          <a:prstGeom prst="rect">
+            <a:avLst/>
+          </a:prstGeom>
+          <a:solidFill>
+            <a:schemeClr val="tx1"/>
+          </a:solidFill>
+        </p:spPr>
+        <p:txBody>
+          <a:bodyPr wrap="square">
+            <a:spAutoFit/>
+          </a:bodyPr>
+          <a:lstStyle/>
+          <a:p>
+            <a:pPr algn="l"/>
+            <a:r>
+              <a:rPr lang="en-US" altLang="ko-KR" sz="1800" b="1" cap="none" dirty="0">
+                <a:solidFill>
+                  <a:schemeClr val="bg1"/>
+                </a:solidFill>
+                <a:latin typeface="D2Coding" panose="020B0609020101020101" pitchFamily="49" charset="-127"/>
+                <a:ea typeface="D2Coding" panose="020B0609020101020101" pitchFamily="49" charset="-127"/>
+              </a:rPr>
+              <a:t>Sequential API</a:t>
+            </a:r>
+          </a:p>
+        </p:txBody>
+      </p:sp>
+      <p:sp>
+        <p:nvSpPr>
+          <p:cNvPr id="45" name="TextBox 44">
+            <a:extLst>
+              <a:ext uri="{FF2B5EF4-FFF2-40B4-BE49-F238E27FC236}">
+                <a16:creationId xmlns:a16="http://schemas.microsoft.com/office/drawing/2014/main" id="{FCF4BAD4-E68D-B7C6-DFC3-8A348A302B2F}"/>
+              </a:ext>
+            </a:extLst>
+          </p:cNvPr>
+          <p:cNvSpPr txBox="1"/>
+          <p:nvPr/>
+        </p:nvSpPr>
+        <p:spPr>
+          <a:xfrm>
+            <a:off x="1171574" y="4141286"/>
+            <a:ext cx="2286001" cy="369332"/>
+          </a:xfrm>
+          <a:prstGeom prst="rect">
+            <a:avLst/>
+          </a:prstGeom>
+          <a:solidFill>
+            <a:schemeClr val="tx1"/>
+          </a:solidFill>
+        </p:spPr>
+        <p:txBody>
+          <a:bodyPr wrap="square">
+            <a:spAutoFit/>
+          </a:bodyPr>
+          <a:lstStyle/>
+          <a:p>
+            <a:pPr algn="l"/>
+            <a:r>
+              <a:rPr lang="en-US" altLang="ko-KR" sz="1800" b="1" cap="none" dirty="0">
+                <a:solidFill>
+                  <a:schemeClr val="bg1"/>
+                </a:solidFill>
+                <a:latin typeface="D2Coding" panose="020B0609020101020101" pitchFamily="49" charset="-127"/>
+                <a:ea typeface="D2Coding" panose="020B0609020101020101" pitchFamily="49" charset="-127"/>
+              </a:rPr>
+              <a:t>Functional API</a:t>
             </a:r>
           </a:p>
         </p:txBody>
@@ -8911,7 +10430,2405 @@
     </p:spTree>
     <p:extLst>
       <p:ext uri="{BB962C8B-B14F-4D97-AF65-F5344CB8AC3E}">
-        <p14:creationId xmlns:p14="http://schemas.microsoft.com/office/powerpoint/2010/main" val="1289008243"/>
+        <p14:creationId xmlns:p14="http://schemas.microsoft.com/office/powerpoint/2010/main" val="2680037129"/>
+      </p:ext>
+    </p:extLst>
+  </p:cSld>
+  <p:clrMapOvr>
+    <a:masterClrMapping/>
+  </p:clrMapOvr>
+</p:sld>
+</file>
+
+<file path=ppt/slides/slide7.xml><?xml version="1.0" encoding="utf-8"?>
+<p:sld xmlns:a="http://schemas.openxmlformats.org/drawingml/2006/main" xmlns:r="http://schemas.openxmlformats.org/officeDocument/2006/relationships" xmlns:p="http://schemas.openxmlformats.org/presentationml/2006/main">
+  <p:cSld>
+    <p:spTree>
+      <p:nvGrpSpPr>
+        <p:cNvPr id="1" name="">
+          <a:extLst>
+            <a:ext uri="{FF2B5EF4-FFF2-40B4-BE49-F238E27FC236}">
+              <a16:creationId xmlns:a16="http://schemas.microsoft.com/office/drawing/2014/main" id="{DB1FC356-FBD2-E81A-AE71-C3ED95915733}"/>
+            </a:ext>
+          </a:extLst>
+        </p:cNvPr>
+        <p:cNvGrpSpPr/>
+        <p:nvPr/>
+      </p:nvGrpSpPr>
+      <p:grpSpPr>
+        <a:xfrm>
+          <a:off x="0" y="0"/>
+          <a:ext cx="0" cy="0"/>
+          <a:chOff x="0" y="0"/>
+          <a:chExt cx="0" cy="0"/>
+        </a:xfrm>
+      </p:grpSpPr>
+      <p:sp>
+        <p:nvSpPr>
+          <p:cNvPr id="4" name="슬라이드 번호 개체 틀 3">
+            <a:extLst>
+              <a:ext uri="{FF2B5EF4-FFF2-40B4-BE49-F238E27FC236}">
+                <a16:creationId xmlns:a16="http://schemas.microsoft.com/office/drawing/2014/main" id="{4C1C24E2-AC75-8A2E-66CB-CC1EF15F6295}"/>
+              </a:ext>
+            </a:extLst>
+          </p:cNvPr>
+          <p:cNvSpPr>
+            <a:spLocks noGrp="1"/>
+          </p:cNvSpPr>
+          <p:nvPr>
+            <p:ph type="sldNum" sz="quarter" idx="12"/>
+          </p:nvPr>
+        </p:nvSpPr>
+        <p:spPr>
+          <a:xfrm>
+            <a:off x="10514011" y="6036261"/>
+            <a:ext cx="753545" cy="365125"/>
+          </a:xfrm>
+        </p:spPr>
+        <p:txBody>
+          <a:bodyPr/>
+          <a:lstStyle/>
+          <a:p>
+            <a:fld id="{D57F1E4F-1CFF-5643-939E-217C01CDF565}" type="slidenum">
+              <a:rPr lang="en-US" smtClean="0"/>
+              <a:pPr/>
+              <a:t>7</a:t>
+            </a:fld>
+            <a:endParaRPr lang="en-US" dirty="0"/>
+          </a:p>
+        </p:txBody>
+      </p:sp>
+      <p:sp>
+        <p:nvSpPr>
+          <p:cNvPr id="3" name="제목 1">
+            <a:extLst>
+              <a:ext uri="{FF2B5EF4-FFF2-40B4-BE49-F238E27FC236}">
+                <a16:creationId xmlns:a16="http://schemas.microsoft.com/office/drawing/2014/main" id="{05A76447-D581-98E7-8FBA-60EA8140BE50}"/>
+              </a:ext>
+            </a:extLst>
+          </p:cNvPr>
+          <p:cNvSpPr txBox="1">
+            <a:spLocks/>
+          </p:cNvSpPr>
+          <p:nvPr/>
+        </p:nvSpPr>
+        <p:spPr>
+          <a:xfrm>
+            <a:off x="475645" y="481983"/>
+            <a:ext cx="10353762" cy="766439"/>
+          </a:xfrm>
+          <a:prstGeom prst="rect">
+            <a:avLst/>
+          </a:prstGeom>
+        </p:spPr>
+        <p:txBody>
+          <a:bodyPr vert="horz" lIns="91440" tIns="45720" rIns="91440" bIns="45720" rtlCol="0" anchor="ctr">
+            <a:normAutofit/>
+          </a:bodyPr>
+          <a:lstStyle>
+            <a:lvl1pPr algn="ctr" defTabSz="914400" rtl="0" eaLnBrk="1" latinLnBrk="1" hangingPunct="1">
+              <a:lnSpc>
+                <a:spcPct val="90000"/>
+              </a:lnSpc>
+              <a:spcBef>
+                <a:spcPct val="0"/>
+              </a:spcBef>
+              <a:buNone/>
+              <a:defRPr sz="3200" kern="1200" cap="all" baseline="0">
+                <a:solidFill>
+                  <a:schemeClr val="tx1"/>
+                </a:solidFill>
+                <a:effectLst/>
+                <a:latin typeface="Batang" panose="02030600000101010101" pitchFamily="18" charset="-127"/>
+                <a:ea typeface="Batang" panose="02030600000101010101" pitchFamily="18" charset="-127"/>
+                <a:cs typeface="+mj-cs"/>
+              </a:defRPr>
+            </a:lvl1pPr>
+          </a:lstStyle>
+          <a:p>
+            <a:pPr algn="l"/>
+            <a:r>
+              <a:rPr lang="en-US" altLang="ko-KR" sz="2800" b="1" cap="none" dirty="0">
+                <a:latin typeface="Lora" pitchFamily="2" charset="0"/>
+              </a:rPr>
+              <a:t>Training a multi-input, multi-output model</a:t>
+            </a:r>
+          </a:p>
+        </p:txBody>
+      </p:sp>
+      <p:sp>
+        <p:nvSpPr>
+          <p:cNvPr id="49" name="TextBox 48">
+            <a:extLst>
+              <a:ext uri="{FF2B5EF4-FFF2-40B4-BE49-F238E27FC236}">
+                <a16:creationId xmlns:a16="http://schemas.microsoft.com/office/drawing/2014/main" id="{CF05F890-3BDF-142E-E9AB-2BCBB1F65206}"/>
+              </a:ext>
+            </a:extLst>
+          </p:cNvPr>
+          <p:cNvSpPr txBox="1"/>
+          <p:nvPr/>
+        </p:nvSpPr>
+        <p:spPr>
+          <a:xfrm>
+            <a:off x="571197" y="1383594"/>
+            <a:ext cx="11087705" cy="4708981"/>
+          </a:xfrm>
+          <a:prstGeom prst="rect">
+            <a:avLst/>
+          </a:prstGeom>
+          <a:solidFill>
+            <a:srgbClr val="76E3FF"/>
+          </a:solidFill>
+        </p:spPr>
+        <p:txBody>
+          <a:bodyPr wrap="square">
+            <a:spAutoFit/>
+          </a:bodyPr>
+          <a:lstStyle/>
+          <a:p>
+            <a:r>
+              <a:rPr lang="en-US" altLang="ko-KR" sz="1200" dirty="0">
+                <a:latin typeface="D2Coding" panose="020B0609020101020101" pitchFamily="49" charset="-127"/>
+                <a:ea typeface="D2Coding" panose="020B0609020101020101" pitchFamily="49" charset="-127"/>
+              </a:rPr>
+              <a:t># 1. </a:t>
+            </a:r>
+            <a:r>
+              <a:rPr lang="ko-KR" altLang="en-US" sz="1200" dirty="0" err="1">
+                <a:latin typeface="D2Coding" panose="020B0609020101020101" pitchFamily="49" charset="-127"/>
+                <a:ea typeface="D2Coding" panose="020B0609020101020101" pitchFamily="49" charset="-127"/>
+              </a:rPr>
+              <a:t>하이퍼파라미터</a:t>
+            </a:r>
+            <a:r>
+              <a:rPr lang="ko-KR" altLang="en-US" sz="1200" dirty="0">
+                <a:latin typeface="D2Coding" panose="020B0609020101020101" pitchFamily="49" charset="-127"/>
+                <a:ea typeface="D2Coding" panose="020B0609020101020101" pitchFamily="49" charset="-127"/>
+              </a:rPr>
+              <a:t> 및 차원 크기 정의</a:t>
+            </a:r>
+            <a:endParaRPr lang="en-US" altLang="ko-KR" sz="1200" dirty="0">
+              <a:latin typeface="D2Coding" panose="020B0609020101020101" pitchFamily="49" charset="-127"/>
+              <a:ea typeface="D2Coding" panose="020B0609020101020101" pitchFamily="49" charset="-127"/>
+            </a:endParaRPr>
+          </a:p>
+          <a:p>
+            <a:r>
+              <a:rPr lang="ko-KR" altLang="en-US" sz="1200" dirty="0" err="1">
+                <a:latin typeface="D2Coding" panose="020B0609020101020101" pitchFamily="49" charset="-127"/>
+                <a:ea typeface="D2Coding" panose="020B0609020101020101" pitchFamily="49" charset="-127"/>
+              </a:rPr>
+              <a:t>vocabulary_size</a:t>
+            </a:r>
+            <a:r>
+              <a:rPr lang="ko-KR" altLang="en-US" sz="1200" dirty="0">
+                <a:latin typeface="D2Coding" panose="020B0609020101020101" pitchFamily="49" charset="-127"/>
+                <a:ea typeface="D2Coding" panose="020B0609020101020101" pitchFamily="49" charset="-127"/>
+              </a:rPr>
+              <a:t> = 10000  # 텍스트에 사용할 단어 사전 크기 (단어 종류 개수)</a:t>
+            </a:r>
+            <a:endParaRPr lang="en-US" altLang="ko-KR" sz="1200" dirty="0">
+              <a:latin typeface="D2Coding" panose="020B0609020101020101" pitchFamily="49" charset="-127"/>
+              <a:ea typeface="D2Coding" panose="020B0609020101020101" pitchFamily="49" charset="-127"/>
+            </a:endParaRPr>
+          </a:p>
+          <a:p>
+            <a:r>
+              <a:rPr lang="ko-KR" altLang="en-US" sz="1200" dirty="0" err="1">
+                <a:latin typeface="D2Coding" panose="020B0609020101020101" pitchFamily="49" charset="-127"/>
+                <a:ea typeface="D2Coding" panose="020B0609020101020101" pitchFamily="49" charset="-127"/>
+              </a:rPr>
+              <a:t>num_tags</a:t>
+            </a:r>
+            <a:r>
+              <a:rPr lang="ko-KR" altLang="en-US" sz="1200" dirty="0">
+                <a:latin typeface="D2Coding" panose="020B0609020101020101" pitchFamily="49" charset="-127"/>
+                <a:ea typeface="D2Coding" panose="020B0609020101020101" pitchFamily="49" charset="-127"/>
+              </a:rPr>
+              <a:t> = 100          # </a:t>
+            </a:r>
+            <a:r>
+              <a:rPr lang="ko-KR" altLang="en-US" sz="1200" dirty="0" err="1">
+                <a:latin typeface="D2Coding" panose="020B0609020101020101" pitchFamily="49" charset="-127"/>
+                <a:ea typeface="D2Coding" panose="020B0609020101020101" pitchFamily="49" charset="-127"/>
+              </a:rPr>
+              <a:t>멀티핫</a:t>
+            </a:r>
+            <a:r>
+              <a:rPr lang="ko-KR" altLang="en-US" sz="1200" dirty="0">
+                <a:latin typeface="D2Coding" panose="020B0609020101020101" pitchFamily="49" charset="-127"/>
+                <a:ea typeface="D2Coding" panose="020B0609020101020101" pitchFamily="49" charset="-127"/>
+              </a:rPr>
+              <a:t> </a:t>
+            </a:r>
+            <a:r>
+              <a:rPr lang="ko-KR" altLang="en-US" sz="1200" dirty="0" err="1">
+                <a:latin typeface="D2Coding" panose="020B0609020101020101" pitchFamily="49" charset="-127"/>
+                <a:ea typeface="D2Coding" panose="020B0609020101020101" pitchFamily="49" charset="-127"/>
+              </a:rPr>
+              <a:t>인코딩된</a:t>
+            </a:r>
+            <a:r>
+              <a:rPr lang="ko-KR" altLang="en-US" sz="1200" dirty="0">
+                <a:latin typeface="D2Coding" panose="020B0609020101020101" pitchFamily="49" charset="-127"/>
+                <a:ea typeface="D2Coding" panose="020B0609020101020101" pitchFamily="49" charset="-127"/>
+              </a:rPr>
+              <a:t> 태그의 종류 개수</a:t>
+            </a:r>
+          </a:p>
+          <a:p>
+            <a:r>
+              <a:rPr lang="ko-KR" altLang="en-US" sz="1200" dirty="0" err="1">
+                <a:latin typeface="D2Coding" panose="020B0609020101020101" pitchFamily="49" charset="-127"/>
+                <a:ea typeface="D2Coding" panose="020B0609020101020101" pitchFamily="49" charset="-127"/>
+              </a:rPr>
+              <a:t>num_departments</a:t>
+            </a:r>
+            <a:r>
+              <a:rPr lang="ko-KR" altLang="en-US" sz="1200" dirty="0">
+                <a:latin typeface="D2Coding" panose="020B0609020101020101" pitchFamily="49" charset="-127"/>
+                <a:ea typeface="D2Coding" panose="020B0609020101020101" pitchFamily="49" charset="-127"/>
+              </a:rPr>
+              <a:t> = 4     # 분류할 담당 부서 수 (클래스 개수)</a:t>
+            </a:r>
+          </a:p>
+          <a:p>
+            <a:endParaRPr lang="ko-KR" altLang="en-US" sz="1200" dirty="0">
+              <a:latin typeface="D2Coding" panose="020B0609020101020101" pitchFamily="49" charset="-127"/>
+              <a:ea typeface="D2Coding" panose="020B0609020101020101" pitchFamily="49" charset="-127"/>
+            </a:endParaRPr>
+          </a:p>
+          <a:p>
+            <a:r>
+              <a:rPr lang="ko-KR" altLang="en-US" sz="1200" dirty="0">
+                <a:latin typeface="D2Coding" panose="020B0609020101020101" pitchFamily="49" charset="-127"/>
+                <a:ea typeface="D2Coding" panose="020B0609020101020101" pitchFamily="49" charset="-127"/>
+              </a:rPr>
+              <a:t># </a:t>
+            </a:r>
+            <a:r>
+              <a:rPr lang="en-US" altLang="ko-KR" sz="1200" dirty="0">
+                <a:latin typeface="D2Coding" panose="020B0609020101020101" pitchFamily="49" charset="-127"/>
+                <a:ea typeface="D2Coding" panose="020B0609020101020101" pitchFamily="49" charset="-127"/>
+              </a:rPr>
+              <a:t>2</a:t>
+            </a:r>
+            <a:r>
+              <a:rPr lang="ko-KR" altLang="en-US" sz="1200" dirty="0">
+                <a:latin typeface="D2Coding" panose="020B0609020101020101" pitchFamily="49" charset="-127"/>
+                <a:ea typeface="D2Coding" panose="020B0609020101020101" pitchFamily="49" charset="-127"/>
+              </a:rPr>
+              <a:t>. 다중 입력(</a:t>
+            </a:r>
+            <a:r>
+              <a:rPr lang="ko-KR" altLang="en-US" sz="1200" dirty="0" err="1">
+                <a:latin typeface="D2Coding" panose="020B0609020101020101" pitchFamily="49" charset="-127"/>
+                <a:ea typeface="D2Coding" panose="020B0609020101020101" pitchFamily="49" charset="-127"/>
+              </a:rPr>
+              <a:t>Multi-input</a:t>
+            </a:r>
+            <a:r>
+              <a:rPr lang="ko-KR" altLang="en-US" sz="1200" dirty="0">
+                <a:latin typeface="D2Coding" panose="020B0609020101020101" pitchFamily="49" charset="-127"/>
+                <a:ea typeface="D2Coding" panose="020B0609020101020101" pitchFamily="49" charset="-127"/>
+              </a:rPr>
+              <a:t>) 레이어 정의 </a:t>
+            </a:r>
+            <a:r>
+              <a:rPr lang="en-US" altLang="ko-KR" sz="1200" dirty="0">
+                <a:latin typeface="D2Coding" panose="020B0609020101020101" pitchFamily="49" charset="-127"/>
+                <a:ea typeface="D2Coding" panose="020B0609020101020101" pitchFamily="49" charset="-127"/>
+              </a:rPr>
+              <a:t>: </a:t>
+            </a:r>
+            <a:r>
+              <a:rPr lang="ko-KR" altLang="en-US" sz="1200" dirty="0">
+                <a:latin typeface="D2Coding" panose="020B0609020101020101" pitchFamily="49" charset="-127"/>
+                <a:ea typeface="D2Coding" panose="020B0609020101020101" pitchFamily="49" charset="-127"/>
+              </a:rPr>
+              <a:t>티켓 제목 입력: (</a:t>
+            </a:r>
+            <a:r>
+              <a:rPr lang="ko-KR" altLang="en-US" sz="1200" dirty="0" err="1">
+                <a:latin typeface="D2Coding" panose="020B0609020101020101" pitchFamily="49" charset="-127"/>
+                <a:ea typeface="D2Coding" panose="020B0609020101020101" pitchFamily="49" charset="-127"/>
+              </a:rPr>
+              <a:t>None</a:t>
+            </a:r>
+            <a:r>
+              <a:rPr lang="ko-KR" altLang="en-US" sz="1200" dirty="0">
+                <a:latin typeface="D2Coding" panose="020B0609020101020101" pitchFamily="49" charset="-127"/>
+                <a:ea typeface="D2Coding" panose="020B0609020101020101" pitchFamily="49" charset="-127"/>
+              </a:rPr>
+              <a:t>, 10000) 형태의 </a:t>
+            </a:r>
+            <a:r>
+              <a:rPr lang="ko-KR" altLang="en-US" sz="1200" dirty="0" err="1">
+                <a:latin typeface="D2Coding" panose="020B0609020101020101" pitchFamily="49" charset="-127"/>
+                <a:ea typeface="D2Coding" panose="020B0609020101020101" pitchFamily="49" charset="-127"/>
+              </a:rPr>
+              <a:t>텐서를</a:t>
+            </a:r>
+            <a:r>
+              <a:rPr lang="ko-KR" altLang="en-US" sz="1200" dirty="0">
+                <a:latin typeface="D2Coding" panose="020B0609020101020101" pitchFamily="49" charset="-127"/>
+                <a:ea typeface="D2Coding" panose="020B0609020101020101" pitchFamily="49" charset="-127"/>
+              </a:rPr>
+              <a:t> 받음 (</a:t>
+            </a:r>
+            <a:r>
+              <a:rPr lang="ko-KR" altLang="en-US" sz="1200" dirty="0" err="1">
+                <a:latin typeface="D2Coding" panose="020B0609020101020101" pitchFamily="49" charset="-127"/>
+                <a:ea typeface="D2Coding" panose="020B0609020101020101" pitchFamily="49" charset="-127"/>
+              </a:rPr>
+              <a:t>None은</a:t>
+            </a:r>
+            <a:r>
+              <a:rPr lang="ko-KR" altLang="en-US" sz="1200" dirty="0">
+                <a:latin typeface="D2Coding" panose="020B0609020101020101" pitchFamily="49" charset="-127"/>
+                <a:ea typeface="D2Coding" panose="020B0609020101020101" pitchFamily="49" charset="-127"/>
+              </a:rPr>
+              <a:t> 가변적인 배치 크기)</a:t>
+            </a:r>
+          </a:p>
+          <a:p>
+            <a:r>
+              <a:rPr lang="ko-KR" altLang="en-US" sz="1200" dirty="0" err="1">
+                <a:latin typeface="D2Coding" panose="020B0609020101020101" pitchFamily="49" charset="-127"/>
+                <a:ea typeface="D2Coding" panose="020B0609020101020101" pitchFamily="49" charset="-127"/>
+              </a:rPr>
+              <a:t>title</a:t>
+            </a:r>
+            <a:r>
+              <a:rPr lang="ko-KR" altLang="en-US" sz="1200" dirty="0">
+                <a:latin typeface="D2Coding" panose="020B0609020101020101" pitchFamily="49" charset="-127"/>
+                <a:ea typeface="D2Coding" panose="020B0609020101020101" pitchFamily="49" charset="-127"/>
+              </a:rPr>
+              <a:t> = </a:t>
+            </a:r>
+            <a:r>
+              <a:rPr lang="ko-KR" altLang="en-US" sz="1200" dirty="0" err="1">
+                <a:latin typeface="D2Coding" panose="020B0609020101020101" pitchFamily="49" charset="-127"/>
+                <a:ea typeface="D2Coding" panose="020B0609020101020101" pitchFamily="49" charset="-127"/>
+              </a:rPr>
+              <a:t>keras.Input</a:t>
+            </a:r>
+            <a:r>
+              <a:rPr lang="ko-KR" altLang="en-US" sz="1200" dirty="0">
+                <a:latin typeface="D2Coding" panose="020B0609020101020101" pitchFamily="49" charset="-127"/>
+                <a:ea typeface="D2Coding" panose="020B0609020101020101" pitchFamily="49" charset="-127"/>
+              </a:rPr>
+              <a:t>(</a:t>
+            </a:r>
+            <a:r>
+              <a:rPr lang="ko-KR" altLang="en-US" sz="1200" dirty="0" err="1">
+                <a:latin typeface="D2Coding" panose="020B0609020101020101" pitchFamily="49" charset="-127"/>
+                <a:ea typeface="D2Coding" panose="020B0609020101020101" pitchFamily="49" charset="-127"/>
+              </a:rPr>
+              <a:t>shape</a:t>
+            </a:r>
+            <a:r>
+              <a:rPr lang="ko-KR" altLang="en-US" sz="1200" dirty="0">
+                <a:latin typeface="D2Coding" panose="020B0609020101020101" pitchFamily="49" charset="-127"/>
+                <a:ea typeface="D2Coding" panose="020B0609020101020101" pitchFamily="49" charset="-127"/>
+              </a:rPr>
+              <a:t>=(</a:t>
+            </a:r>
+            <a:r>
+              <a:rPr lang="ko-KR" altLang="en-US" sz="1200" dirty="0" err="1">
+                <a:latin typeface="D2Coding" panose="020B0609020101020101" pitchFamily="49" charset="-127"/>
+                <a:ea typeface="D2Coding" panose="020B0609020101020101" pitchFamily="49" charset="-127"/>
+              </a:rPr>
+              <a:t>vocabulary_size</a:t>
+            </a:r>
+            <a:r>
+              <a:rPr lang="ko-KR" altLang="en-US" sz="1200" dirty="0">
+                <a:latin typeface="D2Coding" panose="020B0609020101020101" pitchFamily="49" charset="-127"/>
+                <a:ea typeface="D2Coding" panose="020B0609020101020101" pitchFamily="49" charset="-127"/>
+              </a:rPr>
+              <a:t>,), </a:t>
+            </a:r>
+            <a:r>
+              <a:rPr lang="ko-KR" altLang="en-US" sz="1200" dirty="0" err="1">
+                <a:latin typeface="D2Coding" panose="020B0609020101020101" pitchFamily="49" charset="-127"/>
+                <a:ea typeface="D2Coding" panose="020B0609020101020101" pitchFamily="49" charset="-127"/>
+              </a:rPr>
+              <a:t>name</a:t>
+            </a:r>
+            <a:r>
+              <a:rPr lang="ko-KR" altLang="en-US" sz="1200" dirty="0">
+                <a:latin typeface="D2Coding" panose="020B0609020101020101" pitchFamily="49" charset="-127"/>
+                <a:ea typeface="D2Coding" panose="020B0609020101020101" pitchFamily="49" charset="-127"/>
+              </a:rPr>
+              <a:t>="</a:t>
+            </a:r>
+            <a:r>
+              <a:rPr lang="ko-KR" altLang="en-US" sz="1200" dirty="0" err="1">
+                <a:latin typeface="D2Coding" panose="020B0609020101020101" pitchFamily="49" charset="-127"/>
+                <a:ea typeface="D2Coding" panose="020B0609020101020101" pitchFamily="49" charset="-127"/>
+              </a:rPr>
+              <a:t>title</a:t>
+            </a:r>
+            <a:r>
+              <a:rPr lang="ko-KR" altLang="en-US" sz="1200" dirty="0">
+                <a:latin typeface="D2Coding" panose="020B0609020101020101" pitchFamily="49" charset="-127"/>
+                <a:ea typeface="D2Coding" panose="020B0609020101020101" pitchFamily="49" charset="-127"/>
+              </a:rPr>
+              <a:t>")</a:t>
+            </a:r>
+          </a:p>
+          <a:p>
+            <a:r>
+              <a:rPr lang="ko-KR" altLang="en-US" sz="1200" dirty="0" err="1">
+                <a:latin typeface="D2Coding" panose="020B0609020101020101" pitchFamily="49" charset="-127"/>
+                <a:ea typeface="D2Coding" panose="020B0609020101020101" pitchFamily="49" charset="-127"/>
+              </a:rPr>
+              <a:t>text_body</a:t>
+            </a:r>
+            <a:r>
+              <a:rPr lang="ko-KR" altLang="en-US" sz="1200" dirty="0">
+                <a:latin typeface="D2Coding" panose="020B0609020101020101" pitchFamily="49" charset="-127"/>
+                <a:ea typeface="D2Coding" panose="020B0609020101020101" pitchFamily="49" charset="-127"/>
+              </a:rPr>
+              <a:t> = </a:t>
+            </a:r>
+            <a:r>
+              <a:rPr lang="ko-KR" altLang="en-US" sz="1200" dirty="0" err="1">
+                <a:latin typeface="D2Coding" panose="020B0609020101020101" pitchFamily="49" charset="-127"/>
+                <a:ea typeface="D2Coding" panose="020B0609020101020101" pitchFamily="49" charset="-127"/>
+              </a:rPr>
+              <a:t>keras.Input</a:t>
+            </a:r>
+            <a:r>
+              <a:rPr lang="ko-KR" altLang="en-US" sz="1200" dirty="0">
+                <a:latin typeface="D2Coding" panose="020B0609020101020101" pitchFamily="49" charset="-127"/>
+                <a:ea typeface="D2Coding" panose="020B0609020101020101" pitchFamily="49" charset="-127"/>
+              </a:rPr>
+              <a:t>(</a:t>
+            </a:r>
+            <a:r>
+              <a:rPr lang="ko-KR" altLang="en-US" sz="1200" dirty="0" err="1">
+                <a:latin typeface="D2Coding" panose="020B0609020101020101" pitchFamily="49" charset="-127"/>
+                <a:ea typeface="D2Coding" panose="020B0609020101020101" pitchFamily="49" charset="-127"/>
+              </a:rPr>
+              <a:t>shape</a:t>
+            </a:r>
+            <a:r>
+              <a:rPr lang="ko-KR" altLang="en-US" sz="1200" dirty="0">
+                <a:latin typeface="D2Coding" panose="020B0609020101020101" pitchFamily="49" charset="-127"/>
+                <a:ea typeface="D2Coding" panose="020B0609020101020101" pitchFamily="49" charset="-127"/>
+              </a:rPr>
+              <a:t>=(</a:t>
+            </a:r>
+            <a:r>
+              <a:rPr lang="ko-KR" altLang="en-US" sz="1200" dirty="0" err="1">
+                <a:latin typeface="D2Coding" panose="020B0609020101020101" pitchFamily="49" charset="-127"/>
+                <a:ea typeface="D2Coding" panose="020B0609020101020101" pitchFamily="49" charset="-127"/>
+              </a:rPr>
+              <a:t>vocabulary_size</a:t>
+            </a:r>
+            <a:r>
+              <a:rPr lang="ko-KR" altLang="en-US" sz="1200" dirty="0">
+                <a:latin typeface="D2Coding" panose="020B0609020101020101" pitchFamily="49" charset="-127"/>
+                <a:ea typeface="D2Coding" panose="020B0609020101020101" pitchFamily="49" charset="-127"/>
+              </a:rPr>
+              <a:t>,), </a:t>
+            </a:r>
+            <a:r>
+              <a:rPr lang="ko-KR" altLang="en-US" sz="1200" dirty="0" err="1">
+                <a:latin typeface="D2Coding" panose="020B0609020101020101" pitchFamily="49" charset="-127"/>
+                <a:ea typeface="D2Coding" panose="020B0609020101020101" pitchFamily="49" charset="-127"/>
+              </a:rPr>
+              <a:t>name</a:t>
+            </a:r>
+            <a:r>
+              <a:rPr lang="ko-KR" altLang="en-US" sz="1200" dirty="0">
+                <a:latin typeface="D2Coding" panose="020B0609020101020101" pitchFamily="49" charset="-127"/>
+                <a:ea typeface="D2Coding" panose="020B0609020101020101" pitchFamily="49" charset="-127"/>
+              </a:rPr>
+              <a:t>="</a:t>
+            </a:r>
+            <a:r>
+              <a:rPr lang="ko-KR" altLang="en-US" sz="1200" dirty="0" err="1">
+                <a:latin typeface="D2Coding" panose="020B0609020101020101" pitchFamily="49" charset="-127"/>
+                <a:ea typeface="D2Coding" panose="020B0609020101020101" pitchFamily="49" charset="-127"/>
+              </a:rPr>
+              <a:t>text_body</a:t>
+            </a:r>
+            <a:r>
+              <a:rPr lang="ko-KR" altLang="en-US" sz="1200" dirty="0">
+                <a:latin typeface="D2Coding" panose="020B0609020101020101" pitchFamily="49" charset="-127"/>
+                <a:ea typeface="D2Coding" panose="020B0609020101020101" pitchFamily="49" charset="-127"/>
+              </a:rPr>
+              <a:t>") # 티켓 본문 입력: (</a:t>
+            </a:r>
+            <a:r>
+              <a:rPr lang="ko-KR" altLang="en-US" sz="1200" dirty="0" err="1">
+                <a:latin typeface="D2Coding" panose="020B0609020101020101" pitchFamily="49" charset="-127"/>
+                <a:ea typeface="D2Coding" panose="020B0609020101020101" pitchFamily="49" charset="-127"/>
+              </a:rPr>
+              <a:t>None</a:t>
+            </a:r>
+            <a:r>
+              <a:rPr lang="ko-KR" altLang="en-US" sz="1200" dirty="0">
+                <a:latin typeface="D2Coding" panose="020B0609020101020101" pitchFamily="49" charset="-127"/>
+                <a:ea typeface="D2Coding" panose="020B0609020101020101" pitchFamily="49" charset="-127"/>
+              </a:rPr>
+              <a:t>, 10000) 형태의 </a:t>
+            </a:r>
+            <a:r>
+              <a:rPr lang="ko-KR" altLang="en-US" sz="1200" dirty="0" err="1">
+                <a:latin typeface="D2Coding" panose="020B0609020101020101" pitchFamily="49" charset="-127"/>
+                <a:ea typeface="D2Coding" panose="020B0609020101020101" pitchFamily="49" charset="-127"/>
+              </a:rPr>
+              <a:t>텐서를</a:t>
+            </a:r>
+            <a:r>
+              <a:rPr lang="ko-KR" altLang="en-US" sz="1200" dirty="0">
+                <a:latin typeface="D2Coding" panose="020B0609020101020101" pitchFamily="49" charset="-127"/>
+                <a:ea typeface="D2Coding" panose="020B0609020101020101" pitchFamily="49" charset="-127"/>
+              </a:rPr>
+              <a:t> 받음</a:t>
+            </a:r>
+          </a:p>
+          <a:p>
+            <a:r>
+              <a:rPr lang="ko-KR" altLang="en-US" sz="1200" dirty="0" err="1">
+                <a:latin typeface="D2Coding" panose="020B0609020101020101" pitchFamily="49" charset="-127"/>
+                <a:ea typeface="D2Coding" panose="020B0609020101020101" pitchFamily="49" charset="-127"/>
+              </a:rPr>
+              <a:t>tags</a:t>
+            </a:r>
+            <a:r>
+              <a:rPr lang="ko-KR" altLang="en-US" sz="1200" dirty="0">
+                <a:latin typeface="D2Coding" panose="020B0609020101020101" pitchFamily="49" charset="-127"/>
+                <a:ea typeface="D2Coding" panose="020B0609020101020101" pitchFamily="49" charset="-127"/>
+              </a:rPr>
+              <a:t> = </a:t>
+            </a:r>
+            <a:r>
+              <a:rPr lang="ko-KR" altLang="en-US" sz="1200" dirty="0" err="1">
+                <a:latin typeface="D2Coding" panose="020B0609020101020101" pitchFamily="49" charset="-127"/>
+                <a:ea typeface="D2Coding" panose="020B0609020101020101" pitchFamily="49" charset="-127"/>
+              </a:rPr>
+              <a:t>keras.Input</a:t>
+            </a:r>
+            <a:r>
+              <a:rPr lang="ko-KR" altLang="en-US" sz="1200" dirty="0">
+                <a:latin typeface="D2Coding" panose="020B0609020101020101" pitchFamily="49" charset="-127"/>
+                <a:ea typeface="D2Coding" panose="020B0609020101020101" pitchFamily="49" charset="-127"/>
+              </a:rPr>
+              <a:t>(</a:t>
+            </a:r>
+            <a:r>
+              <a:rPr lang="ko-KR" altLang="en-US" sz="1200" dirty="0" err="1">
+                <a:latin typeface="D2Coding" panose="020B0609020101020101" pitchFamily="49" charset="-127"/>
+                <a:ea typeface="D2Coding" panose="020B0609020101020101" pitchFamily="49" charset="-127"/>
+              </a:rPr>
+              <a:t>shape</a:t>
+            </a:r>
+            <a:r>
+              <a:rPr lang="ko-KR" altLang="en-US" sz="1200" dirty="0">
+                <a:latin typeface="D2Coding" panose="020B0609020101020101" pitchFamily="49" charset="-127"/>
+                <a:ea typeface="D2Coding" panose="020B0609020101020101" pitchFamily="49" charset="-127"/>
+              </a:rPr>
+              <a:t>=(</a:t>
+            </a:r>
+            <a:r>
+              <a:rPr lang="ko-KR" altLang="en-US" sz="1200" dirty="0" err="1">
+                <a:latin typeface="D2Coding" panose="020B0609020101020101" pitchFamily="49" charset="-127"/>
+                <a:ea typeface="D2Coding" panose="020B0609020101020101" pitchFamily="49" charset="-127"/>
+              </a:rPr>
+              <a:t>num_tags</a:t>
+            </a:r>
+            <a:r>
+              <a:rPr lang="ko-KR" altLang="en-US" sz="1200" dirty="0">
+                <a:latin typeface="D2Coding" panose="020B0609020101020101" pitchFamily="49" charset="-127"/>
+                <a:ea typeface="D2Coding" panose="020B0609020101020101" pitchFamily="49" charset="-127"/>
+              </a:rPr>
+              <a:t>,), </a:t>
+            </a:r>
+            <a:r>
+              <a:rPr lang="ko-KR" altLang="en-US" sz="1200" dirty="0" err="1">
+                <a:latin typeface="D2Coding" panose="020B0609020101020101" pitchFamily="49" charset="-127"/>
+                <a:ea typeface="D2Coding" panose="020B0609020101020101" pitchFamily="49" charset="-127"/>
+              </a:rPr>
+              <a:t>name</a:t>
+            </a:r>
+            <a:r>
+              <a:rPr lang="ko-KR" altLang="en-US" sz="1200" dirty="0">
+                <a:latin typeface="D2Coding" panose="020B0609020101020101" pitchFamily="49" charset="-127"/>
+                <a:ea typeface="D2Coding" panose="020B0609020101020101" pitchFamily="49" charset="-127"/>
+              </a:rPr>
+              <a:t>="</a:t>
+            </a:r>
+            <a:r>
+              <a:rPr lang="ko-KR" altLang="en-US" sz="1200" dirty="0" err="1">
+                <a:latin typeface="D2Coding" panose="020B0609020101020101" pitchFamily="49" charset="-127"/>
+                <a:ea typeface="D2Coding" panose="020B0609020101020101" pitchFamily="49" charset="-127"/>
+              </a:rPr>
+              <a:t>tags</a:t>
+            </a:r>
+            <a:r>
+              <a:rPr lang="ko-KR" altLang="en-US" sz="1200" dirty="0">
+                <a:latin typeface="D2Coding" panose="020B0609020101020101" pitchFamily="49" charset="-127"/>
+                <a:ea typeface="D2Coding" panose="020B0609020101020101" pitchFamily="49" charset="-127"/>
+              </a:rPr>
+              <a:t>") # 티켓 태그 입력: (</a:t>
+            </a:r>
+            <a:r>
+              <a:rPr lang="ko-KR" altLang="en-US" sz="1200" dirty="0" err="1">
+                <a:latin typeface="D2Coding" panose="020B0609020101020101" pitchFamily="49" charset="-127"/>
+                <a:ea typeface="D2Coding" panose="020B0609020101020101" pitchFamily="49" charset="-127"/>
+              </a:rPr>
+              <a:t>None</a:t>
+            </a:r>
+            <a:r>
+              <a:rPr lang="ko-KR" altLang="en-US" sz="1200" dirty="0">
+                <a:latin typeface="D2Coding" panose="020B0609020101020101" pitchFamily="49" charset="-127"/>
+                <a:ea typeface="D2Coding" panose="020B0609020101020101" pitchFamily="49" charset="-127"/>
+              </a:rPr>
+              <a:t>, 100) 형태의 </a:t>
+            </a:r>
+            <a:r>
+              <a:rPr lang="ko-KR" altLang="en-US" sz="1200" dirty="0" err="1">
+                <a:latin typeface="D2Coding" panose="020B0609020101020101" pitchFamily="49" charset="-127"/>
+                <a:ea typeface="D2Coding" panose="020B0609020101020101" pitchFamily="49" charset="-127"/>
+              </a:rPr>
+              <a:t>텐서를</a:t>
+            </a:r>
+            <a:r>
+              <a:rPr lang="ko-KR" altLang="en-US" sz="1200" dirty="0">
+                <a:latin typeface="D2Coding" panose="020B0609020101020101" pitchFamily="49" charset="-127"/>
+                <a:ea typeface="D2Coding" panose="020B0609020101020101" pitchFamily="49" charset="-127"/>
+              </a:rPr>
+              <a:t> 받음</a:t>
+            </a:r>
+          </a:p>
+          <a:p>
+            <a:endParaRPr lang="ko-KR" altLang="en-US" sz="1200" dirty="0">
+              <a:latin typeface="D2Coding" panose="020B0609020101020101" pitchFamily="49" charset="-127"/>
+              <a:ea typeface="D2Coding" panose="020B0609020101020101" pitchFamily="49" charset="-127"/>
+            </a:endParaRPr>
+          </a:p>
+          <a:p>
+            <a:r>
+              <a:rPr lang="ko-KR" altLang="en-US" sz="1200" dirty="0">
+                <a:latin typeface="D2Coding" panose="020B0609020101020101" pitchFamily="49" charset="-127"/>
+                <a:ea typeface="D2Coding" panose="020B0609020101020101" pitchFamily="49" charset="-127"/>
+              </a:rPr>
+              <a:t># </a:t>
+            </a:r>
+            <a:r>
+              <a:rPr lang="en-US" altLang="ko-KR" sz="1200" dirty="0">
+                <a:latin typeface="D2Coding" panose="020B0609020101020101" pitchFamily="49" charset="-127"/>
+                <a:ea typeface="D2Coding" panose="020B0609020101020101" pitchFamily="49" charset="-127"/>
+              </a:rPr>
+              <a:t>3</a:t>
+            </a:r>
+            <a:r>
+              <a:rPr lang="ko-KR" altLang="en-US" sz="1200" dirty="0">
+                <a:latin typeface="D2Coding" panose="020B0609020101020101" pitchFamily="49" charset="-127"/>
+                <a:ea typeface="D2Coding" panose="020B0609020101020101" pitchFamily="49" charset="-127"/>
+              </a:rPr>
+              <a:t>. 특성 결합(</a:t>
+            </a:r>
+            <a:r>
+              <a:rPr lang="ko-KR" altLang="en-US" sz="1200" dirty="0" err="1">
+                <a:latin typeface="D2Coding" panose="020B0609020101020101" pitchFamily="49" charset="-127"/>
+                <a:ea typeface="D2Coding" panose="020B0609020101020101" pitchFamily="49" charset="-127"/>
+              </a:rPr>
+              <a:t>Concatenate</a:t>
+            </a:r>
+            <a:r>
+              <a:rPr lang="ko-KR" altLang="en-US" sz="1200" dirty="0">
+                <a:latin typeface="D2Coding" panose="020B0609020101020101" pitchFamily="49" charset="-127"/>
+                <a:ea typeface="D2Coding" panose="020B0609020101020101" pitchFamily="49" charset="-127"/>
+              </a:rPr>
+              <a:t>) 및 </a:t>
+            </a:r>
+            <a:r>
+              <a:rPr lang="ko-KR" altLang="en-US" sz="1200" dirty="0" err="1">
+                <a:latin typeface="D2Coding" panose="020B0609020101020101" pitchFamily="49" charset="-127"/>
+                <a:ea typeface="D2Coding" panose="020B0609020101020101" pitchFamily="49" charset="-127"/>
+              </a:rPr>
+              <a:t>은닉층</a:t>
+            </a:r>
+            <a:r>
+              <a:rPr lang="ko-KR" altLang="en-US" sz="1200" dirty="0">
+                <a:latin typeface="D2Coding" panose="020B0609020101020101" pitchFamily="49" charset="-127"/>
+                <a:ea typeface="D2Coding" panose="020B0609020101020101" pitchFamily="49" charset="-127"/>
+              </a:rPr>
+              <a:t> 처리 </a:t>
+            </a:r>
+            <a:r>
+              <a:rPr lang="en-US" altLang="ko-KR" sz="1200" dirty="0">
+                <a:latin typeface="D2Coding" panose="020B0609020101020101" pitchFamily="49" charset="-127"/>
+                <a:ea typeface="D2Coding" panose="020B0609020101020101" pitchFamily="49" charset="-127"/>
+              </a:rPr>
+              <a:t>; </a:t>
+            </a:r>
+            <a:r>
+              <a:rPr lang="ko-KR" altLang="en-US" sz="1200" dirty="0">
+                <a:latin typeface="D2Coding" panose="020B0609020101020101" pitchFamily="49" charset="-127"/>
+                <a:ea typeface="D2Coding" panose="020B0609020101020101" pitchFamily="49" charset="-127"/>
+              </a:rPr>
+              <a:t>3개의 입력 </a:t>
+            </a:r>
+            <a:r>
+              <a:rPr lang="ko-KR" altLang="en-US" sz="1200" dirty="0" err="1">
+                <a:latin typeface="D2Coding" panose="020B0609020101020101" pitchFamily="49" charset="-127"/>
+                <a:ea typeface="D2Coding" panose="020B0609020101020101" pitchFamily="49" charset="-127"/>
+              </a:rPr>
+              <a:t>텐서를</a:t>
+            </a:r>
+            <a:r>
+              <a:rPr lang="ko-KR" altLang="en-US" sz="1200" dirty="0">
+                <a:latin typeface="D2Coding" panose="020B0609020101020101" pitchFamily="49" charset="-127"/>
+                <a:ea typeface="D2Coding" panose="020B0609020101020101" pitchFamily="49" charset="-127"/>
+              </a:rPr>
+              <a:t> 하나의 축으로 병합</a:t>
+            </a:r>
+            <a:r>
+              <a:rPr lang="en-US" altLang="ko-KR" sz="1200" dirty="0">
+                <a:latin typeface="D2Coding" panose="020B0609020101020101" pitchFamily="49" charset="-127"/>
+                <a:ea typeface="D2Coding" panose="020B0609020101020101" pitchFamily="49" charset="-127"/>
+              </a:rPr>
+              <a:t>(</a:t>
+            </a:r>
+            <a:r>
+              <a:rPr lang="ko-KR" altLang="en-US" sz="1200" dirty="0">
+                <a:latin typeface="D2Coding" panose="020B0609020101020101" pitchFamily="49" charset="-127"/>
+                <a:ea typeface="D2Coding" panose="020B0609020101020101" pitchFamily="49" charset="-127"/>
+              </a:rPr>
+              <a:t>10000 + 10000 + 100 = 20100)</a:t>
+            </a:r>
+          </a:p>
+          <a:p>
+            <a:r>
+              <a:rPr lang="ko-KR" altLang="en-US" sz="1200" dirty="0" err="1">
+                <a:latin typeface="D2Coding" panose="020B0609020101020101" pitchFamily="49" charset="-127"/>
+                <a:ea typeface="D2Coding" panose="020B0609020101020101" pitchFamily="49" charset="-127"/>
+              </a:rPr>
+              <a:t>features</a:t>
+            </a:r>
+            <a:r>
+              <a:rPr lang="ko-KR" altLang="en-US" sz="1200" dirty="0">
+                <a:latin typeface="D2Coding" panose="020B0609020101020101" pitchFamily="49" charset="-127"/>
+                <a:ea typeface="D2Coding" panose="020B0609020101020101" pitchFamily="49" charset="-127"/>
+              </a:rPr>
+              <a:t> = </a:t>
+            </a:r>
+            <a:r>
+              <a:rPr lang="ko-KR" altLang="en-US" sz="1200" dirty="0" err="1">
+                <a:latin typeface="D2Coding" panose="020B0609020101020101" pitchFamily="49" charset="-127"/>
+                <a:ea typeface="D2Coding" panose="020B0609020101020101" pitchFamily="49" charset="-127"/>
+              </a:rPr>
+              <a:t>layers.Concatenate</a:t>
+            </a:r>
+            <a:r>
+              <a:rPr lang="ko-KR" altLang="en-US" sz="1200" dirty="0">
+                <a:latin typeface="D2Coding" panose="020B0609020101020101" pitchFamily="49" charset="-127"/>
+                <a:ea typeface="D2Coding" panose="020B0609020101020101" pitchFamily="49" charset="-127"/>
+              </a:rPr>
+              <a:t>()([</a:t>
+            </a:r>
+            <a:r>
+              <a:rPr lang="ko-KR" altLang="en-US" sz="1200" dirty="0" err="1">
+                <a:latin typeface="D2Coding" panose="020B0609020101020101" pitchFamily="49" charset="-127"/>
+                <a:ea typeface="D2Coding" panose="020B0609020101020101" pitchFamily="49" charset="-127"/>
+              </a:rPr>
+              <a:t>title</a:t>
+            </a:r>
+            <a:r>
+              <a:rPr lang="ko-KR" altLang="en-US" sz="1200" dirty="0">
+                <a:latin typeface="D2Coding" panose="020B0609020101020101" pitchFamily="49" charset="-127"/>
+                <a:ea typeface="D2Coding" panose="020B0609020101020101" pitchFamily="49" charset="-127"/>
+              </a:rPr>
+              <a:t>, </a:t>
+            </a:r>
+            <a:r>
+              <a:rPr lang="ko-KR" altLang="en-US" sz="1200" dirty="0" err="1">
+                <a:latin typeface="D2Coding" panose="020B0609020101020101" pitchFamily="49" charset="-127"/>
+                <a:ea typeface="D2Coding" panose="020B0609020101020101" pitchFamily="49" charset="-127"/>
+              </a:rPr>
+              <a:t>text_body</a:t>
+            </a:r>
+            <a:r>
+              <a:rPr lang="ko-KR" altLang="en-US" sz="1200" dirty="0">
+                <a:latin typeface="D2Coding" panose="020B0609020101020101" pitchFamily="49" charset="-127"/>
+                <a:ea typeface="D2Coding" panose="020B0609020101020101" pitchFamily="49" charset="-127"/>
+              </a:rPr>
+              <a:t>, </a:t>
+            </a:r>
+            <a:r>
+              <a:rPr lang="ko-KR" altLang="en-US" sz="1200" dirty="0" err="1">
+                <a:latin typeface="D2Coding" panose="020B0609020101020101" pitchFamily="49" charset="-127"/>
+                <a:ea typeface="D2Coding" panose="020B0609020101020101" pitchFamily="49" charset="-127"/>
+              </a:rPr>
+              <a:t>tags</a:t>
+            </a:r>
+            <a:r>
+              <a:rPr lang="ko-KR" altLang="en-US" sz="1200" dirty="0">
+                <a:latin typeface="D2Coding" panose="020B0609020101020101" pitchFamily="49" charset="-127"/>
+                <a:ea typeface="D2Coding" panose="020B0609020101020101" pitchFamily="49" charset="-127"/>
+              </a:rPr>
+              <a:t>])</a:t>
+            </a:r>
+          </a:p>
+          <a:p>
+            <a:endParaRPr lang="ko-KR" altLang="en-US" sz="1200" dirty="0">
+              <a:latin typeface="D2Coding" panose="020B0609020101020101" pitchFamily="49" charset="-127"/>
+              <a:ea typeface="D2Coding" panose="020B0609020101020101" pitchFamily="49" charset="-127"/>
+            </a:endParaRPr>
+          </a:p>
+          <a:p>
+            <a:r>
+              <a:rPr lang="ko-KR" altLang="en-US" sz="1200" dirty="0">
+                <a:latin typeface="D2Coding" panose="020B0609020101020101" pitchFamily="49" charset="-127"/>
+                <a:ea typeface="D2Coding" panose="020B0609020101020101" pitchFamily="49" charset="-127"/>
+              </a:rPr>
+              <a:t># 병합된 입력 데이터로부터 주요 특징을 추출하는 완전 연결 </a:t>
+            </a:r>
+            <a:r>
+              <a:rPr lang="ko-KR" altLang="en-US" sz="1200" dirty="0" err="1">
+                <a:latin typeface="D2Coding" panose="020B0609020101020101" pitchFamily="49" charset="-127"/>
+                <a:ea typeface="D2Coding" panose="020B0609020101020101" pitchFamily="49" charset="-127"/>
+              </a:rPr>
+              <a:t>은닉층</a:t>
+            </a:r>
+            <a:r>
+              <a:rPr lang="ko-KR" altLang="en-US" sz="1200" dirty="0">
+                <a:latin typeface="D2Coding" panose="020B0609020101020101" pitchFamily="49" charset="-127"/>
+                <a:ea typeface="D2Coding" panose="020B0609020101020101" pitchFamily="49" charset="-127"/>
+              </a:rPr>
+              <a:t> (노드 64개, </a:t>
+            </a:r>
+            <a:r>
+              <a:rPr lang="ko-KR" altLang="en-US" sz="1200" dirty="0" err="1">
+                <a:latin typeface="D2Coding" panose="020B0609020101020101" pitchFamily="49" charset="-127"/>
+                <a:ea typeface="D2Coding" panose="020B0609020101020101" pitchFamily="49" charset="-127"/>
+              </a:rPr>
+              <a:t>ReLU</a:t>
+            </a:r>
+            <a:r>
+              <a:rPr lang="ko-KR" altLang="en-US" sz="1200" dirty="0">
+                <a:latin typeface="D2Coding" panose="020B0609020101020101" pitchFamily="49" charset="-127"/>
+                <a:ea typeface="D2Coding" panose="020B0609020101020101" pitchFamily="49" charset="-127"/>
+              </a:rPr>
+              <a:t> 활성화 함수)</a:t>
+            </a:r>
+          </a:p>
+          <a:p>
+            <a:r>
+              <a:rPr lang="ko-KR" altLang="en-US" sz="1200" dirty="0" err="1">
+                <a:latin typeface="D2Coding" panose="020B0609020101020101" pitchFamily="49" charset="-127"/>
+                <a:ea typeface="D2Coding" panose="020B0609020101020101" pitchFamily="49" charset="-127"/>
+              </a:rPr>
+              <a:t>features</a:t>
+            </a:r>
+            <a:r>
+              <a:rPr lang="ko-KR" altLang="en-US" sz="1200" dirty="0">
+                <a:latin typeface="D2Coding" panose="020B0609020101020101" pitchFamily="49" charset="-127"/>
+                <a:ea typeface="D2Coding" panose="020B0609020101020101" pitchFamily="49" charset="-127"/>
+              </a:rPr>
+              <a:t> = </a:t>
+            </a:r>
+            <a:r>
+              <a:rPr lang="ko-KR" altLang="en-US" sz="1200" dirty="0" err="1">
+                <a:latin typeface="D2Coding" panose="020B0609020101020101" pitchFamily="49" charset="-127"/>
+                <a:ea typeface="D2Coding" panose="020B0609020101020101" pitchFamily="49" charset="-127"/>
+              </a:rPr>
+              <a:t>layers.Dense</a:t>
+            </a:r>
+            <a:r>
+              <a:rPr lang="ko-KR" altLang="en-US" sz="1200" dirty="0">
+                <a:latin typeface="D2Coding" panose="020B0609020101020101" pitchFamily="49" charset="-127"/>
+                <a:ea typeface="D2Coding" panose="020B0609020101020101" pitchFamily="49" charset="-127"/>
+              </a:rPr>
+              <a:t>(64, </a:t>
+            </a:r>
+            <a:r>
+              <a:rPr lang="ko-KR" altLang="en-US" sz="1200" dirty="0" err="1">
+                <a:latin typeface="D2Coding" panose="020B0609020101020101" pitchFamily="49" charset="-127"/>
+                <a:ea typeface="D2Coding" panose="020B0609020101020101" pitchFamily="49" charset="-127"/>
+              </a:rPr>
+              <a:t>activation</a:t>
+            </a:r>
+            <a:r>
+              <a:rPr lang="ko-KR" altLang="en-US" sz="1200" dirty="0">
+                <a:latin typeface="D2Coding" panose="020B0609020101020101" pitchFamily="49" charset="-127"/>
+                <a:ea typeface="D2Coding" panose="020B0609020101020101" pitchFamily="49" charset="-127"/>
+              </a:rPr>
+              <a:t>="</a:t>
+            </a:r>
+            <a:r>
+              <a:rPr lang="ko-KR" altLang="en-US" sz="1200" dirty="0" err="1">
+                <a:latin typeface="D2Coding" panose="020B0609020101020101" pitchFamily="49" charset="-127"/>
+                <a:ea typeface="D2Coding" panose="020B0609020101020101" pitchFamily="49" charset="-127"/>
+              </a:rPr>
+              <a:t>relu</a:t>
+            </a:r>
+            <a:r>
+              <a:rPr lang="ko-KR" altLang="en-US" sz="1200" dirty="0">
+                <a:latin typeface="D2Coding" panose="020B0609020101020101" pitchFamily="49" charset="-127"/>
+                <a:ea typeface="D2Coding" panose="020B0609020101020101" pitchFamily="49" charset="-127"/>
+              </a:rPr>
+              <a:t>", </a:t>
+            </a:r>
+            <a:r>
+              <a:rPr lang="ko-KR" altLang="en-US" sz="1200" dirty="0" err="1">
+                <a:latin typeface="D2Coding" panose="020B0609020101020101" pitchFamily="49" charset="-127"/>
+                <a:ea typeface="D2Coding" panose="020B0609020101020101" pitchFamily="49" charset="-127"/>
+              </a:rPr>
+              <a:t>name</a:t>
+            </a:r>
+            <a:r>
+              <a:rPr lang="ko-KR" altLang="en-US" sz="1200" dirty="0">
+                <a:latin typeface="D2Coding" panose="020B0609020101020101" pitchFamily="49" charset="-127"/>
+                <a:ea typeface="D2Coding" panose="020B0609020101020101" pitchFamily="49" charset="-127"/>
+              </a:rPr>
+              <a:t>="</a:t>
+            </a:r>
+            <a:r>
+              <a:rPr lang="ko-KR" altLang="en-US" sz="1200" dirty="0" err="1">
+                <a:latin typeface="D2Coding" panose="020B0609020101020101" pitchFamily="49" charset="-127"/>
+                <a:ea typeface="D2Coding" panose="020B0609020101020101" pitchFamily="49" charset="-127"/>
+              </a:rPr>
+              <a:t>dense_features</a:t>
+            </a:r>
+            <a:r>
+              <a:rPr lang="ko-KR" altLang="en-US" sz="1200" dirty="0">
+                <a:latin typeface="D2Coding" panose="020B0609020101020101" pitchFamily="49" charset="-127"/>
+                <a:ea typeface="D2Coding" panose="020B0609020101020101" pitchFamily="49" charset="-127"/>
+              </a:rPr>
+              <a:t>")(</a:t>
+            </a:r>
+            <a:r>
+              <a:rPr lang="ko-KR" altLang="en-US" sz="1200" dirty="0" err="1">
+                <a:latin typeface="D2Coding" panose="020B0609020101020101" pitchFamily="49" charset="-127"/>
+                <a:ea typeface="D2Coding" panose="020B0609020101020101" pitchFamily="49" charset="-127"/>
+              </a:rPr>
+              <a:t>features</a:t>
+            </a:r>
+            <a:r>
+              <a:rPr lang="ko-KR" altLang="en-US" sz="1200" dirty="0">
+                <a:latin typeface="D2Coding" panose="020B0609020101020101" pitchFamily="49" charset="-127"/>
+                <a:ea typeface="D2Coding" panose="020B0609020101020101" pitchFamily="49" charset="-127"/>
+              </a:rPr>
+              <a:t>)</a:t>
+            </a:r>
+          </a:p>
+          <a:p>
+            <a:endParaRPr lang="ko-KR" altLang="en-US" sz="1200" dirty="0">
+              <a:latin typeface="D2Coding" panose="020B0609020101020101" pitchFamily="49" charset="-127"/>
+              <a:ea typeface="D2Coding" panose="020B0609020101020101" pitchFamily="49" charset="-127"/>
+            </a:endParaRPr>
+          </a:p>
+          <a:p>
+            <a:r>
+              <a:rPr lang="ko-KR" altLang="en-US" sz="1200" dirty="0">
+                <a:latin typeface="D2Coding" panose="020B0609020101020101" pitchFamily="49" charset="-127"/>
+                <a:ea typeface="D2Coding" panose="020B0609020101020101" pitchFamily="49" charset="-127"/>
+              </a:rPr>
+              <a:t># </a:t>
+            </a:r>
+            <a:r>
+              <a:rPr lang="en-US" altLang="ko-KR" sz="1200" dirty="0">
+                <a:latin typeface="D2Coding" panose="020B0609020101020101" pitchFamily="49" charset="-127"/>
+                <a:ea typeface="D2Coding" panose="020B0609020101020101" pitchFamily="49" charset="-127"/>
+              </a:rPr>
+              <a:t>4</a:t>
+            </a:r>
+            <a:r>
+              <a:rPr lang="ko-KR" altLang="en-US" sz="1200" dirty="0">
+                <a:latin typeface="D2Coding" panose="020B0609020101020101" pitchFamily="49" charset="-127"/>
+                <a:ea typeface="D2Coding" panose="020B0609020101020101" pitchFamily="49" charset="-127"/>
+              </a:rPr>
+              <a:t>. 다중 출력(</a:t>
+            </a:r>
+            <a:r>
+              <a:rPr lang="ko-KR" altLang="en-US" sz="1200" dirty="0" err="1">
+                <a:latin typeface="D2Coding" panose="020B0609020101020101" pitchFamily="49" charset="-127"/>
+                <a:ea typeface="D2Coding" panose="020B0609020101020101" pitchFamily="49" charset="-127"/>
+              </a:rPr>
+              <a:t>Multi-output</a:t>
+            </a:r>
+            <a:r>
+              <a:rPr lang="ko-KR" altLang="en-US" sz="1200" dirty="0">
+                <a:latin typeface="D2Coding" panose="020B0609020101020101" pitchFamily="49" charset="-127"/>
+                <a:ea typeface="D2Coding" panose="020B0609020101020101" pitchFamily="49" charset="-127"/>
+              </a:rPr>
+              <a:t>) 레이어 정의 </a:t>
+            </a:r>
+            <a:r>
+              <a:rPr lang="en-US" altLang="ko-KR" sz="1200" dirty="0">
+                <a:latin typeface="D2Coding" panose="020B0609020101020101" pitchFamily="49" charset="-127"/>
+                <a:ea typeface="D2Coding" panose="020B0609020101020101" pitchFamily="49" charset="-127"/>
+              </a:rPr>
+              <a:t>: </a:t>
+            </a:r>
+            <a:endParaRPr lang="ko-KR" altLang="en-US" sz="1200" dirty="0">
+              <a:latin typeface="D2Coding" panose="020B0609020101020101" pitchFamily="49" charset="-127"/>
+              <a:ea typeface="D2Coding" panose="020B0609020101020101" pitchFamily="49" charset="-127"/>
+            </a:endParaRPr>
+          </a:p>
+          <a:p>
+            <a:r>
+              <a:rPr lang="ko-KR" altLang="en-US" sz="1200" dirty="0" err="1">
+                <a:latin typeface="D2Coding" panose="020B0609020101020101" pitchFamily="49" charset="-127"/>
+                <a:ea typeface="D2Coding" panose="020B0609020101020101" pitchFamily="49" charset="-127"/>
+              </a:rPr>
+              <a:t>priority</a:t>
+            </a:r>
+            <a:r>
+              <a:rPr lang="ko-KR" altLang="en-US" sz="1200" dirty="0">
+                <a:latin typeface="D2Coding" panose="020B0609020101020101" pitchFamily="49" charset="-127"/>
+                <a:ea typeface="D2Coding" panose="020B0609020101020101" pitchFamily="49" charset="-127"/>
+              </a:rPr>
+              <a:t> = </a:t>
+            </a:r>
+            <a:r>
+              <a:rPr lang="ko-KR" altLang="en-US" sz="1200" dirty="0" err="1">
+                <a:latin typeface="D2Coding" panose="020B0609020101020101" pitchFamily="49" charset="-127"/>
+                <a:ea typeface="D2Coding" panose="020B0609020101020101" pitchFamily="49" charset="-127"/>
+              </a:rPr>
+              <a:t>layers.Dense</a:t>
+            </a:r>
+            <a:r>
+              <a:rPr lang="ko-KR" altLang="en-US" sz="1200" dirty="0">
+                <a:latin typeface="D2Coding" panose="020B0609020101020101" pitchFamily="49" charset="-127"/>
+                <a:ea typeface="D2Coding" panose="020B0609020101020101" pitchFamily="49" charset="-127"/>
+              </a:rPr>
+              <a:t>(1, </a:t>
+            </a:r>
+            <a:r>
+              <a:rPr lang="ko-KR" altLang="en-US" sz="1200" dirty="0" err="1">
+                <a:latin typeface="D2Coding" panose="020B0609020101020101" pitchFamily="49" charset="-127"/>
+                <a:ea typeface="D2Coding" panose="020B0609020101020101" pitchFamily="49" charset="-127"/>
+              </a:rPr>
+              <a:t>activation</a:t>
+            </a:r>
+            <a:r>
+              <a:rPr lang="ko-KR" altLang="en-US" sz="1200" dirty="0">
+                <a:latin typeface="D2Coding" panose="020B0609020101020101" pitchFamily="49" charset="-127"/>
+                <a:ea typeface="D2Coding" panose="020B0609020101020101" pitchFamily="49" charset="-127"/>
+              </a:rPr>
+              <a:t>="</a:t>
+            </a:r>
+            <a:r>
+              <a:rPr lang="ko-KR" altLang="en-US" sz="1200" dirty="0" err="1">
+                <a:latin typeface="D2Coding" panose="020B0609020101020101" pitchFamily="49" charset="-127"/>
+                <a:ea typeface="D2Coding" panose="020B0609020101020101" pitchFamily="49" charset="-127"/>
+              </a:rPr>
+              <a:t>sigmoid</a:t>
+            </a:r>
+            <a:r>
+              <a:rPr lang="ko-KR" altLang="en-US" sz="1200" dirty="0">
+                <a:latin typeface="D2Coding" panose="020B0609020101020101" pitchFamily="49" charset="-127"/>
+                <a:ea typeface="D2Coding" panose="020B0609020101020101" pitchFamily="49" charset="-127"/>
+              </a:rPr>
+              <a:t>", </a:t>
+            </a:r>
+            <a:r>
+              <a:rPr lang="ko-KR" altLang="en-US" sz="1200" dirty="0" err="1">
+                <a:latin typeface="D2Coding" panose="020B0609020101020101" pitchFamily="49" charset="-127"/>
+                <a:ea typeface="D2Coding" panose="020B0609020101020101" pitchFamily="49" charset="-127"/>
+              </a:rPr>
+              <a:t>name</a:t>
+            </a:r>
+            <a:r>
+              <a:rPr lang="ko-KR" altLang="en-US" sz="1200" dirty="0">
+                <a:latin typeface="D2Coding" panose="020B0609020101020101" pitchFamily="49" charset="-127"/>
+                <a:ea typeface="D2Coding" panose="020B0609020101020101" pitchFamily="49" charset="-127"/>
+              </a:rPr>
+              <a:t>="</a:t>
+            </a:r>
+            <a:r>
+              <a:rPr lang="ko-KR" altLang="en-US" sz="1200" dirty="0" err="1">
+                <a:latin typeface="D2Coding" panose="020B0609020101020101" pitchFamily="49" charset="-127"/>
+                <a:ea typeface="D2Coding" panose="020B0609020101020101" pitchFamily="49" charset="-127"/>
+              </a:rPr>
+              <a:t>priority</a:t>
+            </a:r>
+            <a:r>
+              <a:rPr lang="ko-KR" altLang="en-US" sz="1200" dirty="0">
+                <a:latin typeface="D2Coding" panose="020B0609020101020101" pitchFamily="49" charset="-127"/>
+                <a:ea typeface="D2Coding" panose="020B0609020101020101" pitchFamily="49" charset="-127"/>
+              </a:rPr>
+              <a:t>")(</a:t>
+            </a:r>
+            <a:r>
+              <a:rPr lang="ko-KR" altLang="en-US" sz="1200" dirty="0" err="1">
+                <a:latin typeface="D2Coding" panose="020B0609020101020101" pitchFamily="49" charset="-127"/>
+                <a:ea typeface="D2Coding" panose="020B0609020101020101" pitchFamily="49" charset="-127"/>
+              </a:rPr>
+              <a:t>features</a:t>
+            </a:r>
+            <a:r>
+              <a:rPr lang="ko-KR" altLang="en-US" sz="1200" dirty="0">
+                <a:latin typeface="D2Coding" panose="020B0609020101020101" pitchFamily="49" charset="-127"/>
+                <a:ea typeface="D2Coding" panose="020B0609020101020101" pitchFamily="49" charset="-127"/>
+              </a:rPr>
+              <a:t>) # 티켓 우선순위 점수 (0~1 사이 </a:t>
+            </a:r>
+            <a:r>
+              <a:rPr lang="ko-KR" altLang="en-US" sz="1200" dirty="0" err="1">
+                <a:latin typeface="D2Coding" panose="020B0609020101020101" pitchFamily="49" charset="-127"/>
+                <a:ea typeface="D2Coding" panose="020B0609020101020101" pitchFamily="49" charset="-127"/>
+              </a:rPr>
+              <a:t>스칼라값</a:t>
+            </a:r>
+            <a:r>
+              <a:rPr lang="ko-KR" altLang="en-US" sz="1200" dirty="0">
+                <a:latin typeface="D2Coding" panose="020B0609020101020101" pitchFamily="49" charset="-127"/>
+                <a:ea typeface="D2Coding" panose="020B0609020101020101" pitchFamily="49" charset="-127"/>
+              </a:rPr>
+              <a:t> 출력/이진 분류</a:t>
+            </a:r>
+            <a:r>
+              <a:rPr lang="en-US" altLang="ko-KR" sz="1200" dirty="0">
+                <a:latin typeface="D2Coding" panose="020B0609020101020101" pitchFamily="49" charset="-127"/>
+                <a:ea typeface="D2Coding" panose="020B0609020101020101" pitchFamily="49" charset="-127"/>
+              </a:rPr>
+              <a:t>)</a:t>
+            </a:r>
+            <a:endParaRPr lang="ko-KR" altLang="en-US" sz="1200" dirty="0">
+              <a:latin typeface="D2Coding" panose="020B0609020101020101" pitchFamily="49" charset="-127"/>
+              <a:ea typeface="D2Coding" panose="020B0609020101020101" pitchFamily="49" charset="-127"/>
+            </a:endParaRPr>
+          </a:p>
+          <a:p>
+            <a:r>
+              <a:rPr lang="ko-KR" altLang="en-US" sz="1200" dirty="0" err="1">
+                <a:latin typeface="D2Coding" panose="020B0609020101020101" pitchFamily="49" charset="-127"/>
+                <a:ea typeface="D2Coding" panose="020B0609020101020101" pitchFamily="49" charset="-127"/>
+              </a:rPr>
+              <a:t>department</a:t>
+            </a:r>
+            <a:r>
+              <a:rPr lang="ko-KR" altLang="en-US" sz="1200" dirty="0">
+                <a:latin typeface="D2Coding" panose="020B0609020101020101" pitchFamily="49" charset="-127"/>
+                <a:ea typeface="D2Coding" panose="020B0609020101020101" pitchFamily="49" charset="-127"/>
+              </a:rPr>
+              <a:t> = </a:t>
+            </a:r>
+            <a:r>
+              <a:rPr lang="ko-KR" altLang="en-US" sz="1200" dirty="0" err="1">
+                <a:latin typeface="D2Coding" panose="020B0609020101020101" pitchFamily="49" charset="-127"/>
+                <a:ea typeface="D2Coding" panose="020B0609020101020101" pitchFamily="49" charset="-127"/>
+              </a:rPr>
+              <a:t>layers.Dense</a:t>
+            </a:r>
+            <a:r>
+              <a:rPr lang="ko-KR" altLang="en-US" sz="1200" dirty="0">
+                <a:latin typeface="D2Coding" panose="020B0609020101020101" pitchFamily="49" charset="-127"/>
+                <a:ea typeface="D2Coding" panose="020B0609020101020101" pitchFamily="49" charset="-127"/>
+              </a:rPr>
+              <a:t>(</a:t>
+            </a:r>
+            <a:r>
+              <a:rPr lang="ko-KR" altLang="en-US" sz="1200" dirty="0" err="1">
+                <a:latin typeface="D2Coding" panose="020B0609020101020101" pitchFamily="49" charset="-127"/>
+                <a:ea typeface="D2Coding" panose="020B0609020101020101" pitchFamily="49" charset="-127"/>
+              </a:rPr>
+              <a:t>num_departments</a:t>
+            </a:r>
+            <a:r>
+              <a:rPr lang="ko-KR" altLang="en-US" sz="1200" dirty="0">
+                <a:latin typeface="D2Coding" panose="020B0609020101020101" pitchFamily="49" charset="-127"/>
+                <a:ea typeface="D2Coding" panose="020B0609020101020101" pitchFamily="49" charset="-127"/>
+              </a:rPr>
+              <a:t>, </a:t>
+            </a:r>
+            <a:r>
+              <a:rPr lang="ko-KR" altLang="en-US" sz="1200" dirty="0" err="1">
+                <a:latin typeface="D2Coding" panose="020B0609020101020101" pitchFamily="49" charset="-127"/>
+                <a:ea typeface="D2Coding" panose="020B0609020101020101" pitchFamily="49" charset="-127"/>
+              </a:rPr>
+              <a:t>activation</a:t>
+            </a:r>
+            <a:r>
+              <a:rPr lang="ko-KR" altLang="en-US" sz="1200" dirty="0">
+                <a:latin typeface="D2Coding" panose="020B0609020101020101" pitchFamily="49" charset="-127"/>
+                <a:ea typeface="D2Coding" panose="020B0609020101020101" pitchFamily="49" charset="-127"/>
+              </a:rPr>
+              <a:t>="</a:t>
+            </a:r>
+            <a:r>
+              <a:rPr lang="ko-KR" altLang="en-US" sz="1200" dirty="0" err="1">
+                <a:latin typeface="D2Coding" panose="020B0609020101020101" pitchFamily="49" charset="-127"/>
+                <a:ea typeface="D2Coding" panose="020B0609020101020101" pitchFamily="49" charset="-127"/>
+              </a:rPr>
+              <a:t>softmax</a:t>
+            </a:r>
+            <a:r>
+              <a:rPr lang="ko-KR" altLang="en-US" sz="1200" dirty="0">
+                <a:latin typeface="D2Coding" panose="020B0609020101020101" pitchFamily="49" charset="-127"/>
+                <a:ea typeface="D2Coding" panose="020B0609020101020101" pitchFamily="49" charset="-127"/>
+              </a:rPr>
+              <a:t>", </a:t>
+            </a:r>
+            <a:r>
+              <a:rPr lang="ko-KR" altLang="en-US" sz="1200" dirty="0" err="1">
+                <a:latin typeface="D2Coding" panose="020B0609020101020101" pitchFamily="49" charset="-127"/>
+                <a:ea typeface="D2Coding" panose="020B0609020101020101" pitchFamily="49" charset="-127"/>
+              </a:rPr>
+              <a:t>name</a:t>
+            </a:r>
+            <a:r>
+              <a:rPr lang="ko-KR" altLang="en-US" sz="1200" dirty="0">
+                <a:latin typeface="D2Coding" panose="020B0609020101020101" pitchFamily="49" charset="-127"/>
+                <a:ea typeface="D2Coding" panose="020B0609020101020101" pitchFamily="49" charset="-127"/>
+              </a:rPr>
+              <a:t>="</a:t>
+            </a:r>
+            <a:r>
+              <a:rPr lang="ko-KR" altLang="en-US" sz="1200" dirty="0" err="1">
+                <a:latin typeface="D2Coding" panose="020B0609020101020101" pitchFamily="49" charset="-127"/>
+                <a:ea typeface="D2Coding" panose="020B0609020101020101" pitchFamily="49" charset="-127"/>
+              </a:rPr>
+              <a:t>department</a:t>
+            </a:r>
+            <a:r>
+              <a:rPr lang="ko-KR" altLang="en-US" sz="1200" dirty="0">
+                <a:latin typeface="D2Coding" panose="020B0609020101020101" pitchFamily="49" charset="-127"/>
+                <a:ea typeface="D2Coding" panose="020B0609020101020101" pitchFamily="49" charset="-127"/>
+              </a:rPr>
+              <a:t>")(</a:t>
+            </a:r>
+            <a:r>
+              <a:rPr lang="ko-KR" altLang="en-US" sz="1200" dirty="0" err="1">
+                <a:latin typeface="D2Coding" panose="020B0609020101020101" pitchFamily="49" charset="-127"/>
+                <a:ea typeface="D2Coding" panose="020B0609020101020101" pitchFamily="49" charset="-127"/>
+              </a:rPr>
+              <a:t>features</a:t>
+            </a:r>
+            <a:r>
+              <a:rPr lang="ko-KR" altLang="en-US" sz="1200" dirty="0">
+                <a:latin typeface="D2Coding" panose="020B0609020101020101" pitchFamily="49" charset="-127"/>
+                <a:ea typeface="D2Coding" panose="020B0609020101020101" pitchFamily="49" charset="-127"/>
+              </a:rPr>
+              <a:t>) # </a:t>
+            </a:r>
+            <a:r>
+              <a:rPr lang="en-US" altLang="ko-KR" sz="1200" dirty="0">
+                <a:latin typeface="D2Coding" panose="020B0609020101020101" pitchFamily="49" charset="-127"/>
+                <a:ea typeface="D2Coding" panose="020B0609020101020101" pitchFamily="49" charset="-127"/>
+              </a:rPr>
+              <a:t>4</a:t>
+            </a:r>
+            <a:r>
+              <a:rPr lang="ko-KR" altLang="en-US" sz="1200" dirty="0">
+                <a:latin typeface="D2Coding" panose="020B0609020101020101" pitchFamily="49" charset="-127"/>
+                <a:ea typeface="D2Coding" panose="020B0609020101020101" pitchFamily="49" charset="-127"/>
+              </a:rPr>
+              <a:t>개 담당 부서 분류 (</a:t>
+            </a:r>
+            <a:r>
+              <a:rPr lang="ko-KR" altLang="en-US" sz="1200" dirty="0" err="1">
+                <a:latin typeface="D2Coding" panose="020B0609020101020101" pitchFamily="49" charset="-127"/>
+                <a:ea typeface="D2Coding" panose="020B0609020101020101" pitchFamily="49" charset="-127"/>
+              </a:rPr>
+              <a:t>확률값</a:t>
+            </a:r>
+            <a:r>
+              <a:rPr lang="ko-KR" altLang="en-US" sz="1200" dirty="0">
+                <a:latin typeface="D2Coding" panose="020B0609020101020101" pitchFamily="49" charset="-127"/>
+                <a:ea typeface="D2Coding" panose="020B0609020101020101" pitchFamily="49" charset="-127"/>
+              </a:rPr>
+              <a:t>/다중 분류</a:t>
+            </a:r>
+            <a:r>
+              <a:rPr lang="en-US" altLang="ko-KR" sz="1200" dirty="0">
+                <a:latin typeface="D2Coding" panose="020B0609020101020101" pitchFamily="49" charset="-127"/>
+                <a:ea typeface="D2Coding" panose="020B0609020101020101" pitchFamily="49" charset="-127"/>
+              </a:rPr>
+              <a:t>)</a:t>
+            </a:r>
+            <a:endParaRPr lang="ko-KR" altLang="en-US" sz="1200" dirty="0">
+              <a:latin typeface="D2Coding" panose="020B0609020101020101" pitchFamily="49" charset="-127"/>
+              <a:ea typeface="D2Coding" panose="020B0609020101020101" pitchFamily="49" charset="-127"/>
+            </a:endParaRPr>
+          </a:p>
+          <a:p>
+            <a:endParaRPr lang="ko-KR" altLang="en-US" sz="1200" dirty="0">
+              <a:latin typeface="D2Coding" panose="020B0609020101020101" pitchFamily="49" charset="-127"/>
+              <a:ea typeface="D2Coding" panose="020B0609020101020101" pitchFamily="49" charset="-127"/>
+            </a:endParaRPr>
+          </a:p>
+          <a:p>
+            <a:r>
+              <a:rPr lang="ko-KR" altLang="en-US" sz="1200" dirty="0">
+                <a:latin typeface="D2Coding" panose="020B0609020101020101" pitchFamily="49" charset="-127"/>
+                <a:ea typeface="D2Coding" panose="020B0609020101020101" pitchFamily="49" charset="-127"/>
+              </a:rPr>
+              <a:t># </a:t>
+            </a:r>
+            <a:r>
+              <a:rPr lang="en-US" altLang="ko-KR" sz="1200" dirty="0">
+                <a:latin typeface="D2Coding" panose="020B0609020101020101" pitchFamily="49" charset="-127"/>
+                <a:ea typeface="D2Coding" panose="020B0609020101020101" pitchFamily="49" charset="-127"/>
+              </a:rPr>
+              <a:t>5</a:t>
+            </a:r>
+            <a:r>
+              <a:rPr lang="ko-KR" altLang="en-US" sz="1200" dirty="0">
+                <a:latin typeface="D2Coding" panose="020B0609020101020101" pitchFamily="49" charset="-127"/>
+                <a:ea typeface="D2Coding" panose="020B0609020101020101" pitchFamily="49" charset="-127"/>
+              </a:rPr>
+              <a:t>. </a:t>
+            </a:r>
+            <a:r>
+              <a:rPr lang="ko-KR" altLang="en-US" sz="1200" dirty="0" err="1">
+                <a:latin typeface="D2Coding" panose="020B0609020101020101" pitchFamily="49" charset="-127"/>
+                <a:ea typeface="D2Coding" panose="020B0609020101020101" pitchFamily="49" charset="-127"/>
+              </a:rPr>
+              <a:t>Keras</a:t>
+            </a:r>
+            <a:r>
+              <a:rPr lang="ko-KR" altLang="en-US" sz="1200" dirty="0">
+                <a:latin typeface="D2Coding" panose="020B0609020101020101" pitchFamily="49" charset="-127"/>
+                <a:ea typeface="D2Coding" panose="020B0609020101020101" pitchFamily="49" charset="-127"/>
+              </a:rPr>
+              <a:t> </a:t>
+            </a:r>
+            <a:r>
+              <a:rPr lang="ko-KR" altLang="en-US" sz="1200" dirty="0" err="1">
+                <a:latin typeface="D2Coding" panose="020B0609020101020101" pitchFamily="49" charset="-127"/>
+                <a:ea typeface="D2Coding" panose="020B0609020101020101" pitchFamily="49" charset="-127"/>
+              </a:rPr>
+              <a:t>Functional</a:t>
+            </a:r>
+            <a:r>
+              <a:rPr lang="ko-KR" altLang="en-US" sz="1200" dirty="0">
+                <a:latin typeface="D2Coding" panose="020B0609020101020101" pitchFamily="49" charset="-127"/>
+                <a:ea typeface="D2Coding" panose="020B0609020101020101" pitchFamily="49" charset="-127"/>
+              </a:rPr>
+              <a:t> API 모델 최종 생성 </a:t>
+            </a:r>
+            <a:r>
+              <a:rPr lang="en-US" altLang="ko-KR" sz="1200" dirty="0">
+                <a:latin typeface="D2Coding" panose="020B0609020101020101" pitchFamily="49" charset="-127"/>
+                <a:ea typeface="D2Coding" panose="020B0609020101020101" pitchFamily="49" charset="-127"/>
+              </a:rPr>
+              <a:t>: </a:t>
+            </a:r>
+            <a:r>
+              <a:rPr lang="ko-KR" altLang="en-US" sz="1200" dirty="0">
+                <a:latin typeface="D2Coding" panose="020B0609020101020101" pitchFamily="49" charset="-127"/>
+                <a:ea typeface="D2Coding" panose="020B0609020101020101" pitchFamily="49" charset="-127"/>
+              </a:rPr>
+              <a:t>입력(</a:t>
+            </a:r>
+            <a:r>
+              <a:rPr lang="ko-KR" altLang="en-US" sz="1200" dirty="0" err="1">
+                <a:latin typeface="D2Coding" panose="020B0609020101020101" pitchFamily="49" charset="-127"/>
+                <a:ea typeface="D2Coding" panose="020B0609020101020101" pitchFamily="49" charset="-127"/>
+              </a:rPr>
+              <a:t>inputs</a:t>
+            </a:r>
+            <a:r>
+              <a:rPr lang="ko-KR" altLang="en-US" sz="1200" dirty="0">
+                <a:latin typeface="D2Coding" panose="020B0609020101020101" pitchFamily="49" charset="-127"/>
+                <a:ea typeface="D2Coding" panose="020B0609020101020101" pitchFamily="49" charset="-127"/>
+              </a:rPr>
+              <a:t>) 리스트와 출력(</a:t>
+            </a:r>
+            <a:r>
+              <a:rPr lang="ko-KR" altLang="en-US" sz="1200" dirty="0" err="1">
+                <a:latin typeface="D2Coding" panose="020B0609020101020101" pitchFamily="49" charset="-127"/>
+                <a:ea typeface="D2Coding" panose="020B0609020101020101" pitchFamily="49" charset="-127"/>
+              </a:rPr>
+              <a:t>outputs</a:t>
+            </a:r>
+            <a:r>
+              <a:rPr lang="ko-KR" altLang="en-US" sz="1200" dirty="0">
+                <a:latin typeface="D2Coding" panose="020B0609020101020101" pitchFamily="49" charset="-127"/>
+                <a:ea typeface="D2Coding" panose="020B0609020101020101" pitchFamily="49" charset="-127"/>
+              </a:rPr>
+              <a:t>) 리스트를 연결하여 하나의 그래프 구조 모델로 묶음</a:t>
+            </a:r>
+          </a:p>
+          <a:p>
+            <a:r>
+              <a:rPr lang="ko-KR" altLang="en-US" sz="1200" dirty="0" err="1">
+                <a:latin typeface="D2Coding" panose="020B0609020101020101" pitchFamily="49" charset="-127"/>
+                <a:ea typeface="D2Coding" panose="020B0609020101020101" pitchFamily="49" charset="-127"/>
+              </a:rPr>
+              <a:t>model</a:t>
+            </a:r>
+            <a:r>
+              <a:rPr lang="ko-KR" altLang="en-US" sz="1200" dirty="0">
+                <a:latin typeface="D2Coding" panose="020B0609020101020101" pitchFamily="49" charset="-127"/>
+                <a:ea typeface="D2Coding" panose="020B0609020101020101" pitchFamily="49" charset="-127"/>
+              </a:rPr>
+              <a:t> = </a:t>
+            </a:r>
+            <a:r>
+              <a:rPr lang="ko-KR" altLang="en-US" sz="1200" dirty="0" err="1">
+                <a:latin typeface="D2Coding" panose="020B0609020101020101" pitchFamily="49" charset="-127"/>
+                <a:ea typeface="D2Coding" panose="020B0609020101020101" pitchFamily="49" charset="-127"/>
+              </a:rPr>
+              <a:t>keras.Model</a:t>
+            </a:r>
+            <a:r>
+              <a:rPr lang="ko-KR" altLang="en-US" sz="1200" dirty="0">
+                <a:latin typeface="D2Coding" panose="020B0609020101020101" pitchFamily="49" charset="-127"/>
+                <a:ea typeface="D2Coding" panose="020B0609020101020101" pitchFamily="49" charset="-127"/>
+              </a:rPr>
+              <a:t>(</a:t>
+            </a:r>
+            <a:r>
+              <a:rPr lang="ko-KR" altLang="en-US" sz="1200" dirty="0" err="1">
+                <a:latin typeface="D2Coding" panose="020B0609020101020101" pitchFamily="49" charset="-127"/>
+                <a:ea typeface="D2Coding" panose="020B0609020101020101" pitchFamily="49" charset="-127"/>
+              </a:rPr>
+              <a:t>inputs</a:t>
+            </a:r>
+            <a:r>
+              <a:rPr lang="ko-KR" altLang="en-US" sz="1200" dirty="0">
+                <a:latin typeface="D2Coding" panose="020B0609020101020101" pitchFamily="49" charset="-127"/>
+                <a:ea typeface="D2Coding" panose="020B0609020101020101" pitchFamily="49" charset="-127"/>
+              </a:rPr>
+              <a:t>=[</a:t>
+            </a:r>
+            <a:r>
+              <a:rPr lang="ko-KR" altLang="en-US" sz="1200" dirty="0" err="1">
+                <a:latin typeface="D2Coding" panose="020B0609020101020101" pitchFamily="49" charset="-127"/>
+                <a:ea typeface="D2Coding" panose="020B0609020101020101" pitchFamily="49" charset="-127"/>
+              </a:rPr>
+              <a:t>title</a:t>
+            </a:r>
+            <a:r>
+              <a:rPr lang="ko-KR" altLang="en-US" sz="1200" dirty="0">
+                <a:latin typeface="D2Coding" panose="020B0609020101020101" pitchFamily="49" charset="-127"/>
+                <a:ea typeface="D2Coding" panose="020B0609020101020101" pitchFamily="49" charset="-127"/>
+              </a:rPr>
+              <a:t>, </a:t>
+            </a:r>
+            <a:r>
+              <a:rPr lang="ko-KR" altLang="en-US" sz="1200" dirty="0" err="1">
+                <a:latin typeface="D2Coding" panose="020B0609020101020101" pitchFamily="49" charset="-127"/>
+                <a:ea typeface="D2Coding" panose="020B0609020101020101" pitchFamily="49" charset="-127"/>
+              </a:rPr>
+              <a:t>text_body</a:t>
+            </a:r>
+            <a:r>
+              <a:rPr lang="ko-KR" altLang="en-US" sz="1200" dirty="0">
+                <a:latin typeface="D2Coding" panose="020B0609020101020101" pitchFamily="49" charset="-127"/>
+                <a:ea typeface="D2Coding" panose="020B0609020101020101" pitchFamily="49" charset="-127"/>
+              </a:rPr>
+              <a:t>, </a:t>
+            </a:r>
+            <a:r>
+              <a:rPr lang="ko-KR" altLang="en-US" sz="1200" dirty="0" err="1">
+                <a:latin typeface="D2Coding" panose="020B0609020101020101" pitchFamily="49" charset="-127"/>
+                <a:ea typeface="D2Coding" panose="020B0609020101020101" pitchFamily="49" charset="-127"/>
+              </a:rPr>
+              <a:t>tags</a:t>
+            </a:r>
+            <a:r>
+              <a:rPr lang="ko-KR" altLang="en-US" sz="1200" dirty="0">
+                <a:latin typeface="D2Coding" panose="020B0609020101020101" pitchFamily="49" charset="-127"/>
+                <a:ea typeface="D2Coding" panose="020B0609020101020101" pitchFamily="49" charset="-127"/>
+              </a:rPr>
+              <a:t>], </a:t>
+            </a:r>
+            <a:r>
+              <a:rPr lang="ko-KR" altLang="en-US" sz="1200" dirty="0" err="1">
+                <a:latin typeface="D2Coding" panose="020B0609020101020101" pitchFamily="49" charset="-127"/>
+                <a:ea typeface="D2Coding" panose="020B0609020101020101" pitchFamily="49" charset="-127"/>
+              </a:rPr>
+              <a:t>outputs</a:t>
+            </a:r>
+            <a:r>
+              <a:rPr lang="ko-KR" altLang="en-US" sz="1200" dirty="0">
+                <a:latin typeface="D2Coding" panose="020B0609020101020101" pitchFamily="49" charset="-127"/>
+                <a:ea typeface="D2Coding" panose="020B0609020101020101" pitchFamily="49" charset="-127"/>
+              </a:rPr>
+              <a:t>=[</a:t>
+            </a:r>
+            <a:r>
+              <a:rPr lang="ko-KR" altLang="en-US" sz="1200" dirty="0" err="1">
+                <a:latin typeface="D2Coding" panose="020B0609020101020101" pitchFamily="49" charset="-127"/>
+                <a:ea typeface="D2Coding" panose="020B0609020101020101" pitchFamily="49" charset="-127"/>
+              </a:rPr>
+              <a:t>priority</a:t>
+            </a:r>
+            <a:r>
+              <a:rPr lang="ko-KR" altLang="en-US" sz="1200" dirty="0">
+                <a:latin typeface="D2Coding" panose="020B0609020101020101" pitchFamily="49" charset="-127"/>
+                <a:ea typeface="D2Coding" panose="020B0609020101020101" pitchFamily="49" charset="-127"/>
+              </a:rPr>
+              <a:t>, </a:t>
+            </a:r>
+            <a:r>
+              <a:rPr lang="ko-KR" altLang="en-US" sz="1200" dirty="0" err="1">
+                <a:latin typeface="D2Coding" panose="020B0609020101020101" pitchFamily="49" charset="-127"/>
+                <a:ea typeface="D2Coding" panose="020B0609020101020101" pitchFamily="49" charset="-127"/>
+              </a:rPr>
+              <a:t>department</a:t>
+            </a:r>
+            <a:r>
+              <a:rPr lang="ko-KR" altLang="en-US" sz="1200" dirty="0">
+                <a:latin typeface="D2Coding" panose="020B0609020101020101" pitchFamily="49" charset="-127"/>
+                <a:ea typeface="D2Coding" panose="020B0609020101020101" pitchFamily="49" charset="-127"/>
+              </a:rPr>
+              <a:t>],)</a:t>
+            </a:r>
+          </a:p>
+          <a:p>
+            <a:endParaRPr lang="ko-KR" altLang="en-US" sz="1200" dirty="0">
+              <a:latin typeface="D2Coding" panose="020B0609020101020101" pitchFamily="49" charset="-127"/>
+              <a:ea typeface="D2Coding" panose="020B0609020101020101" pitchFamily="49" charset="-127"/>
+            </a:endParaRPr>
+          </a:p>
+          <a:p>
+            <a:r>
+              <a:rPr lang="ko-KR" altLang="en-US" sz="1200" dirty="0">
+                <a:latin typeface="D2Coding" panose="020B0609020101020101" pitchFamily="49" charset="-127"/>
+                <a:ea typeface="D2Coding" panose="020B0609020101020101" pitchFamily="49" charset="-127"/>
+              </a:rPr>
+              <a:t># 모델 구조 출력 (입력 3개 -&gt; 병합 -&gt; </a:t>
+            </a:r>
+            <a:r>
+              <a:rPr lang="ko-KR" altLang="en-US" sz="1200" dirty="0" err="1">
+                <a:latin typeface="D2Coding" panose="020B0609020101020101" pitchFamily="49" charset="-127"/>
+                <a:ea typeface="D2Coding" panose="020B0609020101020101" pitchFamily="49" charset="-127"/>
+              </a:rPr>
+              <a:t>은닉층</a:t>
+            </a:r>
+            <a:r>
+              <a:rPr lang="ko-KR" altLang="en-US" sz="1200" dirty="0">
+                <a:latin typeface="D2Coding" panose="020B0609020101020101" pitchFamily="49" charset="-127"/>
+                <a:ea typeface="D2Coding" panose="020B0609020101020101" pitchFamily="49" charset="-127"/>
+              </a:rPr>
+              <a:t> -&gt; 출력 2개 흐름 확인)</a:t>
+            </a:r>
+          </a:p>
+          <a:p>
+            <a:r>
+              <a:rPr lang="ko-KR" altLang="en-US" sz="1200" dirty="0" err="1">
+                <a:latin typeface="D2Coding" panose="020B0609020101020101" pitchFamily="49" charset="-127"/>
+                <a:ea typeface="D2Coding" panose="020B0609020101020101" pitchFamily="49" charset="-127"/>
+              </a:rPr>
+              <a:t>model.summary</a:t>
+            </a:r>
+            <a:r>
+              <a:rPr lang="ko-KR" altLang="en-US" sz="1200" dirty="0">
+                <a:latin typeface="D2Coding" panose="020B0609020101020101" pitchFamily="49" charset="-127"/>
+                <a:ea typeface="D2Coding" panose="020B0609020101020101" pitchFamily="49" charset="-127"/>
+              </a:rPr>
+              <a:t>()</a:t>
+            </a:r>
+          </a:p>
+        </p:txBody>
+      </p:sp>
+      <p:sp>
+        <p:nvSpPr>
+          <p:cNvPr id="50" name="TextBox 49">
+            <a:extLst>
+              <a:ext uri="{FF2B5EF4-FFF2-40B4-BE49-F238E27FC236}">
+                <a16:creationId xmlns:a16="http://schemas.microsoft.com/office/drawing/2014/main" id="{B7D4AD18-7AC6-3DC6-AC9C-FA3ACE62CD54}"/>
+              </a:ext>
+            </a:extLst>
+          </p:cNvPr>
+          <p:cNvSpPr txBox="1"/>
+          <p:nvPr/>
+        </p:nvSpPr>
+        <p:spPr>
+          <a:xfrm>
+            <a:off x="8554720" y="822776"/>
+            <a:ext cx="3048000" cy="369332"/>
+          </a:xfrm>
+          <a:prstGeom prst="rect">
+            <a:avLst/>
+          </a:prstGeom>
+          <a:noFill/>
+        </p:spPr>
+        <p:txBody>
+          <a:bodyPr wrap="square">
+            <a:spAutoFit/>
+          </a:bodyPr>
+          <a:lstStyle/>
+          <a:p>
+            <a:pPr algn="r"/>
+            <a:r>
+              <a:rPr lang="en-US" altLang="ko-KR" b="1" dirty="0">
+                <a:latin typeface="Lora" pitchFamily="2" charset="0"/>
+              </a:rPr>
+              <a:t>Functional API</a:t>
+            </a:r>
+          </a:p>
+        </p:txBody>
+      </p:sp>
+    </p:spTree>
+    <p:extLst>
+      <p:ext uri="{BB962C8B-B14F-4D97-AF65-F5344CB8AC3E}">
+        <p14:creationId xmlns:p14="http://schemas.microsoft.com/office/powerpoint/2010/main" val="1784997589"/>
+      </p:ext>
+    </p:extLst>
+  </p:cSld>
+  <p:clrMapOvr>
+    <a:masterClrMapping/>
+  </p:clrMapOvr>
+</p:sld>
+</file>
+
+<file path=ppt/slides/slide8.xml><?xml version="1.0" encoding="utf-8"?>
+<p:sld xmlns:a="http://schemas.openxmlformats.org/drawingml/2006/main" xmlns:r="http://schemas.openxmlformats.org/officeDocument/2006/relationships" xmlns:p="http://schemas.openxmlformats.org/presentationml/2006/main">
+  <p:cSld>
+    <p:spTree>
+      <p:nvGrpSpPr>
+        <p:cNvPr id="1" name="">
+          <a:extLst>
+            <a:ext uri="{FF2B5EF4-FFF2-40B4-BE49-F238E27FC236}">
+              <a16:creationId xmlns:a16="http://schemas.microsoft.com/office/drawing/2014/main" id="{EF7E70B9-5654-A5B6-2611-8A8E13CECC5B}"/>
+            </a:ext>
+          </a:extLst>
+        </p:cNvPr>
+        <p:cNvGrpSpPr/>
+        <p:nvPr/>
+      </p:nvGrpSpPr>
+      <p:grpSpPr>
+        <a:xfrm>
+          <a:off x="0" y="0"/>
+          <a:ext cx="0" cy="0"/>
+          <a:chOff x="0" y="0"/>
+          <a:chExt cx="0" cy="0"/>
+        </a:xfrm>
+      </p:grpSpPr>
+      <p:sp>
+        <p:nvSpPr>
+          <p:cNvPr id="4" name="슬라이드 번호 개체 틀 3">
+            <a:extLst>
+              <a:ext uri="{FF2B5EF4-FFF2-40B4-BE49-F238E27FC236}">
+                <a16:creationId xmlns:a16="http://schemas.microsoft.com/office/drawing/2014/main" id="{411B3FAF-0A59-B809-6001-123EE4730E0D}"/>
+              </a:ext>
+            </a:extLst>
+          </p:cNvPr>
+          <p:cNvSpPr>
+            <a:spLocks noGrp="1"/>
+          </p:cNvSpPr>
+          <p:nvPr>
+            <p:ph type="sldNum" sz="quarter" idx="12"/>
+          </p:nvPr>
+        </p:nvSpPr>
+        <p:spPr>
+          <a:xfrm>
+            <a:off x="10514011" y="6036261"/>
+            <a:ext cx="753545" cy="365125"/>
+          </a:xfrm>
+        </p:spPr>
+        <p:txBody>
+          <a:bodyPr/>
+          <a:lstStyle/>
+          <a:p>
+            <a:fld id="{D57F1E4F-1CFF-5643-939E-217C01CDF565}" type="slidenum">
+              <a:rPr lang="en-US" smtClean="0"/>
+              <a:pPr/>
+              <a:t>8</a:t>
+            </a:fld>
+            <a:endParaRPr lang="en-US" dirty="0"/>
+          </a:p>
+        </p:txBody>
+      </p:sp>
+      <p:sp>
+        <p:nvSpPr>
+          <p:cNvPr id="3" name="제목 1">
+            <a:extLst>
+              <a:ext uri="{FF2B5EF4-FFF2-40B4-BE49-F238E27FC236}">
+                <a16:creationId xmlns:a16="http://schemas.microsoft.com/office/drawing/2014/main" id="{5AA0A530-F655-859A-2D85-453B4F511F99}"/>
+              </a:ext>
+            </a:extLst>
+          </p:cNvPr>
+          <p:cNvSpPr txBox="1">
+            <a:spLocks/>
+          </p:cNvSpPr>
+          <p:nvPr/>
+        </p:nvSpPr>
+        <p:spPr>
+          <a:xfrm>
+            <a:off x="475645" y="481983"/>
+            <a:ext cx="7439630" cy="766439"/>
+          </a:xfrm>
+          <a:prstGeom prst="rect">
+            <a:avLst/>
+          </a:prstGeom>
+        </p:spPr>
+        <p:txBody>
+          <a:bodyPr vert="horz" lIns="91440" tIns="45720" rIns="91440" bIns="45720" rtlCol="0" anchor="ctr">
+            <a:normAutofit fontScale="92500"/>
+          </a:bodyPr>
+          <a:lstStyle>
+            <a:lvl1pPr algn="ctr" defTabSz="914400" rtl="0" eaLnBrk="1" latinLnBrk="1" hangingPunct="1">
+              <a:lnSpc>
+                <a:spcPct val="90000"/>
+              </a:lnSpc>
+              <a:spcBef>
+                <a:spcPct val="0"/>
+              </a:spcBef>
+              <a:buNone/>
+              <a:defRPr sz="3200" kern="1200" cap="all" baseline="0">
+                <a:solidFill>
+                  <a:schemeClr val="tx1"/>
+                </a:solidFill>
+                <a:effectLst/>
+                <a:latin typeface="Batang" panose="02030600000101010101" pitchFamily="18" charset="-127"/>
+                <a:ea typeface="Batang" panose="02030600000101010101" pitchFamily="18" charset="-127"/>
+                <a:cs typeface="+mj-cs"/>
+              </a:defRPr>
+            </a:lvl1pPr>
+          </a:lstStyle>
+          <a:p>
+            <a:pPr algn="l"/>
+            <a:r>
+              <a:rPr lang="en-US" altLang="ko-KR" sz="2800" b="1" cap="none" dirty="0">
+                <a:latin typeface="Lora" pitchFamily="2" charset="0"/>
+              </a:rPr>
+              <a:t>Training a multi-input, multi-output model</a:t>
+            </a:r>
+          </a:p>
+        </p:txBody>
+      </p:sp>
+      <p:sp>
+        <p:nvSpPr>
+          <p:cNvPr id="6" name="TextBox 5">
+            <a:extLst>
+              <a:ext uri="{FF2B5EF4-FFF2-40B4-BE49-F238E27FC236}">
+                <a16:creationId xmlns:a16="http://schemas.microsoft.com/office/drawing/2014/main" id="{EF903609-6381-C120-0EA0-451E43FA442E}"/>
+              </a:ext>
+            </a:extLst>
+          </p:cNvPr>
+          <p:cNvSpPr txBox="1"/>
+          <p:nvPr/>
+        </p:nvSpPr>
+        <p:spPr>
+          <a:xfrm>
+            <a:off x="8554720" y="822776"/>
+            <a:ext cx="3048000" cy="369332"/>
+          </a:xfrm>
+          <a:prstGeom prst="rect">
+            <a:avLst/>
+          </a:prstGeom>
+          <a:noFill/>
+        </p:spPr>
+        <p:txBody>
+          <a:bodyPr wrap="square">
+            <a:spAutoFit/>
+          </a:bodyPr>
+          <a:lstStyle/>
+          <a:p>
+            <a:pPr algn="r"/>
+            <a:r>
+              <a:rPr lang="en-US" altLang="ko-KR" b="1" dirty="0">
+                <a:latin typeface="Lora" pitchFamily="2" charset="0"/>
+              </a:rPr>
+              <a:t>Functional API</a:t>
+            </a:r>
+          </a:p>
+        </p:txBody>
+      </p:sp>
+      <p:pic>
+        <p:nvPicPr>
+          <p:cNvPr id="4098" name="Picture 2">
+            <a:extLst>
+              <a:ext uri="{FF2B5EF4-FFF2-40B4-BE49-F238E27FC236}">
+                <a16:creationId xmlns:a16="http://schemas.microsoft.com/office/drawing/2014/main" id="{B4854A1D-15A3-B76F-3237-451998C01159}"/>
+              </a:ext>
+            </a:extLst>
+          </p:cNvPr>
+          <p:cNvPicPr>
+            <a:picLocks noChangeAspect="1" noChangeArrowheads="1"/>
+          </p:cNvPicPr>
+          <p:nvPr/>
+        </p:nvPicPr>
+        <p:blipFill>
+          <a:blip r:embed="rId2">
+            <a:extLst>
+              <a:ext uri="{28A0092B-C50C-407E-A947-70E740481C1C}">
+                <a14:useLocalDpi xmlns:a14="http://schemas.microsoft.com/office/drawing/2010/main" val="0"/>
+              </a:ext>
+            </a:extLst>
+          </a:blip>
+          <a:srcRect/>
+          <a:stretch>
+            <a:fillRect/>
+          </a:stretch>
+        </p:blipFill>
+        <p:spPr bwMode="auto">
+          <a:xfrm>
+            <a:off x="606679" y="2311204"/>
+            <a:ext cx="4556365" cy="3669392"/>
+          </a:xfrm>
+          <a:prstGeom prst="rect">
+            <a:avLst/>
+          </a:prstGeom>
+          <a:noFill/>
+          <a:extLst>
+            <a:ext uri="{909E8E84-426E-40DD-AFC4-6F175D3DCCD1}">
+              <a14:hiddenFill xmlns:a14="http://schemas.microsoft.com/office/drawing/2010/main">
+                <a:solidFill>
+                  <a:srgbClr val="FFFFFF"/>
+                </a:solidFill>
+              </a14:hiddenFill>
+            </a:ext>
+          </a:extLst>
+        </p:spPr>
+      </p:pic>
+      <p:pic>
+        <p:nvPicPr>
+          <p:cNvPr id="4100" name="Picture 4">
+            <a:extLst>
+              <a:ext uri="{FF2B5EF4-FFF2-40B4-BE49-F238E27FC236}">
+                <a16:creationId xmlns:a16="http://schemas.microsoft.com/office/drawing/2014/main" id="{86A3EDEA-44E5-F84B-7F48-777ED5F28075}"/>
+              </a:ext>
+            </a:extLst>
+          </p:cNvPr>
+          <p:cNvPicPr>
+            <a:picLocks noChangeAspect="1" noChangeArrowheads="1"/>
+          </p:cNvPicPr>
+          <p:nvPr/>
+        </p:nvPicPr>
+        <p:blipFill>
+          <a:blip r:embed="rId3">
+            <a:extLst>
+              <a:ext uri="{28A0092B-C50C-407E-A947-70E740481C1C}">
+                <a14:useLocalDpi xmlns:a14="http://schemas.microsoft.com/office/drawing/2010/main" val="0"/>
+              </a:ext>
+            </a:extLst>
+          </a:blip>
+          <a:srcRect/>
+          <a:stretch>
+            <a:fillRect/>
+          </a:stretch>
+        </p:blipFill>
+        <p:spPr bwMode="auto">
+          <a:xfrm>
+            <a:off x="5663375" y="2311204"/>
+            <a:ext cx="5782690" cy="3669392"/>
+          </a:xfrm>
+          <a:prstGeom prst="rect">
+            <a:avLst/>
+          </a:prstGeom>
+          <a:noFill/>
+          <a:extLst>
+            <a:ext uri="{909E8E84-426E-40DD-AFC4-6F175D3DCCD1}">
+              <a14:hiddenFill xmlns:a14="http://schemas.microsoft.com/office/drawing/2010/main">
+                <a:solidFill>
+                  <a:srgbClr val="FFFFFF"/>
+                </a:solidFill>
+              </a14:hiddenFill>
+            </a:ext>
+          </a:extLst>
+        </p:spPr>
+      </p:pic>
+      <p:sp>
+        <p:nvSpPr>
+          <p:cNvPr id="8" name="TextBox 7">
+            <a:extLst>
+              <a:ext uri="{FF2B5EF4-FFF2-40B4-BE49-F238E27FC236}">
+                <a16:creationId xmlns:a16="http://schemas.microsoft.com/office/drawing/2014/main" id="{61286AE1-FF3A-2650-C3F3-446BEDC64377}"/>
+              </a:ext>
+            </a:extLst>
+          </p:cNvPr>
+          <p:cNvSpPr txBox="1"/>
+          <p:nvPr/>
+        </p:nvSpPr>
+        <p:spPr>
+          <a:xfrm>
+            <a:off x="2170431" y="1595147"/>
+            <a:ext cx="7264400" cy="369332"/>
+          </a:xfrm>
+          <a:prstGeom prst="rect">
+            <a:avLst/>
+          </a:prstGeom>
+          <a:noFill/>
+        </p:spPr>
+        <p:txBody>
+          <a:bodyPr wrap="square">
+            <a:spAutoFit/>
+          </a:bodyPr>
+          <a:lstStyle/>
+          <a:p>
+            <a:pPr algn="l">
+              <a:buNone/>
+            </a:pPr>
+            <a:r>
+              <a:rPr lang="en-US" altLang="ko-KR" i="0" dirty="0">
+                <a:effectLst/>
+                <a:latin typeface="D2Coding" panose="020B0609020101020101" pitchFamily="49" charset="-127"/>
+                <a:ea typeface="D2Coding" panose="020B0609020101020101" pitchFamily="49" charset="-127"/>
+              </a:rPr>
+              <a:t>The power of the Functional API: Access to layer connectivity</a:t>
+            </a:r>
+          </a:p>
+        </p:txBody>
+      </p:sp>
+      <p:sp>
+        <p:nvSpPr>
+          <p:cNvPr id="5" name="TextBox 4">
+            <a:extLst>
+              <a:ext uri="{FF2B5EF4-FFF2-40B4-BE49-F238E27FC236}">
+                <a16:creationId xmlns:a16="http://schemas.microsoft.com/office/drawing/2014/main" id="{8F387E84-F200-98AA-0280-5B68FF8CD9E0}"/>
+              </a:ext>
+            </a:extLst>
+          </p:cNvPr>
+          <p:cNvSpPr txBox="1"/>
+          <p:nvPr/>
+        </p:nvSpPr>
+        <p:spPr>
+          <a:xfrm>
+            <a:off x="7383145" y="5933830"/>
+            <a:ext cx="1171575" cy="307777"/>
+          </a:xfrm>
+          <a:prstGeom prst="rect">
+            <a:avLst/>
+          </a:prstGeom>
+          <a:noFill/>
+        </p:spPr>
+        <p:txBody>
+          <a:bodyPr wrap="square">
+            <a:spAutoFit/>
+          </a:bodyPr>
+          <a:lstStyle/>
+          <a:p>
+            <a:r>
+              <a:rPr lang="ko-KR" altLang="en-US" sz="1400" dirty="0" err="1">
+                <a:latin typeface="D2Coding" panose="020B0609020101020101" pitchFamily="49" charset="-127"/>
+                <a:ea typeface="D2Coding" panose="020B0609020101020101" pitchFamily="49" charset="-127"/>
+              </a:rPr>
+              <a:t>sigmoid</a:t>
+            </a:r>
+            <a:endParaRPr lang="ko-KR" altLang="en-US" sz="1400" dirty="0"/>
+          </a:p>
+        </p:txBody>
+      </p:sp>
+      <p:sp>
+        <p:nvSpPr>
+          <p:cNvPr id="9" name="TextBox 8">
+            <a:extLst>
+              <a:ext uri="{FF2B5EF4-FFF2-40B4-BE49-F238E27FC236}">
+                <a16:creationId xmlns:a16="http://schemas.microsoft.com/office/drawing/2014/main" id="{C98AE8B4-0F70-5532-8947-C10E97E66B23}"/>
+              </a:ext>
+            </a:extLst>
+          </p:cNvPr>
+          <p:cNvSpPr txBox="1"/>
+          <p:nvPr/>
+        </p:nvSpPr>
+        <p:spPr>
+          <a:xfrm>
+            <a:off x="10172181" y="5911046"/>
+            <a:ext cx="933969" cy="307777"/>
+          </a:xfrm>
+          <a:prstGeom prst="rect">
+            <a:avLst/>
+          </a:prstGeom>
+          <a:noFill/>
+        </p:spPr>
+        <p:txBody>
+          <a:bodyPr wrap="square">
+            <a:spAutoFit/>
+          </a:bodyPr>
+          <a:lstStyle/>
+          <a:p>
+            <a:r>
+              <a:rPr lang="ko-KR" altLang="en-US" sz="1400" dirty="0" err="1">
+                <a:latin typeface="D2Coding" panose="020B0609020101020101" pitchFamily="49" charset="-127"/>
+                <a:ea typeface="D2Coding" panose="020B0609020101020101" pitchFamily="49" charset="-127"/>
+              </a:rPr>
+              <a:t>softmax</a:t>
+            </a:r>
+            <a:endParaRPr lang="ko-KR" altLang="en-US" sz="1400" dirty="0"/>
+          </a:p>
+        </p:txBody>
+      </p:sp>
+    </p:spTree>
+    <p:extLst>
+      <p:ext uri="{BB962C8B-B14F-4D97-AF65-F5344CB8AC3E}">
+        <p14:creationId xmlns:p14="http://schemas.microsoft.com/office/powerpoint/2010/main" val="1901938499"/>
+      </p:ext>
+    </p:extLst>
+  </p:cSld>
+  <p:clrMapOvr>
+    <a:masterClrMapping/>
+  </p:clrMapOvr>
+</p:sld>
+</file>
+
+<file path=ppt/slides/slide9.xml><?xml version="1.0" encoding="utf-8"?>
+<p:sld xmlns:a="http://schemas.openxmlformats.org/drawingml/2006/main" xmlns:r="http://schemas.openxmlformats.org/officeDocument/2006/relationships" xmlns:p="http://schemas.openxmlformats.org/presentationml/2006/main">
+  <p:cSld>
+    <p:spTree>
+      <p:nvGrpSpPr>
+        <p:cNvPr id="1" name="">
+          <a:extLst>
+            <a:ext uri="{FF2B5EF4-FFF2-40B4-BE49-F238E27FC236}">
+              <a16:creationId xmlns:a16="http://schemas.microsoft.com/office/drawing/2014/main" id="{2D443848-41FB-B2FA-DB4F-AE56CD1EA666}"/>
+            </a:ext>
+          </a:extLst>
+        </p:cNvPr>
+        <p:cNvGrpSpPr/>
+        <p:nvPr/>
+      </p:nvGrpSpPr>
+      <p:grpSpPr>
+        <a:xfrm>
+          <a:off x="0" y="0"/>
+          <a:ext cx="0" cy="0"/>
+          <a:chOff x="0" y="0"/>
+          <a:chExt cx="0" cy="0"/>
+        </a:xfrm>
+      </p:grpSpPr>
+      <p:sp>
+        <p:nvSpPr>
+          <p:cNvPr id="4" name="슬라이드 번호 개체 틀 3">
+            <a:extLst>
+              <a:ext uri="{FF2B5EF4-FFF2-40B4-BE49-F238E27FC236}">
+                <a16:creationId xmlns:a16="http://schemas.microsoft.com/office/drawing/2014/main" id="{A8949B6C-C372-4F9A-9E49-A253934E52E3}"/>
+              </a:ext>
+            </a:extLst>
+          </p:cNvPr>
+          <p:cNvSpPr>
+            <a:spLocks noGrp="1"/>
+          </p:cNvSpPr>
+          <p:nvPr>
+            <p:ph type="sldNum" sz="quarter" idx="12"/>
+          </p:nvPr>
+        </p:nvSpPr>
+        <p:spPr>
+          <a:xfrm>
+            <a:off x="10514011" y="6036261"/>
+            <a:ext cx="753545" cy="365125"/>
+          </a:xfrm>
+        </p:spPr>
+        <p:txBody>
+          <a:bodyPr/>
+          <a:lstStyle/>
+          <a:p>
+            <a:fld id="{D57F1E4F-1CFF-5643-939E-217C01CDF565}" type="slidenum">
+              <a:rPr lang="en-US" smtClean="0"/>
+              <a:pPr/>
+              <a:t>9</a:t>
+            </a:fld>
+            <a:endParaRPr lang="en-US" dirty="0"/>
+          </a:p>
+        </p:txBody>
+      </p:sp>
+      <p:sp>
+        <p:nvSpPr>
+          <p:cNvPr id="3" name="제목 1">
+            <a:extLst>
+              <a:ext uri="{FF2B5EF4-FFF2-40B4-BE49-F238E27FC236}">
+                <a16:creationId xmlns:a16="http://schemas.microsoft.com/office/drawing/2014/main" id="{E602D0EB-6A55-FA1B-B2EE-054A46BA142F}"/>
+              </a:ext>
+            </a:extLst>
+          </p:cNvPr>
+          <p:cNvSpPr txBox="1">
+            <a:spLocks/>
+          </p:cNvSpPr>
+          <p:nvPr/>
+        </p:nvSpPr>
+        <p:spPr>
+          <a:xfrm>
+            <a:off x="475645" y="481983"/>
+            <a:ext cx="7439630" cy="766439"/>
+          </a:xfrm>
+          <a:prstGeom prst="rect">
+            <a:avLst/>
+          </a:prstGeom>
+        </p:spPr>
+        <p:txBody>
+          <a:bodyPr vert="horz" lIns="91440" tIns="45720" rIns="91440" bIns="45720" rtlCol="0" anchor="ctr">
+            <a:normAutofit fontScale="92500"/>
+          </a:bodyPr>
+          <a:lstStyle>
+            <a:lvl1pPr algn="ctr" defTabSz="914400" rtl="0" eaLnBrk="1" latinLnBrk="1" hangingPunct="1">
+              <a:lnSpc>
+                <a:spcPct val="90000"/>
+              </a:lnSpc>
+              <a:spcBef>
+                <a:spcPct val="0"/>
+              </a:spcBef>
+              <a:buNone/>
+              <a:defRPr sz="3200" kern="1200" cap="all" baseline="0">
+                <a:solidFill>
+                  <a:schemeClr val="tx1"/>
+                </a:solidFill>
+                <a:effectLst/>
+                <a:latin typeface="Batang" panose="02030600000101010101" pitchFamily="18" charset="-127"/>
+                <a:ea typeface="Batang" panose="02030600000101010101" pitchFamily="18" charset="-127"/>
+                <a:cs typeface="+mj-cs"/>
+              </a:defRPr>
+            </a:lvl1pPr>
+          </a:lstStyle>
+          <a:p>
+            <a:pPr algn="l"/>
+            <a:r>
+              <a:rPr lang="en-US" altLang="ko-KR" sz="2800" b="1" cap="none" dirty="0">
+                <a:latin typeface="Lora" pitchFamily="2" charset="0"/>
+              </a:rPr>
+              <a:t>Training a multi-input, multi-output model</a:t>
+            </a:r>
+          </a:p>
+        </p:txBody>
+      </p:sp>
+      <p:sp>
+        <p:nvSpPr>
+          <p:cNvPr id="6" name="TextBox 5">
+            <a:extLst>
+              <a:ext uri="{FF2B5EF4-FFF2-40B4-BE49-F238E27FC236}">
+                <a16:creationId xmlns:a16="http://schemas.microsoft.com/office/drawing/2014/main" id="{396B4481-8D4F-A3CE-82F5-89819ED56103}"/>
+              </a:ext>
+            </a:extLst>
+          </p:cNvPr>
+          <p:cNvSpPr txBox="1"/>
+          <p:nvPr/>
+        </p:nvSpPr>
+        <p:spPr>
+          <a:xfrm>
+            <a:off x="8554720" y="822776"/>
+            <a:ext cx="3048000" cy="369332"/>
+          </a:xfrm>
+          <a:prstGeom prst="rect">
+            <a:avLst/>
+          </a:prstGeom>
+          <a:noFill/>
+        </p:spPr>
+        <p:txBody>
+          <a:bodyPr wrap="square">
+            <a:spAutoFit/>
+          </a:bodyPr>
+          <a:lstStyle/>
+          <a:p>
+            <a:pPr algn="r"/>
+            <a:r>
+              <a:rPr lang="en-US" altLang="ko-KR" b="1" dirty="0">
+                <a:latin typeface="Lora" pitchFamily="2" charset="0"/>
+              </a:rPr>
+              <a:t>Functional API</a:t>
+            </a:r>
+          </a:p>
+        </p:txBody>
+      </p:sp>
+      <p:sp>
+        <p:nvSpPr>
+          <p:cNvPr id="7" name="TextBox 6">
+            <a:extLst>
+              <a:ext uri="{FF2B5EF4-FFF2-40B4-BE49-F238E27FC236}">
+                <a16:creationId xmlns:a16="http://schemas.microsoft.com/office/drawing/2014/main" id="{A7168822-2A75-796C-DF8D-0CAF0D3CD4C9}"/>
+              </a:ext>
+            </a:extLst>
+          </p:cNvPr>
+          <p:cNvSpPr txBox="1"/>
+          <p:nvPr/>
+        </p:nvSpPr>
+        <p:spPr>
+          <a:xfrm>
+            <a:off x="600075" y="1248422"/>
+            <a:ext cx="11002645" cy="1028808"/>
+          </a:xfrm>
+          <a:prstGeom prst="rect">
+            <a:avLst/>
+          </a:prstGeom>
+          <a:solidFill>
+            <a:srgbClr val="76E3FF"/>
+          </a:solidFill>
+        </p:spPr>
+        <p:txBody>
+          <a:bodyPr wrap="square">
+            <a:spAutoFit/>
+          </a:bodyPr>
+          <a:lstStyle/>
+          <a:p>
+            <a:pPr>
+              <a:lnSpc>
+                <a:spcPct val="150000"/>
+              </a:lnSpc>
+              <a:buNone/>
+            </a:pPr>
+            <a:r>
+              <a:rPr lang="en-US" altLang="ko-KR" sz="1400" b="0" dirty="0">
+                <a:effectLst/>
+                <a:latin typeface="D2Coding" panose="020B0609020101020101" pitchFamily="49" charset="-127"/>
+                <a:ea typeface="D2Coding" panose="020B0609020101020101" pitchFamily="49" charset="-127"/>
+              </a:rPr>
+              <a:t>features = </a:t>
+            </a:r>
+            <a:r>
+              <a:rPr lang="en-US" altLang="ko-KR" sz="1400" b="0" dirty="0" err="1">
+                <a:effectLst/>
+                <a:latin typeface="D2Coding" panose="020B0609020101020101" pitchFamily="49" charset="-127"/>
+                <a:ea typeface="D2Coding" panose="020B0609020101020101" pitchFamily="49" charset="-127"/>
+              </a:rPr>
+              <a:t>model.layers</a:t>
+            </a:r>
+            <a:r>
+              <a:rPr lang="en-US" altLang="ko-KR" sz="1400" b="0" dirty="0">
+                <a:effectLst/>
+                <a:latin typeface="D2Coding" panose="020B0609020101020101" pitchFamily="49" charset="-127"/>
+                <a:ea typeface="D2Coding" panose="020B0609020101020101" pitchFamily="49" charset="-127"/>
+              </a:rPr>
+              <a:t>[4].output</a:t>
+            </a:r>
+          </a:p>
+          <a:p>
+            <a:pPr>
+              <a:lnSpc>
+                <a:spcPct val="150000"/>
+              </a:lnSpc>
+              <a:buNone/>
+            </a:pPr>
+            <a:r>
+              <a:rPr lang="en-US" altLang="ko-KR" sz="1400" b="0" dirty="0">
+                <a:effectLst/>
+                <a:latin typeface="D2Coding" panose="020B0609020101020101" pitchFamily="49" charset="-127"/>
+                <a:ea typeface="D2Coding" panose="020B0609020101020101" pitchFamily="49" charset="-127"/>
+              </a:rPr>
+              <a:t>difficulty = </a:t>
+            </a:r>
+            <a:r>
+              <a:rPr lang="en-US" altLang="ko-KR" sz="1400" b="0" dirty="0" err="1">
+                <a:effectLst/>
+                <a:latin typeface="D2Coding" panose="020B0609020101020101" pitchFamily="49" charset="-127"/>
+                <a:ea typeface="D2Coding" panose="020B0609020101020101" pitchFamily="49" charset="-127"/>
+              </a:rPr>
+              <a:t>layers.Dense</a:t>
+            </a:r>
+            <a:r>
+              <a:rPr lang="en-US" altLang="ko-KR" sz="1400" b="0" dirty="0">
+                <a:effectLst/>
+                <a:latin typeface="D2Coding" panose="020B0609020101020101" pitchFamily="49" charset="-127"/>
+                <a:ea typeface="D2Coding" panose="020B0609020101020101" pitchFamily="49" charset="-127"/>
+              </a:rPr>
+              <a:t>(3, activation="</a:t>
+            </a:r>
+            <a:r>
+              <a:rPr lang="en-US" altLang="ko-KR" sz="1400" b="0" dirty="0" err="1">
+                <a:effectLst/>
+                <a:latin typeface="D2Coding" panose="020B0609020101020101" pitchFamily="49" charset="-127"/>
+                <a:ea typeface="D2Coding" panose="020B0609020101020101" pitchFamily="49" charset="-127"/>
+              </a:rPr>
+              <a:t>softmax</a:t>
+            </a:r>
+            <a:r>
+              <a:rPr lang="en-US" altLang="ko-KR" sz="1400" b="0" dirty="0">
+                <a:effectLst/>
+                <a:latin typeface="D2Coding" panose="020B0609020101020101" pitchFamily="49" charset="-127"/>
+                <a:ea typeface="D2Coding" panose="020B0609020101020101" pitchFamily="49" charset="-127"/>
+              </a:rPr>
+              <a:t>", name="difficulty")(features)</a:t>
+            </a:r>
+          </a:p>
+          <a:p>
+            <a:pPr>
+              <a:lnSpc>
+                <a:spcPct val="150000"/>
+              </a:lnSpc>
+              <a:buNone/>
+            </a:pPr>
+            <a:r>
+              <a:rPr lang="en-US" altLang="ko-KR" sz="1400" b="0" dirty="0" err="1">
+                <a:effectLst/>
+                <a:latin typeface="D2Coding" panose="020B0609020101020101" pitchFamily="49" charset="-127"/>
+                <a:ea typeface="D2Coding" panose="020B0609020101020101" pitchFamily="49" charset="-127"/>
+              </a:rPr>
+              <a:t>new_model</a:t>
+            </a:r>
+            <a:r>
+              <a:rPr lang="en-US" altLang="ko-KR" sz="1400" b="0" dirty="0">
+                <a:effectLst/>
+                <a:latin typeface="D2Coding" panose="020B0609020101020101" pitchFamily="49" charset="-127"/>
+                <a:ea typeface="D2Coding" panose="020B0609020101020101" pitchFamily="49" charset="-127"/>
+              </a:rPr>
+              <a:t> = </a:t>
+            </a:r>
+            <a:r>
+              <a:rPr lang="en-US" altLang="ko-KR" sz="1400" b="0" dirty="0" err="1">
+                <a:effectLst/>
+                <a:latin typeface="D2Coding" panose="020B0609020101020101" pitchFamily="49" charset="-127"/>
+                <a:ea typeface="D2Coding" panose="020B0609020101020101" pitchFamily="49" charset="-127"/>
+              </a:rPr>
+              <a:t>keras.Model</a:t>
+            </a:r>
+            <a:r>
+              <a:rPr lang="en-US" altLang="ko-KR" sz="1400" b="0" dirty="0">
+                <a:effectLst/>
+                <a:latin typeface="D2Coding" panose="020B0609020101020101" pitchFamily="49" charset="-127"/>
+                <a:ea typeface="D2Coding" panose="020B0609020101020101" pitchFamily="49" charset="-127"/>
+              </a:rPr>
+              <a:t>(inputs=[title, </a:t>
+            </a:r>
+            <a:r>
+              <a:rPr lang="en-US" altLang="ko-KR" sz="1400" b="0" dirty="0" err="1">
+                <a:effectLst/>
+                <a:latin typeface="D2Coding" panose="020B0609020101020101" pitchFamily="49" charset="-127"/>
+                <a:ea typeface="D2Coding" panose="020B0609020101020101" pitchFamily="49" charset="-127"/>
+              </a:rPr>
+              <a:t>text_body</a:t>
+            </a:r>
+            <a:r>
+              <a:rPr lang="en-US" altLang="ko-KR" sz="1400" b="0" dirty="0">
+                <a:effectLst/>
+                <a:latin typeface="D2Coding" panose="020B0609020101020101" pitchFamily="49" charset="-127"/>
+                <a:ea typeface="D2Coding" panose="020B0609020101020101" pitchFamily="49" charset="-127"/>
+              </a:rPr>
+              <a:t>, tags], outputs=[priority, department, difficulty])</a:t>
+            </a:r>
+          </a:p>
+        </p:txBody>
+      </p:sp>
+      <p:pic>
+        <p:nvPicPr>
+          <p:cNvPr id="1026" name="Picture 2">
+            <a:extLst>
+              <a:ext uri="{FF2B5EF4-FFF2-40B4-BE49-F238E27FC236}">
+                <a16:creationId xmlns:a16="http://schemas.microsoft.com/office/drawing/2014/main" id="{4CC78783-FF25-70C9-81CA-B9E7AE61973C}"/>
+              </a:ext>
+            </a:extLst>
+          </p:cNvPr>
+          <p:cNvPicPr>
+            <a:picLocks noChangeAspect="1" noChangeArrowheads="1"/>
+          </p:cNvPicPr>
+          <p:nvPr/>
+        </p:nvPicPr>
+        <p:blipFill>
+          <a:blip r:embed="rId2">
+            <a:extLst>
+              <a:ext uri="{28A0092B-C50C-407E-A947-70E740481C1C}">
+                <a14:useLocalDpi xmlns:a14="http://schemas.microsoft.com/office/drawing/2010/main" val="0"/>
+              </a:ext>
+            </a:extLst>
+          </a:blip>
+          <a:srcRect/>
+          <a:stretch>
+            <a:fillRect/>
+          </a:stretch>
+        </p:blipFill>
+        <p:spPr bwMode="auto">
+          <a:xfrm>
+            <a:off x="1598611" y="2683690"/>
+            <a:ext cx="8763000" cy="3692327"/>
+          </a:xfrm>
+          <a:prstGeom prst="rect">
+            <a:avLst/>
+          </a:prstGeom>
+          <a:noFill/>
+          <a:extLst>
+            <a:ext uri="{909E8E84-426E-40DD-AFC4-6F175D3DCCD1}">
+              <a14:hiddenFill xmlns:a14="http://schemas.microsoft.com/office/drawing/2010/main">
+                <a:solidFill>
+                  <a:srgbClr val="FFFFFF"/>
+                </a:solidFill>
+              </a14:hiddenFill>
+            </a:ext>
+          </a:extLst>
+        </p:spPr>
+      </p:pic>
+    </p:spTree>
+    <p:extLst>
+      <p:ext uri="{BB962C8B-B14F-4D97-AF65-F5344CB8AC3E}">
+        <p14:creationId xmlns:p14="http://schemas.microsoft.com/office/powerpoint/2010/main" val="2264211179"/>
       </p:ext>
     </p:extLst>
   </p:cSld>

--- a/Chapter 07 A deep dive on Keras.pptx
+++ b/Chapter 07 A deep dive on Keras.pptx
@@ -5,10 +5,10 @@
     <p:sldMasterId id="2147483660" r:id="rId1"/>
   </p:sldMasterIdLst>
   <p:notesMasterIdLst>
-    <p:notesMasterId r:id="rId13"/>
+    <p:notesMasterId r:id="rId18"/>
   </p:notesMasterIdLst>
   <p:handoutMasterIdLst>
-    <p:handoutMasterId r:id="rId14"/>
+    <p:handoutMasterId r:id="rId19"/>
   </p:handoutMasterIdLst>
   <p:sldIdLst>
     <p:sldId id="256" r:id="rId2"/>
@@ -18,10 +18,15 @@
     <p:sldId id="1150" r:id="rId6"/>
     <p:sldId id="1152" r:id="rId7"/>
     <p:sldId id="1151" r:id="rId8"/>
-    <p:sldId id="1147" r:id="rId9"/>
-    <p:sldId id="1153" r:id="rId10"/>
-    <p:sldId id="1148" r:id="rId11"/>
-    <p:sldId id="1154" r:id="rId12"/>
+    <p:sldId id="1155" r:id="rId9"/>
+    <p:sldId id="1157" r:id="rId10"/>
+    <p:sldId id="1158" r:id="rId11"/>
+    <p:sldId id="1156" r:id="rId12"/>
+    <p:sldId id="1147" r:id="rId13"/>
+    <p:sldId id="1159" r:id="rId14"/>
+    <p:sldId id="1153" r:id="rId15"/>
+    <p:sldId id="1148" r:id="rId16"/>
+    <p:sldId id="1154" r:id="rId17"/>
   </p:sldIdLst>
   <p:sldSz cx="12192000" cy="6858000"/>
   <p:notesSz cx="6858000" cy="9144000"/>
@@ -136,7 +141,12 @@
             <p14:sldId id="1150"/>
             <p14:sldId id="1152"/>
             <p14:sldId id="1151"/>
+            <p14:sldId id="1155"/>
+            <p14:sldId id="1157"/>
+            <p14:sldId id="1158"/>
+            <p14:sldId id="1156"/>
             <p14:sldId id="1147"/>
+            <p14:sldId id="1159"/>
             <p14:sldId id="1153"/>
             <p14:sldId id="1148"/>
             <p14:sldId id="1154"/>
@@ -264,7 +274,7 @@
                 <a:latin typeface="맑은 고딕" panose="020B0503020000020004" pitchFamily="50" charset="-127"/>
                 <a:ea typeface="맑은 고딕" panose="020B0503020000020004" pitchFamily="50" charset="-127"/>
               </a:rPr>
-              <a:t>2026-08-03</a:t>
+              <a:t>2026-09-10</a:t>
             </a:fld>
             <a:endParaRPr lang="ko-KR" altLang="en-US">
               <a:latin typeface="맑은 고딕" panose="020B0503020000020004" pitchFamily="50" charset="-127"/>
@@ -450,7 +460,7 @@
           <a:p>
             <a:fld id="{43E1C3DD-4A19-441D-907C-380838DB51C4}" type="datetime1">
               <a:rPr lang="ko-KR" altLang="en-US" noProof="0" smtClean="0"/>
-              <a:t>2026-08-03</a:t>
+              <a:t>2026-09-10</a:t>
             </a:fld>
             <a:endParaRPr lang="ko-KR" altLang="en-US" noProof="0"/>
           </a:p>
@@ -1298,7 +1308,7 @@
           <a:p>
             <a:fld id="{990475B5-67CA-4281-BDCA-DA943C3C8EB3}" type="datetime1">
               <a:rPr lang="ko-KR" altLang="en-US" noProof="0" smtClean="0"/>
-              <a:t>2026-08-03</a:t>
+              <a:t>2026-09-10</a:t>
             </a:fld>
             <a:endParaRPr lang="ko-KR" altLang="en-US" noProof="0"/>
           </a:p>
@@ -1952,7 +1962,7 @@
           <a:p>
             <a:fld id="{48A87A34-81AB-432B-8DAE-1953F412C126}" type="datetimeFigureOut">
               <a:rPr lang="en-US" smtClean="0"/>
-              <a:t>8/3/2026</a:t>
+              <a:t>9/10/2026</a:t>
             </a:fld>
             <a:endParaRPr lang="en-US" dirty="0"/>
           </a:p>
@@ -2248,7 +2258,7 @@
           <a:p>
             <a:fld id="{C655C81E-72E7-4D05-94B5-F45B321A525D}" type="datetime1">
               <a:rPr lang="ko-KR" altLang="en-US" noProof="0" smtClean="0"/>
-              <a:t>2026-08-03</a:t>
+              <a:t>2026-09-10</a:t>
             </a:fld>
             <a:endParaRPr lang="ko-KR" altLang="en-US" noProof="0" dirty="0">
               <a:latin typeface="맑은 고딕" panose="020B0503020000020004" pitchFamily="50" charset="-127"/>
@@ -3043,7 +3053,7 @@
         <p:cNvPr id="1" name="">
           <a:extLst>
             <a:ext uri="{FF2B5EF4-FFF2-40B4-BE49-F238E27FC236}">
-              <a16:creationId xmlns:a16="http://schemas.microsoft.com/office/drawing/2014/main" id="{99409AF4-13C2-BB8C-7BFC-6CD15F491502}"/>
+              <a16:creationId xmlns:a16="http://schemas.microsoft.com/office/drawing/2014/main" id="{56D09499-4AE8-256D-B802-CE6B2CA08322}"/>
             </a:ext>
           </a:extLst>
         </p:cNvPr>
@@ -3060,39 +3070,3649 @@
       </p:grpSpPr>
       <p:sp>
         <p:nvSpPr>
-          <p:cNvPr id="4" name="슬라이드 번호 개체 틀 3">
+          <p:cNvPr id="3" name="제목 1">
             <a:extLst>
               <a:ext uri="{FF2B5EF4-FFF2-40B4-BE49-F238E27FC236}">
-                <a16:creationId xmlns:a16="http://schemas.microsoft.com/office/drawing/2014/main" id="{72D42AF9-ED60-E6F6-D796-22E5E2FB0BCE}"/>
+                <a16:creationId xmlns:a16="http://schemas.microsoft.com/office/drawing/2014/main" id="{9A0083C2-AB4C-02A9-09B3-328ACEE112B3}"/>
               </a:ext>
             </a:extLst>
           </p:cNvPr>
-          <p:cNvSpPr>
-            <a:spLocks noGrp="1"/>
+          <p:cNvSpPr txBox="1">
+            <a:spLocks/>
           </p:cNvSpPr>
-          <p:nvPr>
-            <p:ph type="sldNum" sz="quarter" idx="12"/>
-          </p:nvPr>
+          <p:nvPr/>
         </p:nvSpPr>
         <p:spPr>
           <a:xfrm>
-            <a:off x="10514011" y="6036261"/>
+            <a:off x="475645" y="481983"/>
+            <a:ext cx="10353762" cy="766439"/>
+          </a:xfrm>
+          <a:prstGeom prst="rect">
+            <a:avLst/>
+          </a:prstGeom>
+        </p:spPr>
+        <p:txBody>
+          <a:bodyPr vert="horz" lIns="91440" tIns="45720" rIns="91440" bIns="45720" rtlCol="0" anchor="ctr">
+            <a:normAutofit/>
+          </a:bodyPr>
+          <a:lstStyle>
+            <a:lvl1pPr algn="ctr" defTabSz="914400" rtl="0" eaLnBrk="1" latinLnBrk="1" hangingPunct="1">
+              <a:lnSpc>
+                <a:spcPct val="90000"/>
+              </a:lnSpc>
+              <a:spcBef>
+                <a:spcPct val="0"/>
+              </a:spcBef>
+              <a:buNone/>
+              <a:defRPr sz="3200" kern="1200" cap="all" baseline="0">
+                <a:solidFill>
+                  <a:schemeClr val="tx1"/>
+                </a:solidFill>
+                <a:effectLst/>
+                <a:latin typeface="Batang" panose="02030600000101010101" pitchFamily="18" charset="-127"/>
+                <a:ea typeface="Batang" panose="02030600000101010101" pitchFamily="18" charset="-127"/>
+                <a:cs typeface="+mj-cs"/>
+              </a:defRPr>
+            </a:lvl1pPr>
+          </a:lstStyle>
+          <a:p>
+            <a:pPr algn="l"/>
+            <a:r>
+              <a:rPr lang="en-US" altLang="ko-KR" sz="2800" b="1" cap="none" dirty="0">
+                <a:latin typeface="Lora" pitchFamily="2" charset="0"/>
+              </a:rPr>
+              <a:t>2. Multi-input, multi-output model</a:t>
+            </a:r>
+          </a:p>
+        </p:txBody>
+      </p:sp>
+      <p:sp>
+        <p:nvSpPr>
+          <p:cNvPr id="49" name="TextBox 48">
+            <a:extLst>
+              <a:ext uri="{FF2B5EF4-FFF2-40B4-BE49-F238E27FC236}">
+                <a16:creationId xmlns:a16="http://schemas.microsoft.com/office/drawing/2014/main" id="{BB9FACA5-510A-7AD8-C18C-4F1321A930F2}"/>
+              </a:ext>
+            </a:extLst>
+          </p:cNvPr>
+          <p:cNvSpPr txBox="1"/>
+          <p:nvPr/>
+        </p:nvSpPr>
+        <p:spPr>
+          <a:xfrm>
+            <a:off x="599440" y="1248422"/>
+            <a:ext cx="10993120" cy="5229958"/>
+          </a:xfrm>
+          <a:prstGeom prst="rect">
+            <a:avLst/>
+          </a:prstGeom>
+          <a:solidFill>
+            <a:srgbClr val="76E3FF"/>
+          </a:solidFill>
+        </p:spPr>
+        <p:txBody>
+          <a:bodyPr wrap="square">
+            <a:spAutoFit/>
+          </a:bodyPr>
+          <a:lstStyle/>
+          <a:p>
+            <a:pPr>
+              <a:lnSpc>
+                <a:spcPct val="150000"/>
+              </a:lnSpc>
+            </a:pPr>
+            <a:r>
+              <a:rPr lang="en-US" altLang="ko-KR" sz="1400" dirty="0">
+                <a:latin typeface="D2Coding" panose="020B0609020101020101" pitchFamily="49" charset="-127"/>
+                <a:ea typeface="D2Coding" panose="020B0609020101020101" pitchFamily="49" charset="-127"/>
+              </a:rPr>
+              <a:t># 1. </a:t>
+            </a:r>
+            <a:r>
+              <a:rPr lang="ko-KR" altLang="en-US" sz="1400" dirty="0" err="1">
+                <a:latin typeface="D2Coding" panose="020B0609020101020101" pitchFamily="49" charset="-127"/>
+                <a:ea typeface="D2Coding" panose="020B0609020101020101" pitchFamily="49" charset="-127"/>
+              </a:rPr>
+              <a:t>하이퍼파라미터</a:t>
+            </a:r>
+            <a:r>
+              <a:rPr lang="ko-KR" altLang="en-US" sz="1400" dirty="0">
+                <a:latin typeface="D2Coding" panose="020B0609020101020101" pitchFamily="49" charset="-127"/>
+                <a:ea typeface="D2Coding" panose="020B0609020101020101" pitchFamily="49" charset="-127"/>
+              </a:rPr>
+              <a:t> 및 차원 크기 정의</a:t>
+            </a:r>
+            <a:endParaRPr lang="en-US" altLang="ko-KR" sz="1400" dirty="0">
+              <a:latin typeface="D2Coding" panose="020B0609020101020101" pitchFamily="49" charset="-127"/>
+              <a:ea typeface="D2Coding" panose="020B0609020101020101" pitchFamily="49" charset="-127"/>
+            </a:endParaRPr>
+          </a:p>
+          <a:p>
+            <a:pPr>
+              <a:lnSpc>
+                <a:spcPct val="150000"/>
+              </a:lnSpc>
+            </a:pPr>
+            <a:r>
+              <a:rPr lang="ko-KR" altLang="en-US" sz="1400" dirty="0" err="1">
+                <a:latin typeface="D2Coding" panose="020B0609020101020101" pitchFamily="49" charset="-127"/>
+                <a:ea typeface="D2Coding" panose="020B0609020101020101" pitchFamily="49" charset="-127"/>
+              </a:rPr>
+              <a:t>vocabulary_size</a:t>
+            </a:r>
+            <a:r>
+              <a:rPr lang="ko-KR" altLang="en-US" sz="1400" dirty="0">
+                <a:latin typeface="D2Coding" panose="020B0609020101020101" pitchFamily="49" charset="-127"/>
+                <a:ea typeface="D2Coding" panose="020B0609020101020101" pitchFamily="49" charset="-127"/>
+              </a:rPr>
+              <a:t> = 10000  # 텍스트에 사용할 단어 사전 크기 (단어 종류 개수)</a:t>
+            </a:r>
+            <a:endParaRPr lang="en-US" altLang="ko-KR" sz="1400" dirty="0">
+              <a:latin typeface="D2Coding" panose="020B0609020101020101" pitchFamily="49" charset="-127"/>
+              <a:ea typeface="D2Coding" panose="020B0609020101020101" pitchFamily="49" charset="-127"/>
+            </a:endParaRPr>
+          </a:p>
+          <a:p>
+            <a:pPr>
+              <a:lnSpc>
+                <a:spcPct val="150000"/>
+              </a:lnSpc>
+            </a:pPr>
+            <a:r>
+              <a:rPr lang="ko-KR" altLang="en-US" sz="1400" dirty="0" err="1">
+                <a:latin typeface="D2Coding" panose="020B0609020101020101" pitchFamily="49" charset="-127"/>
+                <a:ea typeface="D2Coding" panose="020B0609020101020101" pitchFamily="49" charset="-127"/>
+              </a:rPr>
+              <a:t>num_tags</a:t>
+            </a:r>
+            <a:r>
+              <a:rPr lang="ko-KR" altLang="en-US" sz="1400" dirty="0">
+                <a:latin typeface="D2Coding" panose="020B0609020101020101" pitchFamily="49" charset="-127"/>
+                <a:ea typeface="D2Coding" panose="020B0609020101020101" pitchFamily="49" charset="-127"/>
+              </a:rPr>
+              <a:t> = 100           # </a:t>
+            </a:r>
+            <a:r>
+              <a:rPr lang="ko-KR" altLang="en-US" sz="1400" dirty="0" err="1">
+                <a:latin typeface="D2Coding" panose="020B0609020101020101" pitchFamily="49" charset="-127"/>
+                <a:ea typeface="D2Coding" panose="020B0609020101020101" pitchFamily="49" charset="-127"/>
+              </a:rPr>
+              <a:t>멀티핫</a:t>
+            </a:r>
+            <a:r>
+              <a:rPr lang="ko-KR" altLang="en-US" sz="1400" dirty="0">
+                <a:latin typeface="D2Coding" panose="020B0609020101020101" pitchFamily="49" charset="-127"/>
+                <a:ea typeface="D2Coding" panose="020B0609020101020101" pitchFamily="49" charset="-127"/>
+              </a:rPr>
+              <a:t> </a:t>
+            </a:r>
+            <a:r>
+              <a:rPr lang="ko-KR" altLang="en-US" sz="1400" dirty="0" err="1">
+                <a:latin typeface="D2Coding" panose="020B0609020101020101" pitchFamily="49" charset="-127"/>
+                <a:ea typeface="D2Coding" panose="020B0609020101020101" pitchFamily="49" charset="-127"/>
+              </a:rPr>
+              <a:t>인코딩된</a:t>
+            </a:r>
+            <a:r>
+              <a:rPr lang="ko-KR" altLang="en-US" sz="1400" dirty="0">
+                <a:latin typeface="D2Coding" panose="020B0609020101020101" pitchFamily="49" charset="-127"/>
+                <a:ea typeface="D2Coding" panose="020B0609020101020101" pitchFamily="49" charset="-127"/>
+              </a:rPr>
+              <a:t> 태그의 종류 개수</a:t>
+            </a:r>
+          </a:p>
+          <a:p>
+            <a:pPr>
+              <a:lnSpc>
+                <a:spcPct val="150000"/>
+              </a:lnSpc>
+            </a:pPr>
+            <a:r>
+              <a:rPr lang="ko-KR" altLang="en-US" sz="1400" dirty="0" err="1">
+                <a:latin typeface="D2Coding" panose="020B0609020101020101" pitchFamily="49" charset="-127"/>
+                <a:ea typeface="D2Coding" panose="020B0609020101020101" pitchFamily="49" charset="-127"/>
+              </a:rPr>
+              <a:t>num_departments</a:t>
+            </a:r>
+            <a:r>
+              <a:rPr lang="ko-KR" altLang="en-US" sz="1400" dirty="0">
+                <a:latin typeface="D2Coding" panose="020B0609020101020101" pitchFamily="49" charset="-127"/>
+                <a:ea typeface="D2Coding" panose="020B0609020101020101" pitchFamily="49" charset="-127"/>
+              </a:rPr>
+              <a:t> = 4      # 분류할 담당 부서 수 (클래스 개수)</a:t>
+            </a:r>
+          </a:p>
+          <a:p>
+            <a:pPr>
+              <a:lnSpc>
+                <a:spcPct val="150000"/>
+              </a:lnSpc>
+            </a:pPr>
+            <a:endParaRPr lang="ko-KR" altLang="en-US" sz="1400" dirty="0">
+              <a:latin typeface="D2Coding" panose="020B0609020101020101" pitchFamily="49" charset="-127"/>
+              <a:ea typeface="D2Coding" panose="020B0609020101020101" pitchFamily="49" charset="-127"/>
+            </a:endParaRPr>
+          </a:p>
+          <a:p>
+            <a:pPr>
+              <a:lnSpc>
+                <a:spcPct val="150000"/>
+              </a:lnSpc>
+            </a:pPr>
+            <a:r>
+              <a:rPr lang="ko-KR" altLang="en-US" sz="1400" dirty="0">
+                <a:latin typeface="D2Coding" panose="020B0609020101020101" pitchFamily="49" charset="-127"/>
+                <a:ea typeface="D2Coding" panose="020B0609020101020101" pitchFamily="49" charset="-127"/>
+              </a:rPr>
+              <a:t># </a:t>
+            </a:r>
+            <a:r>
+              <a:rPr lang="en-US" altLang="ko-KR" sz="1400" dirty="0">
+                <a:latin typeface="D2Coding" panose="020B0609020101020101" pitchFamily="49" charset="-127"/>
+                <a:ea typeface="D2Coding" panose="020B0609020101020101" pitchFamily="49" charset="-127"/>
+              </a:rPr>
+              <a:t>2</a:t>
+            </a:r>
+            <a:r>
+              <a:rPr lang="ko-KR" altLang="en-US" sz="1400" dirty="0">
+                <a:latin typeface="D2Coding" panose="020B0609020101020101" pitchFamily="49" charset="-127"/>
+                <a:ea typeface="D2Coding" panose="020B0609020101020101" pitchFamily="49" charset="-127"/>
+              </a:rPr>
+              <a:t>. 다중 입력(</a:t>
+            </a:r>
+            <a:r>
+              <a:rPr lang="ko-KR" altLang="en-US" sz="1400" dirty="0" err="1">
+                <a:latin typeface="D2Coding" panose="020B0609020101020101" pitchFamily="49" charset="-127"/>
+                <a:ea typeface="D2Coding" panose="020B0609020101020101" pitchFamily="49" charset="-127"/>
+              </a:rPr>
+              <a:t>Multi-input</a:t>
+            </a:r>
+            <a:r>
+              <a:rPr lang="ko-KR" altLang="en-US" sz="1400" dirty="0">
+                <a:latin typeface="D2Coding" panose="020B0609020101020101" pitchFamily="49" charset="-127"/>
+                <a:ea typeface="D2Coding" panose="020B0609020101020101" pitchFamily="49" charset="-127"/>
+              </a:rPr>
+              <a:t>) 레이어 정의 </a:t>
+            </a:r>
+            <a:r>
+              <a:rPr lang="en-US" altLang="ko-KR" sz="1400" dirty="0">
+                <a:latin typeface="D2Coding" panose="020B0609020101020101" pitchFamily="49" charset="-127"/>
+                <a:ea typeface="D2Coding" panose="020B0609020101020101" pitchFamily="49" charset="-127"/>
+              </a:rPr>
+              <a:t>: </a:t>
+            </a:r>
+            <a:r>
+              <a:rPr lang="ko-KR" altLang="en-US" sz="1400" dirty="0">
+                <a:latin typeface="D2Coding" panose="020B0609020101020101" pitchFamily="49" charset="-127"/>
+                <a:ea typeface="D2Coding" panose="020B0609020101020101" pitchFamily="49" charset="-127"/>
+              </a:rPr>
+              <a:t>(</a:t>
+            </a:r>
+            <a:r>
+              <a:rPr lang="ko-KR" altLang="en-US" sz="1400" dirty="0" err="1">
+                <a:latin typeface="D2Coding" panose="020B0609020101020101" pitchFamily="49" charset="-127"/>
+                <a:ea typeface="D2Coding" panose="020B0609020101020101" pitchFamily="49" charset="-127"/>
+              </a:rPr>
+              <a:t>None은</a:t>
+            </a:r>
+            <a:r>
+              <a:rPr lang="ko-KR" altLang="en-US" sz="1400" dirty="0">
+                <a:latin typeface="D2Coding" panose="020B0609020101020101" pitchFamily="49" charset="-127"/>
+                <a:ea typeface="D2Coding" panose="020B0609020101020101" pitchFamily="49" charset="-127"/>
+              </a:rPr>
+              <a:t> 가변적인 배치 크기)</a:t>
+            </a:r>
+            <a:endParaRPr lang="en-US" altLang="ko-KR" sz="1400" dirty="0">
+              <a:latin typeface="D2Coding" panose="020B0609020101020101" pitchFamily="49" charset="-127"/>
+              <a:ea typeface="D2Coding" panose="020B0609020101020101" pitchFamily="49" charset="-127"/>
+            </a:endParaRPr>
+          </a:p>
+          <a:p>
+            <a:pPr>
+              <a:lnSpc>
+                <a:spcPct val="150000"/>
+              </a:lnSpc>
+            </a:pPr>
+            <a:r>
+              <a:rPr lang="en-US" altLang="ko-KR" sz="1400" dirty="0">
+                <a:latin typeface="D2Coding" panose="020B0609020101020101" pitchFamily="49" charset="-127"/>
+                <a:ea typeface="D2Coding" panose="020B0609020101020101" pitchFamily="49" charset="-127"/>
+              </a:rPr>
+              <a:t># </a:t>
+            </a:r>
+            <a:r>
+              <a:rPr lang="ko-KR" altLang="en-US" sz="1400" dirty="0">
+                <a:latin typeface="D2Coding" panose="020B0609020101020101" pitchFamily="49" charset="-127"/>
+                <a:ea typeface="D2Coding" panose="020B0609020101020101" pitchFamily="49" charset="-127"/>
+              </a:rPr>
+              <a:t>티켓 제목 입력: (</a:t>
+            </a:r>
+            <a:r>
+              <a:rPr lang="ko-KR" altLang="en-US" sz="1400" dirty="0" err="1">
+                <a:latin typeface="D2Coding" panose="020B0609020101020101" pitchFamily="49" charset="-127"/>
+                <a:ea typeface="D2Coding" panose="020B0609020101020101" pitchFamily="49" charset="-127"/>
+              </a:rPr>
+              <a:t>None</a:t>
+            </a:r>
+            <a:r>
+              <a:rPr lang="ko-KR" altLang="en-US" sz="1400" dirty="0">
+                <a:latin typeface="D2Coding" panose="020B0609020101020101" pitchFamily="49" charset="-127"/>
+                <a:ea typeface="D2Coding" panose="020B0609020101020101" pitchFamily="49" charset="-127"/>
+              </a:rPr>
+              <a:t>, 10000) 형태의 </a:t>
+            </a:r>
+            <a:r>
+              <a:rPr lang="ko-KR" altLang="en-US" sz="1400" dirty="0" err="1">
+                <a:latin typeface="D2Coding" panose="020B0609020101020101" pitchFamily="49" charset="-127"/>
+                <a:ea typeface="D2Coding" panose="020B0609020101020101" pitchFamily="49" charset="-127"/>
+              </a:rPr>
+              <a:t>텐서를</a:t>
+            </a:r>
+            <a:r>
+              <a:rPr lang="ko-KR" altLang="en-US" sz="1400" dirty="0">
+                <a:latin typeface="D2Coding" panose="020B0609020101020101" pitchFamily="49" charset="-127"/>
+                <a:ea typeface="D2Coding" panose="020B0609020101020101" pitchFamily="49" charset="-127"/>
+              </a:rPr>
+              <a:t> 받음 </a:t>
+            </a:r>
+            <a:endParaRPr lang="en-US" altLang="ko-KR" sz="1400" dirty="0">
+              <a:latin typeface="D2Coding" panose="020B0609020101020101" pitchFamily="49" charset="-127"/>
+              <a:ea typeface="D2Coding" panose="020B0609020101020101" pitchFamily="49" charset="-127"/>
+            </a:endParaRPr>
+          </a:p>
+          <a:p>
+            <a:pPr>
+              <a:lnSpc>
+                <a:spcPct val="150000"/>
+              </a:lnSpc>
+            </a:pPr>
+            <a:r>
+              <a:rPr lang="ko-KR" altLang="en-US" sz="1400" dirty="0">
+                <a:latin typeface="D2Coding" panose="020B0609020101020101" pitchFamily="49" charset="-127"/>
+                <a:ea typeface="D2Coding" panose="020B0609020101020101" pitchFamily="49" charset="-127"/>
+              </a:rPr>
+              <a:t># 티켓 본문 입력: (</a:t>
+            </a:r>
+            <a:r>
+              <a:rPr lang="ko-KR" altLang="en-US" sz="1400" dirty="0" err="1">
+                <a:latin typeface="D2Coding" panose="020B0609020101020101" pitchFamily="49" charset="-127"/>
+                <a:ea typeface="D2Coding" panose="020B0609020101020101" pitchFamily="49" charset="-127"/>
+              </a:rPr>
+              <a:t>None</a:t>
+            </a:r>
+            <a:r>
+              <a:rPr lang="ko-KR" altLang="en-US" sz="1400" dirty="0">
+                <a:latin typeface="D2Coding" panose="020B0609020101020101" pitchFamily="49" charset="-127"/>
+                <a:ea typeface="D2Coding" panose="020B0609020101020101" pitchFamily="49" charset="-127"/>
+              </a:rPr>
+              <a:t>, 10000) 형태의 </a:t>
+            </a:r>
+            <a:r>
+              <a:rPr lang="ko-KR" altLang="en-US" sz="1400" dirty="0" err="1">
+                <a:latin typeface="D2Coding" panose="020B0609020101020101" pitchFamily="49" charset="-127"/>
+                <a:ea typeface="D2Coding" panose="020B0609020101020101" pitchFamily="49" charset="-127"/>
+              </a:rPr>
+              <a:t>텐서를</a:t>
+            </a:r>
+            <a:r>
+              <a:rPr lang="ko-KR" altLang="en-US" sz="1400" dirty="0">
+                <a:latin typeface="D2Coding" panose="020B0609020101020101" pitchFamily="49" charset="-127"/>
+                <a:ea typeface="D2Coding" panose="020B0609020101020101" pitchFamily="49" charset="-127"/>
+              </a:rPr>
+              <a:t> 받음</a:t>
+            </a:r>
+          </a:p>
+          <a:p>
+            <a:pPr>
+              <a:lnSpc>
+                <a:spcPct val="150000"/>
+              </a:lnSpc>
+            </a:pPr>
+            <a:r>
+              <a:rPr lang="ko-KR" altLang="en-US" sz="1400" dirty="0" err="1">
+                <a:latin typeface="D2Coding" panose="020B0609020101020101" pitchFamily="49" charset="-127"/>
+                <a:ea typeface="D2Coding" panose="020B0609020101020101" pitchFamily="49" charset="-127"/>
+              </a:rPr>
+              <a:t>title</a:t>
+            </a:r>
+            <a:r>
+              <a:rPr lang="ko-KR" altLang="en-US" sz="1400" dirty="0">
+                <a:latin typeface="D2Coding" panose="020B0609020101020101" pitchFamily="49" charset="-127"/>
+                <a:ea typeface="D2Coding" panose="020B0609020101020101" pitchFamily="49" charset="-127"/>
+              </a:rPr>
+              <a:t> = </a:t>
+            </a:r>
+            <a:r>
+              <a:rPr lang="ko-KR" altLang="en-US" sz="1400" dirty="0" err="1">
+                <a:latin typeface="D2Coding" panose="020B0609020101020101" pitchFamily="49" charset="-127"/>
+                <a:ea typeface="D2Coding" panose="020B0609020101020101" pitchFamily="49" charset="-127"/>
+              </a:rPr>
+              <a:t>keras.Input</a:t>
+            </a:r>
+            <a:r>
+              <a:rPr lang="ko-KR" altLang="en-US" sz="1400" dirty="0">
+                <a:latin typeface="D2Coding" panose="020B0609020101020101" pitchFamily="49" charset="-127"/>
+                <a:ea typeface="D2Coding" panose="020B0609020101020101" pitchFamily="49" charset="-127"/>
+              </a:rPr>
+              <a:t>(</a:t>
+            </a:r>
+            <a:r>
+              <a:rPr lang="ko-KR" altLang="en-US" sz="1400" dirty="0" err="1">
+                <a:latin typeface="D2Coding" panose="020B0609020101020101" pitchFamily="49" charset="-127"/>
+                <a:ea typeface="D2Coding" panose="020B0609020101020101" pitchFamily="49" charset="-127"/>
+              </a:rPr>
+              <a:t>shape</a:t>
+            </a:r>
+            <a:r>
+              <a:rPr lang="ko-KR" altLang="en-US" sz="1400" dirty="0">
+                <a:latin typeface="D2Coding" panose="020B0609020101020101" pitchFamily="49" charset="-127"/>
+                <a:ea typeface="D2Coding" panose="020B0609020101020101" pitchFamily="49" charset="-127"/>
+              </a:rPr>
+              <a:t>=(</a:t>
+            </a:r>
+            <a:r>
+              <a:rPr lang="ko-KR" altLang="en-US" sz="1400" dirty="0" err="1">
+                <a:latin typeface="D2Coding" panose="020B0609020101020101" pitchFamily="49" charset="-127"/>
+                <a:ea typeface="D2Coding" panose="020B0609020101020101" pitchFamily="49" charset="-127"/>
+              </a:rPr>
+              <a:t>vocabulary_size</a:t>
+            </a:r>
+            <a:r>
+              <a:rPr lang="ko-KR" altLang="en-US" sz="1400" dirty="0">
+                <a:latin typeface="D2Coding" panose="020B0609020101020101" pitchFamily="49" charset="-127"/>
+                <a:ea typeface="D2Coding" panose="020B0609020101020101" pitchFamily="49" charset="-127"/>
+              </a:rPr>
+              <a:t>,), </a:t>
+            </a:r>
+            <a:r>
+              <a:rPr lang="ko-KR" altLang="en-US" sz="1400" dirty="0" err="1">
+                <a:latin typeface="D2Coding" panose="020B0609020101020101" pitchFamily="49" charset="-127"/>
+                <a:ea typeface="D2Coding" panose="020B0609020101020101" pitchFamily="49" charset="-127"/>
+              </a:rPr>
+              <a:t>name</a:t>
+            </a:r>
+            <a:r>
+              <a:rPr lang="ko-KR" altLang="en-US" sz="1400" dirty="0">
+                <a:latin typeface="D2Coding" panose="020B0609020101020101" pitchFamily="49" charset="-127"/>
+                <a:ea typeface="D2Coding" panose="020B0609020101020101" pitchFamily="49" charset="-127"/>
+              </a:rPr>
+              <a:t>="</a:t>
+            </a:r>
+            <a:r>
+              <a:rPr lang="ko-KR" altLang="en-US" sz="1400" dirty="0" err="1">
+                <a:latin typeface="D2Coding" panose="020B0609020101020101" pitchFamily="49" charset="-127"/>
+                <a:ea typeface="D2Coding" panose="020B0609020101020101" pitchFamily="49" charset="-127"/>
+              </a:rPr>
+              <a:t>title</a:t>
+            </a:r>
+            <a:r>
+              <a:rPr lang="ko-KR" altLang="en-US" sz="1400" dirty="0">
+                <a:latin typeface="D2Coding" panose="020B0609020101020101" pitchFamily="49" charset="-127"/>
+                <a:ea typeface="D2Coding" panose="020B0609020101020101" pitchFamily="49" charset="-127"/>
+              </a:rPr>
+              <a:t>")</a:t>
+            </a:r>
+          </a:p>
+          <a:p>
+            <a:pPr>
+              <a:lnSpc>
+                <a:spcPct val="150000"/>
+              </a:lnSpc>
+            </a:pPr>
+            <a:r>
+              <a:rPr lang="ko-KR" altLang="en-US" sz="1400" dirty="0" err="1">
+                <a:latin typeface="D2Coding" panose="020B0609020101020101" pitchFamily="49" charset="-127"/>
+                <a:ea typeface="D2Coding" panose="020B0609020101020101" pitchFamily="49" charset="-127"/>
+              </a:rPr>
+              <a:t>text_body</a:t>
+            </a:r>
+            <a:r>
+              <a:rPr lang="ko-KR" altLang="en-US" sz="1400" dirty="0">
+                <a:latin typeface="D2Coding" panose="020B0609020101020101" pitchFamily="49" charset="-127"/>
+                <a:ea typeface="D2Coding" panose="020B0609020101020101" pitchFamily="49" charset="-127"/>
+              </a:rPr>
+              <a:t> = </a:t>
+            </a:r>
+            <a:r>
+              <a:rPr lang="ko-KR" altLang="en-US" sz="1400" dirty="0" err="1">
+                <a:latin typeface="D2Coding" panose="020B0609020101020101" pitchFamily="49" charset="-127"/>
+                <a:ea typeface="D2Coding" panose="020B0609020101020101" pitchFamily="49" charset="-127"/>
+              </a:rPr>
+              <a:t>keras.Input</a:t>
+            </a:r>
+            <a:r>
+              <a:rPr lang="ko-KR" altLang="en-US" sz="1400" dirty="0">
+                <a:latin typeface="D2Coding" panose="020B0609020101020101" pitchFamily="49" charset="-127"/>
+                <a:ea typeface="D2Coding" panose="020B0609020101020101" pitchFamily="49" charset="-127"/>
+              </a:rPr>
+              <a:t>(</a:t>
+            </a:r>
+            <a:r>
+              <a:rPr lang="ko-KR" altLang="en-US" sz="1400" dirty="0" err="1">
+                <a:latin typeface="D2Coding" panose="020B0609020101020101" pitchFamily="49" charset="-127"/>
+                <a:ea typeface="D2Coding" panose="020B0609020101020101" pitchFamily="49" charset="-127"/>
+              </a:rPr>
+              <a:t>shape</a:t>
+            </a:r>
+            <a:r>
+              <a:rPr lang="ko-KR" altLang="en-US" sz="1400" dirty="0">
+                <a:latin typeface="D2Coding" panose="020B0609020101020101" pitchFamily="49" charset="-127"/>
+                <a:ea typeface="D2Coding" panose="020B0609020101020101" pitchFamily="49" charset="-127"/>
+              </a:rPr>
+              <a:t>=(</a:t>
+            </a:r>
+            <a:r>
+              <a:rPr lang="ko-KR" altLang="en-US" sz="1400" dirty="0" err="1">
+                <a:latin typeface="D2Coding" panose="020B0609020101020101" pitchFamily="49" charset="-127"/>
+                <a:ea typeface="D2Coding" panose="020B0609020101020101" pitchFamily="49" charset="-127"/>
+              </a:rPr>
+              <a:t>vocabulary_size</a:t>
+            </a:r>
+            <a:r>
+              <a:rPr lang="ko-KR" altLang="en-US" sz="1400" dirty="0">
+                <a:latin typeface="D2Coding" panose="020B0609020101020101" pitchFamily="49" charset="-127"/>
+                <a:ea typeface="D2Coding" panose="020B0609020101020101" pitchFamily="49" charset="-127"/>
+              </a:rPr>
+              <a:t>,), </a:t>
+            </a:r>
+            <a:r>
+              <a:rPr lang="ko-KR" altLang="en-US" sz="1400" dirty="0" err="1">
+                <a:latin typeface="D2Coding" panose="020B0609020101020101" pitchFamily="49" charset="-127"/>
+                <a:ea typeface="D2Coding" panose="020B0609020101020101" pitchFamily="49" charset="-127"/>
+              </a:rPr>
+              <a:t>name</a:t>
+            </a:r>
+            <a:r>
+              <a:rPr lang="ko-KR" altLang="en-US" sz="1400" dirty="0">
+                <a:latin typeface="D2Coding" panose="020B0609020101020101" pitchFamily="49" charset="-127"/>
+                <a:ea typeface="D2Coding" panose="020B0609020101020101" pitchFamily="49" charset="-127"/>
+              </a:rPr>
+              <a:t>="</a:t>
+            </a:r>
+            <a:r>
+              <a:rPr lang="ko-KR" altLang="en-US" sz="1400" dirty="0" err="1">
+                <a:latin typeface="D2Coding" panose="020B0609020101020101" pitchFamily="49" charset="-127"/>
+                <a:ea typeface="D2Coding" panose="020B0609020101020101" pitchFamily="49" charset="-127"/>
+              </a:rPr>
+              <a:t>text_body</a:t>
+            </a:r>
+            <a:r>
+              <a:rPr lang="ko-KR" altLang="en-US" sz="1400" dirty="0">
+                <a:latin typeface="D2Coding" panose="020B0609020101020101" pitchFamily="49" charset="-127"/>
+                <a:ea typeface="D2Coding" panose="020B0609020101020101" pitchFamily="49" charset="-127"/>
+              </a:rPr>
+              <a:t>") </a:t>
+            </a:r>
+            <a:endParaRPr lang="en-US" altLang="ko-KR" sz="1400" dirty="0">
+              <a:latin typeface="D2Coding" panose="020B0609020101020101" pitchFamily="49" charset="-127"/>
+              <a:ea typeface="D2Coding" panose="020B0609020101020101" pitchFamily="49" charset="-127"/>
+            </a:endParaRPr>
+          </a:p>
+          <a:p>
+            <a:pPr>
+              <a:lnSpc>
+                <a:spcPct val="150000"/>
+              </a:lnSpc>
+            </a:pPr>
+            <a:r>
+              <a:rPr lang="ko-KR" altLang="en-US" sz="1400" dirty="0">
+                <a:latin typeface="D2Coding" panose="020B0609020101020101" pitchFamily="49" charset="-127"/>
+                <a:ea typeface="D2Coding" panose="020B0609020101020101" pitchFamily="49" charset="-127"/>
+              </a:rPr>
+              <a:t># 티켓 태그 입력: (</a:t>
+            </a:r>
+            <a:r>
+              <a:rPr lang="ko-KR" altLang="en-US" sz="1400" dirty="0" err="1">
+                <a:latin typeface="D2Coding" panose="020B0609020101020101" pitchFamily="49" charset="-127"/>
+                <a:ea typeface="D2Coding" panose="020B0609020101020101" pitchFamily="49" charset="-127"/>
+              </a:rPr>
+              <a:t>None</a:t>
+            </a:r>
+            <a:r>
+              <a:rPr lang="ko-KR" altLang="en-US" sz="1400" dirty="0">
+                <a:latin typeface="D2Coding" panose="020B0609020101020101" pitchFamily="49" charset="-127"/>
+                <a:ea typeface="D2Coding" panose="020B0609020101020101" pitchFamily="49" charset="-127"/>
+              </a:rPr>
+              <a:t>, 100) 형태의 </a:t>
+            </a:r>
+            <a:r>
+              <a:rPr lang="ko-KR" altLang="en-US" sz="1400" dirty="0" err="1">
+                <a:latin typeface="D2Coding" panose="020B0609020101020101" pitchFamily="49" charset="-127"/>
+                <a:ea typeface="D2Coding" panose="020B0609020101020101" pitchFamily="49" charset="-127"/>
+              </a:rPr>
+              <a:t>텐서를</a:t>
+            </a:r>
+            <a:r>
+              <a:rPr lang="ko-KR" altLang="en-US" sz="1400" dirty="0">
+                <a:latin typeface="D2Coding" panose="020B0609020101020101" pitchFamily="49" charset="-127"/>
+                <a:ea typeface="D2Coding" panose="020B0609020101020101" pitchFamily="49" charset="-127"/>
+              </a:rPr>
+              <a:t> 받음</a:t>
+            </a:r>
+          </a:p>
+          <a:p>
+            <a:pPr>
+              <a:lnSpc>
+                <a:spcPct val="150000"/>
+              </a:lnSpc>
+            </a:pPr>
+            <a:r>
+              <a:rPr lang="ko-KR" altLang="en-US" sz="1400" dirty="0" err="1">
+                <a:latin typeface="D2Coding" panose="020B0609020101020101" pitchFamily="49" charset="-127"/>
+                <a:ea typeface="D2Coding" panose="020B0609020101020101" pitchFamily="49" charset="-127"/>
+              </a:rPr>
+              <a:t>tags</a:t>
+            </a:r>
+            <a:r>
+              <a:rPr lang="ko-KR" altLang="en-US" sz="1400" dirty="0">
+                <a:latin typeface="D2Coding" panose="020B0609020101020101" pitchFamily="49" charset="-127"/>
+                <a:ea typeface="D2Coding" panose="020B0609020101020101" pitchFamily="49" charset="-127"/>
+              </a:rPr>
+              <a:t> = </a:t>
+            </a:r>
+            <a:r>
+              <a:rPr lang="ko-KR" altLang="en-US" sz="1400" dirty="0" err="1">
+                <a:latin typeface="D2Coding" panose="020B0609020101020101" pitchFamily="49" charset="-127"/>
+                <a:ea typeface="D2Coding" panose="020B0609020101020101" pitchFamily="49" charset="-127"/>
+              </a:rPr>
+              <a:t>keras.Input</a:t>
+            </a:r>
+            <a:r>
+              <a:rPr lang="ko-KR" altLang="en-US" sz="1400" dirty="0">
+                <a:latin typeface="D2Coding" panose="020B0609020101020101" pitchFamily="49" charset="-127"/>
+                <a:ea typeface="D2Coding" panose="020B0609020101020101" pitchFamily="49" charset="-127"/>
+              </a:rPr>
+              <a:t>(</a:t>
+            </a:r>
+            <a:r>
+              <a:rPr lang="ko-KR" altLang="en-US" sz="1400" dirty="0" err="1">
+                <a:latin typeface="D2Coding" panose="020B0609020101020101" pitchFamily="49" charset="-127"/>
+                <a:ea typeface="D2Coding" panose="020B0609020101020101" pitchFamily="49" charset="-127"/>
+              </a:rPr>
+              <a:t>shape</a:t>
+            </a:r>
+            <a:r>
+              <a:rPr lang="ko-KR" altLang="en-US" sz="1400" dirty="0">
+                <a:latin typeface="D2Coding" panose="020B0609020101020101" pitchFamily="49" charset="-127"/>
+                <a:ea typeface="D2Coding" panose="020B0609020101020101" pitchFamily="49" charset="-127"/>
+              </a:rPr>
+              <a:t>=(</a:t>
+            </a:r>
+            <a:r>
+              <a:rPr lang="ko-KR" altLang="en-US" sz="1400" dirty="0" err="1">
+                <a:latin typeface="D2Coding" panose="020B0609020101020101" pitchFamily="49" charset="-127"/>
+                <a:ea typeface="D2Coding" panose="020B0609020101020101" pitchFamily="49" charset="-127"/>
+              </a:rPr>
+              <a:t>num_tags</a:t>
+            </a:r>
+            <a:r>
+              <a:rPr lang="ko-KR" altLang="en-US" sz="1400" dirty="0">
+                <a:latin typeface="D2Coding" panose="020B0609020101020101" pitchFamily="49" charset="-127"/>
+                <a:ea typeface="D2Coding" panose="020B0609020101020101" pitchFamily="49" charset="-127"/>
+              </a:rPr>
+              <a:t>,), </a:t>
+            </a:r>
+            <a:r>
+              <a:rPr lang="ko-KR" altLang="en-US" sz="1400" dirty="0" err="1">
+                <a:latin typeface="D2Coding" panose="020B0609020101020101" pitchFamily="49" charset="-127"/>
+                <a:ea typeface="D2Coding" panose="020B0609020101020101" pitchFamily="49" charset="-127"/>
+              </a:rPr>
+              <a:t>name</a:t>
+            </a:r>
+            <a:r>
+              <a:rPr lang="ko-KR" altLang="en-US" sz="1400" dirty="0">
+                <a:latin typeface="D2Coding" panose="020B0609020101020101" pitchFamily="49" charset="-127"/>
+                <a:ea typeface="D2Coding" panose="020B0609020101020101" pitchFamily="49" charset="-127"/>
+              </a:rPr>
+              <a:t>="</a:t>
+            </a:r>
+            <a:r>
+              <a:rPr lang="ko-KR" altLang="en-US" sz="1400" dirty="0" err="1">
+                <a:latin typeface="D2Coding" panose="020B0609020101020101" pitchFamily="49" charset="-127"/>
+                <a:ea typeface="D2Coding" panose="020B0609020101020101" pitchFamily="49" charset="-127"/>
+              </a:rPr>
+              <a:t>tags</a:t>
+            </a:r>
+            <a:r>
+              <a:rPr lang="ko-KR" altLang="en-US" sz="1400" dirty="0">
+                <a:latin typeface="D2Coding" panose="020B0609020101020101" pitchFamily="49" charset="-127"/>
+                <a:ea typeface="D2Coding" panose="020B0609020101020101" pitchFamily="49" charset="-127"/>
+              </a:rPr>
+              <a:t>") </a:t>
+            </a:r>
+            <a:endParaRPr lang="en-US" altLang="ko-KR" sz="1400" dirty="0">
+              <a:latin typeface="D2Coding" panose="020B0609020101020101" pitchFamily="49" charset="-127"/>
+              <a:ea typeface="D2Coding" panose="020B0609020101020101" pitchFamily="49" charset="-127"/>
+            </a:endParaRPr>
+          </a:p>
+          <a:p>
+            <a:pPr>
+              <a:lnSpc>
+                <a:spcPct val="150000"/>
+              </a:lnSpc>
+            </a:pPr>
+            <a:endParaRPr lang="ko-KR" altLang="en-US" sz="1400" dirty="0">
+              <a:latin typeface="D2Coding" panose="020B0609020101020101" pitchFamily="49" charset="-127"/>
+              <a:ea typeface="D2Coding" panose="020B0609020101020101" pitchFamily="49" charset="-127"/>
+            </a:endParaRPr>
+          </a:p>
+          <a:p>
+            <a:pPr>
+              <a:lnSpc>
+                <a:spcPct val="150000"/>
+              </a:lnSpc>
+            </a:pPr>
+            <a:r>
+              <a:rPr lang="ko-KR" altLang="en-US" sz="1400" dirty="0">
+                <a:latin typeface="D2Coding" panose="020B0609020101020101" pitchFamily="49" charset="-127"/>
+                <a:ea typeface="D2Coding" panose="020B0609020101020101" pitchFamily="49" charset="-127"/>
+              </a:rPr>
+              <a:t># </a:t>
+            </a:r>
+            <a:r>
+              <a:rPr lang="en-US" altLang="ko-KR" sz="1400" dirty="0">
+                <a:latin typeface="D2Coding" panose="020B0609020101020101" pitchFamily="49" charset="-127"/>
+                <a:ea typeface="D2Coding" panose="020B0609020101020101" pitchFamily="49" charset="-127"/>
+              </a:rPr>
+              <a:t>3</a:t>
+            </a:r>
+            <a:r>
+              <a:rPr lang="ko-KR" altLang="en-US" sz="1400" dirty="0">
+                <a:latin typeface="D2Coding" panose="020B0609020101020101" pitchFamily="49" charset="-127"/>
+                <a:ea typeface="D2Coding" panose="020B0609020101020101" pitchFamily="49" charset="-127"/>
+              </a:rPr>
+              <a:t>. 특성 결합(</a:t>
+            </a:r>
+            <a:r>
+              <a:rPr lang="ko-KR" altLang="en-US" sz="1400" dirty="0" err="1">
+                <a:latin typeface="D2Coding" panose="020B0609020101020101" pitchFamily="49" charset="-127"/>
+                <a:ea typeface="D2Coding" panose="020B0609020101020101" pitchFamily="49" charset="-127"/>
+              </a:rPr>
+              <a:t>Concatenate</a:t>
+            </a:r>
+            <a:r>
+              <a:rPr lang="ko-KR" altLang="en-US" sz="1400" dirty="0">
+                <a:latin typeface="D2Coding" panose="020B0609020101020101" pitchFamily="49" charset="-127"/>
+                <a:ea typeface="D2Coding" panose="020B0609020101020101" pitchFamily="49" charset="-127"/>
+              </a:rPr>
+              <a:t>) 및 </a:t>
+            </a:r>
+            <a:r>
+              <a:rPr lang="ko-KR" altLang="en-US" sz="1400" dirty="0" err="1">
+                <a:latin typeface="D2Coding" panose="020B0609020101020101" pitchFamily="49" charset="-127"/>
+                <a:ea typeface="D2Coding" panose="020B0609020101020101" pitchFamily="49" charset="-127"/>
+              </a:rPr>
+              <a:t>은닉층</a:t>
+            </a:r>
+            <a:r>
+              <a:rPr lang="ko-KR" altLang="en-US" sz="1400" dirty="0">
+                <a:latin typeface="D2Coding" panose="020B0609020101020101" pitchFamily="49" charset="-127"/>
+                <a:ea typeface="D2Coding" panose="020B0609020101020101" pitchFamily="49" charset="-127"/>
+              </a:rPr>
+              <a:t> 처리 </a:t>
+            </a:r>
+            <a:r>
+              <a:rPr lang="en-US" altLang="ko-KR" sz="1400" dirty="0">
+                <a:latin typeface="D2Coding" panose="020B0609020101020101" pitchFamily="49" charset="-127"/>
+                <a:ea typeface="D2Coding" panose="020B0609020101020101" pitchFamily="49" charset="-127"/>
+              </a:rPr>
+              <a:t>; </a:t>
+            </a:r>
+          </a:p>
+          <a:p>
+            <a:pPr>
+              <a:lnSpc>
+                <a:spcPct val="150000"/>
+              </a:lnSpc>
+            </a:pPr>
+            <a:r>
+              <a:rPr lang="en-US" altLang="ko-KR" sz="1400" dirty="0">
+                <a:latin typeface="D2Coding" panose="020B0609020101020101" pitchFamily="49" charset="-127"/>
+                <a:ea typeface="D2Coding" panose="020B0609020101020101" pitchFamily="49" charset="-127"/>
+              </a:rPr>
+              <a:t># </a:t>
+            </a:r>
+            <a:r>
+              <a:rPr lang="ko-KR" altLang="en-US" sz="1400" dirty="0">
+                <a:latin typeface="D2Coding" panose="020B0609020101020101" pitchFamily="49" charset="-127"/>
+                <a:ea typeface="D2Coding" panose="020B0609020101020101" pitchFamily="49" charset="-127"/>
+              </a:rPr>
+              <a:t>3개의 입력 </a:t>
+            </a:r>
+            <a:r>
+              <a:rPr lang="ko-KR" altLang="en-US" sz="1400" dirty="0" err="1">
+                <a:latin typeface="D2Coding" panose="020B0609020101020101" pitchFamily="49" charset="-127"/>
+                <a:ea typeface="D2Coding" panose="020B0609020101020101" pitchFamily="49" charset="-127"/>
+              </a:rPr>
+              <a:t>텐서를</a:t>
+            </a:r>
+            <a:r>
+              <a:rPr lang="ko-KR" altLang="en-US" sz="1400" dirty="0">
+                <a:latin typeface="D2Coding" panose="020B0609020101020101" pitchFamily="49" charset="-127"/>
+                <a:ea typeface="D2Coding" panose="020B0609020101020101" pitchFamily="49" charset="-127"/>
+              </a:rPr>
+              <a:t> 하나의 축으로 병합</a:t>
+            </a:r>
+            <a:r>
+              <a:rPr lang="en-US" altLang="ko-KR" sz="1400" dirty="0">
+                <a:latin typeface="D2Coding" panose="020B0609020101020101" pitchFamily="49" charset="-127"/>
+                <a:ea typeface="D2Coding" panose="020B0609020101020101" pitchFamily="49" charset="-127"/>
+              </a:rPr>
+              <a:t>(</a:t>
+            </a:r>
+            <a:r>
+              <a:rPr lang="ko-KR" altLang="en-US" sz="1400" dirty="0">
+                <a:latin typeface="D2Coding" panose="020B0609020101020101" pitchFamily="49" charset="-127"/>
+                <a:ea typeface="D2Coding" panose="020B0609020101020101" pitchFamily="49" charset="-127"/>
+              </a:rPr>
+              <a:t>10000 + 10000 + 100 = 20100)</a:t>
+            </a:r>
+          </a:p>
+          <a:p>
+            <a:pPr>
+              <a:lnSpc>
+                <a:spcPct val="150000"/>
+              </a:lnSpc>
+            </a:pPr>
+            <a:r>
+              <a:rPr lang="ko-KR" altLang="en-US" sz="1400" dirty="0" err="1">
+                <a:latin typeface="D2Coding" panose="020B0609020101020101" pitchFamily="49" charset="-127"/>
+                <a:ea typeface="D2Coding" panose="020B0609020101020101" pitchFamily="49" charset="-127"/>
+              </a:rPr>
+              <a:t>features</a:t>
+            </a:r>
+            <a:r>
+              <a:rPr lang="ko-KR" altLang="en-US" sz="1400" dirty="0">
+                <a:latin typeface="D2Coding" panose="020B0609020101020101" pitchFamily="49" charset="-127"/>
+                <a:ea typeface="D2Coding" panose="020B0609020101020101" pitchFamily="49" charset="-127"/>
+              </a:rPr>
+              <a:t> = </a:t>
+            </a:r>
+            <a:r>
+              <a:rPr lang="ko-KR" altLang="en-US" sz="1400" dirty="0" err="1">
+                <a:latin typeface="D2Coding" panose="020B0609020101020101" pitchFamily="49" charset="-127"/>
+                <a:ea typeface="D2Coding" panose="020B0609020101020101" pitchFamily="49" charset="-127"/>
+              </a:rPr>
+              <a:t>layers.Concatenate</a:t>
+            </a:r>
+            <a:r>
+              <a:rPr lang="ko-KR" altLang="en-US" sz="1400" dirty="0">
+                <a:latin typeface="D2Coding" panose="020B0609020101020101" pitchFamily="49" charset="-127"/>
+                <a:ea typeface="D2Coding" panose="020B0609020101020101" pitchFamily="49" charset="-127"/>
+              </a:rPr>
+              <a:t>()([</a:t>
+            </a:r>
+            <a:r>
+              <a:rPr lang="ko-KR" altLang="en-US" sz="1400" dirty="0" err="1">
+                <a:latin typeface="D2Coding" panose="020B0609020101020101" pitchFamily="49" charset="-127"/>
+                <a:ea typeface="D2Coding" panose="020B0609020101020101" pitchFamily="49" charset="-127"/>
+              </a:rPr>
+              <a:t>title</a:t>
+            </a:r>
+            <a:r>
+              <a:rPr lang="ko-KR" altLang="en-US" sz="1400" dirty="0">
+                <a:latin typeface="D2Coding" panose="020B0609020101020101" pitchFamily="49" charset="-127"/>
+                <a:ea typeface="D2Coding" panose="020B0609020101020101" pitchFamily="49" charset="-127"/>
+              </a:rPr>
+              <a:t>, </a:t>
+            </a:r>
+            <a:r>
+              <a:rPr lang="ko-KR" altLang="en-US" sz="1400" dirty="0" err="1">
+                <a:latin typeface="D2Coding" panose="020B0609020101020101" pitchFamily="49" charset="-127"/>
+                <a:ea typeface="D2Coding" panose="020B0609020101020101" pitchFamily="49" charset="-127"/>
+              </a:rPr>
+              <a:t>text_body</a:t>
+            </a:r>
+            <a:r>
+              <a:rPr lang="ko-KR" altLang="en-US" sz="1400" dirty="0">
+                <a:latin typeface="D2Coding" panose="020B0609020101020101" pitchFamily="49" charset="-127"/>
+                <a:ea typeface="D2Coding" panose="020B0609020101020101" pitchFamily="49" charset="-127"/>
+              </a:rPr>
+              <a:t>, </a:t>
+            </a:r>
+            <a:r>
+              <a:rPr lang="ko-KR" altLang="en-US" sz="1400" dirty="0" err="1">
+                <a:latin typeface="D2Coding" panose="020B0609020101020101" pitchFamily="49" charset="-127"/>
+                <a:ea typeface="D2Coding" panose="020B0609020101020101" pitchFamily="49" charset="-127"/>
+              </a:rPr>
+              <a:t>tags</a:t>
+            </a:r>
+            <a:r>
+              <a:rPr lang="ko-KR" altLang="en-US" sz="1400" dirty="0">
+                <a:latin typeface="D2Coding" panose="020B0609020101020101" pitchFamily="49" charset="-127"/>
+                <a:ea typeface="D2Coding" panose="020B0609020101020101" pitchFamily="49" charset="-127"/>
+              </a:rPr>
+              <a:t>])</a:t>
+            </a:r>
+          </a:p>
+        </p:txBody>
+      </p:sp>
+      <p:sp>
+        <p:nvSpPr>
+          <p:cNvPr id="50" name="TextBox 49">
+            <a:extLst>
+              <a:ext uri="{FF2B5EF4-FFF2-40B4-BE49-F238E27FC236}">
+                <a16:creationId xmlns:a16="http://schemas.microsoft.com/office/drawing/2014/main" id="{A4E6BF07-5E35-89E5-D3A6-F72BAADBA740}"/>
+              </a:ext>
+            </a:extLst>
+          </p:cNvPr>
+          <p:cNvSpPr txBox="1"/>
+          <p:nvPr/>
+        </p:nvSpPr>
+        <p:spPr>
+          <a:xfrm>
+            <a:off x="8554720" y="822776"/>
+            <a:ext cx="3048000" cy="369332"/>
+          </a:xfrm>
+          <a:prstGeom prst="rect">
+            <a:avLst/>
+          </a:prstGeom>
+          <a:noFill/>
+        </p:spPr>
+        <p:txBody>
+          <a:bodyPr wrap="square">
+            <a:spAutoFit/>
+          </a:bodyPr>
+          <a:lstStyle/>
+          <a:p>
+            <a:pPr algn="r"/>
+            <a:r>
+              <a:rPr lang="en-US" altLang="ko-KR" b="1" dirty="0">
+                <a:latin typeface="Lora" pitchFamily="2" charset="0"/>
+              </a:rPr>
+              <a:t>Functional API</a:t>
+            </a:r>
+          </a:p>
+        </p:txBody>
+      </p:sp>
+      <p:pic>
+        <p:nvPicPr>
+          <p:cNvPr id="5" name="그림 4">
+            <a:extLst>
+              <a:ext uri="{FF2B5EF4-FFF2-40B4-BE49-F238E27FC236}">
+                <a16:creationId xmlns:a16="http://schemas.microsoft.com/office/drawing/2014/main" id="{7B165D61-C30A-7458-0190-89A2D13780E7}"/>
+              </a:ext>
+            </a:extLst>
+          </p:cNvPr>
+          <p:cNvPicPr>
+            <a:picLocks noChangeAspect="1"/>
+          </p:cNvPicPr>
+          <p:nvPr/>
+        </p:nvPicPr>
+        <p:blipFill>
+          <a:blip r:embed="rId2"/>
+          <a:stretch>
+            <a:fillRect/>
+          </a:stretch>
+        </p:blipFill>
+        <p:spPr>
+          <a:xfrm>
+            <a:off x="6747684" y="4115929"/>
+            <a:ext cx="4968671" cy="1493649"/>
+          </a:xfrm>
+          <a:prstGeom prst="rect">
+            <a:avLst/>
+          </a:prstGeom>
+        </p:spPr>
+      </p:pic>
+      <p:sp>
+        <p:nvSpPr>
+          <p:cNvPr id="6" name="슬라이드 번호 개체 틀 3">
+            <a:extLst>
+              <a:ext uri="{FF2B5EF4-FFF2-40B4-BE49-F238E27FC236}">
+                <a16:creationId xmlns:a16="http://schemas.microsoft.com/office/drawing/2014/main" id="{A2001D58-0A93-1B67-2839-FB400A92DB29}"/>
+              </a:ext>
+            </a:extLst>
+          </p:cNvPr>
+          <p:cNvSpPr txBox="1">
+            <a:spLocks/>
+          </p:cNvSpPr>
+          <p:nvPr/>
+        </p:nvSpPr>
+        <p:spPr>
+          <a:xfrm>
+            <a:off x="11142661" y="299420"/>
             <a:ext cx="753545" cy="365125"/>
           </a:xfrm>
+          <a:prstGeom prst="rect">
+            <a:avLst/>
+          </a:prstGeom>
         </p:spPr>
         <p:txBody>
-          <a:bodyPr/>
-          <a:lstStyle/>
+          <a:bodyPr vert="horz" lIns="91440" tIns="45720" rIns="91440" bIns="45720" rtlCol="0" anchor="ctr"/>
+          <a:lstStyle>
+            <a:defPPr rtl="0">
+              <a:defRPr lang="ko-KR"/>
+            </a:defPPr>
+            <a:lvl1pPr marL="0" algn="r" defTabSz="914400" rtl="0" eaLnBrk="1" latinLnBrk="0" hangingPunct="1">
+              <a:defRPr sz="1200" kern="1200" baseline="0">
+                <a:solidFill>
+                  <a:schemeClr val="tx1">
+                    <a:lumMod val="65000"/>
+                    <a:lumOff val="35000"/>
+                  </a:schemeClr>
+                </a:solidFill>
+                <a:latin typeface="맑은 고딕" panose="020B0503020000020004" pitchFamily="50" charset="-127"/>
+                <a:ea typeface="맑은 고딕" panose="020B0503020000020004" pitchFamily="50" charset="-127"/>
+                <a:cs typeface="+mn-cs"/>
+              </a:defRPr>
+            </a:lvl1pPr>
+            <a:lvl2pPr marL="457200" algn="l" defTabSz="914400" rtl="0" eaLnBrk="1" latinLnBrk="0" hangingPunct="1">
+              <a:defRPr sz="1800" kern="1200">
+                <a:solidFill>
+                  <a:schemeClr val="tx1"/>
+                </a:solidFill>
+                <a:latin typeface="+mn-lt"/>
+                <a:ea typeface="+mn-ea"/>
+                <a:cs typeface="+mn-cs"/>
+              </a:defRPr>
+            </a:lvl2pPr>
+            <a:lvl3pPr marL="914400" algn="l" defTabSz="914400" rtl="0" eaLnBrk="1" latinLnBrk="0" hangingPunct="1">
+              <a:defRPr sz="1800" kern="1200">
+                <a:solidFill>
+                  <a:schemeClr val="tx1"/>
+                </a:solidFill>
+                <a:latin typeface="+mn-lt"/>
+                <a:ea typeface="+mn-ea"/>
+                <a:cs typeface="+mn-cs"/>
+              </a:defRPr>
+            </a:lvl3pPr>
+            <a:lvl4pPr marL="1371600" algn="l" defTabSz="914400" rtl="0" eaLnBrk="1" latinLnBrk="0" hangingPunct="1">
+              <a:defRPr sz="1800" kern="1200">
+                <a:solidFill>
+                  <a:schemeClr val="tx1"/>
+                </a:solidFill>
+                <a:latin typeface="+mn-lt"/>
+                <a:ea typeface="+mn-ea"/>
+                <a:cs typeface="+mn-cs"/>
+              </a:defRPr>
+            </a:lvl4pPr>
+            <a:lvl5pPr marL="1828800" algn="l" defTabSz="914400" rtl="0" eaLnBrk="1" latinLnBrk="0" hangingPunct="1">
+              <a:defRPr sz="1800" kern="1200">
+                <a:solidFill>
+                  <a:schemeClr val="tx1"/>
+                </a:solidFill>
+                <a:latin typeface="+mn-lt"/>
+                <a:ea typeface="+mn-ea"/>
+                <a:cs typeface="+mn-cs"/>
+              </a:defRPr>
+            </a:lvl5pPr>
+            <a:lvl6pPr marL="2286000" algn="l" defTabSz="914400" rtl="0" eaLnBrk="1" latinLnBrk="0" hangingPunct="1">
+              <a:defRPr sz="1800" kern="1200">
+                <a:solidFill>
+                  <a:schemeClr val="tx1"/>
+                </a:solidFill>
+                <a:latin typeface="+mn-lt"/>
+                <a:ea typeface="+mn-ea"/>
+                <a:cs typeface="+mn-cs"/>
+              </a:defRPr>
+            </a:lvl6pPr>
+            <a:lvl7pPr marL="2743200" algn="l" defTabSz="914400" rtl="0" eaLnBrk="1" latinLnBrk="0" hangingPunct="1">
+              <a:defRPr sz="1800" kern="1200">
+                <a:solidFill>
+                  <a:schemeClr val="tx1"/>
+                </a:solidFill>
+                <a:latin typeface="+mn-lt"/>
+                <a:ea typeface="+mn-ea"/>
+                <a:cs typeface="+mn-cs"/>
+              </a:defRPr>
+            </a:lvl7pPr>
+            <a:lvl8pPr marL="3200400" algn="l" defTabSz="914400" rtl="0" eaLnBrk="1" latinLnBrk="0" hangingPunct="1">
+              <a:defRPr sz="1800" kern="1200">
+                <a:solidFill>
+                  <a:schemeClr val="tx1"/>
+                </a:solidFill>
+                <a:latin typeface="+mn-lt"/>
+                <a:ea typeface="+mn-ea"/>
+                <a:cs typeface="+mn-cs"/>
+              </a:defRPr>
+            </a:lvl8pPr>
+            <a:lvl9pPr marL="3657600" algn="l" defTabSz="914400" rtl="0" eaLnBrk="1" latinLnBrk="0" hangingPunct="1">
+              <a:defRPr sz="1800" kern="1200">
+                <a:solidFill>
+                  <a:schemeClr val="tx1"/>
+                </a:solidFill>
+                <a:latin typeface="+mn-lt"/>
+                <a:ea typeface="+mn-ea"/>
+                <a:cs typeface="+mn-cs"/>
+              </a:defRPr>
+            </a:lvl9pPr>
+          </a:lstStyle>
           <a:p>
             <a:fld id="{D57F1E4F-1CFF-5643-939E-217C01CDF565}" type="slidenum">
-              <a:rPr lang="en-US" smtClean="0"/>
+              <a:rPr lang="en-US" sz="1400" b="1" smtClean="0">
+                <a:latin typeface="D2Coding" panose="020B0609020101020101" pitchFamily="49" charset="-127"/>
+                <a:ea typeface="D2Coding" panose="020B0609020101020101" pitchFamily="49" charset="-127"/>
+              </a:rPr>
               <a:pPr/>
               <a:t>10</a:t>
             </a:fld>
-            <a:endParaRPr lang="en-US" dirty="0"/>
+            <a:endParaRPr lang="en-US" sz="1400" b="1" dirty="0">
+              <a:latin typeface="D2Coding" panose="020B0609020101020101" pitchFamily="49" charset="-127"/>
+              <a:ea typeface="D2Coding" panose="020B0609020101020101" pitchFamily="49" charset="-127"/>
+            </a:endParaRPr>
           </a:p>
         </p:txBody>
       </p:sp>
+    </p:spTree>
+    <p:extLst>
+      <p:ext uri="{BB962C8B-B14F-4D97-AF65-F5344CB8AC3E}">
+        <p14:creationId xmlns:p14="http://schemas.microsoft.com/office/powerpoint/2010/main" val="1666498777"/>
+      </p:ext>
+    </p:extLst>
+  </p:cSld>
+  <p:clrMapOvr>
+    <a:masterClrMapping/>
+  </p:clrMapOvr>
+</p:sld>
+</file>
+
+<file path=ppt/slides/slide11.xml><?xml version="1.0" encoding="utf-8"?>
+<p:sld xmlns:a="http://schemas.openxmlformats.org/drawingml/2006/main" xmlns:r="http://schemas.openxmlformats.org/officeDocument/2006/relationships" xmlns:p="http://schemas.openxmlformats.org/presentationml/2006/main">
+  <p:cSld>
+    <p:spTree>
+      <p:nvGrpSpPr>
+        <p:cNvPr id="1" name="">
+          <a:extLst>
+            <a:ext uri="{FF2B5EF4-FFF2-40B4-BE49-F238E27FC236}">
+              <a16:creationId xmlns:a16="http://schemas.microsoft.com/office/drawing/2014/main" id="{FBA5F65C-0530-F71C-3E2F-72B0ED970675}"/>
+            </a:ext>
+          </a:extLst>
+        </p:cNvPr>
+        <p:cNvGrpSpPr/>
+        <p:nvPr/>
+      </p:nvGrpSpPr>
+      <p:grpSpPr>
+        <a:xfrm>
+          <a:off x="0" y="0"/>
+          <a:ext cx="0" cy="0"/>
+          <a:chOff x="0" y="0"/>
+          <a:chExt cx="0" cy="0"/>
+        </a:xfrm>
+      </p:grpSpPr>
+      <p:sp>
+        <p:nvSpPr>
+          <p:cNvPr id="3" name="제목 1">
+            <a:extLst>
+              <a:ext uri="{FF2B5EF4-FFF2-40B4-BE49-F238E27FC236}">
+                <a16:creationId xmlns:a16="http://schemas.microsoft.com/office/drawing/2014/main" id="{6DD33789-AD66-F32D-0D72-44CBD6E75556}"/>
+              </a:ext>
+            </a:extLst>
+          </p:cNvPr>
+          <p:cNvSpPr txBox="1">
+            <a:spLocks/>
+          </p:cNvSpPr>
+          <p:nvPr/>
+        </p:nvSpPr>
+        <p:spPr>
+          <a:xfrm>
+            <a:off x="475645" y="481983"/>
+            <a:ext cx="10353762" cy="766439"/>
+          </a:xfrm>
+          <a:prstGeom prst="rect">
+            <a:avLst/>
+          </a:prstGeom>
+        </p:spPr>
+        <p:txBody>
+          <a:bodyPr vert="horz" lIns="91440" tIns="45720" rIns="91440" bIns="45720" rtlCol="0" anchor="ctr">
+            <a:normAutofit/>
+          </a:bodyPr>
+          <a:lstStyle>
+            <a:lvl1pPr algn="ctr" defTabSz="914400" rtl="0" eaLnBrk="1" latinLnBrk="1" hangingPunct="1">
+              <a:lnSpc>
+                <a:spcPct val="90000"/>
+              </a:lnSpc>
+              <a:spcBef>
+                <a:spcPct val="0"/>
+              </a:spcBef>
+              <a:buNone/>
+              <a:defRPr sz="3200" kern="1200" cap="all" baseline="0">
+                <a:solidFill>
+                  <a:schemeClr val="tx1"/>
+                </a:solidFill>
+                <a:effectLst/>
+                <a:latin typeface="Batang" panose="02030600000101010101" pitchFamily="18" charset="-127"/>
+                <a:ea typeface="Batang" panose="02030600000101010101" pitchFamily="18" charset="-127"/>
+                <a:cs typeface="+mj-cs"/>
+              </a:defRPr>
+            </a:lvl1pPr>
+          </a:lstStyle>
+          <a:p>
+            <a:pPr algn="l"/>
+            <a:r>
+              <a:rPr lang="en-US" altLang="ko-KR" sz="2800" b="1" cap="none" dirty="0">
+                <a:latin typeface="Lora" pitchFamily="2" charset="0"/>
+              </a:rPr>
+              <a:t>2. Multi-input, multi-output model</a:t>
+            </a:r>
+          </a:p>
+        </p:txBody>
+      </p:sp>
+      <p:sp>
+        <p:nvSpPr>
+          <p:cNvPr id="49" name="TextBox 48">
+            <a:extLst>
+              <a:ext uri="{FF2B5EF4-FFF2-40B4-BE49-F238E27FC236}">
+                <a16:creationId xmlns:a16="http://schemas.microsoft.com/office/drawing/2014/main" id="{0E051D83-9F21-0CC7-EC85-C424B25EA2C6}"/>
+              </a:ext>
+            </a:extLst>
+          </p:cNvPr>
+          <p:cNvSpPr txBox="1"/>
+          <p:nvPr/>
+        </p:nvSpPr>
+        <p:spPr>
+          <a:xfrm>
+            <a:off x="638175" y="1469225"/>
+            <a:ext cx="10964545" cy="4906792"/>
+          </a:xfrm>
+          <a:prstGeom prst="rect">
+            <a:avLst/>
+          </a:prstGeom>
+          <a:solidFill>
+            <a:srgbClr val="76E3FF"/>
+          </a:solidFill>
+        </p:spPr>
+        <p:txBody>
+          <a:bodyPr wrap="square">
+            <a:spAutoFit/>
+          </a:bodyPr>
+          <a:lstStyle/>
+          <a:p>
+            <a:pPr>
+              <a:lnSpc>
+                <a:spcPct val="150000"/>
+              </a:lnSpc>
+            </a:pPr>
+            <a:r>
+              <a:rPr lang="ko-KR" altLang="en-US" sz="1400" dirty="0">
+                <a:latin typeface="D2Coding" panose="020B0609020101020101" pitchFamily="49" charset="-127"/>
+                <a:ea typeface="D2Coding" panose="020B0609020101020101" pitchFamily="49" charset="-127"/>
+              </a:rPr>
+              <a:t># 병합된 입력 데이터로부터 주요 특징을 추출하는 완전 연결 </a:t>
+            </a:r>
+            <a:r>
+              <a:rPr lang="ko-KR" altLang="en-US" sz="1400" dirty="0" err="1">
+                <a:latin typeface="D2Coding" panose="020B0609020101020101" pitchFamily="49" charset="-127"/>
+                <a:ea typeface="D2Coding" panose="020B0609020101020101" pitchFamily="49" charset="-127"/>
+              </a:rPr>
+              <a:t>은닉층</a:t>
+            </a:r>
+            <a:r>
+              <a:rPr lang="ko-KR" altLang="en-US" sz="1400" dirty="0">
+                <a:latin typeface="D2Coding" panose="020B0609020101020101" pitchFamily="49" charset="-127"/>
+                <a:ea typeface="D2Coding" panose="020B0609020101020101" pitchFamily="49" charset="-127"/>
+              </a:rPr>
+              <a:t> (노드 64개, </a:t>
+            </a:r>
+            <a:r>
+              <a:rPr lang="ko-KR" altLang="en-US" sz="1400" dirty="0" err="1">
+                <a:latin typeface="D2Coding" panose="020B0609020101020101" pitchFamily="49" charset="-127"/>
+                <a:ea typeface="D2Coding" panose="020B0609020101020101" pitchFamily="49" charset="-127"/>
+              </a:rPr>
+              <a:t>ReLU</a:t>
+            </a:r>
+            <a:r>
+              <a:rPr lang="ko-KR" altLang="en-US" sz="1400" dirty="0">
+                <a:latin typeface="D2Coding" panose="020B0609020101020101" pitchFamily="49" charset="-127"/>
+                <a:ea typeface="D2Coding" panose="020B0609020101020101" pitchFamily="49" charset="-127"/>
+              </a:rPr>
+              <a:t> 활성화 함수)</a:t>
+            </a:r>
+          </a:p>
+          <a:p>
+            <a:pPr>
+              <a:lnSpc>
+                <a:spcPct val="150000"/>
+              </a:lnSpc>
+            </a:pPr>
+            <a:r>
+              <a:rPr lang="ko-KR" altLang="en-US" sz="1400" dirty="0" err="1">
+                <a:latin typeface="D2Coding" panose="020B0609020101020101" pitchFamily="49" charset="-127"/>
+                <a:ea typeface="D2Coding" panose="020B0609020101020101" pitchFamily="49" charset="-127"/>
+              </a:rPr>
+              <a:t>features</a:t>
+            </a:r>
+            <a:r>
+              <a:rPr lang="ko-KR" altLang="en-US" sz="1400" dirty="0">
+                <a:latin typeface="D2Coding" panose="020B0609020101020101" pitchFamily="49" charset="-127"/>
+                <a:ea typeface="D2Coding" panose="020B0609020101020101" pitchFamily="49" charset="-127"/>
+              </a:rPr>
+              <a:t> = </a:t>
+            </a:r>
+            <a:r>
+              <a:rPr lang="ko-KR" altLang="en-US" sz="1400" dirty="0" err="1">
+                <a:latin typeface="D2Coding" panose="020B0609020101020101" pitchFamily="49" charset="-127"/>
+                <a:ea typeface="D2Coding" panose="020B0609020101020101" pitchFamily="49" charset="-127"/>
+              </a:rPr>
+              <a:t>layers.Dense</a:t>
+            </a:r>
+            <a:r>
+              <a:rPr lang="ko-KR" altLang="en-US" sz="1400" dirty="0">
+                <a:latin typeface="D2Coding" panose="020B0609020101020101" pitchFamily="49" charset="-127"/>
+                <a:ea typeface="D2Coding" panose="020B0609020101020101" pitchFamily="49" charset="-127"/>
+              </a:rPr>
+              <a:t>(64, </a:t>
+            </a:r>
+            <a:r>
+              <a:rPr lang="ko-KR" altLang="en-US" sz="1400" dirty="0" err="1">
+                <a:latin typeface="D2Coding" panose="020B0609020101020101" pitchFamily="49" charset="-127"/>
+                <a:ea typeface="D2Coding" panose="020B0609020101020101" pitchFamily="49" charset="-127"/>
+              </a:rPr>
+              <a:t>activation</a:t>
+            </a:r>
+            <a:r>
+              <a:rPr lang="ko-KR" altLang="en-US" sz="1400" dirty="0">
+                <a:latin typeface="D2Coding" panose="020B0609020101020101" pitchFamily="49" charset="-127"/>
+                <a:ea typeface="D2Coding" panose="020B0609020101020101" pitchFamily="49" charset="-127"/>
+              </a:rPr>
+              <a:t>="</a:t>
+            </a:r>
+            <a:r>
+              <a:rPr lang="ko-KR" altLang="en-US" sz="1400" dirty="0" err="1">
+                <a:latin typeface="D2Coding" panose="020B0609020101020101" pitchFamily="49" charset="-127"/>
+                <a:ea typeface="D2Coding" panose="020B0609020101020101" pitchFamily="49" charset="-127"/>
+              </a:rPr>
+              <a:t>relu</a:t>
+            </a:r>
+            <a:r>
+              <a:rPr lang="ko-KR" altLang="en-US" sz="1400" dirty="0">
+                <a:latin typeface="D2Coding" panose="020B0609020101020101" pitchFamily="49" charset="-127"/>
+                <a:ea typeface="D2Coding" panose="020B0609020101020101" pitchFamily="49" charset="-127"/>
+              </a:rPr>
+              <a:t>", </a:t>
+            </a:r>
+            <a:r>
+              <a:rPr lang="ko-KR" altLang="en-US" sz="1400" dirty="0" err="1">
+                <a:latin typeface="D2Coding" panose="020B0609020101020101" pitchFamily="49" charset="-127"/>
+                <a:ea typeface="D2Coding" panose="020B0609020101020101" pitchFamily="49" charset="-127"/>
+              </a:rPr>
+              <a:t>name</a:t>
+            </a:r>
+            <a:r>
+              <a:rPr lang="ko-KR" altLang="en-US" sz="1400" dirty="0">
+                <a:latin typeface="D2Coding" panose="020B0609020101020101" pitchFamily="49" charset="-127"/>
+                <a:ea typeface="D2Coding" panose="020B0609020101020101" pitchFamily="49" charset="-127"/>
+              </a:rPr>
+              <a:t>="</a:t>
+            </a:r>
+            <a:r>
+              <a:rPr lang="ko-KR" altLang="en-US" sz="1400" dirty="0" err="1">
+                <a:latin typeface="D2Coding" panose="020B0609020101020101" pitchFamily="49" charset="-127"/>
+                <a:ea typeface="D2Coding" panose="020B0609020101020101" pitchFamily="49" charset="-127"/>
+              </a:rPr>
+              <a:t>dense_features</a:t>
+            </a:r>
+            <a:r>
+              <a:rPr lang="ko-KR" altLang="en-US" sz="1400" dirty="0">
+                <a:latin typeface="D2Coding" panose="020B0609020101020101" pitchFamily="49" charset="-127"/>
+                <a:ea typeface="D2Coding" panose="020B0609020101020101" pitchFamily="49" charset="-127"/>
+              </a:rPr>
+              <a:t>")(</a:t>
+            </a:r>
+            <a:r>
+              <a:rPr lang="ko-KR" altLang="en-US" sz="1400" dirty="0" err="1">
+                <a:latin typeface="D2Coding" panose="020B0609020101020101" pitchFamily="49" charset="-127"/>
+                <a:ea typeface="D2Coding" panose="020B0609020101020101" pitchFamily="49" charset="-127"/>
+              </a:rPr>
+              <a:t>features</a:t>
+            </a:r>
+            <a:r>
+              <a:rPr lang="ko-KR" altLang="en-US" sz="1400" dirty="0">
+                <a:latin typeface="D2Coding" panose="020B0609020101020101" pitchFamily="49" charset="-127"/>
+                <a:ea typeface="D2Coding" panose="020B0609020101020101" pitchFamily="49" charset="-127"/>
+              </a:rPr>
+              <a:t>)</a:t>
+            </a:r>
+          </a:p>
+          <a:p>
+            <a:pPr>
+              <a:lnSpc>
+                <a:spcPct val="150000"/>
+              </a:lnSpc>
+            </a:pPr>
+            <a:endParaRPr lang="en-US" altLang="ko-KR" sz="1400" dirty="0">
+              <a:latin typeface="D2Coding" panose="020B0609020101020101" pitchFamily="49" charset="-127"/>
+              <a:ea typeface="D2Coding" panose="020B0609020101020101" pitchFamily="49" charset="-127"/>
+            </a:endParaRPr>
+          </a:p>
+          <a:p>
+            <a:pPr>
+              <a:lnSpc>
+                <a:spcPct val="150000"/>
+              </a:lnSpc>
+            </a:pPr>
+            <a:r>
+              <a:rPr lang="ko-KR" altLang="en-US" sz="1400" dirty="0">
+                <a:latin typeface="D2Coding" panose="020B0609020101020101" pitchFamily="49" charset="-127"/>
+                <a:ea typeface="D2Coding" panose="020B0609020101020101" pitchFamily="49" charset="-127"/>
+              </a:rPr>
+              <a:t># </a:t>
+            </a:r>
+            <a:r>
+              <a:rPr lang="en-US" altLang="ko-KR" sz="1400" dirty="0">
+                <a:latin typeface="D2Coding" panose="020B0609020101020101" pitchFamily="49" charset="-127"/>
+                <a:ea typeface="D2Coding" panose="020B0609020101020101" pitchFamily="49" charset="-127"/>
+              </a:rPr>
+              <a:t>4</a:t>
+            </a:r>
+            <a:r>
+              <a:rPr lang="ko-KR" altLang="en-US" sz="1400" dirty="0">
+                <a:latin typeface="D2Coding" panose="020B0609020101020101" pitchFamily="49" charset="-127"/>
+                <a:ea typeface="D2Coding" panose="020B0609020101020101" pitchFamily="49" charset="-127"/>
+              </a:rPr>
+              <a:t>. 다중 출력(</a:t>
+            </a:r>
+            <a:r>
+              <a:rPr lang="ko-KR" altLang="en-US" sz="1400" dirty="0" err="1">
+                <a:latin typeface="D2Coding" panose="020B0609020101020101" pitchFamily="49" charset="-127"/>
+                <a:ea typeface="D2Coding" panose="020B0609020101020101" pitchFamily="49" charset="-127"/>
+              </a:rPr>
+              <a:t>Multi-output</a:t>
+            </a:r>
+            <a:r>
+              <a:rPr lang="ko-KR" altLang="en-US" sz="1400" dirty="0">
+                <a:latin typeface="D2Coding" panose="020B0609020101020101" pitchFamily="49" charset="-127"/>
+                <a:ea typeface="D2Coding" panose="020B0609020101020101" pitchFamily="49" charset="-127"/>
+              </a:rPr>
+              <a:t>) 레이어 정의 </a:t>
+            </a:r>
+            <a:r>
+              <a:rPr lang="en-US" altLang="ko-KR" sz="1400" dirty="0">
+                <a:latin typeface="D2Coding" panose="020B0609020101020101" pitchFamily="49" charset="-127"/>
+                <a:ea typeface="D2Coding" panose="020B0609020101020101" pitchFamily="49" charset="-127"/>
+              </a:rPr>
+              <a:t>: </a:t>
+            </a:r>
+          </a:p>
+          <a:p>
+            <a:pPr>
+              <a:lnSpc>
+                <a:spcPct val="150000"/>
+              </a:lnSpc>
+            </a:pPr>
+            <a:r>
+              <a:rPr lang="ko-KR" altLang="en-US" sz="1400" dirty="0">
+                <a:latin typeface="D2Coding" panose="020B0609020101020101" pitchFamily="49" charset="-127"/>
+                <a:ea typeface="D2Coding" panose="020B0609020101020101" pitchFamily="49" charset="-127"/>
+              </a:rPr>
+              <a:t># 티켓 우선순위 점수(0~1 사이 </a:t>
+            </a:r>
+            <a:r>
+              <a:rPr lang="ko-KR" altLang="en-US" sz="1400" dirty="0" err="1">
+                <a:latin typeface="D2Coding" panose="020B0609020101020101" pitchFamily="49" charset="-127"/>
+                <a:ea typeface="D2Coding" panose="020B0609020101020101" pitchFamily="49" charset="-127"/>
+              </a:rPr>
+              <a:t>스칼라값</a:t>
+            </a:r>
+            <a:r>
+              <a:rPr lang="ko-KR" altLang="en-US" sz="1400" dirty="0">
+                <a:latin typeface="D2Coding" panose="020B0609020101020101" pitchFamily="49" charset="-127"/>
+                <a:ea typeface="D2Coding" panose="020B0609020101020101" pitchFamily="49" charset="-127"/>
+              </a:rPr>
+              <a:t> 출력/이진 분류</a:t>
+            </a:r>
+            <a:r>
+              <a:rPr lang="en-US" altLang="ko-KR" sz="1400" dirty="0">
+                <a:latin typeface="D2Coding" panose="020B0609020101020101" pitchFamily="49" charset="-127"/>
+                <a:ea typeface="D2Coding" panose="020B0609020101020101" pitchFamily="49" charset="-127"/>
+              </a:rPr>
+              <a:t>)</a:t>
+            </a:r>
+            <a:endParaRPr lang="ko-KR" altLang="en-US" sz="1400" dirty="0">
+              <a:latin typeface="D2Coding" panose="020B0609020101020101" pitchFamily="49" charset="-127"/>
+              <a:ea typeface="D2Coding" panose="020B0609020101020101" pitchFamily="49" charset="-127"/>
+            </a:endParaRPr>
+          </a:p>
+          <a:p>
+            <a:pPr>
+              <a:lnSpc>
+                <a:spcPct val="150000"/>
+              </a:lnSpc>
+            </a:pPr>
+            <a:r>
+              <a:rPr lang="ko-KR" altLang="en-US" sz="1400" dirty="0" err="1">
+                <a:latin typeface="D2Coding" panose="020B0609020101020101" pitchFamily="49" charset="-127"/>
+                <a:ea typeface="D2Coding" panose="020B0609020101020101" pitchFamily="49" charset="-127"/>
+              </a:rPr>
+              <a:t>priority</a:t>
+            </a:r>
+            <a:r>
+              <a:rPr lang="ko-KR" altLang="en-US" sz="1400" dirty="0">
+                <a:latin typeface="D2Coding" panose="020B0609020101020101" pitchFamily="49" charset="-127"/>
+                <a:ea typeface="D2Coding" panose="020B0609020101020101" pitchFamily="49" charset="-127"/>
+              </a:rPr>
+              <a:t> = </a:t>
+            </a:r>
+            <a:r>
+              <a:rPr lang="ko-KR" altLang="en-US" sz="1400" dirty="0" err="1">
+                <a:latin typeface="D2Coding" panose="020B0609020101020101" pitchFamily="49" charset="-127"/>
+                <a:ea typeface="D2Coding" panose="020B0609020101020101" pitchFamily="49" charset="-127"/>
+              </a:rPr>
+              <a:t>layers.Dense</a:t>
+            </a:r>
+            <a:r>
+              <a:rPr lang="ko-KR" altLang="en-US" sz="1400" dirty="0">
+                <a:latin typeface="D2Coding" panose="020B0609020101020101" pitchFamily="49" charset="-127"/>
+                <a:ea typeface="D2Coding" panose="020B0609020101020101" pitchFamily="49" charset="-127"/>
+              </a:rPr>
+              <a:t>(1, </a:t>
+            </a:r>
+            <a:r>
+              <a:rPr lang="ko-KR" altLang="en-US" sz="1400" dirty="0" err="1">
+                <a:latin typeface="D2Coding" panose="020B0609020101020101" pitchFamily="49" charset="-127"/>
+                <a:ea typeface="D2Coding" panose="020B0609020101020101" pitchFamily="49" charset="-127"/>
+              </a:rPr>
+              <a:t>activation</a:t>
+            </a:r>
+            <a:r>
+              <a:rPr lang="ko-KR" altLang="en-US" sz="1400" dirty="0">
+                <a:latin typeface="D2Coding" panose="020B0609020101020101" pitchFamily="49" charset="-127"/>
+                <a:ea typeface="D2Coding" panose="020B0609020101020101" pitchFamily="49" charset="-127"/>
+              </a:rPr>
+              <a:t>="</a:t>
+            </a:r>
+            <a:r>
+              <a:rPr lang="ko-KR" altLang="en-US" sz="1400" dirty="0" err="1">
+                <a:latin typeface="D2Coding" panose="020B0609020101020101" pitchFamily="49" charset="-127"/>
+                <a:ea typeface="D2Coding" panose="020B0609020101020101" pitchFamily="49" charset="-127"/>
+              </a:rPr>
+              <a:t>sigmoid</a:t>
+            </a:r>
+            <a:r>
+              <a:rPr lang="ko-KR" altLang="en-US" sz="1400" dirty="0">
+                <a:latin typeface="D2Coding" panose="020B0609020101020101" pitchFamily="49" charset="-127"/>
+                <a:ea typeface="D2Coding" panose="020B0609020101020101" pitchFamily="49" charset="-127"/>
+              </a:rPr>
+              <a:t>", </a:t>
+            </a:r>
+            <a:r>
+              <a:rPr lang="ko-KR" altLang="en-US" sz="1400" dirty="0" err="1">
+                <a:latin typeface="D2Coding" panose="020B0609020101020101" pitchFamily="49" charset="-127"/>
+                <a:ea typeface="D2Coding" panose="020B0609020101020101" pitchFamily="49" charset="-127"/>
+              </a:rPr>
+              <a:t>name</a:t>
+            </a:r>
+            <a:r>
+              <a:rPr lang="ko-KR" altLang="en-US" sz="1400" dirty="0">
+                <a:latin typeface="D2Coding" panose="020B0609020101020101" pitchFamily="49" charset="-127"/>
+                <a:ea typeface="D2Coding" panose="020B0609020101020101" pitchFamily="49" charset="-127"/>
+              </a:rPr>
+              <a:t>="</a:t>
+            </a:r>
+            <a:r>
+              <a:rPr lang="ko-KR" altLang="en-US" sz="1400" dirty="0" err="1">
+                <a:latin typeface="D2Coding" panose="020B0609020101020101" pitchFamily="49" charset="-127"/>
+                <a:ea typeface="D2Coding" panose="020B0609020101020101" pitchFamily="49" charset="-127"/>
+              </a:rPr>
+              <a:t>priority</a:t>
+            </a:r>
+            <a:r>
+              <a:rPr lang="ko-KR" altLang="en-US" sz="1400" dirty="0">
+                <a:latin typeface="D2Coding" panose="020B0609020101020101" pitchFamily="49" charset="-127"/>
+                <a:ea typeface="D2Coding" panose="020B0609020101020101" pitchFamily="49" charset="-127"/>
+              </a:rPr>
+              <a:t>")(</a:t>
+            </a:r>
+            <a:r>
+              <a:rPr lang="ko-KR" altLang="en-US" sz="1400" dirty="0" err="1">
+                <a:latin typeface="D2Coding" panose="020B0609020101020101" pitchFamily="49" charset="-127"/>
+                <a:ea typeface="D2Coding" panose="020B0609020101020101" pitchFamily="49" charset="-127"/>
+              </a:rPr>
+              <a:t>features</a:t>
+            </a:r>
+            <a:r>
+              <a:rPr lang="ko-KR" altLang="en-US" sz="1400" dirty="0">
+                <a:latin typeface="D2Coding" panose="020B0609020101020101" pitchFamily="49" charset="-127"/>
+                <a:ea typeface="D2Coding" panose="020B0609020101020101" pitchFamily="49" charset="-127"/>
+              </a:rPr>
+              <a:t>) </a:t>
+            </a:r>
+            <a:endParaRPr lang="en-US" altLang="ko-KR" sz="1400" dirty="0">
+              <a:latin typeface="D2Coding" panose="020B0609020101020101" pitchFamily="49" charset="-127"/>
+              <a:ea typeface="D2Coding" panose="020B0609020101020101" pitchFamily="49" charset="-127"/>
+            </a:endParaRPr>
+          </a:p>
+          <a:p>
+            <a:pPr>
+              <a:lnSpc>
+                <a:spcPct val="150000"/>
+              </a:lnSpc>
+            </a:pPr>
+            <a:r>
+              <a:rPr lang="ko-KR" altLang="en-US" sz="1400" dirty="0">
+                <a:latin typeface="D2Coding" panose="020B0609020101020101" pitchFamily="49" charset="-127"/>
+                <a:ea typeface="D2Coding" panose="020B0609020101020101" pitchFamily="49" charset="-127"/>
+              </a:rPr>
+              <a:t># </a:t>
+            </a:r>
+            <a:r>
+              <a:rPr lang="en-US" altLang="ko-KR" sz="1400" dirty="0">
+                <a:latin typeface="D2Coding" panose="020B0609020101020101" pitchFamily="49" charset="-127"/>
+                <a:ea typeface="D2Coding" panose="020B0609020101020101" pitchFamily="49" charset="-127"/>
+              </a:rPr>
+              <a:t>4</a:t>
+            </a:r>
+            <a:r>
+              <a:rPr lang="ko-KR" altLang="en-US" sz="1400" dirty="0">
+                <a:latin typeface="D2Coding" panose="020B0609020101020101" pitchFamily="49" charset="-127"/>
+                <a:ea typeface="D2Coding" panose="020B0609020101020101" pitchFamily="49" charset="-127"/>
+              </a:rPr>
+              <a:t>개 부서 분류 (</a:t>
+            </a:r>
+            <a:r>
+              <a:rPr lang="ko-KR" altLang="en-US" sz="1400" dirty="0" err="1">
+                <a:latin typeface="D2Coding" panose="020B0609020101020101" pitchFamily="49" charset="-127"/>
+                <a:ea typeface="D2Coding" panose="020B0609020101020101" pitchFamily="49" charset="-127"/>
+              </a:rPr>
+              <a:t>확률값</a:t>
+            </a:r>
+            <a:r>
+              <a:rPr lang="ko-KR" altLang="en-US" sz="1400" dirty="0">
+                <a:latin typeface="D2Coding" panose="020B0609020101020101" pitchFamily="49" charset="-127"/>
+                <a:ea typeface="D2Coding" panose="020B0609020101020101" pitchFamily="49" charset="-127"/>
+              </a:rPr>
+              <a:t>/다중 분류</a:t>
+            </a:r>
+            <a:r>
+              <a:rPr lang="en-US" altLang="ko-KR" sz="1400" dirty="0">
+                <a:latin typeface="D2Coding" panose="020B0609020101020101" pitchFamily="49" charset="-127"/>
+                <a:ea typeface="D2Coding" panose="020B0609020101020101" pitchFamily="49" charset="-127"/>
+              </a:rPr>
+              <a:t>)</a:t>
+            </a:r>
+            <a:endParaRPr lang="ko-KR" altLang="en-US" sz="1400" dirty="0">
+              <a:latin typeface="D2Coding" panose="020B0609020101020101" pitchFamily="49" charset="-127"/>
+              <a:ea typeface="D2Coding" panose="020B0609020101020101" pitchFamily="49" charset="-127"/>
+            </a:endParaRPr>
+          </a:p>
+          <a:p>
+            <a:pPr>
+              <a:lnSpc>
+                <a:spcPct val="150000"/>
+              </a:lnSpc>
+            </a:pPr>
+            <a:r>
+              <a:rPr lang="ko-KR" altLang="en-US" sz="1400" dirty="0" err="1">
+                <a:latin typeface="D2Coding" panose="020B0609020101020101" pitchFamily="49" charset="-127"/>
+                <a:ea typeface="D2Coding" panose="020B0609020101020101" pitchFamily="49" charset="-127"/>
+              </a:rPr>
+              <a:t>department</a:t>
+            </a:r>
+            <a:r>
+              <a:rPr lang="ko-KR" altLang="en-US" sz="1400" dirty="0">
+                <a:latin typeface="D2Coding" panose="020B0609020101020101" pitchFamily="49" charset="-127"/>
+                <a:ea typeface="D2Coding" panose="020B0609020101020101" pitchFamily="49" charset="-127"/>
+              </a:rPr>
+              <a:t> = </a:t>
+            </a:r>
+            <a:r>
+              <a:rPr lang="ko-KR" altLang="en-US" sz="1400" dirty="0" err="1">
+                <a:latin typeface="D2Coding" panose="020B0609020101020101" pitchFamily="49" charset="-127"/>
+                <a:ea typeface="D2Coding" panose="020B0609020101020101" pitchFamily="49" charset="-127"/>
+              </a:rPr>
+              <a:t>layers.Dense</a:t>
+            </a:r>
+            <a:r>
+              <a:rPr lang="ko-KR" altLang="en-US" sz="1400" dirty="0">
+                <a:latin typeface="D2Coding" panose="020B0609020101020101" pitchFamily="49" charset="-127"/>
+                <a:ea typeface="D2Coding" panose="020B0609020101020101" pitchFamily="49" charset="-127"/>
+              </a:rPr>
+              <a:t>(</a:t>
+            </a:r>
+            <a:r>
+              <a:rPr lang="ko-KR" altLang="en-US" sz="1400" dirty="0" err="1">
+                <a:latin typeface="D2Coding" panose="020B0609020101020101" pitchFamily="49" charset="-127"/>
+                <a:ea typeface="D2Coding" panose="020B0609020101020101" pitchFamily="49" charset="-127"/>
+              </a:rPr>
+              <a:t>num_departments</a:t>
+            </a:r>
+            <a:r>
+              <a:rPr lang="ko-KR" altLang="en-US" sz="1400" dirty="0">
+                <a:latin typeface="D2Coding" panose="020B0609020101020101" pitchFamily="49" charset="-127"/>
+                <a:ea typeface="D2Coding" panose="020B0609020101020101" pitchFamily="49" charset="-127"/>
+              </a:rPr>
+              <a:t>, </a:t>
+            </a:r>
+            <a:r>
+              <a:rPr lang="ko-KR" altLang="en-US" sz="1400" dirty="0" err="1">
+                <a:latin typeface="D2Coding" panose="020B0609020101020101" pitchFamily="49" charset="-127"/>
+                <a:ea typeface="D2Coding" panose="020B0609020101020101" pitchFamily="49" charset="-127"/>
+              </a:rPr>
+              <a:t>activation</a:t>
+            </a:r>
+            <a:r>
+              <a:rPr lang="ko-KR" altLang="en-US" sz="1400" dirty="0">
+                <a:latin typeface="D2Coding" panose="020B0609020101020101" pitchFamily="49" charset="-127"/>
+                <a:ea typeface="D2Coding" panose="020B0609020101020101" pitchFamily="49" charset="-127"/>
+              </a:rPr>
+              <a:t>="</a:t>
+            </a:r>
+            <a:r>
+              <a:rPr lang="ko-KR" altLang="en-US" sz="1400" dirty="0" err="1">
+                <a:latin typeface="D2Coding" panose="020B0609020101020101" pitchFamily="49" charset="-127"/>
+                <a:ea typeface="D2Coding" panose="020B0609020101020101" pitchFamily="49" charset="-127"/>
+              </a:rPr>
+              <a:t>softmax</a:t>
+            </a:r>
+            <a:r>
+              <a:rPr lang="ko-KR" altLang="en-US" sz="1400" dirty="0">
+                <a:latin typeface="D2Coding" panose="020B0609020101020101" pitchFamily="49" charset="-127"/>
+                <a:ea typeface="D2Coding" panose="020B0609020101020101" pitchFamily="49" charset="-127"/>
+              </a:rPr>
+              <a:t>", </a:t>
+            </a:r>
+            <a:r>
+              <a:rPr lang="ko-KR" altLang="en-US" sz="1400" dirty="0" err="1">
+                <a:latin typeface="D2Coding" panose="020B0609020101020101" pitchFamily="49" charset="-127"/>
+                <a:ea typeface="D2Coding" panose="020B0609020101020101" pitchFamily="49" charset="-127"/>
+              </a:rPr>
+              <a:t>name</a:t>
+            </a:r>
+            <a:r>
+              <a:rPr lang="ko-KR" altLang="en-US" sz="1400" dirty="0">
+                <a:latin typeface="D2Coding" panose="020B0609020101020101" pitchFamily="49" charset="-127"/>
+                <a:ea typeface="D2Coding" panose="020B0609020101020101" pitchFamily="49" charset="-127"/>
+              </a:rPr>
+              <a:t>="</a:t>
+            </a:r>
+            <a:r>
+              <a:rPr lang="ko-KR" altLang="en-US" sz="1400" dirty="0" err="1">
+                <a:latin typeface="D2Coding" panose="020B0609020101020101" pitchFamily="49" charset="-127"/>
+                <a:ea typeface="D2Coding" panose="020B0609020101020101" pitchFamily="49" charset="-127"/>
+              </a:rPr>
+              <a:t>department</a:t>
+            </a:r>
+            <a:r>
+              <a:rPr lang="ko-KR" altLang="en-US" sz="1400" dirty="0">
+                <a:latin typeface="D2Coding" panose="020B0609020101020101" pitchFamily="49" charset="-127"/>
+                <a:ea typeface="D2Coding" panose="020B0609020101020101" pitchFamily="49" charset="-127"/>
+              </a:rPr>
+              <a:t>")(</a:t>
+            </a:r>
+            <a:r>
+              <a:rPr lang="ko-KR" altLang="en-US" sz="1400" dirty="0" err="1">
+                <a:latin typeface="D2Coding" panose="020B0609020101020101" pitchFamily="49" charset="-127"/>
+                <a:ea typeface="D2Coding" panose="020B0609020101020101" pitchFamily="49" charset="-127"/>
+              </a:rPr>
+              <a:t>features</a:t>
+            </a:r>
+            <a:r>
+              <a:rPr lang="ko-KR" altLang="en-US" sz="1400" dirty="0">
+                <a:latin typeface="D2Coding" panose="020B0609020101020101" pitchFamily="49" charset="-127"/>
+                <a:ea typeface="D2Coding" panose="020B0609020101020101" pitchFamily="49" charset="-127"/>
+              </a:rPr>
+              <a:t>) </a:t>
+            </a:r>
+          </a:p>
+          <a:p>
+            <a:pPr>
+              <a:lnSpc>
+                <a:spcPct val="150000"/>
+              </a:lnSpc>
+            </a:pPr>
+            <a:endParaRPr lang="ko-KR" altLang="en-US" sz="1400" dirty="0">
+              <a:latin typeface="D2Coding" panose="020B0609020101020101" pitchFamily="49" charset="-127"/>
+              <a:ea typeface="D2Coding" panose="020B0609020101020101" pitchFamily="49" charset="-127"/>
+            </a:endParaRPr>
+          </a:p>
+          <a:p>
+            <a:pPr>
+              <a:lnSpc>
+                <a:spcPct val="150000"/>
+              </a:lnSpc>
+            </a:pPr>
+            <a:r>
+              <a:rPr lang="ko-KR" altLang="en-US" sz="1400" dirty="0">
+                <a:latin typeface="D2Coding" panose="020B0609020101020101" pitchFamily="49" charset="-127"/>
+                <a:ea typeface="D2Coding" panose="020B0609020101020101" pitchFamily="49" charset="-127"/>
+              </a:rPr>
+              <a:t># </a:t>
+            </a:r>
+            <a:r>
+              <a:rPr lang="en-US" altLang="ko-KR" sz="1400" dirty="0">
+                <a:latin typeface="D2Coding" panose="020B0609020101020101" pitchFamily="49" charset="-127"/>
+                <a:ea typeface="D2Coding" panose="020B0609020101020101" pitchFamily="49" charset="-127"/>
+              </a:rPr>
+              <a:t>5</a:t>
+            </a:r>
+            <a:r>
+              <a:rPr lang="ko-KR" altLang="en-US" sz="1400" dirty="0">
+                <a:latin typeface="D2Coding" panose="020B0609020101020101" pitchFamily="49" charset="-127"/>
+                <a:ea typeface="D2Coding" panose="020B0609020101020101" pitchFamily="49" charset="-127"/>
+              </a:rPr>
+              <a:t>. </a:t>
+            </a:r>
+            <a:r>
+              <a:rPr lang="ko-KR" altLang="en-US" sz="1400" dirty="0" err="1">
+                <a:latin typeface="D2Coding" panose="020B0609020101020101" pitchFamily="49" charset="-127"/>
+                <a:ea typeface="D2Coding" panose="020B0609020101020101" pitchFamily="49" charset="-127"/>
+              </a:rPr>
+              <a:t>Keras</a:t>
+            </a:r>
+            <a:r>
+              <a:rPr lang="ko-KR" altLang="en-US" sz="1400" dirty="0">
+                <a:latin typeface="D2Coding" panose="020B0609020101020101" pitchFamily="49" charset="-127"/>
+                <a:ea typeface="D2Coding" panose="020B0609020101020101" pitchFamily="49" charset="-127"/>
+              </a:rPr>
+              <a:t> </a:t>
+            </a:r>
+            <a:r>
+              <a:rPr lang="ko-KR" altLang="en-US" sz="1400" dirty="0" err="1">
+                <a:latin typeface="D2Coding" panose="020B0609020101020101" pitchFamily="49" charset="-127"/>
+                <a:ea typeface="D2Coding" panose="020B0609020101020101" pitchFamily="49" charset="-127"/>
+              </a:rPr>
+              <a:t>Functional</a:t>
+            </a:r>
+            <a:r>
+              <a:rPr lang="ko-KR" altLang="en-US" sz="1400" dirty="0">
+                <a:latin typeface="D2Coding" panose="020B0609020101020101" pitchFamily="49" charset="-127"/>
+                <a:ea typeface="D2Coding" panose="020B0609020101020101" pitchFamily="49" charset="-127"/>
+              </a:rPr>
+              <a:t> API 모델 최종 생성 </a:t>
+            </a:r>
+            <a:r>
+              <a:rPr lang="en-US" altLang="ko-KR" sz="1400" dirty="0">
+                <a:latin typeface="D2Coding" panose="020B0609020101020101" pitchFamily="49" charset="-127"/>
+                <a:ea typeface="D2Coding" panose="020B0609020101020101" pitchFamily="49" charset="-127"/>
+              </a:rPr>
+              <a:t>: </a:t>
+            </a:r>
+          </a:p>
+          <a:p>
+            <a:pPr>
+              <a:lnSpc>
+                <a:spcPct val="150000"/>
+              </a:lnSpc>
+            </a:pPr>
+            <a:r>
+              <a:rPr lang="en-US" altLang="ko-KR" sz="1400" dirty="0">
+                <a:latin typeface="D2Coding" panose="020B0609020101020101" pitchFamily="49" charset="-127"/>
+                <a:ea typeface="D2Coding" panose="020B0609020101020101" pitchFamily="49" charset="-127"/>
+              </a:rPr>
+              <a:t># </a:t>
+            </a:r>
+            <a:r>
+              <a:rPr lang="ko-KR" altLang="en-US" sz="1400" dirty="0">
+                <a:latin typeface="D2Coding" panose="020B0609020101020101" pitchFamily="49" charset="-127"/>
+                <a:ea typeface="D2Coding" panose="020B0609020101020101" pitchFamily="49" charset="-127"/>
+              </a:rPr>
+              <a:t>입력(</a:t>
+            </a:r>
+            <a:r>
+              <a:rPr lang="ko-KR" altLang="en-US" sz="1400" dirty="0" err="1">
+                <a:latin typeface="D2Coding" panose="020B0609020101020101" pitchFamily="49" charset="-127"/>
+                <a:ea typeface="D2Coding" panose="020B0609020101020101" pitchFamily="49" charset="-127"/>
+              </a:rPr>
+              <a:t>inputs</a:t>
+            </a:r>
+            <a:r>
+              <a:rPr lang="ko-KR" altLang="en-US" sz="1400" dirty="0">
+                <a:latin typeface="D2Coding" panose="020B0609020101020101" pitchFamily="49" charset="-127"/>
+                <a:ea typeface="D2Coding" panose="020B0609020101020101" pitchFamily="49" charset="-127"/>
+              </a:rPr>
+              <a:t>)과 출력(</a:t>
+            </a:r>
+            <a:r>
+              <a:rPr lang="ko-KR" altLang="en-US" sz="1400" dirty="0" err="1">
+                <a:latin typeface="D2Coding" panose="020B0609020101020101" pitchFamily="49" charset="-127"/>
+                <a:ea typeface="D2Coding" panose="020B0609020101020101" pitchFamily="49" charset="-127"/>
+              </a:rPr>
+              <a:t>outputs</a:t>
+            </a:r>
+            <a:r>
+              <a:rPr lang="ko-KR" altLang="en-US" sz="1400" dirty="0">
+                <a:latin typeface="D2Coding" panose="020B0609020101020101" pitchFamily="49" charset="-127"/>
+                <a:ea typeface="D2Coding" panose="020B0609020101020101" pitchFamily="49" charset="-127"/>
+              </a:rPr>
+              <a:t>) 리스트를 연결하여 하나의 그래프 구조 모델로 묶음</a:t>
+            </a:r>
+          </a:p>
+          <a:p>
+            <a:pPr>
+              <a:lnSpc>
+                <a:spcPct val="150000"/>
+              </a:lnSpc>
+            </a:pPr>
+            <a:r>
+              <a:rPr lang="ko-KR" altLang="en-US" sz="1400" dirty="0" err="1">
+                <a:latin typeface="D2Coding" panose="020B0609020101020101" pitchFamily="49" charset="-127"/>
+                <a:ea typeface="D2Coding" panose="020B0609020101020101" pitchFamily="49" charset="-127"/>
+              </a:rPr>
+              <a:t>model</a:t>
+            </a:r>
+            <a:r>
+              <a:rPr lang="ko-KR" altLang="en-US" sz="1400" dirty="0">
+                <a:latin typeface="D2Coding" panose="020B0609020101020101" pitchFamily="49" charset="-127"/>
+                <a:ea typeface="D2Coding" panose="020B0609020101020101" pitchFamily="49" charset="-127"/>
+              </a:rPr>
+              <a:t> = </a:t>
+            </a:r>
+            <a:r>
+              <a:rPr lang="ko-KR" altLang="en-US" sz="1400" dirty="0" err="1">
+                <a:latin typeface="D2Coding" panose="020B0609020101020101" pitchFamily="49" charset="-127"/>
+                <a:ea typeface="D2Coding" panose="020B0609020101020101" pitchFamily="49" charset="-127"/>
+              </a:rPr>
+              <a:t>keras.Model</a:t>
+            </a:r>
+            <a:r>
+              <a:rPr lang="ko-KR" altLang="en-US" sz="1400" dirty="0">
+                <a:latin typeface="D2Coding" panose="020B0609020101020101" pitchFamily="49" charset="-127"/>
+                <a:ea typeface="D2Coding" panose="020B0609020101020101" pitchFamily="49" charset="-127"/>
+              </a:rPr>
+              <a:t>(</a:t>
+            </a:r>
+            <a:r>
+              <a:rPr lang="ko-KR" altLang="en-US" sz="1400" dirty="0" err="1">
+                <a:latin typeface="D2Coding" panose="020B0609020101020101" pitchFamily="49" charset="-127"/>
+                <a:ea typeface="D2Coding" panose="020B0609020101020101" pitchFamily="49" charset="-127"/>
+              </a:rPr>
+              <a:t>inputs</a:t>
+            </a:r>
+            <a:r>
+              <a:rPr lang="ko-KR" altLang="en-US" sz="1400" dirty="0">
+                <a:latin typeface="D2Coding" panose="020B0609020101020101" pitchFamily="49" charset="-127"/>
+                <a:ea typeface="D2Coding" panose="020B0609020101020101" pitchFamily="49" charset="-127"/>
+              </a:rPr>
+              <a:t>=[</a:t>
+            </a:r>
+            <a:r>
+              <a:rPr lang="ko-KR" altLang="en-US" sz="1400" dirty="0" err="1">
+                <a:latin typeface="D2Coding" panose="020B0609020101020101" pitchFamily="49" charset="-127"/>
+                <a:ea typeface="D2Coding" panose="020B0609020101020101" pitchFamily="49" charset="-127"/>
+              </a:rPr>
+              <a:t>title</a:t>
+            </a:r>
+            <a:r>
+              <a:rPr lang="ko-KR" altLang="en-US" sz="1400" dirty="0">
+                <a:latin typeface="D2Coding" panose="020B0609020101020101" pitchFamily="49" charset="-127"/>
+                <a:ea typeface="D2Coding" panose="020B0609020101020101" pitchFamily="49" charset="-127"/>
+              </a:rPr>
+              <a:t>, </a:t>
+            </a:r>
+            <a:r>
+              <a:rPr lang="ko-KR" altLang="en-US" sz="1400" dirty="0" err="1">
+                <a:latin typeface="D2Coding" panose="020B0609020101020101" pitchFamily="49" charset="-127"/>
+                <a:ea typeface="D2Coding" panose="020B0609020101020101" pitchFamily="49" charset="-127"/>
+              </a:rPr>
+              <a:t>text_body</a:t>
+            </a:r>
+            <a:r>
+              <a:rPr lang="ko-KR" altLang="en-US" sz="1400" dirty="0">
+                <a:latin typeface="D2Coding" panose="020B0609020101020101" pitchFamily="49" charset="-127"/>
+                <a:ea typeface="D2Coding" panose="020B0609020101020101" pitchFamily="49" charset="-127"/>
+              </a:rPr>
+              <a:t>, </a:t>
+            </a:r>
+            <a:r>
+              <a:rPr lang="ko-KR" altLang="en-US" sz="1400" dirty="0" err="1">
+                <a:latin typeface="D2Coding" panose="020B0609020101020101" pitchFamily="49" charset="-127"/>
+                <a:ea typeface="D2Coding" panose="020B0609020101020101" pitchFamily="49" charset="-127"/>
+              </a:rPr>
+              <a:t>tags</a:t>
+            </a:r>
+            <a:r>
+              <a:rPr lang="ko-KR" altLang="en-US" sz="1400" dirty="0">
+                <a:latin typeface="D2Coding" panose="020B0609020101020101" pitchFamily="49" charset="-127"/>
+                <a:ea typeface="D2Coding" panose="020B0609020101020101" pitchFamily="49" charset="-127"/>
+              </a:rPr>
+              <a:t>], </a:t>
+            </a:r>
+            <a:r>
+              <a:rPr lang="ko-KR" altLang="en-US" sz="1400" dirty="0" err="1">
+                <a:latin typeface="D2Coding" panose="020B0609020101020101" pitchFamily="49" charset="-127"/>
+                <a:ea typeface="D2Coding" panose="020B0609020101020101" pitchFamily="49" charset="-127"/>
+              </a:rPr>
+              <a:t>outputs</a:t>
+            </a:r>
+            <a:r>
+              <a:rPr lang="ko-KR" altLang="en-US" sz="1400" dirty="0">
+                <a:latin typeface="D2Coding" panose="020B0609020101020101" pitchFamily="49" charset="-127"/>
+                <a:ea typeface="D2Coding" panose="020B0609020101020101" pitchFamily="49" charset="-127"/>
+              </a:rPr>
+              <a:t>=[</a:t>
+            </a:r>
+            <a:r>
+              <a:rPr lang="ko-KR" altLang="en-US" sz="1400" dirty="0" err="1">
+                <a:latin typeface="D2Coding" panose="020B0609020101020101" pitchFamily="49" charset="-127"/>
+                <a:ea typeface="D2Coding" panose="020B0609020101020101" pitchFamily="49" charset="-127"/>
+              </a:rPr>
+              <a:t>priority</a:t>
+            </a:r>
+            <a:r>
+              <a:rPr lang="ko-KR" altLang="en-US" sz="1400" dirty="0">
+                <a:latin typeface="D2Coding" panose="020B0609020101020101" pitchFamily="49" charset="-127"/>
+                <a:ea typeface="D2Coding" panose="020B0609020101020101" pitchFamily="49" charset="-127"/>
+              </a:rPr>
+              <a:t>, </a:t>
+            </a:r>
+            <a:r>
+              <a:rPr lang="ko-KR" altLang="en-US" sz="1400" dirty="0" err="1">
+                <a:latin typeface="D2Coding" panose="020B0609020101020101" pitchFamily="49" charset="-127"/>
+                <a:ea typeface="D2Coding" panose="020B0609020101020101" pitchFamily="49" charset="-127"/>
+              </a:rPr>
+              <a:t>department</a:t>
+            </a:r>
+            <a:r>
+              <a:rPr lang="ko-KR" altLang="en-US" sz="1400" dirty="0">
+                <a:latin typeface="D2Coding" panose="020B0609020101020101" pitchFamily="49" charset="-127"/>
+                <a:ea typeface="D2Coding" panose="020B0609020101020101" pitchFamily="49" charset="-127"/>
+              </a:rPr>
+              <a:t>],)</a:t>
+            </a:r>
+          </a:p>
+          <a:p>
+            <a:pPr>
+              <a:lnSpc>
+                <a:spcPct val="150000"/>
+              </a:lnSpc>
+            </a:pPr>
+            <a:endParaRPr lang="ko-KR" altLang="en-US" sz="1400" dirty="0">
+              <a:latin typeface="D2Coding" panose="020B0609020101020101" pitchFamily="49" charset="-127"/>
+              <a:ea typeface="D2Coding" panose="020B0609020101020101" pitchFamily="49" charset="-127"/>
+            </a:endParaRPr>
+          </a:p>
+          <a:p>
+            <a:pPr>
+              <a:lnSpc>
+                <a:spcPct val="150000"/>
+              </a:lnSpc>
+            </a:pPr>
+            <a:r>
+              <a:rPr lang="ko-KR" altLang="en-US" sz="1400" dirty="0">
+                <a:latin typeface="D2Coding" panose="020B0609020101020101" pitchFamily="49" charset="-127"/>
+                <a:ea typeface="D2Coding" panose="020B0609020101020101" pitchFamily="49" charset="-127"/>
+              </a:rPr>
+              <a:t># 모델 구조 출력 (입력 3개 -&gt; 병합 -&gt; </a:t>
+            </a:r>
+            <a:r>
+              <a:rPr lang="ko-KR" altLang="en-US" sz="1400" dirty="0" err="1">
+                <a:latin typeface="D2Coding" panose="020B0609020101020101" pitchFamily="49" charset="-127"/>
+                <a:ea typeface="D2Coding" panose="020B0609020101020101" pitchFamily="49" charset="-127"/>
+              </a:rPr>
+              <a:t>은닉층</a:t>
+            </a:r>
+            <a:r>
+              <a:rPr lang="ko-KR" altLang="en-US" sz="1400" dirty="0">
+                <a:latin typeface="D2Coding" panose="020B0609020101020101" pitchFamily="49" charset="-127"/>
+                <a:ea typeface="D2Coding" panose="020B0609020101020101" pitchFamily="49" charset="-127"/>
+              </a:rPr>
+              <a:t> -&gt; 출력 2개 흐름 확인)</a:t>
+            </a:r>
+          </a:p>
+          <a:p>
+            <a:pPr>
+              <a:lnSpc>
+                <a:spcPct val="150000"/>
+              </a:lnSpc>
+            </a:pPr>
+            <a:r>
+              <a:rPr lang="ko-KR" altLang="en-US" sz="1400" dirty="0" err="1">
+                <a:latin typeface="D2Coding" panose="020B0609020101020101" pitchFamily="49" charset="-127"/>
+                <a:ea typeface="D2Coding" panose="020B0609020101020101" pitchFamily="49" charset="-127"/>
+              </a:rPr>
+              <a:t>model.summary</a:t>
+            </a:r>
+            <a:r>
+              <a:rPr lang="ko-KR" altLang="en-US" sz="1400" dirty="0">
+                <a:latin typeface="D2Coding" panose="020B0609020101020101" pitchFamily="49" charset="-127"/>
+                <a:ea typeface="D2Coding" panose="020B0609020101020101" pitchFamily="49" charset="-127"/>
+              </a:rPr>
+              <a:t>()</a:t>
+            </a:r>
+          </a:p>
+        </p:txBody>
+      </p:sp>
+      <p:sp>
+        <p:nvSpPr>
+          <p:cNvPr id="50" name="TextBox 49">
+            <a:extLst>
+              <a:ext uri="{FF2B5EF4-FFF2-40B4-BE49-F238E27FC236}">
+                <a16:creationId xmlns:a16="http://schemas.microsoft.com/office/drawing/2014/main" id="{3ACACFBF-4E88-114A-3CC9-FB171D28871F}"/>
+              </a:ext>
+            </a:extLst>
+          </p:cNvPr>
+          <p:cNvSpPr txBox="1"/>
+          <p:nvPr/>
+        </p:nvSpPr>
+        <p:spPr>
+          <a:xfrm>
+            <a:off x="8554720" y="822776"/>
+            <a:ext cx="3048000" cy="369332"/>
+          </a:xfrm>
+          <a:prstGeom prst="rect">
+            <a:avLst/>
+          </a:prstGeom>
+          <a:noFill/>
+        </p:spPr>
+        <p:txBody>
+          <a:bodyPr wrap="square">
+            <a:spAutoFit/>
+          </a:bodyPr>
+          <a:lstStyle/>
+          <a:p>
+            <a:pPr algn="r"/>
+            <a:r>
+              <a:rPr lang="en-US" altLang="ko-KR" b="1" dirty="0">
+                <a:latin typeface="Lora" pitchFamily="2" charset="0"/>
+              </a:rPr>
+              <a:t>Functional API</a:t>
+            </a:r>
+          </a:p>
+        </p:txBody>
+      </p:sp>
+      <p:pic>
+        <p:nvPicPr>
+          <p:cNvPr id="2" name="그림 1">
+            <a:extLst>
+              <a:ext uri="{FF2B5EF4-FFF2-40B4-BE49-F238E27FC236}">
+                <a16:creationId xmlns:a16="http://schemas.microsoft.com/office/drawing/2014/main" id="{303CD2EB-20EE-C84D-23B7-53C0796E4612}"/>
+              </a:ext>
+            </a:extLst>
+          </p:cNvPr>
+          <p:cNvPicPr>
+            <a:picLocks noChangeAspect="1"/>
+          </p:cNvPicPr>
+          <p:nvPr/>
+        </p:nvPicPr>
+        <p:blipFill>
+          <a:blip r:embed="rId2"/>
+          <a:stretch>
+            <a:fillRect/>
+          </a:stretch>
+        </p:blipFill>
+        <p:spPr>
+          <a:xfrm>
+            <a:off x="8334374" y="4367804"/>
+            <a:ext cx="3268346" cy="2008213"/>
+          </a:xfrm>
+          <a:prstGeom prst="rect">
+            <a:avLst/>
+          </a:prstGeom>
+          <a:ln>
+            <a:solidFill>
+              <a:schemeClr val="tx1"/>
+            </a:solidFill>
+          </a:ln>
+        </p:spPr>
+      </p:pic>
+      <p:sp>
+        <p:nvSpPr>
+          <p:cNvPr id="5" name="슬라이드 번호 개체 틀 3">
+            <a:extLst>
+              <a:ext uri="{FF2B5EF4-FFF2-40B4-BE49-F238E27FC236}">
+                <a16:creationId xmlns:a16="http://schemas.microsoft.com/office/drawing/2014/main" id="{99A5850C-8C5F-0569-D795-571381D1AF76}"/>
+              </a:ext>
+            </a:extLst>
+          </p:cNvPr>
+          <p:cNvSpPr txBox="1">
+            <a:spLocks/>
+          </p:cNvSpPr>
+          <p:nvPr/>
+        </p:nvSpPr>
+        <p:spPr>
+          <a:xfrm>
+            <a:off x="11142661" y="299420"/>
+            <a:ext cx="753545" cy="365125"/>
+          </a:xfrm>
+          <a:prstGeom prst="rect">
+            <a:avLst/>
+          </a:prstGeom>
+        </p:spPr>
+        <p:txBody>
+          <a:bodyPr vert="horz" lIns="91440" tIns="45720" rIns="91440" bIns="45720" rtlCol="0" anchor="ctr"/>
+          <a:lstStyle>
+            <a:defPPr rtl="0">
+              <a:defRPr lang="ko-KR"/>
+            </a:defPPr>
+            <a:lvl1pPr marL="0" algn="r" defTabSz="914400" rtl="0" eaLnBrk="1" latinLnBrk="0" hangingPunct="1">
+              <a:defRPr sz="1200" kern="1200" baseline="0">
+                <a:solidFill>
+                  <a:schemeClr val="tx1">
+                    <a:lumMod val="65000"/>
+                    <a:lumOff val="35000"/>
+                  </a:schemeClr>
+                </a:solidFill>
+                <a:latin typeface="맑은 고딕" panose="020B0503020000020004" pitchFamily="50" charset="-127"/>
+                <a:ea typeface="맑은 고딕" panose="020B0503020000020004" pitchFamily="50" charset="-127"/>
+                <a:cs typeface="+mn-cs"/>
+              </a:defRPr>
+            </a:lvl1pPr>
+            <a:lvl2pPr marL="457200" algn="l" defTabSz="914400" rtl="0" eaLnBrk="1" latinLnBrk="0" hangingPunct="1">
+              <a:defRPr sz="1800" kern="1200">
+                <a:solidFill>
+                  <a:schemeClr val="tx1"/>
+                </a:solidFill>
+                <a:latin typeface="+mn-lt"/>
+                <a:ea typeface="+mn-ea"/>
+                <a:cs typeface="+mn-cs"/>
+              </a:defRPr>
+            </a:lvl2pPr>
+            <a:lvl3pPr marL="914400" algn="l" defTabSz="914400" rtl="0" eaLnBrk="1" latinLnBrk="0" hangingPunct="1">
+              <a:defRPr sz="1800" kern="1200">
+                <a:solidFill>
+                  <a:schemeClr val="tx1"/>
+                </a:solidFill>
+                <a:latin typeface="+mn-lt"/>
+                <a:ea typeface="+mn-ea"/>
+                <a:cs typeface="+mn-cs"/>
+              </a:defRPr>
+            </a:lvl3pPr>
+            <a:lvl4pPr marL="1371600" algn="l" defTabSz="914400" rtl="0" eaLnBrk="1" latinLnBrk="0" hangingPunct="1">
+              <a:defRPr sz="1800" kern="1200">
+                <a:solidFill>
+                  <a:schemeClr val="tx1"/>
+                </a:solidFill>
+                <a:latin typeface="+mn-lt"/>
+                <a:ea typeface="+mn-ea"/>
+                <a:cs typeface="+mn-cs"/>
+              </a:defRPr>
+            </a:lvl4pPr>
+            <a:lvl5pPr marL="1828800" algn="l" defTabSz="914400" rtl="0" eaLnBrk="1" latinLnBrk="0" hangingPunct="1">
+              <a:defRPr sz="1800" kern="1200">
+                <a:solidFill>
+                  <a:schemeClr val="tx1"/>
+                </a:solidFill>
+                <a:latin typeface="+mn-lt"/>
+                <a:ea typeface="+mn-ea"/>
+                <a:cs typeface="+mn-cs"/>
+              </a:defRPr>
+            </a:lvl5pPr>
+            <a:lvl6pPr marL="2286000" algn="l" defTabSz="914400" rtl="0" eaLnBrk="1" latinLnBrk="0" hangingPunct="1">
+              <a:defRPr sz="1800" kern="1200">
+                <a:solidFill>
+                  <a:schemeClr val="tx1"/>
+                </a:solidFill>
+                <a:latin typeface="+mn-lt"/>
+                <a:ea typeface="+mn-ea"/>
+                <a:cs typeface="+mn-cs"/>
+              </a:defRPr>
+            </a:lvl6pPr>
+            <a:lvl7pPr marL="2743200" algn="l" defTabSz="914400" rtl="0" eaLnBrk="1" latinLnBrk="0" hangingPunct="1">
+              <a:defRPr sz="1800" kern="1200">
+                <a:solidFill>
+                  <a:schemeClr val="tx1"/>
+                </a:solidFill>
+                <a:latin typeface="+mn-lt"/>
+                <a:ea typeface="+mn-ea"/>
+                <a:cs typeface="+mn-cs"/>
+              </a:defRPr>
+            </a:lvl7pPr>
+            <a:lvl8pPr marL="3200400" algn="l" defTabSz="914400" rtl="0" eaLnBrk="1" latinLnBrk="0" hangingPunct="1">
+              <a:defRPr sz="1800" kern="1200">
+                <a:solidFill>
+                  <a:schemeClr val="tx1"/>
+                </a:solidFill>
+                <a:latin typeface="+mn-lt"/>
+                <a:ea typeface="+mn-ea"/>
+                <a:cs typeface="+mn-cs"/>
+              </a:defRPr>
+            </a:lvl8pPr>
+            <a:lvl9pPr marL="3657600" algn="l" defTabSz="914400" rtl="0" eaLnBrk="1" latinLnBrk="0" hangingPunct="1">
+              <a:defRPr sz="1800" kern="1200">
+                <a:solidFill>
+                  <a:schemeClr val="tx1"/>
+                </a:solidFill>
+                <a:latin typeface="+mn-lt"/>
+                <a:ea typeface="+mn-ea"/>
+                <a:cs typeface="+mn-cs"/>
+              </a:defRPr>
+            </a:lvl9pPr>
+          </a:lstStyle>
+          <a:p>
+            <a:fld id="{D57F1E4F-1CFF-5643-939E-217C01CDF565}" type="slidenum">
+              <a:rPr lang="en-US" sz="1400" b="1" smtClean="0">
+                <a:latin typeface="D2Coding" panose="020B0609020101020101" pitchFamily="49" charset="-127"/>
+                <a:ea typeface="D2Coding" panose="020B0609020101020101" pitchFamily="49" charset="-127"/>
+              </a:rPr>
+              <a:pPr/>
+              <a:t>11</a:t>
+            </a:fld>
+            <a:endParaRPr lang="en-US" sz="1400" b="1" dirty="0">
+              <a:latin typeface="D2Coding" panose="020B0609020101020101" pitchFamily="49" charset="-127"/>
+              <a:ea typeface="D2Coding" panose="020B0609020101020101" pitchFamily="49" charset="-127"/>
+            </a:endParaRPr>
+          </a:p>
+        </p:txBody>
+      </p:sp>
+    </p:spTree>
+    <p:extLst>
+      <p:ext uri="{BB962C8B-B14F-4D97-AF65-F5344CB8AC3E}">
+        <p14:creationId xmlns:p14="http://schemas.microsoft.com/office/powerpoint/2010/main" val="2060670809"/>
+      </p:ext>
+    </p:extLst>
+  </p:cSld>
+  <p:clrMapOvr>
+    <a:masterClrMapping/>
+  </p:clrMapOvr>
+</p:sld>
+</file>
+
+<file path=ppt/slides/slide12.xml><?xml version="1.0" encoding="utf-8"?>
+<p:sld xmlns:a="http://schemas.openxmlformats.org/drawingml/2006/main" xmlns:r="http://schemas.openxmlformats.org/officeDocument/2006/relationships" xmlns:p="http://schemas.openxmlformats.org/presentationml/2006/main">
+  <p:cSld>
+    <p:spTree>
+      <p:nvGrpSpPr>
+        <p:cNvPr id="1" name="">
+          <a:extLst>
+            <a:ext uri="{FF2B5EF4-FFF2-40B4-BE49-F238E27FC236}">
+              <a16:creationId xmlns:a16="http://schemas.microsoft.com/office/drawing/2014/main" id="{EF7E70B9-5654-A5B6-2611-8A8E13CECC5B}"/>
+            </a:ext>
+          </a:extLst>
+        </p:cNvPr>
+        <p:cNvGrpSpPr/>
+        <p:nvPr/>
+      </p:nvGrpSpPr>
+      <p:grpSpPr>
+        <a:xfrm>
+          <a:off x="0" y="0"/>
+          <a:ext cx="0" cy="0"/>
+          <a:chOff x="0" y="0"/>
+          <a:chExt cx="0" cy="0"/>
+        </a:xfrm>
+      </p:grpSpPr>
+      <p:sp>
+        <p:nvSpPr>
+          <p:cNvPr id="3" name="제목 1">
+            <a:extLst>
+              <a:ext uri="{FF2B5EF4-FFF2-40B4-BE49-F238E27FC236}">
+                <a16:creationId xmlns:a16="http://schemas.microsoft.com/office/drawing/2014/main" id="{5AA0A530-F655-859A-2D85-453B4F511F99}"/>
+              </a:ext>
+            </a:extLst>
+          </p:cNvPr>
+          <p:cNvSpPr txBox="1">
+            <a:spLocks/>
+          </p:cNvSpPr>
+          <p:nvPr/>
+        </p:nvSpPr>
+        <p:spPr>
+          <a:xfrm>
+            <a:off x="475645" y="481983"/>
+            <a:ext cx="7439630" cy="766439"/>
+          </a:xfrm>
+          <a:prstGeom prst="rect">
+            <a:avLst/>
+          </a:prstGeom>
+        </p:spPr>
+        <p:txBody>
+          <a:bodyPr vert="horz" lIns="91440" tIns="45720" rIns="91440" bIns="45720" rtlCol="0" anchor="ctr">
+            <a:normAutofit fontScale="92500"/>
+          </a:bodyPr>
+          <a:lstStyle>
+            <a:lvl1pPr algn="ctr" defTabSz="914400" rtl="0" eaLnBrk="1" latinLnBrk="1" hangingPunct="1">
+              <a:lnSpc>
+                <a:spcPct val="90000"/>
+              </a:lnSpc>
+              <a:spcBef>
+                <a:spcPct val="0"/>
+              </a:spcBef>
+              <a:buNone/>
+              <a:defRPr sz="3200" kern="1200" cap="all" baseline="0">
+                <a:solidFill>
+                  <a:schemeClr val="tx1"/>
+                </a:solidFill>
+                <a:effectLst/>
+                <a:latin typeface="Batang" panose="02030600000101010101" pitchFamily="18" charset="-127"/>
+                <a:ea typeface="Batang" panose="02030600000101010101" pitchFamily="18" charset="-127"/>
+                <a:cs typeface="+mj-cs"/>
+              </a:defRPr>
+            </a:lvl1pPr>
+          </a:lstStyle>
+          <a:p>
+            <a:pPr algn="l"/>
+            <a:r>
+              <a:rPr lang="en-US" altLang="ko-KR" sz="2800" b="1" cap="none" dirty="0">
+                <a:latin typeface="Lora" pitchFamily="2" charset="0"/>
+              </a:rPr>
+              <a:t>Training a multi-input, multi-output model</a:t>
+            </a:r>
+          </a:p>
+        </p:txBody>
+      </p:sp>
+      <p:sp>
+        <p:nvSpPr>
+          <p:cNvPr id="6" name="TextBox 5">
+            <a:extLst>
+              <a:ext uri="{FF2B5EF4-FFF2-40B4-BE49-F238E27FC236}">
+                <a16:creationId xmlns:a16="http://schemas.microsoft.com/office/drawing/2014/main" id="{EF903609-6381-C120-0EA0-451E43FA442E}"/>
+              </a:ext>
+            </a:extLst>
+          </p:cNvPr>
+          <p:cNvSpPr txBox="1"/>
+          <p:nvPr/>
+        </p:nvSpPr>
+        <p:spPr>
+          <a:xfrm>
+            <a:off x="8554720" y="822776"/>
+            <a:ext cx="3048000" cy="369332"/>
+          </a:xfrm>
+          <a:prstGeom prst="rect">
+            <a:avLst/>
+          </a:prstGeom>
+          <a:noFill/>
+        </p:spPr>
+        <p:txBody>
+          <a:bodyPr wrap="square">
+            <a:spAutoFit/>
+          </a:bodyPr>
+          <a:lstStyle/>
+          <a:p>
+            <a:pPr algn="r"/>
+            <a:r>
+              <a:rPr lang="en-US" altLang="ko-KR" b="1" dirty="0">
+                <a:latin typeface="Lora" pitchFamily="2" charset="0"/>
+              </a:rPr>
+              <a:t>Functional API</a:t>
+            </a:r>
+          </a:p>
+        </p:txBody>
+      </p:sp>
+      <p:pic>
+        <p:nvPicPr>
+          <p:cNvPr id="4098" name="Picture 2">
+            <a:extLst>
+              <a:ext uri="{FF2B5EF4-FFF2-40B4-BE49-F238E27FC236}">
+                <a16:creationId xmlns:a16="http://schemas.microsoft.com/office/drawing/2014/main" id="{B4854A1D-15A3-B76F-3237-451998C01159}"/>
+              </a:ext>
+            </a:extLst>
+          </p:cNvPr>
+          <p:cNvPicPr>
+            <a:picLocks noChangeAspect="1" noChangeArrowheads="1"/>
+          </p:cNvPicPr>
+          <p:nvPr/>
+        </p:nvPicPr>
+        <p:blipFill>
+          <a:blip r:embed="rId2">
+            <a:extLst>
+              <a:ext uri="{28A0092B-C50C-407E-A947-70E740481C1C}">
+                <a14:useLocalDpi xmlns:a14="http://schemas.microsoft.com/office/drawing/2010/main" val="0"/>
+              </a:ext>
+            </a:extLst>
+          </a:blip>
+          <a:srcRect/>
+          <a:stretch>
+            <a:fillRect/>
+          </a:stretch>
+        </p:blipFill>
+        <p:spPr bwMode="auto">
+          <a:xfrm>
+            <a:off x="3524448" y="2206429"/>
+            <a:ext cx="4936213" cy="3975296"/>
+          </a:xfrm>
+          <a:prstGeom prst="rect">
+            <a:avLst/>
+          </a:prstGeom>
+          <a:noFill/>
+          <a:extLst>
+            <a:ext uri="{909E8E84-426E-40DD-AFC4-6F175D3DCCD1}">
+              <a14:hiddenFill xmlns:a14="http://schemas.microsoft.com/office/drawing/2010/main">
+                <a:solidFill>
+                  <a:srgbClr val="FFFFFF"/>
+                </a:solidFill>
+              </a14:hiddenFill>
+            </a:ext>
+          </a:extLst>
+        </p:spPr>
+      </p:pic>
+      <p:sp>
+        <p:nvSpPr>
+          <p:cNvPr id="8" name="TextBox 7">
+            <a:extLst>
+              <a:ext uri="{FF2B5EF4-FFF2-40B4-BE49-F238E27FC236}">
+                <a16:creationId xmlns:a16="http://schemas.microsoft.com/office/drawing/2014/main" id="{61286AE1-FF3A-2650-C3F3-446BEDC64377}"/>
+              </a:ext>
+            </a:extLst>
+          </p:cNvPr>
+          <p:cNvSpPr txBox="1"/>
+          <p:nvPr/>
+        </p:nvSpPr>
+        <p:spPr>
+          <a:xfrm>
+            <a:off x="2170431" y="1595147"/>
+            <a:ext cx="7264400" cy="369332"/>
+          </a:xfrm>
+          <a:prstGeom prst="rect">
+            <a:avLst/>
+          </a:prstGeom>
+          <a:noFill/>
+        </p:spPr>
+        <p:txBody>
+          <a:bodyPr wrap="square">
+            <a:spAutoFit/>
+          </a:bodyPr>
+          <a:lstStyle/>
+          <a:p>
+            <a:pPr algn="l">
+              <a:buNone/>
+            </a:pPr>
+            <a:r>
+              <a:rPr lang="en-US" altLang="ko-KR" i="0" dirty="0">
+                <a:effectLst/>
+                <a:latin typeface="D2Coding" panose="020B0609020101020101" pitchFamily="49" charset="-127"/>
+                <a:ea typeface="D2Coding" panose="020B0609020101020101" pitchFamily="49" charset="-127"/>
+              </a:rPr>
+              <a:t>The power of the Functional API: Access to layer connectivity</a:t>
+            </a:r>
+          </a:p>
+        </p:txBody>
+      </p:sp>
+      <p:sp>
+        <p:nvSpPr>
+          <p:cNvPr id="2" name="슬라이드 번호 개체 틀 3">
+            <a:extLst>
+              <a:ext uri="{FF2B5EF4-FFF2-40B4-BE49-F238E27FC236}">
+                <a16:creationId xmlns:a16="http://schemas.microsoft.com/office/drawing/2014/main" id="{732D378B-04A4-5A91-27D4-5925B2533584}"/>
+              </a:ext>
+            </a:extLst>
+          </p:cNvPr>
+          <p:cNvSpPr txBox="1">
+            <a:spLocks/>
+          </p:cNvSpPr>
+          <p:nvPr/>
+        </p:nvSpPr>
+        <p:spPr>
+          <a:xfrm>
+            <a:off x="11142661" y="299420"/>
+            <a:ext cx="753545" cy="365125"/>
+          </a:xfrm>
+          <a:prstGeom prst="rect">
+            <a:avLst/>
+          </a:prstGeom>
+        </p:spPr>
+        <p:txBody>
+          <a:bodyPr vert="horz" lIns="91440" tIns="45720" rIns="91440" bIns="45720" rtlCol="0" anchor="ctr"/>
+          <a:lstStyle>
+            <a:defPPr rtl="0">
+              <a:defRPr lang="ko-KR"/>
+            </a:defPPr>
+            <a:lvl1pPr marL="0" algn="r" defTabSz="914400" rtl="0" eaLnBrk="1" latinLnBrk="0" hangingPunct="1">
+              <a:defRPr sz="1200" kern="1200" baseline="0">
+                <a:solidFill>
+                  <a:schemeClr val="tx1">
+                    <a:lumMod val="65000"/>
+                    <a:lumOff val="35000"/>
+                  </a:schemeClr>
+                </a:solidFill>
+                <a:latin typeface="맑은 고딕" panose="020B0503020000020004" pitchFamily="50" charset="-127"/>
+                <a:ea typeface="맑은 고딕" panose="020B0503020000020004" pitchFamily="50" charset="-127"/>
+                <a:cs typeface="+mn-cs"/>
+              </a:defRPr>
+            </a:lvl1pPr>
+            <a:lvl2pPr marL="457200" algn="l" defTabSz="914400" rtl="0" eaLnBrk="1" latinLnBrk="0" hangingPunct="1">
+              <a:defRPr sz="1800" kern="1200">
+                <a:solidFill>
+                  <a:schemeClr val="tx1"/>
+                </a:solidFill>
+                <a:latin typeface="+mn-lt"/>
+                <a:ea typeface="+mn-ea"/>
+                <a:cs typeface="+mn-cs"/>
+              </a:defRPr>
+            </a:lvl2pPr>
+            <a:lvl3pPr marL="914400" algn="l" defTabSz="914400" rtl="0" eaLnBrk="1" latinLnBrk="0" hangingPunct="1">
+              <a:defRPr sz="1800" kern="1200">
+                <a:solidFill>
+                  <a:schemeClr val="tx1"/>
+                </a:solidFill>
+                <a:latin typeface="+mn-lt"/>
+                <a:ea typeface="+mn-ea"/>
+                <a:cs typeface="+mn-cs"/>
+              </a:defRPr>
+            </a:lvl3pPr>
+            <a:lvl4pPr marL="1371600" algn="l" defTabSz="914400" rtl="0" eaLnBrk="1" latinLnBrk="0" hangingPunct="1">
+              <a:defRPr sz="1800" kern="1200">
+                <a:solidFill>
+                  <a:schemeClr val="tx1"/>
+                </a:solidFill>
+                <a:latin typeface="+mn-lt"/>
+                <a:ea typeface="+mn-ea"/>
+                <a:cs typeface="+mn-cs"/>
+              </a:defRPr>
+            </a:lvl4pPr>
+            <a:lvl5pPr marL="1828800" algn="l" defTabSz="914400" rtl="0" eaLnBrk="1" latinLnBrk="0" hangingPunct="1">
+              <a:defRPr sz="1800" kern="1200">
+                <a:solidFill>
+                  <a:schemeClr val="tx1"/>
+                </a:solidFill>
+                <a:latin typeface="+mn-lt"/>
+                <a:ea typeface="+mn-ea"/>
+                <a:cs typeface="+mn-cs"/>
+              </a:defRPr>
+            </a:lvl5pPr>
+            <a:lvl6pPr marL="2286000" algn="l" defTabSz="914400" rtl="0" eaLnBrk="1" latinLnBrk="0" hangingPunct="1">
+              <a:defRPr sz="1800" kern="1200">
+                <a:solidFill>
+                  <a:schemeClr val="tx1"/>
+                </a:solidFill>
+                <a:latin typeface="+mn-lt"/>
+                <a:ea typeface="+mn-ea"/>
+                <a:cs typeface="+mn-cs"/>
+              </a:defRPr>
+            </a:lvl6pPr>
+            <a:lvl7pPr marL="2743200" algn="l" defTabSz="914400" rtl="0" eaLnBrk="1" latinLnBrk="0" hangingPunct="1">
+              <a:defRPr sz="1800" kern="1200">
+                <a:solidFill>
+                  <a:schemeClr val="tx1"/>
+                </a:solidFill>
+                <a:latin typeface="+mn-lt"/>
+                <a:ea typeface="+mn-ea"/>
+                <a:cs typeface="+mn-cs"/>
+              </a:defRPr>
+            </a:lvl7pPr>
+            <a:lvl8pPr marL="3200400" algn="l" defTabSz="914400" rtl="0" eaLnBrk="1" latinLnBrk="0" hangingPunct="1">
+              <a:defRPr sz="1800" kern="1200">
+                <a:solidFill>
+                  <a:schemeClr val="tx1"/>
+                </a:solidFill>
+                <a:latin typeface="+mn-lt"/>
+                <a:ea typeface="+mn-ea"/>
+                <a:cs typeface="+mn-cs"/>
+              </a:defRPr>
+            </a:lvl8pPr>
+            <a:lvl9pPr marL="3657600" algn="l" defTabSz="914400" rtl="0" eaLnBrk="1" latinLnBrk="0" hangingPunct="1">
+              <a:defRPr sz="1800" kern="1200">
+                <a:solidFill>
+                  <a:schemeClr val="tx1"/>
+                </a:solidFill>
+                <a:latin typeface="+mn-lt"/>
+                <a:ea typeface="+mn-ea"/>
+                <a:cs typeface="+mn-cs"/>
+              </a:defRPr>
+            </a:lvl9pPr>
+          </a:lstStyle>
+          <a:p>
+            <a:fld id="{D57F1E4F-1CFF-5643-939E-217C01CDF565}" type="slidenum">
+              <a:rPr lang="en-US" sz="1400" b="1" smtClean="0">
+                <a:latin typeface="D2Coding" panose="020B0609020101020101" pitchFamily="49" charset="-127"/>
+                <a:ea typeface="D2Coding" panose="020B0609020101020101" pitchFamily="49" charset="-127"/>
+              </a:rPr>
+              <a:pPr/>
+              <a:t>12</a:t>
+            </a:fld>
+            <a:endParaRPr lang="en-US" sz="1400" b="1" dirty="0">
+              <a:latin typeface="D2Coding" panose="020B0609020101020101" pitchFamily="49" charset="-127"/>
+              <a:ea typeface="D2Coding" panose="020B0609020101020101" pitchFamily="49" charset="-127"/>
+            </a:endParaRPr>
+          </a:p>
+        </p:txBody>
+      </p:sp>
+    </p:spTree>
+    <p:extLst>
+      <p:ext uri="{BB962C8B-B14F-4D97-AF65-F5344CB8AC3E}">
+        <p14:creationId xmlns:p14="http://schemas.microsoft.com/office/powerpoint/2010/main" val="1901938499"/>
+      </p:ext>
+    </p:extLst>
+  </p:cSld>
+  <p:clrMapOvr>
+    <a:masterClrMapping/>
+  </p:clrMapOvr>
+</p:sld>
+</file>
+
+<file path=ppt/slides/slide13.xml><?xml version="1.0" encoding="utf-8"?>
+<p:sld xmlns:a="http://schemas.openxmlformats.org/drawingml/2006/main" xmlns:r="http://schemas.openxmlformats.org/officeDocument/2006/relationships" xmlns:p="http://schemas.openxmlformats.org/presentationml/2006/main">
+  <p:cSld>
+    <p:spTree>
+      <p:nvGrpSpPr>
+        <p:cNvPr id="1" name="">
+          <a:extLst>
+            <a:ext uri="{FF2B5EF4-FFF2-40B4-BE49-F238E27FC236}">
+              <a16:creationId xmlns:a16="http://schemas.microsoft.com/office/drawing/2014/main" id="{E6EB176D-AC01-C431-8130-9B7CCB1AF5B5}"/>
+            </a:ext>
+          </a:extLst>
+        </p:cNvPr>
+        <p:cNvGrpSpPr/>
+        <p:nvPr/>
+      </p:nvGrpSpPr>
+      <p:grpSpPr>
+        <a:xfrm>
+          <a:off x="0" y="0"/>
+          <a:ext cx="0" cy="0"/>
+          <a:chOff x="0" y="0"/>
+          <a:chExt cx="0" cy="0"/>
+        </a:xfrm>
+      </p:grpSpPr>
+      <p:sp>
+        <p:nvSpPr>
+          <p:cNvPr id="3" name="제목 1">
+            <a:extLst>
+              <a:ext uri="{FF2B5EF4-FFF2-40B4-BE49-F238E27FC236}">
+                <a16:creationId xmlns:a16="http://schemas.microsoft.com/office/drawing/2014/main" id="{7D20BEA8-A10F-030E-CA2D-EFABEF031701}"/>
+              </a:ext>
+            </a:extLst>
+          </p:cNvPr>
+          <p:cNvSpPr txBox="1">
+            <a:spLocks/>
+          </p:cNvSpPr>
+          <p:nvPr/>
+        </p:nvSpPr>
+        <p:spPr>
+          <a:xfrm>
+            <a:off x="475645" y="481983"/>
+            <a:ext cx="7439630" cy="766439"/>
+          </a:xfrm>
+          <a:prstGeom prst="rect">
+            <a:avLst/>
+          </a:prstGeom>
+        </p:spPr>
+        <p:txBody>
+          <a:bodyPr vert="horz" lIns="91440" tIns="45720" rIns="91440" bIns="45720" rtlCol="0" anchor="ctr">
+            <a:normAutofit fontScale="92500"/>
+          </a:bodyPr>
+          <a:lstStyle>
+            <a:lvl1pPr algn="ctr" defTabSz="914400" rtl="0" eaLnBrk="1" latinLnBrk="1" hangingPunct="1">
+              <a:lnSpc>
+                <a:spcPct val="90000"/>
+              </a:lnSpc>
+              <a:spcBef>
+                <a:spcPct val="0"/>
+              </a:spcBef>
+              <a:buNone/>
+              <a:defRPr sz="3200" kern="1200" cap="all" baseline="0">
+                <a:solidFill>
+                  <a:schemeClr val="tx1"/>
+                </a:solidFill>
+                <a:effectLst/>
+                <a:latin typeface="Batang" panose="02030600000101010101" pitchFamily="18" charset="-127"/>
+                <a:ea typeface="Batang" panose="02030600000101010101" pitchFamily="18" charset="-127"/>
+                <a:cs typeface="+mj-cs"/>
+              </a:defRPr>
+            </a:lvl1pPr>
+          </a:lstStyle>
+          <a:p>
+            <a:pPr algn="l"/>
+            <a:r>
+              <a:rPr lang="en-US" altLang="ko-KR" sz="2800" b="1" cap="none" dirty="0">
+                <a:latin typeface="Lora" pitchFamily="2" charset="0"/>
+              </a:rPr>
+              <a:t>Training a multi-input, multi-output model</a:t>
+            </a:r>
+          </a:p>
+        </p:txBody>
+      </p:sp>
+      <p:sp>
+        <p:nvSpPr>
+          <p:cNvPr id="6" name="TextBox 5">
+            <a:extLst>
+              <a:ext uri="{FF2B5EF4-FFF2-40B4-BE49-F238E27FC236}">
+                <a16:creationId xmlns:a16="http://schemas.microsoft.com/office/drawing/2014/main" id="{68B0173C-9152-8CC1-5F0C-384018A60C33}"/>
+              </a:ext>
+            </a:extLst>
+          </p:cNvPr>
+          <p:cNvSpPr txBox="1"/>
+          <p:nvPr/>
+        </p:nvSpPr>
+        <p:spPr>
+          <a:xfrm>
+            <a:off x="8554720" y="822776"/>
+            <a:ext cx="3048000" cy="369332"/>
+          </a:xfrm>
+          <a:prstGeom prst="rect">
+            <a:avLst/>
+          </a:prstGeom>
+          <a:noFill/>
+        </p:spPr>
+        <p:txBody>
+          <a:bodyPr wrap="square">
+            <a:spAutoFit/>
+          </a:bodyPr>
+          <a:lstStyle/>
+          <a:p>
+            <a:pPr algn="r"/>
+            <a:r>
+              <a:rPr lang="en-US" altLang="ko-KR" b="1" dirty="0">
+                <a:latin typeface="Lora" pitchFamily="2" charset="0"/>
+              </a:rPr>
+              <a:t>Functional API</a:t>
+            </a:r>
+          </a:p>
+        </p:txBody>
+      </p:sp>
+      <p:pic>
+        <p:nvPicPr>
+          <p:cNvPr id="4100" name="Picture 4">
+            <a:extLst>
+              <a:ext uri="{FF2B5EF4-FFF2-40B4-BE49-F238E27FC236}">
+                <a16:creationId xmlns:a16="http://schemas.microsoft.com/office/drawing/2014/main" id="{C38FDADA-58BE-E19E-2298-8F63C28D1F1B}"/>
+              </a:ext>
+            </a:extLst>
+          </p:cNvPr>
+          <p:cNvPicPr>
+            <a:picLocks noChangeAspect="1" noChangeArrowheads="1"/>
+          </p:cNvPicPr>
+          <p:nvPr/>
+        </p:nvPicPr>
+        <p:blipFill>
+          <a:blip r:embed="rId2">
+            <a:extLst>
+              <a:ext uri="{28A0092B-C50C-407E-A947-70E740481C1C}">
+                <a14:useLocalDpi xmlns:a14="http://schemas.microsoft.com/office/drawing/2010/main" val="0"/>
+              </a:ext>
+            </a:extLst>
+          </a:blip>
+          <a:srcRect/>
+          <a:stretch>
+            <a:fillRect/>
+          </a:stretch>
+        </p:blipFill>
+        <p:spPr bwMode="auto">
+          <a:xfrm>
+            <a:off x="2772030" y="2196903"/>
+            <a:ext cx="6238620" cy="3958701"/>
+          </a:xfrm>
+          <a:prstGeom prst="rect">
+            <a:avLst/>
+          </a:prstGeom>
+          <a:noFill/>
+          <a:extLst>
+            <a:ext uri="{909E8E84-426E-40DD-AFC4-6F175D3DCCD1}">
+              <a14:hiddenFill xmlns:a14="http://schemas.microsoft.com/office/drawing/2010/main">
+                <a:solidFill>
+                  <a:srgbClr val="FFFFFF"/>
+                </a:solidFill>
+              </a14:hiddenFill>
+            </a:ext>
+          </a:extLst>
+        </p:spPr>
+      </p:pic>
+      <p:sp>
+        <p:nvSpPr>
+          <p:cNvPr id="8" name="TextBox 7">
+            <a:extLst>
+              <a:ext uri="{FF2B5EF4-FFF2-40B4-BE49-F238E27FC236}">
+                <a16:creationId xmlns:a16="http://schemas.microsoft.com/office/drawing/2014/main" id="{906E479A-0299-BC4A-96CA-CC785BF3C769}"/>
+              </a:ext>
+            </a:extLst>
+          </p:cNvPr>
+          <p:cNvSpPr txBox="1"/>
+          <p:nvPr/>
+        </p:nvSpPr>
+        <p:spPr>
+          <a:xfrm>
+            <a:off x="2170431" y="1595147"/>
+            <a:ext cx="7264400" cy="369332"/>
+          </a:xfrm>
+          <a:prstGeom prst="rect">
+            <a:avLst/>
+          </a:prstGeom>
+          <a:noFill/>
+        </p:spPr>
+        <p:txBody>
+          <a:bodyPr wrap="square">
+            <a:spAutoFit/>
+          </a:bodyPr>
+          <a:lstStyle/>
+          <a:p>
+            <a:pPr algn="l">
+              <a:buNone/>
+            </a:pPr>
+            <a:r>
+              <a:rPr lang="en-US" altLang="ko-KR" i="0" dirty="0">
+                <a:effectLst/>
+                <a:latin typeface="D2Coding" panose="020B0609020101020101" pitchFamily="49" charset="-127"/>
+                <a:ea typeface="D2Coding" panose="020B0609020101020101" pitchFamily="49" charset="-127"/>
+              </a:rPr>
+              <a:t>The power of the Functional API: Access to layer connectivity</a:t>
+            </a:r>
+          </a:p>
+        </p:txBody>
+      </p:sp>
+      <p:sp>
+        <p:nvSpPr>
+          <p:cNvPr id="5" name="TextBox 4">
+            <a:extLst>
+              <a:ext uri="{FF2B5EF4-FFF2-40B4-BE49-F238E27FC236}">
+                <a16:creationId xmlns:a16="http://schemas.microsoft.com/office/drawing/2014/main" id="{34F95F53-20DE-7989-8A50-C02ADBA805DE}"/>
+              </a:ext>
+            </a:extLst>
+          </p:cNvPr>
+          <p:cNvSpPr txBox="1"/>
+          <p:nvPr/>
+        </p:nvSpPr>
+        <p:spPr>
+          <a:xfrm>
+            <a:off x="4491800" y="6162430"/>
+            <a:ext cx="1171575" cy="307777"/>
+          </a:xfrm>
+          <a:prstGeom prst="rect">
+            <a:avLst/>
+          </a:prstGeom>
+          <a:solidFill>
+            <a:schemeClr val="accent5"/>
+          </a:solidFill>
+        </p:spPr>
+        <p:txBody>
+          <a:bodyPr wrap="square">
+            <a:spAutoFit/>
+          </a:bodyPr>
+          <a:lstStyle/>
+          <a:p>
+            <a:pPr algn="ctr"/>
+            <a:r>
+              <a:rPr lang="ko-KR" altLang="en-US" sz="1400" b="1" dirty="0" err="1">
+                <a:solidFill>
+                  <a:schemeClr val="bg1"/>
+                </a:solidFill>
+                <a:latin typeface="D2Coding" panose="020B0609020101020101" pitchFamily="49" charset="-127"/>
+                <a:ea typeface="D2Coding" panose="020B0609020101020101" pitchFamily="49" charset="-127"/>
+              </a:rPr>
+              <a:t>sigmoid</a:t>
+            </a:r>
+            <a:endParaRPr lang="ko-KR" altLang="en-US" sz="1400" b="1" dirty="0">
+              <a:solidFill>
+                <a:schemeClr val="bg1"/>
+              </a:solidFill>
+            </a:endParaRPr>
+          </a:p>
+        </p:txBody>
+      </p:sp>
+      <p:sp>
+        <p:nvSpPr>
+          <p:cNvPr id="9" name="TextBox 8">
+            <a:extLst>
+              <a:ext uri="{FF2B5EF4-FFF2-40B4-BE49-F238E27FC236}">
+                <a16:creationId xmlns:a16="http://schemas.microsoft.com/office/drawing/2014/main" id="{7CD196EE-84AD-0964-4E2C-18A23D861857}"/>
+              </a:ext>
+            </a:extLst>
+          </p:cNvPr>
+          <p:cNvSpPr txBox="1"/>
+          <p:nvPr/>
+        </p:nvSpPr>
+        <p:spPr>
+          <a:xfrm>
+            <a:off x="7833286" y="6155604"/>
+            <a:ext cx="933969" cy="307777"/>
+          </a:xfrm>
+          <a:prstGeom prst="rect">
+            <a:avLst/>
+          </a:prstGeom>
+          <a:solidFill>
+            <a:schemeClr val="accent5"/>
+          </a:solidFill>
+        </p:spPr>
+        <p:txBody>
+          <a:bodyPr wrap="square">
+            <a:spAutoFit/>
+          </a:bodyPr>
+          <a:lstStyle/>
+          <a:p>
+            <a:pPr algn="ctr"/>
+            <a:r>
+              <a:rPr lang="ko-KR" altLang="en-US" sz="1400" b="1" dirty="0" err="1">
+                <a:solidFill>
+                  <a:schemeClr val="bg1"/>
+                </a:solidFill>
+                <a:latin typeface="D2Coding" panose="020B0609020101020101" pitchFamily="49" charset="-127"/>
+                <a:ea typeface="D2Coding" panose="020B0609020101020101" pitchFamily="49" charset="-127"/>
+              </a:rPr>
+              <a:t>softmax</a:t>
+            </a:r>
+            <a:endParaRPr lang="ko-KR" altLang="en-US" sz="1400" b="1" dirty="0">
+              <a:solidFill>
+                <a:schemeClr val="bg1"/>
+              </a:solidFill>
+            </a:endParaRPr>
+          </a:p>
+        </p:txBody>
+      </p:sp>
+      <p:sp>
+        <p:nvSpPr>
+          <p:cNvPr id="2" name="슬라이드 번호 개체 틀 3">
+            <a:extLst>
+              <a:ext uri="{FF2B5EF4-FFF2-40B4-BE49-F238E27FC236}">
+                <a16:creationId xmlns:a16="http://schemas.microsoft.com/office/drawing/2014/main" id="{8744B3EA-196A-89C7-AC96-BB8CD51BFAC6}"/>
+              </a:ext>
+            </a:extLst>
+          </p:cNvPr>
+          <p:cNvSpPr txBox="1">
+            <a:spLocks/>
+          </p:cNvSpPr>
+          <p:nvPr/>
+        </p:nvSpPr>
+        <p:spPr>
+          <a:xfrm>
+            <a:off x="11142661" y="299420"/>
+            <a:ext cx="753545" cy="365125"/>
+          </a:xfrm>
+          <a:prstGeom prst="rect">
+            <a:avLst/>
+          </a:prstGeom>
+        </p:spPr>
+        <p:txBody>
+          <a:bodyPr vert="horz" lIns="91440" tIns="45720" rIns="91440" bIns="45720" rtlCol="0" anchor="ctr"/>
+          <a:lstStyle>
+            <a:defPPr rtl="0">
+              <a:defRPr lang="ko-KR"/>
+            </a:defPPr>
+            <a:lvl1pPr marL="0" algn="r" defTabSz="914400" rtl="0" eaLnBrk="1" latinLnBrk="0" hangingPunct="1">
+              <a:defRPr sz="1200" kern="1200" baseline="0">
+                <a:solidFill>
+                  <a:schemeClr val="tx1">
+                    <a:lumMod val="65000"/>
+                    <a:lumOff val="35000"/>
+                  </a:schemeClr>
+                </a:solidFill>
+                <a:latin typeface="맑은 고딕" panose="020B0503020000020004" pitchFamily="50" charset="-127"/>
+                <a:ea typeface="맑은 고딕" panose="020B0503020000020004" pitchFamily="50" charset="-127"/>
+                <a:cs typeface="+mn-cs"/>
+              </a:defRPr>
+            </a:lvl1pPr>
+            <a:lvl2pPr marL="457200" algn="l" defTabSz="914400" rtl="0" eaLnBrk="1" latinLnBrk="0" hangingPunct="1">
+              <a:defRPr sz="1800" kern="1200">
+                <a:solidFill>
+                  <a:schemeClr val="tx1"/>
+                </a:solidFill>
+                <a:latin typeface="+mn-lt"/>
+                <a:ea typeface="+mn-ea"/>
+                <a:cs typeface="+mn-cs"/>
+              </a:defRPr>
+            </a:lvl2pPr>
+            <a:lvl3pPr marL="914400" algn="l" defTabSz="914400" rtl="0" eaLnBrk="1" latinLnBrk="0" hangingPunct="1">
+              <a:defRPr sz="1800" kern="1200">
+                <a:solidFill>
+                  <a:schemeClr val="tx1"/>
+                </a:solidFill>
+                <a:latin typeface="+mn-lt"/>
+                <a:ea typeface="+mn-ea"/>
+                <a:cs typeface="+mn-cs"/>
+              </a:defRPr>
+            </a:lvl3pPr>
+            <a:lvl4pPr marL="1371600" algn="l" defTabSz="914400" rtl="0" eaLnBrk="1" latinLnBrk="0" hangingPunct="1">
+              <a:defRPr sz="1800" kern="1200">
+                <a:solidFill>
+                  <a:schemeClr val="tx1"/>
+                </a:solidFill>
+                <a:latin typeface="+mn-lt"/>
+                <a:ea typeface="+mn-ea"/>
+                <a:cs typeface="+mn-cs"/>
+              </a:defRPr>
+            </a:lvl4pPr>
+            <a:lvl5pPr marL="1828800" algn="l" defTabSz="914400" rtl="0" eaLnBrk="1" latinLnBrk="0" hangingPunct="1">
+              <a:defRPr sz="1800" kern="1200">
+                <a:solidFill>
+                  <a:schemeClr val="tx1"/>
+                </a:solidFill>
+                <a:latin typeface="+mn-lt"/>
+                <a:ea typeface="+mn-ea"/>
+                <a:cs typeface="+mn-cs"/>
+              </a:defRPr>
+            </a:lvl5pPr>
+            <a:lvl6pPr marL="2286000" algn="l" defTabSz="914400" rtl="0" eaLnBrk="1" latinLnBrk="0" hangingPunct="1">
+              <a:defRPr sz="1800" kern="1200">
+                <a:solidFill>
+                  <a:schemeClr val="tx1"/>
+                </a:solidFill>
+                <a:latin typeface="+mn-lt"/>
+                <a:ea typeface="+mn-ea"/>
+                <a:cs typeface="+mn-cs"/>
+              </a:defRPr>
+            </a:lvl6pPr>
+            <a:lvl7pPr marL="2743200" algn="l" defTabSz="914400" rtl="0" eaLnBrk="1" latinLnBrk="0" hangingPunct="1">
+              <a:defRPr sz="1800" kern="1200">
+                <a:solidFill>
+                  <a:schemeClr val="tx1"/>
+                </a:solidFill>
+                <a:latin typeface="+mn-lt"/>
+                <a:ea typeface="+mn-ea"/>
+                <a:cs typeface="+mn-cs"/>
+              </a:defRPr>
+            </a:lvl7pPr>
+            <a:lvl8pPr marL="3200400" algn="l" defTabSz="914400" rtl="0" eaLnBrk="1" latinLnBrk="0" hangingPunct="1">
+              <a:defRPr sz="1800" kern="1200">
+                <a:solidFill>
+                  <a:schemeClr val="tx1"/>
+                </a:solidFill>
+                <a:latin typeface="+mn-lt"/>
+                <a:ea typeface="+mn-ea"/>
+                <a:cs typeface="+mn-cs"/>
+              </a:defRPr>
+            </a:lvl8pPr>
+            <a:lvl9pPr marL="3657600" algn="l" defTabSz="914400" rtl="0" eaLnBrk="1" latinLnBrk="0" hangingPunct="1">
+              <a:defRPr sz="1800" kern="1200">
+                <a:solidFill>
+                  <a:schemeClr val="tx1"/>
+                </a:solidFill>
+                <a:latin typeface="+mn-lt"/>
+                <a:ea typeface="+mn-ea"/>
+                <a:cs typeface="+mn-cs"/>
+              </a:defRPr>
+            </a:lvl9pPr>
+          </a:lstStyle>
+          <a:p>
+            <a:fld id="{D57F1E4F-1CFF-5643-939E-217C01CDF565}" type="slidenum">
+              <a:rPr lang="en-US" sz="1400" b="1" smtClean="0">
+                <a:latin typeface="D2Coding" panose="020B0609020101020101" pitchFamily="49" charset="-127"/>
+                <a:ea typeface="D2Coding" panose="020B0609020101020101" pitchFamily="49" charset="-127"/>
+              </a:rPr>
+              <a:pPr/>
+              <a:t>13</a:t>
+            </a:fld>
+            <a:endParaRPr lang="en-US" sz="1400" b="1" dirty="0">
+              <a:latin typeface="D2Coding" panose="020B0609020101020101" pitchFamily="49" charset="-127"/>
+              <a:ea typeface="D2Coding" panose="020B0609020101020101" pitchFamily="49" charset="-127"/>
+            </a:endParaRPr>
+          </a:p>
+        </p:txBody>
+      </p:sp>
+    </p:spTree>
+    <p:extLst>
+      <p:ext uri="{BB962C8B-B14F-4D97-AF65-F5344CB8AC3E}">
+        <p14:creationId xmlns:p14="http://schemas.microsoft.com/office/powerpoint/2010/main" val="4054057046"/>
+      </p:ext>
+    </p:extLst>
+  </p:cSld>
+  <p:clrMapOvr>
+    <a:masterClrMapping/>
+  </p:clrMapOvr>
+</p:sld>
+</file>
+
+<file path=ppt/slides/slide14.xml><?xml version="1.0" encoding="utf-8"?>
+<p:sld xmlns:a="http://schemas.openxmlformats.org/drawingml/2006/main" xmlns:r="http://schemas.openxmlformats.org/officeDocument/2006/relationships" xmlns:p="http://schemas.openxmlformats.org/presentationml/2006/main">
+  <p:cSld>
+    <p:spTree>
+      <p:nvGrpSpPr>
+        <p:cNvPr id="1" name="">
+          <a:extLst>
+            <a:ext uri="{FF2B5EF4-FFF2-40B4-BE49-F238E27FC236}">
+              <a16:creationId xmlns:a16="http://schemas.microsoft.com/office/drawing/2014/main" id="{2D443848-41FB-B2FA-DB4F-AE56CD1EA666}"/>
+            </a:ext>
+          </a:extLst>
+        </p:cNvPr>
+        <p:cNvGrpSpPr/>
+        <p:nvPr/>
+      </p:nvGrpSpPr>
+      <p:grpSpPr>
+        <a:xfrm>
+          <a:off x="0" y="0"/>
+          <a:ext cx="0" cy="0"/>
+          <a:chOff x="0" y="0"/>
+          <a:chExt cx="0" cy="0"/>
+        </a:xfrm>
+      </p:grpSpPr>
+      <p:sp>
+        <p:nvSpPr>
+          <p:cNvPr id="3" name="제목 1">
+            <a:extLst>
+              <a:ext uri="{FF2B5EF4-FFF2-40B4-BE49-F238E27FC236}">
+                <a16:creationId xmlns:a16="http://schemas.microsoft.com/office/drawing/2014/main" id="{E602D0EB-6A55-FA1B-B2EE-054A46BA142F}"/>
+              </a:ext>
+            </a:extLst>
+          </p:cNvPr>
+          <p:cNvSpPr txBox="1">
+            <a:spLocks/>
+          </p:cNvSpPr>
+          <p:nvPr/>
+        </p:nvSpPr>
+        <p:spPr>
+          <a:xfrm>
+            <a:off x="475645" y="481983"/>
+            <a:ext cx="7439630" cy="766439"/>
+          </a:xfrm>
+          <a:prstGeom prst="rect">
+            <a:avLst/>
+          </a:prstGeom>
+        </p:spPr>
+        <p:txBody>
+          <a:bodyPr vert="horz" lIns="91440" tIns="45720" rIns="91440" bIns="45720" rtlCol="0" anchor="ctr">
+            <a:normAutofit fontScale="92500"/>
+          </a:bodyPr>
+          <a:lstStyle>
+            <a:lvl1pPr algn="ctr" defTabSz="914400" rtl="0" eaLnBrk="1" latinLnBrk="1" hangingPunct="1">
+              <a:lnSpc>
+                <a:spcPct val="90000"/>
+              </a:lnSpc>
+              <a:spcBef>
+                <a:spcPct val="0"/>
+              </a:spcBef>
+              <a:buNone/>
+              <a:defRPr sz="3200" kern="1200" cap="all" baseline="0">
+                <a:solidFill>
+                  <a:schemeClr val="tx1"/>
+                </a:solidFill>
+                <a:effectLst/>
+                <a:latin typeface="Batang" panose="02030600000101010101" pitchFamily="18" charset="-127"/>
+                <a:ea typeface="Batang" panose="02030600000101010101" pitchFamily="18" charset="-127"/>
+                <a:cs typeface="+mj-cs"/>
+              </a:defRPr>
+            </a:lvl1pPr>
+          </a:lstStyle>
+          <a:p>
+            <a:pPr algn="l"/>
+            <a:r>
+              <a:rPr lang="en-US" altLang="ko-KR" sz="2800" b="1" cap="none" dirty="0">
+                <a:latin typeface="Lora" pitchFamily="2" charset="0"/>
+              </a:rPr>
+              <a:t>Training a multi-input, multi-output model</a:t>
+            </a:r>
+          </a:p>
+        </p:txBody>
+      </p:sp>
+      <p:sp>
+        <p:nvSpPr>
+          <p:cNvPr id="6" name="TextBox 5">
+            <a:extLst>
+              <a:ext uri="{FF2B5EF4-FFF2-40B4-BE49-F238E27FC236}">
+                <a16:creationId xmlns:a16="http://schemas.microsoft.com/office/drawing/2014/main" id="{396B4481-8D4F-A3CE-82F5-89819ED56103}"/>
+              </a:ext>
+            </a:extLst>
+          </p:cNvPr>
+          <p:cNvSpPr txBox="1"/>
+          <p:nvPr/>
+        </p:nvSpPr>
+        <p:spPr>
+          <a:xfrm>
+            <a:off x="8554720" y="822776"/>
+            <a:ext cx="3048000" cy="369332"/>
+          </a:xfrm>
+          <a:prstGeom prst="rect">
+            <a:avLst/>
+          </a:prstGeom>
+          <a:noFill/>
+        </p:spPr>
+        <p:txBody>
+          <a:bodyPr wrap="square">
+            <a:spAutoFit/>
+          </a:bodyPr>
+          <a:lstStyle/>
+          <a:p>
+            <a:pPr algn="r"/>
+            <a:r>
+              <a:rPr lang="en-US" altLang="ko-KR" b="1" dirty="0">
+                <a:latin typeface="Lora" pitchFamily="2" charset="0"/>
+              </a:rPr>
+              <a:t>Functional API</a:t>
+            </a:r>
+          </a:p>
+        </p:txBody>
+      </p:sp>
+      <p:sp>
+        <p:nvSpPr>
+          <p:cNvPr id="7" name="TextBox 6">
+            <a:extLst>
+              <a:ext uri="{FF2B5EF4-FFF2-40B4-BE49-F238E27FC236}">
+                <a16:creationId xmlns:a16="http://schemas.microsoft.com/office/drawing/2014/main" id="{A7168822-2A75-796C-DF8D-0CAF0D3CD4C9}"/>
+              </a:ext>
+            </a:extLst>
+          </p:cNvPr>
+          <p:cNvSpPr txBox="1"/>
+          <p:nvPr/>
+        </p:nvSpPr>
+        <p:spPr>
+          <a:xfrm>
+            <a:off x="600075" y="1248422"/>
+            <a:ext cx="11002645" cy="1028808"/>
+          </a:xfrm>
+          <a:prstGeom prst="rect">
+            <a:avLst/>
+          </a:prstGeom>
+          <a:solidFill>
+            <a:srgbClr val="76E3FF"/>
+          </a:solidFill>
+        </p:spPr>
+        <p:txBody>
+          <a:bodyPr wrap="square">
+            <a:spAutoFit/>
+          </a:bodyPr>
+          <a:lstStyle/>
+          <a:p>
+            <a:pPr>
+              <a:lnSpc>
+                <a:spcPct val="150000"/>
+              </a:lnSpc>
+              <a:buNone/>
+            </a:pPr>
+            <a:r>
+              <a:rPr lang="en-US" altLang="ko-KR" sz="1400" b="0" dirty="0">
+                <a:effectLst/>
+                <a:latin typeface="D2Coding" panose="020B0609020101020101" pitchFamily="49" charset="-127"/>
+                <a:ea typeface="D2Coding" panose="020B0609020101020101" pitchFamily="49" charset="-127"/>
+              </a:rPr>
+              <a:t>features = </a:t>
+            </a:r>
+            <a:r>
+              <a:rPr lang="en-US" altLang="ko-KR" sz="1400" b="0" dirty="0" err="1">
+                <a:effectLst/>
+                <a:latin typeface="D2Coding" panose="020B0609020101020101" pitchFamily="49" charset="-127"/>
+                <a:ea typeface="D2Coding" panose="020B0609020101020101" pitchFamily="49" charset="-127"/>
+              </a:rPr>
+              <a:t>model.layers</a:t>
+            </a:r>
+            <a:r>
+              <a:rPr lang="en-US" altLang="ko-KR" sz="1400" b="0" dirty="0">
+                <a:effectLst/>
+                <a:latin typeface="D2Coding" panose="020B0609020101020101" pitchFamily="49" charset="-127"/>
+                <a:ea typeface="D2Coding" panose="020B0609020101020101" pitchFamily="49" charset="-127"/>
+              </a:rPr>
+              <a:t>[4].output</a:t>
+            </a:r>
+          </a:p>
+          <a:p>
+            <a:pPr>
+              <a:lnSpc>
+                <a:spcPct val="150000"/>
+              </a:lnSpc>
+              <a:buNone/>
+            </a:pPr>
+            <a:r>
+              <a:rPr lang="en-US" altLang="ko-KR" sz="1400" b="0" dirty="0">
+                <a:effectLst/>
+                <a:latin typeface="D2Coding" panose="020B0609020101020101" pitchFamily="49" charset="-127"/>
+                <a:ea typeface="D2Coding" panose="020B0609020101020101" pitchFamily="49" charset="-127"/>
+              </a:rPr>
+              <a:t>difficulty = </a:t>
+            </a:r>
+            <a:r>
+              <a:rPr lang="en-US" altLang="ko-KR" sz="1400" b="0" dirty="0" err="1">
+                <a:effectLst/>
+                <a:latin typeface="D2Coding" panose="020B0609020101020101" pitchFamily="49" charset="-127"/>
+                <a:ea typeface="D2Coding" panose="020B0609020101020101" pitchFamily="49" charset="-127"/>
+              </a:rPr>
+              <a:t>layers.Dense</a:t>
+            </a:r>
+            <a:r>
+              <a:rPr lang="en-US" altLang="ko-KR" sz="1400" b="0" dirty="0">
+                <a:effectLst/>
+                <a:latin typeface="D2Coding" panose="020B0609020101020101" pitchFamily="49" charset="-127"/>
+                <a:ea typeface="D2Coding" panose="020B0609020101020101" pitchFamily="49" charset="-127"/>
+              </a:rPr>
+              <a:t>(3, activation="</a:t>
+            </a:r>
+            <a:r>
+              <a:rPr lang="en-US" altLang="ko-KR" sz="1400" b="0" dirty="0" err="1">
+                <a:effectLst/>
+                <a:latin typeface="D2Coding" panose="020B0609020101020101" pitchFamily="49" charset="-127"/>
+                <a:ea typeface="D2Coding" panose="020B0609020101020101" pitchFamily="49" charset="-127"/>
+              </a:rPr>
+              <a:t>softmax</a:t>
+            </a:r>
+            <a:r>
+              <a:rPr lang="en-US" altLang="ko-KR" sz="1400" b="0" dirty="0">
+                <a:effectLst/>
+                <a:latin typeface="D2Coding" panose="020B0609020101020101" pitchFamily="49" charset="-127"/>
+                <a:ea typeface="D2Coding" panose="020B0609020101020101" pitchFamily="49" charset="-127"/>
+              </a:rPr>
+              <a:t>", name="difficulty")(features)</a:t>
+            </a:r>
+          </a:p>
+          <a:p>
+            <a:pPr>
+              <a:lnSpc>
+                <a:spcPct val="150000"/>
+              </a:lnSpc>
+              <a:buNone/>
+            </a:pPr>
+            <a:r>
+              <a:rPr lang="en-US" altLang="ko-KR" sz="1400" b="0" dirty="0" err="1">
+                <a:effectLst/>
+                <a:latin typeface="D2Coding" panose="020B0609020101020101" pitchFamily="49" charset="-127"/>
+                <a:ea typeface="D2Coding" panose="020B0609020101020101" pitchFamily="49" charset="-127"/>
+              </a:rPr>
+              <a:t>new_model</a:t>
+            </a:r>
+            <a:r>
+              <a:rPr lang="en-US" altLang="ko-KR" sz="1400" b="0" dirty="0">
+                <a:effectLst/>
+                <a:latin typeface="D2Coding" panose="020B0609020101020101" pitchFamily="49" charset="-127"/>
+                <a:ea typeface="D2Coding" panose="020B0609020101020101" pitchFamily="49" charset="-127"/>
+              </a:rPr>
+              <a:t> = </a:t>
+            </a:r>
+            <a:r>
+              <a:rPr lang="en-US" altLang="ko-KR" sz="1400" b="0" dirty="0" err="1">
+                <a:effectLst/>
+                <a:latin typeface="D2Coding" panose="020B0609020101020101" pitchFamily="49" charset="-127"/>
+                <a:ea typeface="D2Coding" panose="020B0609020101020101" pitchFamily="49" charset="-127"/>
+              </a:rPr>
+              <a:t>keras.Model</a:t>
+            </a:r>
+            <a:r>
+              <a:rPr lang="en-US" altLang="ko-KR" sz="1400" b="0" dirty="0">
+                <a:effectLst/>
+                <a:latin typeface="D2Coding" panose="020B0609020101020101" pitchFamily="49" charset="-127"/>
+                <a:ea typeface="D2Coding" panose="020B0609020101020101" pitchFamily="49" charset="-127"/>
+              </a:rPr>
+              <a:t>(inputs=[title, </a:t>
+            </a:r>
+            <a:r>
+              <a:rPr lang="en-US" altLang="ko-KR" sz="1400" b="0" dirty="0" err="1">
+                <a:effectLst/>
+                <a:latin typeface="D2Coding" panose="020B0609020101020101" pitchFamily="49" charset="-127"/>
+                <a:ea typeface="D2Coding" panose="020B0609020101020101" pitchFamily="49" charset="-127"/>
+              </a:rPr>
+              <a:t>text_body</a:t>
+            </a:r>
+            <a:r>
+              <a:rPr lang="en-US" altLang="ko-KR" sz="1400" b="0" dirty="0">
+                <a:effectLst/>
+                <a:latin typeface="D2Coding" panose="020B0609020101020101" pitchFamily="49" charset="-127"/>
+                <a:ea typeface="D2Coding" panose="020B0609020101020101" pitchFamily="49" charset="-127"/>
+              </a:rPr>
+              <a:t>, tags], outputs=[priority, department, difficulty])</a:t>
+            </a:r>
+          </a:p>
+        </p:txBody>
+      </p:sp>
+      <p:pic>
+        <p:nvPicPr>
+          <p:cNvPr id="1026" name="Picture 2">
+            <a:extLst>
+              <a:ext uri="{FF2B5EF4-FFF2-40B4-BE49-F238E27FC236}">
+                <a16:creationId xmlns:a16="http://schemas.microsoft.com/office/drawing/2014/main" id="{4CC78783-FF25-70C9-81CA-B9E7AE61973C}"/>
+              </a:ext>
+            </a:extLst>
+          </p:cNvPr>
+          <p:cNvPicPr>
+            <a:picLocks noChangeAspect="1" noChangeArrowheads="1"/>
+          </p:cNvPicPr>
+          <p:nvPr/>
+        </p:nvPicPr>
+        <p:blipFill>
+          <a:blip r:embed="rId2">
+            <a:extLst>
+              <a:ext uri="{28A0092B-C50C-407E-A947-70E740481C1C}">
+                <a14:useLocalDpi xmlns:a14="http://schemas.microsoft.com/office/drawing/2010/main" val="0"/>
+              </a:ext>
+            </a:extLst>
+          </a:blip>
+          <a:srcRect/>
+          <a:stretch>
+            <a:fillRect/>
+          </a:stretch>
+        </p:blipFill>
+        <p:spPr bwMode="auto">
+          <a:xfrm>
+            <a:off x="1598611" y="2683690"/>
+            <a:ext cx="8763000" cy="3692327"/>
+          </a:xfrm>
+          <a:prstGeom prst="rect">
+            <a:avLst/>
+          </a:prstGeom>
+          <a:noFill/>
+          <a:extLst>
+            <a:ext uri="{909E8E84-426E-40DD-AFC4-6F175D3DCCD1}">
+              <a14:hiddenFill xmlns:a14="http://schemas.microsoft.com/office/drawing/2010/main">
+                <a:solidFill>
+                  <a:srgbClr val="FFFFFF"/>
+                </a:solidFill>
+              </a14:hiddenFill>
+            </a:ext>
+          </a:extLst>
+        </p:spPr>
+      </p:pic>
+      <p:sp>
+        <p:nvSpPr>
+          <p:cNvPr id="2" name="슬라이드 번호 개체 틀 3">
+            <a:extLst>
+              <a:ext uri="{FF2B5EF4-FFF2-40B4-BE49-F238E27FC236}">
+                <a16:creationId xmlns:a16="http://schemas.microsoft.com/office/drawing/2014/main" id="{54688DD8-3CEB-5CBC-FCE9-68BD2773C086}"/>
+              </a:ext>
+            </a:extLst>
+          </p:cNvPr>
+          <p:cNvSpPr txBox="1">
+            <a:spLocks/>
+          </p:cNvSpPr>
+          <p:nvPr/>
+        </p:nvSpPr>
+        <p:spPr>
+          <a:xfrm>
+            <a:off x="11142661" y="299420"/>
+            <a:ext cx="753545" cy="365125"/>
+          </a:xfrm>
+          <a:prstGeom prst="rect">
+            <a:avLst/>
+          </a:prstGeom>
+        </p:spPr>
+        <p:txBody>
+          <a:bodyPr vert="horz" lIns="91440" tIns="45720" rIns="91440" bIns="45720" rtlCol="0" anchor="ctr"/>
+          <a:lstStyle>
+            <a:defPPr rtl="0">
+              <a:defRPr lang="ko-KR"/>
+            </a:defPPr>
+            <a:lvl1pPr marL="0" algn="r" defTabSz="914400" rtl="0" eaLnBrk="1" latinLnBrk="0" hangingPunct="1">
+              <a:defRPr sz="1200" kern="1200" baseline="0">
+                <a:solidFill>
+                  <a:schemeClr val="tx1">
+                    <a:lumMod val="65000"/>
+                    <a:lumOff val="35000"/>
+                  </a:schemeClr>
+                </a:solidFill>
+                <a:latin typeface="맑은 고딕" panose="020B0503020000020004" pitchFamily="50" charset="-127"/>
+                <a:ea typeface="맑은 고딕" panose="020B0503020000020004" pitchFamily="50" charset="-127"/>
+                <a:cs typeface="+mn-cs"/>
+              </a:defRPr>
+            </a:lvl1pPr>
+            <a:lvl2pPr marL="457200" algn="l" defTabSz="914400" rtl="0" eaLnBrk="1" latinLnBrk="0" hangingPunct="1">
+              <a:defRPr sz="1800" kern="1200">
+                <a:solidFill>
+                  <a:schemeClr val="tx1"/>
+                </a:solidFill>
+                <a:latin typeface="+mn-lt"/>
+                <a:ea typeface="+mn-ea"/>
+                <a:cs typeface="+mn-cs"/>
+              </a:defRPr>
+            </a:lvl2pPr>
+            <a:lvl3pPr marL="914400" algn="l" defTabSz="914400" rtl="0" eaLnBrk="1" latinLnBrk="0" hangingPunct="1">
+              <a:defRPr sz="1800" kern="1200">
+                <a:solidFill>
+                  <a:schemeClr val="tx1"/>
+                </a:solidFill>
+                <a:latin typeface="+mn-lt"/>
+                <a:ea typeface="+mn-ea"/>
+                <a:cs typeface="+mn-cs"/>
+              </a:defRPr>
+            </a:lvl3pPr>
+            <a:lvl4pPr marL="1371600" algn="l" defTabSz="914400" rtl="0" eaLnBrk="1" latinLnBrk="0" hangingPunct="1">
+              <a:defRPr sz="1800" kern="1200">
+                <a:solidFill>
+                  <a:schemeClr val="tx1"/>
+                </a:solidFill>
+                <a:latin typeface="+mn-lt"/>
+                <a:ea typeface="+mn-ea"/>
+                <a:cs typeface="+mn-cs"/>
+              </a:defRPr>
+            </a:lvl4pPr>
+            <a:lvl5pPr marL="1828800" algn="l" defTabSz="914400" rtl="0" eaLnBrk="1" latinLnBrk="0" hangingPunct="1">
+              <a:defRPr sz="1800" kern="1200">
+                <a:solidFill>
+                  <a:schemeClr val="tx1"/>
+                </a:solidFill>
+                <a:latin typeface="+mn-lt"/>
+                <a:ea typeface="+mn-ea"/>
+                <a:cs typeface="+mn-cs"/>
+              </a:defRPr>
+            </a:lvl5pPr>
+            <a:lvl6pPr marL="2286000" algn="l" defTabSz="914400" rtl="0" eaLnBrk="1" latinLnBrk="0" hangingPunct="1">
+              <a:defRPr sz="1800" kern="1200">
+                <a:solidFill>
+                  <a:schemeClr val="tx1"/>
+                </a:solidFill>
+                <a:latin typeface="+mn-lt"/>
+                <a:ea typeface="+mn-ea"/>
+                <a:cs typeface="+mn-cs"/>
+              </a:defRPr>
+            </a:lvl6pPr>
+            <a:lvl7pPr marL="2743200" algn="l" defTabSz="914400" rtl="0" eaLnBrk="1" latinLnBrk="0" hangingPunct="1">
+              <a:defRPr sz="1800" kern="1200">
+                <a:solidFill>
+                  <a:schemeClr val="tx1"/>
+                </a:solidFill>
+                <a:latin typeface="+mn-lt"/>
+                <a:ea typeface="+mn-ea"/>
+                <a:cs typeface="+mn-cs"/>
+              </a:defRPr>
+            </a:lvl7pPr>
+            <a:lvl8pPr marL="3200400" algn="l" defTabSz="914400" rtl="0" eaLnBrk="1" latinLnBrk="0" hangingPunct="1">
+              <a:defRPr sz="1800" kern="1200">
+                <a:solidFill>
+                  <a:schemeClr val="tx1"/>
+                </a:solidFill>
+                <a:latin typeface="+mn-lt"/>
+                <a:ea typeface="+mn-ea"/>
+                <a:cs typeface="+mn-cs"/>
+              </a:defRPr>
+            </a:lvl8pPr>
+            <a:lvl9pPr marL="3657600" algn="l" defTabSz="914400" rtl="0" eaLnBrk="1" latinLnBrk="0" hangingPunct="1">
+              <a:defRPr sz="1800" kern="1200">
+                <a:solidFill>
+                  <a:schemeClr val="tx1"/>
+                </a:solidFill>
+                <a:latin typeface="+mn-lt"/>
+                <a:ea typeface="+mn-ea"/>
+                <a:cs typeface="+mn-cs"/>
+              </a:defRPr>
+            </a:lvl9pPr>
+          </a:lstStyle>
+          <a:p>
+            <a:fld id="{D57F1E4F-1CFF-5643-939E-217C01CDF565}" type="slidenum">
+              <a:rPr lang="en-US" sz="1400" b="1" smtClean="0">
+                <a:latin typeface="D2Coding" panose="020B0609020101020101" pitchFamily="49" charset="-127"/>
+                <a:ea typeface="D2Coding" panose="020B0609020101020101" pitchFamily="49" charset="-127"/>
+              </a:rPr>
+              <a:pPr/>
+              <a:t>14</a:t>
+            </a:fld>
+            <a:endParaRPr lang="en-US" sz="1400" b="1" dirty="0">
+              <a:latin typeface="D2Coding" panose="020B0609020101020101" pitchFamily="49" charset="-127"/>
+              <a:ea typeface="D2Coding" panose="020B0609020101020101" pitchFamily="49" charset="-127"/>
+            </a:endParaRPr>
+          </a:p>
+        </p:txBody>
+      </p:sp>
+    </p:spTree>
+    <p:extLst>
+      <p:ext uri="{BB962C8B-B14F-4D97-AF65-F5344CB8AC3E}">
+        <p14:creationId xmlns:p14="http://schemas.microsoft.com/office/powerpoint/2010/main" val="2264211179"/>
+      </p:ext>
+    </p:extLst>
+  </p:cSld>
+  <p:clrMapOvr>
+    <a:masterClrMapping/>
+  </p:clrMapOvr>
+</p:sld>
+</file>
+
+<file path=ppt/slides/slide15.xml><?xml version="1.0" encoding="utf-8"?>
+<p:sld xmlns:a="http://schemas.openxmlformats.org/drawingml/2006/main" xmlns:r="http://schemas.openxmlformats.org/officeDocument/2006/relationships" xmlns:p="http://schemas.openxmlformats.org/presentationml/2006/main">
+  <p:cSld>
+    <p:spTree>
+      <p:nvGrpSpPr>
+        <p:cNvPr id="1" name="">
+          <a:extLst>
+            <a:ext uri="{FF2B5EF4-FFF2-40B4-BE49-F238E27FC236}">
+              <a16:creationId xmlns:a16="http://schemas.microsoft.com/office/drawing/2014/main" id="{99409AF4-13C2-BB8C-7BFC-6CD15F491502}"/>
+            </a:ext>
+          </a:extLst>
+        </p:cNvPr>
+        <p:cNvGrpSpPr/>
+        <p:nvPr/>
+      </p:nvGrpSpPr>
+      <p:grpSpPr>
+        <a:xfrm>
+          <a:off x="0" y="0"/>
+          <a:ext cx="0" cy="0"/>
+          <a:chOff x="0" y="0"/>
+          <a:chExt cx="0" cy="0"/>
+        </a:xfrm>
+      </p:grpSpPr>
       <p:sp>
         <p:nvSpPr>
           <p:cNvPr id="3" name="제목 1">
@@ -4064,6 +7684,145 @@
           </a:p>
         </p:txBody>
       </p:sp>
+      <p:sp>
+        <p:nvSpPr>
+          <p:cNvPr id="2" name="슬라이드 번호 개체 틀 3">
+            <a:extLst>
+              <a:ext uri="{FF2B5EF4-FFF2-40B4-BE49-F238E27FC236}">
+                <a16:creationId xmlns:a16="http://schemas.microsoft.com/office/drawing/2014/main" id="{63D47316-A6D7-E367-D897-FB35162058B5}"/>
+              </a:ext>
+            </a:extLst>
+          </p:cNvPr>
+          <p:cNvSpPr txBox="1">
+            <a:spLocks/>
+          </p:cNvSpPr>
+          <p:nvPr/>
+        </p:nvSpPr>
+        <p:spPr>
+          <a:xfrm>
+            <a:off x="11142661" y="299420"/>
+            <a:ext cx="753545" cy="365125"/>
+          </a:xfrm>
+          <a:prstGeom prst="rect">
+            <a:avLst/>
+          </a:prstGeom>
+        </p:spPr>
+        <p:txBody>
+          <a:bodyPr vert="horz" lIns="91440" tIns="45720" rIns="91440" bIns="45720" rtlCol="0" anchor="ctr"/>
+          <a:lstStyle>
+            <a:defPPr rtl="0">
+              <a:defRPr lang="ko-KR"/>
+            </a:defPPr>
+            <a:lvl1pPr marL="0" algn="r" defTabSz="914400" rtl="0" eaLnBrk="1" latinLnBrk="0" hangingPunct="1">
+              <a:defRPr sz="1200" kern="1200" baseline="0">
+                <a:solidFill>
+                  <a:schemeClr val="tx1">
+                    <a:lumMod val="65000"/>
+                    <a:lumOff val="35000"/>
+                  </a:schemeClr>
+                </a:solidFill>
+                <a:latin typeface="맑은 고딕" panose="020B0503020000020004" pitchFamily="50" charset="-127"/>
+                <a:ea typeface="맑은 고딕" panose="020B0503020000020004" pitchFamily="50" charset="-127"/>
+                <a:cs typeface="+mn-cs"/>
+              </a:defRPr>
+            </a:lvl1pPr>
+            <a:lvl2pPr marL="457200" algn="l" defTabSz="914400" rtl="0" eaLnBrk="1" latinLnBrk="0" hangingPunct="1">
+              <a:defRPr sz="1800" kern="1200">
+                <a:solidFill>
+                  <a:schemeClr val="tx1"/>
+                </a:solidFill>
+                <a:latin typeface="+mn-lt"/>
+                <a:ea typeface="+mn-ea"/>
+                <a:cs typeface="+mn-cs"/>
+              </a:defRPr>
+            </a:lvl2pPr>
+            <a:lvl3pPr marL="914400" algn="l" defTabSz="914400" rtl="0" eaLnBrk="1" latinLnBrk="0" hangingPunct="1">
+              <a:defRPr sz="1800" kern="1200">
+                <a:solidFill>
+                  <a:schemeClr val="tx1"/>
+                </a:solidFill>
+                <a:latin typeface="+mn-lt"/>
+                <a:ea typeface="+mn-ea"/>
+                <a:cs typeface="+mn-cs"/>
+              </a:defRPr>
+            </a:lvl3pPr>
+            <a:lvl4pPr marL="1371600" algn="l" defTabSz="914400" rtl="0" eaLnBrk="1" latinLnBrk="0" hangingPunct="1">
+              <a:defRPr sz="1800" kern="1200">
+                <a:solidFill>
+                  <a:schemeClr val="tx1"/>
+                </a:solidFill>
+                <a:latin typeface="+mn-lt"/>
+                <a:ea typeface="+mn-ea"/>
+                <a:cs typeface="+mn-cs"/>
+              </a:defRPr>
+            </a:lvl4pPr>
+            <a:lvl5pPr marL="1828800" algn="l" defTabSz="914400" rtl="0" eaLnBrk="1" latinLnBrk="0" hangingPunct="1">
+              <a:defRPr sz="1800" kern="1200">
+                <a:solidFill>
+                  <a:schemeClr val="tx1"/>
+                </a:solidFill>
+                <a:latin typeface="+mn-lt"/>
+                <a:ea typeface="+mn-ea"/>
+                <a:cs typeface="+mn-cs"/>
+              </a:defRPr>
+            </a:lvl5pPr>
+            <a:lvl6pPr marL="2286000" algn="l" defTabSz="914400" rtl="0" eaLnBrk="1" latinLnBrk="0" hangingPunct="1">
+              <a:defRPr sz="1800" kern="1200">
+                <a:solidFill>
+                  <a:schemeClr val="tx1"/>
+                </a:solidFill>
+                <a:latin typeface="+mn-lt"/>
+                <a:ea typeface="+mn-ea"/>
+                <a:cs typeface="+mn-cs"/>
+              </a:defRPr>
+            </a:lvl6pPr>
+            <a:lvl7pPr marL="2743200" algn="l" defTabSz="914400" rtl="0" eaLnBrk="1" latinLnBrk="0" hangingPunct="1">
+              <a:defRPr sz="1800" kern="1200">
+                <a:solidFill>
+                  <a:schemeClr val="tx1"/>
+                </a:solidFill>
+                <a:latin typeface="+mn-lt"/>
+                <a:ea typeface="+mn-ea"/>
+                <a:cs typeface="+mn-cs"/>
+              </a:defRPr>
+            </a:lvl7pPr>
+            <a:lvl8pPr marL="3200400" algn="l" defTabSz="914400" rtl="0" eaLnBrk="1" latinLnBrk="0" hangingPunct="1">
+              <a:defRPr sz="1800" kern="1200">
+                <a:solidFill>
+                  <a:schemeClr val="tx1"/>
+                </a:solidFill>
+                <a:latin typeface="+mn-lt"/>
+                <a:ea typeface="+mn-ea"/>
+                <a:cs typeface="+mn-cs"/>
+              </a:defRPr>
+            </a:lvl8pPr>
+            <a:lvl9pPr marL="3657600" algn="l" defTabSz="914400" rtl="0" eaLnBrk="1" latinLnBrk="0" hangingPunct="1">
+              <a:defRPr sz="1800" kern="1200">
+                <a:solidFill>
+                  <a:schemeClr val="tx1"/>
+                </a:solidFill>
+                <a:latin typeface="+mn-lt"/>
+                <a:ea typeface="+mn-ea"/>
+                <a:cs typeface="+mn-cs"/>
+              </a:defRPr>
+            </a:lvl9pPr>
+          </a:lstStyle>
+          <a:p>
+            <a:fld id="{D57F1E4F-1CFF-5643-939E-217C01CDF565}" type="slidenum">
+              <a:rPr lang="en-US" sz="1400" b="1" smtClean="0">
+                <a:latin typeface="D2Coding" panose="020B0609020101020101" pitchFamily="49" charset="-127"/>
+                <a:ea typeface="D2Coding" panose="020B0609020101020101" pitchFamily="49" charset="-127"/>
+              </a:rPr>
+              <a:pPr/>
+              <a:t>15</a:t>
+            </a:fld>
+            <a:endParaRPr lang="en-US" sz="1400" b="1" dirty="0">
+              <a:latin typeface="D2Coding" panose="020B0609020101020101" pitchFamily="49" charset="-127"/>
+              <a:ea typeface="D2Coding" panose="020B0609020101020101" pitchFamily="49" charset="-127"/>
+            </a:endParaRPr>
+          </a:p>
+        </p:txBody>
+      </p:sp>
     </p:spTree>
     <p:extLst>
       <p:ext uri="{BB962C8B-B14F-4D97-AF65-F5344CB8AC3E}">
@@ -4077,7 +7836,7 @@
 </p:sld>
 </file>
 
-<file path=ppt/slides/slide11.xml><?xml version="1.0" encoding="utf-8"?>
+<file path=ppt/slides/slide16.xml><?xml version="1.0" encoding="utf-8"?>
 <p:sld xmlns:a="http://schemas.openxmlformats.org/drawingml/2006/main" xmlns:r="http://schemas.openxmlformats.org/officeDocument/2006/relationships" xmlns:p="http://schemas.openxmlformats.org/presentationml/2006/main">
   <p:cSld>
     <p:spTree>
@@ -4118,7 +7877,7 @@
         </p:nvSpPr>
         <p:spPr>
           <a:xfrm>
-            <a:off x="10514011" y="6036261"/>
+            <a:off x="11142661" y="299420"/>
             <a:ext cx="753545" cy="365125"/>
           </a:xfrm>
         </p:spPr>
@@ -4127,11 +7886,17 @@
           <a:lstStyle/>
           <a:p>
             <a:fld id="{D57F1E4F-1CFF-5643-939E-217C01CDF565}" type="slidenum">
-              <a:rPr lang="en-US" smtClean="0"/>
+              <a:rPr lang="en-US" sz="1400" b="1" smtClean="0">
+                <a:latin typeface="D2Coding" panose="020B0609020101020101" pitchFamily="49" charset="-127"/>
+                <a:ea typeface="D2Coding" panose="020B0609020101020101" pitchFamily="49" charset="-127"/>
+              </a:rPr>
               <a:pPr/>
-              <a:t>11</a:t>
+              <a:t>16</a:t>
             </a:fld>
-            <a:endParaRPr lang="en-US" dirty="0"/>
+            <a:endParaRPr lang="en-US" sz="1400" b="1" dirty="0">
+              <a:latin typeface="D2Coding" panose="020B0609020101020101" pitchFamily="49" charset="-127"/>
+              <a:ea typeface="D2Coding" panose="020B0609020101020101" pitchFamily="49" charset="-127"/>
+            </a:endParaRPr>
           </a:p>
         </p:txBody>
       </p:sp>
@@ -4693,41 +8458,6 @@
       </p:grpSpPr>
       <p:sp>
         <p:nvSpPr>
-          <p:cNvPr id="4" name="슬라이드 번호 개체 틀 3">
-            <a:extLst>
-              <a:ext uri="{FF2B5EF4-FFF2-40B4-BE49-F238E27FC236}">
-                <a16:creationId xmlns:a16="http://schemas.microsoft.com/office/drawing/2014/main" id="{38A443F0-E912-1108-17B8-FEAA865DAB12}"/>
-              </a:ext>
-            </a:extLst>
-          </p:cNvPr>
-          <p:cNvSpPr>
-            <a:spLocks noGrp="1"/>
-          </p:cNvSpPr>
-          <p:nvPr>
-            <p:ph type="sldNum" sz="quarter" idx="12"/>
-          </p:nvPr>
-        </p:nvSpPr>
-        <p:spPr>
-          <a:xfrm>
-            <a:off x="10514011" y="6036261"/>
-            <a:ext cx="753545" cy="365125"/>
-          </a:xfrm>
-        </p:spPr>
-        <p:txBody>
-          <a:bodyPr/>
-          <a:lstStyle/>
-          <a:p>
-            <a:fld id="{D57F1E4F-1CFF-5643-939E-217C01CDF565}" type="slidenum">
-              <a:rPr lang="en-US" smtClean="0"/>
-              <a:pPr/>
-              <a:t>3</a:t>
-            </a:fld>
-            <a:endParaRPr lang="en-US" dirty="0"/>
-          </a:p>
-        </p:txBody>
-      </p:sp>
-      <p:sp>
-        <p:nvSpPr>
           <p:cNvPr id="3" name="제목 1">
             <a:extLst>
               <a:ext uri="{FF2B5EF4-FFF2-40B4-BE49-F238E27FC236}">
@@ -5007,6 +8737,145 @@
               <a:t>를 사용하는 것처럼 모든 세부 사항을 완전히 제어할 수 있음</a:t>
             </a:r>
             <a:endParaRPr lang="en-US" altLang="ko-KR" dirty="0">
+              <a:latin typeface="D2Coding" panose="020B0609020101020101" pitchFamily="49" charset="-127"/>
+              <a:ea typeface="D2Coding" panose="020B0609020101020101" pitchFamily="49" charset="-127"/>
+            </a:endParaRPr>
+          </a:p>
+        </p:txBody>
+      </p:sp>
+      <p:sp>
+        <p:nvSpPr>
+          <p:cNvPr id="2" name="슬라이드 번호 개체 틀 3">
+            <a:extLst>
+              <a:ext uri="{FF2B5EF4-FFF2-40B4-BE49-F238E27FC236}">
+                <a16:creationId xmlns:a16="http://schemas.microsoft.com/office/drawing/2014/main" id="{0D024024-306F-1387-FA7C-5186E77EAB93}"/>
+              </a:ext>
+            </a:extLst>
+          </p:cNvPr>
+          <p:cNvSpPr txBox="1">
+            <a:spLocks/>
+          </p:cNvSpPr>
+          <p:nvPr/>
+        </p:nvSpPr>
+        <p:spPr>
+          <a:xfrm>
+            <a:off x="11142661" y="299420"/>
+            <a:ext cx="753545" cy="365125"/>
+          </a:xfrm>
+          <a:prstGeom prst="rect">
+            <a:avLst/>
+          </a:prstGeom>
+        </p:spPr>
+        <p:txBody>
+          <a:bodyPr vert="horz" lIns="91440" tIns="45720" rIns="91440" bIns="45720" rtlCol="0" anchor="ctr"/>
+          <a:lstStyle>
+            <a:defPPr rtl="0">
+              <a:defRPr lang="ko-KR"/>
+            </a:defPPr>
+            <a:lvl1pPr marL="0" algn="r" defTabSz="914400" rtl="0" eaLnBrk="1" latinLnBrk="0" hangingPunct="1">
+              <a:defRPr sz="1200" kern="1200" baseline="0">
+                <a:solidFill>
+                  <a:schemeClr val="tx1">
+                    <a:lumMod val="65000"/>
+                    <a:lumOff val="35000"/>
+                  </a:schemeClr>
+                </a:solidFill>
+                <a:latin typeface="맑은 고딕" panose="020B0503020000020004" pitchFamily="50" charset="-127"/>
+                <a:ea typeface="맑은 고딕" panose="020B0503020000020004" pitchFamily="50" charset="-127"/>
+                <a:cs typeface="+mn-cs"/>
+              </a:defRPr>
+            </a:lvl1pPr>
+            <a:lvl2pPr marL="457200" algn="l" defTabSz="914400" rtl="0" eaLnBrk="1" latinLnBrk="0" hangingPunct="1">
+              <a:defRPr sz="1800" kern="1200">
+                <a:solidFill>
+                  <a:schemeClr val="tx1"/>
+                </a:solidFill>
+                <a:latin typeface="+mn-lt"/>
+                <a:ea typeface="+mn-ea"/>
+                <a:cs typeface="+mn-cs"/>
+              </a:defRPr>
+            </a:lvl2pPr>
+            <a:lvl3pPr marL="914400" algn="l" defTabSz="914400" rtl="0" eaLnBrk="1" latinLnBrk="0" hangingPunct="1">
+              <a:defRPr sz="1800" kern="1200">
+                <a:solidFill>
+                  <a:schemeClr val="tx1"/>
+                </a:solidFill>
+                <a:latin typeface="+mn-lt"/>
+                <a:ea typeface="+mn-ea"/>
+                <a:cs typeface="+mn-cs"/>
+              </a:defRPr>
+            </a:lvl3pPr>
+            <a:lvl4pPr marL="1371600" algn="l" defTabSz="914400" rtl="0" eaLnBrk="1" latinLnBrk="0" hangingPunct="1">
+              <a:defRPr sz="1800" kern="1200">
+                <a:solidFill>
+                  <a:schemeClr val="tx1"/>
+                </a:solidFill>
+                <a:latin typeface="+mn-lt"/>
+                <a:ea typeface="+mn-ea"/>
+                <a:cs typeface="+mn-cs"/>
+              </a:defRPr>
+            </a:lvl4pPr>
+            <a:lvl5pPr marL="1828800" algn="l" defTabSz="914400" rtl="0" eaLnBrk="1" latinLnBrk="0" hangingPunct="1">
+              <a:defRPr sz="1800" kern="1200">
+                <a:solidFill>
+                  <a:schemeClr val="tx1"/>
+                </a:solidFill>
+                <a:latin typeface="+mn-lt"/>
+                <a:ea typeface="+mn-ea"/>
+                <a:cs typeface="+mn-cs"/>
+              </a:defRPr>
+            </a:lvl5pPr>
+            <a:lvl6pPr marL="2286000" algn="l" defTabSz="914400" rtl="0" eaLnBrk="1" latinLnBrk="0" hangingPunct="1">
+              <a:defRPr sz="1800" kern="1200">
+                <a:solidFill>
+                  <a:schemeClr val="tx1"/>
+                </a:solidFill>
+                <a:latin typeface="+mn-lt"/>
+                <a:ea typeface="+mn-ea"/>
+                <a:cs typeface="+mn-cs"/>
+              </a:defRPr>
+            </a:lvl6pPr>
+            <a:lvl7pPr marL="2743200" algn="l" defTabSz="914400" rtl="0" eaLnBrk="1" latinLnBrk="0" hangingPunct="1">
+              <a:defRPr sz="1800" kern="1200">
+                <a:solidFill>
+                  <a:schemeClr val="tx1"/>
+                </a:solidFill>
+                <a:latin typeface="+mn-lt"/>
+                <a:ea typeface="+mn-ea"/>
+                <a:cs typeface="+mn-cs"/>
+              </a:defRPr>
+            </a:lvl7pPr>
+            <a:lvl8pPr marL="3200400" algn="l" defTabSz="914400" rtl="0" eaLnBrk="1" latinLnBrk="0" hangingPunct="1">
+              <a:defRPr sz="1800" kern="1200">
+                <a:solidFill>
+                  <a:schemeClr val="tx1"/>
+                </a:solidFill>
+                <a:latin typeface="+mn-lt"/>
+                <a:ea typeface="+mn-ea"/>
+                <a:cs typeface="+mn-cs"/>
+              </a:defRPr>
+            </a:lvl8pPr>
+            <a:lvl9pPr marL="3657600" algn="l" defTabSz="914400" rtl="0" eaLnBrk="1" latinLnBrk="0" hangingPunct="1">
+              <a:defRPr sz="1800" kern="1200">
+                <a:solidFill>
+                  <a:schemeClr val="tx1"/>
+                </a:solidFill>
+                <a:latin typeface="+mn-lt"/>
+                <a:ea typeface="+mn-ea"/>
+                <a:cs typeface="+mn-cs"/>
+              </a:defRPr>
+            </a:lvl9pPr>
+          </a:lstStyle>
+          <a:p>
+            <a:fld id="{D57F1E4F-1CFF-5643-939E-217C01CDF565}" type="slidenum">
+              <a:rPr lang="en-US" sz="1400" b="1" smtClean="0">
+                <a:latin typeface="D2Coding" panose="020B0609020101020101" pitchFamily="49" charset="-127"/>
+                <a:ea typeface="D2Coding" panose="020B0609020101020101" pitchFamily="49" charset="-127"/>
+              </a:rPr>
+              <a:pPr/>
+              <a:t>3</a:t>
+            </a:fld>
+            <a:endParaRPr lang="en-US" sz="1400" b="1" dirty="0">
               <a:latin typeface="D2Coding" panose="020B0609020101020101" pitchFamily="49" charset="-127"/>
               <a:ea typeface="D2Coding" panose="020B0609020101020101" pitchFamily="49" charset="-127"/>
             </a:endParaRPr>
@@ -5051,41 +8920,6 @@
       </p:grpSpPr>
       <p:sp>
         <p:nvSpPr>
-          <p:cNvPr id="4" name="슬라이드 번호 개체 틀 3">
-            <a:extLst>
-              <a:ext uri="{FF2B5EF4-FFF2-40B4-BE49-F238E27FC236}">
-                <a16:creationId xmlns:a16="http://schemas.microsoft.com/office/drawing/2014/main" id="{401C3C76-D244-006B-FA7B-A81F44A469BB}"/>
-              </a:ext>
-            </a:extLst>
-          </p:cNvPr>
-          <p:cNvSpPr>
-            <a:spLocks noGrp="1"/>
-          </p:cNvSpPr>
-          <p:nvPr>
-            <p:ph type="sldNum" sz="quarter" idx="12"/>
-          </p:nvPr>
-        </p:nvSpPr>
-        <p:spPr>
-          <a:xfrm>
-            <a:off x="10514011" y="6036261"/>
-            <a:ext cx="753545" cy="365125"/>
-          </a:xfrm>
-        </p:spPr>
-        <p:txBody>
-          <a:bodyPr/>
-          <a:lstStyle/>
-          <a:p>
-            <a:fld id="{D57F1E4F-1CFF-5643-939E-217C01CDF565}" type="slidenum">
-              <a:rPr lang="en-US" smtClean="0"/>
-              <a:pPr/>
-              <a:t>4</a:t>
-            </a:fld>
-            <a:endParaRPr lang="en-US" dirty="0"/>
-          </a:p>
-        </p:txBody>
-      </p:sp>
-      <p:sp>
-        <p:nvSpPr>
           <p:cNvPr id="3" name="제목 1">
             <a:extLst>
               <a:ext uri="{FF2B5EF4-FFF2-40B4-BE49-F238E27FC236}">
@@ -5169,7 +9003,7 @@
           <p:nvPr>
             <p:extLst>
               <p:ext uri="{D42A27DB-BD31-4B8C-83A1-F6EECF244321}">
-                <p14:modId xmlns:p14="http://schemas.microsoft.com/office/powerpoint/2010/main" val="3023850307"/>
+                <p14:modId xmlns:p14="http://schemas.microsoft.com/office/powerpoint/2010/main" val="4151441594"/>
               </p:ext>
             </p:extLst>
           </p:nvPr>
@@ -5260,6 +9094,12 @@
                       <a:headEnd type="none" w="med" len="med"/>
                       <a:tailEnd type="none" w="med" len="med"/>
                     </a:lnT>
+                    <a:solidFill>
+                      <a:schemeClr val="accent5">
+                        <a:lumMod val="20000"/>
+                        <a:lumOff val="80000"/>
+                      </a:schemeClr>
+                    </a:solidFill>
                   </a:tcPr>
                 </a:tc>
                 <a:tc>
@@ -5324,6 +9164,12 @@
                       <a:headEnd type="none" w="med" len="med"/>
                       <a:tailEnd type="none" w="med" len="med"/>
                     </a:lnT>
+                    <a:solidFill>
+                      <a:schemeClr val="accent5">
+                        <a:lumMod val="20000"/>
+                        <a:lumOff val="80000"/>
+                      </a:schemeClr>
+                    </a:solidFill>
                   </a:tcPr>
                 </a:tc>
                 <a:tc>
@@ -5335,14 +9181,14 @@
                         <a:buNone/>
                       </a:pPr>
                       <a:r>
-                        <a:rPr lang="ko-KR" altLang="en-US" sz="1400" u="none" strike="noStrike">
+                        <a:rPr lang="ko-KR" altLang="en-US" sz="1400" u="none" strike="noStrike" dirty="0">
                           <a:effectLst/>
                           <a:latin typeface="D2Coding" panose="020B0609020101020101" pitchFamily="49" charset="-127"/>
                           <a:ea typeface="D2Coding" panose="020B0609020101020101" pitchFamily="49" charset="-127"/>
                         </a:rPr>
                         <a:t>주요 특징 및 장점</a:t>
                       </a:r>
-                      <a:endParaRPr lang="ko-KR" altLang="en-US" sz="1400" b="1" i="0" u="none" strike="noStrike">
+                      <a:endParaRPr lang="ko-KR" altLang="en-US" sz="1400" b="1" i="0" u="none" strike="noStrike" dirty="0">
                         <a:solidFill>
                           <a:srgbClr val="FFFFFF"/>
                         </a:solidFill>
@@ -5362,6 +9208,12 @@
                       <a:headEnd type="none" w="med" len="med"/>
                       <a:tailEnd type="none" w="med" len="med"/>
                     </a:lnT>
+                    <a:solidFill>
+                      <a:schemeClr val="accent5">
+                        <a:lumMod val="20000"/>
+                        <a:lumOff val="80000"/>
+                      </a:schemeClr>
+                    </a:solidFill>
                   </a:tcPr>
                 </a:tc>
                 <a:tc>
@@ -5373,14 +9225,22 @@
                         <a:buNone/>
                       </a:pPr>
                       <a:r>
-                        <a:rPr lang="ko-KR" altLang="en-US" sz="1400" u="none" strike="noStrike">
+                        <a:rPr lang="ko-KR" altLang="en-US" sz="1400" u="none" strike="noStrike" dirty="0">
                           <a:effectLst/>
                           <a:latin typeface="D2Coding" panose="020B0609020101020101" pitchFamily="49" charset="-127"/>
                           <a:ea typeface="D2Coding" panose="020B0609020101020101" pitchFamily="49" charset="-127"/>
                         </a:rPr>
-                        <a:t>적합한 유스케이스</a:t>
+                        <a:t>적합한 </a:t>
                       </a:r>
-                      <a:endParaRPr lang="ko-KR" altLang="en-US" sz="1400" b="1" i="0" u="none" strike="noStrike">
+                      <a:r>
+                        <a:rPr lang="ko-KR" altLang="en-US" sz="1400" u="none" strike="noStrike" dirty="0" err="1">
+                          <a:effectLst/>
+                          <a:latin typeface="D2Coding" panose="020B0609020101020101" pitchFamily="49" charset="-127"/>
+                          <a:ea typeface="D2Coding" panose="020B0609020101020101" pitchFamily="49" charset="-127"/>
+                        </a:rPr>
+                        <a:t>유스케이스</a:t>
+                      </a:r>
+                      <a:endParaRPr lang="ko-KR" altLang="en-US" sz="1400" b="1" i="0" u="none" strike="noStrike" dirty="0">
                         <a:solidFill>
                           <a:srgbClr val="FFFFFF"/>
                         </a:solidFill>
@@ -5409,6 +9269,12 @@
                       <a:headEnd type="none" w="med" len="med"/>
                       <a:tailEnd type="none" w="med" len="med"/>
                     </a:lnT>
+                    <a:solidFill>
+                      <a:schemeClr val="accent5">
+                        <a:lumMod val="20000"/>
+                        <a:lumOff val="80000"/>
+                      </a:schemeClr>
+                    </a:solidFill>
                   </a:tcPr>
                 </a:tc>
                 <a:extLst>
@@ -6633,7 +10499,7 @@
         <p:spPr>
           <a:xfrm>
             <a:off x="548639" y="1243876"/>
-            <a:ext cx="10972149" cy="880819"/>
+            <a:ext cx="10972149" cy="793166"/>
           </a:xfrm>
           <a:prstGeom prst="rect">
             <a:avLst/>
@@ -6652,111 +10518,250 @@
               </a:lnSpc>
             </a:pPr>
             <a:r>
-              <a:rPr lang="ko-KR" altLang="en-US" dirty="0">
-                <a:latin typeface="D2Coding" panose="020B0609020101020101" pitchFamily="49" charset="-127"/>
-                <a:ea typeface="D2Coding" panose="020B0609020101020101" pitchFamily="49" charset="-127"/>
-              </a:rPr>
-              <a:t>레고 성</a:t>
-            </a:r>
-            <a:r>
-              <a:rPr lang="en-US" altLang="ko-KR" dirty="0">
+              <a:rPr lang="en-US" altLang="ko-KR" sz="1600" dirty="0">
+                <a:latin typeface="D2Coding" panose="020B0609020101020101" pitchFamily="49" charset="-127"/>
+                <a:ea typeface="D2Coding" panose="020B0609020101020101" pitchFamily="49" charset="-127"/>
+              </a:rPr>
+              <a:t>Lego</a:t>
+            </a:r>
+            <a:r>
+              <a:rPr lang="ko-KR" altLang="en-US" sz="1600" dirty="0">
+                <a:latin typeface="D2Coding" panose="020B0609020101020101" pitchFamily="49" charset="-127"/>
+                <a:ea typeface="D2Coding" panose="020B0609020101020101" pitchFamily="49" charset="-127"/>
+              </a:rPr>
+              <a:t>로 성</a:t>
+            </a:r>
+            <a:r>
+              <a:rPr lang="en-US" altLang="ko-KR" sz="1600" dirty="0">
                 <a:latin typeface="D2Coding" panose="020B0609020101020101" pitchFamily="49" charset="-127"/>
                 <a:ea typeface="D2Coding" panose="020B0609020101020101" pitchFamily="49" charset="-127"/>
               </a:rPr>
               <a:t>(Functional API)</a:t>
             </a:r>
             <a:r>
-              <a:rPr lang="ko-KR" altLang="en-US" dirty="0">
+              <a:rPr lang="ko-KR" altLang="en-US" sz="1600" dirty="0">
                 <a:latin typeface="D2Coding" panose="020B0609020101020101" pitchFamily="49" charset="-127"/>
                 <a:ea typeface="D2Coding" panose="020B0609020101020101" pitchFamily="49" charset="-127"/>
               </a:rPr>
               <a:t>을 짓다가 내가 원하는 특수한 </a:t>
             </a:r>
             <a:r>
-              <a:rPr lang="ko-KR" altLang="en-US" dirty="0" err="1">
+              <a:rPr lang="ko-KR" altLang="en-US" sz="1600" dirty="0" err="1">
                 <a:latin typeface="D2Coding" panose="020B0609020101020101" pitchFamily="49" charset="-127"/>
                 <a:ea typeface="D2Coding" panose="020B0609020101020101" pitchFamily="49" charset="-127"/>
               </a:rPr>
               <a:t>브릭이</a:t>
             </a:r>
             <a:r>
-              <a:rPr lang="ko-KR" altLang="en-US" dirty="0">
+              <a:rPr lang="ko-KR" altLang="en-US" sz="1600" dirty="0">
                 <a:latin typeface="D2Coding" panose="020B0609020101020101" pitchFamily="49" charset="-127"/>
                 <a:ea typeface="D2Coding" panose="020B0609020101020101" pitchFamily="49" charset="-127"/>
               </a:rPr>
               <a:t> 없으면 그 </a:t>
             </a:r>
             <a:r>
-              <a:rPr lang="ko-KR" altLang="en-US" dirty="0" err="1">
+              <a:rPr lang="ko-KR" altLang="en-US" sz="1600" dirty="0" err="1">
                 <a:latin typeface="D2Coding" panose="020B0609020101020101" pitchFamily="49" charset="-127"/>
                 <a:ea typeface="D2Coding" panose="020B0609020101020101" pitchFamily="49" charset="-127"/>
               </a:rPr>
               <a:t>브릭만</a:t>
             </a:r>
             <a:r>
-              <a:rPr lang="ko-KR" altLang="en-US" dirty="0">
+              <a:rPr lang="ko-KR" altLang="en-US" sz="1600" dirty="0">
                 <a:latin typeface="D2Coding" panose="020B0609020101020101" pitchFamily="49" charset="-127"/>
                 <a:ea typeface="D2Coding" panose="020B0609020101020101" pitchFamily="49" charset="-127"/>
               </a:rPr>
               <a:t> </a:t>
             </a:r>
             <a:r>
-              <a:rPr lang="en-US" altLang="ko-KR" dirty="0">
+              <a:rPr lang="en-US" altLang="ko-KR" sz="1600" dirty="0">
                 <a:latin typeface="D2Coding" panose="020B0609020101020101" pitchFamily="49" charset="-127"/>
                 <a:ea typeface="D2Coding" panose="020B0609020101020101" pitchFamily="49" charset="-127"/>
               </a:rPr>
               <a:t>3D </a:t>
             </a:r>
             <a:r>
-              <a:rPr lang="ko-KR" altLang="en-US" dirty="0">
+              <a:rPr lang="ko-KR" altLang="en-US" sz="1600" dirty="0">
                 <a:latin typeface="D2Coding" panose="020B0609020101020101" pitchFamily="49" charset="-127"/>
                 <a:ea typeface="D2Coding" panose="020B0609020101020101" pitchFamily="49" charset="-127"/>
               </a:rPr>
               <a:t>프린터로 직접 찍어서</a:t>
             </a:r>
             <a:r>
-              <a:rPr lang="en-US" altLang="ko-KR" dirty="0">
+              <a:rPr lang="en-US" altLang="ko-KR" sz="1600" dirty="0">
                 <a:latin typeface="D2Coding" panose="020B0609020101020101" pitchFamily="49" charset="-127"/>
                 <a:ea typeface="D2Coding" panose="020B0609020101020101" pitchFamily="49" charset="-127"/>
               </a:rPr>
               <a:t>(Subclassing API)</a:t>
             </a:r>
             <a:r>
-              <a:rPr lang="ko-KR" altLang="en-US" dirty="0">
-                <a:latin typeface="D2Coding" panose="020B0609020101020101" pitchFamily="49" charset="-127"/>
-                <a:ea typeface="D2Coding" panose="020B0609020101020101" pitchFamily="49" charset="-127"/>
-              </a:rPr>
-              <a:t>성벽 중간에 조립해도 완벽하게 </a:t>
-            </a:r>
-            <a:r>
-              <a:rPr lang="ko-KR" altLang="en-US" dirty="0" err="1">
-                <a:latin typeface="D2Coding" panose="020B0609020101020101" pitchFamily="49" charset="-127"/>
-                <a:ea typeface="D2Coding" panose="020B0609020101020101" pitchFamily="49" charset="-127"/>
-              </a:rPr>
-              <a:t>맞아떨어</a:t>
-            </a:r>
-            <a:r>
-              <a:rPr lang="en-US" altLang="ko-KR" dirty="0">
+              <a:rPr lang="ko-KR" altLang="en-US" sz="1600" dirty="0">
+                <a:latin typeface="D2Coding" panose="020B0609020101020101" pitchFamily="49" charset="-127"/>
+                <a:ea typeface="D2Coding" panose="020B0609020101020101" pitchFamily="49" charset="-127"/>
+              </a:rPr>
+              <a:t>성벽 중간에 조립해도 완벽하게 맞아 떨어</a:t>
+            </a:r>
+            <a:r>
+              <a:rPr lang="en-US" altLang="ko-KR" sz="1600" dirty="0">
                 <a:latin typeface="D2Coding" panose="020B0609020101020101" pitchFamily="49" charset="-127"/>
                 <a:ea typeface="D2Coding" panose="020B0609020101020101" pitchFamily="49" charset="-127"/>
               </a:rPr>
               <a:t> </a:t>
             </a:r>
             <a:r>
-              <a:rPr lang="ko-KR" altLang="en-US" dirty="0">
+              <a:rPr lang="ko-KR" altLang="en-US" sz="1600" dirty="0">
                 <a:latin typeface="D2Coding" panose="020B0609020101020101" pitchFamily="49" charset="-127"/>
                 <a:ea typeface="D2Coding" panose="020B0609020101020101" pitchFamily="49" charset="-127"/>
               </a:rPr>
               <a:t>지도록 모델 유형을 </a:t>
             </a:r>
             <a:r>
-              <a:rPr lang="en-US" altLang="ko-KR" dirty="0">
+              <a:rPr lang="en-US" altLang="ko-KR" sz="1600" dirty="0">
                 <a:latin typeface="D2Coding" panose="020B0609020101020101" pitchFamily="49" charset="-127"/>
                 <a:ea typeface="D2Coding" panose="020B0609020101020101" pitchFamily="49" charset="-127"/>
               </a:rPr>
               <a:t>Mix &amp; Match</a:t>
             </a:r>
-            <a:endParaRPr lang="ko-KR" altLang="en-US" dirty="0">
+            <a:endParaRPr lang="ko-KR" altLang="en-US" sz="1600" dirty="0">
+              <a:latin typeface="D2Coding" panose="020B0609020101020101" pitchFamily="49" charset="-127"/>
+              <a:ea typeface="D2Coding" panose="020B0609020101020101" pitchFamily="49" charset="-127"/>
+            </a:endParaRPr>
+          </a:p>
+        </p:txBody>
+      </p:sp>
+      <p:sp>
+        <p:nvSpPr>
+          <p:cNvPr id="2" name="슬라이드 번호 개체 틀 3">
+            <a:extLst>
+              <a:ext uri="{FF2B5EF4-FFF2-40B4-BE49-F238E27FC236}">
+                <a16:creationId xmlns:a16="http://schemas.microsoft.com/office/drawing/2014/main" id="{69E4F0C5-7F4D-DD90-394D-46A8A350E5AB}"/>
+              </a:ext>
+            </a:extLst>
+          </p:cNvPr>
+          <p:cNvSpPr txBox="1">
+            <a:spLocks/>
+          </p:cNvSpPr>
+          <p:nvPr/>
+        </p:nvSpPr>
+        <p:spPr>
+          <a:xfrm>
+            <a:off x="11142661" y="299420"/>
+            <a:ext cx="753545" cy="365125"/>
+          </a:xfrm>
+          <a:prstGeom prst="rect">
+            <a:avLst/>
+          </a:prstGeom>
+        </p:spPr>
+        <p:txBody>
+          <a:bodyPr vert="horz" lIns="91440" tIns="45720" rIns="91440" bIns="45720" rtlCol="0" anchor="ctr"/>
+          <a:lstStyle>
+            <a:defPPr rtl="0">
+              <a:defRPr lang="ko-KR"/>
+            </a:defPPr>
+            <a:lvl1pPr marL="0" algn="r" defTabSz="914400" rtl="0" eaLnBrk="1" latinLnBrk="0" hangingPunct="1">
+              <a:defRPr sz="1200" kern="1200" baseline="0">
+                <a:solidFill>
+                  <a:schemeClr val="tx1">
+                    <a:lumMod val="65000"/>
+                    <a:lumOff val="35000"/>
+                  </a:schemeClr>
+                </a:solidFill>
+                <a:latin typeface="맑은 고딕" panose="020B0503020000020004" pitchFamily="50" charset="-127"/>
+                <a:ea typeface="맑은 고딕" panose="020B0503020000020004" pitchFamily="50" charset="-127"/>
+                <a:cs typeface="+mn-cs"/>
+              </a:defRPr>
+            </a:lvl1pPr>
+            <a:lvl2pPr marL="457200" algn="l" defTabSz="914400" rtl="0" eaLnBrk="1" latinLnBrk="0" hangingPunct="1">
+              <a:defRPr sz="1800" kern="1200">
+                <a:solidFill>
+                  <a:schemeClr val="tx1"/>
+                </a:solidFill>
+                <a:latin typeface="+mn-lt"/>
+                <a:ea typeface="+mn-ea"/>
+                <a:cs typeface="+mn-cs"/>
+              </a:defRPr>
+            </a:lvl2pPr>
+            <a:lvl3pPr marL="914400" algn="l" defTabSz="914400" rtl="0" eaLnBrk="1" latinLnBrk="0" hangingPunct="1">
+              <a:defRPr sz="1800" kern="1200">
+                <a:solidFill>
+                  <a:schemeClr val="tx1"/>
+                </a:solidFill>
+                <a:latin typeface="+mn-lt"/>
+                <a:ea typeface="+mn-ea"/>
+                <a:cs typeface="+mn-cs"/>
+              </a:defRPr>
+            </a:lvl3pPr>
+            <a:lvl4pPr marL="1371600" algn="l" defTabSz="914400" rtl="0" eaLnBrk="1" latinLnBrk="0" hangingPunct="1">
+              <a:defRPr sz="1800" kern="1200">
+                <a:solidFill>
+                  <a:schemeClr val="tx1"/>
+                </a:solidFill>
+                <a:latin typeface="+mn-lt"/>
+                <a:ea typeface="+mn-ea"/>
+                <a:cs typeface="+mn-cs"/>
+              </a:defRPr>
+            </a:lvl4pPr>
+            <a:lvl5pPr marL="1828800" algn="l" defTabSz="914400" rtl="0" eaLnBrk="1" latinLnBrk="0" hangingPunct="1">
+              <a:defRPr sz="1800" kern="1200">
+                <a:solidFill>
+                  <a:schemeClr val="tx1"/>
+                </a:solidFill>
+                <a:latin typeface="+mn-lt"/>
+                <a:ea typeface="+mn-ea"/>
+                <a:cs typeface="+mn-cs"/>
+              </a:defRPr>
+            </a:lvl5pPr>
+            <a:lvl6pPr marL="2286000" algn="l" defTabSz="914400" rtl="0" eaLnBrk="1" latinLnBrk="0" hangingPunct="1">
+              <a:defRPr sz="1800" kern="1200">
+                <a:solidFill>
+                  <a:schemeClr val="tx1"/>
+                </a:solidFill>
+                <a:latin typeface="+mn-lt"/>
+                <a:ea typeface="+mn-ea"/>
+                <a:cs typeface="+mn-cs"/>
+              </a:defRPr>
+            </a:lvl6pPr>
+            <a:lvl7pPr marL="2743200" algn="l" defTabSz="914400" rtl="0" eaLnBrk="1" latinLnBrk="0" hangingPunct="1">
+              <a:defRPr sz="1800" kern="1200">
+                <a:solidFill>
+                  <a:schemeClr val="tx1"/>
+                </a:solidFill>
+                <a:latin typeface="+mn-lt"/>
+                <a:ea typeface="+mn-ea"/>
+                <a:cs typeface="+mn-cs"/>
+              </a:defRPr>
+            </a:lvl7pPr>
+            <a:lvl8pPr marL="3200400" algn="l" defTabSz="914400" rtl="0" eaLnBrk="1" latinLnBrk="0" hangingPunct="1">
+              <a:defRPr sz="1800" kern="1200">
+                <a:solidFill>
+                  <a:schemeClr val="tx1"/>
+                </a:solidFill>
+                <a:latin typeface="+mn-lt"/>
+                <a:ea typeface="+mn-ea"/>
+                <a:cs typeface="+mn-cs"/>
+              </a:defRPr>
+            </a:lvl8pPr>
+            <a:lvl9pPr marL="3657600" algn="l" defTabSz="914400" rtl="0" eaLnBrk="1" latinLnBrk="0" hangingPunct="1">
+              <a:defRPr sz="1800" kern="1200">
+                <a:solidFill>
+                  <a:schemeClr val="tx1"/>
+                </a:solidFill>
+                <a:latin typeface="+mn-lt"/>
+                <a:ea typeface="+mn-ea"/>
+                <a:cs typeface="+mn-cs"/>
+              </a:defRPr>
+            </a:lvl9pPr>
+          </a:lstStyle>
+          <a:p>
+            <a:fld id="{D57F1E4F-1CFF-5643-939E-217C01CDF565}" type="slidenum">
+              <a:rPr lang="en-US" sz="1400" b="1" smtClean="0">
+                <a:latin typeface="D2Coding" panose="020B0609020101020101" pitchFamily="49" charset="-127"/>
+                <a:ea typeface="D2Coding" panose="020B0609020101020101" pitchFamily="49" charset="-127"/>
+              </a:rPr>
+              <a:pPr/>
+              <a:t>4</a:t>
+            </a:fld>
+            <a:endParaRPr lang="en-US" sz="1400" b="1" dirty="0">
               <a:latin typeface="D2Coding" panose="020B0609020101020101" pitchFamily="49" charset="-127"/>
               <a:ea typeface="D2Coding" panose="020B0609020101020101" pitchFamily="49" charset="-127"/>
             </a:endParaRPr>
@@ -6799,41 +10804,6 @@
           <a:chExt cx="0" cy="0"/>
         </a:xfrm>
       </p:grpSpPr>
-      <p:sp>
-        <p:nvSpPr>
-          <p:cNvPr id="4" name="슬라이드 번호 개체 틀 3">
-            <a:extLst>
-              <a:ext uri="{FF2B5EF4-FFF2-40B4-BE49-F238E27FC236}">
-                <a16:creationId xmlns:a16="http://schemas.microsoft.com/office/drawing/2014/main" id="{9D454672-1BAB-01F1-57C2-11F56A735D03}"/>
-              </a:ext>
-            </a:extLst>
-          </p:cNvPr>
-          <p:cNvSpPr>
-            <a:spLocks noGrp="1"/>
-          </p:cNvSpPr>
-          <p:nvPr>
-            <p:ph type="sldNum" sz="quarter" idx="12"/>
-          </p:nvPr>
-        </p:nvSpPr>
-        <p:spPr>
-          <a:xfrm>
-            <a:off x="10514011" y="6036261"/>
-            <a:ext cx="753545" cy="365125"/>
-          </a:xfrm>
-        </p:spPr>
-        <p:txBody>
-          <a:bodyPr/>
-          <a:lstStyle/>
-          <a:p>
-            <a:fld id="{D57F1E4F-1CFF-5643-939E-217C01CDF565}" type="slidenum">
-              <a:rPr lang="en-US" smtClean="0"/>
-              <a:pPr/>
-              <a:t>5</a:t>
-            </a:fld>
-            <a:endParaRPr lang="en-US" dirty="0"/>
-          </a:p>
-        </p:txBody>
-      </p:sp>
       <p:sp>
         <p:nvSpPr>
           <p:cNvPr id="3" name="제목 1">
@@ -7731,8 +11701,8 @@
           </a:p>
         </p:txBody>
       </p:sp>
-      <mc:AlternateContent xmlns:mc="http://schemas.openxmlformats.org/markup-compatibility/2006">
-        <mc:Choice xmlns:a14="http://schemas.microsoft.com/office/drawing/2010/main" Requires="a14">
+      <mc:AlternateContent xmlns:mc="http://schemas.openxmlformats.org/markup-compatibility/2006" xmlns:a14="http://schemas.microsoft.com/office/drawing/2010/main">
+        <mc:Choice Requires="a14">
           <p:sp>
             <p:nvSpPr>
               <p:cNvPr id="26" name="TextBox 25">
@@ -8064,7 +12034,7 @@
             </p:txBody>
           </p:sp>
         </mc:Choice>
-        <mc:Fallback>
+        <mc:Fallback xmlns="">
           <p:sp>
             <p:nvSpPr>
               <p:cNvPr id="26" name="TextBox 25">
@@ -8109,8 +12079,8 @@
           </p:sp>
         </mc:Fallback>
       </mc:AlternateContent>
-      <mc:AlternateContent xmlns:mc="http://schemas.openxmlformats.org/markup-compatibility/2006">
-        <mc:Choice xmlns:a14="http://schemas.microsoft.com/office/drawing/2010/main" Requires="a14">
+      <mc:AlternateContent xmlns:mc="http://schemas.openxmlformats.org/markup-compatibility/2006" xmlns:a14="http://schemas.microsoft.com/office/drawing/2010/main">
+        <mc:Choice Requires="a14">
           <p:sp>
             <p:nvSpPr>
               <p:cNvPr id="30" name="TextBox 29">
@@ -8255,7 +12225,7 @@
             </p:txBody>
           </p:sp>
         </mc:Choice>
-        <mc:Fallback>
+        <mc:Fallback xmlns="">
           <p:sp>
             <p:nvSpPr>
               <p:cNvPr id="30" name="TextBox 29">
@@ -8849,8 +12819,8 @@
           </a:fontRef>
         </p:style>
       </p:cxnSp>
-      <mc:AlternateContent xmlns:mc="http://schemas.openxmlformats.org/markup-compatibility/2006">
-        <mc:Choice xmlns:a14="http://schemas.microsoft.com/office/drawing/2010/main" Requires="a14">
+      <mc:AlternateContent xmlns:mc="http://schemas.openxmlformats.org/markup-compatibility/2006" xmlns:a14="http://schemas.microsoft.com/office/drawing/2010/main">
+        <mc:Choice Requires="a14">
           <p:sp>
             <p:nvSpPr>
               <p:cNvPr id="28" name="TextBox 27">
@@ -9191,7 +13161,7 @@
             </p:txBody>
           </p:sp>
         </mc:Choice>
-        <mc:Fallback>
+        <mc:Fallback xmlns="">
           <p:sp>
             <p:nvSpPr>
               <p:cNvPr id="28" name="TextBox 27">
@@ -9236,8 +13206,8 @@
           </p:sp>
         </mc:Fallback>
       </mc:AlternateContent>
-      <mc:AlternateContent xmlns:mc="http://schemas.openxmlformats.org/markup-compatibility/2006">
-        <mc:Choice xmlns:a14="http://schemas.microsoft.com/office/drawing/2010/main" Requires="a14">
+      <mc:AlternateContent xmlns:mc="http://schemas.openxmlformats.org/markup-compatibility/2006" xmlns:a14="http://schemas.microsoft.com/office/drawing/2010/main">
+        <mc:Choice Requires="a14">
           <p:sp>
             <p:nvSpPr>
               <p:cNvPr id="29" name="TextBox 28">
@@ -9388,7 +13358,7 @@
             </p:txBody>
           </p:sp>
         </mc:Choice>
-        <mc:Fallback>
+        <mc:Fallback xmlns="">
           <p:sp>
             <p:nvSpPr>
               <p:cNvPr id="29" name="TextBox 28">
@@ -9720,6 +13690,145 @@
           <a:p>
             <a:pPr algn="ctr"/>
             <a:endParaRPr lang="ko-KR" altLang="en-US"/>
+          </a:p>
+        </p:txBody>
+      </p:sp>
+      <p:sp>
+        <p:nvSpPr>
+          <p:cNvPr id="6" name="슬라이드 번호 개체 틀 3">
+            <a:extLst>
+              <a:ext uri="{FF2B5EF4-FFF2-40B4-BE49-F238E27FC236}">
+                <a16:creationId xmlns:a16="http://schemas.microsoft.com/office/drawing/2014/main" id="{EDA0F9F3-0D16-0E9C-A4A4-BDFD98C84E22}"/>
+              </a:ext>
+            </a:extLst>
+          </p:cNvPr>
+          <p:cNvSpPr txBox="1">
+            <a:spLocks/>
+          </p:cNvSpPr>
+          <p:nvPr/>
+        </p:nvSpPr>
+        <p:spPr>
+          <a:xfrm>
+            <a:off x="11142661" y="299420"/>
+            <a:ext cx="753545" cy="365125"/>
+          </a:xfrm>
+          <a:prstGeom prst="rect">
+            <a:avLst/>
+          </a:prstGeom>
+        </p:spPr>
+        <p:txBody>
+          <a:bodyPr vert="horz" lIns="91440" tIns="45720" rIns="91440" bIns="45720" rtlCol="0" anchor="ctr"/>
+          <a:lstStyle>
+            <a:defPPr rtl="0">
+              <a:defRPr lang="ko-KR"/>
+            </a:defPPr>
+            <a:lvl1pPr marL="0" algn="r" defTabSz="914400" rtl="0" eaLnBrk="1" latinLnBrk="0" hangingPunct="1">
+              <a:defRPr sz="1200" kern="1200" baseline="0">
+                <a:solidFill>
+                  <a:schemeClr val="tx1">
+                    <a:lumMod val="65000"/>
+                    <a:lumOff val="35000"/>
+                  </a:schemeClr>
+                </a:solidFill>
+                <a:latin typeface="맑은 고딕" panose="020B0503020000020004" pitchFamily="50" charset="-127"/>
+                <a:ea typeface="맑은 고딕" panose="020B0503020000020004" pitchFamily="50" charset="-127"/>
+                <a:cs typeface="+mn-cs"/>
+              </a:defRPr>
+            </a:lvl1pPr>
+            <a:lvl2pPr marL="457200" algn="l" defTabSz="914400" rtl="0" eaLnBrk="1" latinLnBrk="0" hangingPunct="1">
+              <a:defRPr sz="1800" kern="1200">
+                <a:solidFill>
+                  <a:schemeClr val="tx1"/>
+                </a:solidFill>
+                <a:latin typeface="+mn-lt"/>
+                <a:ea typeface="+mn-ea"/>
+                <a:cs typeface="+mn-cs"/>
+              </a:defRPr>
+            </a:lvl2pPr>
+            <a:lvl3pPr marL="914400" algn="l" defTabSz="914400" rtl="0" eaLnBrk="1" latinLnBrk="0" hangingPunct="1">
+              <a:defRPr sz="1800" kern="1200">
+                <a:solidFill>
+                  <a:schemeClr val="tx1"/>
+                </a:solidFill>
+                <a:latin typeface="+mn-lt"/>
+                <a:ea typeface="+mn-ea"/>
+                <a:cs typeface="+mn-cs"/>
+              </a:defRPr>
+            </a:lvl3pPr>
+            <a:lvl4pPr marL="1371600" algn="l" defTabSz="914400" rtl="0" eaLnBrk="1" latinLnBrk="0" hangingPunct="1">
+              <a:defRPr sz="1800" kern="1200">
+                <a:solidFill>
+                  <a:schemeClr val="tx1"/>
+                </a:solidFill>
+                <a:latin typeface="+mn-lt"/>
+                <a:ea typeface="+mn-ea"/>
+                <a:cs typeface="+mn-cs"/>
+              </a:defRPr>
+            </a:lvl4pPr>
+            <a:lvl5pPr marL="1828800" algn="l" defTabSz="914400" rtl="0" eaLnBrk="1" latinLnBrk="0" hangingPunct="1">
+              <a:defRPr sz="1800" kern="1200">
+                <a:solidFill>
+                  <a:schemeClr val="tx1"/>
+                </a:solidFill>
+                <a:latin typeface="+mn-lt"/>
+                <a:ea typeface="+mn-ea"/>
+                <a:cs typeface="+mn-cs"/>
+              </a:defRPr>
+            </a:lvl5pPr>
+            <a:lvl6pPr marL="2286000" algn="l" defTabSz="914400" rtl="0" eaLnBrk="1" latinLnBrk="0" hangingPunct="1">
+              <a:defRPr sz="1800" kern="1200">
+                <a:solidFill>
+                  <a:schemeClr val="tx1"/>
+                </a:solidFill>
+                <a:latin typeface="+mn-lt"/>
+                <a:ea typeface="+mn-ea"/>
+                <a:cs typeface="+mn-cs"/>
+              </a:defRPr>
+            </a:lvl6pPr>
+            <a:lvl7pPr marL="2743200" algn="l" defTabSz="914400" rtl="0" eaLnBrk="1" latinLnBrk="0" hangingPunct="1">
+              <a:defRPr sz="1800" kern="1200">
+                <a:solidFill>
+                  <a:schemeClr val="tx1"/>
+                </a:solidFill>
+                <a:latin typeface="+mn-lt"/>
+                <a:ea typeface="+mn-ea"/>
+                <a:cs typeface="+mn-cs"/>
+              </a:defRPr>
+            </a:lvl7pPr>
+            <a:lvl8pPr marL="3200400" algn="l" defTabSz="914400" rtl="0" eaLnBrk="1" latinLnBrk="0" hangingPunct="1">
+              <a:defRPr sz="1800" kern="1200">
+                <a:solidFill>
+                  <a:schemeClr val="tx1"/>
+                </a:solidFill>
+                <a:latin typeface="+mn-lt"/>
+                <a:ea typeface="+mn-ea"/>
+                <a:cs typeface="+mn-cs"/>
+              </a:defRPr>
+            </a:lvl8pPr>
+            <a:lvl9pPr marL="3657600" algn="l" defTabSz="914400" rtl="0" eaLnBrk="1" latinLnBrk="0" hangingPunct="1">
+              <a:defRPr sz="1800" kern="1200">
+                <a:solidFill>
+                  <a:schemeClr val="tx1"/>
+                </a:solidFill>
+                <a:latin typeface="+mn-lt"/>
+                <a:ea typeface="+mn-ea"/>
+                <a:cs typeface="+mn-cs"/>
+              </a:defRPr>
+            </a:lvl9pPr>
+          </a:lstStyle>
+          <a:p>
+            <a:fld id="{D57F1E4F-1CFF-5643-939E-217C01CDF565}" type="slidenum">
+              <a:rPr lang="en-US" sz="1400" b="1" smtClean="0">
+                <a:latin typeface="D2Coding" panose="020B0609020101020101" pitchFamily="49" charset="-127"/>
+                <a:ea typeface="D2Coding" panose="020B0609020101020101" pitchFamily="49" charset="-127"/>
+              </a:rPr>
+              <a:pPr/>
+              <a:t>5</a:t>
+            </a:fld>
+            <a:endParaRPr lang="en-US" sz="1400" b="1" dirty="0">
+              <a:latin typeface="D2Coding" panose="020B0609020101020101" pitchFamily="49" charset="-127"/>
+              <a:ea typeface="D2Coding" panose="020B0609020101020101" pitchFamily="49" charset="-127"/>
+            </a:endParaRPr>
           </a:p>
         </p:txBody>
       </p:sp>
@@ -9870,41 +13979,6 @@
       </p:grpSpPr>
       <p:sp>
         <p:nvSpPr>
-          <p:cNvPr id="4" name="슬라이드 번호 개체 틀 3">
-            <a:extLst>
-              <a:ext uri="{FF2B5EF4-FFF2-40B4-BE49-F238E27FC236}">
-                <a16:creationId xmlns:a16="http://schemas.microsoft.com/office/drawing/2014/main" id="{B9480BA0-D889-798C-9736-4E866309CB7C}"/>
-              </a:ext>
-            </a:extLst>
-          </p:cNvPr>
-          <p:cNvSpPr>
-            <a:spLocks noGrp="1"/>
-          </p:cNvSpPr>
-          <p:nvPr>
-            <p:ph type="sldNum" sz="quarter" idx="12"/>
-          </p:nvPr>
-        </p:nvSpPr>
-        <p:spPr>
-          <a:xfrm>
-            <a:off x="10514011" y="6036261"/>
-            <a:ext cx="753545" cy="365125"/>
-          </a:xfrm>
-        </p:spPr>
-        <p:txBody>
-          <a:bodyPr/>
-          <a:lstStyle/>
-          <a:p>
-            <a:fld id="{D57F1E4F-1CFF-5643-939E-217C01CDF565}" type="slidenum">
-              <a:rPr lang="en-US" smtClean="0"/>
-              <a:pPr/>
-              <a:t>6</a:t>
-            </a:fld>
-            <a:endParaRPr lang="en-US" dirty="0"/>
-          </a:p>
-        </p:txBody>
-      </p:sp>
-      <p:sp>
-        <p:nvSpPr>
           <p:cNvPr id="3" name="제목 1">
             <a:extLst>
               <a:ext uri="{FF2B5EF4-FFF2-40B4-BE49-F238E27FC236}">
@@ -10424,6 +14498,145 @@
               </a:rPr>
               <a:t>Functional API</a:t>
             </a:r>
+          </a:p>
+        </p:txBody>
+      </p:sp>
+      <p:sp>
+        <p:nvSpPr>
+          <p:cNvPr id="2" name="슬라이드 번호 개체 틀 3">
+            <a:extLst>
+              <a:ext uri="{FF2B5EF4-FFF2-40B4-BE49-F238E27FC236}">
+                <a16:creationId xmlns:a16="http://schemas.microsoft.com/office/drawing/2014/main" id="{25BD72B7-611F-453B-BB81-DAAB2B6ECF2B}"/>
+              </a:ext>
+            </a:extLst>
+          </p:cNvPr>
+          <p:cNvSpPr txBox="1">
+            <a:spLocks/>
+          </p:cNvSpPr>
+          <p:nvPr/>
+        </p:nvSpPr>
+        <p:spPr>
+          <a:xfrm>
+            <a:off x="11142661" y="299420"/>
+            <a:ext cx="753545" cy="365125"/>
+          </a:xfrm>
+          <a:prstGeom prst="rect">
+            <a:avLst/>
+          </a:prstGeom>
+        </p:spPr>
+        <p:txBody>
+          <a:bodyPr vert="horz" lIns="91440" tIns="45720" rIns="91440" bIns="45720" rtlCol="0" anchor="ctr"/>
+          <a:lstStyle>
+            <a:defPPr rtl="0">
+              <a:defRPr lang="ko-KR"/>
+            </a:defPPr>
+            <a:lvl1pPr marL="0" algn="r" defTabSz="914400" rtl="0" eaLnBrk="1" latinLnBrk="0" hangingPunct="1">
+              <a:defRPr sz="1200" kern="1200" baseline="0">
+                <a:solidFill>
+                  <a:schemeClr val="tx1">
+                    <a:lumMod val="65000"/>
+                    <a:lumOff val="35000"/>
+                  </a:schemeClr>
+                </a:solidFill>
+                <a:latin typeface="맑은 고딕" panose="020B0503020000020004" pitchFamily="50" charset="-127"/>
+                <a:ea typeface="맑은 고딕" panose="020B0503020000020004" pitchFamily="50" charset="-127"/>
+                <a:cs typeface="+mn-cs"/>
+              </a:defRPr>
+            </a:lvl1pPr>
+            <a:lvl2pPr marL="457200" algn="l" defTabSz="914400" rtl="0" eaLnBrk="1" latinLnBrk="0" hangingPunct="1">
+              <a:defRPr sz="1800" kern="1200">
+                <a:solidFill>
+                  <a:schemeClr val="tx1"/>
+                </a:solidFill>
+                <a:latin typeface="+mn-lt"/>
+                <a:ea typeface="+mn-ea"/>
+                <a:cs typeface="+mn-cs"/>
+              </a:defRPr>
+            </a:lvl2pPr>
+            <a:lvl3pPr marL="914400" algn="l" defTabSz="914400" rtl="0" eaLnBrk="1" latinLnBrk="0" hangingPunct="1">
+              <a:defRPr sz="1800" kern="1200">
+                <a:solidFill>
+                  <a:schemeClr val="tx1"/>
+                </a:solidFill>
+                <a:latin typeface="+mn-lt"/>
+                <a:ea typeface="+mn-ea"/>
+                <a:cs typeface="+mn-cs"/>
+              </a:defRPr>
+            </a:lvl3pPr>
+            <a:lvl4pPr marL="1371600" algn="l" defTabSz="914400" rtl="0" eaLnBrk="1" latinLnBrk="0" hangingPunct="1">
+              <a:defRPr sz="1800" kern="1200">
+                <a:solidFill>
+                  <a:schemeClr val="tx1"/>
+                </a:solidFill>
+                <a:latin typeface="+mn-lt"/>
+                <a:ea typeface="+mn-ea"/>
+                <a:cs typeface="+mn-cs"/>
+              </a:defRPr>
+            </a:lvl4pPr>
+            <a:lvl5pPr marL="1828800" algn="l" defTabSz="914400" rtl="0" eaLnBrk="1" latinLnBrk="0" hangingPunct="1">
+              <a:defRPr sz="1800" kern="1200">
+                <a:solidFill>
+                  <a:schemeClr val="tx1"/>
+                </a:solidFill>
+                <a:latin typeface="+mn-lt"/>
+                <a:ea typeface="+mn-ea"/>
+                <a:cs typeface="+mn-cs"/>
+              </a:defRPr>
+            </a:lvl5pPr>
+            <a:lvl6pPr marL="2286000" algn="l" defTabSz="914400" rtl="0" eaLnBrk="1" latinLnBrk="0" hangingPunct="1">
+              <a:defRPr sz="1800" kern="1200">
+                <a:solidFill>
+                  <a:schemeClr val="tx1"/>
+                </a:solidFill>
+                <a:latin typeface="+mn-lt"/>
+                <a:ea typeface="+mn-ea"/>
+                <a:cs typeface="+mn-cs"/>
+              </a:defRPr>
+            </a:lvl6pPr>
+            <a:lvl7pPr marL="2743200" algn="l" defTabSz="914400" rtl="0" eaLnBrk="1" latinLnBrk="0" hangingPunct="1">
+              <a:defRPr sz="1800" kern="1200">
+                <a:solidFill>
+                  <a:schemeClr val="tx1"/>
+                </a:solidFill>
+                <a:latin typeface="+mn-lt"/>
+                <a:ea typeface="+mn-ea"/>
+                <a:cs typeface="+mn-cs"/>
+              </a:defRPr>
+            </a:lvl7pPr>
+            <a:lvl8pPr marL="3200400" algn="l" defTabSz="914400" rtl="0" eaLnBrk="1" latinLnBrk="0" hangingPunct="1">
+              <a:defRPr sz="1800" kern="1200">
+                <a:solidFill>
+                  <a:schemeClr val="tx1"/>
+                </a:solidFill>
+                <a:latin typeface="+mn-lt"/>
+                <a:ea typeface="+mn-ea"/>
+                <a:cs typeface="+mn-cs"/>
+              </a:defRPr>
+            </a:lvl8pPr>
+            <a:lvl9pPr marL="3657600" algn="l" defTabSz="914400" rtl="0" eaLnBrk="1" latinLnBrk="0" hangingPunct="1">
+              <a:defRPr sz="1800" kern="1200">
+                <a:solidFill>
+                  <a:schemeClr val="tx1"/>
+                </a:solidFill>
+                <a:latin typeface="+mn-lt"/>
+                <a:ea typeface="+mn-ea"/>
+                <a:cs typeface="+mn-cs"/>
+              </a:defRPr>
+            </a:lvl9pPr>
+          </a:lstStyle>
+          <a:p>
+            <a:fld id="{D57F1E4F-1CFF-5643-939E-217C01CDF565}" type="slidenum">
+              <a:rPr lang="en-US" sz="1400" b="1" smtClean="0">
+                <a:latin typeface="D2Coding" panose="020B0609020101020101" pitchFamily="49" charset="-127"/>
+                <a:ea typeface="D2Coding" panose="020B0609020101020101" pitchFamily="49" charset="-127"/>
+              </a:rPr>
+              <a:pPr/>
+              <a:t>6</a:t>
+            </a:fld>
+            <a:endParaRPr lang="en-US" sz="1400" b="1" dirty="0">
+              <a:latin typeface="D2Coding" panose="020B0609020101020101" pitchFamily="49" charset="-127"/>
+              <a:ea typeface="D2Coding" panose="020B0609020101020101" pitchFamily="49" charset="-127"/>
+            </a:endParaRPr>
           </a:p>
         </p:txBody>
       </p:sp>
@@ -10465,41 +14678,6 @@
       </p:grpSpPr>
       <p:sp>
         <p:nvSpPr>
-          <p:cNvPr id="4" name="슬라이드 번호 개체 틀 3">
-            <a:extLst>
-              <a:ext uri="{FF2B5EF4-FFF2-40B4-BE49-F238E27FC236}">
-                <a16:creationId xmlns:a16="http://schemas.microsoft.com/office/drawing/2014/main" id="{4C1C24E2-AC75-8A2E-66CB-CC1EF15F6295}"/>
-              </a:ext>
-            </a:extLst>
-          </p:cNvPr>
-          <p:cNvSpPr>
-            <a:spLocks noGrp="1"/>
-          </p:cNvSpPr>
-          <p:nvPr>
-            <p:ph type="sldNum" sz="quarter" idx="12"/>
-          </p:nvPr>
-        </p:nvSpPr>
-        <p:spPr>
-          <a:xfrm>
-            <a:off x="10514011" y="6036261"/>
-            <a:ext cx="753545" cy="365125"/>
-          </a:xfrm>
-        </p:spPr>
-        <p:txBody>
-          <a:bodyPr/>
-          <a:lstStyle/>
-          <a:p>
-            <a:fld id="{D57F1E4F-1CFF-5643-939E-217C01CDF565}" type="slidenum">
-              <a:rPr lang="en-US" smtClean="0"/>
-              <a:pPr/>
-              <a:t>7</a:t>
-            </a:fld>
-            <a:endParaRPr lang="en-US" dirty="0"/>
-          </a:p>
-        </p:txBody>
-      </p:sp>
-      <p:sp>
-        <p:nvSpPr>
           <p:cNvPr id="3" name="제목 1">
             <a:extLst>
               <a:ext uri="{FF2B5EF4-FFF2-40B4-BE49-F238E27FC236}">
@@ -10551,7 +14729,7 @@
               <a:rPr lang="en-US" altLang="ko-KR" sz="2800" b="1" cap="none" dirty="0">
                 <a:latin typeface="Lora" pitchFamily="2" charset="0"/>
               </a:rPr>
-              <a:t>Training a multi-input, multi-output model</a:t>
+              <a:t>1. A simple example</a:t>
             </a:r>
           </a:p>
         </p:txBody>
@@ -10571,7 +14749,7 @@
         <p:spPr>
           <a:xfrm>
             <a:off x="571197" y="1383594"/>
-            <a:ext cx="11087705" cy="4708981"/>
+            <a:ext cx="11087705" cy="2062103"/>
           </a:xfrm>
           <a:prstGeom prst="rect">
             <a:avLst/>
@@ -10587,290 +14765,290 @@
           <a:lstStyle/>
           <a:p>
             <a:r>
-              <a:rPr lang="en-US" altLang="ko-KR" sz="1200" dirty="0">
-                <a:latin typeface="D2Coding" panose="020B0609020101020101" pitchFamily="49" charset="-127"/>
-                <a:ea typeface="D2Coding" panose="020B0609020101020101" pitchFamily="49" charset="-127"/>
-              </a:rPr>
-              <a:t># 1. </a:t>
-            </a:r>
-            <a:r>
-              <a:rPr lang="ko-KR" altLang="en-US" sz="1200" dirty="0" err="1">
-                <a:latin typeface="D2Coding" panose="020B0609020101020101" pitchFamily="49" charset="-127"/>
-                <a:ea typeface="D2Coding" panose="020B0609020101020101" pitchFamily="49" charset="-127"/>
-              </a:rPr>
-              <a:t>하이퍼파라미터</a:t>
-            </a:r>
-            <a:r>
-              <a:rPr lang="ko-KR" altLang="en-US" sz="1200" dirty="0">
-                <a:latin typeface="D2Coding" panose="020B0609020101020101" pitchFamily="49" charset="-127"/>
-                <a:ea typeface="D2Coding" panose="020B0609020101020101" pitchFamily="49" charset="-127"/>
-              </a:rPr>
-              <a:t> 및 차원 크기 정의</a:t>
-            </a:r>
-            <a:endParaRPr lang="en-US" altLang="ko-KR" sz="1200" dirty="0">
+              <a:rPr lang="en-US" altLang="ko-KR" sz="1600" dirty="0">
+                <a:latin typeface="D2Coding" panose="020B0609020101020101" pitchFamily="49" charset="-127"/>
+                <a:ea typeface="D2Coding" panose="020B0609020101020101" pitchFamily="49" charset="-127"/>
+              </a:rPr>
+              <a:t># </a:t>
+            </a:r>
+            <a:r>
+              <a:rPr lang="ko-KR" altLang="en-US" sz="1600" dirty="0" err="1">
+                <a:latin typeface="D2Coding" panose="020B0609020101020101" pitchFamily="49" charset="-127"/>
+                <a:ea typeface="D2Coding" panose="020B0609020101020101" pitchFamily="49" charset="-127"/>
+              </a:rPr>
+              <a:t>입력층</a:t>
+            </a:r>
+            <a:r>
+              <a:rPr lang="ko-KR" altLang="en-US" sz="1600" dirty="0">
+                <a:latin typeface="D2Coding" panose="020B0609020101020101" pitchFamily="49" charset="-127"/>
+                <a:ea typeface="D2Coding" panose="020B0609020101020101" pitchFamily="49" charset="-127"/>
+              </a:rPr>
+              <a:t> </a:t>
+            </a:r>
+            <a:r>
+              <a:rPr lang="en-US" altLang="ko-KR" sz="1600" dirty="0">
+                <a:latin typeface="D2Coding" panose="020B0609020101020101" pitchFamily="49" charset="-127"/>
+                <a:ea typeface="D2Coding" panose="020B0609020101020101" pitchFamily="49" charset="-127"/>
+              </a:rPr>
+              <a:t>(inputs)</a:t>
+            </a:r>
+            <a:r>
+              <a:rPr lang="ko-KR" altLang="en-US" sz="1600" dirty="0">
+                <a:latin typeface="D2Coding" panose="020B0609020101020101" pitchFamily="49" charset="-127"/>
+                <a:ea typeface="D2Coding" panose="020B0609020101020101" pitchFamily="49" charset="-127"/>
+              </a:rPr>
+              <a:t>은 </a:t>
+            </a:r>
+            <a:r>
+              <a:rPr lang="en-US" altLang="ko-KR" sz="1600" dirty="0">
+                <a:latin typeface="D2Coding" panose="020B0609020101020101" pitchFamily="49" charset="-127"/>
+                <a:ea typeface="D2Coding" panose="020B0609020101020101" pitchFamily="49" charset="-127"/>
+              </a:rPr>
+              <a:t>3</a:t>
+            </a:r>
+            <a:r>
+              <a:rPr lang="ko-KR" altLang="en-US" sz="1600" dirty="0">
+                <a:latin typeface="D2Coding" panose="020B0609020101020101" pitchFamily="49" charset="-127"/>
+                <a:ea typeface="D2Coding" panose="020B0609020101020101" pitchFamily="49" charset="-127"/>
+              </a:rPr>
+              <a:t>개의 입력 특성</a:t>
+            </a:r>
+            <a:endParaRPr lang="en-US" altLang="ko-KR" sz="1600" dirty="0">
               <a:latin typeface="D2Coding" panose="020B0609020101020101" pitchFamily="49" charset="-127"/>
               <a:ea typeface="D2Coding" panose="020B0609020101020101" pitchFamily="49" charset="-127"/>
             </a:endParaRPr>
           </a:p>
           <a:p>
             <a:r>
-              <a:rPr lang="ko-KR" altLang="en-US" sz="1200" dirty="0" err="1">
-                <a:latin typeface="D2Coding" panose="020B0609020101020101" pitchFamily="49" charset="-127"/>
-                <a:ea typeface="D2Coding" panose="020B0609020101020101" pitchFamily="49" charset="-127"/>
-              </a:rPr>
-              <a:t>vocabulary_size</a:t>
-            </a:r>
-            <a:r>
-              <a:rPr lang="ko-KR" altLang="en-US" sz="1200" dirty="0">
-                <a:latin typeface="D2Coding" panose="020B0609020101020101" pitchFamily="49" charset="-127"/>
-                <a:ea typeface="D2Coding" panose="020B0609020101020101" pitchFamily="49" charset="-127"/>
-              </a:rPr>
-              <a:t> = 10000  # 텍스트에 사용할 단어 사전 크기 (단어 종류 개수)</a:t>
-            </a:r>
-            <a:endParaRPr lang="en-US" altLang="ko-KR" sz="1200" dirty="0">
+              <a:rPr lang="en-US" altLang="ko-KR" sz="1600" dirty="0">
+                <a:latin typeface="D2Coding" panose="020B0609020101020101" pitchFamily="49" charset="-127"/>
+                <a:ea typeface="D2Coding" panose="020B0609020101020101" pitchFamily="49" charset="-127"/>
+              </a:rPr>
+              <a:t># </a:t>
+            </a:r>
+            <a:r>
+              <a:rPr lang="ko-KR" altLang="en-US" sz="1600" dirty="0">
+                <a:latin typeface="D2Coding" panose="020B0609020101020101" pitchFamily="49" charset="-127"/>
+                <a:ea typeface="D2Coding" panose="020B0609020101020101" pitchFamily="49" charset="-127"/>
+              </a:rPr>
+              <a:t>배치 크기</a:t>
+            </a:r>
+            <a:r>
+              <a:rPr lang="en-US" altLang="ko-KR" sz="1600" dirty="0">
+                <a:latin typeface="D2Coding" panose="020B0609020101020101" pitchFamily="49" charset="-127"/>
+                <a:ea typeface="D2Coding" panose="020B0609020101020101" pitchFamily="49" charset="-127"/>
+              </a:rPr>
+              <a:t>(Batch Size) </a:t>
+            </a:r>
+            <a:r>
+              <a:rPr lang="ko-KR" altLang="en-US" sz="1600" dirty="0" err="1">
+                <a:latin typeface="D2Coding" panose="020B0609020101020101" pitchFamily="49" charset="-127"/>
+                <a:ea typeface="D2Coding" panose="020B0609020101020101" pitchFamily="49" charset="-127"/>
+              </a:rPr>
+              <a:t>미지정</a:t>
+            </a:r>
+            <a:r>
+              <a:rPr lang="ko-KR" altLang="en-US" sz="1600" dirty="0">
+                <a:latin typeface="D2Coding" panose="020B0609020101020101" pitchFamily="49" charset="-127"/>
+                <a:ea typeface="D2Coding" panose="020B0609020101020101" pitchFamily="49" charset="-127"/>
+              </a:rPr>
+              <a:t> </a:t>
+            </a:r>
+            <a:r>
+              <a:rPr lang="en-US" altLang="ko-KR" sz="1600" dirty="0">
+                <a:latin typeface="D2Coding" panose="020B0609020101020101" pitchFamily="49" charset="-127"/>
+                <a:ea typeface="D2Coding" panose="020B0609020101020101" pitchFamily="49" charset="-127"/>
+              </a:rPr>
+              <a:t>:</a:t>
+            </a:r>
+            <a:r>
+              <a:rPr lang="ko-KR" altLang="en-US" sz="1600" dirty="0">
+                <a:latin typeface="D2Coding" panose="020B0609020101020101" pitchFamily="49" charset="-127"/>
+                <a:ea typeface="D2Coding" panose="020B0609020101020101" pitchFamily="49" charset="-127"/>
+              </a:rPr>
+              <a:t> 실제 학습이나 예측 시에는 </a:t>
+            </a:r>
+            <a:r>
+              <a:rPr lang="en-US" altLang="ko-KR" sz="1600" dirty="0">
+                <a:latin typeface="D2Coding" panose="020B0609020101020101" pitchFamily="49" charset="-127"/>
+                <a:ea typeface="D2Coding" panose="020B0609020101020101" pitchFamily="49" charset="-127"/>
+              </a:rPr>
+              <a:t>(</a:t>
+            </a:r>
+            <a:r>
+              <a:rPr lang="en-US" altLang="ko-KR" sz="1600" dirty="0" err="1">
+                <a:latin typeface="D2Coding" panose="020B0609020101020101" pitchFamily="49" charset="-127"/>
+                <a:ea typeface="D2Coding" panose="020B0609020101020101" pitchFamily="49" charset="-127"/>
+              </a:rPr>
+              <a:t>batch_size</a:t>
+            </a:r>
+            <a:r>
+              <a:rPr lang="en-US" altLang="ko-KR" sz="1600" dirty="0">
+                <a:latin typeface="D2Coding" panose="020B0609020101020101" pitchFamily="49" charset="-127"/>
+                <a:ea typeface="D2Coding" panose="020B0609020101020101" pitchFamily="49" charset="-127"/>
+              </a:rPr>
+              <a:t>, 3)</a:t>
+            </a:r>
+            <a:r>
+              <a:rPr lang="ko-KR" altLang="en-US" sz="1600" dirty="0">
+                <a:latin typeface="D2Coding" panose="020B0609020101020101" pitchFamily="49" charset="-127"/>
+                <a:ea typeface="D2Coding" panose="020B0609020101020101" pitchFamily="49" charset="-127"/>
+              </a:rPr>
+              <a:t> 형태</a:t>
+            </a:r>
+            <a:endParaRPr lang="en-US" altLang="ko-KR" sz="1600" dirty="0">
               <a:latin typeface="D2Coding" panose="020B0609020101020101" pitchFamily="49" charset="-127"/>
               <a:ea typeface="D2Coding" panose="020B0609020101020101" pitchFamily="49" charset="-127"/>
             </a:endParaRPr>
           </a:p>
           <a:p>
             <a:r>
-              <a:rPr lang="ko-KR" altLang="en-US" sz="1200" dirty="0" err="1">
-                <a:latin typeface="D2Coding" panose="020B0609020101020101" pitchFamily="49" charset="-127"/>
-                <a:ea typeface="D2Coding" panose="020B0609020101020101" pitchFamily="49" charset="-127"/>
-              </a:rPr>
-              <a:t>num_tags</a:t>
-            </a:r>
-            <a:r>
-              <a:rPr lang="ko-KR" altLang="en-US" sz="1200" dirty="0">
-                <a:latin typeface="D2Coding" panose="020B0609020101020101" pitchFamily="49" charset="-127"/>
-                <a:ea typeface="D2Coding" panose="020B0609020101020101" pitchFamily="49" charset="-127"/>
-              </a:rPr>
-              <a:t> = 100          # </a:t>
-            </a:r>
-            <a:r>
-              <a:rPr lang="ko-KR" altLang="en-US" sz="1200" dirty="0" err="1">
-                <a:latin typeface="D2Coding" panose="020B0609020101020101" pitchFamily="49" charset="-127"/>
-                <a:ea typeface="D2Coding" panose="020B0609020101020101" pitchFamily="49" charset="-127"/>
-              </a:rPr>
-              <a:t>멀티핫</a:t>
-            </a:r>
-            <a:r>
-              <a:rPr lang="ko-KR" altLang="en-US" sz="1200" dirty="0">
-                <a:latin typeface="D2Coding" panose="020B0609020101020101" pitchFamily="49" charset="-127"/>
-                <a:ea typeface="D2Coding" panose="020B0609020101020101" pitchFamily="49" charset="-127"/>
-              </a:rPr>
-              <a:t> </a:t>
-            </a:r>
-            <a:r>
-              <a:rPr lang="ko-KR" altLang="en-US" sz="1200" dirty="0" err="1">
-                <a:latin typeface="D2Coding" panose="020B0609020101020101" pitchFamily="49" charset="-127"/>
-                <a:ea typeface="D2Coding" panose="020B0609020101020101" pitchFamily="49" charset="-127"/>
-              </a:rPr>
-              <a:t>인코딩된</a:t>
-            </a:r>
-            <a:r>
-              <a:rPr lang="ko-KR" altLang="en-US" sz="1200" dirty="0">
-                <a:latin typeface="D2Coding" panose="020B0609020101020101" pitchFamily="49" charset="-127"/>
-                <a:ea typeface="D2Coding" panose="020B0609020101020101" pitchFamily="49" charset="-127"/>
-              </a:rPr>
-              <a:t> 태그의 종류 개수</a:t>
-            </a:r>
-          </a:p>
-          <a:p>
-            <a:r>
-              <a:rPr lang="ko-KR" altLang="en-US" sz="1200" dirty="0" err="1">
-                <a:latin typeface="D2Coding" panose="020B0609020101020101" pitchFamily="49" charset="-127"/>
-                <a:ea typeface="D2Coding" panose="020B0609020101020101" pitchFamily="49" charset="-127"/>
-              </a:rPr>
-              <a:t>num_departments</a:t>
-            </a:r>
-            <a:r>
-              <a:rPr lang="ko-KR" altLang="en-US" sz="1200" dirty="0">
-                <a:latin typeface="D2Coding" panose="020B0609020101020101" pitchFamily="49" charset="-127"/>
-                <a:ea typeface="D2Coding" panose="020B0609020101020101" pitchFamily="49" charset="-127"/>
-              </a:rPr>
-              <a:t> = 4     # 분류할 담당 부서 수 (클래스 개수)</a:t>
-            </a:r>
-          </a:p>
-          <a:p>
-            <a:endParaRPr lang="ko-KR" altLang="en-US" sz="1200" dirty="0">
+              <a:rPr lang="en-US" altLang="ko-KR" sz="1600" dirty="0">
+                <a:latin typeface="D2Coding" panose="020B0609020101020101" pitchFamily="49" charset="-127"/>
+                <a:ea typeface="D2Coding" panose="020B0609020101020101" pitchFamily="49" charset="-127"/>
+              </a:rPr>
+              <a:t>inputs = </a:t>
+            </a:r>
+            <a:r>
+              <a:rPr lang="en-US" altLang="ko-KR" sz="1600" dirty="0" err="1">
+                <a:latin typeface="D2Coding" panose="020B0609020101020101" pitchFamily="49" charset="-127"/>
+                <a:ea typeface="D2Coding" panose="020B0609020101020101" pitchFamily="49" charset="-127"/>
+              </a:rPr>
+              <a:t>keras.Input</a:t>
+            </a:r>
+            <a:r>
+              <a:rPr lang="en-US" altLang="ko-KR" sz="1600" dirty="0">
+                <a:latin typeface="D2Coding" panose="020B0609020101020101" pitchFamily="49" charset="-127"/>
+                <a:ea typeface="D2Coding" panose="020B0609020101020101" pitchFamily="49" charset="-127"/>
+              </a:rPr>
+              <a:t>(shape=(3,), name="</a:t>
+            </a:r>
+            <a:r>
+              <a:rPr lang="en-US" altLang="ko-KR" sz="1600" dirty="0" err="1">
+                <a:latin typeface="D2Coding" panose="020B0609020101020101" pitchFamily="49" charset="-127"/>
+                <a:ea typeface="D2Coding" panose="020B0609020101020101" pitchFamily="49" charset="-127"/>
+              </a:rPr>
+              <a:t>my_input</a:t>
+            </a:r>
+            <a:r>
+              <a:rPr lang="en-US" altLang="ko-KR" sz="1600" dirty="0">
+                <a:latin typeface="D2Coding" panose="020B0609020101020101" pitchFamily="49" charset="-127"/>
+                <a:ea typeface="D2Coding" panose="020B0609020101020101" pitchFamily="49" charset="-127"/>
+              </a:rPr>
+              <a:t>")</a:t>
+            </a:r>
+          </a:p>
+          <a:p>
+            <a:endParaRPr lang="en-US" altLang="ko-KR" sz="1600" dirty="0">
               <a:latin typeface="D2Coding" panose="020B0609020101020101" pitchFamily="49" charset="-127"/>
               <a:ea typeface="D2Coding" panose="020B0609020101020101" pitchFamily="49" charset="-127"/>
             </a:endParaRPr>
           </a:p>
           <a:p>
             <a:r>
-              <a:rPr lang="ko-KR" altLang="en-US" sz="1200" dirty="0">
-                <a:latin typeface="D2Coding" panose="020B0609020101020101" pitchFamily="49" charset="-127"/>
-                <a:ea typeface="D2Coding" panose="020B0609020101020101" pitchFamily="49" charset="-127"/>
-              </a:rPr>
-              <a:t># </a:t>
-            </a:r>
-            <a:r>
-              <a:rPr lang="en-US" altLang="ko-KR" sz="1200" dirty="0">
-                <a:latin typeface="D2Coding" panose="020B0609020101020101" pitchFamily="49" charset="-127"/>
-                <a:ea typeface="D2Coding" panose="020B0609020101020101" pitchFamily="49" charset="-127"/>
-              </a:rPr>
-              <a:t>2</a:t>
-            </a:r>
-            <a:r>
-              <a:rPr lang="ko-KR" altLang="en-US" sz="1200" dirty="0">
-                <a:latin typeface="D2Coding" panose="020B0609020101020101" pitchFamily="49" charset="-127"/>
-                <a:ea typeface="D2Coding" panose="020B0609020101020101" pitchFamily="49" charset="-127"/>
-              </a:rPr>
-              <a:t>. 다중 입력(</a:t>
-            </a:r>
-            <a:r>
-              <a:rPr lang="ko-KR" altLang="en-US" sz="1200" dirty="0" err="1">
-                <a:latin typeface="D2Coding" panose="020B0609020101020101" pitchFamily="49" charset="-127"/>
-                <a:ea typeface="D2Coding" panose="020B0609020101020101" pitchFamily="49" charset="-127"/>
-              </a:rPr>
-              <a:t>Multi-input</a:t>
-            </a:r>
-            <a:r>
-              <a:rPr lang="ko-KR" altLang="en-US" sz="1200" dirty="0">
-                <a:latin typeface="D2Coding" panose="020B0609020101020101" pitchFamily="49" charset="-127"/>
-                <a:ea typeface="D2Coding" panose="020B0609020101020101" pitchFamily="49" charset="-127"/>
-              </a:rPr>
-              <a:t>) 레이어 정의 </a:t>
-            </a:r>
-            <a:r>
-              <a:rPr lang="en-US" altLang="ko-KR" sz="1200" dirty="0">
-                <a:latin typeface="D2Coding" panose="020B0609020101020101" pitchFamily="49" charset="-127"/>
-                <a:ea typeface="D2Coding" panose="020B0609020101020101" pitchFamily="49" charset="-127"/>
-              </a:rPr>
-              <a:t>: </a:t>
-            </a:r>
-            <a:r>
-              <a:rPr lang="ko-KR" altLang="en-US" sz="1200" dirty="0">
-                <a:latin typeface="D2Coding" panose="020B0609020101020101" pitchFamily="49" charset="-127"/>
-                <a:ea typeface="D2Coding" panose="020B0609020101020101" pitchFamily="49" charset="-127"/>
-              </a:rPr>
-              <a:t>티켓 제목 입력: (</a:t>
-            </a:r>
-            <a:r>
-              <a:rPr lang="ko-KR" altLang="en-US" sz="1200" dirty="0" err="1">
-                <a:latin typeface="D2Coding" panose="020B0609020101020101" pitchFamily="49" charset="-127"/>
-                <a:ea typeface="D2Coding" panose="020B0609020101020101" pitchFamily="49" charset="-127"/>
-              </a:rPr>
-              <a:t>None</a:t>
-            </a:r>
-            <a:r>
-              <a:rPr lang="ko-KR" altLang="en-US" sz="1200" dirty="0">
-                <a:latin typeface="D2Coding" panose="020B0609020101020101" pitchFamily="49" charset="-127"/>
-                <a:ea typeface="D2Coding" panose="020B0609020101020101" pitchFamily="49" charset="-127"/>
-              </a:rPr>
-              <a:t>, 10000) 형태의 </a:t>
-            </a:r>
-            <a:r>
-              <a:rPr lang="ko-KR" altLang="en-US" sz="1200" dirty="0" err="1">
-                <a:latin typeface="D2Coding" panose="020B0609020101020101" pitchFamily="49" charset="-127"/>
-                <a:ea typeface="D2Coding" panose="020B0609020101020101" pitchFamily="49" charset="-127"/>
-              </a:rPr>
-              <a:t>텐서를</a:t>
-            </a:r>
-            <a:r>
-              <a:rPr lang="ko-KR" altLang="en-US" sz="1200" dirty="0">
-                <a:latin typeface="D2Coding" panose="020B0609020101020101" pitchFamily="49" charset="-127"/>
-                <a:ea typeface="D2Coding" panose="020B0609020101020101" pitchFamily="49" charset="-127"/>
-              </a:rPr>
-              <a:t> 받음 (</a:t>
-            </a:r>
-            <a:r>
-              <a:rPr lang="ko-KR" altLang="en-US" sz="1200" dirty="0" err="1">
-                <a:latin typeface="D2Coding" panose="020B0609020101020101" pitchFamily="49" charset="-127"/>
-                <a:ea typeface="D2Coding" panose="020B0609020101020101" pitchFamily="49" charset="-127"/>
-              </a:rPr>
-              <a:t>None은</a:t>
-            </a:r>
-            <a:r>
-              <a:rPr lang="ko-KR" altLang="en-US" sz="1200" dirty="0">
-                <a:latin typeface="D2Coding" panose="020B0609020101020101" pitchFamily="49" charset="-127"/>
-                <a:ea typeface="D2Coding" panose="020B0609020101020101" pitchFamily="49" charset="-127"/>
-              </a:rPr>
-              <a:t> 가변적인 배치 크기)</a:t>
-            </a:r>
-          </a:p>
-          <a:p>
-            <a:r>
-              <a:rPr lang="ko-KR" altLang="en-US" sz="1200" dirty="0" err="1">
-                <a:latin typeface="D2Coding" panose="020B0609020101020101" pitchFamily="49" charset="-127"/>
-                <a:ea typeface="D2Coding" panose="020B0609020101020101" pitchFamily="49" charset="-127"/>
-              </a:rPr>
-              <a:t>title</a:t>
-            </a:r>
-            <a:r>
-              <a:rPr lang="ko-KR" altLang="en-US" sz="1200" dirty="0">
-                <a:latin typeface="D2Coding" panose="020B0609020101020101" pitchFamily="49" charset="-127"/>
-                <a:ea typeface="D2Coding" panose="020B0609020101020101" pitchFamily="49" charset="-127"/>
-              </a:rPr>
-              <a:t> = </a:t>
-            </a:r>
-            <a:r>
-              <a:rPr lang="ko-KR" altLang="en-US" sz="1200" dirty="0" err="1">
-                <a:latin typeface="D2Coding" panose="020B0609020101020101" pitchFamily="49" charset="-127"/>
-                <a:ea typeface="D2Coding" panose="020B0609020101020101" pitchFamily="49" charset="-127"/>
-              </a:rPr>
-              <a:t>keras.Input</a:t>
-            </a:r>
-            <a:r>
-              <a:rPr lang="ko-KR" altLang="en-US" sz="1200" dirty="0">
-                <a:latin typeface="D2Coding" panose="020B0609020101020101" pitchFamily="49" charset="-127"/>
-                <a:ea typeface="D2Coding" panose="020B0609020101020101" pitchFamily="49" charset="-127"/>
-              </a:rPr>
-              <a:t>(</a:t>
-            </a:r>
-            <a:r>
-              <a:rPr lang="ko-KR" altLang="en-US" sz="1200" dirty="0" err="1">
-                <a:latin typeface="D2Coding" panose="020B0609020101020101" pitchFamily="49" charset="-127"/>
-                <a:ea typeface="D2Coding" panose="020B0609020101020101" pitchFamily="49" charset="-127"/>
-              </a:rPr>
-              <a:t>shape</a:t>
-            </a:r>
-            <a:r>
-              <a:rPr lang="ko-KR" altLang="en-US" sz="1200" dirty="0">
-                <a:latin typeface="D2Coding" panose="020B0609020101020101" pitchFamily="49" charset="-127"/>
-                <a:ea typeface="D2Coding" panose="020B0609020101020101" pitchFamily="49" charset="-127"/>
-              </a:rPr>
-              <a:t>=(</a:t>
-            </a:r>
-            <a:r>
-              <a:rPr lang="ko-KR" altLang="en-US" sz="1200" dirty="0" err="1">
-                <a:latin typeface="D2Coding" panose="020B0609020101020101" pitchFamily="49" charset="-127"/>
-                <a:ea typeface="D2Coding" panose="020B0609020101020101" pitchFamily="49" charset="-127"/>
-              </a:rPr>
-              <a:t>vocabulary_size</a:t>
-            </a:r>
-            <a:r>
-              <a:rPr lang="ko-KR" altLang="en-US" sz="1200" dirty="0">
-                <a:latin typeface="D2Coding" panose="020B0609020101020101" pitchFamily="49" charset="-127"/>
-                <a:ea typeface="D2Coding" panose="020B0609020101020101" pitchFamily="49" charset="-127"/>
-              </a:rPr>
-              <a:t>,), </a:t>
-            </a:r>
-            <a:r>
-              <a:rPr lang="ko-KR" altLang="en-US" sz="1200" dirty="0" err="1">
-                <a:latin typeface="D2Coding" panose="020B0609020101020101" pitchFamily="49" charset="-127"/>
-                <a:ea typeface="D2Coding" panose="020B0609020101020101" pitchFamily="49" charset="-127"/>
-              </a:rPr>
-              <a:t>name</a:t>
-            </a:r>
-            <a:r>
-              <a:rPr lang="ko-KR" altLang="en-US" sz="1200" dirty="0">
-                <a:latin typeface="D2Coding" panose="020B0609020101020101" pitchFamily="49" charset="-127"/>
-                <a:ea typeface="D2Coding" panose="020B0609020101020101" pitchFamily="49" charset="-127"/>
-              </a:rPr>
-              <a:t>="</a:t>
-            </a:r>
-            <a:r>
-              <a:rPr lang="ko-KR" altLang="en-US" sz="1200" dirty="0" err="1">
-                <a:latin typeface="D2Coding" panose="020B0609020101020101" pitchFamily="49" charset="-127"/>
-                <a:ea typeface="D2Coding" panose="020B0609020101020101" pitchFamily="49" charset="-127"/>
-              </a:rPr>
-              <a:t>title</a:t>
-            </a:r>
-            <a:r>
-              <a:rPr lang="ko-KR" altLang="en-US" sz="1200" dirty="0">
+              <a:rPr lang="en-US" altLang="ko-KR" sz="1600" dirty="0">
+                <a:latin typeface="D2Coding" panose="020B0609020101020101" pitchFamily="49" charset="-127"/>
+                <a:ea typeface="D2Coding" panose="020B0609020101020101" pitchFamily="49" charset="-127"/>
+              </a:rPr>
+              <a:t>features = </a:t>
+            </a:r>
+            <a:r>
+              <a:rPr lang="en-US" altLang="ko-KR" sz="1600" dirty="0" err="1">
+                <a:latin typeface="D2Coding" panose="020B0609020101020101" pitchFamily="49" charset="-127"/>
+                <a:ea typeface="D2Coding" panose="020B0609020101020101" pitchFamily="49" charset="-127"/>
+              </a:rPr>
+              <a:t>layers.Dense</a:t>
+            </a:r>
+            <a:r>
+              <a:rPr lang="en-US" altLang="ko-KR" sz="1600" dirty="0">
+                <a:latin typeface="D2Coding" panose="020B0609020101020101" pitchFamily="49" charset="-127"/>
+                <a:ea typeface="D2Coding" panose="020B0609020101020101" pitchFamily="49" charset="-127"/>
+              </a:rPr>
+              <a:t>(64, activation="</a:t>
+            </a:r>
+            <a:r>
+              <a:rPr lang="en-US" altLang="ko-KR" sz="1600" dirty="0" err="1">
+                <a:latin typeface="D2Coding" panose="020B0609020101020101" pitchFamily="49" charset="-127"/>
+                <a:ea typeface="D2Coding" panose="020B0609020101020101" pitchFamily="49" charset="-127"/>
+              </a:rPr>
+              <a:t>relu</a:t>
+            </a:r>
+            <a:r>
+              <a:rPr lang="en-US" altLang="ko-KR" sz="1600" dirty="0">
+                <a:latin typeface="D2Coding" panose="020B0609020101020101" pitchFamily="49" charset="-127"/>
+                <a:ea typeface="D2Coding" panose="020B0609020101020101" pitchFamily="49" charset="-127"/>
+              </a:rPr>
+              <a:t>")(inputs)</a:t>
+            </a:r>
+          </a:p>
+          <a:p>
+            <a:r>
+              <a:rPr lang="en-US" altLang="ko-KR" sz="1600" dirty="0">
+                <a:latin typeface="D2Coding" panose="020B0609020101020101" pitchFamily="49" charset="-127"/>
+                <a:ea typeface="D2Coding" panose="020B0609020101020101" pitchFamily="49" charset="-127"/>
+              </a:rPr>
+              <a:t>outputs = </a:t>
+            </a:r>
+            <a:r>
+              <a:rPr lang="en-US" altLang="ko-KR" sz="1600" dirty="0" err="1">
+                <a:latin typeface="D2Coding" panose="020B0609020101020101" pitchFamily="49" charset="-127"/>
+                <a:ea typeface="D2Coding" panose="020B0609020101020101" pitchFamily="49" charset="-127"/>
+              </a:rPr>
+              <a:t>layers.Dense</a:t>
+            </a:r>
+            <a:r>
+              <a:rPr lang="en-US" altLang="ko-KR" sz="1600" dirty="0">
+                <a:latin typeface="D2Coding" panose="020B0609020101020101" pitchFamily="49" charset="-127"/>
+                <a:ea typeface="D2Coding" panose="020B0609020101020101" pitchFamily="49" charset="-127"/>
+              </a:rPr>
+              <a:t>(10, activation="</a:t>
+            </a:r>
+            <a:r>
+              <a:rPr lang="en-US" altLang="ko-KR" sz="1600" dirty="0" err="1">
+                <a:latin typeface="D2Coding" panose="020B0609020101020101" pitchFamily="49" charset="-127"/>
+                <a:ea typeface="D2Coding" panose="020B0609020101020101" pitchFamily="49" charset="-127"/>
+              </a:rPr>
+              <a:t>softmax</a:t>
+            </a:r>
+            <a:r>
+              <a:rPr lang="en-US" altLang="ko-KR" sz="1600" dirty="0">
+                <a:latin typeface="D2Coding" panose="020B0609020101020101" pitchFamily="49" charset="-127"/>
+                <a:ea typeface="D2Coding" panose="020B0609020101020101" pitchFamily="49" charset="-127"/>
+              </a:rPr>
+              <a:t>")(features)</a:t>
+            </a:r>
+          </a:p>
+          <a:p>
+            <a:r>
+              <a:rPr lang="en-US" altLang="ko-KR" sz="1600" dirty="0">
+                <a:latin typeface="D2Coding" panose="020B0609020101020101" pitchFamily="49" charset="-127"/>
+                <a:ea typeface="D2Coding" panose="020B0609020101020101" pitchFamily="49" charset="-127"/>
+              </a:rPr>
+              <a:t>model = </a:t>
+            </a:r>
+            <a:r>
+              <a:rPr lang="en-US" altLang="ko-KR" sz="1600" dirty="0" err="1">
+                <a:latin typeface="D2Coding" panose="020B0609020101020101" pitchFamily="49" charset="-127"/>
+                <a:ea typeface="D2Coding" panose="020B0609020101020101" pitchFamily="49" charset="-127"/>
+              </a:rPr>
+              <a:t>keras.Model</a:t>
+            </a:r>
+            <a:r>
+              <a:rPr lang="en-US" altLang="ko-KR" sz="1600" dirty="0">
+                <a:latin typeface="D2Coding" panose="020B0609020101020101" pitchFamily="49" charset="-127"/>
+                <a:ea typeface="D2Coding" panose="020B0609020101020101" pitchFamily="49" charset="-127"/>
+              </a:rPr>
+              <a:t>(inputs=inputs, outputs=outputs, name="</a:t>
+            </a:r>
+            <a:r>
+              <a:rPr lang="en-US" altLang="ko-KR" sz="1600" dirty="0" err="1">
+                <a:latin typeface="D2Coding" panose="020B0609020101020101" pitchFamily="49" charset="-127"/>
+                <a:ea typeface="D2Coding" panose="020B0609020101020101" pitchFamily="49" charset="-127"/>
+              </a:rPr>
+              <a:t>my_functional_model</a:t>
+            </a:r>
+            <a:r>
+              <a:rPr lang="en-US" altLang="ko-KR" sz="1600" dirty="0">
                 <a:latin typeface="D2Coding" panose="020B0609020101020101" pitchFamily="49" charset="-127"/>
                 <a:ea typeface="D2Coding" panose="020B0609020101020101" pitchFamily="49" charset="-127"/>
               </a:rPr>
@@ -10879,1144 +15057,14 @@
           </a:p>
           <a:p>
             <a:r>
-              <a:rPr lang="ko-KR" altLang="en-US" sz="1200" dirty="0" err="1">
-                <a:latin typeface="D2Coding" panose="020B0609020101020101" pitchFamily="49" charset="-127"/>
-                <a:ea typeface="D2Coding" panose="020B0609020101020101" pitchFamily="49" charset="-127"/>
-              </a:rPr>
-              <a:t>text_body</a:t>
-            </a:r>
-            <a:r>
-              <a:rPr lang="ko-KR" altLang="en-US" sz="1200" dirty="0">
-                <a:latin typeface="D2Coding" panose="020B0609020101020101" pitchFamily="49" charset="-127"/>
-                <a:ea typeface="D2Coding" panose="020B0609020101020101" pitchFamily="49" charset="-127"/>
-              </a:rPr>
-              <a:t> = </a:t>
-            </a:r>
-            <a:r>
-              <a:rPr lang="ko-KR" altLang="en-US" sz="1200" dirty="0" err="1">
-                <a:latin typeface="D2Coding" panose="020B0609020101020101" pitchFamily="49" charset="-127"/>
-                <a:ea typeface="D2Coding" panose="020B0609020101020101" pitchFamily="49" charset="-127"/>
-              </a:rPr>
-              <a:t>keras.Input</a:t>
-            </a:r>
-            <a:r>
-              <a:rPr lang="ko-KR" altLang="en-US" sz="1200" dirty="0">
-                <a:latin typeface="D2Coding" panose="020B0609020101020101" pitchFamily="49" charset="-127"/>
-                <a:ea typeface="D2Coding" panose="020B0609020101020101" pitchFamily="49" charset="-127"/>
-              </a:rPr>
-              <a:t>(</a:t>
-            </a:r>
-            <a:r>
-              <a:rPr lang="ko-KR" altLang="en-US" sz="1200" dirty="0" err="1">
-                <a:latin typeface="D2Coding" panose="020B0609020101020101" pitchFamily="49" charset="-127"/>
-                <a:ea typeface="D2Coding" panose="020B0609020101020101" pitchFamily="49" charset="-127"/>
-              </a:rPr>
-              <a:t>shape</a:t>
-            </a:r>
-            <a:r>
-              <a:rPr lang="ko-KR" altLang="en-US" sz="1200" dirty="0">
-                <a:latin typeface="D2Coding" panose="020B0609020101020101" pitchFamily="49" charset="-127"/>
-                <a:ea typeface="D2Coding" panose="020B0609020101020101" pitchFamily="49" charset="-127"/>
-              </a:rPr>
-              <a:t>=(</a:t>
-            </a:r>
-            <a:r>
-              <a:rPr lang="ko-KR" altLang="en-US" sz="1200" dirty="0" err="1">
-                <a:latin typeface="D2Coding" panose="020B0609020101020101" pitchFamily="49" charset="-127"/>
-                <a:ea typeface="D2Coding" panose="020B0609020101020101" pitchFamily="49" charset="-127"/>
-              </a:rPr>
-              <a:t>vocabulary_size</a:t>
-            </a:r>
-            <a:r>
-              <a:rPr lang="ko-KR" altLang="en-US" sz="1200" dirty="0">
-                <a:latin typeface="D2Coding" panose="020B0609020101020101" pitchFamily="49" charset="-127"/>
-                <a:ea typeface="D2Coding" panose="020B0609020101020101" pitchFamily="49" charset="-127"/>
-              </a:rPr>
-              <a:t>,), </a:t>
-            </a:r>
-            <a:r>
-              <a:rPr lang="ko-KR" altLang="en-US" sz="1200" dirty="0" err="1">
-                <a:latin typeface="D2Coding" panose="020B0609020101020101" pitchFamily="49" charset="-127"/>
-                <a:ea typeface="D2Coding" panose="020B0609020101020101" pitchFamily="49" charset="-127"/>
-              </a:rPr>
-              <a:t>name</a:t>
-            </a:r>
-            <a:r>
-              <a:rPr lang="ko-KR" altLang="en-US" sz="1200" dirty="0">
-                <a:latin typeface="D2Coding" panose="020B0609020101020101" pitchFamily="49" charset="-127"/>
-                <a:ea typeface="D2Coding" panose="020B0609020101020101" pitchFamily="49" charset="-127"/>
-              </a:rPr>
-              <a:t>="</a:t>
-            </a:r>
-            <a:r>
-              <a:rPr lang="ko-KR" altLang="en-US" sz="1200" dirty="0" err="1">
-                <a:latin typeface="D2Coding" panose="020B0609020101020101" pitchFamily="49" charset="-127"/>
-                <a:ea typeface="D2Coding" panose="020B0609020101020101" pitchFamily="49" charset="-127"/>
-              </a:rPr>
-              <a:t>text_body</a:t>
-            </a:r>
-            <a:r>
-              <a:rPr lang="ko-KR" altLang="en-US" sz="1200" dirty="0">
-                <a:latin typeface="D2Coding" panose="020B0609020101020101" pitchFamily="49" charset="-127"/>
-                <a:ea typeface="D2Coding" panose="020B0609020101020101" pitchFamily="49" charset="-127"/>
-              </a:rPr>
-              <a:t>") # 티켓 본문 입력: (</a:t>
-            </a:r>
-            <a:r>
-              <a:rPr lang="ko-KR" altLang="en-US" sz="1200" dirty="0" err="1">
-                <a:latin typeface="D2Coding" panose="020B0609020101020101" pitchFamily="49" charset="-127"/>
-                <a:ea typeface="D2Coding" panose="020B0609020101020101" pitchFamily="49" charset="-127"/>
-              </a:rPr>
-              <a:t>None</a:t>
-            </a:r>
-            <a:r>
-              <a:rPr lang="ko-KR" altLang="en-US" sz="1200" dirty="0">
-                <a:latin typeface="D2Coding" panose="020B0609020101020101" pitchFamily="49" charset="-127"/>
-                <a:ea typeface="D2Coding" panose="020B0609020101020101" pitchFamily="49" charset="-127"/>
-              </a:rPr>
-              <a:t>, 10000) 형태의 </a:t>
-            </a:r>
-            <a:r>
-              <a:rPr lang="ko-KR" altLang="en-US" sz="1200" dirty="0" err="1">
-                <a:latin typeface="D2Coding" panose="020B0609020101020101" pitchFamily="49" charset="-127"/>
-                <a:ea typeface="D2Coding" panose="020B0609020101020101" pitchFamily="49" charset="-127"/>
-              </a:rPr>
-              <a:t>텐서를</a:t>
-            </a:r>
-            <a:r>
-              <a:rPr lang="ko-KR" altLang="en-US" sz="1200" dirty="0">
-                <a:latin typeface="D2Coding" panose="020B0609020101020101" pitchFamily="49" charset="-127"/>
-                <a:ea typeface="D2Coding" panose="020B0609020101020101" pitchFamily="49" charset="-127"/>
-              </a:rPr>
-              <a:t> 받음</a:t>
-            </a:r>
-          </a:p>
-          <a:p>
-            <a:r>
-              <a:rPr lang="ko-KR" altLang="en-US" sz="1200" dirty="0" err="1">
-                <a:latin typeface="D2Coding" panose="020B0609020101020101" pitchFamily="49" charset="-127"/>
-                <a:ea typeface="D2Coding" panose="020B0609020101020101" pitchFamily="49" charset="-127"/>
-              </a:rPr>
-              <a:t>tags</a:t>
-            </a:r>
-            <a:r>
-              <a:rPr lang="ko-KR" altLang="en-US" sz="1200" dirty="0">
-                <a:latin typeface="D2Coding" panose="020B0609020101020101" pitchFamily="49" charset="-127"/>
-                <a:ea typeface="D2Coding" panose="020B0609020101020101" pitchFamily="49" charset="-127"/>
-              </a:rPr>
-              <a:t> = </a:t>
-            </a:r>
-            <a:r>
-              <a:rPr lang="ko-KR" altLang="en-US" sz="1200" dirty="0" err="1">
-                <a:latin typeface="D2Coding" panose="020B0609020101020101" pitchFamily="49" charset="-127"/>
-                <a:ea typeface="D2Coding" panose="020B0609020101020101" pitchFamily="49" charset="-127"/>
-              </a:rPr>
-              <a:t>keras.Input</a:t>
-            </a:r>
-            <a:r>
-              <a:rPr lang="ko-KR" altLang="en-US" sz="1200" dirty="0">
-                <a:latin typeface="D2Coding" panose="020B0609020101020101" pitchFamily="49" charset="-127"/>
-                <a:ea typeface="D2Coding" panose="020B0609020101020101" pitchFamily="49" charset="-127"/>
-              </a:rPr>
-              <a:t>(</a:t>
-            </a:r>
-            <a:r>
-              <a:rPr lang="ko-KR" altLang="en-US" sz="1200" dirty="0" err="1">
-                <a:latin typeface="D2Coding" panose="020B0609020101020101" pitchFamily="49" charset="-127"/>
-                <a:ea typeface="D2Coding" panose="020B0609020101020101" pitchFamily="49" charset="-127"/>
-              </a:rPr>
-              <a:t>shape</a:t>
-            </a:r>
-            <a:r>
-              <a:rPr lang="ko-KR" altLang="en-US" sz="1200" dirty="0">
-                <a:latin typeface="D2Coding" panose="020B0609020101020101" pitchFamily="49" charset="-127"/>
-                <a:ea typeface="D2Coding" panose="020B0609020101020101" pitchFamily="49" charset="-127"/>
-              </a:rPr>
-              <a:t>=(</a:t>
-            </a:r>
-            <a:r>
-              <a:rPr lang="ko-KR" altLang="en-US" sz="1200" dirty="0" err="1">
-                <a:latin typeface="D2Coding" panose="020B0609020101020101" pitchFamily="49" charset="-127"/>
-                <a:ea typeface="D2Coding" panose="020B0609020101020101" pitchFamily="49" charset="-127"/>
-              </a:rPr>
-              <a:t>num_tags</a:t>
-            </a:r>
-            <a:r>
-              <a:rPr lang="ko-KR" altLang="en-US" sz="1200" dirty="0">
-                <a:latin typeface="D2Coding" panose="020B0609020101020101" pitchFamily="49" charset="-127"/>
-                <a:ea typeface="D2Coding" panose="020B0609020101020101" pitchFamily="49" charset="-127"/>
-              </a:rPr>
-              <a:t>,), </a:t>
-            </a:r>
-            <a:r>
-              <a:rPr lang="ko-KR" altLang="en-US" sz="1200" dirty="0" err="1">
-                <a:latin typeface="D2Coding" panose="020B0609020101020101" pitchFamily="49" charset="-127"/>
-                <a:ea typeface="D2Coding" panose="020B0609020101020101" pitchFamily="49" charset="-127"/>
-              </a:rPr>
-              <a:t>name</a:t>
-            </a:r>
-            <a:r>
-              <a:rPr lang="ko-KR" altLang="en-US" sz="1200" dirty="0">
-                <a:latin typeface="D2Coding" panose="020B0609020101020101" pitchFamily="49" charset="-127"/>
-                <a:ea typeface="D2Coding" panose="020B0609020101020101" pitchFamily="49" charset="-127"/>
-              </a:rPr>
-              <a:t>="</a:t>
-            </a:r>
-            <a:r>
-              <a:rPr lang="ko-KR" altLang="en-US" sz="1200" dirty="0" err="1">
-                <a:latin typeface="D2Coding" panose="020B0609020101020101" pitchFamily="49" charset="-127"/>
-                <a:ea typeface="D2Coding" panose="020B0609020101020101" pitchFamily="49" charset="-127"/>
-              </a:rPr>
-              <a:t>tags</a:t>
-            </a:r>
-            <a:r>
-              <a:rPr lang="ko-KR" altLang="en-US" sz="1200" dirty="0">
-                <a:latin typeface="D2Coding" panose="020B0609020101020101" pitchFamily="49" charset="-127"/>
-                <a:ea typeface="D2Coding" panose="020B0609020101020101" pitchFamily="49" charset="-127"/>
-              </a:rPr>
-              <a:t>") # 티켓 태그 입력: (</a:t>
-            </a:r>
-            <a:r>
-              <a:rPr lang="ko-KR" altLang="en-US" sz="1200" dirty="0" err="1">
-                <a:latin typeface="D2Coding" panose="020B0609020101020101" pitchFamily="49" charset="-127"/>
-                <a:ea typeface="D2Coding" panose="020B0609020101020101" pitchFamily="49" charset="-127"/>
-              </a:rPr>
-              <a:t>None</a:t>
-            </a:r>
-            <a:r>
-              <a:rPr lang="ko-KR" altLang="en-US" sz="1200" dirty="0">
-                <a:latin typeface="D2Coding" panose="020B0609020101020101" pitchFamily="49" charset="-127"/>
-                <a:ea typeface="D2Coding" panose="020B0609020101020101" pitchFamily="49" charset="-127"/>
-              </a:rPr>
-              <a:t>, 100) 형태의 </a:t>
-            </a:r>
-            <a:r>
-              <a:rPr lang="ko-KR" altLang="en-US" sz="1200" dirty="0" err="1">
-                <a:latin typeface="D2Coding" panose="020B0609020101020101" pitchFamily="49" charset="-127"/>
-                <a:ea typeface="D2Coding" panose="020B0609020101020101" pitchFamily="49" charset="-127"/>
-              </a:rPr>
-              <a:t>텐서를</a:t>
-            </a:r>
-            <a:r>
-              <a:rPr lang="ko-KR" altLang="en-US" sz="1200" dirty="0">
-                <a:latin typeface="D2Coding" panose="020B0609020101020101" pitchFamily="49" charset="-127"/>
-                <a:ea typeface="D2Coding" panose="020B0609020101020101" pitchFamily="49" charset="-127"/>
-              </a:rPr>
-              <a:t> 받음</a:t>
-            </a:r>
-          </a:p>
-          <a:p>
-            <a:endParaRPr lang="ko-KR" altLang="en-US" sz="1200" dirty="0">
-              <a:latin typeface="D2Coding" panose="020B0609020101020101" pitchFamily="49" charset="-127"/>
-              <a:ea typeface="D2Coding" panose="020B0609020101020101" pitchFamily="49" charset="-127"/>
-            </a:endParaRPr>
-          </a:p>
-          <a:p>
-            <a:r>
-              <a:rPr lang="ko-KR" altLang="en-US" sz="1200" dirty="0">
-                <a:latin typeface="D2Coding" panose="020B0609020101020101" pitchFamily="49" charset="-127"/>
-                <a:ea typeface="D2Coding" panose="020B0609020101020101" pitchFamily="49" charset="-127"/>
-              </a:rPr>
-              <a:t># </a:t>
-            </a:r>
-            <a:r>
-              <a:rPr lang="en-US" altLang="ko-KR" sz="1200" dirty="0">
-                <a:latin typeface="D2Coding" panose="020B0609020101020101" pitchFamily="49" charset="-127"/>
-                <a:ea typeface="D2Coding" panose="020B0609020101020101" pitchFamily="49" charset="-127"/>
-              </a:rPr>
-              <a:t>3</a:t>
-            </a:r>
-            <a:r>
-              <a:rPr lang="ko-KR" altLang="en-US" sz="1200" dirty="0">
-                <a:latin typeface="D2Coding" panose="020B0609020101020101" pitchFamily="49" charset="-127"/>
-                <a:ea typeface="D2Coding" panose="020B0609020101020101" pitchFamily="49" charset="-127"/>
-              </a:rPr>
-              <a:t>. 특성 결합(</a:t>
-            </a:r>
-            <a:r>
-              <a:rPr lang="ko-KR" altLang="en-US" sz="1200" dirty="0" err="1">
-                <a:latin typeface="D2Coding" panose="020B0609020101020101" pitchFamily="49" charset="-127"/>
-                <a:ea typeface="D2Coding" panose="020B0609020101020101" pitchFamily="49" charset="-127"/>
-              </a:rPr>
-              <a:t>Concatenate</a:t>
-            </a:r>
-            <a:r>
-              <a:rPr lang="ko-KR" altLang="en-US" sz="1200" dirty="0">
-                <a:latin typeface="D2Coding" panose="020B0609020101020101" pitchFamily="49" charset="-127"/>
-                <a:ea typeface="D2Coding" panose="020B0609020101020101" pitchFamily="49" charset="-127"/>
-              </a:rPr>
-              <a:t>) 및 </a:t>
-            </a:r>
-            <a:r>
-              <a:rPr lang="ko-KR" altLang="en-US" sz="1200" dirty="0" err="1">
-                <a:latin typeface="D2Coding" panose="020B0609020101020101" pitchFamily="49" charset="-127"/>
-                <a:ea typeface="D2Coding" panose="020B0609020101020101" pitchFamily="49" charset="-127"/>
-              </a:rPr>
-              <a:t>은닉층</a:t>
-            </a:r>
-            <a:r>
-              <a:rPr lang="ko-KR" altLang="en-US" sz="1200" dirty="0">
-                <a:latin typeface="D2Coding" panose="020B0609020101020101" pitchFamily="49" charset="-127"/>
-                <a:ea typeface="D2Coding" panose="020B0609020101020101" pitchFamily="49" charset="-127"/>
-              </a:rPr>
-              <a:t> 처리 </a:t>
-            </a:r>
-            <a:r>
-              <a:rPr lang="en-US" altLang="ko-KR" sz="1200" dirty="0">
-                <a:latin typeface="D2Coding" panose="020B0609020101020101" pitchFamily="49" charset="-127"/>
-                <a:ea typeface="D2Coding" panose="020B0609020101020101" pitchFamily="49" charset="-127"/>
-              </a:rPr>
-              <a:t>; </a:t>
-            </a:r>
-            <a:r>
-              <a:rPr lang="ko-KR" altLang="en-US" sz="1200" dirty="0">
-                <a:latin typeface="D2Coding" panose="020B0609020101020101" pitchFamily="49" charset="-127"/>
-                <a:ea typeface="D2Coding" panose="020B0609020101020101" pitchFamily="49" charset="-127"/>
-              </a:rPr>
-              <a:t>3개의 입력 </a:t>
-            </a:r>
-            <a:r>
-              <a:rPr lang="ko-KR" altLang="en-US" sz="1200" dirty="0" err="1">
-                <a:latin typeface="D2Coding" panose="020B0609020101020101" pitchFamily="49" charset="-127"/>
-                <a:ea typeface="D2Coding" panose="020B0609020101020101" pitchFamily="49" charset="-127"/>
-              </a:rPr>
-              <a:t>텐서를</a:t>
-            </a:r>
-            <a:r>
-              <a:rPr lang="ko-KR" altLang="en-US" sz="1200" dirty="0">
-                <a:latin typeface="D2Coding" panose="020B0609020101020101" pitchFamily="49" charset="-127"/>
-                <a:ea typeface="D2Coding" panose="020B0609020101020101" pitchFamily="49" charset="-127"/>
-              </a:rPr>
-              <a:t> 하나의 축으로 병합</a:t>
-            </a:r>
-            <a:r>
-              <a:rPr lang="en-US" altLang="ko-KR" sz="1200" dirty="0">
-                <a:latin typeface="D2Coding" panose="020B0609020101020101" pitchFamily="49" charset="-127"/>
-                <a:ea typeface="D2Coding" panose="020B0609020101020101" pitchFamily="49" charset="-127"/>
-              </a:rPr>
-              <a:t>(</a:t>
-            </a:r>
-            <a:r>
-              <a:rPr lang="ko-KR" altLang="en-US" sz="1200" dirty="0">
-                <a:latin typeface="D2Coding" panose="020B0609020101020101" pitchFamily="49" charset="-127"/>
-                <a:ea typeface="D2Coding" panose="020B0609020101020101" pitchFamily="49" charset="-127"/>
-              </a:rPr>
-              <a:t>10000 + 10000 + 100 = 20100)</a:t>
-            </a:r>
-          </a:p>
-          <a:p>
-            <a:r>
-              <a:rPr lang="ko-KR" altLang="en-US" sz="1200" dirty="0" err="1">
-                <a:latin typeface="D2Coding" panose="020B0609020101020101" pitchFamily="49" charset="-127"/>
-                <a:ea typeface="D2Coding" panose="020B0609020101020101" pitchFamily="49" charset="-127"/>
-              </a:rPr>
-              <a:t>features</a:t>
-            </a:r>
-            <a:r>
-              <a:rPr lang="ko-KR" altLang="en-US" sz="1200" dirty="0">
-                <a:latin typeface="D2Coding" panose="020B0609020101020101" pitchFamily="49" charset="-127"/>
-                <a:ea typeface="D2Coding" panose="020B0609020101020101" pitchFamily="49" charset="-127"/>
-              </a:rPr>
-              <a:t> = </a:t>
-            </a:r>
-            <a:r>
-              <a:rPr lang="ko-KR" altLang="en-US" sz="1200" dirty="0" err="1">
-                <a:latin typeface="D2Coding" panose="020B0609020101020101" pitchFamily="49" charset="-127"/>
-                <a:ea typeface="D2Coding" panose="020B0609020101020101" pitchFamily="49" charset="-127"/>
-              </a:rPr>
-              <a:t>layers.Concatenate</a:t>
-            </a:r>
-            <a:r>
-              <a:rPr lang="ko-KR" altLang="en-US" sz="1200" dirty="0">
-                <a:latin typeface="D2Coding" panose="020B0609020101020101" pitchFamily="49" charset="-127"/>
-                <a:ea typeface="D2Coding" panose="020B0609020101020101" pitchFamily="49" charset="-127"/>
-              </a:rPr>
-              <a:t>()([</a:t>
-            </a:r>
-            <a:r>
-              <a:rPr lang="ko-KR" altLang="en-US" sz="1200" dirty="0" err="1">
-                <a:latin typeface="D2Coding" panose="020B0609020101020101" pitchFamily="49" charset="-127"/>
-                <a:ea typeface="D2Coding" panose="020B0609020101020101" pitchFamily="49" charset="-127"/>
-              </a:rPr>
-              <a:t>title</a:t>
-            </a:r>
-            <a:r>
-              <a:rPr lang="ko-KR" altLang="en-US" sz="1200" dirty="0">
-                <a:latin typeface="D2Coding" panose="020B0609020101020101" pitchFamily="49" charset="-127"/>
-                <a:ea typeface="D2Coding" panose="020B0609020101020101" pitchFamily="49" charset="-127"/>
-              </a:rPr>
-              <a:t>, </a:t>
-            </a:r>
-            <a:r>
-              <a:rPr lang="ko-KR" altLang="en-US" sz="1200" dirty="0" err="1">
-                <a:latin typeface="D2Coding" panose="020B0609020101020101" pitchFamily="49" charset="-127"/>
-                <a:ea typeface="D2Coding" panose="020B0609020101020101" pitchFamily="49" charset="-127"/>
-              </a:rPr>
-              <a:t>text_body</a:t>
-            </a:r>
-            <a:r>
-              <a:rPr lang="ko-KR" altLang="en-US" sz="1200" dirty="0">
-                <a:latin typeface="D2Coding" panose="020B0609020101020101" pitchFamily="49" charset="-127"/>
-                <a:ea typeface="D2Coding" panose="020B0609020101020101" pitchFamily="49" charset="-127"/>
-              </a:rPr>
-              <a:t>, </a:t>
-            </a:r>
-            <a:r>
-              <a:rPr lang="ko-KR" altLang="en-US" sz="1200" dirty="0" err="1">
-                <a:latin typeface="D2Coding" panose="020B0609020101020101" pitchFamily="49" charset="-127"/>
-                <a:ea typeface="D2Coding" panose="020B0609020101020101" pitchFamily="49" charset="-127"/>
-              </a:rPr>
-              <a:t>tags</a:t>
-            </a:r>
-            <a:r>
-              <a:rPr lang="ko-KR" altLang="en-US" sz="1200" dirty="0">
-                <a:latin typeface="D2Coding" panose="020B0609020101020101" pitchFamily="49" charset="-127"/>
-                <a:ea typeface="D2Coding" panose="020B0609020101020101" pitchFamily="49" charset="-127"/>
-              </a:rPr>
-              <a:t>])</a:t>
-            </a:r>
-          </a:p>
-          <a:p>
-            <a:endParaRPr lang="ko-KR" altLang="en-US" sz="1200" dirty="0">
-              <a:latin typeface="D2Coding" panose="020B0609020101020101" pitchFamily="49" charset="-127"/>
-              <a:ea typeface="D2Coding" panose="020B0609020101020101" pitchFamily="49" charset="-127"/>
-            </a:endParaRPr>
-          </a:p>
-          <a:p>
-            <a:r>
-              <a:rPr lang="ko-KR" altLang="en-US" sz="1200" dirty="0">
-                <a:latin typeface="D2Coding" panose="020B0609020101020101" pitchFamily="49" charset="-127"/>
-                <a:ea typeface="D2Coding" panose="020B0609020101020101" pitchFamily="49" charset="-127"/>
-              </a:rPr>
-              <a:t># 병합된 입력 데이터로부터 주요 특징을 추출하는 완전 연결 </a:t>
-            </a:r>
-            <a:r>
-              <a:rPr lang="ko-KR" altLang="en-US" sz="1200" dirty="0" err="1">
-                <a:latin typeface="D2Coding" panose="020B0609020101020101" pitchFamily="49" charset="-127"/>
-                <a:ea typeface="D2Coding" panose="020B0609020101020101" pitchFamily="49" charset="-127"/>
-              </a:rPr>
-              <a:t>은닉층</a:t>
-            </a:r>
-            <a:r>
-              <a:rPr lang="ko-KR" altLang="en-US" sz="1200" dirty="0">
-                <a:latin typeface="D2Coding" panose="020B0609020101020101" pitchFamily="49" charset="-127"/>
-                <a:ea typeface="D2Coding" panose="020B0609020101020101" pitchFamily="49" charset="-127"/>
-              </a:rPr>
-              <a:t> (노드 64개, </a:t>
-            </a:r>
-            <a:r>
-              <a:rPr lang="ko-KR" altLang="en-US" sz="1200" dirty="0" err="1">
-                <a:latin typeface="D2Coding" panose="020B0609020101020101" pitchFamily="49" charset="-127"/>
-                <a:ea typeface="D2Coding" panose="020B0609020101020101" pitchFamily="49" charset="-127"/>
-              </a:rPr>
-              <a:t>ReLU</a:t>
-            </a:r>
-            <a:r>
-              <a:rPr lang="ko-KR" altLang="en-US" sz="1200" dirty="0">
-                <a:latin typeface="D2Coding" panose="020B0609020101020101" pitchFamily="49" charset="-127"/>
-                <a:ea typeface="D2Coding" panose="020B0609020101020101" pitchFamily="49" charset="-127"/>
-              </a:rPr>
-              <a:t> 활성화 함수)</a:t>
-            </a:r>
-          </a:p>
-          <a:p>
-            <a:r>
-              <a:rPr lang="ko-KR" altLang="en-US" sz="1200" dirty="0" err="1">
-                <a:latin typeface="D2Coding" panose="020B0609020101020101" pitchFamily="49" charset="-127"/>
-                <a:ea typeface="D2Coding" panose="020B0609020101020101" pitchFamily="49" charset="-127"/>
-              </a:rPr>
-              <a:t>features</a:t>
-            </a:r>
-            <a:r>
-              <a:rPr lang="ko-KR" altLang="en-US" sz="1200" dirty="0">
-                <a:latin typeface="D2Coding" panose="020B0609020101020101" pitchFamily="49" charset="-127"/>
-                <a:ea typeface="D2Coding" panose="020B0609020101020101" pitchFamily="49" charset="-127"/>
-              </a:rPr>
-              <a:t> = </a:t>
-            </a:r>
-            <a:r>
-              <a:rPr lang="ko-KR" altLang="en-US" sz="1200" dirty="0" err="1">
-                <a:latin typeface="D2Coding" panose="020B0609020101020101" pitchFamily="49" charset="-127"/>
-                <a:ea typeface="D2Coding" panose="020B0609020101020101" pitchFamily="49" charset="-127"/>
-              </a:rPr>
-              <a:t>layers.Dense</a:t>
-            </a:r>
-            <a:r>
-              <a:rPr lang="ko-KR" altLang="en-US" sz="1200" dirty="0">
-                <a:latin typeface="D2Coding" panose="020B0609020101020101" pitchFamily="49" charset="-127"/>
-                <a:ea typeface="D2Coding" panose="020B0609020101020101" pitchFamily="49" charset="-127"/>
-              </a:rPr>
-              <a:t>(64, </a:t>
-            </a:r>
-            <a:r>
-              <a:rPr lang="ko-KR" altLang="en-US" sz="1200" dirty="0" err="1">
-                <a:latin typeface="D2Coding" panose="020B0609020101020101" pitchFamily="49" charset="-127"/>
-                <a:ea typeface="D2Coding" panose="020B0609020101020101" pitchFamily="49" charset="-127"/>
-              </a:rPr>
-              <a:t>activation</a:t>
-            </a:r>
-            <a:r>
-              <a:rPr lang="ko-KR" altLang="en-US" sz="1200" dirty="0">
-                <a:latin typeface="D2Coding" panose="020B0609020101020101" pitchFamily="49" charset="-127"/>
-                <a:ea typeface="D2Coding" panose="020B0609020101020101" pitchFamily="49" charset="-127"/>
-              </a:rPr>
-              <a:t>="</a:t>
-            </a:r>
-            <a:r>
-              <a:rPr lang="ko-KR" altLang="en-US" sz="1200" dirty="0" err="1">
-                <a:latin typeface="D2Coding" panose="020B0609020101020101" pitchFamily="49" charset="-127"/>
-                <a:ea typeface="D2Coding" panose="020B0609020101020101" pitchFamily="49" charset="-127"/>
-              </a:rPr>
-              <a:t>relu</a:t>
-            </a:r>
-            <a:r>
-              <a:rPr lang="ko-KR" altLang="en-US" sz="1200" dirty="0">
-                <a:latin typeface="D2Coding" panose="020B0609020101020101" pitchFamily="49" charset="-127"/>
-                <a:ea typeface="D2Coding" panose="020B0609020101020101" pitchFamily="49" charset="-127"/>
-              </a:rPr>
-              <a:t>", </a:t>
-            </a:r>
-            <a:r>
-              <a:rPr lang="ko-KR" altLang="en-US" sz="1200" dirty="0" err="1">
-                <a:latin typeface="D2Coding" panose="020B0609020101020101" pitchFamily="49" charset="-127"/>
-                <a:ea typeface="D2Coding" panose="020B0609020101020101" pitchFamily="49" charset="-127"/>
-              </a:rPr>
-              <a:t>name</a:t>
-            </a:r>
-            <a:r>
-              <a:rPr lang="ko-KR" altLang="en-US" sz="1200" dirty="0">
-                <a:latin typeface="D2Coding" panose="020B0609020101020101" pitchFamily="49" charset="-127"/>
-                <a:ea typeface="D2Coding" panose="020B0609020101020101" pitchFamily="49" charset="-127"/>
-              </a:rPr>
-              <a:t>="</a:t>
-            </a:r>
-            <a:r>
-              <a:rPr lang="ko-KR" altLang="en-US" sz="1200" dirty="0" err="1">
-                <a:latin typeface="D2Coding" panose="020B0609020101020101" pitchFamily="49" charset="-127"/>
-                <a:ea typeface="D2Coding" panose="020B0609020101020101" pitchFamily="49" charset="-127"/>
-              </a:rPr>
-              <a:t>dense_features</a:t>
-            </a:r>
-            <a:r>
-              <a:rPr lang="ko-KR" altLang="en-US" sz="1200" dirty="0">
-                <a:latin typeface="D2Coding" panose="020B0609020101020101" pitchFamily="49" charset="-127"/>
-                <a:ea typeface="D2Coding" panose="020B0609020101020101" pitchFamily="49" charset="-127"/>
-              </a:rPr>
-              <a:t>")(</a:t>
-            </a:r>
-            <a:r>
-              <a:rPr lang="ko-KR" altLang="en-US" sz="1200" dirty="0" err="1">
-                <a:latin typeface="D2Coding" panose="020B0609020101020101" pitchFamily="49" charset="-127"/>
-                <a:ea typeface="D2Coding" panose="020B0609020101020101" pitchFamily="49" charset="-127"/>
-              </a:rPr>
-              <a:t>features</a:t>
-            </a:r>
-            <a:r>
-              <a:rPr lang="ko-KR" altLang="en-US" sz="1200" dirty="0">
-                <a:latin typeface="D2Coding" panose="020B0609020101020101" pitchFamily="49" charset="-127"/>
-                <a:ea typeface="D2Coding" panose="020B0609020101020101" pitchFamily="49" charset="-127"/>
-              </a:rPr>
-              <a:t>)</a:t>
-            </a:r>
-          </a:p>
-          <a:p>
-            <a:endParaRPr lang="ko-KR" altLang="en-US" sz="1200" dirty="0">
-              <a:latin typeface="D2Coding" panose="020B0609020101020101" pitchFamily="49" charset="-127"/>
-              <a:ea typeface="D2Coding" panose="020B0609020101020101" pitchFamily="49" charset="-127"/>
-            </a:endParaRPr>
-          </a:p>
-          <a:p>
-            <a:r>
-              <a:rPr lang="ko-KR" altLang="en-US" sz="1200" dirty="0">
-                <a:latin typeface="D2Coding" panose="020B0609020101020101" pitchFamily="49" charset="-127"/>
-                <a:ea typeface="D2Coding" panose="020B0609020101020101" pitchFamily="49" charset="-127"/>
-              </a:rPr>
-              <a:t># </a:t>
-            </a:r>
-            <a:r>
-              <a:rPr lang="en-US" altLang="ko-KR" sz="1200" dirty="0">
-                <a:latin typeface="D2Coding" panose="020B0609020101020101" pitchFamily="49" charset="-127"/>
-                <a:ea typeface="D2Coding" panose="020B0609020101020101" pitchFamily="49" charset="-127"/>
-              </a:rPr>
-              <a:t>4</a:t>
-            </a:r>
-            <a:r>
-              <a:rPr lang="ko-KR" altLang="en-US" sz="1200" dirty="0">
-                <a:latin typeface="D2Coding" panose="020B0609020101020101" pitchFamily="49" charset="-127"/>
-                <a:ea typeface="D2Coding" panose="020B0609020101020101" pitchFamily="49" charset="-127"/>
-              </a:rPr>
-              <a:t>. 다중 출력(</a:t>
-            </a:r>
-            <a:r>
-              <a:rPr lang="ko-KR" altLang="en-US" sz="1200" dirty="0" err="1">
-                <a:latin typeface="D2Coding" panose="020B0609020101020101" pitchFamily="49" charset="-127"/>
-                <a:ea typeface="D2Coding" panose="020B0609020101020101" pitchFamily="49" charset="-127"/>
-              </a:rPr>
-              <a:t>Multi-output</a:t>
-            </a:r>
-            <a:r>
-              <a:rPr lang="ko-KR" altLang="en-US" sz="1200" dirty="0">
-                <a:latin typeface="D2Coding" panose="020B0609020101020101" pitchFamily="49" charset="-127"/>
-                <a:ea typeface="D2Coding" panose="020B0609020101020101" pitchFamily="49" charset="-127"/>
-              </a:rPr>
-              <a:t>) 레이어 정의 </a:t>
-            </a:r>
-            <a:r>
-              <a:rPr lang="en-US" altLang="ko-KR" sz="1200" dirty="0">
-                <a:latin typeface="D2Coding" panose="020B0609020101020101" pitchFamily="49" charset="-127"/>
-                <a:ea typeface="D2Coding" panose="020B0609020101020101" pitchFamily="49" charset="-127"/>
-              </a:rPr>
-              <a:t>: </a:t>
-            </a:r>
-            <a:endParaRPr lang="ko-KR" altLang="en-US" sz="1200" dirty="0">
-              <a:latin typeface="D2Coding" panose="020B0609020101020101" pitchFamily="49" charset="-127"/>
-              <a:ea typeface="D2Coding" panose="020B0609020101020101" pitchFamily="49" charset="-127"/>
-            </a:endParaRPr>
-          </a:p>
-          <a:p>
-            <a:r>
-              <a:rPr lang="ko-KR" altLang="en-US" sz="1200" dirty="0" err="1">
-                <a:latin typeface="D2Coding" panose="020B0609020101020101" pitchFamily="49" charset="-127"/>
-                <a:ea typeface="D2Coding" panose="020B0609020101020101" pitchFamily="49" charset="-127"/>
-              </a:rPr>
-              <a:t>priority</a:t>
-            </a:r>
-            <a:r>
-              <a:rPr lang="ko-KR" altLang="en-US" sz="1200" dirty="0">
-                <a:latin typeface="D2Coding" panose="020B0609020101020101" pitchFamily="49" charset="-127"/>
-                <a:ea typeface="D2Coding" panose="020B0609020101020101" pitchFamily="49" charset="-127"/>
-              </a:rPr>
-              <a:t> = </a:t>
-            </a:r>
-            <a:r>
-              <a:rPr lang="ko-KR" altLang="en-US" sz="1200" dirty="0" err="1">
-                <a:latin typeface="D2Coding" panose="020B0609020101020101" pitchFamily="49" charset="-127"/>
-                <a:ea typeface="D2Coding" panose="020B0609020101020101" pitchFamily="49" charset="-127"/>
-              </a:rPr>
-              <a:t>layers.Dense</a:t>
-            </a:r>
-            <a:r>
-              <a:rPr lang="ko-KR" altLang="en-US" sz="1200" dirty="0">
-                <a:latin typeface="D2Coding" panose="020B0609020101020101" pitchFamily="49" charset="-127"/>
-                <a:ea typeface="D2Coding" panose="020B0609020101020101" pitchFamily="49" charset="-127"/>
-              </a:rPr>
-              <a:t>(1, </a:t>
-            </a:r>
-            <a:r>
-              <a:rPr lang="ko-KR" altLang="en-US" sz="1200" dirty="0" err="1">
-                <a:latin typeface="D2Coding" panose="020B0609020101020101" pitchFamily="49" charset="-127"/>
-                <a:ea typeface="D2Coding" panose="020B0609020101020101" pitchFamily="49" charset="-127"/>
-              </a:rPr>
-              <a:t>activation</a:t>
-            </a:r>
-            <a:r>
-              <a:rPr lang="ko-KR" altLang="en-US" sz="1200" dirty="0">
-                <a:latin typeface="D2Coding" panose="020B0609020101020101" pitchFamily="49" charset="-127"/>
-                <a:ea typeface="D2Coding" panose="020B0609020101020101" pitchFamily="49" charset="-127"/>
-              </a:rPr>
-              <a:t>="</a:t>
-            </a:r>
-            <a:r>
-              <a:rPr lang="ko-KR" altLang="en-US" sz="1200" dirty="0" err="1">
-                <a:latin typeface="D2Coding" panose="020B0609020101020101" pitchFamily="49" charset="-127"/>
-                <a:ea typeface="D2Coding" panose="020B0609020101020101" pitchFamily="49" charset="-127"/>
-              </a:rPr>
-              <a:t>sigmoid</a:t>
-            </a:r>
-            <a:r>
-              <a:rPr lang="ko-KR" altLang="en-US" sz="1200" dirty="0">
-                <a:latin typeface="D2Coding" panose="020B0609020101020101" pitchFamily="49" charset="-127"/>
-                <a:ea typeface="D2Coding" panose="020B0609020101020101" pitchFamily="49" charset="-127"/>
-              </a:rPr>
-              <a:t>", </a:t>
-            </a:r>
-            <a:r>
-              <a:rPr lang="ko-KR" altLang="en-US" sz="1200" dirty="0" err="1">
-                <a:latin typeface="D2Coding" panose="020B0609020101020101" pitchFamily="49" charset="-127"/>
-                <a:ea typeface="D2Coding" panose="020B0609020101020101" pitchFamily="49" charset="-127"/>
-              </a:rPr>
-              <a:t>name</a:t>
-            </a:r>
-            <a:r>
-              <a:rPr lang="ko-KR" altLang="en-US" sz="1200" dirty="0">
-                <a:latin typeface="D2Coding" panose="020B0609020101020101" pitchFamily="49" charset="-127"/>
-                <a:ea typeface="D2Coding" panose="020B0609020101020101" pitchFamily="49" charset="-127"/>
-              </a:rPr>
-              <a:t>="</a:t>
-            </a:r>
-            <a:r>
-              <a:rPr lang="ko-KR" altLang="en-US" sz="1200" dirty="0" err="1">
-                <a:latin typeface="D2Coding" panose="020B0609020101020101" pitchFamily="49" charset="-127"/>
-                <a:ea typeface="D2Coding" panose="020B0609020101020101" pitchFamily="49" charset="-127"/>
-              </a:rPr>
-              <a:t>priority</a:t>
-            </a:r>
-            <a:r>
-              <a:rPr lang="ko-KR" altLang="en-US" sz="1200" dirty="0">
-                <a:latin typeface="D2Coding" panose="020B0609020101020101" pitchFamily="49" charset="-127"/>
-                <a:ea typeface="D2Coding" panose="020B0609020101020101" pitchFamily="49" charset="-127"/>
-              </a:rPr>
-              <a:t>")(</a:t>
-            </a:r>
-            <a:r>
-              <a:rPr lang="ko-KR" altLang="en-US" sz="1200" dirty="0" err="1">
-                <a:latin typeface="D2Coding" panose="020B0609020101020101" pitchFamily="49" charset="-127"/>
-                <a:ea typeface="D2Coding" panose="020B0609020101020101" pitchFamily="49" charset="-127"/>
-              </a:rPr>
-              <a:t>features</a:t>
-            </a:r>
-            <a:r>
-              <a:rPr lang="ko-KR" altLang="en-US" sz="1200" dirty="0">
-                <a:latin typeface="D2Coding" panose="020B0609020101020101" pitchFamily="49" charset="-127"/>
-                <a:ea typeface="D2Coding" panose="020B0609020101020101" pitchFamily="49" charset="-127"/>
-              </a:rPr>
-              <a:t>) # 티켓 우선순위 점수 (0~1 사이 </a:t>
-            </a:r>
-            <a:r>
-              <a:rPr lang="ko-KR" altLang="en-US" sz="1200" dirty="0" err="1">
-                <a:latin typeface="D2Coding" panose="020B0609020101020101" pitchFamily="49" charset="-127"/>
-                <a:ea typeface="D2Coding" panose="020B0609020101020101" pitchFamily="49" charset="-127"/>
-              </a:rPr>
-              <a:t>스칼라값</a:t>
-            </a:r>
-            <a:r>
-              <a:rPr lang="ko-KR" altLang="en-US" sz="1200" dirty="0">
-                <a:latin typeface="D2Coding" panose="020B0609020101020101" pitchFamily="49" charset="-127"/>
-                <a:ea typeface="D2Coding" panose="020B0609020101020101" pitchFamily="49" charset="-127"/>
-              </a:rPr>
-              <a:t> 출력/이진 분류</a:t>
-            </a:r>
-            <a:r>
-              <a:rPr lang="en-US" altLang="ko-KR" sz="1200" dirty="0">
-                <a:latin typeface="D2Coding" panose="020B0609020101020101" pitchFamily="49" charset="-127"/>
-                <a:ea typeface="D2Coding" panose="020B0609020101020101" pitchFamily="49" charset="-127"/>
-              </a:rPr>
-              <a:t>)</a:t>
-            </a:r>
-            <a:endParaRPr lang="ko-KR" altLang="en-US" sz="1200" dirty="0">
-              <a:latin typeface="D2Coding" panose="020B0609020101020101" pitchFamily="49" charset="-127"/>
-              <a:ea typeface="D2Coding" panose="020B0609020101020101" pitchFamily="49" charset="-127"/>
-            </a:endParaRPr>
-          </a:p>
-          <a:p>
-            <a:r>
-              <a:rPr lang="ko-KR" altLang="en-US" sz="1200" dirty="0" err="1">
-                <a:latin typeface="D2Coding" panose="020B0609020101020101" pitchFamily="49" charset="-127"/>
-                <a:ea typeface="D2Coding" panose="020B0609020101020101" pitchFamily="49" charset="-127"/>
-              </a:rPr>
-              <a:t>department</a:t>
-            </a:r>
-            <a:r>
-              <a:rPr lang="ko-KR" altLang="en-US" sz="1200" dirty="0">
-                <a:latin typeface="D2Coding" panose="020B0609020101020101" pitchFamily="49" charset="-127"/>
-                <a:ea typeface="D2Coding" panose="020B0609020101020101" pitchFamily="49" charset="-127"/>
-              </a:rPr>
-              <a:t> = </a:t>
-            </a:r>
-            <a:r>
-              <a:rPr lang="ko-KR" altLang="en-US" sz="1200" dirty="0" err="1">
-                <a:latin typeface="D2Coding" panose="020B0609020101020101" pitchFamily="49" charset="-127"/>
-                <a:ea typeface="D2Coding" panose="020B0609020101020101" pitchFamily="49" charset="-127"/>
-              </a:rPr>
-              <a:t>layers.Dense</a:t>
-            </a:r>
-            <a:r>
-              <a:rPr lang="ko-KR" altLang="en-US" sz="1200" dirty="0">
-                <a:latin typeface="D2Coding" panose="020B0609020101020101" pitchFamily="49" charset="-127"/>
-                <a:ea typeface="D2Coding" panose="020B0609020101020101" pitchFamily="49" charset="-127"/>
-              </a:rPr>
-              <a:t>(</a:t>
-            </a:r>
-            <a:r>
-              <a:rPr lang="ko-KR" altLang="en-US" sz="1200" dirty="0" err="1">
-                <a:latin typeface="D2Coding" panose="020B0609020101020101" pitchFamily="49" charset="-127"/>
-                <a:ea typeface="D2Coding" panose="020B0609020101020101" pitchFamily="49" charset="-127"/>
-              </a:rPr>
-              <a:t>num_departments</a:t>
-            </a:r>
-            <a:r>
-              <a:rPr lang="ko-KR" altLang="en-US" sz="1200" dirty="0">
-                <a:latin typeface="D2Coding" panose="020B0609020101020101" pitchFamily="49" charset="-127"/>
-                <a:ea typeface="D2Coding" panose="020B0609020101020101" pitchFamily="49" charset="-127"/>
-              </a:rPr>
-              <a:t>, </a:t>
-            </a:r>
-            <a:r>
-              <a:rPr lang="ko-KR" altLang="en-US" sz="1200" dirty="0" err="1">
-                <a:latin typeface="D2Coding" panose="020B0609020101020101" pitchFamily="49" charset="-127"/>
-                <a:ea typeface="D2Coding" panose="020B0609020101020101" pitchFamily="49" charset="-127"/>
-              </a:rPr>
-              <a:t>activation</a:t>
-            </a:r>
-            <a:r>
-              <a:rPr lang="ko-KR" altLang="en-US" sz="1200" dirty="0">
-                <a:latin typeface="D2Coding" panose="020B0609020101020101" pitchFamily="49" charset="-127"/>
-                <a:ea typeface="D2Coding" panose="020B0609020101020101" pitchFamily="49" charset="-127"/>
-              </a:rPr>
-              <a:t>="</a:t>
-            </a:r>
-            <a:r>
-              <a:rPr lang="ko-KR" altLang="en-US" sz="1200" dirty="0" err="1">
-                <a:latin typeface="D2Coding" panose="020B0609020101020101" pitchFamily="49" charset="-127"/>
-                <a:ea typeface="D2Coding" panose="020B0609020101020101" pitchFamily="49" charset="-127"/>
-              </a:rPr>
-              <a:t>softmax</a:t>
-            </a:r>
-            <a:r>
-              <a:rPr lang="ko-KR" altLang="en-US" sz="1200" dirty="0">
-                <a:latin typeface="D2Coding" panose="020B0609020101020101" pitchFamily="49" charset="-127"/>
-                <a:ea typeface="D2Coding" panose="020B0609020101020101" pitchFamily="49" charset="-127"/>
-              </a:rPr>
-              <a:t>", </a:t>
-            </a:r>
-            <a:r>
-              <a:rPr lang="ko-KR" altLang="en-US" sz="1200" dirty="0" err="1">
-                <a:latin typeface="D2Coding" panose="020B0609020101020101" pitchFamily="49" charset="-127"/>
-                <a:ea typeface="D2Coding" panose="020B0609020101020101" pitchFamily="49" charset="-127"/>
-              </a:rPr>
-              <a:t>name</a:t>
-            </a:r>
-            <a:r>
-              <a:rPr lang="ko-KR" altLang="en-US" sz="1200" dirty="0">
-                <a:latin typeface="D2Coding" panose="020B0609020101020101" pitchFamily="49" charset="-127"/>
-                <a:ea typeface="D2Coding" panose="020B0609020101020101" pitchFamily="49" charset="-127"/>
-              </a:rPr>
-              <a:t>="</a:t>
-            </a:r>
-            <a:r>
-              <a:rPr lang="ko-KR" altLang="en-US" sz="1200" dirty="0" err="1">
-                <a:latin typeface="D2Coding" panose="020B0609020101020101" pitchFamily="49" charset="-127"/>
-                <a:ea typeface="D2Coding" panose="020B0609020101020101" pitchFamily="49" charset="-127"/>
-              </a:rPr>
-              <a:t>department</a:t>
-            </a:r>
-            <a:r>
-              <a:rPr lang="ko-KR" altLang="en-US" sz="1200" dirty="0">
-                <a:latin typeface="D2Coding" panose="020B0609020101020101" pitchFamily="49" charset="-127"/>
-                <a:ea typeface="D2Coding" panose="020B0609020101020101" pitchFamily="49" charset="-127"/>
-              </a:rPr>
-              <a:t>")(</a:t>
-            </a:r>
-            <a:r>
-              <a:rPr lang="ko-KR" altLang="en-US" sz="1200" dirty="0" err="1">
-                <a:latin typeface="D2Coding" panose="020B0609020101020101" pitchFamily="49" charset="-127"/>
-                <a:ea typeface="D2Coding" panose="020B0609020101020101" pitchFamily="49" charset="-127"/>
-              </a:rPr>
-              <a:t>features</a:t>
-            </a:r>
-            <a:r>
-              <a:rPr lang="ko-KR" altLang="en-US" sz="1200" dirty="0">
-                <a:latin typeface="D2Coding" panose="020B0609020101020101" pitchFamily="49" charset="-127"/>
-                <a:ea typeface="D2Coding" panose="020B0609020101020101" pitchFamily="49" charset="-127"/>
-              </a:rPr>
-              <a:t>) # </a:t>
-            </a:r>
-            <a:r>
-              <a:rPr lang="en-US" altLang="ko-KR" sz="1200" dirty="0">
-                <a:latin typeface="D2Coding" panose="020B0609020101020101" pitchFamily="49" charset="-127"/>
-                <a:ea typeface="D2Coding" panose="020B0609020101020101" pitchFamily="49" charset="-127"/>
-              </a:rPr>
-              <a:t>4</a:t>
-            </a:r>
-            <a:r>
-              <a:rPr lang="ko-KR" altLang="en-US" sz="1200" dirty="0">
-                <a:latin typeface="D2Coding" panose="020B0609020101020101" pitchFamily="49" charset="-127"/>
-                <a:ea typeface="D2Coding" panose="020B0609020101020101" pitchFamily="49" charset="-127"/>
-              </a:rPr>
-              <a:t>개 담당 부서 분류 (</a:t>
-            </a:r>
-            <a:r>
-              <a:rPr lang="ko-KR" altLang="en-US" sz="1200" dirty="0" err="1">
-                <a:latin typeface="D2Coding" panose="020B0609020101020101" pitchFamily="49" charset="-127"/>
-                <a:ea typeface="D2Coding" panose="020B0609020101020101" pitchFamily="49" charset="-127"/>
-              </a:rPr>
-              <a:t>확률값</a:t>
-            </a:r>
-            <a:r>
-              <a:rPr lang="ko-KR" altLang="en-US" sz="1200" dirty="0">
-                <a:latin typeface="D2Coding" panose="020B0609020101020101" pitchFamily="49" charset="-127"/>
-                <a:ea typeface="D2Coding" panose="020B0609020101020101" pitchFamily="49" charset="-127"/>
-              </a:rPr>
-              <a:t>/다중 분류</a:t>
-            </a:r>
-            <a:r>
-              <a:rPr lang="en-US" altLang="ko-KR" sz="1200" dirty="0">
-                <a:latin typeface="D2Coding" panose="020B0609020101020101" pitchFamily="49" charset="-127"/>
-                <a:ea typeface="D2Coding" panose="020B0609020101020101" pitchFamily="49" charset="-127"/>
-              </a:rPr>
-              <a:t>)</a:t>
-            </a:r>
-            <a:endParaRPr lang="ko-KR" altLang="en-US" sz="1200" dirty="0">
-              <a:latin typeface="D2Coding" panose="020B0609020101020101" pitchFamily="49" charset="-127"/>
-              <a:ea typeface="D2Coding" panose="020B0609020101020101" pitchFamily="49" charset="-127"/>
-            </a:endParaRPr>
-          </a:p>
-          <a:p>
-            <a:endParaRPr lang="ko-KR" altLang="en-US" sz="1200" dirty="0">
-              <a:latin typeface="D2Coding" panose="020B0609020101020101" pitchFamily="49" charset="-127"/>
-              <a:ea typeface="D2Coding" panose="020B0609020101020101" pitchFamily="49" charset="-127"/>
-            </a:endParaRPr>
-          </a:p>
-          <a:p>
-            <a:r>
-              <a:rPr lang="ko-KR" altLang="en-US" sz="1200" dirty="0">
-                <a:latin typeface="D2Coding" panose="020B0609020101020101" pitchFamily="49" charset="-127"/>
-                <a:ea typeface="D2Coding" panose="020B0609020101020101" pitchFamily="49" charset="-127"/>
-              </a:rPr>
-              <a:t># </a:t>
-            </a:r>
-            <a:r>
-              <a:rPr lang="en-US" altLang="ko-KR" sz="1200" dirty="0">
-                <a:latin typeface="D2Coding" panose="020B0609020101020101" pitchFamily="49" charset="-127"/>
-                <a:ea typeface="D2Coding" panose="020B0609020101020101" pitchFamily="49" charset="-127"/>
-              </a:rPr>
-              <a:t>5</a:t>
-            </a:r>
-            <a:r>
-              <a:rPr lang="ko-KR" altLang="en-US" sz="1200" dirty="0">
-                <a:latin typeface="D2Coding" panose="020B0609020101020101" pitchFamily="49" charset="-127"/>
-                <a:ea typeface="D2Coding" panose="020B0609020101020101" pitchFamily="49" charset="-127"/>
-              </a:rPr>
-              <a:t>. </a:t>
-            </a:r>
-            <a:r>
-              <a:rPr lang="ko-KR" altLang="en-US" sz="1200" dirty="0" err="1">
-                <a:latin typeface="D2Coding" panose="020B0609020101020101" pitchFamily="49" charset="-127"/>
-                <a:ea typeface="D2Coding" panose="020B0609020101020101" pitchFamily="49" charset="-127"/>
-              </a:rPr>
-              <a:t>Keras</a:t>
-            </a:r>
-            <a:r>
-              <a:rPr lang="ko-KR" altLang="en-US" sz="1200" dirty="0">
-                <a:latin typeface="D2Coding" panose="020B0609020101020101" pitchFamily="49" charset="-127"/>
-                <a:ea typeface="D2Coding" panose="020B0609020101020101" pitchFamily="49" charset="-127"/>
-              </a:rPr>
-              <a:t> </a:t>
-            </a:r>
-            <a:r>
-              <a:rPr lang="ko-KR" altLang="en-US" sz="1200" dirty="0" err="1">
-                <a:latin typeface="D2Coding" panose="020B0609020101020101" pitchFamily="49" charset="-127"/>
-                <a:ea typeface="D2Coding" panose="020B0609020101020101" pitchFamily="49" charset="-127"/>
-              </a:rPr>
-              <a:t>Functional</a:t>
-            </a:r>
-            <a:r>
-              <a:rPr lang="ko-KR" altLang="en-US" sz="1200" dirty="0">
-                <a:latin typeface="D2Coding" panose="020B0609020101020101" pitchFamily="49" charset="-127"/>
-                <a:ea typeface="D2Coding" panose="020B0609020101020101" pitchFamily="49" charset="-127"/>
-              </a:rPr>
-              <a:t> API 모델 최종 생성 </a:t>
-            </a:r>
-            <a:r>
-              <a:rPr lang="en-US" altLang="ko-KR" sz="1200" dirty="0">
-                <a:latin typeface="D2Coding" panose="020B0609020101020101" pitchFamily="49" charset="-127"/>
-                <a:ea typeface="D2Coding" panose="020B0609020101020101" pitchFamily="49" charset="-127"/>
-              </a:rPr>
-              <a:t>: </a:t>
-            </a:r>
-            <a:r>
-              <a:rPr lang="ko-KR" altLang="en-US" sz="1200" dirty="0">
-                <a:latin typeface="D2Coding" panose="020B0609020101020101" pitchFamily="49" charset="-127"/>
-                <a:ea typeface="D2Coding" panose="020B0609020101020101" pitchFamily="49" charset="-127"/>
-              </a:rPr>
-              <a:t>입력(</a:t>
-            </a:r>
-            <a:r>
-              <a:rPr lang="ko-KR" altLang="en-US" sz="1200" dirty="0" err="1">
-                <a:latin typeface="D2Coding" panose="020B0609020101020101" pitchFamily="49" charset="-127"/>
-                <a:ea typeface="D2Coding" panose="020B0609020101020101" pitchFamily="49" charset="-127"/>
-              </a:rPr>
-              <a:t>inputs</a:t>
-            </a:r>
-            <a:r>
-              <a:rPr lang="ko-KR" altLang="en-US" sz="1200" dirty="0">
-                <a:latin typeface="D2Coding" panose="020B0609020101020101" pitchFamily="49" charset="-127"/>
-                <a:ea typeface="D2Coding" panose="020B0609020101020101" pitchFamily="49" charset="-127"/>
-              </a:rPr>
-              <a:t>) 리스트와 출력(</a:t>
-            </a:r>
-            <a:r>
-              <a:rPr lang="ko-KR" altLang="en-US" sz="1200" dirty="0" err="1">
-                <a:latin typeface="D2Coding" panose="020B0609020101020101" pitchFamily="49" charset="-127"/>
-                <a:ea typeface="D2Coding" panose="020B0609020101020101" pitchFamily="49" charset="-127"/>
-              </a:rPr>
-              <a:t>outputs</a:t>
-            </a:r>
-            <a:r>
-              <a:rPr lang="ko-KR" altLang="en-US" sz="1200" dirty="0">
-                <a:latin typeface="D2Coding" panose="020B0609020101020101" pitchFamily="49" charset="-127"/>
-                <a:ea typeface="D2Coding" panose="020B0609020101020101" pitchFamily="49" charset="-127"/>
-              </a:rPr>
-              <a:t>) 리스트를 연결하여 하나의 그래프 구조 모델로 묶음</a:t>
-            </a:r>
-          </a:p>
-          <a:p>
-            <a:r>
-              <a:rPr lang="ko-KR" altLang="en-US" sz="1200" dirty="0" err="1">
-                <a:latin typeface="D2Coding" panose="020B0609020101020101" pitchFamily="49" charset="-127"/>
-                <a:ea typeface="D2Coding" panose="020B0609020101020101" pitchFamily="49" charset="-127"/>
-              </a:rPr>
-              <a:t>model</a:t>
-            </a:r>
-            <a:r>
-              <a:rPr lang="ko-KR" altLang="en-US" sz="1200" dirty="0">
-                <a:latin typeface="D2Coding" panose="020B0609020101020101" pitchFamily="49" charset="-127"/>
-                <a:ea typeface="D2Coding" panose="020B0609020101020101" pitchFamily="49" charset="-127"/>
-              </a:rPr>
-              <a:t> = </a:t>
-            </a:r>
-            <a:r>
-              <a:rPr lang="ko-KR" altLang="en-US" sz="1200" dirty="0" err="1">
-                <a:latin typeface="D2Coding" panose="020B0609020101020101" pitchFamily="49" charset="-127"/>
-                <a:ea typeface="D2Coding" panose="020B0609020101020101" pitchFamily="49" charset="-127"/>
-              </a:rPr>
-              <a:t>keras.Model</a:t>
-            </a:r>
-            <a:r>
-              <a:rPr lang="ko-KR" altLang="en-US" sz="1200" dirty="0">
-                <a:latin typeface="D2Coding" panose="020B0609020101020101" pitchFamily="49" charset="-127"/>
-                <a:ea typeface="D2Coding" panose="020B0609020101020101" pitchFamily="49" charset="-127"/>
-              </a:rPr>
-              <a:t>(</a:t>
-            </a:r>
-            <a:r>
-              <a:rPr lang="ko-KR" altLang="en-US" sz="1200" dirty="0" err="1">
-                <a:latin typeface="D2Coding" panose="020B0609020101020101" pitchFamily="49" charset="-127"/>
-                <a:ea typeface="D2Coding" panose="020B0609020101020101" pitchFamily="49" charset="-127"/>
-              </a:rPr>
-              <a:t>inputs</a:t>
-            </a:r>
-            <a:r>
-              <a:rPr lang="ko-KR" altLang="en-US" sz="1200" dirty="0">
-                <a:latin typeface="D2Coding" panose="020B0609020101020101" pitchFamily="49" charset="-127"/>
-                <a:ea typeface="D2Coding" panose="020B0609020101020101" pitchFamily="49" charset="-127"/>
-              </a:rPr>
-              <a:t>=[</a:t>
-            </a:r>
-            <a:r>
-              <a:rPr lang="ko-KR" altLang="en-US" sz="1200" dirty="0" err="1">
-                <a:latin typeface="D2Coding" panose="020B0609020101020101" pitchFamily="49" charset="-127"/>
-                <a:ea typeface="D2Coding" panose="020B0609020101020101" pitchFamily="49" charset="-127"/>
-              </a:rPr>
-              <a:t>title</a:t>
-            </a:r>
-            <a:r>
-              <a:rPr lang="ko-KR" altLang="en-US" sz="1200" dirty="0">
-                <a:latin typeface="D2Coding" panose="020B0609020101020101" pitchFamily="49" charset="-127"/>
-                <a:ea typeface="D2Coding" panose="020B0609020101020101" pitchFamily="49" charset="-127"/>
-              </a:rPr>
-              <a:t>, </a:t>
-            </a:r>
-            <a:r>
-              <a:rPr lang="ko-KR" altLang="en-US" sz="1200" dirty="0" err="1">
-                <a:latin typeface="D2Coding" panose="020B0609020101020101" pitchFamily="49" charset="-127"/>
-                <a:ea typeface="D2Coding" panose="020B0609020101020101" pitchFamily="49" charset="-127"/>
-              </a:rPr>
-              <a:t>text_body</a:t>
-            </a:r>
-            <a:r>
-              <a:rPr lang="ko-KR" altLang="en-US" sz="1200" dirty="0">
-                <a:latin typeface="D2Coding" panose="020B0609020101020101" pitchFamily="49" charset="-127"/>
-                <a:ea typeface="D2Coding" panose="020B0609020101020101" pitchFamily="49" charset="-127"/>
-              </a:rPr>
-              <a:t>, </a:t>
-            </a:r>
-            <a:r>
-              <a:rPr lang="ko-KR" altLang="en-US" sz="1200" dirty="0" err="1">
-                <a:latin typeface="D2Coding" panose="020B0609020101020101" pitchFamily="49" charset="-127"/>
-                <a:ea typeface="D2Coding" panose="020B0609020101020101" pitchFamily="49" charset="-127"/>
-              </a:rPr>
-              <a:t>tags</a:t>
-            </a:r>
-            <a:r>
-              <a:rPr lang="ko-KR" altLang="en-US" sz="1200" dirty="0">
-                <a:latin typeface="D2Coding" panose="020B0609020101020101" pitchFamily="49" charset="-127"/>
-                <a:ea typeface="D2Coding" panose="020B0609020101020101" pitchFamily="49" charset="-127"/>
-              </a:rPr>
-              <a:t>], </a:t>
-            </a:r>
-            <a:r>
-              <a:rPr lang="ko-KR" altLang="en-US" sz="1200" dirty="0" err="1">
-                <a:latin typeface="D2Coding" panose="020B0609020101020101" pitchFamily="49" charset="-127"/>
-                <a:ea typeface="D2Coding" panose="020B0609020101020101" pitchFamily="49" charset="-127"/>
-              </a:rPr>
-              <a:t>outputs</a:t>
-            </a:r>
-            <a:r>
-              <a:rPr lang="ko-KR" altLang="en-US" sz="1200" dirty="0">
-                <a:latin typeface="D2Coding" panose="020B0609020101020101" pitchFamily="49" charset="-127"/>
-                <a:ea typeface="D2Coding" panose="020B0609020101020101" pitchFamily="49" charset="-127"/>
-              </a:rPr>
-              <a:t>=[</a:t>
-            </a:r>
-            <a:r>
-              <a:rPr lang="ko-KR" altLang="en-US" sz="1200" dirty="0" err="1">
-                <a:latin typeface="D2Coding" panose="020B0609020101020101" pitchFamily="49" charset="-127"/>
-                <a:ea typeface="D2Coding" panose="020B0609020101020101" pitchFamily="49" charset="-127"/>
-              </a:rPr>
-              <a:t>priority</a:t>
-            </a:r>
-            <a:r>
-              <a:rPr lang="ko-KR" altLang="en-US" sz="1200" dirty="0">
-                <a:latin typeface="D2Coding" panose="020B0609020101020101" pitchFamily="49" charset="-127"/>
-                <a:ea typeface="D2Coding" panose="020B0609020101020101" pitchFamily="49" charset="-127"/>
-              </a:rPr>
-              <a:t>, </a:t>
-            </a:r>
-            <a:r>
-              <a:rPr lang="ko-KR" altLang="en-US" sz="1200" dirty="0" err="1">
-                <a:latin typeface="D2Coding" panose="020B0609020101020101" pitchFamily="49" charset="-127"/>
-                <a:ea typeface="D2Coding" panose="020B0609020101020101" pitchFamily="49" charset="-127"/>
-              </a:rPr>
-              <a:t>department</a:t>
-            </a:r>
-            <a:r>
-              <a:rPr lang="ko-KR" altLang="en-US" sz="1200" dirty="0">
-                <a:latin typeface="D2Coding" panose="020B0609020101020101" pitchFamily="49" charset="-127"/>
-                <a:ea typeface="D2Coding" panose="020B0609020101020101" pitchFamily="49" charset="-127"/>
-              </a:rPr>
-              <a:t>],)</a:t>
-            </a:r>
-          </a:p>
-          <a:p>
-            <a:endParaRPr lang="ko-KR" altLang="en-US" sz="1200" dirty="0">
-              <a:latin typeface="D2Coding" panose="020B0609020101020101" pitchFamily="49" charset="-127"/>
-              <a:ea typeface="D2Coding" panose="020B0609020101020101" pitchFamily="49" charset="-127"/>
-            </a:endParaRPr>
-          </a:p>
-          <a:p>
-            <a:r>
-              <a:rPr lang="ko-KR" altLang="en-US" sz="1200" dirty="0">
-                <a:latin typeface="D2Coding" panose="020B0609020101020101" pitchFamily="49" charset="-127"/>
-                <a:ea typeface="D2Coding" panose="020B0609020101020101" pitchFamily="49" charset="-127"/>
-              </a:rPr>
-              <a:t># 모델 구조 출력 (입력 3개 -&gt; 병합 -&gt; </a:t>
-            </a:r>
-            <a:r>
-              <a:rPr lang="ko-KR" altLang="en-US" sz="1200" dirty="0" err="1">
-                <a:latin typeface="D2Coding" panose="020B0609020101020101" pitchFamily="49" charset="-127"/>
-                <a:ea typeface="D2Coding" panose="020B0609020101020101" pitchFamily="49" charset="-127"/>
-              </a:rPr>
-              <a:t>은닉층</a:t>
-            </a:r>
-            <a:r>
-              <a:rPr lang="ko-KR" altLang="en-US" sz="1200" dirty="0">
-                <a:latin typeface="D2Coding" panose="020B0609020101020101" pitchFamily="49" charset="-127"/>
-                <a:ea typeface="D2Coding" panose="020B0609020101020101" pitchFamily="49" charset="-127"/>
-              </a:rPr>
-              <a:t> -&gt; 출력 2개 흐름 확인)</a:t>
-            </a:r>
-          </a:p>
-          <a:p>
-            <a:r>
-              <a:rPr lang="ko-KR" altLang="en-US" sz="1200" dirty="0" err="1">
+              <a:rPr lang="en-US" altLang="ko-KR" sz="1600" dirty="0" err="1">
                 <a:latin typeface="D2Coding" panose="020B0609020101020101" pitchFamily="49" charset="-127"/>
                 <a:ea typeface="D2Coding" panose="020B0609020101020101" pitchFamily="49" charset="-127"/>
               </a:rPr>
               <a:t>model.summary</a:t>
             </a:r>
             <a:r>
-              <a:rPr lang="ko-KR" altLang="en-US" sz="1200" dirty="0">
+              <a:rPr lang="en-US" altLang="ko-KR" sz="1600" dirty="0">
                 <a:latin typeface="D2Coding" panose="020B0609020101020101" pitchFamily="49" charset="-127"/>
                 <a:ea typeface="D2Coding" panose="020B0609020101020101" pitchFamily="49" charset="-127"/>
               </a:rPr>
@@ -12063,6 +15111,180 @@
           </a:p>
         </p:txBody>
       </p:sp>
+      <p:pic>
+        <p:nvPicPr>
+          <p:cNvPr id="6" name="그림 5">
+            <a:extLst>
+              <a:ext uri="{FF2B5EF4-FFF2-40B4-BE49-F238E27FC236}">
+                <a16:creationId xmlns:a16="http://schemas.microsoft.com/office/drawing/2014/main" id="{AC2E1A66-B7B4-BA82-2CD2-C95A9FBDBF63}"/>
+              </a:ext>
+            </a:extLst>
+          </p:cNvPr>
+          <p:cNvPicPr>
+            <a:picLocks noChangeAspect="1"/>
+          </p:cNvPicPr>
+          <p:nvPr/>
+        </p:nvPicPr>
+        <p:blipFill>
+          <a:blip r:embed="rId2"/>
+          <a:stretch>
+            <a:fillRect/>
+          </a:stretch>
+        </p:blipFill>
+        <p:spPr>
+          <a:xfrm>
+            <a:off x="571197" y="3552669"/>
+            <a:ext cx="7308943" cy="2811860"/>
+          </a:xfrm>
+          <a:prstGeom prst="rect">
+            <a:avLst/>
+          </a:prstGeom>
+          <a:ln>
+            <a:solidFill>
+              <a:schemeClr val="tx1"/>
+            </a:solidFill>
+          </a:ln>
+        </p:spPr>
+      </p:pic>
+      <p:sp>
+        <p:nvSpPr>
+          <p:cNvPr id="7" name="슬라이드 번호 개체 틀 3">
+            <a:extLst>
+              <a:ext uri="{FF2B5EF4-FFF2-40B4-BE49-F238E27FC236}">
+                <a16:creationId xmlns:a16="http://schemas.microsoft.com/office/drawing/2014/main" id="{4F39FBDB-312A-1D60-914C-1BDDB8535D2B}"/>
+              </a:ext>
+            </a:extLst>
+          </p:cNvPr>
+          <p:cNvSpPr txBox="1">
+            <a:spLocks/>
+          </p:cNvSpPr>
+          <p:nvPr/>
+        </p:nvSpPr>
+        <p:spPr>
+          <a:xfrm>
+            <a:off x="11142661" y="299420"/>
+            <a:ext cx="753545" cy="365125"/>
+          </a:xfrm>
+          <a:prstGeom prst="rect">
+            <a:avLst/>
+          </a:prstGeom>
+        </p:spPr>
+        <p:txBody>
+          <a:bodyPr vert="horz" lIns="91440" tIns="45720" rIns="91440" bIns="45720" rtlCol="0" anchor="ctr"/>
+          <a:lstStyle>
+            <a:defPPr rtl="0">
+              <a:defRPr lang="ko-KR"/>
+            </a:defPPr>
+            <a:lvl1pPr marL="0" algn="r" defTabSz="914400" rtl="0" eaLnBrk="1" latinLnBrk="0" hangingPunct="1">
+              <a:defRPr sz="1200" kern="1200" baseline="0">
+                <a:solidFill>
+                  <a:schemeClr val="tx1">
+                    <a:lumMod val="65000"/>
+                    <a:lumOff val="35000"/>
+                  </a:schemeClr>
+                </a:solidFill>
+                <a:latin typeface="맑은 고딕" panose="020B0503020000020004" pitchFamily="50" charset="-127"/>
+                <a:ea typeface="맑은 고딕" panose="020B0503020000020004" pitchFamily="50" charset="-127"/>
+                <a:cs typeface="+mn-cs"/>
+              </a:defRPr>
+            </a:lvl1pPr>
+            <a:lvl2pPr marL="457200" algn="l" defTabSz="914400" rtl="0" eaLnBrk="1" latinLnBrk="0" hangingPunct="1">
+              <a:defRPr sz="1800" kern="1200">
+                <a:solidFill>
+                  <a:schemeClr val="tx1"/>
+                </a:solidFill>
+                <a:latin typeface="+mn-lt"/>
+                <a:ea typeface="+mn-ea"/>
+                <a:cs typeface="+mn-cs"/>
+              </a:defRPr>
+            </a:lvl2pPr>
+            <a:lvl3pPr marL="914400" algn="l" defTabSz="914400" rtl="0" eaLnBrk="1" latinLnBrk="0" hangingPunct="1">
+              <a:defRPr sz="1800" kern="1200">
+                <a:solidFill>
+                  <a:schemeClr val="tx1"/>
+                </a:solidFill>
+                <a:latin typeface="+mn-lt"/>
+                <a:ea typeface="+mn-ea"/>
+                <a:cs typeface="+mn-cs"/>
+              </a:defRPr>
+            </a:lvl3pPr>
+            <a:lvl4pPr marL="1371600" algn="l" defTabSz="914400" rtl="0" eaLnBrk="1" latinLnBrk="0" hangingPunct="1">
+              <a:defRPr sz="1800" kern="1200">
+                <a:solidFill>
+                  <a:schemeClr val="tx1"/>
+                </a:solidFill>
+                <a:latin typeface="+mn-lt"/>
+                <a:ea typeface="+mn-ea"/>
+                <a:cs typeface="+mn-cs"/>
+              </a:defRPr>
+            </a:lvl4pPr>
+            <a:lvl5pPr marL="1828800" algn="l" defTabSz="914400" rtl="0" eaLnBrk="1" latinLnBrk="0" hangingPunct="1">
+              <a:defRPr sz="1800" kern="1200">
+                <a:solidFill>
+                  <a:schemeClr val="tx1"/>
+                </a:solidFill>
+                <a:latin typeface="+mn-lt"/>
+                <a:ea typeface="+mn-ea"/>
+                <a:cs typeface="+mn-cs"/>
+              </a:defRPr>
+            </a:lvl5pPr>
+            <a:lvl6pPr marL="2286000" algn="l" defTabSz="914400" rtl="0" eaLnBrk="1" latinLnBrk="0" hangingPunct="1">
+              <a:defRPr sz="1800" kern="1200">
+                <a:solidFill>
+                  <a:schemeClr val="tx1"/>
+                </a:solidFill>
+                <a:latin typeface="+mn-lt"/>
+                <a:ea typeface="+mn-ea"/>
+                <a:cs typeface="+mn-cs"/>
+              </a:defRPr>
+            </a:lvl6pPr>
+            <a:lvl7pPr marL="2743200" algn="l" defTabSz="914400" rtl="0" eaLnBrk="1" latinLnBrk="0" hangingPunct="1">
+              <a:defRPr sz="1800" kern="1200">
+                <a:solidFill>
+                  <a:schemeClr val="tx1"/>
+                </a:solidFill>
+                <a:latin typeface="+mn-lt"/>
+                <a:ea typeface="+mn-ea"/>
+                <a:cs typeface="+mn-cs"/>
+              </a:defRPr>
+            </a:lvl7pPr>
+            <a:lvl8pPr marL="3200400" algn="l" defTabSz="914400" rtl="0" eaLnBrk="1" latinLnBrk="0" hangingPunct="1">
+              <a:defRPr sz="1800" kern="1200">
+                <a:solidFill>
+                  <a:schemeClr val="tx1"/>
+                </a:solidFill>
+                <a:latin typeface="+mn-lt"/>
+                <a:ea typeface="+mn-ea"/>
+                <a:cs typeface="+mn-cs"/>
+              </a:defRPr>
+            </a:lvl8pPr>
+            <a:lvl9pPr marL="3657600" algn="l" defTabSz="914400" rtl="0" eaLnBrk="1" latinLnBrk="0" hangingPunct="1">
+              <a:defRPr sz="1800" kern="1200">
+                <a:solidFill>
+                  <a:schemeClr val="tx1"/>
+                </a:solidFill>
+                <a:latin typeface="+mn-lt"/>
+                <a:ea typeface="+mn-ea"/>
+                <a:cs typeface="+mn-cs"/>
+              </a:defRPr>
+            </a:lvl9pPr>
+          </a:lstStyle>
+          <a:p>
+            <a:fld id="{D57F1E4F-1CFF-5643-939E-217C01CDF565}" type="slidenum">
+              <a:rPr lang="en-US" sz="1400" b="1" smtClean="0">
+                <a:latin typeface="D2Coding" panose="020B0609020101020101" pitchFamily="49" charset="-127"/>
+                <a:ea typeface="D2Coding" panose="020B0609020101020101" pitchFamily="49" charset="-127"/>
+              </a:rPr>
+              <a:pPr/>
+              <a:t>7</a:t>
+            </a:fld>
+            <a:endParaRPr lang="en-US" sz="1400" b="1" dirty="0">
+              <a:latin typeface="D2Coding" panose="020B0609020101020101" pitchFamily="49" charset="-127"/>
+              <a:ea typeface="D2Coding" panose="020B0609020101020101" pitchFamily="49" charset="-127"/>
+            </a:endParaRPr>
+          </a:p>
+        </p:txBody>
+      </p:sp>
     </p:spTree>
     <p:extLst>
       <p:ext uri="{BB962C8B-B14F-4D97-AF65-F5344CB8AC3E}">
@@ -12084,7 +15306,7 @@
         <p:cNvPr id="1" name="">
           <a:extLst>
             <a:ext uri="{FF2B5EF4-FFF2-40B4-BE49-F238E27FC236}">
-              <a16:creationId xmlns:a16="http://schemas.microsoft.com/office/drawing/2014/main" id="{EF7E70B9-5654-A5B6-2611-8A8E13CECC5B}"/>
+              <a16:creationId xmlns:a16="http://schemas.microsoft.com/office/drawing/2014/main" id="{2D8957F1-5FF6-5E5D-5DF9-B2957A7020AE}"/>
             </a:ext>
           </a:extLst>
         </p:cNvPr>
@@ -12101,45 +15323,10 @@
       </p:grpSpPr>
       <p:sp>
         <p:nvSpPr>
-          <p:cNvPr id="4" name="슬라이드 번호 개체 틀 3">
-            <a:extLst>
-              <a:ext uri="{FF2B5EF4-FFF2-40B4-BE49-F238E27FC236}">
-                <a16:creationId xmlns:a16="http://schemas.microsoft.com/office/drawing/2014/main" id="{411B3FAF-0A59-B809-6001-123EE4730E0D}"/>
-              </a:ext>
-            </a:extLst>
-          </p:cNvPr>
-          <p:cNvSpPr>
-            <a:spLocks noGrp="1"/>
-          </p:cNvSpPr>
-          <p:nvPr>
-            <p:ph type="sldNum" sz="quarter" idx="12"/>
-          </p:nvPr>
-        </p:nvSpPr>
-        <p:spPr>
-          <a:xfrm>
-            <a:off x="10514011" y="6036261"/>
-            <a:ext cx="753545" cy="365125"/>
-          </a:xfrm>
-        </p:spPr>
-        <p:txBody>
-          <a:bodyPr/>
-          <a:lstStyle/>
-          <a:p>
-            <a:fld id="{D57F1E4F-1CFF-5643-939E-217C01CDF565}" type="slidenum">
-              <a:rPr lang="en-US" smtClean="0"/>
-              <a:pPr/>
-              <a:t>8</a:t>
-            </a:fld>
-            <a:endParaRPr lang="en-US" dirty="0"/>
-          </a:p>
-        </p:txBody>
-      </p:sp>
-      <p:sp>
-        <p:nvSpPr>
           <p:cNvPr id="3" name="제목 1">
             <a:extLst>
               <a:ext uri="{FF2B5EF4-FFF2-40B4-BE49-F238E27FC236}">
-                <a16:creationId xmlns:a16="http://schemas.microsoft.com/office/drawing/2014/main" id="{5AA0A530-F655-859A-2D85-453B4F511F99}"/>
+                <a16:creationId xmlns:a16="http://schemas.microsoft.com/office/drawing/2014/main" id="{2F077041-13E9-7ED3-7120-25ECFD8BAE46}"/>
               </a:ext>
             </a:extLst>
           </p:cNvPr>
@@ -12151,7 +15338,7 @@
         <p:spPr>
           <a:xfrm>
             <a:off x="475645" y="481983"/>
-            <a:ext cx="7439630" cy="766439"/>
+            <a:ext cx="10353762" cy="766439"/>
           </a:xfrm>
           <a:prstGeom prst="rect">
             <a:avLst/>
@@ -12159,7 +15346,7 @@
         </p:spPr>
         <p:txBody>
           <a:bodyPr vert="horz" lIns="91440" tIns="45720" rIns="91440" bIns="45720" rtlCol="0" anchor="ctr">
-            <a:normAutofit fontScale="92500"/>
+            <a:normAutofit/>
           </a:bodyPr>
           <a:lstStyle>
             <a:lvl1pPr algn="ctr" defTabSz="914400" rtl="0" eaLnBrk="1" latinLnBrk="1" hangingPunct="1">
@@ -12187,17 +15374,17 @@
               <a:rPr lang="en-US" altLang="ko-KR" sz="2800" b="1" cap="none" dirty="0">
                 <a:latin typeface="Lora" pitchFamily="2" charset="0"/>
               </a:rPr>
-              <a:t>Training a multi-input, multi-output model</a:t>
+              <a:t>2. Multi-input, multi-output model</a:t>
             </a:r>
           </a:p>
         </p:txBody>
       </p:sp>
       <p:sp>
         <p:nvSpPr>
-          <p:cNvPr id="6" name="TextBox 5">
+          <p:cNvPr id="50" name="TextBox 49">
             <a:extLst>
               <a:ext uri="{FF2B5EF4-FFF2-40B4-BE49-F238E27FC236}">
-                <a16:creationId xmlns:a16="http://schemas.microsoft.com/office/drawing/2014/main" id="{EF903609-6381-C120-0EA0-451E43FA442E}"/>
+                <a16:creationId xmlns:a16="http://schemas.microsoft.com/office/drawing/2014/main" id="{A071BBE0-5FFA-3861-8FFE-EA50D8141C4C}"/>
               </a:ext>
             </a:extLst>
           </p:cNvPr>
@@ -12230,106 +15417,12 @@
           </a:p>
         </p:txBody>
       </p:sp>
-      <p:pic>
-        <p:nvPicPr>
-          <p:cNvPr id="4098" name="Picture 2">
+      <p:sp>
+        <p:nvSpPr>
+          <p:cNvPr id="9" name="TextBox 8">
             <a:extLst>
               <a:ext uri="{FF2B5EF4-FFF2-40B4-BE49-F238E27FC236}">
-                <a16:creationId xmlns:a16="http://schemas.microsoft.com/office/drawing/2014/main" id="{B4854A1D-15A3-B76F-3237-451998C01159}"/>
-              </a:ext>
-            </a:extLst>
-          </p:cNvPr>
-          <p:cNvPicPr>
-            <a:picLocks noChangeAspect="1" noChangeArrowheads="1"/>
-          </p:cNvPicPr>
-          <p:nvPr/>
-        </p:nvPicPr>
-        <p:blipFill>
-          <a:blip r:embed="rId2">
-            <a:extLst>
-              <a:ext uri="{28A0092B-C50C-407E-A947-70E740481C1C}">
-                <a14:useLocalDpi xmlns:a14="http://schemas.microsoft.com/office/drawing/2010/main" val="0"/>
-              </a:ext>
-            </a:extLst>
-          </a:blip>
-          <a:srcRect/>
-          <a:stretch>
-            <a:fillRect/>
-          </a:stretch>
-        </p:blipFill>
-        <p:spPr bwMode="auto">
-          <a:xfrm>
-            <a:off x="606679" y="2311204"/>
-            <a:ext cx="4556365" cy="3669392"/>
-          </a:xfrm>
-          <a:prstGeom prst="rect">
-            <a:avLst/>
-          </a:prstGeom>
-          <a:noFill/>
-          <a:extLst>
-            <a:ext uri="{909E8E84-426E-40DD-AFC4-6F175D3DCCD1}">
-              <a14:hiddenFill xmlns:a14="http://schemas.microsoft.com/office/drawing/2010/main">
-                <a:solidFill>
-                  <a:srgbClr val="FFFFFF"/>
-                </a:solidFill>
-              </a14:hiddenFill>
-            </a:ext>
-          </a:extLst>
-        </p:spPr>
-      </p:pic>
-      <p:pic>
-        <p:nvPicPr>
-          <p:cNvPr id="4100" name="Picture 4">
-            <a:extLst>
-              <a:ext uri="{FF2B5EF4-FFF2-40B4-BE49-F238E27FC236}">
-                <a16:creationId xmlns:a16="http://schemas.microsoft.com/office/drawing/2014/main" id="{86A3EDEA-44E5-F84B-7F48-777ED5F28075}"/>
-              </a:ext>
-            </a:extLst>
-          </p:cNvPr>
-          <p:cNvPicPr>
-            <a:picLocks noChangeAspect="1" noChangeArrowheads="1"/>
-          </p:cNvPicPr>
-          <p:nvPr/>
-        </p:nvPicPr>
-        <p:blipFill>
-          <a:blip r:embed="rId3">
-            <a:extLst>
-              <a:ext uri="{28A0092B-C50C-407E-A947-70E740481C1C}">
-                <a14:useLocalDpi xmlns:a14="http://schemas.microsoft.com/office/drawing/2010/main" val="0"/>
-              </a:ext>
-            </a:extLst>
-          </a:blip>
-          <a:srcRect/>
-          <a:stretch>
-            <a:fillRect/>
-          </a:stretch>
-        </p:blipFill>
-        <p:spPr bwMode="auto">
-          <a:xfrm>
-            <a:off x="5663375" y="2311204"/>
-            <a:ext cx="5782690" cy="3669392"/>
-          </a:xfrm>
-          <a:prstGeom prst="rect">
-            <a:avLst/>
-          </a:prstGeom>
-          <a:noFill/>
-          <a:extLst>
-            <a:ext uri="{909E8E84-426E-40DD-AFC4-6F175D3DCCD1}">
-              <a14:hiddenFill xmlns:a14="http://schemas.microsoft.com/office/drawing/2010/main">
-                <a:solidFill>
-                  <a:srgbClr val="FFFFFF"/>
-                </a:solidFill>
-              </a14:hiddenFill>
-            </a:ext>
-          </a:extLst>
-        </p:spPr>
-      </p:pic>
-      <p:sp>
-        <p:nvSpPr>
-          <p:cNvPr id="8" name="TextBox 7">
-            <a:extLst>
-              <a:ext uri="{FF2B5EF4-FFF2-40B4-BE49-F238E27FC236}">
-                <a16:creationId xmlns:a16="http://schemas.microsoft.com/office/drawing/2014/main" id="{61286AE1-FF3A-2650-C3F3-446BEDC64377}"/>
+                <a16:creationId xmlns:a16="http://schemas.microsoft.com/office/drawing/2014/main" id="{3F8AF958-CEC3-EBF9-84CB-C4A010C90D97}"/>
               </a:ext>
             </a:extLst>
           </p:cNvPr>
@@ -12338,8 +15431,8 @@
         </p:nvSpPr>
         <p:spPr>
           <a:xfrm>
-            <a:off x="2170431" y="1595147"/>
-            <a:ext cx="7264400" cy="369332"/>
+            <a:off x="594677" y="1257193"/>
+            <a:ext cx="11002645" cy="423834"/>
           </a:xfrm>
           <a:prstGeom prst="rect">
             <a:avLst/>
@@ -12352,102 +15445,289 @@
           </a:bodyPr>
           <a:lstStyle/>
           <a:p>
-            <a:pPr algn="l">
-              <a:buNone/>
+            <a:pPr>
+              <a:lnSpc>
+                <a:spcPct val="150000"/>
+              </a:lnSpc>
             </a:pPr>
             <a:r>
-              <a:rPr lang="en-US" altLang="ko-KR" i="0" dirty="0">
-                <a:effectLst/>
-                <a:latin typeface="D2Coding" panose="020B0609020101020101" pitchFamily="49" charset="-127"/>
-                <a:ea typeface="D2Coding" panose="020B0609020101020101" pitchFamily="49" charset="-127"/>
-              </a:rPr>
-              <a:t>The power of the Functional API: Access to layer connectivity</a:t>
-            </a:r>
+              <a:rPr lang="ko-KR" altLang="en-US" sz="1600" dirty="0">
+                <a:latin typeface="D2Coding" panose="020B0609020101020101" pitchFamily="49" charset="-127"/>
+                <a:ea typeface="D2Coding" panose="020B0609020101020101" pitchFamily="49" charset="-127"/>
+              </a:rPr>
+              <a:t>고객 문의</a:t>
+            </a:r>
+            <a:r>
+              <a:rPr lang="en-US" altLang="ko-KR" sz="1600" dirty="0">
+                <a:latin typeface="D2Coding" panose="020B0609020101020101" pitchFamily="49" charset="-127"/>
+                <a:ea typeface="D2Coding" panose="020B0609020101020101" pitchFamily="49" charset="-127"/>
+              </a:rPr>
+              <a:t>(</a:t>
+            </a:r>
+            <a:r>
+              <a:rPr lang="ko-KR" altLang="en-US" sz="1600" dirty="0">
+                <a:latin typeface="D2Coding" panose="020B0609020101020101" pitchFamily="49" charset="-127"/>
+                <a:ea typeface="D2Coding" panose="020B0609020101020101" pitchFamily="49" charset="-127"/>
+              </a:rPr>
+              <a:t>제목 </a:t>
+            </a:r>
+            <a:r>
+              <a:rPr lang="en-US" altLang="ko-KR" sz="1600" dirty="0">
+                <a:latin typeface="D2Coding" panose="020B0609020101020101" pitchFamily="49" charset="-127"/>
+                <a:ea typeface="D2Coding" panose="020B0609020101020101" pitchFamily="49" charset="-127"/>
+              </a:rPr>
+              <a:t>+ </a:t>
+            </a:r>
+            <a:r>
+              <a:rPr lang="ko-KR" altLang="en-US" sz="1600" dirty="0">
+                <a:latin typeface="D2Coding" panose="020B0609020101020101" pitchFamily="49" charset="-127"/>
+                <a:ea typeface="D2Coding" panose="020B0609020101020101" pitchFamily="49" charset="-127"/>
+              </a:rPr>
+              <a:t>본문 </a:t>
+            </a:r>
+            <a:r>
+              <a:rPr lang="en-US" altLang="ko-KR" sz="1600" dirty="0">
+                <a:latin typeface="D2Coding" panose="020B0609020101020101" pitchFamily="49" charset="-127"/>
+                <a:ea typeface="D2Coding" panose="020B0609020101020101" pitchFamily="49" charset="-127"/>
+              </a:rPr>
+              <a:t>+ </a:t>
+            </a:r>
+            <a:r>
+              <a:rPr lang="ko-KR" altLang="en-US" sz="1600" dirty="0">
+                <a:latin typeface="D2Coding" panose="020B0609020101020101" pitchFamily="49" charset="-127"/>
+                <a:ea typeface="D2Coding" panose="020B0609020101020101" pitchFamily="49" charset="-127"/>
+              </a:rPr>
+              <a:t>태그</a:t>
+            </a:r>
+            <a:r>
+              <a:rPr lang="en-US" altLang="ko-KR" sz="1600" dirty="0">
+                <a:latin typeface="D2Coding" panose="020B0609020101020101" pitchFamily="49" charset="-127"/>
+                <a:ea typeface="D2Coding" panose="020B0609020101020101" pitchFamily="49" charset="-127"/>
+              </a:rPr>
+              <a:t>)</a:t>
+            </a:r>
+            <a:r>
+              <a:rPr lang="ko-KR" altLang="en-US" sz="1600" dirty="0">
+                <a:latin typeface="D2Coding" panose="020B0609020101020101" pitchFamily="49" charset="-127"/>
+                <a:ea typeface="D2Coding" panose="020B0609020101020101" pitchFamily="49" charset="-127"/>
+              </a:rPr>
+              <a:t>를 보니</a:t>
+            </a:r>
+            <a:r>
+              <a:rPr lang="en-US" altLang="ko-KR" sz="1600" dirty="0">
+                <a:latin typeface="D2Coding" panose="020B0609020101020101" pitchFamily="49" charset="-127"/>
+                <a:ea typeface="D2Coding" panose="020B0609020101020101" pitchFamily="49" charset="-127"/>
+              </a:rPr>
+              <a:t>, </a:t>
+            </a:r>
+            <a:r>
+              <a:rPr lang="ko-KR" altLang="en-US" sz="1600" dirty="0">
+                <a:latin typeface="D2Coding" panose="020B0609020101020101" pitchFamily="49" charset="-127"/>
+                <a:ea typeface="D2Coding" panose="020B0609020101020101" pitchFamily="49" charset="-127"/>
+              </a:rPr>
+              <a:t>얼마나 급한 문제이고</a:t>
+            </a:r>
+            <a:r>
+              <a:rPr lang="en-US" altLang="ko-KR" sz="1600" dirty="0">
+                <a:latin typeface="D2Coding" panose="020B0609020101020101" pitchFamily="49" charset="-127"/>
+                <a:ea typeface="D2Coding" panose="020B0609020101020101" pitchFamily="49" charset="-127"/>
+              </a:rPr>
+              <a:t>(priority), </a:t>
+            </a:r>
+            <a:r>
+              <a:rPr lang="ko-KR" altLang="en-US" sz="1600" dirty="0">
+                <a:latin typeface="D2Coding" panose="020B0609020101020101" pitchFamily="49" charset="-127"/>
+                <a:ea typeface="D2Coding" panose="020B0609020101020101" pitchFamily="49" charset="-127"/>
+              </a:rPr>
+              <a:t>어느 부서로 보내야 하는가</a:t>
+            </a:r>
+            <a:r>
+              <a:rPr lang="en-US" altLang="ko-KR" sz="1600" dirty="0">
+                <a:latin typeface="D2Coding" panose="020B0609020101020101" pitchFamily="49" charset="-127"/>
+                <a:ea typeface="D2Coding" panose="020B0609020101020101" pitchFamily="49" charset="-127"/>
+              </a:rPr>
+              <a:t>(department)</a:t>
+            </a:r>
+            <a:endParaRPr lang="ko-KR" altLang="en-US" sz="1600" dirty="0">
+              <a:latin typeface="D2Coding" panose="020B0609020101020101" pitchFamily="49" charset="-127"/>
+              <a:ea typeface="D2Coding" panose="020B0609020101020101" pitchFamily="49" charset="-127"/>
+            </a:endParaRPr>
           </a:p>
         </p:txBody>
       </p:sp>
-      <p:sp>
-        <p:nvSpPr>
-          <p:cNvPr id="5" name="TextBox 4">
+      <p:pic>
+        <p:nvPicPr>
+          <p:cNvPr id="11" name="그림 10">
             <a:extLst>
               <a:ext uri="{FF2B5EF4-FFF2-40B4-BE49-F238E27FC236}">
-                <a16:creationId xmlns:a16="http://schemas.microsoft.com/office/drawing/2014/main" id="{8F387E84-F200-98AA-0280-5B68FF8CD9E0}"/>
+                <a16:creationId xmlns:a16="http://schemas.microsoft.com/office/drawing/2014/main" id="{677AF258-0B51-39A8-8ECE-19D456B537E1}"/>
               </a:ext>
             </a:extLst>
           </p:cNvPr>
-          <p:cNvSpPr txBox="1"/>
+          <p:cNvPicPr>
+            <a:picLocks noChangeAspect="1"/>
+          </p:cNvPicPr>
+          <p:nvPr/>
+        </p:nvPicPr>
+        <p:blipFill>
+          <a:blip r:embed="rId2"/>
+          <a:stretch>
+            <a:fillRect/>
+          </a:stretch>
+        </p:blipFill>
+        <p:spPr>
+          <a:xfrm>
+            <a:off x="1748491" y="2116271"/>
+            <a:ext cx="7796794" cy="3795128"/>
+          </a:xfrm>
+          <a:prstGeom prst="rect">
+            <a:avLst/>
+          </a:prstGeom>
+        </p:spPr>
+      </p:pic>
+      <p:sp>
+        <p:nvSpPr>
+          <p:cNvPr id="12" name="슬라이드 번호 개체 틀 3">
+            <a:extLst>
+              <a:ext uri="{FF2B5EF4-FFF2-40B4-BE49-F238E27FC236}">
+                <a16:creationId xmlns:a16="http://schemas.microsoft.com/office/drawing/2014/main" id="{0AC27668-2845-E2D9-9A1B-7886442EDF78}"/>
+              </a:ext>
+            </a:extLst>
+          </p:cNvPr>
+          <p:cNvSpPr txBox="1">
+            <a:spLocks/>
+          </p:cNvSpPr>
           <p:nvPr/>
         </p:nvSpPr>
         <p:spPr>
           <a:xfrm>
-            <a:off x="7383145" y="5933830"/>
-            <a:ext cx="1171575" cy="307777"/>
+            <a:off x="11142661" y="299420"/>
+            <a:ext cx="753545" cy="365125"/>
           </a:xfrm>
           <a:prstGeom prst="rect">
             <a:avLst/>
           </a:prstGeom>
-          <a:noFill/>
         </p:spPr>
         <p:txBody>
-          <a:bodyPr wrap="square">
-            <a:spAutoFit/>
-          </a:bodyPr>
-          <a:lstStyle/>
-          <a:p>
-            <a:r>
-              <a:rPr lang="ko-KR" altLang="en-US" sz="1400" dirty="0" err="1">
-                <a:latin typeface="D2Coding" panose="020B0609020101020101" pitchFamily="49" charset="-127"/>
-                <a:ea typeface="D2Coding" panose="020B0609020101020101" pitchFamily="49" charset="-127"/>
-              </a:rPr>
-              <a:t>sigmoid</a:t>
-            </a:r>
-            <a:endParaRPr lang="ko-KR" altLang="en-US" sz="1400" dirty="0"/>
-          </a:p>
-        </p:txBody>
-      </p:sp>
-      <p:sp>
-        <p:nvSpPr>
-          <p:cNvPr id="9" name="TextBox 8">
-            <a:extLst>
-              <a:ext uri="{FF2B5EF4-FFF2-40B4-BE49-F238E27FC236}">
-                <a16:creationId xmlns:a16="http://schemas.microsoft.com/office/drawing/2014/main" id="{C98AE8B4-0F70-5532-8947-C10E97E66B23}"/>
-              </a:ext>
-            </a:extLst>
-          </p:cNvPr>
-          <p:cNvSpPr txBox="1"/>
-          <p:nvPr/>
-        </p:nvSpPr>
-        <p:spPr>
-          <a:xfrm>
-            <a:off x="10172181" y="5911046"/>
-            <a:ext cx="933969" cy="307777"/>
-          </a:xfrm>
-          <a:prstGeom prst="rect">
-            <a:avLst/>
-          </a:prstGeom>
-          <a:noFill/>
-        </p:spPr>
-        <p:txBody>
-          <a:bodyPr wrap="square">
-            <a:spAutoFit/>
-          </a:bodyPr>
-          <a:lstStyle/>
-          <a:p>
-            <a:r>
-              <a:rPr lang="ko-KR" altLang="en-US" sz="1400" dirty="0" err="1">
-                <a:latin typeface="D2Coding" panose="020B0609020101020101" pitchFamily="49" charset="-127"/>
-                <a:ea typeface="D2Coding" panose="020B0609020101020101" pitchFamily="49" charset="-127"/>
-              </a:rPr>
-              <a:t>softmax</a:t>
-            </a:r>
-            <a:endParaRPr lang="ko-KR" altLang="en-US" sz="1400" dirty="0"/>
+          <a:bodyPr vert="horz" lIns="91440" tIns="45720" rIns="91440" bIns="45720" rtlCol="0" anchor="ctr"/>
+          <a:lstStyle>
+            <a:defPPr rtl="0">
+              <a:defRPr lang="ko-KR"/>
+            </a:defPPr>
+            <a:lvl1pPr marL="0" algn="r" defTabSz="914400" rtl="0" eaLnBrk="1" latinLnBrk="0" hangingPunct="1">
+              <a:defRPr sz="1200" kern="1200" baseline="0">
+                <a:solidFill>
+                  <a:schemeClr val="tx1">
+                    <a:lumMod val="65000"/>
+                    <a:lumOff val="35000"/>
+                  </a:schemeClr>
+                </a:solidFill>
+                <a:latin typeface="맑은 고딕" panose="020B0503020000020004" pitchFamily="50" charset="-127"/>
+                <a:ea typeface="맑은 고딕" panose="020B0503020000020004" pitchFamily="50" charset="-127"/>
+                <a:cs typeface="+mn-cs"/>
+              </a:defRPr>
+            </a:lvl1pPr>
+            <a:lvl2pPr marL="457200" algn="l" defTabSz="914400" rtl="0" eaLnBrk="1" latinLnBrk="0" hangingPunct="1">
+              <a:defRPr sz="1800" kern="1200">
+                <a:solidFill>
+                  <a:schemeClr val="tx1"/>
+                </a:solidFill>
+                <a:latin typeface="+mn-lt"/>
+                <a:ea typeface="+mn-ea"/>
+                <a:cs typeface="+mn-cs"/>
+              </a:defRPr>
+            </a:lvl2pPr>
+            <a:lvl3pPr marL="914400" algn="l" defTabSz="914400" rtl="0" eaLnBrk="1" latinLnBrk="0" hangingPunct="1">
+              <a:defRPr sz="1800" kern="1200">
+                <a:solidFill>
+                  <a:schemeClr val="tx1"/>
+                </a:solidFill>
+                <a:latin typeface="+mn-lt"/>
+                <a:ea typeface="+mn-ea"/>
+                <a:cs typeface="+mn-cs"/>
+              </a:defRPr>
+            </a:lvl3pPr>
+            <a:lvl4pPr marL="1371600" algn="l" defTabSz="914400" rtl="0" eaLnBrk="1" latinLnBrk="0" hangingPunct="1">
+              <a:defRPr sz="1800" kern="1200">
+                <a:solidFill>
+                  <a:schemeClr val="tx1"/>
+                </a:solidFill>
+                <a:latin typeface="+mn-lt"/>
+                <a:ea typeface="+mn-ea"/>
+                <a:cs typeface="+mn-cs"/>
+              </a:defRPr>
+            </a:lvl4pPr>
+            <a:lvl5pPr marL="1828800" algn="l" defTabSz="914400" rtl="0" eaLnBrk="1" latinLnBrk="0" hangingPunct="1">
+              <a:defRPr sz="1800" kern="1200">
+                <a:solidFill>
+                  <a:schemeClr val="tx1"/>
+                </a:solidFill>
+                <a:latin typeface="+mn-lt"/>
+                <a:ea typeface="+mn-ea"/>
+                <a:cs typeface="+mn-cs"/>
+              </a:defRPr>
+            </a:lvl5pPr>
+            <a:lvl6pPr marL="2286000" algn="l" defTabSz="914400" rtl="0" eaLnBrk="1" latinLnBrk="0" hangingPunct="1">
+              <a:defRPr sz="1800" kern="1200">
+                <a:solidFill>
+                  <a:schemeClr val="tx1"/>
+                </a:solidFill>
+                <a:latin typeface="+mn-lt"/>
+                <a:ea typeface="+mn-ea"/>
+                <a:cs typeface="+mn-cs"/>
+              </a:defRPr>
+            </a:lvl6pPr>
+            <a:lvl7pPr marL="2743200" algn="l" defTabSz="914400" rtl="0" eaLnBrk="1" latinLnBrk="0" hangingPunct="1">
+              <a:defRPr sz="1800" kern="1200">
+                <a:solidFill>
+                  <a:schemeClr val="tx1"/>
+                </a:solidFill>
+                <a:latin typeface="+mn-lt"/>
+                <a:ea typeface="+mn-ea"/>
+                <a:cs typeface="+mn-cs"/>
+              </a:defRPr>
+            </a:lvl7pPr>
+            <a:lvl8pPr marL="3200400" algn="l" defTabSz="914400" rtl="0" eaLnBrk="1" latinLnBrk="0" hangingPunct="1">
+              <a:defRPr sz="1800" kern="1200">
+                <a:solidFill>
+                  <a:schemeClr val="tx1"/>
+                </a:solidFill>
+                <a:latin typeface="+mn-lt"/>
+                <a:ea typeface="+mn-ea"/>
+                <a:cs typeface="+mn-cs"/>
+              </a:defRPr>
+            </a:lvl8pPr>
+            <a:lvl9pPr marL="3657600" algn="l" defTabSz="914400" rtl="0" eaLnBrk="1" latinLnBrk="0" hangingPunct="1">
+              <a:defRPr sz="1800" kern="1200">
+                <a:solidFill>
+                  <a:schemeClr val="tx1"/>
+                </a:solidFill>
+                <a:latin typeface="+mn-lt"/>
+                <a:ea typeface="+mn-ea"/>
+                <a:cs typeface="+mn-cs"/>
+              </a:defRPr>
+            </a:lvl9pPr>
+          </a:lstStyle>
+          <a:p>
+            <a:fld id="{D57F1E4F-1CFF-5643-939E-217C01CDF565}" type="slidenum">
+              <a:rPr lang="en-US" sz="1400" b="1" smtClean="0">
+                <a:latin typeface="D2Coding" panose="020B0609020101020101" pitchFamily="49" charset="-127"/>
+                <a:ea typeface="D2Coding" panose="020B0609020101020101" pitchFamily="49" charset="-127"/>
+              </a:rPr>
+              <a:pPr/>
+              <a:t>8</a:t>
+            </a:fld>
+            <a:endParaRPr lang="en-US" sz="1400" b="1" dirty="0">
+              <a:latin typeface="D2Coding" panose="020B0609020101020101" pitchFamily="49" charset="-127"/>
+              <a:ea typeface="D2Coding" panose="020B0609020101020101" pitchFamily="49" charset="-127"/>
+            </a:endParaRPr>
           </a:p>
         </p:txBody>
       </p:sp>
     </p:spTree>
     <p:extLst>
       <p:ext uri="{BB962C8B-B14F-4D97-AF65-F5344CB8AC3E}">
-        <p14:creationId xmlns:p14="http://schemas.microsoft.com/office/powerpoint/2010/main" val="1901938499"/>
+        <p14:creationId xmlns:p14="http://schemas.microsoft.com/office/powerpoint/2010/main" val="3419460752"/>
       </p:ext>
     </p:extLst>
   </p:cSld>
@@ -12465,7 +15745,7 @@
         <p:cNvPr id="1" name="">
           <a:extLst>
             <a:ext uri="{FF2B5EF4-FFF2-40B4-BE49-F238E27FC236}">
-              <a16:creationId xmlns:a16="http://schemas.microsoft.com/office/drawing/2014/main" id="{2D443848-41FB-B2FA-DB4F-AE56CD1EA666}"/>
+              <a16:creationId xmlns:a16="http://schemas.microsoft.com/office/drawing/2014/main" id="{5A8EE71A-3A5D-B1C7-9D45-1FDFA1520DCE}"/>
             </a:ext>
           </a:extLst>
         </p:cNvPr>
@@ -12482,45 +15762,10 @@
       </p:grpSpPr>
       <p:sp>
         <p:nvSpPr>
-          <p:cNvPr id="4" name="슬라이드 번호 개체 틀 3">
-            <a:extLst>
-              <a:ext uri="{FF2B5EF4-FFF2-40B4-BE49-F238E27FC236}">
-                <a16:creationId xmlns:a16="http://schemas.microsoft.com/office/drawing/2014/main" id="{A8949B6C-C372-4F9A-9E49-A253934E52E3}"/>
-              </a:ext>
-            </a:extLst>
-          </p:cNvPr>
-          <p:cNvSpPr>
-            <a:spLocks noGrp="1"/>
-          </p:cNvSpPr>
-          <p:nvPr>
-            <p:ph type="sldNum" sz="quarter" idx="12"/>
-          </p:nvPr>
-        </p:nvSpPr>
-        <p:spPr>
-          <a:xfrm>
-            <a:off x="10514011" y="6036261"/>
-            <a:ext cx="753545" cy="365125"/>
-          </a:xfrm>
-        </p:spPr>
-        <p:txBody>
-          <a:bodyPr/>
-          <a:lstStyle/>
-          <a:p>
-            <a:fld id="{D57F1E4F-1CFF-5643-939E-217C01CDF565}" type="slidenum">
-              <a:rPr lang="en-US" smtClean="0"/>
-              <a:pPr/>
-              <a:t>9</a:t>
-            </a:fld>
-            <a:endParaRPr lang="en-US" dirty="0"/>
-          </a:p>
-        </p:txBody>
-      </p:sp>
-      <p:sp>
-        <p:nvSpPr>
           <p:cNvPr id="3" name="제목 1">
             <a:extLst>
               <a:ext uri="{FF2B5EF4-FFF2-40B4-BE49-F238E27FC236}">
-                <a16:creationId xmlns:a16="http://schemas.microsoft.com/office/drawing/2014/main" id="{E602D0EB-6A55-FA1B-B2EE-054A46BA142F}"/>
+                <a16:creationId xmlns:a16="http://schemas.microsoft.com/office/drawing/2014/main" id="{2A97C124-87BF-4C24-B8EC-381A79291448}"/>
               </a:ext>
             </a:extLst>
           </p:cNvPr>
@@ -12532,7 +15777,7 @@
         <p:spPr>
           <a:xfrm>
             <a:off x="475645" y="481983"/>
-            <a:ext cx="7439630" cy="766439"/>
+            <a:ext cx="10353762" cy="766439"/>
           </a:xfrm>
           <a:prstGeom prst="rect">
             <a:avLst/>
@@ -12540,7 +15785,7 @@
         </p:spPr>
         <p:txBody>
           <a:bodyPr vert="horz" lIns="91440" tIns="45720" rIns="91440" bIns="45720" rtlCol="0" anchor="ctr">
-            <a:normAutofit fontScale="92500"/>
+            <a:normAutofit/>
           </a:bodyPr>
           <a:lstStyle>
             <a:lvl1pPr algn="ctr" defTabSz="914400" rtl="0" eaLnBrk="1" latinLnBrk="1" hangingPunct="1">
@@ -12568,17 +15813,17 @@
               <a:rPr lang="en-US" altLang="ko-KR" sz="2800" b="1" cap="none" dirty="0">
                 <a:latin typeface="Lora" pitchFamily="2" charset="0"/>
               </a:rPr>
-              <a:t>Training a multi-input, multi-output model</a:t>
+              <a:t>2. Multi-input, multi-output model</a:t>
             </a:r>
           </a:p>
         </p:txBody>
       </p:sp>
       <p:sp>
         <p:nvSpPr>
-          <p:cNvPr id="6" name="TextBox 5">
+          <p:cNvPr id="50" name="TextBox 49">
             <a:extLst>
               <a:ext uri="{FF2B5EF4-FFF2-40B4-BE49-F238E27FC236}">
-                <a16:creationId xmlns:a16="http://schemas.microsoft.com/office/drawing/2014/main" id="{396B4481-8D4F-A3CE-82F5-89819ED56103}"/>
+                <a16:creationId xmlns:a16="http://schemas.microsoft.com/office/drawing/2014/main" id="{1264D259-159C-C5B5-2465-757E348FC02D}"/>
               </a:ext>
             </a:extLst>
           </p:cNvPr>
@@ -12611,12 +15856,47 @@
           </a:p>
         </p:txBody>
       </p:sp>
+      <p:pic>
+        <p:nvPicPr>
+          <p:cNvPr id="7" name="그림 6">
+            <a:extLst>
+              <a:ext uri="{FF2B5EF4-FFF2-40B4-BE49-F238E27FC236}">
+                <a16:creationId xmlns:a16="http://schemas.microsoft.com/office/drawing/2014/main" id="{3E9C8FCD-322E-8409-064B-05D84AE98CDA}"/>
+              </a:ext>
+            </a:extLst>
+          </p:cNvPr>
+          <p:cNvPicPr>
+            <a:picLocks noChangeAspect="1"/>
+          </p:cNvPicPr>
+          <p:nvPr/>
+        </p:nvPicPr>
+        <p:blipFill>
+          <a:blip r:embed="rId2"/>
+          <a:stretch>
+            <a:fillRect/>
+          </a:stretch>
+        </p:blipFill>
+        <p:spPr>
+          <a:xfrm>
+            <a:off x="5553075" y="2218700"/>
+            <a:ext cx="6257695" cy="3844997"/>
+          </a:xfrm>
+          <a:prstGeom prst="rect">
+            <a:avLst/>
+          </a:prstGeom>
+          <a:ln>
+            <a:solidFill>
+              <a:schemeClr val="tx1"/>
+            </a:solidFill>
+          </a:ln>
+        </p:spPr>
+      </p:pic>
       <p:sp>
         <p:nvSpPr>
-          <p:cNvPr id="7" name="TextBox 6">
+          <p:cNvPr id="4" name="TextBox 3">
             <a:extLst>
               <a:ext uri="{FF2B5EF4-FFF2-40B4-BE49-F238E27FC236}">
-                <a16:creationId xmlns:a16="http://schemas.microsoft.com/office/drawing/2014/main" id="{A7168822-2A75-796C-DF8D-0CAF0D3CD4C9}"/>
+                <a16:creationId xmlns:a16="http://schemas.microsoft.com/office/drawing/2014/main" id="{377C256D-9094-CAF4-0F97-A217099B977F}"/>
               </a:ext>
             </a:extLst>
           </p:cNvPr>
@@ -12625,15 +15905,23 @@
         </p:nvSpPr>
         <p:spPr>
           <a:xfrm>
-            <a:off x="600075" y="1248422"/>
-            <a:ext cx="11002645" cy="1028808"/>
+            <a:off x="603700" y="5752066"/>
+            <a:ext cx="4685465" cy="307777"/>
           </a:xfrm>
           <a:prstGeom prst="rect">
             <a:avLst/>
           </a:prstGeom>
           <a:solidFill>
-            <a:srgbClr val="76E3FF"/>
+            <a:schemeClr val="accent1">
+              <a:lumMod val="20000"/>
+              <a:lumOff val="80000"/>
+            </a:schemeClr>
           </a:solidFill>
+          <a:ln>
+            <a:solidFill>
+              <a:schemeClr val="tx1"/>
+            </a:solidFill>
+          </a:ln>
         </p:spPr>
         <p:txBody>
           <a:bodyPr wrap="square">
@@ -12641,194 +15929,1591 @@
           </a:bodyPr>
           <a:lstStyle/>
           <a:p>
-            <a:pPr>
-              <a:lnSpc>
-                <a:spcPct val="150000"/>
-              </a:lnSpc>
-              <a:buNone/>
-            </a:pPr>
-            <a:r>
-              <a:rPr lang="en-US" altLang="ko-KR" sz="1400" b="0" dirty="0">
-                <a:effectLst/>
-                <a:latin typeface="D2Coding" panose="020B0609020101020101" pitchFamily="49" charset="-127"/>
-                <a:ea typeface="D2Coding" panose="020B0609020101020101" pitchFamily="49" charset="-127"/>
-              </a:rPr>
-              <a:t>features = </a:t>
-            </a:r>
-            <a:r>
-              <a:rPr lang="en-US" altLang="ko-KR" sz="1400" b="0" dirty="0" err="1">
-                <a:effectLst/>
-                <a:latin typeface="D2Coding" panose="020B0609020101020101" pitchFamily="49" charset="-127"/>
-                <a:ea typeface="D2Coding" panose="020B0609020101020101" pitchFamily="49" charset="-127"/>
-              </a:rPr>
-              <a:t>model.layers</a:t>
-            </a:r>
-            <a:r>
-              <a:rPr lang="en-US" altLang="ko-KR" sz="1400" b="0" dirty="0">
-                <a:effectLst/>
-                <a:latin typeface="D2Coding" panose="020B0609020101020101" pitchFamily="49" charset="-127"/>
-                <a:ea typeface="D2Coding" panose="020B0609020101020101" pitchFamily="49" charset="-127"/>
-              </a:rPr>
-              <a:t>[4].output</a:t>
-            </a:r>
-          </a:p>
-          <a:p>
-            <a:pPr>
-              <a:lnSpc>
-                <a:spcPct val="150000"/>
-              </a:lnSpc>
-              <a:buNone/>
-            </a:pPr>
-            <a:r>
-              <a:rPr lang="en-US" altLang="ko-KR" sz="1400" b="0" dirty="0">
-                <a:effectLst/>
-                <a:latin typeface="D2Coding" panose="020B0609020101020101" pitchFamily="49" charset="-127"/>
-                <a:ea typeface="D2Coding" panose="020B0609020101020101" pitchFamily="49" charset="-127"/>
-              </a:rPr>
-              <a:t>difficulty = </a:t>
-            </a:r>
-            <a:r>
-              <a:rPr lang="en-US" altLang="ko-KR" sz="1400" b="0" dirty="0" err="1">
-                <a:effectLst/>
-                <a:latin typeface="D2Coding" panose="020B0609020101020101" pitchFamily="49" charset="-127"/>
-                <a:ea typeface="D2Coding" panose="020B0609020101020101" pitchFamily="49" charset="-127"/>
-              </a:rPr>
-              <a:t>layers.Dense</a:t>
-            </a:r>
-            <a:r>
-              <a:rPr lang="en-US" altLang="ko-KR" sz="1400" b="0" dirty="0">
-                <a:effectLst/>
-                <a:latin typeface="D2Coding" panose="020B0609020101020101" pitchFamily="49" charset="-127"/>
-                <a:ea typeface="D2Coding" panose="020B0609020101020101" pitchFamily="49" charset="-127"/>
-              </a:rPr>
-              <a:t>(3, activation="</a:t>
-            </a:r>
-            <a:r>
-              <a:rPr lang="en-US" altLang="ko-KR" sz="1400" b="0" dirty="0" err="1">
-                <a:effectLst/>
-                <a:latin typeface="D2Coding" panose="020B0609020101020101" pitchFamily="49" charset="-127"/>
-                <a:ea typeface="D2Coding" panose="020B0609020101020101" pitchFamily="49" charset="-127"/>
-              </a:rPr>
-              <a:t>softmax</a:t>
-            </a:r>
-            <a:r>
-              <a:rPr lang="en-US" altLang="ko-KR" sz="1400" b="0" dirty="0">
-                <a:effectLst/>
-                <a:latin typeface="D2Coding" panose="020B0609020101020101" pitchFamily="49" charset="-127"/>
-                <a:ea typeface="D2Coding" panose="020B0609020101020101" pitchFamily="49" charset="-127"/>
-              </a:rPr>
-              <a:t>", name="difficulty")(features)</a:t>
-            </a:r>
-          </a:p>
-          <a:p>
-            <a:pPr>
-              <a:lnSpc>
-                <a:spcPct val="150000"/>
-              </a:lnSpc>
-              <a:buNone/>
-            </a:pPr>
-            <a:r>
-              <a:rPr lang="en-US" altLang="ko-KR" sz="1400" b="0" dirty="0" err="1">
-                <a:effectLst/>
-                <a:latin typeface="D2Coding" panose="020B0609020101020101" pitchFamily="49" charset="-127"/>
-                <a:ea typeface="D2Coding" panose="020B0609020101020101" pitchFamily="49" charset="-127"/>
-              </a:rPr>
-              <a:t>new_model</a:t>
-            </a:r>
-            <a:r>
-              <a:rPr lang="en-US" altLang="ko-KR" sz="1400" b="0" dirty="0">
-                <a:effectLst/>
-                <a:latin typeface="D2Coding" panose="020B0609020101020101" pitchFamily="49" charset="-127"/>
-                <a:ea typeface="D2Coding" panose="020B0609020101020101" pitchFamily="49" charset="-127"/>
-              </a:rPr>
-              <a:t> = </a:t>
-            </a:r>
-            <a:r>
-              <a:rPr lang="en-US" altLang="ko-KR" sz="1400" b="0" dirty="0" err="1">
-                <a:effectLst/>
-                <a:latin typeface="D2Coding" panose="020B0609020101020101" pitchFamily="49" charset="-127"/>
-                <a:ea typeface="D2Coding" panose="020B0609020101020101" pitchFamily="49" charset="-127"/>
-              </a:rPr>
-              <a:t>keras.Model</a:t>
-            </a:r>
-            <a:r>
-              <a:rPr lang="en-US" altLang="ko-KR" sz="1400" b="0" dirty="0">
-                <a:effectLst/>
-                <a:latin typeface="D2Coding" panose="020B0609020101020101" pitchFamily="49" charset="-127"/>
-                <a:ea typeface="D2Coding" panose="020B0609020101020101" pitchFamily="49" charset="-127"/>
-              </a:rPr>
-              <a:t>(inputs=[title, </a:t>
-            </a:r>
-            <a:r>
-              <a:rPr lang="en-US" altLang="ko-KR" sz="1400" b="0" dirty="0" err="1">
-                <a:effectLst/>
-                <a:latin typeface="D2Coding" panose="020B0609020101020101" pitchFamily="49" charset="-127"/>
-                <a:ea typeface="D2Coding" panose="020B0609020101020101" pitchFamily="49" charset="-127"/>
-              </a:rPr>
-              <a:t>text_body</a:t>
-            </a:r>
-            <a:r>
-              <a:rPr lang="en-US" altLang="ko-KR" sz="1400" b="0" dirty="0">
-                <a:effectLst/>
-                <a:latin typeface="D2Coding" panose="020B0609020101020101" pitchFamily="49" charset="-127"/>
-                <a:ea typeface="D2Coding" panose="020B0609020101020101" pitchFamily="49" charset="-127"/>
-              </a:rPr>
-              <a:t>, tags], outputs=[priority, department, difficulty])</a:t>
-            </a:r>
+            <a:r>
+              <a:rPr lang="sv-SE" altLang="ko-KR" sz="1400" dirty="0">
+                <a:latin typeface="D2Coding" panose="020B0609020101020101" pitchFamily="49" charset="-127"/>
+                <a:ea typeface="D2Coding" panose="020B0609020101020101" pitchFamily="49" charset="-127"/>
+              </a:rPr>
+              <a:t>tags_vector = </a:t>
+            </a:r>
+            <a:r>
+              <a:rPr lang="sv-SE" altLang="ko-KR" sz="1400" dirty="0">
+                <a:effectLst/>
+                <a:latin typeface="D2Coding" panose="020B0609020101020101" pitchFamily="49" charset="-127"/>
+                <a:ea typeface="D2Coding" panose="020B0609020101020101" pitchFamily="49" charset="-127"/>
+              </a:rPr>
+              <a:t>[0,</a:t>
+            </a:r>
+            <a:r>
+              <a:rPr lang="sv-SE" altLang="ko-KR" sz="1400" dirty="0">
+                <a:latin typeface="D2Coding" panose="020B0609020101020101" pitchFamily="49" charset="-127"/>
+                <a:ea typeface="D2Coding" panose="020B0609020101020101" pitchFamily="49" charset="-127"/>
+              </a:rPr>
+              <a:t> </a:t>
+            </a:r>
+            <a:r>
+              <a:rPr lang="sv-SE" altLang="ko-KR" sz="1400" dirty="0">
+                <a:effectLst/>
+                <a:latin typeface="D2Coding" panose="020B0609020101020101" pitchFamily="49" charset="-127"/>
+                <a:ea typeface="D2Coding" panose="020B0609020101020101" pitchFamily="49" charset="-127"/>
+              </a:rPr>
+              <a:t>0,</a:t>
+            </a:r>
+            <a:r>
+              <a:rPr lang="sv-SE" altLang="ko-KR" sz="1400" dirty="0">
+                <a:latin typeface="D2Coding" panose="020B0609020101020101" pitchFamily="49" charset="-127"/>
+                <a:ea typeface="D2Coding" panose="020B0609020101020101" pitchFamily="49" charset="-127"/>
+              </a:rPr>
+              <a:t> </a:t>
+            </a:r>
+            <a:r>
+              <a:rPr lang="sv-SE" altLang="ko-KR" sz="1400" dirty="0">
+                <a:effectLst/>
+                <a:latin typeface="D2Coding" panose="020B0609020101020101" pitchFamily="49" charset="-127"/>
+                <a:ea typeface="D2Coding" panose="020B0609020101020101" pitchFamily="49" charset="-127"/>
+              </a:rPr>
+              <a:t>1,</a:t>
+            </a:r>
+            <a:r>
+              <a:rPr lang="sv-SE" altLang="ko-KR" sz="1400" dirty="0">
+                <a:latin typeface="D2Coding" panose="020B0609020101020101" pitchFamily="49" charset="-127"/>
+                <a:ea typeface="D2Coding" panose="020B0609020101020101" pitchFamily="49" charset="-127"/>
+              </a:rPr>
+              <a:t> </a:t>
+            </a:r>
+            <a:r>
+              <a:rPr lang="sv-SE" altLang="ko-KR" sz="1400" dirty="0">
+                <a:effectLst/>
+                <a:latin typeface="D2Coding" panose="020B0609020101020101" pitchFamily="49" charset="-127"/>
+                <a:ea typeface="D2Coding" panose="020B0609020101020101" pitchFamily="49" charset="-127"/>
+              </a:rPr>
+              <a:t>0,</a:t>
+            </a:r>
+            <a:r>
+              <a:rPr lang="sv-SE" altLang="ko-KR" sz="1400" dirty="0">
+                <a:latin typeface="D2Coding" panose="020B0609020101020101" pitchFamily="49" charset="-127"/>
+                <a:ea typeface="D2Coding" panose="020B0609020101020101" pitchFamily="49" charset="-127"/>
+              </a:rPr>
+              <a:t> ...</a:t>
+            </a:r>
+            <a:r>
+              <a:rPr lang="sv-SE" altLang="ko-KR" sz="1400" dirty="0">
+                <a:effectLst/>
+                <a:latin typeface="D2Coding" panose="020B0609020101020101" pitchFamily="49" charset="-127"/>
+                <a:ea typeface="D2Coding" panose="020B0609020101020101" pitchFamily="49" charset="-127"/>
+              </a:rPr>
+              <a:t>,</a:t>
+            </a:r>
+            <a:r>
+              <a:rPr lang="sv-SE" altLang="ko-KR" sz="1400" dirty="0">
+                <a:latin typeface="D2Coding" panose="020B0609020101020101" pitchFamily="49" charset="-127"/>
+                <a:ea typeface="D2Coding" panose="020B0609020101020101" pitchFamily="49" charset="-127"/>
+              </a:rPr>
+              <a:t> </a:t>
+            </a:r>
+            <a:r>
+              <a:rPr lang="sv-SE" altLang="ko-KR" sz="1400" dirty="0">
+                <a:effectLst/>
+                <a:latin typeface="D2Coding" panose="020B0609020101020101" pitchFamily="49" charset="-127"/>
+                <a:ea typeface="D2Coding" panose="020B0609020101020101" pitchFamily="49" charset="-127"/>
+              </a:rPr>
+              <a:t>1,</a:t>
+            </a:r>
+            <a:r>
+              <a:rPr lang="sv-SE" altLang="ko-KR" sz="1400" dirty="0">
+                <a:latin typeface="D2Coding" panose="020B0609020101020101" pitchFamily="49" charset="-127"/>
+                <a:ea typeface="D2Coding" panose="020B0609020101020101" pitchFamily="49" charset="-127"/>
+              </a:rPr>
+              <a:t> </a:t>
+            </a:r>
+            <a:r>
+              <a:rPr lang="sv-SE" altLang="ko-KR" sz="1400" dirty="0">
+                <a:effectLst/>
+                <a:latin typeface="D2Coding" panose="020B0609020101020101" pitchFamily="49" charset="-127"/>
+                <a:ea typeface="D2Coding" panose="020B0609020101020101" pitchFamily="49" charset="-127"/>
+              </a:rPr>
+              <a:t>0,</a:t>
+            </a:r>
+            <a:r>
+              <a:rPr lang="sv-SE" altLang="ko-KR" sz="1400" dirty="0">
+                <a:latin typeface="D2Coding" panose="020B0609020101020101" pitchFamily="49" charset="-127"/>
+                <a:ea typeface="D2Coding" panose="020B0609020101020101" pitchFamily="49" charset="-127"/>
+              </a:rPr>
+              <a:t> ...</a:t>
+            </a:r>
+            <a:r>
+              <a:rPr lang="sv-SE" altLang="ko-KR" sz="1400" dirty="0">
+                <a:effectLst/>
+                <a:latin typeface="D2Coding" panose="020B0609020101020101" pitchFamily="49" charset="-127"/>
+                <a:ea typeface="D2Coding" panose="020B0609020101020101" pitchFamily="49" charset="-127"/>
+              </a:rPr>
+              <a:t>,</a:t>
+            </a:r>
+            <a:r>
+              <a:rPr lang="sv-SE" altLang="ko-KR" sz="1400" dirty="0">
+                <a:latin typeface="D2Coding" panose="020B0609020101020101" pitchFamily="49" charset="-127"/>
+                <a:ea typeface="D2Coding" panose="020B0609020101020101" pitchFamily="49" charset="-127"/>
+              </a:rPr>
+              <a:t> </a:t>
+            </a:r>
+            <a:r>
+              <a:rPr lang="sv-SE" altLang="ko-KR" sz="1400" dirty="0">
+                <a:effectLst/>
+                <a:latin typeface="D2Coding" panose="020B0609020101020101" pitchFamily="49" charset="-127"/>
+                <a:ea typeface="D2Coding" panose="020B0609020101020101" pitchFamily="49" charset="-127"/>
+              </a:rPr>
+              <a:t>1,</a:t>
+            </a:r>
+            <a:r>
+              <a:rPr lang="sv-SE" altLang="ko-KR" sz="1400" dirty="0">
+                <a:latin typeface="D2Coding" panose="020B0609020101020101" pitchFamily="49" charset="-127"/>
+                <a:ea typeface="D2Coding" panose="020B0609020101020101" pitchFamily="49" charset="-127"/>
+              </a:rPr>
+              <a:t> </a:t>
+            </a:r>
+            <a:r>
+              <a:rPr lang="sv-SE" altLang="ko-KR" sz="1400" dirty="0">
+                <a:effectLst/>
+                <a:latin typeface="D2Coding" panose="020B0609020101020101" pitchFamily="49" charset="-127"/>
+                <a:ea typeface="D2Coding" panose="020B0609020101020101" pitchFamily="49" charset="-127"/>
+              </a:rPr>
+              <a:t>0]</a:t>
+            </a:r>
+            <a:r>
+              <a:rPr lang="sv-SE" altLang="ko-KR" sz="1400" dirty="0">
+                <a:latin typeface="D2Coding" panose="020B0609020101020101" pitchFamily="49" charset="-127"/>
+                <a:ea typeface="D2Coding" panose="020B0609020101020101" pitchFamily="49" charset="-127"/>
+              </a:rPr>
+              <a:t> </a:t>
+            </a:r>
+            <a:endParaRPr lang="ko-KR" altLang="en-US" sz="1400" dirty="0">
+              <a:latin typeface="D2Coding" panose="020B0609020101020101" pitchFamily="49" charset="-127"/>
+              <a:ea typeface="D2Coding" panose="020B0609020101020101" pitchFamily="49" charset="-127"/>
+            </a:endParaRPr>
           </a:p>
         </p:txBody>
       </p:sp>
-      <p:pic>
-        <p:nvPicPr>
-          <p:cNvPr id="1026" name="Picture 2">
+      <p:sp>
+        <p:nvSpPr>
+          <p:cNvPr id="6" name="TextBox 5">
             <a:extLst>
               <a:ext uri="{FF2B5EF4-FFF2-40B4-BE49-F238E27FC236}">
-                <a16:creationId xmlns:a16="http://schemas.microsoft.com/office/drawing/2014/main" id="{4CC78783-FF25-70C9-81CA-B9E7AE61973C}"/>
+                <a16:creationId xmlns:a16="http://schemas.microsoft.com/office/drawing/2014/main" id="{B9E0BA19-71FF-B1DB-7F1C-E657DD6A7A7F}"/>
               </a:ext>
             </a:extLst>
           </p:cNvPr>
-          <p:cNvPicPr>
-            <a:picLocks noChangeAspect="1" noChangeArrowheads="1"/>
-          </p:cNvPicPr>
+          <p:cNvSpPr txBox="1"/>
           <p:nvPr/>
-        </p:nvPicPr>
-        <p:blipFill>
-          <a:blip r:embed="rId2">
+        </p:nvSpPr>
+        <p:spPr>
+          <a:xfrm>
+            <a:off x="605671" y="2227132"/>
+            <a:ext cx="4685465" cy="1600438"/>
+          </a:xfrm>
+          <a:prstGeom prst="rect">
+            <a:avLst/>
+          </a:prstGeom>
+          <a:solidFill>
+            <a:schemeClr val="tx1"/>
+          </a:solidFill>
+          <a:ln>
+            <a:solidFill>
+              <a:schemeClr val="tx1"/>
+            </a:solidFill>
+          </a:ln>
+        </p:spPr>
+        <p:txBody>
+          <a:bodyPr wrap="square">
+            <a:spAutoFit/>
+          </a:bodyPr>
+          <a:lstStyle/>
+          <a:p>
+            <a:pPr>
+              <a:buNone/>
+            </a:pPr>
+            <a:r>
+              <a:rPr lang="en-US" altLang="ko-KR" sz="1400" dirty="0">
+                <a:solidFill>
+                  <a:schemeClr val="bg1"/>
+                </a:solidFill>
+                <a:effectLst/>
+                <a:latin typeface="D2Coding" panose="020B0609020101020101" pitchFamily="49" charset="-127"/>
+                <a:ea typeface="D2Coding" panose="020B0609020101020101" pitchFamily="49" charset="-127"/>
+              </a:rPr>
+              <a:t>vocab = {</a:t>
+            </a:r>
+            <a:endParaRPr lang="ko-KR" altLang="en-US" sz="1400" dirty="0">
+              <a:solidFill>
+                <a:schemeClr val="bg1"/>
+              </a:solidFill>
+              <a:effectLst/>
+              <a:latin typeface="D2Coding" panose="020B0609020101020101" pitchFamily="49" charset="-127"/>
+              <a:ea typeface="D2Coding" panose="020B0609020101020101" pitchFamily="49" charset="-127"/>
+            </a:endParaRPr>
+          </a:p>
+          <a:p>
+            <a:pPr>
+              <a:buNone/>
+            </a:pPr>
+            <a:r>
+              <a:rPr lang="ko-KR" altLang="en-US" sz="1400" dirty="0">
+                <a:solidFill>
+                  <a:schemeClr val="bg1"/>
+                </a:solidFill>
+                <a:effectLst/>
+                <a:latin typeface="D2Coding" panose="020B0609020101020101" pitchFamily="49" charset="-127"/>
+                <a:ea typeface="D2Coding" panose="020B0609020101020101" pitchFamily="49" charset="-127"/>
+              </a:rPr>
+              <a:t>    </a:t>
+            </a:r>
+            <a:r>
+              <a:rPr lang="en-US" altLang="ko-KR" sz="1400" dirty="0">
+                <a:solidFill>
+                  <a:schemeClr val="bg1"/>
+                </a:solidFill>
+                <a:effectLst/>
+                <a:latin typeface="D2Coding" panose="020B0609020101020101" pitchFamily="49" charset="-127"/>
+                <a:ea typeface="D2Coding" panose="020B0609020101020101" pitchFamily="49" charset="-127"/>
+              </a:rPr>
+              <a:t>"</a:t>
+            </a:r>
+            <a:r>
+              <a:rPr lang="ko-KR" altLang="en-US" sz="1400" dirty="0">
+                <a:solidFill>
+                  <a:schemeClr val="bg1"/>
+                </a:solidFill>
+                <a:effectLst/>
+                <a:latin typeface="D2Coding" panose="020B0609020101020101" pitchFamily="49" charset="-127"/>
+                <a:ea typeface="D2Coding" panose="020B0609020101020101" pitchFamily="49" charset="-127"/>
+              </a:rPr>
+              <a:t>결제</a:t>
+            </a:r>
+            <a:r>
+              <a:rPr lang="en-US" altLang="ko-KR" sz="1400" dirty="0">
+                <a:solidFill>
+                  <a:schemeClr val="bg1"/>
+                </a:solidFill>
+                <a:effectLst/>
+                <a:latin typeface="D2Coding" panose="020B0609020101020101" pitchFamily="49" charset="-127"/>
+                <a:ea typeface="D2Coding" panose="020B0609020101020101" pitchFamily="49" charset="-127"/>
+              </a:rPr>
+              <a:t>":</a:t>
+            </a:r>
+            <a:r>
+              <a:rPr lang="ko-KR" altLang="en-US" sz="1400" dirty="0">
+                <a:solidFill>
+                  <a:schemeClr val="bg1"/>
+                </a:solidFill>
+                <a:effectLst/>
+                <a:latin typeface="D2Coding" panose="020B0609020101020101" pitchFamily="49" charset="-127"/>
+                <a:ea typeface="D2Coding" panose="020B0609020101020101" pitchFamily="49" charset="-127"/>
+              </a:rPr>
+              <a:t> </a:t>
+            </a:r>
+            <a:r>
+              <a:rPr lang="en-US" altLang="ko-KR" sz="1400" dirty="0">
+                <a:solidFill>
+                  <a:schemeClr val="bg1"/>
+                </a:solidFill>
+                <a:effectLst/>
+                <a:latin typeface="D2Coding" panose="020B0609020101020101" pitchFamily="49" charset="-127"/>
+                <a:ea typeface="D2Coding" panose="020B0609020101020101" pitchFamily="49" charset="-127"/>
+              </a:rPr>
+              <a:t>0,</a:t>
+            </a:r>
+            <a:r>
+              <a:rPr lang="ko-KR" altLang="en-US" sz="1400" dirty="0">
+                <a:solidFill>
+                  <a:schemeClr val="bg1"/>
+                </a:solidFill>
+                <a:effectLst/>
+                <a:latin typeface="D2Coding" panose="020B0609020101020101" pitchFamily="49" charset="-127"/>
+                <a:ea typeface="D2Coding" panose="020B0609020101020101" pitchFamily="49" charset="-127"/>
+              </a:rPr>
+              <a:t> </a:t>
+            </a:r>
+            <a:r>
+              <a:rPr lang="en-US" altLang="ko-KR" sz="1400" dirty="0">
+                <a:solidFill>
+                  <a:schemeClr val="bg1"/>
+                </a:solidFill>
+                <a:effectLst/>
+                <a:latin typeface="D2Coding" panose="020B0609020101020101" pitchFamily="49" charset="-127"/>
+                <a:ea typeface="D2Coding" panose="020B0609020101020101" pitchFamily="49" charset="-127"/>
+              </a:rPr>
+              <a:t>"</a:t>
+            </a:r>
+            <a:r>
+              <a:rPr lang="ko-KR" altLang="en-US" sz="1400" dirty="0">
+                <a:solidFill>
+                  <a:schemeClr val="bg1"/>
+                </a:solidFill>
+                <a:effectLst/>
+                <a:latin typeface="D2Coding" panose="020B0609020101020101" pitchFamily="49" charset="-127"/>
+                <a:ea typeface="D2Coding" panose="020B0609020101020101" pitchFamily="49" charset="-127"/>
+              </a:rPr>
+              <a:t>가</a:t>
+            </a:r>
+            <a:r>
+              <a:rPr lang="en-US" altLang="ko-KR" sz="1400" dirty="0">
+                <a:solidFill>
+                  <a:schemeClr val="bg1"/>
+                </a:solidFill>
+                <a:effectLst/>
+                <a:latin typeface="D2Coding" panose="020B0609020101020101" pitchFamily="49" charset="-127"/>
+                <a:ea typeface="D2Coding" panose="020B0609020101020101" pitchFamily="49" charset="-127"/>
+              </a:rPr>
+              <a:t>":</a:t>
+            </a:r>
+            <a:r>
+              <a:rPr lang="ko-KR" altLang="en-US" sz="1400" dirty="0">
+                <a:solidFill>
+                  <a:schemeClr val="bg1"/>
+                </a:solidFill>
+                <a:effectLst/>
+                <a:latin typeface="D2Coding" panose="020B0609020101020101" pitchFamily="49" charset="-127"/>
+                <a:ea typeface="D2Coding" panose="020B0609020101020101" pitchFamily="49" charset="-127"/>
+              </a:rPr>
+              <a:t> </a:t>
+            </a:r>
+            <a:r>
+              <a:rPr lang="en-US" altLang="ko-KR" sz="1400" dirty="0">
+                <a:solidFill>
+                  <a:schemeClr val="bg1"/>
+                </a:solidFill>
+                <a:effectLst/>
+                <a:latin typeface="D2Coding" panose="020B0609020101020101" pitchFamily="49" charset="-127"/>
+                <a:ea typeface="D2Coding" panose="020B0609020101020101" pitchFamily="49" charset="-127"/>
+              </a:rPr>
+              <a:t>1,</a:t>
+            </a:r>
+            <a:r>
+              <a:rPr lang="ko-KR" altLang="en-US" sz="1400" dirty="0">
+                <a:solidFill>
+                  <a:schemeClr val="bg1"/>
+                </a:solidFill>
+                <a:effectLst/>
+                <a:latin typeface="D2Coding" panose="020B0609020101020101" pitchFamily="49" charset="-127"/>
+                <a:ea typeface="D2Coding" panose="020B0609020101020101" pitchFamily="49" charset="-127"/>
+              </a:rPr>
+              <a:t> </a:t>
+            </a:r>
+            <a:r>
+              <a:rPr lang="en-US" altLang="ko-KR" sz="1400" dirty="0">
+                <a:solidFill>
+                  <a:schemeClr val="bg1"/>
+                </a:solidFill>
+                <a:effectLst/>
+                <a:latin typeface="D2Coding" panose="020B0609020101020101" pitchFamily="49" charset="-127"/>
+                <a:ea typeface="D2Coding" panose="020B0609020101020101" pitchFamily="49" charset="-127"/>
+              </a:rPr>
+              <a:t>"</a:t>
+            </a:r>
+            <a:r>
+              <a:rPr lang="ko-KR" altLang="en-US" sz="1400" dirty="0">
+                <a:solidFill>
+                  <a:schemeClr val="bg1"/>
+                </a:solidFill>
+                <a:effectLst/>
+                <a:latin typeface="D2Coding" panose="020B0609020101020101" pitchFamily="49" charset="-127"/>
+                <a:ea typeface="D2Coding" panose="020B0609020101020101" pitchFamily="49" charset="-127"/>
+              </a:rPr>
+              <a:t>두</a:t>
+            </a:r>
+            <a:r>
+              <a:rPr lang="en-US" altLang="ko-KR" sz="1400" dirty="0">
+                <a:solidFill>
+                  <a:schemeClr val="bg1"/>
+                </a:solidFill>
+                <a:effectLst/>
+                <a:latin typeface="D2Coding" panose="020B0609020101020101" pitchFamily="49" charset="-127"/>
+                <a:ea typeface="D2Coding" panose="020B0609020101020101" pitchFamily="49" charset="-127"/>
+              </a:rPr>
+              <a:t>":</a:t>
+            </a:r>
+            <a:r>
+              <a:rPr lang="ko-KR" altLang="en-US" sz="1400" dirty="0">
+                <a:solidFill>
+                  <a:schemeClr val="bg1"/>
+                </a:solidFill>
+                <a:effectLst/>
+                <a:latin typeface="D2Coding" panose="020B0609020101020101" pitchFamily="49" charset="-127"/>
+                <a:ea typeface="D2Coding" panose="020B0609020101020101" pitchFamily="49" charset="-127"/>
+              </a:rPr>
+              <a:t> </a:t>
+            </a:r>
+            <a:r>
+              <a:rPr lang="en-US" altLang="ko-KR" sz="1400" dirty="0">
+                <a:solidFill>
+                  <a:schemeClr val="bg1"/>
+                </a:solidFill>
+                <a:effectLst/>
+                <a:latin typeface="D2Coding" panose="020B0609020101020101" pitchFamily="49" charset="-127"/>
+                <a:ea typeface="D2Coding" panose="020B0609020101020101" pitchFamily="49" charset="-127"/>
+              </a:rPr>
+              <a:t>2,</a:t>
+            </a:r>
+            <a:r>
+              <a:rPr lang="ko-KR" altLang="en-US" sz="1400" dirty="0">
+                <a:solidFill>
+                  <a:schemeClr val="bg1"/>
+                </a:solidFill>
+                <a:effectLst/>
+                <a:latin typeface="D2Coding" panose="020B0609020101020101" pitchFamily="49" charset="-127"/>
+                <a:ea typeface="D2Coding" panose="020B0609020101020101" pitchFamily="49" charset="-127"/>
+              </a:rPr>
+              <a:t> </a:t>
+            </a:r>
+            <a:r>
+              <a:rPr lang="en-US" altLang="ko-KR" sz="1400" dirty="0">
+                <a:solidFill>
+                  <a:schemeClr val="bg1"/>
+                </a:solidFill>
+                <a:effectLst/>
+                <a:latin typeface="D2Coding" panose="020B0609020101020101" pitchFamily="49" charset="-127"/>
+                <a:ea typeface="D2Coding" panose="020B0609020101020101" pitchFamily="49" charset="-127"/>
+              </a:rPr>
+              <a:t>"</a:t>
+            </a:r>
+            <a:r>
+              <a:rPr lang="ko-KR" altLang="en-US" sz="1400" dirty="0">
+                <a:solidFill>
+                  <a:schemeClr val="bg1"/>
+                </a:solidFill>
+                <a:effectLst/>
+                <a:latin typeface="D2Coding" panose="020B0609020101020101" pitchFamily="49" charset="-127"/>
+                <a:ea typeface="D2Coding" panose="020B0609020101020101" pitchFamily="49" charset="-127"/>
+              </a:rPr>
+              <a:t>번</a:t>
+            </a:r>
+            <a:r>
+              <a:rPr lang="en-US" altLang="ko-KR" sz="1400" dirty="0">
+                <a:solidFill>
+                  <a:schemeClr val="bg1"/>
+                </a:solidFill>
+                <a:effectLst/>
+                <a:latin typeface="D2Coding" panose="020B0609020101020101" pitchFamily="49" charset="-127"/>
+                <a:ea typeface="D2Coding" panose="020B0609020101020101" pitchFamily="49" charset="-127"/>
+              </a:rPr>
+              <a:t>":</a:t>
+            </a:r>
+            <a:r>
+              <a:rPr lang="ko-KR" altLang="en-US" sz="1400" dirty="0">
+                <a:solidFill>
+                  <a:schemeClr val="bg1"/>
+                </a:solidFill>
+                <a:effectLst/>
+                <a:latin typeface="D2Coding" panose="020B0609020101020101" pitchFamily="49" charset="-127"/>
+                <a:ea typeface="D2Coding" panose="020B0609020101020101" pitchFamily="49" charset="-127"/>
+              </a:rPr>
+              <a:t> </a:t>
+            </a:r>
+            <a:r>
+              <a:rPr lang="en-US" altLang="ko-KR" sz="1400" dirty="0">
+                <a:solidFill>
+                  <a:schemeClr val="bg1"/>
+                </a:solidFill>
+                <a:effectLst/>
+                <a:latin typeface="D2Coding" panose="020B0609020101020101" pitchFamily="49" charset="-127"/>
+                <a:ea typeface="D2Coding" panose="020B0609020101020101" pitchFamily="49" charset="-127"/>
+              </a:rPr>
+              <a:t>3,</a:t>
+            </a:r>
+            <a:r>
+              <a:rPr lang="ko-KR" altLang="en-US" sz="1400" dirty="0">
+                <a:solidFill>
+                  <a:schemeClr val="bg1"/>
+                </a:solidFill>
+                <a:effectLst/>
+                <a:latin typeface="D2Coding" panose="020B0609020101020101" pitchFamily="49" charset="-127"/>
+                <a:ea typeface="D2Coding" panose="020B0609020101020101" pitchFamily="49" charset="-127"/>
+              </a:rPr>
+              <a:t> </a:t>
+            </a:r>
+            <a:endParaRPr lang="en-US" altLang="ko-KR" sz="1400" dirty="0">
+              <a:solidFill>
+                <a:schemeClr val="bg1"/>
+              </a:solidFill>
+              <a:effectLst/>
+              <a:latin typeface="D2Coding" panose="020B0609020101020101" pitchFamily="49" charset="-127"/>
+              <a:ea typeface="D2Coding" panose="020B0609020101020101" pitchFamily="49" charset="-127"/>
+            </a:endParaRPr>
+          </a:p>
+          <a:p>
+            <a:pPr>
+              <a:buNone/>
+            </a:pPr>
+            <a:r>
+              <a:rPr lang="en-US" altLang="ko-KR" sz="1400" dirty="0">
+                <a:solidFill>
+                  <a:schemeClr val="bg1"/>
+                </a:solidFill>
+                <a:latin typeface="D2Coding" panose="020B0609020101020101" pitchFamily="49" charset="-127"/>
+                <a:ea typeface="D2Coding" panose="020B0609020101020101" pitchFamily="49" charset="-127"/>
+              </a:rPr>
+              <a:t>    </a:t>
+            </a:r>
+            <a:r>
+              <a:rPr lang="en-US" altLang="ko-KR" sz="1400" dirty="0">
+                <a:solidFill>
+                  <a:schemeClr val="bg1"/>
+                </a:solidFill>
+                <a:effectLst/>
+                <a:latin typeface="D2Coding" panose="020B0609020101020101" pitchFamily="49" charset="-127"/>
+                <a:ea typeface="D2Coding" panose="020B0609020101020101" pitchFamily="49" charset="-127"/>
+              </a:rPr>
+              <a:t>"</a:t>
+            </a:r>
+            <a:r>
+              <a:rPr lang="ko-KR" altLang="en-US" sz="1400" dirty="0">
+                <a:solidFill>
+                  <a:schemeClr val="bg1"/>
+                </a:solidFill>
+                <a:effectLst/>
+                <a:latin typeface="D2Coding" panose="020B0609020101020101" pitchFamily="49" charset="-127"/>
+                <a:ea typeface="D2Coding" panose="020B0609020101020101" pitchFamily="49" charset="-127"/>
+              </a:rPr>
+              <a:t>청구됐어요</a:t>
+            </a:r>
+            <a:r>
+              <a:rPr lang="en-US" altLang="ko-KR" sz="1400" dirty="0">
+                <a:solidFill>
+                  <a:schemeClr val="bg1"/>
+                </a:solidFill>
+                <a:effectLst/>
+                <a:latin typeface="D2Coding" panose="020B0609020101020101" pitchFamily="49" charset="-127"/>
+                <a:ea typeface="D2Coding" panose="020B0609020101020101" pitchFamily="49" charset="-127"/>
+              </a:rPr>
+              <a:t>":</a:t>
+            </a:r>
+            <a:r>
+              <a:rPr lang="ko-KR" altLang="en-US" sz="1400" dirty="0">
+                <a:solidFill>
+                  <a:schemeClr val="bg1"/>
+                </a:solidFill>
+                <a:effectLst/>
+                <a:latin typeface="D2Coding" panose="020B0609020101020101" pitchFamily="49" charset="-127"/>
+                <a:ea typeface="D2Coding" panose="020B0609020101020101" pitchFamily="49" charset="-127"/>
+              </a:rPr>
+              <a:t> </a:t>
+            </a:r>
+            <a:r>
+              <a:rPr lang="en-US" altLang="ko-KR" sz="1400" dirty="0">
+                <a:solidFill>
+                  <a:schemeClr val="bg1"/>
+                </a:solidFill>
+                <a:effectLst/>
+                <a:latin typeface="D2Coding" panose="020B0609020101020101" pitchFamily="49" charset="-127"/>
+                <a:ea typeface="D2Coding" panose="020B0609020101020101" pitchFamily="49" charset="-127"/>
+              </a:rPr>
+              <a:t>4, "</a:t>
+            </a:r>
+            <a:r>
+              <a:rPr lang="ko-KR" altLang="en-US" sz="1400" dirty="0">
+                <a:solidFill>
+                  <a:schemeClr val="bg1"/>
+                </a:solidFill>
+                <a:effectLst/>
+                <a:latin typeface="D2Coding" panose="020B0609020101020101" pitchFamily="49" charset="-127"/>
+                <a:ea typeface="D2Coding" panose="020B0609020101020101" pitchFamily="49" charset="-127"/>
+              </a:rPr>
+              <a:t>비밀번호</a:t>
+            </a:r>
+            <a:r>
+              <a:rPr lang="en-US" altLang="ko-KR" sz="1400" dirty="0">
+                <a:solidFill>
+                  <a:schemeClr val="bg1"/>
+                </a:solidFill>
+                <a:effectLst/>
+                <a:latin typeface="D2Coding" panose="020B0609020101020101" pitchFamily="49" charset="-127"/>
+                <a:ea typeface="D2Coding" panose="020B0609020101020101" pitchFamily="49" charset="-127"/>
+              </a:rPr>
+              <a:t>":</a:t>
+            </a:r>
+            <a:r>
+              <a:rPr lang="ko-KR" altLang="en-US" sz="1400" dirty="0">
+                <a:solidFill>
+                  <a:schemeClr val="bg1"/>
+                </a:solidFill>
+                <a:effectLst/>
+                <a:latin typeface="D2Coding" panose="020B0609020101020101" pitchFamily="49" charset="-127"/>
+                <a:ea typeface="D2Coding" panose="020B0609020101020101" pitchFamily="49" charset="-127"/>
+              </a:rPr>
+              <a:t> </a:t>
+            </a:r>
+            <a:r>
+              <a:rPr lang="en-US" altLang="ko-KR" sz="1400" dirty="0">
+                <a:solidFill>
+                  <a:schemeClr val="bg1"/>
+                </a:solidFill>
+                <a:effectLst/>
+                <a:latin typeface="D2Coding" panose="020B0609020101020101" pitchFamily="49" charset="-127"/>
+                <a:ea typeface="D2Coding" panose="020B0609020101020101" pitchFamily="49" charset="-127"/>
+              </a:rPr>
+              <a:t>5,</a:t>
+            </a:r>
+            <a:r>
+              <a:rPr lang="ko-KR" altLang="en-US" sz="1400" dirty="0">
+                <a:solidFill>
+                  <a:schemeClr val="bg1"/>
+                </a:solidFill>
+                <a:effectLst/>
+                <a:latin typeface="D2Coding" panose="020B0609020101020101" pitchFamily="49" charset="-127"/>
+                <a:ea typeface="D2Coding" panose="020B0609020101020101" pitchFamily="49" charset="-127"/>
+              </a:rPr>
+              <a:t> </a:t>
+            </a:r>
+            <a:endParaRPr lang="en-US" altLang="ko-KR" sz="1400" dirty="0">
+              <a:solidFill>
+                <a:schemeClr val="bg1"/>
+              </a:solidFill>
+              <a:effectLst/>
+              <a:latin typeface="D2Coding" panose="020B0609020101020101" pitchFamily="49" charset="-127"/>
+              <a:ea typeface="D2Coding" panose="020B0609020101020101" pitchFamily="49" charset="-127"/>
+            </a:endParaRPr>
+          </a:p>
+          <a:p>
+            <a:pPr>
+              <a:buNone/>
+            </a:pPr>
+            <a:r>
+              <a:rPr lang="en-US" altLang="ko-KR" sz="1400" dirty="0">
+                <a:solidFill>
+                  <a:schemeClr val="bg1"/>
+                </a:solidFill>
+                <a:latin typeface="D2Coding" panose="020B0609020101020101" pitchFamily="49" charset="-127"/>
+                <a:ea typeface="D2Coding" panose="020B0609020101020101" pitchFamily="49" charset="-127"/>
+              </a:rPr>
+              <a:t>    </a:t>
+            </a:r>
+            <a:r>
+              <a:rPr lang="en-US" altLang="ko-KR" sz="1400" dirty="0">
+                <a:solidFill>
+                  <a:schemeClr val="bg1"/>
+                </a:solidFill>
+                <a:effectLst/>
+                <a:latin typeface="D2Coding" panose="020B0609020101020101" pitchFamily="49" charset="-127"/>
+                <a:ea typeface="D2Coding" panose="020B0609020101020101" pitchFamily="49" charset="-127"/>
+              </a:rPr>
+              <a:t>"</a:t>
+            </a:r>
+            <a:r>
+              <a:rPr lang="ko-KR" altLang="en-US" sz="1400" dirty="0">
+                <a:solidFill>
+                  <a:schemeClr val="bg1"/>
+                </a:solidFill>
+                <a:effectLst/>
+                <a:latin typeface="D2Coding" panose="020B0609020101020101" pitchFamily="49" charset="-127"/>
+                <a:ea typeface="D2Coding" panose="020B0609020101020101" pitchFamily="49" charset="-127"/>
+              </a:rPr>
+              <a:t>를</a:t>
+            </a:r>
+            <a:r>
+              <a:rPr lang="en-US" altLang="ko-KR" sz="1400" dirty="0">
+                <a:solidFill>
+                  <a:schemeClr val="bg1"/>
+                </a:solidFill>
+                <a:effectLst/>
+                <a:latin typeface="D2Coding" panose="020B0609020101020101" pitchFamily="49" charset="-127"/>
+                <a:ea typeface="D2Coding" panose="020B0609020101020101" pitchFamily="49" charset="-127"/>
+              </a:rPr>
+              <a:t>":</a:t>
+            </a:r>
+            <a:r>
+              <a:rPr lang="ko-KR" altLang="en-US" sz="1400" dirty="0">
+                <a:solidFill>
+                  <a:schemeClr val="bg1"/>
+                </a:solidFill>
+                <a:effectLst/>
+                <a:latin typeface="D2Coding" panose="020B0609020101020101" pitchFamily="49" charset="-127"/>
+                <a:ea typeface="D2Coding" panose="020B0609020101020101" pitchFamily="49" charset="-127"/>
+              </a:rPr>
+              <a:t> </a:t>
+            </a:r>
+            <a:r>
+              <a:rPr lang="en-US" altLang="ko-KR" sz="1400" dirty="0">
+                <a:solidFill>
+                  <a:schemeClr val="bg1"/>
+                </a:solidFill>
+                <a:effectLst/>
+                <a:latin typeface="D2Coding" panose="020B0609020101020101" pitchFamily="49" charset="-127"/>
+                <a:ea typeface="D2Coding" panose="020B0609020101020101" pitchFamily="49" charset="-127"/>
+              </a:rPr>
+              <a:t>6,</a:t>
+            </a:r>
+            <a:r>
+              <a:rPr lang="ko-KR" altLang="en-US" sz="1400" dirty="0">
+                <a:solidFill>
+                  <a:schemeClr val="bg1"/>
+                </a:solidFill>
+                <a:effectLst/>
+                <a:latin typeface="D2Coding" panose="020B0609020101020101" pitchFamily="49" charset="-127"/>
+                <a:ea typeface="D2Coding" panose="020B0609020101020101" pitchFamily="49" charset="-127"/>
+              </a:rPr>
+              <a:t> </a:t>
+            </a:r>
+            <a:r>
+              <a:rPr lang="en-US" altLang="ko-KR" sz="1400" dirty="0">
+                <a:solidFill>
+                  <a:schemeClr val="bg1"/>
+                </a:solidFill>
+                <a:effectLst/>
+                <a:latin typeface="D2Coding" panose="020B0609020101020101" pitchFamily="49" charset="-127"/>
+                <a:ea typeface="D2Coding" panose="020B0609020101020101" pitchFamily="49" charset="-127"/>
+              </a:rPr>
+              <a:t>"</a:t>
+            </a:r>
+            <a:r>
+              <a:rPr lang="ko-KR" altLang="en-US" sz="1400" dirty="0">
+                <a:solidFill>
+                  <a:schemeClr val="bg1"/>
+                </a:solidFill>
+                <a:effectLst/>
+                <a:latin typeface="D2Coding" panose="020B0609020101020101" pitchFamily="49" charset="-127"/>
+                <a:ea typeface="D2Coding" panose="020B0609020101020101" pitchFamily="49" charset="-127"/>
+              </a:rPr>
+              <a:t>어떻게</a:t>
+            </a:r>
+            <a:r>
+              <a:rPr lang="en-US" altLang="ko-KR" sz="1400" dirty="0">
+                <a:solidFill>
+                  <a:schemeClr val="bg1"/>
+                </a:solidFill>
+                <a:effectLst/>
+                <a:latin typeface="D2Coding" panose="020B0609020101020101" pitchFamily="49" charset="-127"/>
+                <a:ea typeface="D2Coding" panose="020B0609020101020101" pitchFamily="49" charset="-127"/>
+              </a:rPr>
+              <a:t>":</a:t>
+            </a:r>
+            <a:r>
+              <a:rPr lang="ko-KR" altLang="en-US" sz="1400" dirty="0">
+                <a:solidFill>
+                  <a:schemeClr val="bg1"/>
+                </a:solidFill>
+                <a:effectLst/>
+                <a:latin typeface="D2Coding" panose="020B0609020101020101" pitchFamily="49" charset="-127"/>
+                <a:ea typeface="D2Coding" panose="020B0609020101020101" pitchFamily="49" charset="-127"/>
+              </a:rPr>
+              <a:t> </a:t>
+            </a:r>
+            <a:r>
+              <a:rPr lang="en-US" altLang="ko-KR" sz="1400" dirty="0">
+                <a:solidFill>
+                  <a:schemeClr val="bg1"/>
+                </a:solidFill>
+                <a:effectLst/>
+                <a:latin typeface="D2Coding" panose="020B0609020101020101" pitchFamily="49" charset="-127"/>
+                <a:ea typeface="D2Coding" panose="020B0609020101020101" pitchFamily="49" charset="-127"/>
+              </a:rPr>
+              <a:t>7,</a:t>
+            </a:r>
+            <a:endParaRPr lang="ko-KR" altLang="en-US" sz="1400" dirty="0">
+              <a:solidFill>
+                <a:schemeClr val="bg1"/>
+              </a:solidFill>
+              <a:effectLst/>
+              <a:latin typeface="D2Coding" panose="020B0609020101020101" pitchFamily="49" charset="-127"/>
+              <a:ea typeface="D2Coding" panose="020B0609020101020101" pitchFamily="49" charset="-127"/>
+            </a:endParaRPr>
+          </a:p>
+          <a:p>
+            <a:pPr>
+              <a:buNone/>
+            </a:pPr>
+            <a:r>
+              <a:rPr lang="en-US" altLang="ko-KR" sz="1400" dirty="0">
+                <a:solidFill>
+                  <a:schemeClr val="bg1"/>
+                </a:solidFill>
+                <a:effectLst/>
+                <a:latin typeface="D2Coding" panose="020B0609020101020101" pitchFamily="49" charset="-127"/>
+                <a:ea typeface="D2Coding" panose="020B0609020101020101" pitchFamily="49" charset="-127"/>
+              </a:rPr>
+              <a:t>     ……………………….</a:t>
+            </a:r>
+          </a:p>
+          <a:p>
+            <a:pPr>
+              <a:buNone/>
+            </a:pPr>
+            <a:r>
+              <a:rPr lang="en-US" altLang="ko-KR" sz="1400" dirty="0">
+                <a:solidFill>
+                  <a:schemeClr val="bg1"/>
+                </a:solidFill>
+                <a:effectLst/>
+                <a:latin typeface="D2Coding" panose="020B0609020101020101" pitchFamily="49" charset="-127"/>
+                <a:ea typeface="D2Coding" panose="020B0609020101020101" pitchFamily="49" charset="-127"/>
+              </a:rPr>
+              <a:t>     "</a:t>
+            </a:r>
+            <a:r>
+              <a:rPr lang="ko-KR" altLang="en-US" sz="1400" dirty="0">
+                <a:solidFill>
+                  <a:schemeClr val="bg1"/>
+                </a:solidFill>
+                <a:effectLst/>
+                <a:latin typeface="D2Coding" panose="020B0609020101020101" pitchFamily="49" charset="-127"/>
+                <a:ea typeface="D2Coding" panose="020B0609020101020101" pitchFamily="49" charset="-127"/>
+              </a:rPr>
+              <a:t>주문</a:t>
+            </a:r>
+            <a:r>
+              <a:rPr lang="en-US" altLang="ko-KR" sz="1400" dirty="0">
+                <a:solidFill>
+                  <a:schemeClr val="bg1"/>
+                </a:solidFill>
+                <a:effectLst/>
+                <a:latin typeface="D2Coding" panose="020B0609020101020101" pitchFamily="49" charset="-127"/>
+                <a:ea typeface="D2Coding" panose="020B0609020101020101" pitchFamily="49" charset="-127"/>
+              </a:rPr>
+              <a:t>":</a:t>
+            </a:r>
+            <a:r>
+              <a:rPr lang="ko-KR" altLang="en-US" sz="1400" dirty="0">
+                <a:solidFill>
+                  <a:schemeClr val="bg1"/>
+                </a:solidFill>
+                <a:effectLst/>
+                <a:latin typeface="D2Coding" panose="020B0609020101020101" pitchFamily="49" charset="-127"/>
+                <a:ea typeface="D2Coding" panose="020B0609020101020101" pitchFamily="49" charset="-127"/>
+              </a:rPr>
+              <a:t> </a:t>
+            </a:r>
+            <a:r>
+              <a:rPr lang="en-US" altLang="ko-KR" sz="1400" dirty="0">
+                <a:solidFill>
+                  <a:schemeClr val="bg1"/>
+                </a:solidFill>
+                <a:latin typeface="D2Coding" panose="020B0609020101020101" pitchFamily="49" charset="-127"/>
+                <a:ea typeface="D2Coding" panose="020B0609020101020101" pitchFamily="49" charset="-127"/>
+              </a:rPr>
+              <a:t>9,997</a:t>
+            </a:r>
+            <a:r>
+              <a:rPr lang="en-US" altLang="ko-KR" sz="1400" dirty="0">
+                <a:solidFill>
+                  <a:schemeClr val="bg1"/>
+                </a:solidFill>
+                <a:effectLst/>
+                <a:latin typeface="D2Coding" panose="020B0609020101020101" pitchFamily="49" charset="-127"/>
+                <a:ea typeface="D2Coding" panose="020B0609020101020101" pitchFamily="49" charset="-127"/>
+              </a:rPr>
+              <a:t>,</a:t>
+            </a:r>
+            <a:r>
+              <a:rPr lang="ko-KR" altLang="en-US" sz="1400" dirty="0">
+                <a:solidFill>
+                  <a:schemeClr val="bg1"/>
+                </a:solidFill>
+                <a:effectLst/>
+                <a:latin typeface="D2Coding" panose="020B0609020101020101" pitchFamily="49" charset="-127"/>
+                <a:ea typeface="D2Coding" panose="020B0609020101020101" pitchFamily="49" charset="-127"/>
+              </a:rPr>
+              <a:t> </a:t>
+            </a:r>
+            <a:r>
+              <a:rPr lang="en-US" altLang="ko-KR" sz="1400" dirty="0">
+                <a:solidFill>
+                  <a:schemeClr val="bg1"/>
+                </a:solidFill>
+                <a:effectLst/>
+                <a:latin typeface="D2Coding" panose="020B0609020101020101" pitchFamily="49" charset="-127"/>
+                <a:ea typeface="D2Coding" panose="020B0609020101020101" pitchFamily="49" charset="-127"/>
+              </a:rPr>
+              <a:t>"</a:t>
+            </a:r>
+            <a:r>
+              <a:rPr lang="ko-KR" altLang="en-US" sz="1400" dirty="0">
+                <a:solidFill>
+                  <a:schemeClr val="bg1"/>
+                </a:solidFill>
+                <a:effectLst/>
+                <a:latin typeface="D2Coding" panose="020B0609020101020101" pitchFamily="49" charset="-127"/>
+                <a:ea typeface="D2Coding" panose="020B0609020101020101" pitchFamily="49" charset="-127"/>
+              </a:rPr>
+              <a:t>상품</a:t>
+            </a:r>
+            <a:r>
+              <a:rPr lang="en-US" altLang="ko-KR" sz="1400" dirty="0">
+                <a:solidFill>
+                  <a:schemeClr val="bg1"/>
+                </a:solidFill>
+                <a:effectLst/>
+                <a:latin typeface="D2Coding" panose="020B0609020101020101" pitchFamily="49" charset="-127"/>
+                <a:ea typeface="D2Coding" panose="020B0609020101020101" pitchFamily="49" charset="-127"/>
+              </a:rPr>
+              <a:t>":</a:t>
+            </a:r>
+            <a:r>
+              <a:rPr lang="ko-KR" altLang="en-US" sz="1400" dirty="0">
+                <a:solidFill>
+                  <a:schemeClr val="bg1"/>
+                </a:solidFill>
+                <a:effectLst/>
+                <a:latin typeface="D2Coding" panose="020B0609020101020101" pitchFamily="49" charset="-127"/>
+                <a:ea typeface="D2Coding" panose="020B0609020101020101" pitchFamily="49" charset="-127"/>
+              </a:rPr>
+              <a:t> </a:t>
+            </a:r>
+            <a:r>
+              <a:rPr lang="en-US" altLang="ko-KR" sz="1400" dirty="0">
+                <a:solidFill>
+                  <a:schemeClr val="bg1"/>
+                </a:solidFill>
+                <a:latin typeface="D2Coding" panose="020B0609020101020101" pitchFamily="49" charset="-127"/>
+                <a:ea typeface="D2Coding" panose="020B0609020101020101" pitchFamily="49" charset="-127"/>
+              </a:rPr>
+              <a:t>9,998</a:t>
+            </a:r>
+            <a:r>
+              <a:rPr lang="en-US" altLang="ko-KR" sz="1400" dirty="0">
+                <a:solidFill>
+                  <a:schemeClr val="bg1"/>
+                </a:solidFill>
+                <a:effectLst/>
+                <a:latin typeface="D2Coding" panose="020B0609020101020101" pitchFamily="49" charset="-127"/>
+                <a:ea typeface="D2Coding" panose="020B0609020101020101" pitchFamily="49" charset="-127"/>
+              </a:rPr>
+              <a:t>,</a:t>
+            </a:r>
+            <a:r>
+              <a:rPr lang="ko-KR" altLang="en-US" sz="1400" dirty="0">
+                <a:solidFill>
+                  <a:schemeClr val="bg1"/>
+                </a:solidFill>
+                <a:effectLst/>
+                <a:latin typeface="D2Coding" panose="020B0609020101020101" pitchFamily="49" charset="-127"/>
+                <a:ea typeface="D2Coding" panose="020B0609020101020101" pitchFamily="49" charset="-127"/>
+              </a:rPr>
+              <a:t> </a:t>
+            </a:r>
+            <a:r>
+              <a:rPr lang="en-US" altLang="ko-KR" sz="1400" dirty="0">
+                <a:solidFill>
+                  <a:schemeClr val="bg1"/>
+                </a:solidFill>
+                <a:effectLst/>
+                <a:latin typeface="D2Coding" panose="020B0609020101020101" pitchFamily="49" charset="-127"/>
+                <a:ea typeface="D2Coding" panose="020B0609020101020101" pitchFamily="49" charset="-127"/>
+              </a:rPr>
+              <a:t>"</a:t>
+            </a:r>
+            <a:r>
+              <a:rPr lang="ko-KR" altLang="en-US" sz="1400" dirty="0">
+                <a:solidFill>
+                  <a:schemeClr val="bg1"/>
+                </a:solidFill>
+                <a:effectLst/>
+                <a:latin typeface="D2Coding" panose="020B0609020101020101" pitchFamily="49" charset="-127"/>
+                <a:ea typeface="D2Coding" panose="020B0609020101020101" pitchFamily="49" charset="-127"/>
+              </a:rPr>
+              <a:t>안</a:t>
+            </a:r>
+            <a:r>
+              <a:rPr lang="en-US" altLang="ko-KR" sz="1400" dirty="0">
+                <a:solidFill>
+                  <a:schemeClr val="bg1"/>
+                </a:solidFill>
+                <a:effectLst/>
+                <a:latin typeface="D2Coding" panose="020B0609020101020101" pitchFamily="49" charset="-127"/>
+                <a:ea typeface="D2Coding" panose="020B0609020101020101" pitchFamily="49" charset="-127"/>
+              </a:rPr>
+              <a:t>":</a:t>
+            </a:r>
+            <a:r>
+              <a:rPr lang="ko-KR" altLang="en-US" sz="1400" dirty="0">
+                <a:solidFill>
+                  <a:schemeClr val="bg1"/>
+                </a:solidFill>
+                <a:effectLst/>
+                <a:latin typeface="D2Coding" panose="020B0609020101020101" pitchFamily="49" charset="-127"/>
+                <a:ea typeface="D2Coding" panose="020B0609020101020101" pitchFamily="49" charset="-127"/>
+              </a:rPr>
+              <a:t> </a:t>
+            </a:r>
+            <a:r>
+              <a:rPr lang="en-US" altLang="ko-KR" sz="1400" dirty="0">
+                <a:solidFill>
+                  <a:schemeClr val="bg1"/>
+                </a:solidFill>
+                <a:latin typeface="D2Coding" panose="020B0609020101020101" pitchFamily="49" charset="-127"/>
+                <a:ea typeface="D2Coding" panose="020B0609020101020101" pitchFamily="49" charset="-127"/>
+              </a:rPr>
+              <a:t>9,999</a:t>
+            </a:r>
+            <a:endParaRPr lang="ko-KR" altLang="en-US" sz="1400" dirty="0">
+              <a:solidFill>
+                <a:schemeClr val="bg1"/>
+              </a:solidFill>
+              <a:effectLst/>
+              <a:latin typeface="D2Coding" panose="020B0609020101020101" pitchFamily="49" charset="-127"/>
+              <a:ea typeface="D2Coding" panose="020B0609020101020101" pitchFamily="49" charset="-127"/>
+            </a:endParaRPr>
+          </a:p>
+          <a:p>
+            <a:pPr>
+              <a:buNone/>
+            </a:pPr>
+            <a:r>
+              <a:rPr lang="en-US" altLang="ko-KR" sz="1400" dirty="0">
+                <a:solidFill>
+                  <a:schemeClr val="bg1"/>
+                </a:solidFill>
+                <a:effectLst/>
+                <a:latin typeface="D2Coding" panose="020B0609020101020101" pitchFamily="49" charset="-127"/>
+                <a:ea typeface="D2Coding" panose="020B0609020101020101" pitchFamily="49" charset="-127"/>
+              </a:rPr>
+              <a:t>}</a:t>
+            </a:r>
+            <a:endParaRPr lang="ko-KR" altLang="en-US" sz="1400" dirty="0">
+              <a:solidFill>
+                <a:schemeClr val="bg1"/>
+              </a:solidFill>
+              <a:effectLst/>
+              <a:latin typeface="D2Coding" panose="020B0609020101020101" pitchFamily="49" charset="-127"/>
+              <a:ea typeface="D2Coding" panose="020B0609020101020101" pitchFamily="49" charset="-127"/>
+            </a:endParaRPr>
+          </a:p>
+        </p:txBody>
+      </p:sp>
+      <p:sp>
+        <p:nvSpPr>
+          <p:cNvPr id="10" name="TextBox 9">
             <a:extLst>
-              <a:ext uri="{28A0092B-C50C-407E-A947-70E740481C1C}">
-                <a14:useLocalDpi xmlns:a14="http://schemas.microsoft.com/office/drawing/2010/main" val="0"/>
+              <a:ext uri="{FF2B5EF4-FFF2-40B4-BE49-F238E27FC236}">
+                <a16:creationId xmlns:a16="http://schemas.microsoft.com/office/drawing/2014/main" id="{43C408BD-9B1F-D701-CDFC-94144A572846}"/>
               </a:ext>
             </a:extLst>
-          </a:blip>
-          <a:srcRect/>
-          <a:stretch>
-            <a:fillRect/>
-          </a:stretch>
-        </p:blipFill>
-        <p:spPr bwMode="auto">
+          </p:cNvPr>
+          <p:cNvSpPr txBox="1"/>
+          <p:nvPr/>
+        </p:nvSpPr>
+        <p:spPr>
           <a:xfrm>
-            <a:off x="1598611" y="2683690"/>
-            <a:ext cx="8763000" cy="3692327"/>
+            <a:off x="605667" y="4318389"/>
+            <a:ext cx="4685465" cy="307777"/>
+          </a:xfrm>
+          <a:prstGeom prst="rect">
+            <a:avLst/>
+          </a:prstGeom>
+          <a:solidFill>
+            <a:schemeClr val="accent1">
+              <a:lumMod val="20000"/>
+              <a:lumOff val="80000"/>
+            </a:schemeClr>
+          </a:solidFill>
+          <a:ln>
+            <a:solidFill>
+              <a:schemeClr val="tx1"/>
+            </a:solidFill>
+          </a:ln>
+        </p:spPr>
+        <p:txBody>
+          <a:bodyPr wrap="square">
+            <a:spAutoFit/>
+          </a:bodyPr>
+          <a:lstStyle/>
+          <a:p>
+            <a:r>
+              <a:rPr lang="en-US" altLang="ko-KR" sz="1400" dirty="0">
+                <a:latin typeface="D2Coding" panose="020B0609020101020101" pitchFamily="49" charset="-127"/>
+                <a:ea typeface="D2Coding" panose="020B0609020101020101" pitchFamily="49" charset="-127"/>
+              </a:rPr>
+              <a:t>title_vector_1 = [1, 1, 1, 1, 1, 0, 0…..  0, 0, 0]</a:t>
+            </a:r>
+            <a:endParaRPr lang="ko-KR" altLang="en-US" sz="1400" dirty="0">
+              <a:latin typeface="D2Coding" panose="020B0609020101020101" pitchFamily="49" charset="-127"/>
+              <a:ea typeface="D2Coding" panose="020B0609020101020101" pitchFamily="49" charset="-127"/>
+            </a:endParaRPr>
+          </a:p>
+        </p:txBody>
+      </p:sp>
+      <p:sp>
+        <p:nvSpPr>
+          <p:cNvPr id="12" name="TextBox 11">
+            <a:extLst>
+              <a:ext uri="{FF2B5EF4-FFF2-40B4-BE49-F238E27FC236}">
+                <a16:creationId xmlns:a16="http://schemas.microsoft.com/office/drawing/2014/main" id="{283BD5B4-0545-6E76-4B80-3D761CAB1E59}"/>
+              </a:ext>
+            </a:extLst>
+          </p:cNvPr>
+          <p:cNvSpPr txBox="1"/>
+          <p:nvPr/>
+        </p:nvSpPr>
+        <p:spPr>
+          <a:xfrm>
+            <a:off x="603700" y="5002046"/>
+            <a:ext cx="4685465" cy="307777"/>
+          </a:xfrm>
+          <a:prstGeom prst="rect">
+            <a:avLst/>
+          </a:prstGeom>
+          <a:solidFill>
+            <a:schemeClr val="accent1">
+              <a:lumMod val="20000"/>
+              <a:lumOff val="80000"/>
+            </a:schemeClr>
+          </a:solidFill>
+          <a:ln>
+            <a:solidFill>
+              <a:schemeClr val="tx1"/>
+            </a:solidFill>
+          </a:ln>
+        </p:spPr>
+        <p:txBody>
+          <a:bodyPr wrap="square">
+            <a:spAutoFit/>
+          </a:bodyPr>
+          <a:lstStyle/>
+          <a:p>
+            <a:r>
+              <a:rPr lang="en-US" altLang="ko-KR" sz="1400" dirty="0">
+                <a:latin typeface="D2Coding" panose="020B0609020101020101" pitchFamily="49" charset="-127"/>
+                <a:ea typeface="D2Coding" panose="020B0609020101020101" pitchFamily="49" charset="-127"/>
+              </a:rPr>
+              <a:t>text_body_vector_1 = [1, 1, 1, 1, 0, 0…..  0, 0, 0]</a:t>
+            </a:r>
+            <a:endParaRPr lang="ko-KR" altLang="en-US" sz="1400" dirty="0">
+              <a:latin typeface="D2Coding" panose="020B0609020101020101" pitchFamily="49" charset="-127"/>
+              <a:ea typeface="D2Coding" panose="020B0609020101020101" pitchFamily="49" charset="-127"/>
+            </a:endParaRPr>
+          </a:p>
+        </p:txBody>
+      </p:sp>
+      <p:sp>
+        <p:nvSpPr>
+          <p:cNvPr id="14" name="TextBox 13">
+            <a:extLst>
+              <a:ext uri="{FF2B5EF4-FFF2-40B4-BE49-F238E27FC236}">
+                <a16:creationId xmlns:a16="http://schemas.microsoft.com/office/drawing/2014/main" id="{951DE5D3-E3A7-07F1-D320-73E9C9CF7AAD}"/>
+              </a:ext>
+            </a:extLst>
+          </p:cNvPr>
+          <p:cNvSpPr txBox="1"/>
+          <p:nvPr/>
+        </p:nvSpPr>
+        <p:spPr>
+          <a:xfrm>
+            <a:off x="605667" y="1228530"/>
+            <a:ext cx="10980661" cy="793166"/>
           </a:xfrm>
           <a:prstGeom prst="rect">
             <a:avLst/>
           </a:prstGeom>
           <a:noFill/>
-          <a:extLst>
-            <a:ext uri="{909E8E84-426E-40DD-AFC4-6F175D3DCCD1}">
-              <a14:hiddenFill xmlns:a14="http://schemas.microsoft.com/office/drawing/2010/main">
-                <a:solidFill>
-                  <a:srgbClr val="FFFFFF"/>
-                </a:solidFill>
-              </a14:hiddenFill>
-            </a:ext>
-          </a:extLst>
         </p:spPr>
-      </p:pic>
+        <p:txBody>
+          <a:bodyPr wrap="square">
+            <a:spAutoFit/>
+          </a:bodyPr>
+          <a:lstStyle/>
+          <a:p>
+            <a:pPr>
+              <a:lnSpc>
+                <a:spcPct val="150000"/>
+              </a:lnSpc>
+            </a:pPr>
+            <a:r>
+              <a:rPr lang="en-US" altLang="ko-KR" sz="1600" dirty="0">
+                <a:latin typeface="D2Coding" panose="020B0609020101020101" pitchFamily="49" charset="-127"/>
+                <a:ea typeface="D2Coding" panose="020B0609020101020101" pitchFamily="49" charset="-127"/>
+              </a:rPr>
+              <a:t>10000</a:t>
+            </a:r>
+            <a:r>
+              <a:rPr lang="ko-KR" altLang="en-US" sz="1600" dirty="0">
+                <a:latin typeface="D2Coding" panose="020B0609020101020101" pitchFamily="49" charset="-127"/>
+                <a:ea typeface="D2Coding" panose="020B0609020101020101" pitchFamily="49" charset="-127"/>
+              </a:rPr>
+              <a:t>개 단어 중</a:t>
+            </a:r>
+            <a:r>
+              <a:rPr lang="en-US" altLang="ko-KR" sz="1600" dirty="0">
+                <a:latin typeface="D2Coding" panose="020B0609020101020101" pitchFamily="49" charset="-127"/>
+                <a:ea typeface="D2Coding" panose="020B0609020101020101" pitchFamily="49" charset="-127"/>
+              </a:rPr>
+              <a:t>, </a:t>
+            </a:r>
+            <a:r>
+              <a:rPr lang="ko-KR" altLang="en-US" sz="1600" dirty="0">
+                <a:latin typeface="D2Coding" panose="020B0609020101020101" pitchFamily="49" charset="-127"/>
+                <a:ea typeface="D2Coding" panose="020B0609020101020101" pitchFamily="49" charset="-127"/>
+              </a:rPr>
+              <a:t>이 티켓 제목에 실제로 등장한 단어가 어떤 것인가</a:t>
+            </a:r>
+            <a:r>
+              <a:rPr lang="en-US" altLang="ko-KR" sz="1600" dirty="0">
+                <a:latin typeface="D2Coding" panose="020B0609020101020101" pitchFamily="49" charset="-127"/>
+                <a:ea typeface="D2Coding" panose="020B0609020101020101" pitchFamily="49" charset="-127"/>
+              </a:rPr>
+              <a:t>"</a:t>
+            </a:r>
+            <a:r>
+              <a:rPr lang="ko-KR" altLang="en-US" sz="1600" dirty="0">
+                <a:latin typeface="D2Coding" panose="020B0609020101020101" pitchFamily="49" charset="-127"/>
+                <a:ea typeface="D2Coding" panose="020B0609020101020101" pitchFamily="49" charset="-127"/>
+              </a:rPr>
+              <a:t> 를 표시하는 희소</a:t>
+            </a:r>
+            <a:r>
+              <a:rPr lang="en-US" altLang="ko-KR" sz="1600" dirty="0">
+                <a:latin typeface="D2Coding" panose="020B0609020101020101" pitchFamily="49" charset="-127"/>
+                <a:ea typeface="D2Coding" panose="020B0609020101020101" pitchFamily="49" charset="-127"/>
+              </a:rPr>
+              <a:t>(sparse) 0/1 </a:t>
+            </a:r>
+            <a:r>
+              <a:rPr lang="ko-KR" altLang="en-US" sz="1600" dirty="0">
+                <a:latin typeface="D2Coding" panose="020B0609020101020101" pitchFamily="49" charset="-127"/>
+                <a:ea typeface="D2Coding" panose="020B0609020101020101" pitchFamily="49" charset="-127"/>
+              </a:rPr>
+              <a:t>벡터로</a:t>
+            </a:r>
+            <a:r>
+              <a:rPr lang="en-US" altLang="ko-KR" sz="1600" dirty="0">
+                <a:latin typeface="D2Coding" panose="020B0609020101020101" pitchFamily="49" charset="-127"/>
+                <a:ea typeface="D2Coding" panose="020B0609020101020101" pitchFamily="49" charset="-127"/>
+              </a:rPr>
+              <a:t>  </a:t>
+            </a:r>
+            <a:r>
+              <a:rPr lang="ko-KR" altLang="en-US" sz="1600" dirty="0">
+                <a:latin typeface="D2Coding" panose="020B0609020101020101" pitchFamily="49" charset="-127"/>
+                <a:ea typeface="D2Coding" panose="020B0609020101020101" pitchFamily="49" charset="-127"/>
+              </a:rPr>
+              <a:t>단어 순서나 문맥 정보는 담기지 않고</a:t>
+            </a:r>
+            <a:r>
+              <a:rPr lang="en-US" altLang="ko-KR" sz="1600" dirty="0">
+                <a:latin typeface="D2Coding" panose="020B0609020101020101" pitchFamily="49" charset="-127"/>
+                <a:ea typeface="D2Coding" panose="020B0609020101020101" pitchFamily="49" charset="-127"/>
+              </a:rPr>
+              <a:t>, "</a:t>
+            </a:r>
+            <a:r>
+              <a:rPr lang="ko-KR" altLang="en-US" sz="1600" dirty="0">
+                <a:latin typeface="D2Coding" panose="020B0609020101020101" pitchFamily="49" charset="-127"/>
+                <a:ea typeface="D2Coding" panose="020B0609020101020101" pitchFamily="49" charset="-127"/>
+              </a:rPr>
+              <a:t>등장했다</a:t>
+            </a:r>
+            <a:r>
+              <a:rPr lang="en-US" altLang="ko-KR" sz="1600" dirty="0">
+                <a:latin typeface="D2Coding" panose="020B0609020101020101" pitchFamily="49" charset="-127"/>
+                <a:ea typeface="D2Coding" panose="020B0609020101020101" pitchFamily="49" charset="-127"/>
+              </a:rPr>
+              <a:t>/</a:t>
+            </a:r>
+            <a:r>
+              <a:rPr lang="ko-KR" altLang="en-US" sz="1600" dirty="0">
+                <a:latin typeface="D2Coding" panose="020B0609020101020101" pitchFamily="49" charset="-127"/>
+                <a:ea typeface="D2Coding" panose="020B0609020101020101" pitchFamily="49" charset="-127"/>
+              </a:rPr>
+              <a:t>안 했다</a:t>
+            </a:r>
+            <a:r>
+              <a:rPr lang="en-US" altLang="ko-KR" sz="1600" dirty="0">
+                <a:latin typeface="D2Coding" panose="020B0609020101020101" pitchFamily="49" charset="-127"/>
+                <a:ea typeface="D2Coding" panose="020B0609020101020101" pitchFamily="49" charset="-127"/>
+              </a:rPr>
+              <a:t>"</a:t>
+            </a:r>
+            <a:r>
+              <a:rPr lang="ko-KR" altLang="en-US" sz="1600" dirty="0">
+                <a:latin typeface="D2Coding" panose="020B0609020101020101" pitchFamily="49" charset="-127"/>
+                <a:ea typeface="D2Coding" panose="020B0609020101020101" pitchFamily="49" charset="-127"/>
+              </a:rPr>
+              <a:t>만 담는 방식</a:t>
+            </a:r>
+            <a:r>
+              <a:rPr lang="en-US" altLang="ko-KR" sz="1600" dirty="0">
+                <a:latin typeface="D2Coding" panose="020B0609020101020101" pitchFamily="49" charset="-127"/>
+                <a:ea typeface="D2Coding" panose="020B0609020101020101" pitchFamily="49" charset="-127"/>
+              </a:rPr>
+              <a:t>(</a:t>
+            </a:r>
+            <a:r>
+              <a:rPr lang="en-US" altLang="ko-KR" sz="1600" dirty="0" err="1">
+                <a:latin typeface="D2Coding" panose="020B0609020101020101" pitchFamily="49" charset="-127"/>
+                <a:ea typeface="D2Coding" panose="020B0609020101020101" pitchFamily="49" charset="-127"/>
+              </a:rPr>
+              <a:t>Multihot</a:t>
+            </a:r>
+            <a:r>
+              <a:rPr lang="en-US" altLang="ko-KR" sz="1600" dirty="0">
+                <a:latin typeface="D2Coding" panose="020B0609020101020101" pitchFamily="49" charset="-127"/>
+                <a:ea typeface="D2Coding" panose="020B0609020101020101" pitchFamily="49" charset="-127"/>
+              </a:rPr>
+              <a:t>/Bag-of-Words)</a:t>
+            </a:r>
+            <a:endParaRPr lang="ko-KR" altLang="en-US" sz="1600" dirty="0">
+              <a:latin typeface="D2Coding" panose="020B0609020101020101" pitchFamily="49" charset="-127"/>
+              <a:ea typeface="D2Coding" panose="020B0609020101020101" pitchFamily="49" charset="-127"/>
+            </a:endParaRPr>
+          </a:p>
+        </p:txBody>
+      </p:sp>
+      <p:sp>
+        <p:nvSpPr>
+          <p:cNvPr id="16" name="TextBox 15">
+            <a:extLst>
+              <a:ext uri="{FF2B5EF4-FFF2-40B4-BE49-F238E27FC236}">
+                <a16:creationId xmlns:a16="http://schemas.microsoft.com/office/drawing/2014/main" id="{822EBCD8-F47A-DA1D-69E0-26580C9F8DA0}"/>
+              </a:ext>
+            </a:extLst>
+          </p:cNvPr>
+          <p:cNvSpPr txBox="1"/>
+          <p:nvPr/>
+        </p:nvSpPr>
+        <p:spPr>
+          <a:xfrm>
+            <a:off x="475645" y="4729471"/>
+            <a:ext cx="1527933" cy="307777"/>
+          </a:xfrm>
+          <a:prstGeom prst="rect">
+            <a:avLst/>
+          </a:prstGeom>
+          <a:noFill/>
+        </p:spPr>
+        <p:txBody>
+          <a:bodyPr wrap="square">
+            <a:spAutoFit/>
+          </a:bodyPr>
+          <a:lstStyle/>
+          <a:p>
+            <a:r>
+              <a:rPr lang="en-US" altLang="ko-KR" sz="1400" dirty="0">
+                <a:latin typeface="D2Coding" panose="020B0609020101020101" pitchFamily="49" charset="-127"/>
+                <a:ea typeface="D2Coding" panose="020B0609020101020101" pitchFamily="49" charset="-127"/>
+              </a:rPr>
+              <a:t>(10000,)</a:t>
+            </a:r>
+            <a:endParaRPr lang="ko-KR" altLang="en-US" sz="1400" dirty="0"/>
+          </a:p>
+        </p:txBody>
+      </p:sp>
+      <p:sp>
+        <p:nvSpPr>
+          <p:cNvPr id="17" name="TextBox 16">
+            <a:extLst>
+              <a:ext uri="{FF2B5EF4-FFF2-40B4-BE49-F238E27FC236}">
+                <a16:creationId xmlns:a16="http://schemas.microsoft.com/office/drawing/2014/main" id="{A92238E0-4157-E512-0062-195B02ABC860}"/>
+              </a:ext>
+            </a:extLst>
+          </p:cNvPr>
+          <p:cNvSpPr txBox="1"/>
+          <p:nvPr/>
+        </p:nvSpPr>
+        <p:spPr>
+          <a:xfrm>
+            <a:off x="475645" y="4042917"/>
+            <a:ext cx="1527933" cy="307777"/>
+          </a:xfrm>
+          <a:prstGeom prst="rect">
+            <a:avLst/>
+          </a:prstGeom>
+          <a:noFill/>
+        </p:spPr>
+        <p:txBody>
+          <a:bodyPr wrap="square">
+            <a:spAutoFit/>
+          </a:bodyPr>
+          <a:lstStyle/>
+          <a:p>
+            <a:r>
+              <a:rPr lang="en-US" altLang="ko-KR" sz="1400" dirty="0">
+                <a:latin typeface="D2Coding" panose="020B0609020101020101" pitchFamily="49" charset="-127"/>
+                <a:ea typeface="D2Coding" panose="020B0609020101020101" pitchFamily="49" charset="-127"/>
+              </a:rPr>
+              <a:t>(10000,)</a:t>
+            </a:r>
+            <a:endParaRPr lang="ko-KR" altLang="en-US" sz="1400" dirty="0"/>
+          </a:p>
+        </p:txBody>
+      </p:sp>
+      <p:sp>
+        <p:nvSpPr>
+          <p:cNvPr id="18" name="TextBox 17">
+            <a:extLst>
+              <a:ext uri="{FF2B5EF4-FFF2-40B4-BE49-F238E27FC236}">
+                <a16:creationId xmlns:a16="http://schemas.microsoft.com/office/drawing/2014/main" id="{64278FA9-A00A-A8CC-63AF-B4607BAC6FFC}"/>
+              </a:ext>
+            </a:extLst>
+          </p:cNvPr>
+          <p:cNvSpPr txBox="1"/>
+          <p:nvPr/>
+        </p:nvSpPr>
+        <p:spPr>
+          <a:xfrm>
+            <a:off x="475645" y="5475581"/>
+            <a:ext cx="1527933" cy="307777"/>
+          </a:xfrm>
+          <a:prstGeom prst="rect">
+            <a:avLst/>
+          </a:prstGeom>
+          <a:noFill/>
+        </p:spPr>
+        <p:txBody>
+          <a:bodyPr wrap="square">
+            <a:spAutoFit/>
+          </a:bodyPr>
+          <a:lstStyle/>
+          <a:p>
+            <a:r>
+              <a:rPr lang="en-US" altLang="ko-KR" sz="1400" dirty="0">
+                <a:latin typeface="D2Coding" panose="020B0609020101020101" pitchFamily="49" charset="-127"/>
+                <a:ea typeface="D2Coding" panose="020B0609020101020101" pitchFamily="49" charset="-127"/>
+              </a:rPr>
+              <a:t>(100,)</a:t>
+            </a:r>
+            <a:endParaRPr lang="ko-KR" altLang="en-US" sz="1400" dirty="0"/>
+          </a:p>
+        </p:txBody>
+      </p:sp>
+      <p:sp>
+        <p:nvSpPr>
+          <p:cNvPr id="19" name="슬라이드 번호 개체 틀 3">
+            <a:extLst>
+              <a:ext uri="{FF2B5EF4-FFF2-40B4-BE49-F238E27FC236}">
+                <a16:creationId xmlns:a16="http://schemas.microsoft.com/office/drawing/2014/main" id="{599A1D21-4B9D-7965-CFEE-C16672EB3D6A}"/>
+              </a:ext>
+            </a:extLst>
+          </p:cNvPr>
+          <p:cNvSpPr txBox="1">
+            <a:spLocks/>
+          </p:cNvSpPr>
+          <p:nvPr/>
+        </p:nvSpPr>
+        <p:spPr>
+          <a:xfrm>
+            <a:off x="11142661" y="299420"/>
+            <a:ext cx="753545" cy="365125"/>
+          </a:xfrm>
+          <a:prstGeom prst="rect">
+            <a:avLst/>
+          </a:prstGeom>
+        </p:spPr>
+        <p:txBody>
+          <a:bodyPr vert="horz" lIns="91440" tIns="45720" rIns="91440" bIns="45720" rtlCol="0" anchor="ctr"/>
+          <a:lstStyle>
+            <a:defPPr rtl="0">
+              <a:defRPr lang="ko-KR"/>
+            </a:defPPr>
+            <a:lvl1pPr marL="0" algn="r" defTabSz="914400" rtl="0" eaLnBrk="1" latinLnBrk="0" hangingPunct="1">
+              <a:defRPr sz="1200" kern="1200" baseline="0">
+                <a:solidFill>
+                  <a:schemeClr val="tx1">
+                    <a:lumMod val="65000"/>
+                    <a:lumOff val="35000"/>
+                  </a:schemeClr>
+                </a:solidFill>
+                <a:latin typeface="맑은 고딕" panose="020B0503020000020004" pitchFamily="50" charset="-127"/>
+                <a:ea typeface="맑은 고딕" panose="020B0503020000020004" pitchFamily="50" charset="-127"/>
+                <a:cs typeface="+mn-cs"/>
+              </a:defRPr>
+            </a:lvl1pPr>
+            <a:lvl2pPr marL="457200" algn="l" defTabSz="914400" rtl="0" eaLnBrk="1" latinLnBrk="0" hangingPunct="1">
+              <a:defRPr sz="1800" kern="1200">
+                <a:solidFill>
+                  <a:schemeClr val="tx1"/>
+                </a:solidFill>
+                <a:latin typeface="+mn-lt"/>
+                <a:ea typeface="+mn-ea"/>
+                <a:cs typeface="+mn-cs"/>
+              </a:defRPr>
+            </a:lvl2pPr>
+            <a:lvl3pPr marL="914400" algn="l" defTabSz="914400" rtl="0" eaLnBrk="1" latinLnBrk="0" hangingPunct="1">
+              <a:defRPr sz="1800" kern="1200">
+                <a:solidFill>
+                  <a:schemeClr val="tx1"/>
+                </a:solidFill>
+                <a:latin typeface="+mn-lt"/>
+                <a:ea typeface="+mn-ea"/>
+                <a:cs typeface="+mn-cs"/>
+              </a:defRPr>
+            </a:lvl3pPr>
+            <a:lvl4pPr marL="1371600" algn="l" defTabSz="914400" rtl="0" eaLnBrk="1" latinLnBrk="0" hangingPunct="1">
+              <a:defRPr sz="1800" kern="1200">
+                <a:solidFill>
+                  <a:schemeClr val="tx1"/>
+                </a:solidFill>
+                <a:latin typeface="+mn-lt"/>
+                <a:ea typeface="+mn-ea"/>
+                <a:cs typeface="+mn-cs"/>
+              </a:defRPr>
+            </a:lvl4pPr>
+            <a:lvl5pPr marL="1828800" algn="l" defTabSz="914400" rtl="0" eaLnBrk="1" latinLnBrk="0" hangingPunct="1">
+              <a:defRPr sz="1800" kern="1200">
+                <a:solidFill>
+                  <a:schemeClr val="tx1"/>
+                </a:solidFill>
+                <a:latin typeface="+mn-lt"/>
+                <a:ea typeface="+mn-ea"/>
+                <a:cs typeface="+mn-cs"/>
+              </a:defRPr>
+            </a:lvl5pPr>
+            <a:lvl6pPr marL="2286000" algn="l" defTabSz="914400" rtl="0" eaLnBrk="1" latinLnBrk="0" hangingPunct="1">
+              <a:defRPr sz="1800" kern="1200">
+                <a:solidFill>
+                  <a:schemeClr val="tx1"/>
+                </a:solidFill>
+                <a:latin typeface="+mn-lt"/>
+                <a:ea typeface="+mn-ea"/>
+                <a:cs typeface="+mn-cs"/>
+              </a:defRPr>
+            </a:lvl6pPr>
+            <a:lvl7pPr marL="2743200" algn="l" defTabSz="914400" rtl="0" eaLnBrk="1" latinLnBrk="0" hangingPunct="1">
+              <a:defRPr sz="1800" kern="1200">
+                <a:solidFill>
+                  <a:schemeClr val="tx1"/>
+                </a:solidFill>
+                <a:latin typeface="+mn-lt"/>
+                <a:ea typeface="+mn-ea"/>
+                <a:cs typeface="+mn-cs"/>
+              </a:defRPr>
+            </a:lvl7pPr>
+            <a:lvl8pPr marL="3200400" algn="l" defTabSz="914400" rtl="0" eaLnBrk="1" latinLnBrk="0" hangingPunct="1">
+              <a:defRPr sz="1800" kern="1200">
+                <a:solidFill>
+                  <a:schemeClr val="tx1"/>
+                </a:solidFill>
+                <a:latin typeface="+mn-lt"/>
+                <a:ea typeface="+mn-ea"/>
+                <a:cs typeface="+mn-cs"/>
+              </a:defRPr>
+            </a:lvl8pPr>
+            <a:lvl9pPr marL="3657600" algn="l" defTabSz="914400" rtl="0" eaLnBrk="1" latinLnBrk="0" hangingPunct="1">
+              <a:defRPr sz="1800" kern="1200">
+                <a:solidFill>
+                  <a:schemeClr val="tx1"/>
+                </a:solidFill>
+                <a:latin typeface="+mn-lt"/>
+                <a:ea typeface="+mn-ea"/>
+                <a:cs typeface="+mn-cs"/>
+              </a:defRPr>
+            </a:lvl9pPr>
+          </a:lstStyle>
+          <a:p>
+            <a:fld id="{D57F1E4F-1CFF-5643-939E-217C01CDF565}" type="slidenum">
+              <a:rPr lang="en-US" sz="1400" b="1" smtClean="0">
+                <a:latin typeface="D2Coding" panose="020B0609020101020101" pitchFamily="49" charset="-127"/>
+                <a:ea typeface="D2Coding" panose="020B0609020101020101" pitchFamily="49" charset="-127"/>
+              </a:rPr>
+              <a:pPr/>
+              <a:t>9</a:t>
+            </a:fld>
+            <a:endParaRPr lang="en-US" sz="1400" b="1" dirty="0">
+              <a:latin typeface="D2Coding" panose="020B0609020101020101" pitchFamily="49" charset="-127"/>
+              <a:ea typeface="D2Coding" panose="020B0609020101020101" pitchFamily="49" charset="-127"/>
+            </a:endParaRPr>
+          </a:p>
+        </p:txBody>
+      </p:sp>
     </p:spTree>
     <p:extLst>
       <p:ext uri="{BB962C8B-B14F-4D97-AF65-F5344CB8AC3E}">
-        <p14:creationId xmlns:p14="http://schemas.microsoft.com/office/powerpoint/2010/main" val="2264211179"/>
+        <p14:creationId xmlns:p14="http://schemas.microsoft.com/office/powerpoint/2010/main" val="36204612"/>
       </p:ext>
     </p:extLst>
   </p:cSld>
